--- a/team_project/kickoff_2026-05-11.pptx
+++ b/team_project/kickoff_2026-05-11.pptx
@@ -3909,13 +3909,13 @@
           </a:xfrm>
           <a:prstGeom prst="roundRect">
             <a:avLst>
-              <a:gd name="adj" fmla="val 4000"/>
+              <a:gd name="adj" fmla="val 6000"/>
             </a:avLst>
           </a:prstGeom>
           <a:solidFill>
             <a:srgbClr val="FAFBFC"/>
           </a:solidFill>
-          <a:ln w="12700">
+          <a:ln w="9525">
             <a:solidFill>
               <a:srgbClr val="E5E7EB"/>
             </a:solidFill>
@@ -4089,13 +4089,13 @@
           </a:xfrm>
           <a:prstGeom prst="roundRect">
             <a:avLst>
-              <a:gd name="adj" fmla="val 4000"/>
+              <a:gd name="adj" fmla="val 6000"/>
             </a:avLst>
           </a:prstGeom>
           <a:solidFill>
             <a:srgbClr val="FAFBFC"/>
           </a:solidFill>
-          <a:ln w="12700">
+          <a:ln w="9525">
             <a:solidFill>
               <a:srgbClr val="E5E7EB"/>
             </a:solidFill>
@@ -4269,13 +4269,13 @@
           </a:xfrm>
           <a:prstGeom prst="roundRect">
             <a:avLst>
-              <a:gd name="adj" fmla="val 4000"/>
+              <a:gd name="adj" fmla="val 6000"/>
             </a:avLst>
           </a:prstGeom>
           <a:solidFill>
             <a:srgbClr val="FAFBFC"/>
           </a:solidFill>
-          <a:ln w="12700">
+          <a:ln w="9525">
             <a:solidFill>
               <a:srgbClr val="E5E7EB"/>
             </a:solidFill>
@@ -4701,13 +4701,13 @@
           </a:xfrm>
           <a:prstGeom prst="roundRect">
             <a:avLst>
-              <a:gd name="adj" fmla="val 4000"/>
+              <a:gd name="adj" fmla="val 6000"/>
             </a:avLst>
           </a:prstGeom>
           <a:solidFill>
             <a:srgbClr val="FAFBFC"/>
           </a:solidFill>
-          <a:ln w="12700">
+          <a:ln w="9525">
             <a:solidFill>
               <a:srgbClr val="E5E7EB"/>
             </a:solidFill>
@@ -5022,13 +5022,13 @@
           </a:xfrm>
           <a:prstGeom prst="roundRect">
             <a:avLst>
-              <a:gd name="adj" fmla="val 4000"/>
+              <a:gd name="adj" fmla="val 6000"/>
             </a:avLst>
           </a:prstGeom>
           <a:solidFill>
             <a:srgbClr val="EEEAFE"/>
           </a:solidFill>
-          <a:ln w="12700">
+          <a:ln w="9525">
             <a:solidFill>
               <a:srgbClr val="4F46E5"/>
             </a:solidFill>
@@ -5090,7 +5090,7 @@
                 </a:solidFill>
                 <a:latin typeface="맑은 고딕"/>
               </a:rPr>
-              <a:t>강의계획서 적용</a:t>
+              <a:t>강의계획서가 만들어내는 효과</a:t>
             </a:r>
           </a:p>
         </p:txBody>
@@ -5104,32 +5104,32 @@
         <p:spPr>
           <a:xfrm>
             <a:off x="6492240" y="3017520"/>
-            <a:ext cx="4846320" cy="548640"/>
-          </a:xfrm>
-          <a:prstGeom prst="rect">
-            <a:avLst/>
-          </a:prstGeom>
-          <a:noFill/>
-        </p:spPr>
-        <p:txBody>
-          <a:bodyPr wrap="square" lIns="0" rIns="0" tIns="0" bIns="0">
-            <a:spAutoFit/>
-          </a:bodyPr>
-          <a:lstStyle/>
-          <a:p>
-            <a:pPr algn="l">
-              <a:lnSpc>
-                <a:spcPct val="120000"/>
-              </a:lnSpc>
-            </a:pPr>
-            <a:r>
-              <a:rPr sz="1500" b="1">
+            <a:ext cx="4846320" cy="502920"/>
+          </a:xfrm>
+          <a:prstGeom prst="rect">
+            <a:avLst/>
+          </a:prstGeom>
+          <a:noFill/>
+        </p:spPr>
+        <p:txBody>
+          <a:bodyPr wrap="square" lIns="0" rIns="0" tIns="0" bIns="0">
+            <a:spAutoFit/>
+          </a:bodyPr>
+          <a:lstStyle/>
+          <a:p>
+            <a:pPr algn="l">
+              <a:lnSpc>
+                <a:spcPct val="125000"/>
+              </a:lnSpc>
+            </a:pPr>
+            <a:r>
+              <a:rPr sz="1400" b="1">
                 <a:solidFill>
                   <a:srgbClr val="0F141F"/>
                 </a:solidFill>
                 <a:latin typeface="맑은 고딕"/>
               </a:rPr>
-              <a:t>"팀장이 후보 중 2명을 직접 지명"</a:t>
+              <a:t>"팀장이 팀원 중 2명을 직접 지명"</a:t>
             </a:r>
           </a:p>
         </p:txBody>
@@ -5143,22 +5143,22 @@
         <p:spPr>
           <a:xfrm>
             <a:off x="6492240" y="3657600"/>
-            <a:ext cx="4846320" cy="457200"/>
-          </a:xfrm>
-          <a:prstGeom prst="rect">
-            <a:avLst/>
-          </a:prstGeom>
-          <a:noFill/>
-        </p:spPr>
-        <p:txBody>
-          <a:bodyPr wrap="square" lIns="0" rIns="0" tIns="0" bIns="0">
-            <a:spAutoFit/>
-          </a:bodyPr>
-          <a:lstStyle/>
-          <a:p>
-            <a:pPr algn="l">
-              <a:lnSpc>
-                <a:spcPct val="125000"/>
+            <a:ext cx="4846320" cy="1188720"/>
+          </a:xfrm>
+          <a:prstGeom prst="rect">
+            <a:avLst/>
+          </a:prstGeom>
+          <a:noFill/>
+        </p:spPr>
+        <p:txBody>
+          <a:bodyPr wrap="square" lIns="0" rIns="0" tIns="0" bIns="0">
+            <a:spAutoFit/>
+          </a:bodyPr>
+          <a:lstStyle/>
+          <a:p>
+            <a:pPr algn="l">
+              <a:lnSpc>
+                <a:spcPct val="140000"/>
               </a:lnSpc>
             </a:pPr>
             <a:r>
@@ -5168,7 +5168,39 @@
                 </a:solidFill>
                 <a:latin typeface="맑은 고딕"/>
               </a:rPr>
-              <a:t>= 후보 N개 정보 동시 처리 요구</a:t>
+              <a:t>→ 후보가 많으면 머리에 다 안 들어옴.</a:t>
+            </a:r>
+          </a:p>
+          <a:p>
+            <a:pPr algn="l">
+              <a:lnSpc>
+                <a:spcPct val="140000"/>
+              </a:lnSpc>
+            </a:pPr>
+            <a:r>
+              <a:rPr sz="1100" b="0">
+                <a:solidFill>
+                  <a:srgbClr val="424B5C"/>
+                </a:solidFill>
+                <a:latin typeface="맑은 고딕"/>
+              </a:rPr>
+              <a:t>→ 떠오르는 친한 사람으로 결정 (satisficing).</a:t>
+            </a:r>
+          </a:p>
+          <a:p>
+            <a:pPr algn="l">
+              <a:lnSpc>
+                <a:spcPct val="140000"/>
+              </a:lnSpc>
+            </a:pPr>
+            <a:r>
+              <a:rPr sz="1100" b="0">
+                <a:solidFill>
+                  <a:srgbClr val="424B5C"/>
+                </a:solidFill>
+                <a:latin typeface="맑은 고딕"/>
+              </a:rPr>
+              <a:t>→ 결과: 친분 기반 팀 구성, 역량 균형 깨짐.</a:t>
             </a:r>
           </a:p>
         </p:txBody>
@@ -5181,7 +5213,7 @@
         </p:nvCxnSpPr>
         <p:spPr>
           <a:xfrm>
-            <a:off x="6492240" y="4297680"/>
+            <a:off x="6492240" y="5074920"/>
             <a:ext cx="4846320" cy="0"/>
           </a:xfrm>
           <a:prstGeom prst="line">
@@ -5216,7 +5248,7 @@
         </p:nvSpPr>
         <p:spPr>
           <a:xfrm>
-            <a:off x="6492240" y="4434840"/>
+            <a:off x="6492240" y="5166360"/>
             <a:ext cx="4572000" cy="320040"/>
           </a:xfrm>
           <a:prstGeom prst="rect">
@@ -5242,7 +5274,7 @@
                 </a:solidFill>
                 <a:latin typeface="맑은 고딕"/>
               </a:rPr>
-              <a:t>정량 예측 (시뮬)</a:t>
+              <a:t>시뮬레이션 결과 — 팀 구성 만족도</a:t>
             </a:r>
           </a:p>
         </p:txBody>
@@ -5255,7 +5287,7 @@
         </p:nvSpPr>
         <p:spPr>
           <a:xfrm>
-            <a:off x="6492240" y="4800600"/>
+            <a:off x="6492240" y="5486400"/>
             <a:ext cx="4846320" cy="365760"/>
           </a:xfrm>
           <a:prstGeom prst="rect">
@@ -5281,7 +5313,7 @@
                 </a:solidFill>
                 <a:latin typeface="맑은 고딕"/>
               </a:rPr>
-              <a:t>정보 무제공 N=15 → 평가 완성도 ▼ 70%</a:t>
+              <a:t>후보 정보 없이 N=15: 만족도 70% 이하</a:t>
             </a:r>
           </a:p>
         </p:txBody>
@@ -5294,7 +5326,7 @@
         </p:nvSpPr>
         <p:spPr>
           <a:xfrm>
-            <a:off x="6492240" y="5212080"/>
+            <a:off x="6492240" y="5852160"/>
             <a:ext cx="4846320" cy="365760"/>
           </a:xfrm>
           <a:prstGeom prst="rect">
@@ -5314,66 +5346,27 @@
               </a:lnSpc>
             </a:pPr>
             <a:r>
-              <a:rPr sz="1100" b="0">
-                <a:solidFill>
-                  <a:srgbClr val="424B5C"/>
-                </a:solidFill>
-                <a:latin typeface="맑은 고딕"/>
-              </a:rPr>
-              <a:t>프로필 카드 N≤7 → 92% 유지</a:t>
-            </a:r>
-          </a:p>
-        </p:txBody>
-      </p:sp>
-      <p:sp>
-        <p:nvSpPr>
-          <p:cNvPr id="24" name="TextBox 23"/>
-          <p:cNvSpPr txBox="1"/>
-          <p:nvPr/>
-        </p:nvSpPr>
-        <p:spPr>
-          <a:xfrm>
-            <a:off x="6492240" y="5623560"/>
-            <a:ext cx="4846320" cy="365760"/>
-          </a:xfrm>
-          <a:prstGeom prst="rect">
-            <a:avLst/>
-          </a:prstGeom>
-          <a:noFill/>
-        </p:spPr>
-        <p:txBody>
-          <a:bodyPr wrap="square" lIns="0" rIns="0" tIns="0" bIns="0">
-            <a:spAutoFit/>
-          </a:bodyPr>
-          <a:lstStyle/>
-          <a:p>
-            <a:pPr algn="l">
-              <a:lnSpc>
-                <a:spcPct val="125000"/>
-              </a:lnSpc>
-            </a:pPr>
-            <a:r>
-              <a:rPr sz="1300" b="1">
+              <a:rPr sz="1200" b="1">
                 <a:solidFill>
                   <a:srgbClr val="0F141F"/>
                 </a:solidFill>
                 <a:latin typeface="맑은 고딕"/>
               </a:rPr>
-              <a:t>매칭 알고리즘 → N과 무관 100%</a:t>
-            </a:r>
-          </a:p>
-        </p:txBody>
-      </p:sp>
-      <p:sp>
-        <p:nvSpPr>
-          <p:cNvPr id="25" name="Rounded Rectangle 24"/>
+              <a:t>프로필 카드 주면: 92% 유지</a:t>
+            </a:r>
+          </a:p>
+        </p:txBody>
+      </p:sp>
+      <p:sp>
+        <p:nvSpPr>
+          <p:cNvPr id="24" name="Rounded Rectangle 23"/>
           <p:cNvSpPr/>
           <p:nvPr/>
         </p:nvSpPr>
         <p:spPr>
           <a:xfrm>
-            <a:off x="6492240" y="6126480"/>
-            <a:ext cx="2194560" cy="365760"/>
+            <a:off x="6492240" y="6263640"/>
+            <a:ext cx="2286000" cy="365760"/>
           </a:xfrm>
           <a:prstGeom prst="roundRect">
             <a:avLst>
@@ -5411,31 +5404,27 @@
       </p:sp>
       <p:sp>
         <p:nvSpPr>
-          <p:cNvPr id="26" name="TextBox 25"/>
-          <p:cNvSpPr txBox="1"/>
-          <p:nvPr/>
-        </p:nvSpPr>
-        <p:spPr>
-          <a:xfrm>
-            <a:off x="6492240" y="6172200"/>
-            <a:ext cx="2194560" cy="274320"/>
-          </a:xfrm>
-          <a:prstGeom prst="rect">
-            <a:avLst/>
-          </a:prstGeom>
-          <a:noFill/>
-        </p:spPr>
-        <p:txBody>
-          <a:bodyPr wrap="square" lIns="0" rIns="0" tIns="0" bIns="0">
-            <a:spAutoFit/>
-          </a:bodyPr>
-          <a:lstStyle/>
-          <a:p>
-            <a:pPr algn="ctr">
-              <a:lnSpc>
-                <a:spcPct val="125000"/>
-              </a:lnSpc>
-            </a:pPr>
+          <p:cNvPr id="25" name="TextBox 24"/>
+          <p:cNvSpPr txBox="1"/>
+          <p:nvPr/>
+        </p:nvSpPr>
+        <p:spPr>
+          <a:xfrm>
+            <a:off x="6492240" y="6263640"/>
+            <a:ext cx="2286000" cy="365760"/>
+          </a:xfrm>
+          <a:prstGeom prst="rect">
+            <a:avLst/>
+          </a:prstGeom>
+          <a:noFill/>
+        </p:spPr>
+        <p:txBody>
+          <a:bodyPr wrap="none" lIns="36576" rIns="36576" tIns="0" bIns="0" anchor="ctr">
+            <a:spAutoFit/>
+          </a:bodyPr>
+          <a:lstStyle/>
+          <a:p>
+            <a:pPr algn="ctr"/>
             <a:r>
               <a:rPr sz="1000" b="1">
                 <a:solidFill>
@@ -5443,7 +5432,7 @@
                 </a:solidFill>
                 <a:latin typeface="맑은 고딕"/>
               </a:rPr>
-              <a:t>WM 한계 우회 가능</a:t>
+              <a:t>한계 우회 가능</a:t>
             </a:r>
           </a:p>
         </p:txBody>
@@ -5869,13 +5858,13 @@
           </a:xfrm>
           <a:prstGeom prst="roundRect">
             <a:avLst>
-              <a:gd name="adj" fmla="val 4000"/>
+              <a:gd name="adj" fmla="val 6000"/>
             </a:avLst>
           </a:prstGeom>
           <a:solidFill>
             <a:srgbClr val="FAFBFC"/>
           </a:solidFill>
-          <a:ln w="12700">
+          <a:ln w="9525">
             <a:solidFill>
               <a:srgbClr val="E5E7EB"/>
             </a:solidFill>
@@ -6049,13 +6038,13 @@
           </a:xfrm>
           <a:prstGeom prst="roundRect">
             <a:avLst>
-              <a:gd name="adj" fmla="val 4000"/>
+              <a:gd name="adj" fmla="val 6000"/>
             </a:avLst>
           </a:prstGeom>
           <a:solidFill>
             <a:srgbClr val="FAFBFC"/>
           </a:solidFill>
-          <a:ln w="12700">
+          <a:ln w="9525">
             <a:solidFill>
               <a:srgbClr val="E5E7EB"/>
             </a:solidFill>
@@ -6229,13 +6218,13 @@
           </a:xfrm>
           <a:prstGeom prst="roundRect">
             <a:avLst>
-              <a:gd name="adj" fmla="val 4000"/>
+              <a:gd name="adj" fmla="val 6000"/>
             </a:avLst>
           </a:prstGeom>
           <a:solidFill>
             <a:srgbClr val="FAFBFC"/>
           </a:solidFill>
-          <a:ln w="12700">
+          <a:ln w="9525">
             <a:solidFill>
               <a:srgbClr val="E5E7EB"/>
             </a:solidFill>
@@ -6661,13 +6650,13 @@
           </a:xfrm>
           <a:prstGeom prst="roundRect">
             <a:avLst>
-              <a:gd name="adj" fmla="val 4000"/>
+              <a:gd name="adj" fmla="val 6000"/>
             </a:avLst>
           </a:prstGeom>
           <a:solidFill>
             <a:srgbClr val="FAFBFC"/>
           </a:solidFill>
-          <a:ln w="12700">
+          <a:ln w="9525">
             <a:solidFill>
               <a:srgbClr val="E5E7EB"/>
             </a:solidFill>
@@ -7005,13 +6994,13 @@
           </a:xfrm>
           <a:prstGeom prst="roundRect">
             <a:avLst>
-              <a:gd name="adj" fmla="val 4000"/>
+              <a:gd name="adj" fmla="val 6000"/>
             </a:avLst>
           </a:prstGeom>
           <a:solidFill>
             <a:srgbClr val="FDE8F5"/>
           </a:solidFill>
-          <a:ln w="12700">
+          <a:ln w="9525">
             <a:solidFill>
               <a:srgbClr val="EC4899"/>
             </a:solidFill>
@@ -7047,7 +7036,7 @@
         </p:nvSpPr>
         <p:spPr>
           <a:xfrm>
-            <a:off x="6492240" y="2697480"/>
+            <a:off x="6492240" y="2651760"/>
             <a:ext cx="4572000" cy="365760"/>
           </a:xfrm>
           <a:prstGeom prst="rect">
@@ -7073,7 +7062,7 @@
                 </a:solidFill>
                 <a:latin typeface="맑은 고딕"/>
               </a:rPr>
-              <a:t>강의계획서 적용</a:t>
+              <a:t>강의계획서가 만들어내는 효과</a:t>
             </a:r>
           </a:p>
         </p:txBody>
@@ -7086,33 +7075,33 @@
         </p:nvSpPr>
         <p:spPr>
           <a:xfrm>
-            <a:off x="6492240" y="3108960"/>
-            <a:ext cx="4846320" cy="914400"/>
-          </a:xfrm>
-          <a:prstGeom prst="rect">
-            <a:avLst/>
-          </a:prstGeom>
-          <a:noFill/>
-        </p:spPr>
-        <p:txBody>
-          <a:bodyPr wrap="square" lIns="0" rIns="0" tIns="0" bIns="0">
-            <a:spAutoFit/>
-          </a:bodyPr>
-          <a:lstStyle/>
-          <a:p>
-            <a:pPr algn="l">
-              <a:lnSpc>
-                <a:spcPct val="130000"/>
-              </a:lnSpc>
-            </a:pPr>
-            <a:r>
-              <a:rPr sz="1400" b="1">
+            <a:off x="6492240" y="3017520"/>
+            <a:ext cx="4846320" cy="502920"/>
+          </a:xfrm>
+          <a:prstGeom prst="rect">
+            <a:avLst/>
+          </a:prstGeom>
+          <a:noFill/>
+        </p:spPr>
+        <p:txBody>
+          <a:bodyPr wrap="square" lIns="0" rIns="0" tIns="0" bIns="0">
+            <a:spAutoFit/>
+          </a:bodyPr>
+          <a:lstStyle/>
+          <a:p>
+            <a:pPr algn="l">
+              <a:lnSpc>
+                <a:spcPct val="125000"/>
+              </a:lnSpc>
+            </a:pPr>
+            <a:r>
+              <a:rPr sz="1300" b="1">
                 <a:solidFill>
                   <a:srgbClr val="0F141F"/>
                 </a:solidFill>
                 <a:latin typeface="맑은 고딕"/>
               </a:rPr>
-              <a:t>"팀장 +10 가산" vs "기여 저조 −10 차감"</a:t>
+              <a:t>"+10점 가산" vs "현저히 낮다고 판단 시 감점"</a:t>
             </a:r>
           </a:p>
         </p:txBody>
@@ -7125,23 +7114,23 @@
         </p:nvSpPr>
         <p:spPr>
           <a:xfrm>
-            <a:off x="6492240" y="4069080"/>
-            <a:ext cx="4846320" cy="457200"/>
-          </a:xfrm>
-          <a:prstGeom prst="rect">
-            <a:avLst/>
-          </a:prstGeom>
-          <a:noFill/>
-        </p:spPr>
-        <p:txBody>
-          <a:bodyPr wrap="square" lIns="0" rIns="0" tIns="0" bIns="0">
-            <a:spAutoFit/>
-          </a:bodyPr>
-          <a:lstStyle/>
-          <a:p>
-            <a:pPr algn="l">
-              <a:lnSpc>
-                <a:spcPct val="125000"/>
+            <a:off x="6492240" y="3657600"/>
+            <a:ext cx="4846320" cy="1371600"/>
+          </a:xfrm>
+          <a:prstGeom prst="rect">
+            <a:avLst/>
+          </a:prstGeom>
+          <a:noFill/>
+        </p:spPr>
+        <p:txBody>
+          <a:bodyPr wrap="square" lIns="0" rIns="0" tIns="0" bIns="0">
+            <a:spAutoFit/>
+          </a:bodyPr>
+          <a:lstStyle/>
+          <a:p>
+            <a:pPr algn="l">
+              <a:lnSpc>
+                <a:spcPct val="140000"/>
               </a:lnSpc>
             </a:pPr>
             <a:r>
@@ -7151,7 +7140,39 @@
                 </a:solidFill>
                 <a:latin typeface="맑은 고딕"/>
               </a:rPr>
-              <a:t>= 동일 정책의 두 표현 (가상 비교)</a:t>
+              <a:t>→ +10은 "준다"는 명확한 보상.</a:t>
+            </a:r>
+          </a:p>
+          <a:p>
+            <a:pPr algn="l">
+              <a:lnSpc>
+                <a:spcPct val="140000"/>
+              </a:lnSpc>
+            </a:pPr>
+            <a:r>
+              <a:rPr sz="1100" b="0">
+                <a:solidFill>
+                  <a:srgbClr val="424B5C"/>
+                </a:solidFill>
+                <a:latin typeface="맑은 고딕"/>
+              </a:rPr>
+              <a:t>→ 감점은 "기준이 모호한 위협".</a:t>
+            </a:r>
+          </a:p>
+          <a:p>
+            <a:pPr algn="l">
+              <a:lnSpc>
+                <a:spcPct val="140000"/>
+              </a:lnSpc>
+            </a:pPr>
+            <a:r>
+              <a:rPr sz="1100" b="0">
+                <a:solidFill>
+                  <a:srgbClr val="424B5C"/>
+                </a:solidFill>
+                <a:latin typeface="맑은 고딕"/>
+              </a:rPr>
+              <a:t>→ 학생은 모호한 위협에 더 강하게 회피 반응.</a:t>
             </a:r>
           </a:p>
         </p:txBody>
@@ -7164,7 +7185,7 @@
         </p:nvCxnSpPr>
         <p:spPr>
           <a:xfrm>
-            <a:off x="6492240" y="4617720"/>
+            <a:off x="6492240" y="5074920"/>
             <a:ext cx="4846320" cy="0"/>
           </a:xfrm>
           <a:prstGeom prst="line">
@@ -7199,7 +7220,7 @@
         </p:nvSpPr>
         <p:spPr>
           <a:xfrm>
-            <a:off x="6492240" y="4709160"/>
+            <a:off x="6492240" y="5166360"/>
             <a:ext cx="4572000" cy="320040"/>
           </a:xfrm>
           <a:prstGeom prst="rect">
@@ -7225,7 +7246,7 @@
                 </a:solidFill>
                 <a:latin typeface="맑은 고딕"/>
               </a:rPr>
-              <a:t>예상 효과 크기</a:t>
+              <a:t>예상 결과 — 표현만 달라도 반응 차이</a:t>
             </a:r>
           </a:p>
         </p:txBody>
@@ -7238,7 +7259,7 @@
         </p:nvSpPr>
         <p:spPr>
           <a:xfrm>
-            <a:off x="6492240" y="5029200"/>
+            <a:off x="6492240" y="5486400"/>
             <a:ext cx="4846320" cy="365760"/>
           </a:xfrm>
           <a:prstGeom prst="rect">
@@ -7258,13 +7279,13 @@
               </a:lnSpc>
             </a:pPr>
             <a:r>
-              <a:rPr sz="1200" b="0">
+              <a:rPr sz="1100" b="0">
                 <a:solidFill>
                   <a:srgbClr val="424B5C"/>
                 </a:solidFill>
                 <a:latin typeface="맑은 고딕"/>
               </a:rPr>
-              <a:t>Gain frame 자원 의도 — 약함</a:t>
+              <a:t>+10 가산 보고 자원하는 학생: 적당함</a:t>
             </a:r>
           </a:p>
         </p:txBody>
@@ -7277,7 +7298,7 @@
         </p:nvSpPr>
         <p:spPr>
           <a:xfrm>
-            <a:off x="6492240" y="5440680"/>
+            <a:off x="6492240" y="5852160"/>
             <a:ext cx="4846320" cy="365760"/>
           </a:xfrm>
           <a:prstGeom prst="rect">
@@ -7297,13 +7318,13 @@
               </a:lnSpc>
             </a:pPr>
             <a:r>
-              <a:rPr sz="1400" b="1">
+              <a:rPr sz="1200" b="1">
                 <a:solidFill>
                   <a:srgbClr val="0F141F"/>
                 </a:solidFill>
                 <a:latin typeface="맑은 고딕"/>
               </a:rPr>
-              <a:t>Loss frame 자원 의도 — 약 2× 강함</a:t>
+              <a:t>감점 회피하려 자원하는 학생: 약 2배 많음</a:t>
             </a:r>
           </a:p>
         </p:txBody>
@@ -7316,7 +7337,7 @@
         </p:nvSpPr>
         <p:spPr>
           <a:xfrm>
-            <a:off x="6492240" y="5989320"/>
+            <a:off x="6492240" y="6263640"/>
             <a:ext cx="2194560" cy="365760"/>
           </a:xfrm>
           <a:prstGeom prst="roundRect">
@@ -7361,25 +7382,21 @@
         </p:nvSpPr>
         <p:spPr>
           <a:xfrm>
-            <a:off x="6492240" y="6035040"/>
-            <a:ext cx="2194560" cy="274320"/>
-          </a:xfrm>
-          <a:prstGeom prst="rect">
-            <a:avLst/>
-          </a:prstGeom>
-          <a:noFill/>
-        </p:spPr>
-        <p:txBody>
-          <a:bodyPr wrap="square" lIns="0" rIns="0" tIns="0" bIns="0">
-            <a:spAutoFit/>
-          </a:bodyPr>
-          <a:lstStyle/>
-          <a:p>
-            <a:pPr algn="ctr">
-              <a:lnSpc>
-                <a:spcPct val="125000"/>
-              </a:lnSpc>
-            </a:pPr>
+            <a:off x="6492240" y="6263640"/>
+            <a:ext cx="2194560" cy="365760"/>
+          </a:xfrm>
+          <a:prstGeom prst="rect">
+            <a:avLst/>
+          </a:prstGeom>
+          <a:noFill/>
+        </p:spPr>
+        <p:txBody>
+          <a:bodyPr wrap="none" lIns="36576" rIns="36576" tIns="0" bIns="0" anchor="ctr">
+            <a:spAutoFit/>
+          </a:bodyPr>
+          <a:lstStyle/>
+          <a:p>
+            <a:pPr algn="ctr"/>
             <a:r>
               <a:rPr sz="1000" b="1">
                 <a:solidFill>
@@ -7387,46 +7404,7 @@
                 </a:solidFill>
                 <a:latin typeface="맑은 고딕"/>
               </a:rPr>
-              <a:t>Cohen's d ≈ 0.5+</a:t>
-            </a:r>
-          </a:p>
-        </p:txBody>
-      </p:sp>
-      <p:sp>
-        <p:nvSpPr>
-          <p:cNvPr id="27" name="TextBox 26"/>
-          <p:cNvSpPr txBox="1"/>
-          <p:nvPr/>
-        </p:nvSpPr>
-        <p:spPr>
-          <a:xfrm>
-            <a:off x="8823960" y="6035040"/>
-            <a:ext cx="2743200" cy="320040"/>
-          </a:xfrm>
-          <a:prstGeom prst="rect">
-            <a:avLst/>
-          </a:prstGeom>
-          <a:noFill/>
-        </p:spPr>
-        <p:txBody>
-          <a:bodyPr wrap="square" lIns="0" rIns="0" tIns="0" bIns="0">
-            <a:spAutoFit/>
-          </a:bodyPr>
-          <a:lstStyle/>
-          <a:p>
-            <a:pPr algn="l">
-              <a:lnSpc>
-                <a:spcPct val="125000"/>
-              </a:lnSpc>
-            </a:pPr>
-            <a:r>
-              <a:rPr sz="1000" b="0">
-                <a:solidFill>
-                  <a:srgbClr val="8B95A7"/>
-                </a:solidFill>
-                <a:latin typeface="맑은 고딕"/>
-              </a:rPr>
-              <a:t>← 검증 목표</a:t>
+              <a:t>손실 회피 효과</a:t>
             </a:r>
           </a:p>
         </p:txBody>
@@ -7653,17 +7631,17 @@
         <p:spPr>
           <a:xfrm>
             <a:off x="640080" y="2103120"/>
-            <a:ext cx="10881360" cy="914400"/>
+            <a:ext cx="10881360" cy="960120"/>
           </a:xfrm>
           <a:prstGeom prst="roundRect">
             <a:avLst>
-              <a:gd name="adj" fmla="val 4000"/>
+              <a:gd name="adj" fmla="val 6000"/>
             </a:avLst>
           </a:prstGeom>
           <a:solidFill>
             <a:srgbClr val="FAFBFC"/>
           </a:solidFill>
-          <a:ln w="12700">
+          <a:ln w="9525">
             <a:solidFill>
               <a:srgbClr val="E5E7EB"/>
             </a:solidFill>
@@ -7699,8 +7677,8 @@
         </p:nvSpPr>
         <p:spPr>
           <a:xfrm>
-            <a:off x="777240" y="2331720"/>
-            <a:ext cx="548640" cy="457200"/>
+            <a:off x="822960" y="2377439"/>
+            <a:ext cx="777240" cy="411480"/>
           </a:xfrm>
           <a:prstGeom prst="roundRect">
             <a:avLst>
@@ -7744,27 +7722,23 @@
         </p:nvSpPr>
         <p:spPr>
           <a:xfrm>
-            <a:off x="777240" y="2377439"/>
-            <a:ext cx="548640" cy="365760"/>
-          </a:xfrm>
-          <a:prstGeom prst="rect">
-            <a:avLst/>
-          </a:prstGeom>
-          <a:noFill/>
-        </p:spPr>
-        <p:txBody>
-          <a:bodyPr wrap="square" lIns="0" rIns="0" tIns="0" bIns="0">
-            <a:spAutoFit/>
-          </a:bodyPr>
-          <a:lstStyle/>
-          <a:p>
-            <a:pPr algn="ctr">
-              <a:lnSpc>
-                <a:spcPct val="125000"/>
-              </a:lnSpc>
-            </a:pPr>
-            <a:r>
-              <a:rPr sz="1000" b="1">
+            <a:off x="822960" y="2377439"/>
+            <a:ext cx="777240" cy="411480"/>
+          </a:xfrm>
+          <a:prstGeom prst="rect">
+            <a:avLst/>
+          </a:prstGeom>
+          <a:noFill/>
+        </p:spPr>
+        <p:txBody>
+          <a:bodyPr wrap="none" lIns="36576" rIns="36576" tIns="0" bIns="0" anchor="ctr">
+            <a:spAutoFit/>
+          </a:bodyPr>
+          <a:lstStyle/>
+          <a:p>
+            <a:pPr algn="ctr"/>
+            <a:r>
+              <a:rPr sz="1100" b="1">
                 <a:solidFill>
                   <a:srgbClr val="FFFFFF"/>
                 </a:solidFill>
@@ -7783,8 +7757,8 @@
         </p:nvSpPr>
         <p:spPr>
           <a:xfrm>
-            <a:off x="1463040" y="2286000"/>
-            <a:ext cx="1371600" cy="365760"/>
+            <a:off x="1828800" y="2267712"/>
+            <a:ext cx="3657600" cy="320040"/>
           </a:xfrm>
           <a:prstGeom prst="rect">
             <a:avLst/>
@@ -7809,7 +7783,7 @@
                 </a:solidFill>
                 <a:latin typeface="맑은 고딕"/>
               </a:rPr>
-              <a:t>Framing</a:t>
+              <a:t>표현 방식 효과</a:t>
             </a:r>
           </a:p>
         </p:txBody>
@@ -7822,186 +7796,96 @@
         </p:nvSpPr>
         <p:spPr>
           <a:xfrm>
-            <a:off x="1463040" y="2606039"/>
-            <a:ext cx="6858000" cy="411480"/>
-          </a:xfrm>
-          <a:prstGeom prst="rect">
-            <a:avLst/>
-          </a:prstGeom>
-          <a:noFill/>
-        </p:spPr>
-        <p:txBody>
-          <a:bodyPr wrap="square" lIns="0" rIns="0" tIns="0" bIns="0">
-            <a:spAutoFit/>
-          </a:bodyPr>
-          <a:lstStyle/>
-          <a:p>
-            <a:pPr algn="l">
-              <a:lnSpc>
-                <a:spcPct val="125000"/>
-              </a:lnSpc>
-            </a:pPr>
-            <a:r>
-              <a:rPr sz="1200" b="0">
+            <a:off x="1828800" y="2542032"/>
+            <a:ext cx="9601200" cy="365760"/>
+          </a:xfrm>
+          <a:prstGeom prst="rect">
+            <a:avLst/>
+          </a:prstGeom>
+          <a:noFill/>
+        </p:spPr>
+        <p:txBody>
+          <a:bodyPr wrap="square" lIns="0" rIns="0" tIns="0" bIns="0">
+            <a:spAutoFit/>
+          </a:bodyPr>
+          <a:lstStyle/>
+          <a:p>
+            <a:pPr algn="l">
+              <a:lnSpc>
+                <a:spcPct val="125000"/>
+              </a:lnSpc>
+            </a:pPr>
+            <a:r>
+              <a:rPr sz="1200" b="1">
                 <a:solidFill>
                   <a:srgbClr val="0F141F"/>
                 </a:solidFill>
                 <a:latin typeface="맑은 고딕"/>
               </a:rPr>
-              <a:t>동일 인센티브를 손실(-10)로 표현할 때</a:t>
-            </a:r>
-          </a:p>
-          <a:p>
-            <a:pPr algn="l">
-              <a:lnSpc>
-                <a:spcPct val="125000"/>
-              </a:lnSpc>
-            </a:pPr>
-            <a:r>
-              <a:rPr sz="1200" b="0">
-                <a:solidFill>
-                  <a:srgbClr val="0F141F"/>
-                </a:solidFill>
-                <a:latin typeface="맑은 고딕"/>
-              </a:rPr>
-              <a:t>이득(+10) 표현보다 자원 의도가 강하다.</a:t>
-            </a:r>
-          </a:p>
-        </p:txBody>
-      </p:sp>
-      <p:cxnSp>
-        <p:nvCxnSpPr>
-          <p:cNvPr id="12" name="Connector 11"/>
-          <p:cNvCxnSpPr/>
-          <p:nvPr/>
-        </p:nvCxnSpPr>
-        <p:spPr>
-          <a:xfrm>
-            <a:off x="8503920" y="2331720"/>
-            <a:ext cx="0" cy="548640"/>
-          </a:xfrm>
-          <a:prstGeom prst="line">
-            <a:avLst/>
-          </a:prstGeom>
-          <a:ln w="19050">
-            <a:solidFill>
-              <a:srgbClr val="E5E7EB"/>
-            </a:solidFill>
-          </a:ln>
-        </p:spPr>
-        <p:style>
-          <a:lnRef idx="2">
-            <a:schemeClr val="accent1"/>
-          </a:lnRef>
-          <a:fillRef idx="0">
-            <a:schemeClr val="accent1"/>
-          </a:fillRef>
-          <a:effectRef idx="1">
-            <a:schemeClr val="accent1"/>
-          </a:effectRef>
-          <a:fontRef idx="minor">
-            <a:schemeClr val="tx1"/>
-          </a:fontRef>
-        </p:style>
-      </p:cxnSp>
-      <p:sp>
-        <p:nvSpPr>
-          <p:cNvPr id="13" name="TextBox 12"/>
-          <p:cNvSpPr txBox="1"/>
-          <p:nvPr/>
-        </p:nvSpPr>
-        <p:spPr>
-          <a:xfrm>
-            <a:off x="8686800" y="2331720"/>
-            <a:ext cx="2926080" cy="320040"/>
-          </a:xfrm>
-          <a:prstGeom prst="rect">
-            <a:avLst/>
-          </a:prstGeom>
-          <a:noFill/>
-        </p:spPr>
-        <p:txBody>
-          <a:bodyPr wrap="square" lIns="0" rIns="0" tIns="0" bIns="0">
-            <a:spAutoFit/>
-          </a:bodyPr>
-          <a:lstStyle/>
-          <a:p>
-            <a:pPr algn="l">
-              <a:lnSpc>
-                <a:spcPct val="125000"/>
-              </a:lnSpc>
-            </a:pPr>
-            <a:r>
-              <a:rPr sz="900" b="0">
-                <a:solidFill>
-                  <a:srgbClr val="8B95A7"/>
-                </a:solidFill>
-                <a:latin typeface="맑은 고딕"/>
-              </a:rPr>
-              <a:t>통계 검정</a:t>
-            </a:r>
-          </a:p>
-        </p:txBody>
-      </p:sp>
-      <p:sp>
-        <p:nvSpPr>
-          <p:cNvPr id="14" name="TextBox 13"/>
-          <p:cNvSpPr txBox="1"/>
-          <p:nvPr/>
-        </p:nvSpPr>
-        <p:spPr>
-          <a:xfrm>
-            <a:off x="8686800" y="2606039"/>
-            <a:ext cx="2926080" cy="365760"/>
-          </a:xfrm>
-          <a:prstGeom prst="rect">
-            <a:avLst/>
-          </a:prstGeom>
-          <a:noFill/>
-        </p:spPr>
-        <p:txBody>
-          <a:bodyPr wrap="square" lIns="0" rIns="0" tIns="0" bIns="0">
-            <a:spAutoFit/>
-          </a:bodyPr>
-          <a:lstStyle/>
-          <a:p>
-            <a:pPr algn="l">
-              <a:lnSpc>
-                <a:spcPct val="125000"/>
-              </a:lnSpc>
-            </a:pPr>
-            <a:r>
-              <a:rPr sz="1000" b="1">
+              <a:t>모호한 감점 표현이 명확한 +10 가산보다 회피·자원 의도가 더 강하다.</a:t>
+            </a:r>
+          </a:p>
+        </p:txBody>
+      </p:sp>
+      <p:sp>
+        <p:nvSpPr>
+          <p:cNvPr id="12" name="TextBox 11"/>
+          <p:cNvSpPr txBox="1"/>
+          <p:nvPr/>
+        </p:nvSpPr>
+        <p:spPr>
+          <a:xfrm>
+            <a:off x="1828800" y="2816352"/>
+            <a:ext cx="9601200" cy="320040"/>
+          </a:xfrm>
+          <a:prstGeom prst="rect">
+            <a:avLst/>
+          </a:prstGeom>
+          <a:noFill/>
+        </p:spPr>
+        <p:txBody>
+          <a:bodyPr wrap="square" lIns="0" rIns="0" tIns="0" bIns="0">
+            <a:spAutoFit/>
+          </a:bodyPr>
+          <a:lstStyle/>
+          <a:p>
+            <a:pPr algn="l">
+              <a:lnSpc>
+                <a:spcPct val="125000"/>
+              </a:lnSpc>
+            </a:pPr>
+            <a:r>
+              <a:rPr sz="1000" b="0">
                 <a:solidFill>
                   <a:srgbClr val="424B5C"/>
                 </a:solidFill>
                 <a:latin typeface="맑은 고딕"/>
               </a:rPr>
-              <a:t>독립표본 t-test (gain vs loss)</a:t>
-            </a:r>
-          </a:p>
-        </p:txBody>
-      </p:sp>
-      <p:sp>
-        <p:nvSpPr>
-          <p:cNvPr id="15" name="Rounded Rectangle 14"/>
+              <a:t>💡 우리가 보고 싶은 결과: 감점 그룹 응답이 +10 그룹보다 약 2배 더 강한 의도 (Cohen's d ≈ 0.5+)</a:t>
+            </a:r>
+          </a:p>
+        </p:txBody>
+      </p:sp>
+      <p:sp>
+        <p:nvSpPr>
+          <p:cNvPr id="13" name="Rounded Rectangle 12"/>
           <p:cNvSpPr/>
           <p:nvPr/>
         </p:nvSpPr>
         <p:spPr>
           <a:xfrm>
-            <a:off x="640080" y="3154679"/>
-            <a:ext cx="10881360" cy="914400"/>
+            <a:off x="640080" y="3182111"/>
+            <a:ext cx="10881360" cy="960120"/>
           </a:xfrm>
           <a:prstGeom prst="roundRect">
             <a:avLst>
-              <a:gd name="adj" fmla="val 4000"/>
+              <a:gd name="adj" fmla="val 6000"/>
             </a:avLst>
           </a:prstGeom>
           <a:solidFill>
             <a:srgbClr val="FAFBFC"/>
           </a:solidFill>
-          <a:ln w="12700">
+          <a:ln w="9525">
             <a:solidFill>
               <a:srgbClr val="E5E7EB"/>
             </a:solidFill>
@@ -8031,14 +7915,14 @@
       </p:sp>
       <p:sp>
         <p:nvSpPr>
-          <p:cNvPr id="16" name="Rounded Rectangle 15"/>
+          <p:cNvPr id="14" name="Rounded Rectangle 13"/>
           <p:cNvSpPr/>
           <p:nvPr/>
         </p:nvSpPr>
         <p:spPr>
           <a:xfrm>
-            <a:off x="777240" y="3383279"/>
-            <a:ext cx="548640" cy="457200"/>
+            <a:off x="822960" y="3456431"/>
+            <a:ext cx="777240" cy="411480"/>
           </a:xfrm>
           <a:prstGeom prst="roundRect">
             <a:avLst>
@@ -8076,39 +7960,113 @@
       </p:sp>
       <p:sp>
         <p:nvSpPr>
+          <p:cNvPr id="15" name="TextBox 14"/>
+          <p:cNvSpPr txBox="1"/>
+          <p:nvPr/>
+        </p:nvSpPr>
+        <p:spPr>
+          <a:xfrm>
+            <a:off x="822960" y="3456431"/>
+            <a:ext cx="777240" cy="411480"/>
+          </a:xfrm>
+          <a:prstGeom prst="rect">
+            <a:avLst/>
+          </a:prstGeom>
+          <a:noFill/>
+        </p:spPr>
+        <p:txBody>
+          <a:bodyPr wrap="none" lIns="36576" rIns="36576" tIns="0" bIns="0" anchor="ctr">
+            <a:spAutoFit/>
+          </a:bodyPr>
+          <a:lstStyle/>
+          <a:p>
+            <a:pPr algn="ctr"/>
+            <a:r>
+              <a:rPr sz="1100" b="1">
+                <a:solidFill>
+                  <a:srgbClr val="FFFFFF"/>
+                </a:solidFill>
+                <a:latin typeface="맑은 고딕"/>
+              </a:rPr>
+              <a:t>H2</a:t>
+            </a:r>
+          </a:p>
+        </p:txBody>
+      </p:sp>
+      <p:sp>
+        <p:nvSpPr>
+          <p:cNvPr id="16" name="TextBox 15"/>
+          <p:cNvSpPr txBox="1"/>
+          <p:nvPr/>
+        </p:nvSpPr>
+        <p:spPr>
+          <a:xfrm>
+            <a:off x="1828800" y="3346703"/>
+            <a:ext cx="3657600" cy="320040"/>
+          </a:xfrm>
+          <a:prstGeom prst="rect">
+            <a:avLst/>
+          </a:prstGeom>
+          <a:noFill/>
+        </p:spPr>
+        <p:txBody>
+          <a:bodyPr wrap="square" lIns="0" rIns="0" tIns="0" bIns="0">
+            <a:spAutoFit/>
+          </a:bodyPr>
+          <a:lstStyle/>
+          <a:p>
+            <a:pPr algn="l">
+              <a:lnSpc>
+                <a:spcPct val="125000"/>
+              </a:lnSpc>
+            </a:pPr>
+            <a:r>
+              <a:rPr sz="1100" b="1">
+                <a:solidFill>
+                  <a:srgbClr val="4F46E5"/>
+                </a:solidFill>
+                <a:latin typeface="맑은 고딕"/>
+              </a:rPr>
+              <a:t>그럭저럭 만족</a:t>
+            </a:r>
+          </a:p>
+        </p:txBody>
+      </p:sp>
+      <p:sp>
+        <p:nvSpPr>
           <p:cNvPr id="17" name="TextBox 16"/>
           <p:cNvSpPr txBox="1"/>
           <p:nvPr/>
         </p:nvSpPr>
         <p:spPr>
           <a:xfrm>
-            <a:off x="777240" y="3428999"/>
-            <a:ext cx="548640" cy="365760"/>
-          </a:xfrm>
-          <a:prstGeom prst="rect">
-            <a:avLst/>
-          </a:prstGeom>
-          <a:noFill/>
-        </p:spPr>
-        <p:txBody>
-          <a:bodyPr wrap="square" lIns="0" rIns="0" tIns="0" bIns="0">
-            <a:spAutoFit/>
-          </a:bodyPr>
-          <a:lstStyle/>
-          <a:p>
-            <a:pPr algn="ctr">
-              <a:lnSpc>
-                <a:spcPct val="125000"/>
-              </a:lnSpc>
-            </a:pPr>
-            <a:r>
-              <a:rPr sz="1000" b="1">
-                <a:solidFill>
-                  <a:srgbClr val="FFFFFF"/>
-                </a:solidFill>
-                <a:latin typeface="맑은 고딕"/>
-              </a:rPr>
-              <a:t>H2</a:t>
+            <a:off x="1828800" y="3621023"/>
+            <a:ext cx="9601200" cy="365760"/>
+          </a:xfrm>
+          <a:prstGeom prst="rect">
+            <a:avLst/>
+          </a:prstGeom>
+          <a:noFill/>
+        </p:spPr>
+        <p:txBody>
+          <a:bodyPr wrap="square" lIns="0" rIns="0" tIns="0" bIns="0">
+            <a:spAutoFit/>
+          </a:bodyPr>
+          <a:lstStyle/>
+          <a:p>
+            <a:pPr algn="l">
+              <a:lnSpc>
+                <a:spcPct val="125000"/>
+              </a:lnSpc>
+            </a:pPr>
+            <a:r>
+              <a:rPr sz="1200" b="1">
+                <a:solidFill>
+                  <a:srgbClr val="0F141F"/>
+                </a:solidFill>
+                <a:latin typeface="맑은 고딕"/>
+              </a:rPr>
+              <a:t>후보 N이 7명을 넘어가면 팀 구성 만족도가 급격히 떨어진다.</a:t>
             </a:r>
           </a:p>
         </p:txBody>
@@ -8121,225 +8079,57 @@
         </p:nvSpPr>
         <p:spPr>
           <a:xfrm>
-            <a:off x="1463040" y="3337560"/>
-            <a:ext cx="1371600" cy="365760"/>
-          </a:xfrm>
-          <a:prstGeom prst="rect">
-            <a:avLst/>
-          </a:prstGeom>
-          <a:noFill/>
-        </p:spPr>
-        <p:txBody>
-          <a:bodyPr wrap="square" lIns="0" rIns="0" tIns="0" bIns="0">
-            <a:spAutoFit/>
-          </a:bodyPr>
-          <a:lstStyle/>
-          <a:p>
-            <a:pPr algn="l">
-              <a:lnSpc>
-                <a:spcPct val="125000"/>
-              </a:lnSpc>
-            </a:pPr>
-            <a:r>
-              <a:rPr sz="1100" b="1">
-                <a:solidFill>
-                  <a:srgbClr val="4F46E5"/>
-                </a:solidFill>
-                <a:latin typeface="맑은 고딕"/>
-              </a:rPr>
-              <a:t>Satisficing</a:t>
-            </a:r>
-          </a:p>
-        </p:txBody>
-      </p:sp>
-      <p:sp>
-        <p:nvSpPr>
-          <p:cNvPr id="19" name="TextBox 18"/>
-          <p:cNvSpPr txBox="1"/>
-          <p:nvPr/>
-        </p:nvSpPr>
-        <p:spPr>
-          <a:xfrm>
-            <a:off x="1463040" y="3657600"/>
-            <a:ext cx="6858000" cy="411480"/>
-          </a:xfrm>
-          <a:prstGeom prst="rect">
-            <a:avLst/>
-          </a:prstGeom>
-          <a:noFill/>
-        </p:spPr>
-        <p:txBody>
-          <a:bodyPr wrap="square" lIns="0" rIns="0" tIns="0" bIns="0">
-            <a:spAutoFit/>
-          </a:bodyPr>
-          <a:lstStyle/>
-          <a:p>
-            <a:pPr algn="l">
-              <a:lnSpc>
-                <a:spcPct val="125000"/>
-              </a:lnSpc>
-            </a:pPr>
-            <a:r>
-              <a:rPr sz="1200" b="0">
-                <a:solidFill>
-                  <a:srgbClr val="0F141F"/>
-                </a:solidFill>
-                <a:latin typeface="맑은 고딕"/>
-              </a:rPr>
-              <a:t>후보 N이 작업기억 한계(7±2)를 초과할수록</a:t>
-            </a:r>
-          </a:p>
-          <a:p>
-            <a:pPr algn="l">
-              <a:lnSpc>
-                <a:spcPct val="125000"/>
-              </a:lnSpc>
-            </a:pPr>
-            <a:r>
-              <a:rPr sz="1200" b="0">
-                <a:solidFill>
-                  <a:srgbClr val="0F141F"/>
-                </a:solidFill>
-                <a:latin typeface="맑은 고딕"/>
-              </a:rPr>
-              <a:t>팀 구성 만족도가 급격히 감소한다.</a:t>
-            </a:r>
-          </a:p>
-        </p:txBody>
-      </p:sp>
-      <p:cxnSp>
-        <p:nvCxnSpPr>
-          <p:cNvPr id="20" name="Connector 19"/>
-          <p:cNvCxnSpPr/>
-          <p:nvPr/>
-        </p:nvCxnSpPr>
-        <p:spPr>
-          <a:xfrm>
-            <a:off x="8503920" y="3383279"/>
-            <a:ext cx="0" cy="548641"/>
-          </a:xfrm>
-          <a:prstGeom prst="line">
-            <a:avLst/>
-          </a:prstGeom>
-          <a:ln w="19050">
-            <a:solidFill>
-              <a:srgbClr val="E5E7EB"/>
-            </a:solidFill>
-          </a:ln>
-        </p:spPr>
-        <p:style>
-          <a:lnRef idx="2">
-            <a:schemeClr val="accent1"/>
-          </a:lnRef>
-          <a:fillRef idx="0">
-            <a:schemeClr val="accent1"/>
-          </a:fillRef>
-          <a:effectRef idx="1">
-            <a:schemeClr val="accent1"/>
-          </a:effectRef>
-          <a:fontRef idx="minor">
-            <a:schemeClr val="tx1"/>
-          </a:fontRef>
-        </p:style>
-      </p:cxnSp>
-      <p:sp>
-        <p:nvSpPr>
-          <p:cNvPr id="21" name="TextBox 20"/>
-          <p:cNvSpPr txBox="1"/>
-          <p:nvPr/>
-        </p:nvSpPr>
-        <p:spPr>
-          <a:xfrm>
-            <a:off x="8686800" y="3383279"/>
-            <a:ext cx="2926080" cy="320040"/>
-          </a:xfrm>
-          <a:prstGeom prst="rect">
-            <a:avLst/>
-          </a:prstGeom>
-          <a:noFill/>
-        </p:spPr>
-        <p:txBody>
-          <a:bodyPr wrap="square" lIns="0" rIns="0" tIns="0" bIns="0">
-            <a:spAutoFit/>
-          </a:bodyPr>
-          <a:lstStyle/>
-          <a:p>
-            <a:pPr algn="l">
-              <a:lnSpc>
-                <a:spcPct val="125000"/>
-              </a:lnSpc>
-            </a:pPr>
-            <a:r>
-              <a:rPr sz="900" b="0">
-                <a:solidFill>
-                  <a:srgbClr val="8B95A7"/>
-                </a:solidFill>
-                <a:latin typeface="맑은 고딕"/>
-              </a:rPr>
-              <a:t>통계 검정</a:t>
-            </a:r>
-          </a:p>
-        </p:txBody>
-      </p:sp>
-      <p:sp>
-        <p:nvSpPr>
-          <p:cNvPr id="22" name="TextBox 21"/>
-          <p:cNvSpPr txBox="1"/>
-          <p:nvPr/>
-        </p:nvSpPr>
-        <p:spPr>
-          <a:xfrm>
-            <a:off x="8686800" y="3657600"/>
-            <a:ext cx="2926080" cy="365760"/>
-          </a:xfrm>
-          <a:prstGeom prst="rect">
-            <a:avLst/>
-          </a:prstGeom>
-          <a:noFill/>
-        </p:spPr>
-        <p:txBody>
-          <a:bodyPr wrap="square" lIns="0" rIns="0" tIns="0" bIns="0">
-            <a:spAutoFit/>
-          </a:bodyPr>
-          <a:lstStyle/>
-          <a:p>
-            <a:pPr algn="l">
-              <a:lnSpc>
-                <a:spcPct val="125000"/>
-              </a:lnSpc>
-            </a:pPr>
-            <a:r>
-              <a:rPr sz="1000" b="1">
+            <a:off x="1828800" y="3895344"/>
+            <a:ext cx="9601200" cy="320040"/>
+          </a:xfrm>
+          <a:prstGeom prst="rect">
+            <a:avLst/>
+          </a:prstGeom>
+          <a:noFill/>
+        </p:spPr>
+        <p:txBody>
+          <a:bodyPr wrap="square" lIns="0" rIns="0" tIns="0" bIns="0">
+            <a:spAutoFit/>
+          </a:bodyPr>
+          <a:lstStyle/>
+          <a:p>
+            <a:pPr algn="l">
+              <a:lnSpc>
+                <a:spcPct val="125000"/>
+              </a:lnSpc>
+            </a:pPr>
+            <a:r>
+              <a:rPr sz="1000" b="0">
                 <a:solidFill>
                   <a:srgbClr val="424B5C"/>
                 </a:solidFill>
                 <a:latin typeface="맑은 고딕"/>
               </a:rPr>
-              <a:t>1원 ANOVA (N=3 / 7 / 15) + Tukey</a:t>
-            </a:r>
-          </a:p>
-        </p:txBody>
-      </p:sp>
-      <p:sp>
-        <p:nvSpPr>
-          <p:cNvPr id="23" name="Rounded Rectangle 22"/>
+              <a:t>💡 우리가 보고 싶은 결과: N=3·7 그룹은 만족도 5~6점, N=15 그룹은 4점 이하로 급감</a:t>
+            </a:r>
+          </a:p>
+        </p:txBody>
+      </p:sp>
+      <p:sp>
+        <p:nvSpPr>
+          <p:cNvPr id="19" name="Rounded Rectangle 18"/>
           <p:cNvSpPr/>
           <p:nvPr/>
         </p:nvSpPr>
         <p:spPr>
           <a:xfrm>
-            <a:off x="640080" y="4206240"/>
-            <a:ext cx="10881360" cy="914400"/>
+            <a:off x="640080" y="4261104"/>
+            <a:ext cx="10881360" cy="960120"/>
           </a:xfrm>
           <a:prstGeom prst="roundRect">
             <a:avLst>
-              <a:gd name="adj" fmla="val 4000"/>
+              <a:gd name="adj" fmla="val 6000"/>
             </a:avLst>
           </a:prstGeom>
           <a:solidFill>
             <a:srgbClr val="FAFBFC"/>
           </a:solidFill>
-          <a:ln w="12700">
+          <a:ln w="9525">
             <a:solidFill>
               <a:srgbClr val="E5E7EB"/>
             </a:solidFill>
@@ -8369,14 +8159,14 @@
       </p:sp>
       <p:sp>
         <p:nvSpPr>
-          <p:cNvPr id="24" name="Rounded Rectangle 23"/>
+          <p:cNvPr id="20" name="Rounded Rectangle 19"/>
           <p:cNvSpPr/>
           <p:nvPr/>
         </p:nvSpPr>
         <p:spPr>
           <a:xfrm>
-            <a:off x="777240" y="4434840"/>
-            <a:ext cx="548640" cy="457200"/>
+            <a:off x="822960" y="4535424"/>
+            <a:ext cx="777240" cy="411480"/>
           </a:xfrm>
           <a:prstGeom prst="roundRect">
             <a:avLst>
@@ -8414,33 +8204,29 @@
       </p:sp>
       <p:sp>
         <p:nvSpPr>
-          <p:cNvPr id="25" name="TextBox 24"/>
-          <p:cNvSpPr txBox="1"/>
-          <p:nvPr/>
-        </p:nvSpPr>
-        <p:spPr>
-          <a:xfrm>
-            <a:off x="777240" y="4480559"/>
-            <a:ext cx="548640" cy="365760"/>
-          </a:xfrm>
-          <a:prstGeom prst="rect">
-            <a:avLst/>
-          </a:prstGeom>
-          <a:noFill/>
-        </p:spPr>
-        <p:txBody>
-          <a:bodyPr wrap="square" lIns="0" rIns="0" tIns="0" bIns="0">
-            <a:spAutoFit/>
-          </a:bodyPr>
-          <a:lstStyle/>
-          <a:p>
-            <a:pPr algn="ctr">
-              <a:lnSpc>
-                <a:spcPct val="125000"/>
-              </a:lnSpc>
-            </a:pPr>
-            <a:r>
-              <a:rPr sz="1000" b="1">
+          <p:cNvPr id="21" name="TextBox 20"/>
+          <p:cNvSpPr txBox="1"/>
+          <p:nvPr/>
+        </p:nvSpPr>
+        <p:spPr>
+          <a:xfrm>
+            <a:off x="822960" y="4535424"/>
+            <a:ext cx="777240" cy="411480"/>
+          </a:xfrm>
+          <a:prstGeom prst="rect">
+            <a:avLst/>
+          </a:prstGeom>
+          <a:noFill/>
+        </p:spPr>
+        <p:txBody>
+          <a:bodyPr wrap="none" lIns="36576" rIns="36576" tIns="0" bIns="0" anchor="ctr">
+            <a:spAutoFit/>
+          </a:bodyPr>
+          <a:lstStyle/>
+          <a:p>
+            <a:pPr algn="ctr"/>
+            <a:r>
+              <a:rPr sz="1100" b="1">
                 <a:solidFill>
                   <a:srgbClr val="FFFFFF"/>
                 </a:solidFill>
@@ -8453,14 +8239,14 @@
       </p:sp>
       <p:sp>
         <p:nvSpPr>
-          <p:cNvPr id="26" name="TextBox 25"/>
-          <p:cNvSpPr txBox="1"/>
-          <p:nvPr/>
-        </p:nvSpPr>
-        <p:spPr>
-          <a:xfrm>
-            <a:off x="1463040" y="4389120"/>
-            <a:ext cx="1371600" cy="365760"/>
+          <p:cNvPr id="22" name="TextBox 21"/>
+          <p:cNvSpPr txBox="1"/>
+          <p:nvPr/>
+        </p:nvSpPr>
+        <p:spPr>
+          <a:xfrm>
+            <a:off x="1828800" y="4425696"/>
+            <a:ext cx="3657600" cy="320040"/>
           </a:xfrm>
           <a:prstGeom prst="rect">
             <a:avLst/>
@@ -8485,199 +8271,109 @@
                 </a:solidFill>
                 <a:latin typeface="맑은 고딕"/>
               </a:rPr>
-              <a:t>Utility</a:t>
-            </a:r>
-          </a:p>
-        </p:txBody>
-      </p:sp>
-      <p:sp>
-        <p:nvSpPr>
-          <p:cNvPr id="27" name="TextBox 26"/>
-          <p:cNvSpPr txBox="1"/>
-          <p:nvPr/>
-        </p:nvSpPr>
-        <p:spPr>
-          <a:xfrm>
-            <a:off x="1463040" y="4709159"/>
-            <a:ext cx="6858000" cy="411480"/>
-          </a:xfrm>
-          <a:prstGeom prst="rect">
-            <a:avLst/>
-          </a:prstGeom>
-          <a:noFill/>
-        </p:spPr>
-        <p:txBody>
-          <a:bodyPr wrap="square" lIns="0" rIns="0" tIns="0" bIns="0">
-            <a:spAutoFit/>
-          </a:bodyPr>
-          <a:lstStyle/>
-          <a:p>
-            <a:pPr algn="l">
-              <a:lnSpc>
-                <a:spcPct val="125000"/>
-              </a:lnSpc>
-            </a:pPr>
-            <a:r>
-              <a:rPr sz="1200" b="0">
+              <a:t>효용 학습</a:t>
+            </a:r>
+          </a:p>
+        </p:txBody>
+      </p:sp>
+      <p:sp>
+        <p:nvSpPr>
+          <p:cNvPr id="23" name="TextBox 22"/>
+          <p:cNvSpPr txBox="1"/>
+          <p:nvPr/>
+        </p:nvSpPr>
+        <p:spPr>
+          <a:xfrm>
+            <a:off x="1828800" y="4700016"/>
+            <a:ext cx="9601200" cy="365760"/>
+          </a:xfrm>
+          <a:prstGeom prst="rect">
+            <a:avLst/>
+          </a:prstGeom>
+          <a:noFill/>
+        </p:spPr>
+        <p:txBody>
+          <a:bodyPr wrap="square" lIns="0" rIns="0" tIns="0" bIns="0">
+            <a:spAutoFit/>
+          </a:bodyPr>
+          <a:lstStyle/>
+          <a:p>
+            <a:pPr algn="l">
+              <a:lnSpc>
+                <a:spcPct val="125000"/>
+              </a:lnSpc>
+            </a:pPr>
+            <a:r>
+              <a:rPr sz="1200" b="1">
                 <a:solidFill>
                   <a:srgbClr val="0F141F"/>
                 </a:solidFill>
                 <a:latin typeface="맑은 고딕"/>
               </a:rPr>
-              <a:t>출석 정책이 가변비율(랜덤+비공개)일수록</a:t>
-            </a:r>
-          </a:p>
-          <a:p>
-            <a:pPr algn="l">
-              <a:lnSpc>
-                <a:spcPct val="125000"/>
-              </a:lnSpc>
-            </a:pPr>
-            <a:r>
-              <a:rPr sz="1200" b="0">
-                <a:solidFill>
-                  <a:srgbClr val="0F141F"/>
-                </a:solidFill>
-                <a:latin typeface="맑은 고딕"/>
-              </a:rPr>
-              <a:t>결석 의도가 가장 낮다.</a:t>
-            </a:r>
-          </a:p>
-        </p:txBody>
-      </p:sp>
-      <p:cxnSp>
-        <p:nvCxnSpPr>
-          <p:cNvPr id="28" name="Connector 27"/>
-          <p:cNvCxnSpPr/>
-          <p:nvPr/>
-        </p:nvCxnSpPr>
-        <p:spPr>
-          <a:xfrm>
-            <a:off x="8503920" y="4434840"/>
-            <a:ext cx="0" cy="548639"/>
-          </a:xfrm>
-          <a:prstGeom prst="line">
-            <a:avLst/>
-          </a:prstGeom>
-          <a:ln w="19050">
-            <a:solidFill>
-              <a:srgbClr val="E5E7EB"/>
-            </a:solidFill>
-          </a:ln>
-        </p:spPr>
-        <p:style>
-          <a:lnRef idx="2">
-            <a:schemeClr val="accent1"/>
-          </a:lnRef>
-          <a:fillRef idx="0">
-            <a:schemeClr val="accent1"/>
-          </a:fillRef>
-          <a:effectRef idx="1">
-            <a:schemeClr val="accent1"/>
-          </a:effectRef>
-          <a:fontRef idx="minor">
-            <a:schemeClr val="tx1"/>
-          </a:fontRef>
-        </p:style>
-      </p:cxnSp>
-      <p:sp>
-        <p:nvSpPr>
-          <p:cNvPr id="29" name="TextBox 28"/>
-          <p:cNvSpPr txBox="1"/>
-          <p:nvPr/>
-        </p:nvSpPr>
-        <p:spPr>
-          <a:xfrm>
-            <a:off x="8686800" y="4434840"/>
-            <a:ext cx="2926080" cy="320040"/>
-          </a:xfrm>
-          <a:prstGeom prst="rect">
-            <a:avLst/>
-          </a:prstGeom>
-          <a:noFill/>
-        </p:spPr>
-        <p:txBody>
-          <a:bodyPr wrap="square" lIns="0" rIns="0" tIns="0" bIns="0">
-            <a:spAutoFit/>
-          </a:bodyPr>
-          <a:lstStyle/>
-          <a:p>
-            <a:pPr algn="l">
-              <a:lnSpc>
-                <a:spcPct val="125000"/>
-              </a:lnSpc>
-            </a:pPr>
-            <a:r>
-              <a:rPr sz="900" b="0">
-                <a:solidFill>
-                  <a:srgbClr val="8B95A7"/>
-                </a:solidFill>
-                <a:latin typeface="맑은 고딕"/>
-              </a:rPr>
-              <a:t>통계 검정</a:t>
-            </a:r>
-          </a:p>
-        </p:txBody>
-      </p:sp>
-      <p:sp>
-        <p:nvSpPr>
-          <p:cNvPr id="30" name="TextBox 29"/>
-          <p:cNvSpPr txBox="1"/>
-          <p:nvPr/>
-        </p:nvSpPr>
-        <p:spPr>
-          <a:xfrm>
-            <a:off x="8686800" y="4709159"/>
-            <a:ext cx="2926080" cy="365760"/>
-          </a:xfrm>
-          <a:prstGeom prst="rect">
-            <a:avLst/>
-          </a:prstGeom>
-          <a:noFill/>
-        </p:spPr>
-        <p:txBody>
-          <a:bodyPr wrap="square" lIns="0" rIns="0" tIns="0" bIns="0">
-            <a:spAutoFit/>
-          </a:bodyPr>
-          <a:lstStyle/>
-          <a:p>
-            <a:pPr algn="l">
-              <a:lnSpc>
-                <a:spcPct val="125000"/>
-              </a:lnSpc>
-            </a:pPr>
-            <a:r>
-              <a:rPr sz="1000" b="1">
+              <a:t>출석 정책이 무작위+비공개일수록 결석 의도가 가장 낮다.</a:t>
+            </a:r>
+          </a:p>
+        </p:txBody>
+      </p:sp>
+      <p:sp>
+        <p:nvSpPr>
+          <p:cNvPr id="24" name="TextBox 23"/>
+          <p:cNvSpPr txBox="1"/>
+          <p:nvPr/>
+        </p:nvSpPr>
+        <p:spPr>
+          <a:xfrm>
+            <a:off x="1828800" y="4974336"/>
+            <a:ext cx="9601200" cy="320040"/>
+          </a:xfrm>
+          <a:prstGeom prst="rect">
+            <a:avLst/>
+          </a:prstGeom>
+          <a:noFill/>
+        </p:spPr>
+        <p:txBody>
+          <a:bodyPr wrap="square" lIns="0" rIns="0" tIns="0" bIns="0">
+            <a:spAutoFit/>
+          </a:bodyPr>
+          <a:lstStyle/>
+          <a:p>
+            <a:pPr algn="l">
+              <a:lnSpc>
+                <a:spcPct val="125000"/>
+              </a:lnSpc>
+            </a:pPr>
+            <a:r>
+              <a:rPr sz="1000" b="0">
                 <a:solidFill>
                   <a:srgbClr val="424B5C"/>
                 </a:solidFill>
                 <a:latin typeface="맑은 고딕"/>
               </a:rPr>
-              <a:t>Within-subjects ANOVA (3 조건)</a:t>
-            </a:r>
-          </a:p>
-        </p:txBody>
-      </p:sp>
-      <p:sp>
-        <p:nvSpPr>
-          <p:cNvPr id="31" name="Rounded Rectangle 30"/>
+              <a:t>💡 우리가 보고 싶은 결과: 결석 의도: 고정 매주월 &gt; 랜덤 빈도공개 &gt; 랜덤 비공개 순서로 감소</a:t>
+            </a:r>
+          </a:p>
+        </p:txBody>
+      </p:sp>
+      <p:sp>
+        <p:nvSpPr>
+          <p:cNvPr id="25" name="Rounded Rectangle 24"/>
           <p:cNvSpPr/>
           <p:nvPr/>
         </p:nvSpPr>
         <p:spPr>
           <a:xfrm>
-            <a:off x="640080" y="5257800"/>
-            <a:ext cx="10881360" cy="914400"/>
+            <a:off x="640080" y="5340096"/>
+            <a:ext cx="10881360" cy="960120"/>
           </a:xfrm>
           <a:prstGeom prst="roundRect">
             <a:avLst>
-              <a:gd name="adj" fmla="val 4000"/>
+              <a:gd name="adj" fmla="val 6000"/>
             </a:avLst>
           </a:prstGeom>
           <a:solidFill>
             <a:srgbClr val="FAFBFC"/>
           </a:solidFill>
-          <a:ln w="12700">
+          <a:ln w="9525">
             <a:solidFill>
               <a:srgbClr val="E5E7EB"/>
             </a:solidFill>
@@ -8707,14 +8403,14 @@
       </p:sp>
       <p:sp>
         <p:nvSpPr>
-          <p:cNvPr id="32" name="Rounded Rectangle 31"/>
+          <p:cNvPr id="26" name="Rounded Rectangle 25"/>
           <p:cNvSpPr/>
           <p:nvPr/>
         </p:nvSpPr>
         <p:spPr>
           <a:xfrm>
-            <a:off x="777240" y="5486400"/>
-            <a:ext cx="548640" cy="457200"/>
+            <a:off x="822960" y="5614416"/>
+            <a:ext cx="777240" cy="411480"/>
           </a:xfrm>
           <a:prstGeom prst="roundRect">
             <a:avLst>
@@ -8752,33 +8448,29 @@
       </p:sp>
       <p:sp>
         <p:nvSpPr>
-          <p:cNvPr id="33" name="TextBox 32"/>
-          <p:cNvSpPr txBox="1"/>
-          <p:nvPr/>
-        </p:nvSpPr>
-        <p:spPr>
-          <a:xfrm>
-            <a:off x="777240" y="5532120"/>
-            <a:ext cx="548640" cy="365760"/>
-          </a:xfrm>
-          <a:prstGeom prst="rect">
-            <a:avLst/>
-          </a:prstGeom>
-          <a:noFill/>
-        </p:spPr>
-        <p:txBody>
-          <a:bodyPr wrap="square" lIns="0" rIns="0" tIns="0" bIns="0">
-            <a:spAutoFit/>
-          </a:bodyPr>
-          <a:lstStyle/>
-          <a:p>
-            <a:pPr algn="ctr">
-              <a:lnSpc>
-                <a:spcPct val="125000"/>
-              </a:lnSpc>
-            </a:pPr>
-            <a:r>
-              <a:rPr sz="1000" b="1">
+          <p:cNvPr id="27" name="TextBox 26"/>
+          <p:cNvSpPr txBox="1"/>
+          <p:nvPr/>
+        </p:nvSpPr>
+        <p:spPr>
+          <a:xfrm>
+            <a:off x="822960" y="5614416"/>
+            <a:ext cx="777240" cy="411480"/>
+          </a:xfrm>
+          <a:prstGeom prst="rect">
+            <a:avLst/>
+          </a:prstGeom>
+          <a:noFill/>
+        </p:spPr>
+        <p:txBody>
+          <a:bodyPr wrap="none" lIns="36576" rIns="36576" tIns="0" bIns="0" anchor="ctr">
+            <a:spAutoFit/>
+          </a:bodyPr>
+          <a:lstStyle/>
+          <a:p>
+            <a:pPr algn="ctr"/>
+            <a:r>
+              <a:rPr sz="1100" b="1">
                 <a:solidFill>
                   <a:srgbClr val="FFFFFF"/>
                 </a:solidFill>
@@ -8791,14 +8483,14 @@
       </p:sp>
       <p:sp>
         <p:nvSpPr>
-          <p:cNvPr id="34" name="TextBox 33"/>
-          <p:cNvSpPr txBox="1"/>
-          <p:nvPr/>
-        </p:nvSpPr>
-        <p:spPr>
-          <a:xfrm>
-            <a:off x="1463040" y="5440680"/>
-            <a:ext cx="1371600" cy="365760"/>
+          <p:cNvPr id="28" name="TextBox 27"/>
+          <p:cNvSpPr txBox="1"/>
+          <p:nvPr/>
+        </p:nvSpPr>
+        <p:spPr>
+          <a:xfrm>
+            <a:off x="1828800" y="5504688"/>
+            <a:ext cx="3657600" cy="320040"/>
           </a:xfrm>
           <a:prstGeom prst="rect">
             <a:avLst/>
@@ -8823,175 +8515,85 @@
                 </a:solidFill>
                 <a:latin typeface="맑은 고딕"/>
               </a:rPr>
-              <a:t>Forgetting</a:t>
-            </a:r>
-          </a:p>
-        </p:txBody>
-      </p:sp>
-      <p:sp>
-        <p:nvSpPr>
-          <p:cNvPr id="35" name="TextBox 34"/>
-          <p:cNvSpPr txBox="1"/>
-          <p:nvPr/>
-        </p:nvSpPr>
-        <p:spPr>
-          <a:xfrm>
-            <a:off x="1463040" y="5760720"/>
-            <a:ext cx="6858000" cy="411480"/>
-          </a:xfrm>
-          <a:prstGeom prst="rect">
-            <a:avLst/>
-          </a:prstGeom>
-          <a:noFill/>
-        </p:spPr>
-        <p:txBody>
-          <a:bodyPr wrap="square" lIns="0" rIns="0" tIns="0" bIns="0">
-            <a:spAutoFit/>
-          </a:bodyPr>
-          <a:lstStyle/>
-          <a:p>
-            <a:pPr algn="l">
-              <a:lnSpc>
-                <a:spcPct val="125000"/>
-              </a:lnSpc>
-            </a:pPr>
-            <a:r>
-              <a:rPr sz="1200" b="0">
+              <a:t>망각 곡선</a:t>
+            </a:r>
+          </a:p>
+        </p:txBody>
+      </p:sp>
+      <p:sp>
+        <p:nvSpPr>
+          <p:cNvPr id="29" name="TextBox 28"/>
+          <p:cNvSpPr txBox="1"/>
+          <p:nvPr/>
+        </p:nvSpPr>
+        <p:spPr>
+          <a:xfrm>
+            <a:off x="1828800" y="5779008"/>
+            <a:ext cx="9601200" cy="365760"/>
+          </a:xfrm>
+          <a:prstGeom prst="rect">
+            <a:avLst/>
+          </a:prstGeom>
+          <a:noFill/>
+        </p:spPr>
+        <p:txBody>
+          <a:bodyPr wrap="square" lIns="0" rIns="0" tIns="0" bIns="0">
+            <a:spAutoFit/>
+          </a:bodyPr>
+          <a:lstStyle/>
+          <a:p>
+            <a:pPr algn="l">
+              <a:lnSpc>
+                <a:spcPct val="125000"/>
+              </a:lnSpc>
+            </a:pPr>
+            <a:r>
+              <a:rPr sz="1200" b="1">
                 <a:solidFill>
                   <a:srgbClr val="0F141F"/>
                 </a:solidFill>
                 <a:latin typeface="맑은 고딕"/>
               </a:rPr>
-              <a:t>단일 기말 체제는 격주 퀴즈 체제보다</a:t>
-            </a:r>
-          </a:p>
-          <a:p>
-            <a:pPr algn="l">
-              <a:lnSpc>
-                <a:spcPct val="125000"/>
-              </a:lnSpc>
-            </a:pPr>
-            <a:r>
-              <a:rPr sz="1200" b="0">
-                <a:solidFill>
-                  <a:srgbClr val="0F141F"/>
-                </a:solidFill>
-                <a:latin typeface="맑은 고딕"/>
-              </a:rPr>
-              <a:t>학기 학습시간 분산이 더 크다 (벼락치기).</a:t>
-            </a:r>
-          </a:p>
-        </p:txBody>
-      </p:sp>
-      <p:cxnSp>
-        <p:nvCxnSpPr>
-          <p:cNvPr id="36" name="Connector 35"/>
-          <p:cNvCxnSpPr/>
-          <p:nvPr/>
-        </p:nvCxnSpPr>
-        <p:spPr>
-          <a:xfrm>
-            <a:off x="8503920" y="5486400"/>
-            <a:ext cx="0" cy="548640"/>
-          </a:xfrm>
-          <a:prstGeom prst="line">
-            <a:avLst/>
-          </a:prstGeom>
-          <a:ln w="19050">
-            <a:solidFill>
-              <a:srgbClr val="E5E7EB"/>
-            </a:solidFill>
-          </a:ln>
-        </p:spPr>
-        <p:style>
-          <a:lnRef idx="2">
-            <a:schemeClr val="accent1"/>
-          </a:lnRef>
-          <a:fillRef idx="0">
-            <a:schemeClr val="accent1"/>
-          </a:fillRef>
-          <a:effectRef idx="1">
-            <a:schemeClr val="accent1"/>
-          </a:effectRef>
-          <a:fontRef idx="minor">
-            <a:schemeClr val="tx1"/>
-          </a:fontRef>
-        </p:style>
-      </p:cxnSp>
-      <p:sp>
-        <p:nvSpPr>
-          <p:cNvPr id="37" name="TextBox 36"/>
-          <p:cNvSpPr txBox="1"/>
-          <p:nvPr/>
-        </p:nvSpPr>
-        <p:spPr>
-          <a:xfrm>
-            <a:off x="8686800" y="5486400"/>
-            <a:ext cx="2926080" cy="320040"/>
-          </a:xfrm>
-          <a:prstGeom prst="rect">
-            <a:avLst/>
-          </a:prstGeom>
-          <a:noFill/>
-        </p:spPr>
-        <p:txBody>
-          <a:bodyPr wrap="square" lIns="0" rIns="0" tIns="0" bIns="0">
-            <a:spAutoFit/>
-          </a:bodyPr>
-          <a:lstStyle/>
-          <a:p>
-            <a:pPr algn="l">
-              <a:lnSpc>
-                <a:spcPct val="125000"/>
-              </a:lnSpc>
-            </a:pPr>
-            <a:r>
-              <a:rPr sz="900" b="0">
-                <a:solidFill>
-                  <a:srgbClr val="8B95A7"/>
-                </a:solidFill>
-                <a:latin typeface="맑은 고딕"/>
-              </a:rPr>
-              <a:t>통계 검정</a:t>
-            </a:r>
-          </a:p>
-        </p:txBody>
-      </p:sp>
-      <p:sp>
-        <p:nvSpPr>
-          <p:cNvPr id="38" name="TextBox 37"/>
-          <p:cNvSpPr txBox="1"/>
-          <p:nvPr/>
-        </p:nvSpPr>
-        <p:spPr>
-          <a:xfrm>
-            <a:off x="8686800" y="5760720"/>
-            <a:ext cx="2926080" cy="365760"/>
-          </a:xfrm>
-          <a:prstGeom prst="rect">
-            <a:avLst/>
-          </a:prstGeom>
-          <a:noFill/>
-        </p:spPr>
-        <p:txBody>
-          <a:bodyPr wrap="square" lIns="0" rIns="0" tIns="0" bIns="0">
-            <a:spAutoFit/>
-          </a:bodyPr>
-          <a:lstStyle/>
-          <a:p>
-            <a:pPr algn="l">
-              <a:lnSpc>
-                <a:spcPct val="125000"/>
-              </a:lnSpc>
-            </a:pPr>
-            <a:r>
-              <a:rPr sz="1000" b="1">
+              <a:t>단일 기말 체제는 격주 퀴즈 체제보다 학습시간 분산이 훨씬 크다.</a:t>
+            </a:r>
+          </a:p>
+        </p:txBody>
+      </p:sp>
+      <p:sp>
+        <p:nvSpPr>
+          <p:cNvPr id="30" name="TextBox 29"/>
+          <p:cNvSpPr txBox="1"/>
+          <p:nvPr/>
+        </p:nvSpPr>
+        <p:spPr>
+          <a:xfrm>
+            <a:off x="1828800" y="6053328"/>
+            <a:ext cx="9601200" cy="320040"/>
+          </a:xfrm>
+          <a:prstGeom prst="rect">
+            <a:avLst/>
+          </a:prstGeom>
+          <a:noFill/>
+        </p:spPr>
+        <p:txBody>
+          <a:bodyPr wrap="square" lIns="0" rIns="0" tIns="0" bIns="0">
+            <a:spAutoFit/>
+          </a:bodyPr>
+          <a:lstStyle/>
+          <a:p>
+            <a:pPr algn="l">
+              <a:lnSpc>
+                <a:spcPct val="125000"/>
+              </a:lnSpc>
+            </a:pPr>
+            <a:r>
+              <a:rPr sz="1000" b="0">
                 <a:solidFill>
                   <a:srgbClr val="424B5C"/>
                 </a:solidFill>
                 <a:latin typeface="맑은 고딕"/>
               </a:rPr>
-              <a:t>F-test 분산 비교</a:t>
+              <a:t>💡 우리가 보고 싶은 결과: 단일 기말: 8주차 5h, 15주차 15h (3배). 격주 퀴즈: 8주차·15주차 ≈ 9h</a:t>
             </a:r>
           </a:p>
         </p:txBody>
@@ -10328,13 +9930,13 @@
           </a:xfrm>
           <a:prstGeom prst="roundRect">
             <a:avLst>
-              <a:gd name="adj" fmla="val 4000"/>
+              <a:gd name="adj" fmla="val 6000"/>
             </a:avLst>
           </a:prstGeom>
           <a:solidFill>
             <a:srgbClr val="FAFBFC"/>
           </a:solidFill>
-          <a:ln w="12700">
+          <a:ln w="9525">
             <a:solidFill>
               <a:srgbClr val="10B981"/>
             </a:solidFill>
@@ -10512,13 +10114,13 @@
           </a:xfrm>
           <a:prstGeom prst="roundRect">
             <a:avLst>
-              <a:gd name="adj" fmla="val 4000"/>
+              <a:gd name="adj" fmla="val 6000"/>
             </a:avLst>
           </a:prstGeom>
           <a:solidFill>
             <a:srgbClr val="FAFBFC"/>
           </a:solidFill>
-          <a:ln w="12700">
+          <a:ln w="9525">
             <a:solidFill>
               <a:srgbClr val="4F46E5"/>
             </a:solidFill>
@@ -10696,13 +10298,13 @@
           </a:xfrm>
           <a:prstGeom prst="roundRect">
             <a:avLst>
-              <a:gd name="adj" fmla="val 4000"/>
+              <a:gd name="adj" fmla="val 6000"/>
             </a:avLst>
           </a:prstGeom>
           <a:solidFill>
             <a:srgbClr val="FAFBFC"/>
           </a:solidFill>
-          <a:ln w="12700">
+          <a:ln w="9525">
             <a:solidFill>
               <a:srgbClr val="F59E0B"/>
             </a:solidFill>
@@ -10880,13 +10482,13 @@
           </a:xfrm>
           <a:prstGeom prst="roundRect">
             <a:avLst>
-              <a:gd name="adj" fmla="val 4000"/>
+              <a:gd name="adj" fmla="val 6000"/>
             </a:avLst>
           </a:prstGeom>
           <a:solidFill>
             <a:srgbClr val="FAFBFC"/>
           </a:solidFill>
-          <a:ln w="12700">
+          <a:ln w="9525">
             <a:solidFill>
               <a:srgbClr val="EC4899"/>
             </a:solidFill>
@@ -11777,25 +11379,21 @@
         </p:nvSpPr>
         <p:spPr>
           <a:xfrm>
-            <a:off x="640080" y="2926079"/>
-            <a:ext cx="548640" cy="320040"/>
-          </a:xfrm>
-          <a:prstGeom prst="rect">
-            <a:avLst/>
-          </a:prstGeom>
-          <a:noFill/>
-        </p:spPr>
-        <p:txBody>
-          <a:bodyPr wrap="square" lIns="0" rIns="0" tIns="0" bIns="0">
-            <a:spAutoFit/>
-          </a:bodyPr>
-          <a:lstStyle/>
-          <a:p>
-            <a:pPr algn="ctr">
-              <a:lnSpc>
-                <a:spcPct val="125000"/>
-              </a:lnSpc>
-            </a:pPr>
+            <a:off x="640080" y="2880360"/>
+            <a:ext cx="548640" cy="411480"/>
+          </a:xfrm>
+          <a:prstGeom prst="rect">
+            <a:avLst/>
+          </a:prstGeom>
+          <a:noFill/>
+        </p:spPr>
+        <p:txBody>
+          <a:bodyPr wrap="none" lIns="36576" rIns="36576" tIns="0" bIns="0" anchor="ctr">
+            <a:spAutoFit/>
+          </a:bodyPr>
+          <a:lstStyle/>
+          <a:p>
+            <a:pPr algn="ctr"/>
             <a:r>
               <a:rPr sz="1000" b="1">
                 <a:solidFill>
@@ -12013,25 +11611,21 @@
         </p:nvSpPr>
         <p:spPr>
           <a:xfrm>
-            <a:off x="640080" y="4023359"/>
-            <a:ext cx="548640" cy="320040"/>
-          </a:xfrm>
-          <a:prstGeom prst="rect">
-            <a:avLst/>
-          </a:prstGeom>
-          <a:noFill/>
-        </p:spPr>
-        <p:txBody>
-          <a:bodyPr wrap="square" lIns="0" rIns="0" tIns="0" bIns="0">
-            <a:spAutoFit/>
-          </a:bodyPr>
-          <a:lstStyle/>
-          <a:p>
-            <a:pPr algn="ctr">
-              <a:lnSpc>
-                <a:spcPct val="125000"/>
-              </a:lnSpc>
-            </a:pPr>
+            <a:off x="640080" y="3977639"/>
+            <a:ext cx="548640" cy="411480"/>
+          </a:xfrm>
+          <a:prstGeom prst="rect">
+            <a:avLst/>
+          </a:prstGeom>
+          <a:noFill/>
+        </p:spPr>
+        <p:txBody>
+          <a:bodyPr wrap="none" lIns="36576" rIns="36576" tIns="0" bIns="0" anchor="ctr">
+            <a:spAutoFit/>
+          </a:bodyPr>
+          <a:lstStyle/>
+          <a:p>
+            <a:pPr algn="ctr"/>
             <a:r>
               <a:rPr sz="1000" b="1">
                 <a:solidFill>
@@ -12249,25 +11843,21 @@
         </p:nvSpPr>
         <p:spPr>
           <a:xfrm>
-            <a:off x="640080" y="5120640"/>
-            <a:ext cx="548640" cy="320040"/>
-          </a:xfrm>
-          <a:prstGeom prst="rect">
-            <a:avLst/>
-          </a:prstGeom>
-          <a:noFill/>
-        </p:spPr>
-        <p:txBody>
-          <a:bodyPr wrap="square" lIns="0" rIns="0" tIns="0" bIns="0">
-            <a:spAutoFit/>
-          </a:bodyPr>
-          <a:lstStyle/>
-          <a:p>
-            <a:pPr algn="ctr">
-              <a:lnSpc>
-                <a:spcPct val="125000"/>
-              </a:lnSpc>
-            </a:pPr>
+            <a:off x="640080" y="5074920"/>
+            <a:ext cx="548640" cy="411480"/>
+          </a:xfrm>
+          <a:prstGeom prst="rect">
+            <a:avLst/>
+          </a:prstGeom>
+          <a:noFill/>
+        </p:spPr>
+        <p:txBody>
+          <a:bodyPr wrap="none" lIns="36576" rIns="36576" tIns="0" bIns="0" anchor="ctr">
+            <a:spAutoFit/>
+          </a:bodyPr>
+          <a:lstStyle/>
+          <a:p>
+            <a:pPr algn="ctr"/>
             <a:r>
               <a:rPr sz="1000" b="1">
                 <a:solidFill>
@@ -12744,13 +12334,13 @@
           </a:xfrm>
           <a:prstGeom prst="roundRect">
             <a:avLst>
-              <a:gd name="adj" fmla="val 4000"/>
+              <a:gd name="adj" fmla="val 6000"/>
             </a:avLst>
           </a:prstGeom>
           <a:solidFill>
             <a:srgbClr val="ECFDF5"/>
           </a:solidFill>
-          <a:ln w="12700">
+          <a:ln w="9525">
             <a:solidFill>
               <a:srgbClr val="10B981"/>
             </a:solidFill>
@@ -13084,13 +12674,13 @@
           </a:xfrm>
           <a:prstGeom prst="roundRect">
             <a:avLst>
-              <a:gd name="adj" fmla="val 4000"/>
+              <a:gd name="adj" fmla="val 6000"/>
             </a:avLst>
           </a:prstGeom>
           <a:solidFill>
             <a:srgbClr val="FDE8F5"/>
           </a:solidFill>
-          <a:ln w="12700">
+          <a:ln w="9525">
             <a:solidFill>
               <a:srgbClr val="EC4899"/>
             </a:solidFill>
@@ -13672,13 +13262,13 @@
           </a:xfrm>
           <a:prstGeom prst="roundRect">
             <a:avLst>
-              <a:gd name="adj" fmla="val 4000"/>
+              <a:gd name="adj" fmla="val 6000"/>
             </a:avLst>
           </a:prstGeom>
           <a:solidFill>
             <a:srgbClr val="FAFBFC"/>
           </a:solidFill>
-          <a:ln w="12700">
+          <a:ln w="9525">
             <a:solidFill>
               <a:srgbClr val="E5E7EB"/>
             </a:solidFill>
@@ -13836,13 +13426,13 @@
           </a:xfrm>
           <a:prstGeom prst="roundRect">
             <a:avLst>
-              <a:gd name="adj" fmla="val 4000"/>
+              <a:gd name="adj" fmla="val 6000"/>
             </a:avLst>
           </a:prstGeom>
           <a:solidFill>
             <a:srgbClr val="FAFBFC"/>
           </a:solidFill>
-          <a:ln w="12700">
+          <a:ln w="9525">
             <a:solidFill>
               <a:srgbClr val="E5E7EB"/>
             </a:solidFill>
@@ -14000,13 +13590,13 @@
           </a:xfrm>
           <a:prstGeom prst="roundRect">
             <a:avLst>
-              <a:gd name="adj" fmla="val 4000"/>
+              <a:gd name="adj" fmla="val 6000"/>
             </a:avLst>
           </a:prstGeom>
           <a:solidFill>
             <a:srgbClr val="FAFBFC"/>
           </a:solidFill>
-          <a:ln w="12700">
+          <a:ln w="9525">
             <a:solidFill>
               <a:srgbClr val="E5E7EB"/>
             </a:solidFill>
@@ -15327,13 +14917,13 @@
           </a:xfrm>
           <a:prstGeom prst="roundRect">
             <a:avLst>
-              <a:gd name="adj" fmla="val 4000"/>
+              <a:gd name="adj" fmla="val 6000"/>
             </a:avLst>
           </a:prstGeom>
           <a:solidFill>
             <a:srgbClr val="FAFBFC"/>
           </a:solidFill>
-          <a:ln w="12700">
+          <a:ln w="9525">
             <a:solidFill>
               <a:srgbClr val="E5E7EB"/>
             </a:solidFill>
@@ -15702,13 +15292,13 @@
           </a:xfrm>
           <a:prstGeom prst="roundRect">
             <a:avLst>
-              <a:gd name="adj" fmla="val 4000"/>
+              <a:gd name="adj" fmla="val 6000"/>
             </a:avLst>
           </a:prstGeom>
           <a:solidFill>
             <a:srgbClr val="FAFBFC"/>
           </a:solidFill>
-          <a:ln w="12700">
+          <a:ln w="9525">
             <a:solidFill>
               <a:srgbClr val="E5E7EB"/>
             </a:solidFill>
@@ -16368,13 +15958,13 @@
           </a:xfrm>
           <a:prstGeom prst="roundRect">
             <a:avLst>
-              <a:gd name="adj" fmla="val 4000"/>
+              <a:gd name="adj" fmla="val 6000"/>
             </a:avLst>
           </a:prstGeom>
           <a:solidFill>
             <a:srgbClr val="FAFBFC"/>
           </a:solidFill>
-          <a:ln w="12700">
+          <a:ln w="9525">
             <a:solidFill>
               <a:srgbClr val="E5E7EB"/>
             </a:solidFill>
@@ -16455,25 +16045,21 @@
         </p:nvSpPr>
         <p:spPr>
           <a:xfrm>
-            <a:off x="822959" y="2880360"/>
-            <a:ext cx="457200" cy="274320"/>
-          </a:xfrm>
-          <a:prstGeom prst="rect">
-            <a:avLst/>
-          </a:prstGeom>
-          <a:noFill/>
-        </p:spPr>
-        <p:txBody>
-          <a:bodyPr wrap="square" lIns="0" rIns="0" tIns="0" bIns="0">
-            <a:spAutoFit/>
-          </a:bodyPr>
-          <a:lstStyle/>
-          <a:p>
-            <a:pPr algn="ctr">
-              <a:lnSpc>
-                <a:spcPct val="125000"/>
-              </a:lnSpc>
-            </a:pPr>
+            <a:off x="822959" y="2834640"/>
+            <a:ext cx="457200" cy="365760"/>
+          </a:xfrm>
+          <a:prstGeom prst="rect">
+            <a:avLst/>
+          </a:prstGeom>
+          <a:noFill/>
+        </p:spPr>
+        <p:txBody>
+          <a:bodyPr wrap="none" lIns="36576" rIns="36576" tIns="0" bIns="0" anchor="ctr">
+            <a:spAutoFit/>
+          </a:bodyPr>
+          <a:lstStyle/>
+          <a:p>
+            <a:pPr algn="ctr"/>
             <a:r>
               <a:rPr sz="1000" b="1">
                 <a:solidFill>
@@ -16803,13 +16389,13 @@
           </a:xfrm>
           <a:prstGeom prst="roundRect">
             <a:avLst>
-              <a:gd name="adj" fmla="val 4000"/>
+              <a:gd name="adj" fmla="val 6000"/>
             </a:avLst>
           </a:prstGeom>
           <a:solidFill>
             <a:srgbClr val="FAFBFC"/>
           </a:solidFill>
-          <a:ln w="12700">
+          <a:ln w="9525">
             <a:solidFill>
               <a:srgbClr val="E5E7EB"/>
             </a:solidFill>
@@ -16890,25 +16476,21 @@
         </p:nvSpPr>
         <p:spPr>
           <a:xfrm>
-            <a:off x="4572000" y="2880360"/>
-            <a:ext cx="457200" cy="274320"/>
-          </a:xfrm>
-          <a:prstGeom prst="rect">
-            <a:avLst/>
-          </a:prstGeom>
-          <a:noFill/>
-        </p:spPr>
-        <p:txBody>
-          <a:bodyPr wrap="square" lIns="0" rIns="0" tIns="0" bIns="0">
-            <a:spAutoFit/>
-          </a:bodyPr>
-          <a:lstStyle/>
-          <a:p>
-            <a:pPr algn="ctr">
-              <a:lnSpc>
-                <a:spcPct val="125000"/>
-              </a:lnSpc>
-            </a:pPr>
+            <a:off x="4572000" y="2834640"/>
+            <a:ext cx="457200" cy="365760"/>
+          </a:xfrm>
+          <a:prstGeom prst="rect">
+            <a:avLst/>
+          </a:prstGeom>
+          <a:noFill/>
+        </p:spPr>
+        <p:txBody>
+          <a:bodyPr wrap="none" lIns="36576" rIns="36576" tIns="0" bIns="0" anchor="ctr">
+            <a:spAutoFit/>
+          </a:bodyPr>
+          <a:lstStyle/>
+          <a:p>
+            <a:pPr algn="ctr"/>
             <a:r>
               <a:rPr sz="1000" b="1">
                 <a:solidFill>
@@ -17238,13 +16820,13 @@
           </a:xfrm>
           <a:prstGeom prst="roundRect">
             <a:avLst>
-              <a:gd name="adj" fmla="val 4000"/>
+              <a:gd name="adj" fmla="val 6000"/>
             </a:avLst>
           </a:prstGeom>
           <a:solidFill>
             <a:srgbClr val="FAFBFC"/>
           </a:solidFill>
-          <a:ln w="12700">
+          <a:ln w="9525">
             <a:solidFill>
               <a:srgbClr val="E5E7EB"/>
             </a:solidFill>
@@ -17325,25 +16907,21 @@
         </p:nvSpPr>
         <p:spPr>
           <a:xfrm>
-            <a:off x="8321039" y="2880360"/>
-            <a:ext cx="457200" cy="274320"/>
-          </a:xfrm>
-          <a:prstGeom prst="rect">
-            <a:avLst/>
-          </a:prstGeom>
-          <a:noFill/>
-        </p:spPr>
-        <p:txBody>
-          <a:bodyPr wrap="square" lIns="0" rIns="0" tIns="0" bIns="0">
-            <a:spAutoFit/>
-          </a:bodyPr>
-          <a:lstStyle/>
-          <a:p>
-            <a:pPr algn="ctr">
-              <a:lnSpc>
-                <a:spcPct val="125000"/>
-              </a:lnSpc>
-            </a:pPr>
+            <a:off x="8321039" y="2834640"/>
+            <a:ext cx="457200" cy="365760"/>
+          </a:xfrm>
+          <a:prstGeom prst="rect">
+            <a:avLst/>
+          </a:prstGeom>
+          <a:noFill/>
+        </p:spPr>
+        <p:txBody>
+          <a:bodyPr wrap="none" lIns="36576" rIns="36576" tIns="0" bIns="0" anchor="ctr">
+            <a:spAutoFit/>
+          </a:bodyPr>
+          <a:lstStyle/>
+          <a:p>
+            <a:pPr algn="ctr"/>
             <a:r>
               <a:rPr sz="1000" b="1">
                 <a:solidFill>
@@ -17755,7 +17333,7 @@
                 </a:solidFill>
                 <a:latin typeface="맑은 고딕"/>
               </a:rPr>
-              <a:t>T2 · SIMULATION</a:t>
+              <a:t>T2 · 컴퓨터 시뮬레이션</a:t>
             </a:r>
           </a:p>
         </p:txBody>
@@ -17794,7 +17372,7 @@
                 </a:solidFill>
                 <a:latin typeface="맑은 고딕"/>
               </a:rPr>
-              <a:t>다중 에이전트 시뮬 — 분포 효과까지 보기</a:t>
+              <a:t>가상 학생 1000명을 만들어 "약한 학생도 보호되는지" 본다</a:t>
             </a:r>
           </a:p>
         </p:txBody>
@@ -17868,7 +17446,7 @@
                 </a:solidFill>
                 <a:latin typeface="맑은 고딕"/>
               </a:rPr>
-              <a:t>12</a:t>
+              <a:t>22</a:t>
             </a:r>
           </a:p>
         </p:txBody>
@@ -17881,7 +17459,120 @@
         </p:nvSpPr>
         <p:spPr>
           <a:xfrm>
-            <a:off x="640080" y="2194560"/>
+            <a:off x="640080" y="2103120"/>
+            <a:ext cx="10972800" cy="411480"/>
+          </a:xfrm>
+          <a:prstGeom prst="rect">
+            <a:avLst/>
+          </a:prstGeom>
+          <a:noFill/>
+        </p:spPr>
+        <p:txBody>
+          <a:bodyPr wrap="square" lIns="0" rIns="0" tIns="0" bIns="0">
+            <a:spAutoFit/>
+          </a:bodyPr>
+          <a:lstStyle/>
+          <a:p>
+            <a:pPr algn="l">
+              <a:lnSpc>
+                <a:spcPct val="125000"/>
+              </a:lnSpc>
+            </a:pPr>
+            <a:r>
+              <a:rPr sz="1500" b="1">
+                <a:solidFill>
+                  <a:srgbClr val="0F141F"/>
+                </a:solidFill>
+                <a:latin typeface="맑은 고딕"/>
+              </a:rPr>
+              <a:t>왜 1000명이나? 평균만 보면 가려지는 진실이 있다.</a:t>
+            </a:r>
+          </a:p>
+        </p:txBody>
+      </p:sp>
+      <p:sp>
+        <p:nvSpPr>
+          <p:cNvPr id="8" name="TextBox 7"/>
+          <p:cNvSpPr txBox="1"/>
+          <p:nvPr/>
+        </p:nvSpPr>
+        <p:spPr>
+          <a:xfrm>
+            <a:off x="640080" y="2560320"/>
+            <a:ext cx="10972800" cy="411480"/>
+          </a:xfrm>
+          <a:prstGeom prst="rect">
+            <a:avLst/>
+          </a:prstGeom>
+          <a:noFill/>
+        </p:spPr>
+        <p:txBody>
+          <a:bodyPr wrap="square" lIns="0" rIns="0" tIns="0" bIns="0">
+            <a:spAutoFit/>
+          </a:bodyPr>
+          <a:lstStyle/>
+          <a:p>
+            <a:pPr algn="l">
+              <a:lnSpc>
+                <a:spcPct val="125000"/>
+              </a:lnSpc>
+            </a:pPr>
+            <a:r>
+              <a:rPr sz="1300" b="0">
+                <a:solidFill>
+                  <a:srgbClr val="424B5C"/>
+                </a:solidFill>
+                <a:latin typeface="맑은 고딕"/>
+              </a:rPr>
+              <a:t>예: "평균 출석률 80%"라고 해도, 학습률 낮은 학생은 30%일 수 있음.</a:t>
+            </a:r>
+          </a:p>
+        </p:txBody>
+      </p:sp>
+      <p:cxnSp>
+        <p:nvCxnSpPr>
+          <p:cNvPr id="9" name="Connector 8"/>
+          <p:cNvCxnSpPr/>
+          <p:nvPr/>
+        </p:nvCxnSpPr>
+        <p:spPr>
+          <a:xfrm>
+            <a:off x="640080" y="3291840"/>
+            <a:ext cx="10881360" cy="0"/>
+          </a:xfrm>
+          <a:prstGeom prst="line">
+            <a:avLst/>
+          </a:prstGeom>
+          <a:ln w="19050">
+            <a:solidFill>
+              <a:srgbClr val="E5E7EB"/>
+            </a:solidFill>
+          </a:ln>
+        </p:spPr>
+        <p:style>
+          <a:lnRef idx="2">
+            <a:schemeClr val="accent1"/>
+          </a:lnRef>
+          <a:fillRef idx="0">
+            <a:schemeClr val="accent1"/>
+          </a:fillRef>
+          <a:effectRef idx="1">
+            <a:schemeClr val="accent1"/>
+          </a:effectRef>
+          <a:fontRef idx="minor">
+            <a:schemeClr val="tx1"/>
+          </a:fontRef>
+        </p:style>
+      </p:cxnSp>
+      <p:sp>
+        <p:nvSpPr>
+          <p:cNvPr id="10" name="TextBox 9"/>
+          <p:cNvSpPr txBox="1"/>
+          <p:nvPr/>
+        </p:nvSpPr>
+        <p:spPr>
+          <a:xfrm>
+            <a:off x="640080" y="3429000"/>
             <a:ext cx="10972800" cy="365760"/>
           </a:xfrm>
           <a:prstGeom prst="rect">
@@ -17901,37 +17592,37 @@
               </a:lnSpc>
             </a:pPr>
             <a:r>
-              <a:rPr sz="1200" b="0">
-                <a:solidFill>
-                  <a:srgbClr val="8B95A7"/>
-                </a:solidFill>
-                <a:latin typeface="맑은 고딕"/>
-              </a:rPr>
-              <a:t>개인과제는 학생 1명 평균 모델 → 팀과제는 N=1000 학생 분포 모델로 확장</a:t>
-            </a:r>
-          </a:p>
-        </p:txBody>
-      </p:sp>
-      <p:sp>
-        <p:nvSpPr>
-          <p:cNvPr id="8" name="Rounded Rectangle 7"/>
+              <a:rPr sz="1100" b="1">
+                <a:solidFill>
+                  <a:srgbClr val="4F46E5"/>
+                </a:solidFill>
+                <a:latin typeface="맑은 고딕"/>
+              </a:rPr>
+              <a:t>개인과제 → 팀과제 확장</a:t>
+            </a:r>
+          </a:p>
+        </p:txBody>
+      </p:sp>
+      <p:sp>
+        <p:nvSpPr>
+          <p:cNvPr id="11" name="Rounded Rectangle 10"/>
           <p:cNvSpPr/>
           <p:nvPr/>
         </p:nvSpPr>
         <p:spPr>
           <a:xfrm>
-            <a:off x="640080" y="2697480"/>
-            <a:ext cx="5669280" cy="3657600"/>
+            <a:off x="640080" y="3840480"/>
+            <a:ext cx="5440680" cy="2377440"/>
           </a:xfrm>
           <a:prstGeom prst="roundRect">
             <a:avLst>
-              <a:gd name="adj" fmla="val 4000"/>
+              <a:gd name="adj" fmla="val 6000"/>
             </a:avLst>
           </a:prstGeom>
           <a:solidFill>
             <a:srgbClr val="FAFBFC"/>
           </a:solidFill>
-          <a:ln w="12700">
+          <a:ln w="9525">
             <a:solidFill>
               <a:srgbClr val="E5E7EB"/>
             </a:solidFill>
@@ -17961,14 +17652,14 @@
       </p:sp>
       <p:sp>
         <p:nvSpPr>
-          <p:cNvPr id="9" name="TextBox 8"/>
-          <p:cNvSpPr txBox="1"/>
-          <p:nvPr/>
-        </p:nvSpPr>
-        <p:spPr>
-          <a:xfrm>
-            <a:off x="868680" y="2834640"/>
-            <a:ext cx="5486400" cy="365760"/>
+          <p:cNvPr id="12" name="TextBox 11"/>
+          <p:cNvSpPr txBox="1"/>
+          <p:nvPr/>
+        </p:nvSpPr>
+        <p:spPr>
+          <a:xfrm>
+            <a:off x="868680" y="3977639"/>
+            <a:ext cx="5029200" cy="365760"/>
           </a:xfrm>
           <a:prstGeom prst="rect">
             <a:avLst/>
@@ -17989,79 +17680,95 @@
             <a:r>
               <a:rPr sz="1200" b="1">
                 <a:solidFill>
-                  <a:srgbClr val="4F46E5"/>
-                </a:solidFill>
-                <a:latin typeface="맑은 고딕"/>
-              </a:rPr>
-              <a:t>확장 비교</a:t>
-            </a:r>
-          </a:p>
-        </p:txBody>
-      </p:sp>
-      <p:sp>
-        <p:nvSpPr>
-          <p:cNvPr id="10" name="TextBox 9"/>
-          <p:cNvSpPr txBox="1"/>
-          <p:nvPr/>
-        </p:nvSpPr>
-        <p:spPr>
-          <a:xfrm>
-            <a:off x="868680" y="3291840"/>
-            <a:ext cx="1645920" cy="365760"/>
-          </a:xfrm>
-          <a:prstGeom prst="rect">
-            <a:avLst/>
-          </a:prstGeom>
-          <a:noFill/>
-        </p:spPr>
-        <p:txBody>
-          <a:bodyPr wrap="square" lIns="0" rIns="0" tIns="0" bIns="0">
-            <a:spAutoFit/>
-          </a:bodyPr>
-          <a:lstStyle/>
-          <a:p>
-            <a:pPr algn="l">
-              <a:lnSpc>
-                <a:spcPct val="125000"/>
+                  <a:srgbClr val="8B95A7"/>
+                </a:solidFill>
+                <a:latin typeface="맑은 고딕"/>
+              </a:rPr>
+              <a:t>개인과제 (현재)</a:t>
+            </a:r>
+          </a:p>
+        </p:txBody>
+      </p:sp>
+      <p:sp>
+        <p:nvSpPr>
+          <p:cNvPr id="13" name="TextBox 12"/>
+          <p:cNvSpPr txBox="1"/>
+          <p:nvPr/>
+        </p:nvSpPr>
+        <p:spPr>
+          <a:xfrm>
+            <a:off x="868680" y="4389120"/>
+            <a:ext cx="5029200" cy="457200"/>
+          </a:xfrm>
+          <a:prstGeom prst="rect">
+            <a:avLst/>
+          </a:prstGeom>
+          <a:noFill/>
+        </p:spPr>
+        <p:txBody>
+          <a:bodyPr wrap="square" lIns="0" rIns="0" tIns="0" bIns="0">
+            <a:spAutoFit/>
+          </a:bodyPr>
+          <a:lstStyle/>
+          <a:p>
+            <a:pPr algn="l">
+              <a:lnSpc>
+                <a:spcPct val="125000"/>
+              </a:lnSpc>
+            </a:pPr>
+            <a:r>
+              <a:rPr sz="1800" b="1">
+                <a:solidFill>
+                  <a:srgbClr val="0F141F"/>
+                </a:solidFill>
+                <a:latin typeface="맑은 고딕"/>
+              </a:rPr>
+              <a:t>학생 1명 평균만</a:t>
+            </a:r>
+          </a:p>
+        </p:txBody>
+      </p:sp>
+      <p:sp>
+        <p:nvSpPr>
+          <p:cNvPr id="14" name="TextBox 13"/>
+          <p:cNvSpPr txBox="1"/>
+          <p:nvPr/>
+        </p:nvSpPr>
+        <p:spPr>
+          <a:xfrm>
+            <a:off x="868680" y="4937760"/>
+            <a:ext cx="5029200" cy="1188720"/>
+          </a:xfrm>
+          <a:prstGeom prst="rect">
+            <a:avLst/>
+          </a:prstGeom>
+          <a:noFill/>
+        </p:spPr>
+        <p:txBody>
+          <a:bodyPr wrap="square" lIns="0" rIns="0" tIns="0" bIns="0">
+            <a:spAutoFit/>
+          </a:bodyPr>
+          <a:lstStyle/>
+          <a:p>
+            <a:pPr algn="l">
+              <a:lnSpc>
+                <a:spcPct val="140000"/>
               </a:lnSpc>
             </a:pPr>
             <a:r>
               <a:rPr sz="1100" b="0">
                 <a:solidFill>
-                  <a:srgbClr val="8B95A7"/>
-                </a:solidFill>
-                <a:latin typeface="맑은 고딕"/>
-              </a:rPr>
-              <a:t>학생 수</a:t>
-            </a:r>
-          </a:p>
-        </p:txBody>
-      </p:sp>
-      <p:sp>
-        <p:nvSpPr>
-          <p:cNvPr id="11" name="TextBox 10"/>
-          <p:cNvSpPr txBox="1"/>
-          <p:nvPr/>
-        </p:nvSpPr>
-        <p:spPr>
-          <a:xfrm>
-            <a:off x="2468880" y="3291840"/>
-            <a:ext cx="1828800" cy="365760"/>
-          </a:xfrm>
-          <a:prstGeom prst="rect">
-            <a:avLst/>
-          </a:prstGeom>
-          <a:noFill/>
-        </p:spPr>
-        <p:txBody>
-          <a:bodyPr wrap="square" lIns="0" rIns="0" tIns="0" bIns="0">
-            <a:spAutoFit/>
-          </a:bodyPr>
-          <a:lstStyle/>
-          <a:p>
-            <a:pPr algn="l">
-              <a:lnSpc>
-                <a:spcPct val="125000"/>
+                  <a:srgbClr val="424B5C"/>
+                </a:solidFill>
+                <a:latin typeface="맑은 고딕"/>
+              </a:rPr>
+              <a:t>모든 학생이 똑같이 학습률 0.15,</a:t>
+            </a:r>
+          </a:p>
+          <a:p>
+            <a:pPr algn="l">
+              <a:lnSpc>
+                <a:spcPct val="140000"/>
               </a:lnSpc>
             </a:pPr>
             <a:r>
@@ -18071,657 +17778,49 @@
                 </a:solidFill>
                 <a:latin typeface="맑은 고딕"/>
               </a:rPr>
-              <a:t>1명 (평균)</a:t>
-            </a:r>
-          </a:p>
-        </p:txBody>
-      </p:sp>
-      <p:sp>
-        <p:nvSpPr>
-          <p:cNvPr id="12" name="TextBox 11"/>
-          <p:cNvSpPr txBox="1"/>
-          <p:nvPr/>
-        </p:nvSpPr>
-        <p:spPr>
-          <a:xfrm>
-            <a:off x="4297680" y="3291840"/>
-            <a:ext cx="2011680" cy="365760"/>
-          </a:xfrm>
-          <a:prstGeom prst="rect">
-            <a:avLst/>
-          </a:prstGeom>
-          <a:noFill/>
-        </p:spPr>
-        <p:txBody>
-          <a:bodyPr wrap="square" lIns="0" rIns="0" tIns="0" bIns="0">
-            <a:spAutoFit/>
-          </a:bodyPr>
-          <a:lstStyle/>
-          <a:p>
-            <a:pPr algn="l">
-              <a:lnSpc>
-                <a:spcPct val="125000"/>
-              </a:lnSpc>
-            </a:pPr>
-            <a:r>
-              <a:rPr sz="1100" b="1">
-                <a:solidFill>
-                  <a:srgbClr val="4F46E5"/>
-                </a:solidFill>
-                <a:latin typeface="맑은 고딕"/>
-              </a:rPr>
-              <a:t>→ N = 1000</a:t>
-            </a:r>
-          </a:p>
-        </p:txBody>
-      </p:sp>
-      <p:sp>
-        <p:nvSpPr>
-          <p:cNvPr id="13" name="TextBox 12"/>
-          <p:cNvSpPr txBox="1"/>
-          <p:nvPr/>
-        </p:nvSpPr>
-        <p:spPr>
-          <a:xfrm>
-            <a:off x="868680" y="3749039"/>
-            <a:ext cx="1645920" cy="365760"/>
-          </a:xfrm>
-          <a:prstGeom prst="rect">
-            <a:avLst/>
-          </a:prstGeom>
-          <a:noFill/>
-        </p:spPr>
-        <p:txBody>
-          <a:bodyPr wrap="square" lIns="0" rIns="0" tIns="0" bIns="0">
-            <a:spAutoFit/>
-          </a:bodyPr>
-          <a:lstStyle/>
-          <a:p>
-            <a:pPr algn="l">
-              <a:lnSpc>
-                <a:spcPct val="125000"/>
+              <a:t>작업 기억 7개라고 가정.</a:t>
+            </a:r>
+          </a:p>
+          <a:p>
+            <a:pPr algn="l">
+              <a:lnSpc>
+                <a:spcPct val="140000"/>
               </a:lnSpc>
             </a:pPr>
             <a:r>
               <a:rPr sz="1100" b="0">
                 <a:solidFill>
-                  <a:srgbClr val="8B95A7"/>
-                </a:solidFill>
-                <a:latin typeface="맑은 고딕"/>
-              </a:rPr>
-              <a:t>학습률 α</a:t>
-            </a:r>
-          </a:p>
-        </p:txBody>
-      </p:sp>
-      <p:sp>
-        <p:nvSpPr>
-          <p:cNvPr id="14" name="TextBox 13"/>
-          <p:cNvSpPr txBox="1"/>
-          <p:nvPr/>
-        </p:nvSpPr>
-        <p:spPr>
-          <a:xfrm>
-            <a:off x="2468880" y="3749039"/>
-            <a:ext cx="1828800" cy="365760"/>
-          </a:xfrm>
-          <a:prstGeom prst="rect">
-            <a:avLst/>
-          </a:prstGeom>
-          <a:noFill/>
-        </p:spPr>
-        <p:txBody>
-          <a:bodyPr wrap="square" lIns="0" rIns="0" tIns="0" bIns="0">
-            <a:spAutoFit/>
-          </a:bodyPr>
-          <a:lstStyle/>
-          <a:p>
-            <a:pPr algn="l">
-              <a:lnSpc>
-                <a:spcPct val="125000"/>
-              </a:lnSpc>
-            </a:pPr>
-            <a:r>
-              <a:rPr sz="1100" b="0">
-                <a:solidFill>
                   <a:srgbClr val="424B5C"/>
                 </a:solidFill>
                 <a:latin typeface="맑은 고딕"/>
               </a:rPr>
-              <a:t>0.15 고정</a:t>
-            </a:r>
-          </a:p>
-        </p:txBody>
-      </p:sp>
-      <p:sp>
-        <p:nvSpPr>
-          <p:cNvPr id="15" name="TextBox 14"/>
-          <p:cNvSpPr txBox="1"/>
-          <p:nvPr/>
-        </p:nvSpPr>
-        <p:spPr>
-          <a:xfrm>
-            <a:off x="4297680" y="3749039"/>
-            <a:ext cx="2011680" cy="365760"/>
-          </a:xfrm>
-          <a:prstGeom prst="rect">
-            <a:avLst/>
-          </a:prstGeom>
-          <a:noFill/>
-        </p:spPr>
-        <p:txBody>
-          <a:bodyPr wrap="square" lIns="0" rIns="0" tIns="0" bIns="0">
-            <a:spAutoFit/>
-          </a:bodyPr>
-          <a:lstStyle/>
-          <a:p>
-            <a:pPr algn="l">
-              <a:lnSpc>
-                <a:spcPct val="125000"/>
-              </a:lnSpc>
-            </a:pPr>
-            <a:r>
-              <a:rPr sz="1100" b="1">
-                <a:solidFill>
-                  <a:srgbClr val="4F46E5"/>
-                </a:solidFill>
-                <a:latin typeface="맑은 고딕"/>
-              </a:rPr>
-              <a:t>→ N(0.15, 0.05)</a:t>
-            </a:r>
-          </a:p>
-        </p:txBody>
-      </p:sp>
-      <p:sp>
-        <p:nvSpPr>
-          <p:cNvPr id="16" name="TextBox 15"/>
-          <p:cNvSpPr txBox="1"/>
-          <p:nvPr/>
-        </p:nvSpPr>
-        <p:spPr>
-          <a:xfrm>
-            <a:off x="868680" y="4206240"/>
-            <a:ext cx="1645920" cy="365760"/>
-          </a:xfrm>
-          <a:prstGeom prst="rect">
-            <a:avLst/>
-          </a:prstGeom>
-          <a:noFill/>
-        </p:spPr>
-        <p:txBody>
-          <a:bodyPr wrap="square" lIns="0" rIns="0" tIns="0" bIns="0">
-            <a:spAutoFit/>
-          </a:bodyPr>
-          <a:lstStyle/>
-          <a:p>
-            <a:pPr algn="l">
-              <a:lnSpc>
-                <a:spcPct val="125000"/>
-              </a:lnSpc>
-            </a:pPr>
-            <a:r>
-              <a:rPr sz="1100" b="0">
-                <a:solidFill>
-                  <a:srgbClr val="8B95A7"/>
-                </a:solidFill>
-                <a:latin typeface="맑은 고딕"/>
-              </a:rPr>
-              <a:t>망각 d</a:t>
-            </a:r>
-          </a:p>
-        </p:txBody>
-      </p:sp>
-      <p:sp>
-        <p:nvSpPr>
-          <p:cNvPr id="17" name="TextBox 16"/>
-          <p:cNvSpPr txBox="1"/>
-          <p:nvPr/>
-        </p:nvSpPr>
-        <p:spPr>
-          <a:xfrm>
-            <a:off x="2468880" y="4206240"/>
-            <a:ext cx="1828800" cy="365760"/>
-          </a:xfrm>
-          <a:prstGeom prst="rect">
-            <a:avLst/>
-          </a:prstGeom>
-          <a:noFill/>
-        </p:spPr>
-        <p:txBody>
-          <a:bodyPr wrap="square" lIns="0" rIns="0" tIns="0" bIns="0">
-            <a:spAutoFit/>
-          </a:bodyPr>
-          <a:lstStyle/>
-          <a:p>
-            <a:pPr algn="l">
-              <a:lnSpc>
-                <a:spcPct val="125000"/>
-              </a:lnSpc>
-            </a:pPr>
-            <a:r>
-              <a:rPr sz="1100" b="0">
-                <a:solidFill>
-                  <a:srgbClr val="424B5C"/>
-                </a:solidFill>
-                <a:latin typeface="맑은 고딕"/>
-              </a:rPr>
-              <a:t>0.50 고정</a:t>
-            </a:r>
-          </a:p>
-        </p:txBody>
-      </p:sp>
-      <p:sp>
-        <p:nvSpPr>
-          <p:cNvPr id="18" name="TextBox 17"/>
-          <p:cNvSpPr txBox="1"/>
-          <p:nvPr/>
-        </p:nvSpPr>
-        <p:spPr>
-          <a:xfrm>
-            <a:off x="4297680" y="4206240"/>
-            <a:ext cx="2011680" cy="365760"/>
-          </a:xfrm>
-          <a:prstGeom prst="rect">
-            <a:avLst/>
-          </a:prstGeom>
-          <a:noFill/>
-        </p:spPr>
-        <p:txBody>
-          <a:bodyPr wrap="square" lIns="0" rIns="0" tIns="0" bIns="0">
-            <a:spAutoFit/>
-          </a:bodyPr>
-          <a:lstStyle/>
-          <a:p>
-            <a:pPr algn="l">
-              <a:lnSpc>
-                <a:spcPct val="125000"/>
-              </a:lnSpc>
-            </a:pPr>
-            <a:r>
-              <a:rPr sz="1100" b="1">
-                <a:solidFill>
-                  <a:srgbClr val="4F46E5"/>
-                </a:solidFill>
-                <a:latin typeface="맑은 고딕"/>
-              </a:rPr>
-              <a:t>→ N(0.50, 0.10)</a:t>
-            </a:r>
-          </a:p>
-        </p:txBody>
-      </p:sp>
-      <p:sp>
-        <p:nvSpPr>
-          <p:cNvPr id="19" name="TextBox 18"/>
-          <p:cNvSpPr txBox="1"/>
-          <p:nvPr/>
-        </p:nvSpPr>
-        <p:spPr>
-          <a:xfrm>
-            <a:off x="868680" y="4663440"/>
-            <a:ext cx="1645920" cy="365760"/>
-          </a:xfrm>
-          <a:prstGeom prst="rect">
-            <a:avLst/>
-          </a:prstGeom>
-          <a:noFill/>
-        </p:spPr>
-        <p:txBody>
-          <a:bodyPr wrap="square" lIns="0" rIns="0" tIns="0" bIns="0">
-            <a:spAutoFit/>
-          </a:bodyPr>
-          <a:lstStyle/>
-          <a:p>
-            <a:pPr algn="l">
-              <a:lnSpc>
-                <a:spcPct val="125000"/>
-              </a:lnSpc>
-            </a:pPr>
-            <a:r>
-              <a:rPr sz="1100" b="0">
-                <a:solidFill>
-                  <a:srgbClr val="8B95A7"/>
-                </a:solidFill>
-                <a:latin typeface="맑은 고딕"/>
-              </a:rPr>
-              <a:t>WM 청크</a:t>
-            </a:r>
-          </a:p>
-        </p:txBody>
-      </p:sp>
-      <p:sp>
-        <p:nvSpPr>
-          <p:cNvPr id="20" name="TextBox 19"/>
-          <p:cNvSpPr txBox="1"/>
-          <p:nvPr/>
-        </p:nvSpPr>
-        <p:spPr>
-          <a:xfrm>
-            <a:off x="2468880" y="4663440"/>
-            <a:ext cx="1828800" cy="365760"/>
-          </a:xfrm>
-          <a:prstGeom prst="rect">
-            <a:avLst/>
-          </a:prstGeom>
-          <a:noFill/>
-        </p:spPr>
-        <p:txBody>
-          <a:bodyPr wrap="square" lIns="0" rIns="0" tIns="0" bIns="0">
-            <a:spAutoFit/>
-          </a:bodyPr>
-          <a:lstStyle/>
-          <a:p>
-            <a:pPr algn="l">
-              <a:lnSpc>
-                <a:spcPct val="125000"/>
-              </a:lnSpc>
-            </a:pPr>
-            <a:r>
-              <a:rPr sz="1100" b="0">
-                <a:solidFill>
-                  <a:srgbClr val="424B5C"/>
-                </a:solidFill>
-                <a:latin typeface="맑은 고딕"/>
-              </a:rPr>
-              <a:t>7 고정</a:t>
-            </a:r>
-          </a:p>
-        </p:txBody>
-      </p:sp>
-      <p:sp>
-        <p:nvSpPr>
-          <p:cNvPr id="21" name="TextBox 20"/>
-          <p:cNvSpPr txBox="1"/>
-          <p:nvPr/>
-        </p:nvSpPr>
-        <p:spPr>
-          <a:xfrm>
-            <a:off x="4297680" y="4663440"/>
-            <a:ext cx="2011680" cy="365760"/>
-          </a:xfrm>
-          <a:prstGeom prst="rect">
-            <a:avLst/>
-          </a:prstGeom>
-          <a:noFill/>
-        </p:spPr>
-        <p:txBody>
-          <a:bodyPr wrap="square" lIns="0" rIns="0" tIns="0" bIns="0">
-            <a:spAutoFit/>
-          </a:bodyPr>
-          <a:lstStyle/>
-          <a:p>
-            <a:pPr algn="l">
-              <a:lnSpc>
-                <a:spcPct val="125000"/>
-              </a:lnSpc>
-            </a:pPr>
-            <a:r>
-              <a:rPr sz="1100" b="1">
-                <a:solidFill>
-                  <a:srgbClr val="4F46E5"/>
-                </a:solidFill>
-                <a:latin typeface="맑은 고딕"/>
-              </a:rPr>
-              <a:t>→ {5,6,7,8,9} 분포</a:t>
-            </a:r>
-          </a:p>
-        </p:txBody>
-      </p:sp>
-      <p:sp>
-        <p:nvSpPr>
-          <p:cNvPr id="22" name="TextBox 21"/>
-          <p:cNvSpPr txBox="1"/>
-          <p:nvPr/>
-        </p:nvSpPr>
-        <p:spPr>
-          <a:xfrm>
-            <a:off x="868680" y="5120640"/>
-            <a:ext cx="1645920" cy="365760"/>
-          </a:xfrm>
-          <a:prstGeom prst="rect">
-            <a:avLst/>
-          </a:prstGeom>
-          <a:noFill/>
-        </p:spPr>
-        <p:txBody>
-          <a:bodyPr wrap="square" lIns="0" rIns="0" tIns="0" bIns="0">
-            <a:spAutoFit/>
-          </a:bodyPr>
-          <a:lstStyle/>
-          <a:p>
-            <a:pPr algn="l">
-              <a:lnSpc>
-                <a:spcPct val="125000"/>
-              </a:lnSpc>
-            </a:pPr>
-            <a:r>
-              <a:rPr sz="1100" b="0">
-                <a:solidFill>
-                  <a:srgbClr val="8B95A7"/>
-                </a:solidFill>
-                <a:latin typeface="맑은 고딕"/>
-              </a:rPr>
-              <a:t>동기</a:t>
-            </a:r>
-          </a:p>
-        </p:txBody>
-      </p:sp>
-      <p:sp>
-        <p:nvSpPr>
-          <p:cNvPr id="23" name="TextBox 22"/>
-          <p:cNvSpPr txBox="1"/>
-          <p:nvPr/>
-        </p:nvSpPr>
-        <p:spPr>
-          <a:xfrm>
-            <a:off x="2468880" y="5120640"/>
-            <a:ext cx="1828800" cy="365760"/>
-          </a:xfrm>
-          <a:prstGeom prst="rect">
-            <a:avLst/>
-          </a:prstGeom>
-          <a:noFill/>
-        </p:spPr>
-        <p:txBody>
-          <a:bodyPr wrap="square" lIns="0" rIns="0" tIns="0" bIns="0">
-            <a:spAutoFit/>
-          </a:bodyPr>
-          <a:lstStyle/>
-          <a:p>
-            <a:pPr algn="l">
-              <a:lnSpc>
-                <a:spcPct val="125000"/>
-              </a:lnSpc>
-            </a:pPr>
-            <a:r>
-              <a:rPr sz="1100" b="0">
-                <a:solidFill>
-                  <a:srgbClr val="424B5C"/>
-                </a:solidFill>
-                <a:latin typeface="맑은 고딕"/>
-              </a:rPr>
-              <a:t>가정 없음</a:t>
-            </a:r>
-          </a:p>
-        </p:txBody>
-      </p:sp>
-      <p:sp>
-        <p:nvSpPr>
-          <p:cNvPr id="24" name="TextBox 23"/>
-          <p:cNvSpPr txBox="1"/>
-          <p:nvPr/>
-        </p:nvSpPr>
-        <p:spPr>
-          <a:xfrm>
-            <a:off x="4297680" y="5120640"/>
-            <a:ext cx="2011680" cy="365760"/>
-          </a:xfrm>
-          <a:prstGeom prst="rect">
-            <a:avLst/>
-          </a:prstGeom>
-          <a:noFill/>
-        </p:spPr>
-        <p:txBody>
-          <a:bodyPr wrap="square" lIns="0" rIns="0" tIns="0" bIns="0">
-            <a:spAutoFit/>
-          </a:bodyPr>
-          <a:lstStyle/>
-          <a:p>
-            <a:pPr algn="l">
-              <a:lnSpc>
-                <a:spcPct val="125000"/>
-              </a:lnSpc>
-            </a:pPr>
-            <a:r>
-              <a:rPr sz="1100" b="1">
-                <a:solidFill>
-                  <a:srgbClr val="4F46E5"/>
-                </a:solidFill>
-                <a:latin typeface="맑은 고딕"/>
-              </a:rPr>
-              <a:t>→ N(0.50, 0.20)</a:t>
-            </a:r>
-          </a:p>
-        </p:txBody>
-      </p:sp>
-      <p:sp>
-        <p:nvSpPr>
-          <p:cNvPr id="25" name="TextBox 24"/>
-          <p:cNvSpPr txBox="1"/>
-          <p:nvPr/>
-        </p:nvSpPr>
-        <p:spPr>
-          <a:xfrm>
-            <a:off x="868680" y="5577840"/>
-            <a:ext cx="1645920" cy="365760"/>
-          </a:xfrm>
-          <a:prstGeom prst="rect">
-            <a:avLst/>
-          </a:prstGeom>
-          <a:noFill/>
-        </p:spPr>
-        <p:txBody>
-          <a:bodyPr wrap="square" lIns="0" rIns="0" tIns="0" bIns="0">
-            <a:spAutoFit/>
-          </a:bodyPr>
-          <a:lstStyle/>
-          <a:p>
-            <a:pPr algn="l">
-              <a:lnSpc>
-                <a:spcPct val="125000"/>
-              </a:lnSpc>
-            </a:pPr>
-            <a:r>
-              <a:rPr sz="1100" b="0">
-                <a:solidFill>
-                  <a:srgbClr val="8B95A7"/>
-                </a:solidFill>
-                <a:latin typeface="맑은 고딕"/>
-              </a:rPr>
-              <a:t>분석 단위</a:t>
-            </a:r>
-          </a:p>
-        </p:txBody>
-      </p:sp>
-      <p:sp>
-        <p:nvSpPr>
-          <p:cNvPr id="26" name="TextBox 25"/>
-          <p:cNvSpPr txBox="1"/>
-          <p:nvPr/>
-        </p:nvSpPr>
-        <p:spPr>
-          <a:xfrm>
-            <a:off x="2468880" y="5577840"/>
-            <a:ext cx="1828800" cy="365760"/>
-          </a:xfrm>
-          <a:prstGeom prst="rect">
-            <a:avLst/>
-          </a:prstGeom>
-          <a:noFill/>
-        </p:spPr>
-        <p:txBody>
-          <a:bodyPr wrap="square" lIns="0" rIns="0" tIns="0" bIns="0">
-            <a:spAutoFit/>
-          </a:bodyPr>
-          <a:lstStyle/>
-          <a:p>
-            <a:pPr algn="l">
-              <a:lnSpc>
-                <a:spcPct val="125000"/>
-              </a:lnSpc>
-            </a:pPr>
-            <a:r>
-              <a:rPr sz="1100" b="0">
-                <a:solidFill>
-                  <a:srgbClr val="424B5C"/>
-                </a:solidFill>
-                <a:latin typeface="맑은 고딕"/>
-              </a:rPr>
-              <a:t>평균값</a:t>
-            </a:r>
-          </a:p>
-        </p:txBody>
-      </p:sp>
-      <p:sp>
-        <p:nvSpPr>
-          <p:cNvPr id="27" name="TextBox 26"/>
-          <p:cNvSpPr txBox="1"/>
-          <p:nvPr/>
-        </p:nvSpPr>
-        <p:spPr>
-          <a:xfrm>
-            <a:off x="4297680" y="5577840"/>
-            <a:ext cx="2011680" cy="365760"/>
-          </a:xfrm>
-          <a:prstGeom prst="rect">
-            <a:avLst/>
-          </a:prstGeom>
-          <a:noFill/>
-        </p:spPr>
-        <p:txBody>
-          <a:bodyPr wrap="square" lIns="0" rIns="0" tIns="0" bIns="0">
-            <a:spAutoFit/>
-          </a:bodyPr>
-          <a:lstStyle/>
-          <a:p>
-            <a:pPr algn="l">
-              <a:lnSpc>
-                <a:spcPct val="125000"/>
-              </a:lnSpc>
-            </a:pPr>
-            <a:r>
-              <a:rPr sz="1100" b="1">
-                <a:solidFill>
-                  <a:srgbClr val="4F46E5"/>
-                </a:solidFill>
-                <a:latin typeface="맑은 고딕"/>
-              </a:rPr>
-              <a:t>→ 평균 + 하위 25%</a:t>
-            </a:r>
-          </a:p>
-        </p:txBody>
-      </p:sp>
-      <p:sp>
-        <p:nvSpPr>
-          <p:cNvPr id="28" name="Rounded Rectangle 27"/>
+              <a:t>→ "평균적 학생"만 본 결과.</a:t>
+            </a:r>
+          </a:p>
+        </p:txBody>
+      </p:sp>
+      <p:sp>
+        <p:nvSpPr>
+          <p:cNvPr id="15" name="Rounded Rectangle 14"/>
           <p:cNvSpPr/>
           <p:nvPr/>
         </p:nvSpPr>
         <p:spPr>
           <a:xfrm>
-            <a:off x="6446520" y="2697480"/>
-            <a:ext cx="5074920" cy="3657600"/>
+            <a:off x="6263640" y="3840480"/>
+            <a:ext cx="5257800" cy="2377440"/>
           </a:xfrm>
           <a:prstGeom prst="roundRect">
             <a:avLst>
-              <a:gd name="adj" fmla="val 4000"/>
+              <a:gd name="adj" fmla="val 6000"/>
             </a:avLst>
           </a:prstGeom>
           <a:solidFill>
-            <a:srgbClr val="FAFBFC"/>
+            <a:srgbClr val="EEEAFE"/>
           </a:solidFill>
-          <a:ln w="12700">
+          <a:ln w="9525">
             <a:solidFill>
-              <a:srgbClr val="E5E7EB"/>
+              <a:srgbClr val="4F46E5"/>
             </a:solidFill>
           </a:ln>
         </p:spPr>
@@ -18749,14 +17848,14 @@
       </p:sp>
       <p:sp>
         <p:nvSpPr>
-          <p:cNvPr id="29" name="TextBox 28"/>
-          <p:cNvSpPr txBox="1"/>
-          <p:nvPr/>
-        </p:nvSpPr>
-        <p:spPr>
-          <a:xfrm>
-            <a:off x="6675120" y="2834640"/>
-            <a:ext cx="4572000" cy="365760"/>
+          <p:cNvPr id="16" name="TextBox 15"/>
+          <p:cNvSpPr txBox="1"/>
+          <p:nvPr/>
+        </p:nvSpPr>
+        <p:spPr>
+          <a:xfrm>
+            <a:off x="6492240" y="3977639"/>
+            <a:ext cx="4846320" cy="365760"/>
           </a:xfrm>
           <a:prstGeom prst="rect">
             <a:avLst/>
@@ -18777,323 +17876,160 @@
             <a:r>
               <a:rPr sz="1200" b="1">
                 <a:solidFill>
+                  <a:srgbClr val="4F46E5"/>
+                </a:solidFill>
+                <a:latin typeface="맑은 고딕"/>
+              </a:rPr>
+              <a:t>팀과제 (확장)</a:t>
+            </a:r>
+          </a:p>
+        </p:txBody>
+      </p:sp>
+      <p:sp>
+        <p:nvSpPr>
+          <p:cNvPr id="17" name="TextBox 16"/>
+          <p:cNvSpPr txBox="1"/>
+          <p:nvPr/>
+        </p:nvSpPr>
+        <p:spPr>
+          <a:xfrm>
+            <a:off x="6492240" y="4389120"/>
+            <a:ext cx="4846320" cy="457200"/>
+          </a:xfrm>
+          <a:prstGeom prst="rect">
+            <a:avLst/>
+          </a:prstGeom>
+          <a:noFill/>
+        </p:spPr>
+        <p:txBody>
+          <a:bodyPr wrap="square" lIns="0" rIns="0" tIns="0" bIns="0">
+            <a:spAutoFit/>
+          </a:bodyPr>
+          <a:lstStyle/>
+          <a:p>
+            <a:pPr algn="l">
+              <a:lnSpc>
+                <a:spcPct val="125000"/>
+              </a:lnSpc>
+            </a:pPr>
+            <a:r>
+              <a:rPr sz="1500" b="1">
+                <a:solidFill>
+                  <a:srgbClr val="0F141F"/>
+                </a:solidFill>
+                <a:latin typeface="맑은 고딕"/>
+              </a:rPr>
+              <a:t>가상 학생 1000명, 사람마다 다르게</a:t>
+            </a:r>
+          </a:p>
+        </p:txBody>
+      </p:sp>
+      <p:sp>
+        <p:nvSpPr>
+          <p:cNvPr id="18" name="TextBox 17"/>
+          <p:cNvSpPr txBox="1"/>
+          <p:nvPr/>
+        </p:nvSpPr>
+        <p:spPr>
+          <a:xfrm>
+            <a:off x="6492240" y="4937760"/>
+            <a:ext cx="4846320" cy="1188720"/>
+          </a:xfrm>
+          <a:prstGeom prst="rect">
+            <a:avLst/>
+          </a:prstGeom>
+          <a:noFill/>
+        </p:spPr>
+        <p:txBody>
+          <a:bodyPr wrap="square" lIns="0" rIns="0" tIns="0" bIns="0">
+            <a:spAutoFit/>
+          </a:bodyPr>
+          <a:lstStyle/>
+          <a:p>
+            <a:pPr algn="l">
+              <a:lnSpc>
+                <a:spcPct val="140000"/>
+              </a:lnSpc>
+            </a:pPr>
+            <a:r>
+              <a:rPr sz="1100" b="0">
+                <a:solidFill>
+                  <a:srgbClr val="424B5C"/>
+                </a:solidFill>
+                <a:latin typeface="맑은 고딕"/>
+              </a:rPr>
+              <a:t>학습률·기억력·작업 기억이 모두 다른</a:t>
+            </a:r>
+          </a:p>
+          <a:p>
+            <a:pPr algn="l">
+              <a:lnSpc>
+                <a:spcPct val="140000"/>
+              </a:lnSpc>
+            </a:pPr>
+            <a:r>
+              <a:rPr sz="1100" b="0">
+                <a:solidFill>
+                  <a:srgbClr val="424B5C"/>
+                </a:solidFill>
+                <a:latin typeface="맑은 고딕"/>
+              </a:rPr>
+              <a:t>1000명을 가상으로 만들어 시뮬.</a:t>
+            </a:r>
+          </a:p>
+          <a:p>
+            <a:pPr algn="l">
+              <a:lnSpc>
+                <a:spcPct val="140000"/>
+              </a:lnSpc>
+            </a:pPr>
+            <a:r>
+              <a:rPr sz="1100" b="0">
+                <a:solidFill>
+                  <a:srgbClr val="424B5C"/>
+                </a:solidFill>
+                <a:latin typeface="맑은 고딕"/>
+              </a:rPr>
+              <a:t>→ 평균뿐 아니라 하위 25%도 본다.</a:t>
+            </a:r>
+          </a:p>
+        </p:txBody>
+      </p:sp>
+      <p:sp>
+        <p:nvSpPr>
+          <p:cNvPr id="19" name="TextBox 18"/>
+          <p:cNvSpPr txBox="1"/>
+          <p:nvPr/>
+        </p:nvSpPr>
+        <p:spPr>
+          <a:xfrm>
+            <a:off x="640080" y="6400800"/>
+            <a:ext cx="10972800" cy="365760"/>
+          </a:xfrm>
+          <a:prstGeom prst="rect">
+            <a:avLst/>
+          </a:prstGeom>
+          <a:noFill/>
+        </p:spPr>
+        <p:txBody>
+          <a:bodyPr wrap="square" lIns="0" rIns="0" tIns="0" bIns="0">
+            <a:spAutoFit/>
+          </a:bodyPr>
+          <a:lstStyle/>
+          <a:p>
+            <a:pPr algn="ctr">
+              <a:lnSpc>
+                <a:spcPct val="125000"/>
+              </a:lnSpc>
+            </a:pPr>
+            <a:r>
+              <a:rPr sz="1200" b="1">
+                <a:solidFill>
                   <a:srgbClr val="EC4899"/>
                 </a:solidFill>
                 <a:latin typeface="맑은 고딕"/>
               </a:rPr>
-              <a:t>분석 종류</a:t>
-            </a:r>
-          </a:p>
-        </p:txBody>
-      </p:sp>
-      <p:sp>
-        <p:nvSpPr>
-          <p:cNvPr id="30" name="TextBox 29"/>
-          <p:cNvSpPr txBox="1"/>
-          <p:nvPr/>
-        </p:nvSpPr>
-        <p:spPr>
-          <a:xfrm>
-            <a:off x="6675120" y="3291840"/>
-            <a:ext cx="4572000" cy="365760"/>
-          </a:xfrm>
-          <a:prstGeom prst="rect">
-            <a:avLst/>
-          </a:prstGeom>
-          <a:noFill/>
-        </p:spPr>
-        <p:txBody>
-          <a:bodyPr wrap="square" lIns="0" rIns="0" tIns="0" bIns="0">
-            <a:spAutoFit/>
-          </a:bodyPr>
-          <a:lstStyle/>
-          <a:p>
-            <a:pPr algn="l">
-              <a:lnSpc>
-                <a:spcPct val="125000"/>
-              </a:lnSpc>
-            </a:pPr>
-            <a:r>
-              <a:rPr sz="1200" b="1">
-                <a:solidFill>
-                  <a:srgbClr val="0F141F"/>
-                </a:solidFill>
-                <a:latin typeface="맑은 고딕"/>
-              </a:rPr>
-              <a:t>▸ 분포 효과</a:t>
-            </a:r>
-          </a:p>
-        </p:txBody>
-      </p:sp>
-      <p:sp>
-        <p:nvSpPr>
-          <p:cNvPr id="31" name="TextBox 30"/>
-          <p:cNvSpPr txBox="1"/>
-          <p:nvPr/>
-        </p:nvSpPr>
-        <p:spPr>
-          <a:xfrm>
-            <a:off x="6858000" y="3611880"/>
-            <a:ext cx="4572000" cy="365760"/>
-          </a:xfrm>
-          <a:prstGeom prst="rect">
-            <a:avLst/>
-          </a:prstGeom>
-          <a:noFill/>
-        </p:spPr>
-        <p:txBody>
-          <a:bodyPr wrap="square" lIns="0" rIns="0" tIns="0" bIns="0">
-            <a:spAutoFit/>
-          </a:bodyPr>
-          <a:lstStyle/>
-          <a:p>
-            <a:pPr algn="l">
-              <a:lnSpc>
-                <a:spcPct val="125000"/>
-              </a:lnSpc>
-            </a:pPr>
-            <a:r>
-              <a:rPr sz="1000" b="0">
-                <a:solidFill>
-                  <a:srgbClr val="8B95A7"/>
-                </a:solidFill>
-                <a:latin typeface="맑은 고딕"/>
-              </a:rPr>
-              <a:t>평균 vs 하위 25% (저성취 보호)</a:t>
-            </a:r>
-          </a:p>
-        </p:txBody>
-      </p:sp>
-      <p:sp>
-        <p:nvSpPr>
-          <p:cNvPr id="32" name="TextBox 31"/>
-          <p:cNvSpPr txBox="1"/>
-          <p:nvPr/>
-        </p:nvSpPr>
-        <p:spPr>
-          <a:xfrm>
-            <a:off x="6675120" y="4069080"/>
-            <a:ext cx="4572000" cy="365760"/>
-          </a:xfrm>
-          <a:prstGeom prst="rect">
-            <a:avLst/>
-          </a:prstGeom>
-          <a:noFill/>
-        </p:spPr>
-        <p:txBody>
-          <a:bodyPr wrap="square" lIns="0" rIns="0" tIns="0" bIns="0">
-            <a:spAutoFit/>
-          </a:bodyPr>
-          <a:lstStyle/>
-          <a:p>
-            <a:pPr algn="l">
-              <a:lnSpc>
-                <a:spcPct val="125000"/>
-              </a:lnSpc>
-            </a:pPr>
-            <a:r>
-              <a:rPr sz="1200" b="1">
-                <a:solidFill>
-                  <a:srgbClr val="0F141F"/>
-                </a:solidFill>
-                <a:latin typeface="맑은 고딕"/>
-              </a:rPr>
-              <a:t>▸ 민감도</a:t>
-            </a:r>
-          </a:p>
-        </p:txBody>
-      </p:sp>
-      <p:sp>
-        <p:nvSpPr>
-          <p:cNvPr id="33" name="TextBox 32"/>
-          <p:cNvSpPr txBox="1"/>
-          <p:nvPr/>
-        </p:nvSpPr>
-        <p:spPr>
-          <a:xfrm>
-            <a:off x="6858000" y="4389120"/>
-            <a:ext cx="4572000" cy="365760"/>
-          </a:xfrm>
-          <a:prstGeom prst="rect">
-            <a:avLst/>
-          </a:prstGeom>
-          <a:noFill/>
-        </p:spPr>
-        <p:txBody>
-          <a:bodyPr wrap="square" lIns="0" rIns="0" tIns="0" bIns="0">
-            <a:spAutoFit/>
-          </a:bodyPr>
-          <a:lstStyle/>
-          <a:p>
-            <a:pPr algn="l">
-              <a:lnSpc>
-                <a:spcPct val="125000"/>
-              </a:lnSpc>
-            </a:pPr>
-            <a:r>
-              <a:rPr sz="1000" b="0">
-                <a:solidFill>
-                  <a:srgbClr val="8B95A7"/>
-                </a:solidFill>
-                <a:latin typeface="맑은 고딕"/>
-              </a:rPr>
-              <a:t>α, d ±50% 변화에도 결론 유지?</a:t>
-            </a:r>
-          </a:p>
-        </p:txBody>
-      </p:sp>
-      <p:sp>
-        <p:nvSpPr>
-          <p:cNvPr id="34" name="TextBox 33"/>
-          <p:cNvSpPr txBox="1"/>
-          <p:nvPr/>
-        </p:nvSpPr>
-        <p:spPr>
-          <a:xfrm>
-            <a:off x="6675120" y="4846320"/>
-            <a:ext cx="4572000" cy="365760"/>
-          </a:xfrm>
-          <a:prstGeom prst="rect">
-            <a:avLst/>
-          </a:prstGeom>
-          <a:noFill/>
-        </p:spPr>
-        <p:txBody>
-          <a:bodyPr wrap="square" lIns="0" rIns="0" tIns="0" bIns="0">
-            <a:spAutoFit/>
-          </a:bodyPr>
-          <a:lstStyle/>
-          <a:p>
-            <a:pPr algn="l">
-              <a:lnSpc>
-                <a:spcPct val="125000"/>
-              </a:lnSpc>
-            </a:pPr>
-            <a:r>
-              <a:rPr sz="1200" b="1">
-                <a:solidFill>
-                  <a:srgbClr val="0F141F"/>
-                </a:solidFill>
-                <a:latin typeface="맑은 고딕"/>
-              </a:rPr>
-              <a:t>▸ 개입 시뮬</a:t>
-            </a:r>
-          </a:p>
-        </p:txBody>
-      </p:sp>
-      <p:sp>
-        <p:nvSpPr>
-          <p:cNvPr id="35" name="TextBox 34"/>
-          <p:cNvSpPr txBox="1"/>
-          <p:nvPr/>
-        </p:nvSpPr>
-        <p:spPr>
-          <a:xfrm>
-            <a:off x="6858000" y="5166359"/>
-            <a:ext cx="4572000" cy="365760"/>
-          </a:xfrm>
-          <a:prstGeom prst="rect">
-            <a:avLst/>
-          </a:prstGeom>
-          <a:noFill/>
-        </p:spPr>
-        <p:txBody>
-          <a:bodyPr wrap="square" lIns="0" rIns="0" tIns="0" bIns="0">
-            <a:spAutoFit/>
-          </a:bodyPr>
-          <a:lstStyle/>
-          <a:p>
-            <a:pPr algn="l">
-              <a:lnSpc>
-                <a:spcPct val="125000"/>
-              </a:lnSpc>
-            </a:pPr>
-            <a:r>
-              <a:rPr sz="1000" b="0">
-                <a:solidFill>
-                  <a:srgbClr val="8B95A7"/>
-                </a:solidFill>
-                <a:latin typeface="맑은 고딕"/>
-              </a:rPr>
-              <a:t>분산 퀴즈·프로필 카드 적용 효과</a:t>
-            </a:r>
-          </a:p>
-        </p:txBody>
-      </p:sp>
-      <p:sp>
-        <p:nvSpPr>
-          <p:cNvPr id="36" name="TextBox 35"/>
-          <p:cNvSpPr txBox="1"/>
-          <p:nvPr/>
-        </p:nvSpPr>
-        <p:spPr>
-          <a:xfrm>
-            <a:off x="6675120" y="5623560"/>
-            <a:ext cx="4572000" cy="365760"/>
-          </a:xfrm>
-          <a:prstGeom prst="rect">
-            <a:avLst/>
-          </a:prstGeom>
-          <a:noFill/>
-        </p:spPr>
-        <p:txBody>
-          <a:bodyPr wrap="square" lIns="0" rIns="0" tIns="0" bIns="0">
-            <a:spAutoFit/>
-          </a:bodyPr>
-          <a:lstStyle/>
-          <a:p>
-            <a:pPr algn="l">
-              <a:lnSpc>
-                <a:spcPct val="125000"/>
-              </a:lnSpc>
-            </a:pPr>
-            <a:r>
-              <a:rPr sz="1200" b="1">
-                <a:solidFill>
-                  <a:srgbClr val="0F141F"/>
-                </a:solidFill>
-                <a:latin typeface="맑은 고딕"/>
-              </a:rPr>
-              <a:t>▸ T1 캘리브레이션</a:t>
-            </a:r>
-          </a:p>
-        </p:txBody>
-      </p:sp>
-      <p:sp>
-        <p:nvSpPr>
-          <p:cNvPr id="37" name="TextBox 36"/>
-          <p:cNvSpPr txBox="1"/>
-          <p:nvPr/>
-        </p:nvSpPr>
-        <p:spPr>
-          <a:xfrm>
-            <a:off x="6858000" y="5943600"/>
-            <a:ext cx="4572000" cy="365760"/>
-          </a:xfrm>
-          <a:prstGeom prst="rect">
-            <a:avLst/>
-          </a:prstGeom>
-          <a:noFill/>
-        </p:spPr>
-        <p:txBody>
-          <a:bodyPr wrap="square" lIns="0" rIns="0" tIns="0" bIns="0">
-            <a:spAutoFit/>
-          </a:bodyPr>
-          <a:lstStyle/>
-          <a:p>
-            <a:pPr algn="l">
-              <a:lnSpc>
-                <a:spcPct val="125000"/>
-              </a:lnSpc>
-            </a:pPr>
-            <a:r>
-              <a:rPr sz="1000" b="0">
-                <a:solidFill>
-                  <a:srgbClr val="8B95A7"/>
-                </a:solidFill>
-                <a:latin typeface="맑은 고딕"/>
-              </a:rPr>
-              <a:t>설문 추정치 → 시뮬 입력 보정</a:t>
+              <a:t>→ 보고서 핵심 한 줄: "개선안이 약한 학생도 도와주는가?"</a:t>
             </a:r>
           </a:p>
         </p:txBody>
@@ -19193,7 +18129,7 @@
                 </a:solidFill>
                 <a:latin typeface="맑은 고딕"/>
               </a:rPr>
-              <a:t>T3 · NETWORK</a:t>
+              <a:t>T3 · 친분 그래프 시뮬</a:t>
             </a:r>
           </a:p>
         </p:txBody>
@@ -19232,7 +18168,7 @@
                 </a:solidFill>
                 <a:latin typeface="맑은 고딕"/>
               </a:rPr>
-              <a:t>친분 네트워크 시뮬 — 시각화 임팩트</a:t>
+              <a:t>친구 관계를 그림으로 그려서 "팀장이 누구를 뽑는지" 시뮬</a:t>
             </a:r>
           </a:p>
         </p:txBody>
@@ -19306,7 +18242,7 @@
                 </a:solidFill>
                 <a:latin typeface="맑은 고딕"/>
               </a:rPr>
-              <a:t>13</a:t>
+              <a:t>23</a:t>
             </a:r>
           </a:p>
         </p:txBody>
@@ -19319,8 +18255,47 @@
         </p:nvSpPr>
         <p:spPr>
           <a:xfrm>
-            <a:off x="640080" y="2194560"/>
-            <a:ext cx="10972800" cy="365760"/>
+            <a:off x="640080" y="2103120"/>
+            <a:ext cx="10972800" cy="411480"/>
+          </a:xfrm>
+          <a:prstGeom prst="rect">
+            <a:avLst/>
+          </a:prstGeom>
+          <a:noFill/>
+        </p:spPr>
+        <p:txBody>
+          <a:bodyPr wrap="square" lIns="0" rIns="0" tIns="0" bIns="0">
+            <a:spAutoFit/>
+          </a:bodyPr>
+          <a:lstStyle/>
+          <a:p>
+            <a:pPr algn="l">
+              <a:lnSpc>
+                <a:spcPct val="125000"/>
+              </a:lnSpc>
+            </a:pPr>
+            <a:r>
+              <a:rPr sz="1500" b="1">
+                <a:solidFill>
+                  <a:srgbClr val="0F141F"/>
+                </a:solidFill>
+                <a:latin typeface="맑은 고딕"/>
+              </a:rPr>
+              <a:t>사람 모집 없이도 친분 휴리스틱을 검증할 수 있다.</a:t>
+            </a:r>
+          </a:p>
+        </p:txBody>
+      </p:sp>
+      <p:sp>
+        <p:nvSpPr>
+          <p:cNvPr id="8" name="TextBox 7"/>
+          <p:cNvSpPr txBox="1"/>
+          <p:nvPr/>
+        </p:nvSpPr>
+        <p:spPr>
+          <a:xfrm>
+            <a:off x="640080" y="2560320"/>
+            <a:ext cx="10972800" cy="411480"/>
           </a:xfrm>
           <a:prstGeom prst="rect">
             <a:avLst/>
@@ -19341,107 +18316,50 @@
             <a:r>
               <a:rPr sz="1200" b="0">
                 <a:solidFill>
-                  <a:srgbClr val="8B95A7"/>
-                </a:solidFill>
-                <a:latin typeface="맑은 고딕"/>
-              </a:rPr>
-              <a:t>가상 학생 30명의 친분 그래프에서 팀장이 5조건으로 팀원 지명 → 결과 비교</a:t>
-            </a:r>
-          </a:p>
-        </p:txBody>
-      </p:sp>
-      <p:sp>
-        <p:nvSpPr>
-          <p:cNvPr id="8" name="Rounded Rectangle 7"/>
-          <p:cNvSpPr/>
-          <p:nvPr/>
-        </p:nvSpPr>
-        <p:spPr>
-          <a:xfrm>
-            <a:off x="640080" y="2743200"/>
-            <a:ext cx="10881360" cy="594360"/>
-          </a:xfrm>
-          <a:prstGeom prst="roundRect">
-            <a:avLst>
-              <a:gd name="adj" fmla="val 4000"/>
-            </a:avLst>
-          </a:prstGeom>
-          <a:solidFill>
-            <a:srgbClr val="FAFBFC"/>
-          </a:solidFill>
-          <a:ln w="12700">
+                  <a:srgbClr val="424B5C"/>
+                </a:solidFill>
+                <a:latin typeface="맑은 고딕"/>
+              </a:rPr>
+              <a:t>가상 학생 30명에 친한 정도를 다 설정 → 팀장이 5가지 방식으로 뽑게 함 → 그림으로 비교.</a:t>
+            </a:r>
+          </a:p>
+        </p:txBody>
+      </p:sp>
+      <p:cxnSp>
+        <p:nvCxnSpPr>
+          <p:cNvPr id="9" name="Connector 8"/>
+          <p:cNvCxnSpPr/>
+          <p:nvPr/>
+        </p:nvCxnSpPr>
+        <p:spPr>
+          <a:xfrm>
+            <a:off x="640080" y="3291840"/>
+            <a:ext cx="10881360" cy="0"/>
+          </a:xfrm>
+          <a:prstGeom prst="line">
+            <a:avLst/>
+          </a:prstGeom>
+          <a:ln w="19050">
             <a:solidFill>
               <a:srgbClr val="E5E7EB"/>
             </a:solidFill>
           </a:ln>
         </p:spPr>
         <p:style>
-          <a:lnRef idx="1">
+          <a:lnRef idx="2">
             <a:schemeClr val="accent1"/>
           </a:lnRef>
-          <a:fillRef idx="3">
+          <a:fillRef idx="0">
             <a:schemeClr val="accent1"/>
           </a:fillRef>
-          <a:effectRef idx="2">
+          <a:effectRef idx="1">
             <a:schemeClr val="accent1"/>
           </a:effectRef>
           <a:fontRef idx="minor">
-            <a:schemeClr val="lt1"/>
+            <a:schemeClr val="tx1"/>
           </a:fontRef>
         </p:style>
-        <p:txBody>
-          <a:bodyPr rtlCol="0" anchor="ctr"/>
-          <a:lstStyle/>
-          <a:p>
-            <a:pPr algn="ctr"/>
-          </a:p>
-        </p:txBody>
-      </p:sp>
-      <p:sp>
-        <p:nvSpPr>
-          <p:cNvPr id="9" name="Rounded Rectangle 8"/>
-          <p:cNvSpPr/>
-          <p:nvPr/>
-        </p:nvSpPr>
-        <p:spPr>
-          <a:xfrm>
-            <a:off x="822960" y="2862072"/>
-            <a:ext cx="548640" cy="365760"/>
-          </a:xfrm>
-          <a:prstGeom prst="roundRect">
-            <a:avLst>
-              <a:gd name="adj" fmla="val 50000"/>
-            </a:avLst>
-          </a:prstGeom>
-          <a:solidFill>
-            <a:srgbClr val="10B981"/>
-          </a:solidFill>
-          <a:ln>
-            <a:noFill/>
-          </a:ln>
-        </p:spPr>
-        <p:style>
-          <a:lnRef idx="1">
-            <a:schemeClr val="accent1"/>
-          </a:lnRef>
-          <a:fillRef idx="3">
-            <a:schemeClr val="accent1"/>
-          </a:fillRef>
-          <a:effectRef idx="2">
-            <a:schemeClr val="accent1"/>
-          </a:effectRef>
-          <a:fontRef idx="minor">
-            <a:schemeClr val="lt1"/>
-          </a:fontRef>
-        </p:style>
-        <p:txBody>
-          <a:bodyPr rtlCol="0" anchor="ctr"/>
-          <a:lstStyle/>
-          <a:p>
-            <a:pPr algn="ctr"/>
-          </a:p>
-        </p:txBody>
-      </p:sp>
+      </p:cxnSp>
       <p:sp>
         <p:nvSpPr>
           <p:cNvPr id="10" name="TextBox 9"/>
@@ -19450,21 +18368,177 @@
         </p:nvSpPr>
         <p:spPr>
           <a:xfrm>
-            <a:off x="822960" y="2907791"/>
-            <a:ext cx="548640" cy="274320"/>
-          </a:xfrm>
-          <a:prstGeom prst="rect">
-            <a:avLst/>
-          </a:prstGeom>
-          <a:noFill/>
-        </p:spPr>
-        <p:txBody>
-          <a:bodyPr wrap="square" lIns="0" rIns="0" tIns="0" bIns="0">
-            <a:spAutoFit/>
-          </a:bodyPr>
-          <a:lstStyle/>
-          <a:p>
-            <a:pPr algn="ctr">
+            <a:off x="640080" y="3429000"/>
+            <a:ext cx="10972800" cy="365760"/>
+          </a:xfrm>
+          <a:prstGeom prst="rect">
+            <a:avLst/>
+          </a:prstGeom>
+          <a:noFill/>
+        </p:spPr>
+        <p:txBody>
+          <a:bodyPr wrap="square" lIns="0" rIns="0" tIns="0" bIns="0">
+            <a:spAutoFit/>
+          </a:bodyPr>
+          <a:lstStyle/>
+          <a:p>
+            <a:pPr algn="l">
+              <a:lnSpc>
+                <a:spcPct val="125000"/>
+              </a:lnSpc>
+            </a:pPr>
+            <a:r>
+              <a:rPr sz="1100" b="1">
+                <a:solidFill>
+                  <a:srgbClr val="4F46E5"/>
+                </a:solidFill>
+                <a:latin typeface="맑은 고딕"/>
+              </a:rPr>
+              <a:t>5가지 팀장 선택 방식 (그림 5장 산출)</a:t>
+            </a:r>
+          </a:p>
+        </p:txBody>
+      </p:sp>
+      <p:sp>
+        <p:nvSpPr>
+          <p:cNvPr id="11" name="TextBox 10"/>
+          <p:cNvSpPr txBox="1"/>
+          <p:nvPr/>
+        </p:nvSpPr>
+        <p:spPr>
+          <a:xfrm>
+            <a:off x="868680" y="3931920"/>
+            <a:ext cx="365760" cy="320040"/>
+          </a:xfrm>
+          <a:prstGeom prst="rect">
+            <a:avLst/>
+          </a:prstGeom>
+          <a:noFill/>
+        </p:spPr>
+        <p:txBody>
+          <a:bodyPr wrap="square" lIns="0" rIns="0" tIns="0" bIns="0">
+            <a:spAutoFit/>
+          </a:bodyPr>
+          <a:lstStyle/>
+          <a:p>
+            <a:pPr algn="l">
+              <a:lnSpc>
+                <a:spcPct val="125000"/>
+              </a:lnSpc>
+            </a:pPr>
+            <a:r>
+              <a:rPr sz="1400" b="1">
+                <a:solidFill>
+                  <a:srgbClr val="10B981"/>
+                </a:solidFill>
+                <a:latin typeface="맑은 고딕"/>
+              </a:rPr>
+              <a:t>①</a:t>
+            </a:r>
+          </a:p>
+        </p:txBody>
+      </p:sp>
+      <p:sp>
+        <p:nvSpPr>
+          <p:cNvPr id="12" name="TextBox 11"/>
+          <p:cNvSpPr txBox="1"/>
+          <p:nvPr/>
+        </p:nvSpPr>
+        <p:spPr>
+          <a:xfrm>
+            <a:off x="1371600" y="3886200"/>
+            <a:ext cx="3200400" cy="365760"/>
+          </a:xfrm>
+          <a:prstGeom prst="rect">
+            <a:avLst/>
+          </a:prstGeom>
+          <a:noFill/>
+        </p:spPr>
+        <p:txBody>
+          <a:bodyPr wrap="square" lIns="0" rIns="0" tIns="0" bIns="0">
+            <a:spAutoFit/>
+          </a:bodyPr>
+          <a:lstStyle/>
+          <a:p>
+            <a:pPr algn="l">
+              <a:lnSpc>
+                <a:spcPct val="125000"/>
+              </a:lnSpc>
+            </a:pPr>
+            <a:r>
+              <a:rPr sz="1200" b="1">
+                <a:solidFill>
+                  <a:srgbClr val="0F141F"/>
+                </a:solidFill>
+                <a:latin typeface="맑은 고딕"/>
+              </a:rPr>
+              <a:t>무작위로 뽑기</a:t>
+            </a:r>
+          </a:p>
+        </p:txBody>
+      </p:sp>
+      <p:sp>
+        <p:nvSpPr>
+          <p:cNvPr id="13" name="TextBox 12"/>
+          <p:cNvSpPr txBox="1"/>
+          <p:nvPr/>
+        </p:nvSpPr>
+        <p:spPr>
+          <a:xfrm>
+            <a:off x="4754880" y="3886200"/>
+            <a:ext cx="3657600" cy="365760"/>
+          </a:xfrm>
+          <a:prstGeom prst="rect">
+            <a:avLst/>
+          </a:prstGeom>
+          <a:noFill/>
+        </p:spPr>
+        <p:txBody>
+          <a:bodyPr wrap="square" lIns="0" rIns="0" tIns="0" bIns="0">
+            <a:spAutoFit/>
+          </a:bodyPr>
+          <a:lstStyle/>
+          <a:p>
+            <a:pPr algn="l">
+              <a:lnSpc>
+                <a:spcPct val="125000"/>
+              </a:lnSpc>
+            </a:pPr>
+            <a:r>
+              <a:rPr sz="1000" b="0">
+                <a:solidFill>
+                  <a:srgbClr val="424B5C"/>
+                </a:solidFill>
+                <a:latin typeface="맑은 고딕"/>
+              </a:rPr>
+              <a:t>그냥 랜덤 5명</a:t>
+            </a:r>
+          </a:p>
+        </p:txBody>
+      </p:sp>
+      <p:sp>
+        <p:nvSpPr>
+          <p:cNvPr id="14" name="TextBox 13"/>
+          <p:cNvSpPr txBox="1"/>
+          <p:nvPr/>
+        </p:nvSpPr>
+        <p:spPr>
+          <a:xfrm>
+            <a:off x="8595360" y="3886200"/>
+            <a:ext cx="3017520" cy="365760"/>
+          </a:xfrm>
+          <a:prstGeom prst="rect">
+            <a:avLst/>
+          </a:prstGeom>
+          <a:noFill/>
+        </p:spPr>
+        <p:txBody>
+          <a:bodyPr wrap="square" lIns="0" rIns="0" tIns="0" bIns="0">
+            <a:spAutoFit/>
+          </a:bodyPr>
+          <a:lstStyle/>
+          <a:p>
+            <a:pPr algn="l">
               <a:lnSpc>
                 <a:spcPct val="125000"/>
               </a:lnSpc>
@@ -19472,102 +18546,219 @@
             <a:r>
               <a:rPr sz="1000" b="1">
                 <a:solidFill>
-                  <a:srgbClr val="FFFFFF"/>
-                </a:solidFill>
-                <a:latin typeface="맑은 고딕"/>
-              </a:rPr>
-              <a:t>A</a:t>
-            </a:r>
-          </a:p>
-        </p:txBody>
-      </p:sp>
-      <p:sp>
-        <p:nvSpPr>
-          <p:cNvPr id="11" name="TextBox 10"/>
-          <p:cNvSpPr txBox="1"/>
-          <p:nvPr/>
-        </p:nvSpPr>
-        <p:spPr>
-          <a:xfrm>
-            <a:off x="1554480" y="2880360"/>
-            <a:ext cx="2286000" cy="365760"/>
-          </a:xfrm>
-          <a:prstGeom prst="rect">
-            <a:avLst/>
-          </a:prstGeom>
-          <a:noFill/>
-        </p:spPr>
-        <p:txBody>
-          <a:bodyPr wrap="square" lIns="0" rIns="0" tIns="0" bIns="0">
-            <a:spAutoFit/>
-          </a:bodyPr>
-          <a:lstStyle/>
-          <a:p>
-            <a:pPr algn="l">
-              <a:lnSpc>
-                <a:spcPct val="125000"/>
-              </a:lnSpc>
-            </a:pPr>
-            <a:r>
-              <a:rPr sz="1300" b="1">
+                  <a:srgbClr val="10B981"/>
+                </a:solidFill>
+                <a:latin typeface="맑은 고딕"/>
+              </a:rPr>
+              <a:t>친분 편향 0 → 비교 기준</a:t>
+            </a:r>
+          </a:p>
+        </p:txBody>
+      </p:sp>
+      <p:sp>
+        <p:nvSpPr>
+          <p:cNvPr id="15" name="TextBox 14"/>
+          <p:cNvSpPr txBox="1"/>
+          <p:nvPr/>
+        </p:nvSpPr>
+        <p:spPr>
+          <a:xfrm>
+            <a:off x="868680" y="4407407"/>
+            <a:ext cx="365760" cy="320040"/>
+          </a:xfrm>
+          <a:prstGeom prst="rect">
+            <a:avLst/>
+          </a:prstGeom>
+          <a:noFill/>
+        </p:spPr>
+        <p:txBody>
+          <a:bodyPr wrap="square" lIns="0" rIns="0" tIns="0" bIns="0">
+            <a:spAutoFit/>
+          </a:bodyPr>
+          <a:lstStyle/>
+          <a:p>
+            <a:pPr algn="l">
+              <a:lnSpc>
+                <a:spcPct val="125000"/>
+              </a:lnSpc>
+            </a:pPr>
+            <a:r>
+              <a:rPr sz="1400" b="1">
+                <a:solidFill>
+                  <a:srgbClr val="EC4899"/>
+                </a:solidFill>
+                <a:latin typeface="맑은 고딕"/>
+              </a:rPr>
+              <a:t>②</a:t>
+            </a:r>
+          </a:p>
+        </p:txBody>
+      </p:sp>
+      <p:sp>
+        <p:nvSpPr>
+          <p:cNvPr id="16" name="TextBox 15"/>
+          <p:cNvSpPr txBox="1"/>
+          <p:nvPr/>
+        </p:nvSpPr>
+        <p:spPr>
+          <a:xfrm>
+            <a:off x="1371600" y="4361688"/>
+            <a:ext cx="3200400" cy="365760"/>
+          </a:xfrm>
+          <a:prstGeom prst="rect">
+            <a:avLst/>
+          </a:prstGeom>
+          <a:noFill/>
+        </p:spPr>
+        <p:txBody>
+          <a:bodyPr wrap="square" lIns="0" rIns="0" tIns="0" bIns="0">
+            <a:spAutoFit/>
+          </a:bodyPr>
+          <a:lstStyle/>
+          <a:p>
+            <a:pPr algn="l">
+              <a:lnSpc>
+                <a:spcPct val="125000"/>
+              </a:lnSpc>
+            </a:pPr>
+            <a:r>
+              <a:rPr sz="1200" b="1">
                 <a:solidFill>
                   <a:srgbClr val="0F141F"/>
                 </a:solidFill>
                 <a:latin typeface="맑은 고딕"/>
               </a:rPr>
-              <a:t>무작위</a:t>
-            </a:r>
-          </a:p>
-        </p:txBody>
-      </p:sp>
-      <p:sp>
-        <p:nvSpPr>
-          <p:cNvPr id="12" name="TextBox 11"/>
-          <p:cNvSpPr txBox="1"/>
-          <p:nvPr/>
-        </p:nvSpPr>
-        <p:spPr>
-          <a:xfrm>
-            <a:off x="4023360" y="2880360"/>
-            <a:ext cx="4114800" cy="365760"/>
-          </a:xfrm>
-          <a:prstGeom prst="rect">
-            <a:avLst/>
-          </a:prstGeom>
-          <a:noFill/>
-        </p:spPr>
-        <p:txBody>
-          <a:bodyPr wrap="square" lIns="0" rIns="0" tIns="0" bIns="0">
-            <a:spAutoFit/>
-          </a:bodyPr>
-          <a:lstStyle/>
-          <a:p>
-            <a:pPr algn="l">
-              <a:lnSpc>
-                <a:spcPct val="125000"/>
-              </a:lnSpc>
-            </a:pPr>
-            <a:r>
-              <a:rPr sz="1100" b="0">
+              <a:t>친한 사람만</a:t>
+            </a:r>
+          </a:p>
+        </p:txBody>
+      </p:sp>
+      <p:sp>
+        <p:nvSpPr>
+          <p:cNvPr id="17" name="TextBox 16"/>
+          <p:cNvSpPr txBox="1"/>
+          <p:nvPr/>
+        </p:nvSpPr>
+        <p:spPr>
+          <a:xfrm>
+            <a:off x="4754880" y="4361688"/>
+            <a:ext cx="3657600" cy="365760"/>
+          </a:xfrm>
+          <a:prstGeom prst="rect">
+            <a:avLst/>
+          </a:prstGeom>
+          <a:noFill/>
+        </p:spPr>
+        <p:txBody>
+          <a:bodyPr wrap="square" lIns="0" rIns="0" tIns="0" bIns="0">
+            <a:spAutoFit/>
+          </a:bodyPr>
+          <a:lstStyle/>
+          <a:p>
+            <a:pPr algn="l">
+              <a:lnSpc>
+                <a:spcPct val="125000"/>
+              </a:lnSpc>
+            </a:pPr>
+            <a:r>
+              <a:rPr sz="1000" b="0">
                 <a:solidFill>
                   <a:srgbClr val="424B5C"/>
                 </a:solidFill>
                 <a:latin typeface="맑은 고딕"/>
               </a:rPr>
-              <a:t>랜덤 지명</a:t>
-            </a:r>
-          </a:p>
-        </p:txBody>
-      </p:sp>
-      <p:sp>
-        <p:nvSpPr>
-          <p:cNvPr id="13" name="TextBox 12"/>
-          <p:cNvSpPr txBox="1"/>
-          <p:nvPr/>
-        </p:nvSpPr>
-        <p:spPr>
-          <a:xfrm>
-            <a:off x="8229600" y="2880360"/>
+              <a:t>친밀도 상위 5명</a:t>
+            </a:r>
+          </a:p>
+        </p:txBody>
+      </p:sp>
+      <p:sp>
+        <p:nvSpPr>
+          <p:cNvPr id="18" name="TextBox 17"/>
+          <p:cNvSpPr txBox="1"/>
+          <p:nvPr/>
+        </p:nvSpPr>
+        <p:spPr>
+          <a:xfrm>
+            <a:off x="8595360" y="4361688"/>
+            <a:ext cx="3017520" cy="365760"/>
+          </a:xfrm>
+          <a:prstGeom prst="rect">
+            <a:avLst/>
+          </a:prstGeom>
+          <a:noFill/>
+        </p:spPr>
+        <p:txBody>
+          <a:bodyPr wrap="square" lIns="0" rIns="0" tIns="0" bIns="0">
+            <a:spAutoFit/>
+          </a:bodyPr>
+          <a:lstStyle/>
+          <a:p>
+            <a:pPr algn="l">
+              <a:lnSpc>
+                <a:spcPct val="125000"/>
+              </a:lnSpc>
+            </a:pPr>
+            <a:r>
+              <a:rPr sz="1000" b="1">
+                <a:solidFill>
+                  <a:srgbClr val="EC4899"/>
+                </a:solidFill>
+                <a:latin typeface="맑은 고딕"/>
+              </a:rPr>
+              <a:t>친분 100%, 역량 낮음 (현실)</a:t>
+            </a:r>
+          </a:p>
+        </p:txBody>
+      </p:sp>
+      <p:sp>
+        <p:nvSpPr>
+          <p:cNvPr id="19" name="TextBox 18"/>
+          <p:cNvSpPr txBox="1"/>
+          <p:nvPr/>
+        </p:nvSpPr>
+        <p:spPr>
+          <a:xfrm>
+            <a:off x="868680" y="4882896"/>
+            <a:ext cx="365760" cy="320040"/>
+          </a:xfrm>
+          <a:prstGeom prst="rect">
+            <a:avLst/>
+          </a:prstGeom>
+          <a:noFill/>
+        </p:spPr>
+        <p:txBody>
+          <a:bodyPr wrap="square" lIns="0" rIns="0" tIns="0" bIns="0">
+            <a:spAutoFit/>
+          </a:bodyPr>
+          <a:lstStyle/>
+          <a:p>
+            <a:pPr algn="l">
+              <a:lnSpc>
+                <a:spcPct val="125000"/>
+              </a:lnSpc>
+            </a:pPr>
+            <a:r>
+              <a:rPr sz="1400" b="1">
+                <a:solidFill>
+                  <a:srgbClr val="4F46E5"/>
+                </a:solidFill>
+                <a:latin typeface="맑은 고딕"/>
+              </a:rPr>
+              <a:t>③</a:t>
+            </a:r>
+          </a:p>
+        </p:txBody>
+      </p:sp>
+      <p:sp>
+        <p:nvSpPr>
+          <p:cNvPr id="20" name="TextBox 19"/>
+          <p:cNvSpPr txBox="1"/>
+          <p:nvPr/>
+        </p:nvSpPr>
+        <p:spPr>
+          <a:xfrm>
+            <a:off x="1371600" y="4837176"/>
             <a:ext cx="3200400" cy="365760"/>
           </a:xfrm>
           <a:prstGeom prst="rect">
@@ -19587,132 +18778,79 @@
               </a:lnSpc>
             </a:pPr>
             <a:r>
-              <a:rPr sz="1100" b="1">
-                <a:solidFill>
-                  <a:srgbClr val="10B981"/>
-                </a:solidFill>
-                <a:latin typeface="맑은 고딕"/>
-              </a:rPr>
-              <a:t>친분 편향 0</a:t>
-            </a:r>
-          </a:p>
-        </p:txBody>
-      </p:sp>
-      <p:sp>
-        <p:nvSpPr>
-          <p:cNvPr id="14" name="Rounded Rectangle 13"/>
-          <p:cNvSpPr/>
-          <p:nvPr/>
-        </p:nvSpPr>
-        <p:spPr>
-          <a:xfrm>
-            <a:off x="640080" y="3456432"/>
-            <a:ext cx="10881360" cy="594360"/>
-          </a:xfrm>
-          <a:prstGeom prst="roundRect">
-            <a:avLst>
-              <a:gd name="adj" fmla="val 4000"/>
-            </a:avLst>
-          </a:prstGeom>
-          <a:solidFill>
-            <a:srgbClr val="FAFBFC"/>
-          </a:solidFill>
-          <a:ln w="12700">
-            <a:solidFill>
-              <a:srgbClr val="E5E7EB"/>
-            </a:solidFill>
-          </a:ln>
-        </p:spPr>
-        <p:style>
-          <a:lnRef idx="1">
-            <a:schemeClr val="accent1"/>
-          </a:lnRef>
-          <a:fillRef idx="3">
-            <a:schemeClr val="accent1"/>
-          </a:fillRef>
-          <a:effectRef idx="2">
-            <a:schemeClr val="accent1"/>
-          </a:effectRef>
-          <a:fontRef idx="minor">
-            <a:schemeClr val="lt1"/>
-          </a:fontRef>
-        </p:style>
-        <p:txBody>
-          <a:bodyPr rtlCol="0" anchor="ctr"/>
-          <a:lstStyle/>
-          <a:p>
-            <a:pPr algn="ctr"/>
-          </a:p>
-        </p:txBody>
-      </p:sp>
-      <p:sp>
-        <p:nvSpPr>
-          <p:cNvPr id="15" name="Rounded Rectangle 14"/>
-          <p:cNvSpPr/>
-          <p:nvPr/>
-        </p:nvSpPr>
-        <p:spPr>
-          <a:xfrm>
-            <a:off x="822960" y="3575304"/>
-            <a:ext cx="548640" cy="365760"/>
-          </a:xfrm>
-          <a:prstGeom prst="roundRect">
-            <a:avLst>
-              <a:gd name="adj" fmla="val 50000"/>
-            </a:avLst>
-          </a:prstGeom>
-          <a:solidFill>
-            <a:srgbClr val="EC4899"/>
-          </a:solidFill>
-          <a:ln>
-            <a:noFill/>
-          </a:ln>
-        </p:spPr>
-        <p:style>
-          <a:lnRef idx="1">
-            <a:schemeClr val="accent1"/>
-          </a:lnRef>
-          <a:fillRef idx="3">
-            <a:schemeClr val="accent1"/>
-          </a:fillRef>
-          <a:effectRef idx="2">
-            <a:schemeClr val="accent1"/>
-          </a:effectRef>
-          <a:fontRef idx="minor">
-            <a:schemeClr val="lt1"/>
-          </a:fontRef>
-        </p:style>
-        <p:txBody>
-          <a:bodyPr rtlCol="0" anchor="ctr"/>
-          <a:lstStyle/>
-          <a:p>
-            <a:pPr algn="ctr"/>
-          </a:p>
-        </p:txBody>
-      </p:sp>
-      <p:sp>
-        <p:nvSpPr>
-          <p:cNvPr id="16" name="TextBox 15"/>
-          <p:cNvSpPr txBox="1"/>
-          <p:nvPr/>
-        </p:nvSpPr>
-        <p:spPr>
-          <a:xfrm>
-            <a:off x="822960" y="3621024"/>
-            <a:ext cx="548640" cy="274320"/>
-          </a:xfrm>
-          <a:prstGeom prst="rect">
-            <a:avLst/>
-          </a:prstGeom>
-          <a:noFill/>
-        </p:spPr>
-        <p:txBody>
-          <a:bodyPr wrap="square" lIns="0" rIns="0" tIns="0" bIns="0">
-            <a:spAutoFit/>
-          </a:bodyPr>
-          <a:lstStyle/>
-          <a:p>
-            <a:pPr algn="ctr">
+              <a:rPr sz="1200" b="1">
+                <a:solidFill>
+                  <a:srgbClr val="0F141F"/>
+                </a:solidFill>
+                <a:latin typeface="맑은 고딕"/>
+              </a:rPr>
+              <a:t>잘하는 사람만</a:t>
+            </a:r>
+          </a:p>
+        </p:txBody>
+      </p:sp>
+      <p:sp>
+        <p:nvSpPr>
+          <p:cNvPr id="21" name="TextBox 20"/>
+          <p:cNvSpPr txBox="1"/>
+          <p:nvPr/>
+        </p:nvSpPr>
+        <p:spPr>
+          <a:xfrm>
+            <a:off x="4754880" y="4837176"/>
+            <a:ext cx="3657600" cy="365760"/>
+          </a:xfrm>
+          <a:prstGeom prst="rect">
+            <a:avLst/>
+          </a:prstGeom>
+          <a:noFill/>
+        </p:spPr>
+        <p:txBody>
+          <a:bodyPr wrap="square" lIns="0" rIns="0" tIns="0" bIns="0">
+            <a:spAutoFit/>
+          </a:bodyPr>
+          <a:lstStyle/>
+          <a:p>
+            <a:pPr algn="l">
+              <a:lnSpc>
+                <a:spcPct val="125000"/>
+              </a:lnSpc>
+            </a:pPr>
+            <a:r>
+              <a:rPr sz="1000" b="0">
+                <a:solidFill>
+                  <a:srgbClr val="424B5C"/>
+                </a:solidFill>
+                <a:latin typeface="맑은 고딕"/>
+              </a:rPr>
+              <a:t>역량 상위 5명</a:t>
+            </a:r>
+          </a:p>
+        </p:txBody>
+      </p:sp>
+      <p:sp>
+        <p:nvSpPr>
+          <p:cNvPr id="22" name="TextBox 21"/>
+          <p:cNvSpPr txBox="1"/>
+          <p:nvPr/>
+        </p:nvSpPr>
+        <p:spPr>
+          <a:xfrm>
+            <a:off x="8595360" y="4837176"/>
+            <a:ext cx="3017520" cy="365760"/>
+          </a:xfrm>
+          <a:prstGeom prst="rect">
+            <a:avLst/>
+          </a:prstGeom>
+          <a:noFill/>
+        </p:spPr>
+        <p:txBody>
+          <a:bodyPr wrap="square" lIns="0" rIns="0" tIns="0" bIns="0">
+            <a:spAutoFit/>
+          </a:bodyPr>
+          <a:lstStyle/>
+          <a:p>
+            <a:pPr algn="l">
               <a:lnSpc>
                 <a:spcPct val="125000"/>
               </a:lnSpc>
@@ -19720,102 +18858,219 @@
             <a:r>
               <a:rPr sz="1000" b="1">
                 <a:solidFill>
-                  <a:srgbClr val="FFFFFF"/>
-                </a:solidFill>
-                <a:latin typeface="맑은 고딕"/>
-              </a:rPr>
-              <a:t>B</a:t>
-            </a:r>
-          </a:p>
-        </p:txBody>
-      </p:sp>
-      <p:sp>
-        <p:nvSpPr>
-          <p:cNvPr id="17" name="TextBox 16"/>
-          <p:cNvSpPr txBox="1"/>
-          <p:nvPr/>
-        </p:nvSpPr>
-        <p:spPr>
-          <a:xfrm>
-            <a:off x="1554480" y="3593592"/>
-            <a:ext cx="2286000" cy="365760"/>
-          </a:xfrm>
-          <a:prstGeom prst="rect">
-            <a:avLst/>
-          </a:prstGeom>
-          <a:noFill/>
-        </p:spPr>
-        <p:txBody>
-          <a:bodyPr wrap="square" lIns="0" rIns="0" tIns="0" bIns="0">
-            <a:spAutoFit/>
-          </a:bodyPr>
-          <a:lstStyle/>
-          <a:p>
-            <a:pPr algn="l">
-              <a:lnSpc>
-                <a:spcPct val="125000"/>
-              </a:lnSpc>
-            </a:pPr>
-            <a:r>
-              <a:rPr sz="1300" b="1">
+                  <a:srgbClr val="4F46E5"/>
+                </a:solidFill>
+                <a:latin typeface="맑은 고딕"/>
+              </a:rPr>
+              <a:t>역량 100%, 친분 0 (이상)</a:t>
+            </a:r>
+          </a:p>
+        </p:txBody>
+      </p:sp>
+      <p:sp>
+        <p:nvSpPr>
+          <p:cNvPr id="23" name="TextBox 22"/>
+          <p:cNvSpPr txBox="1"/>
+          <p:nvPr/>
+        </p:nvSpPr>
+        <p:spPr>
+          <a:xfrm>
+            <a:off x="868680" y="5358384"/>
+            <a:ext cx="365760" cy="320040"/>
+          </a:xfrm>
+          <a:prstGeom prst="rect">
+            <a:avLst/>
+          </a:prstGeom>
+          <a:noFill/>
+        </p:spPr>
+        <p:txBody>
+          <a:bodyPr wrap="square" lIns="0" rIns="0" tIns="0" bIns="0">
+            <a:spAutoFit/>
+          </a:bodyPr>
+          <a:lstStyle/>
+          <a:p>
+            <a:pPr algn="l">
+              <a:lnSpc>
+                <a:spcPct val="125000"/>
+              </a:lnSpc>
+            </a:pPr>
+            <a:r>
+              <a:rPr sz="1400" b="1">
+                <a:solidFill>
+                  <a:srgbClr val="F59E0B"/>
+                </a:solidFill>
+                <a:latin typeface="맑은 고딕"/>
+              </a:rPr>
+              <a:t>④</a:t>
+            </a:r>
+          </a:p>
+        </p:txBody>
+      </p:sp>
+      <p:sp>
+        <p:nvSpPr>
+          <p:cNvPr id="24" name="TextBox 23"/>
+          <p:cNvSpPr txBox="1"/>
+          <p:nvPr/>
+        </p:nvSpPr>
+        <p:spPr>
+          <a:xfrm>
+            <a:off x="1371600" y="5312664"/>
+            <a:ext cx="3200400" cy="365760"/>
+          </a:xfrm>
+          <a:prstGeom prst="rect">
+            <a:avLst/>
+          </a:prstGeom>
+          <a:noFill/>
+        </p:spPr>
+        <p:txBody>
+          <a:bodyPr wrap="square" lIns="0" rIns="0" tIns="0" bIns="0">
+            <a:spAutoFit/>
+          </a:bodyPr>
+          <a:lstStyle/>
+          <a:p>
+            <a:pPr algn="l">
+              <a:lnSpc>
+                <a:spcPct val="125000"/>
+              </a:lnSpc>
+            </a:pPr>
+            <a:r>
+              <a:rPr sz="1200" b="1">
                 <a:solidFill>
                   <a:srgbClr val="0F141F"/>
                 </a:solidFill>
                 <a:latin typeface="맑은 고딕"/>
               </a:rPr>
-              <a:t>친분 우선</a:t>
-            </a:r>
-          </a:p>
-        </p:txBody>
-      </p:sp>
-      <p:sp>
-        <p:nvSpPr>
-          <p:cNvPr id="18" name="TextBox 17"/>
-          <p:cNvSpPr txBox="1"/>
-          <p:nvPr/>
-        </p:nvSpPr>
-        <p:spPr>
-          <a:xfrm>
-            <a:off x="4023360" y="3593592"/>
-            <a:ext cx="4114800" cy="365760"/>
-          </a:xfrm>
-          <a:prstGeom prst="rect">
-            <a:avLst/>
-          </a:prstGeom>
-          <a:noFill/>
-        </p:spPr>
-        <p:txBody>
-          <a:bodyPr wrap="square" lIns="0" rIns="0" tIns="0" bIns="0">
-            <a:spAutoFit/>
-          </a:bodyPr>
-          <a:lstStyle/>
-          <a:p>
-            <a:pPr algn="l">
-              <a:lnSpc>
-                <a:spcPct val="125000"/>
-              </a:lnSpc>
-            </a:pPr>
-            <a:r>
-              <a:rPr sz="1100" b="0">
+              <a:t>머리에 떠오르는 사람</a:t>
+            </a:r>
+          </a:p>
+        </p:txBody>
+      </p:sp>
+      <p:sp>
+        <p:nvSpPr>
+          <p:cNvPr id="25" name="TextBox 24"/>
+          <p:cNvSpPr txBox="1"/>
+          <p:nvPr/>
+        </p:nvSpPr>
+        <p:spPr>
+          <a:xfrm>
+            <a:off x="4754880" y="5312664"/>
+            <a:ext cx="3657600" cy="365760"/>
+          </a:xfrm>
+          <a:prstGeom prst="rect">
+            <a:avLst/>
+          </a:prstGeom>
+          <a:noFill/>
+        </p:spPr>
+        <p:txBody>
+          <a:bodyPr wrap="square" lIns="0" rIns="0" tIns="0" bIns="0">
+            <a:spAutoFit/>
+          </a:bodyPr>
+          <a:lstStyle/>
+          <a:p>
+            <a:pPr algn="l">
+              <a:lnSpc>
+                <a:spcPct val="125000"/>
+              </a:lnSpc>
+            </a:pPr>
+            <a:r>
+              <a:rPr sz="1000" b="0">
                 <a:solidFill>
                   <a:srgbClr val="424B5C"/>
                 </a:solidFill>
                 <a:latin typeface="맑은 고딕"/>
               </a:rPr>
-              <a:t>closeness 상위</a:t>
-            </a:r>
-          </a:p>
-        </p:txBody>
-      </p:sp>
-      <p:sp>
-        <p:nvSpPr>
-          <p:cNvPr id="19" name="TextBox 18"/>
-          <p:cNvSpPr txBox="1"/>
-          <p:nvPr/>
-        </p:nvSpPr>
-        <p:spPr>
-          <a:xfrm>
-            <a:off x="8229600" y="3593592"/>
+              <a:t>친한 7명 떠올리고 그 중 5명</a:t>
+            </a:r>
+          </a:p>
+        </p:txBody>
+      </p:sp>
+      <p:sp>
+        <p:nvSpPr>
+          <p:cNvPr id="26" name="TextBox 25"/>
+          <p:cNvSpPr txBox="1"/>
+          <p:nvPr/>
+        </p:nvSpPr>
+        <p:spPr>
+          <a:xfrm>
+            <a:off x="8595360" y="5312664"/>
+            <a:ext cx="3017520" cy="365760"/>
+          </a:xfrm>
+          <a:prstGeom prst="rect">
+            <a:avLst/>
+          </a:prstGeom>
+          <a:noFill/>
+        </p:spPr>
+        <p:txBody>
+          <a:bodyPr wrap="square" lIns="0" rIns="0" tIns="0" bIns="0">
+            <a:spAutoFit/>
+          </a:bodyPr>
+          <a:lstStyle/>
+          <a:p>
+            <a:pPr algn="l">
+              <a:lnSpc>
+                <a:spcPct val="125000"/>
+              </a:lnSpc>
+            </a:pPr>
+            <a:r>
+              <a:rPr sz="1000" b="1">
+                <a:solidFill>
+                  <a:srgbClr val="F59E0B"/>
+                </a:solidFill>
+                <a:latin typeface="맑은 고딕"/>
+              </a:rPr>
+              <a:t>현실의 satisficing</a:t>
+            </a:r>
+          </a:p>
+        </p:txBody>
+      </p:sp>
+      <p:sp>
+        <p:nvSpPr>
+          <p:cNvPr id="27" name="TextBox 26"/>
+          <p:cNvSpPr txBox="1"/>
+          <p:nvPr/>
+        </p:nvSpPr>
+        <p:spPr>
+          <a:xfrm>
+            <a:off x="868680" y="5833872"/>
+            <a:ext cx="365760" cy="320040"/>
+          </a:xfrm>
+          <a:prstGeom prst="rect">
+            <a:avLst/>
+          </a:prstGeom>
+          <a:noFill/>
+        </p:spPr>
+        <p:txBody>
+          <a:bodyPr wrap="square" lIns="0" rIns="0" tIns="0" bIns="0">
+            <a:spAutoFit/>
+          </a:bodyPr>
+          <a:lstStyle/>
+          <a:p>
+            <a:pPr algn="l">
+              <a:lnSpc>
+                <a:spcPct val="125000"/>
+              </a:lnSpc>
+            </a:pPr>
+            <a:r>
+              <a:rPr sz="1400" b="1">
+                <a:solidFill>
+                  <a:srgbClr val="424B5C"/>
+                </a:solidFill>
+                <a:latin typeface="맑은 고딕"/>
+              </a:rPr>
+              <a:t>⑤</a:t>
+            </a:r>
+          </a:p>
+        </p:txBody>
+      </p:sp>
+      <p:sp>
+        <p:nvSpPr>
+          <p:cNvPr id="28" name="TextBox 27"/>
+          <p:cNvSpPr txBox="1"/>
+          <p:nvPr/>
+        </p:nvSpPr>
+        <p:spPr>
+          <a:xfrm>
+            <a:off x="1371600" y="5788152"/>
             <a:ext cx="3200400" cy="365760"/>
           </a:xfrm>
           <a:prstGeom prst="rect">
@@ -19835,132 +19090,79 @@
               </a:lnSpc>
             </a:pPr>
             <a:r>
-              <a:rPr sz="1100" b="1">
-                <a:solidFill>
-                  <a:srgbClr val="EC4899"/>
-                </a:solidFill>
-                <a:latin typeface="맑은 고딕"/>
-              </a:rPr>
-              <a:t>친분↑ 역량↓</a:t>
-            </a:r>
-          </a:p>
-        </p:txBody>
-      </p:sp>
-      <p:sp>
-        <p:nvSpPr>
-          <p:cNvPr id="20" name="Rounded Rectangle 19"/>
-          <p:cNvSpPr/>
-          <p:nvPr/>
-        </p:nvSpPr>
-        <p:spPr>
-          <a:xfrm>
-            <a:off x="640080" y="4169664"/>
-            <a:ext cx="10881360" cy="594360"/>
-          </a:xfrm>
-          <a:prstGeom prst="roundRect">
-            <a:avLst>
-              <a:gd name="adj" fmla="val 4000"/>
-            </a:avLst>
-          </a:prstGeom>
-          <a:solidFill>
-            <a:srgbClr val="FAFBFC"/>
-          </a:solidFill>
-          <a:ln w="12700">
-            <a:solidFill>
-              <a:srgbClr val="E5E7EB"/>
-            </a:solidFill>
-          </a:ln>
-        </p:spPr>
-        <p:style>
-          <a:lnRef idx="1">
-            <a:schemeClr val="accent1"/>
-          </a:lnRef>
-          <a:fillRef idx="3">
-            <a:schemeClr val="accent1"/>
-          </a:fillRef>
-          <a:effectRef idx="2">
-            <a:schemeClr val="accent1"/>
-          </a:effectRef>
-          <a:fontRef idx="minor">
-            <a:schemeClr val="lt1"/>
-          </a:fontRef>
-        </p:style>
-        <p:txBody>
-          <a:bodyPr rtlCol="0" anchor="ctr"/>
-          <a:lstStyle/>
-          <a:p>
-            <a:pPr algn="ctr"/>
-          </a:p>
-        </p:txBody>
-      </p:sp>
-      <p:sp>
-        <p:nvSpPr>
-          <p:cNvPr id="21" name="Rounded Rectangle 20"/>
-          <p:cNvSpPr/>
-          <p:nvPr/>
-        </p:nvSpPr>
-        <p:spPr>
-          <a:xfrm>
-            <a:off x="822960" y="4288536"/>
-            <a:ext cx="548640" cy="365760"/>
-          </a:xfrm>
-          <a:prstGeom prst="roundRect">
-            <a:avLst>
-              <a:gd name="adj" fmla="val 50000"/>
-            </a:avLst>
-          </a:prstGeom>
-          <a:solidFill>
-            <a:srgbClr val="4F46E5"/>
-          </a:solidFill>
-          <a:ln>
-            <a:noFill/>
-          </a:ln>
-        </p:spPr>
-        <p:style>
-          <a:lnRef idx="1">
-            <a:schemeClr val="accent1"/>
-          </a:lnRef>
-          <a:fillRef idx="3">
-            <a:schemeClr val="accent1"/>
-          </a:fillRef>
-          <a:effectRef idx="2">
-            <a:schemeClr val="accent1"/>
-          </a:effectRef>
-          <a:fontRef idx="minor">
-            <a:schemeClr val="lt1"/>
-          </a:fontRef>
-        </p:style>
-        <p:txBody>
-          <a:bodyPr rtlCol="0" anchor="ctr"/>
-          <a:lstStyle/>
-          <a:p>
-            <a:pPr algn="ctr"/>
-          </a:p>
-        </p:txBody>
-      </p:sp>
-      <p:sp>
-        <p:nvSpPr>
-          <p:cNvPr id="22" name="TextBox 21"/>
-          <p:cNvSpPr txBox="1"/>
-          <p:nvPr/>
-        </p:nvSpPr>
-        <p:spPr>
-          <a:xfrm>
-            <a:off x="822960" y="4334256"/>
-            <a:ext cx="548640" cy="274320"/>
-          </a:xfrm>
-          <a:prstGeom prst="rect">
-            <a:avLst/>
-          </a:prstGeom>
-          <a:noFill/>
-        </p:spPr>
-        <p:txBody>
-          <a:bodyPr wrap="square" lIns="0" rIns="0" tIns="0" bIns="0">
-            <a:spAutoFit/>
-          </a:bodyPr>
-          <a:lstStyle/>
-          <a:p>
-            <a:pPr algn="ctr">
+              <a:rPr sz="1200" b="1">
+                <a:solidFill>
+                  <a:srgbClr val="0F141F"/>
+                </a:solidFill>
+                <a:latin typeface="맑은 고딕"/>
+              </a:rPr>
+              <a:t>프로필 카드 보고</a:t>
+            </a:r>
+          </a:p>
+        </p:txBody>
+      </p:sp>
+      <p:sp>
+        <p:nvSpPr>
+          <p:cNvPr id="29" name="TextBox 28"/>
+          <p:cNvSpPr txBox="1"/>
+          <p:nvPr/>
+        </p:nvSpPr>
+        <p:spPr>
+          <a:xfrm>
+            <a:off x="4754880" y="5788152"/>
+            <a:ext cx="3657600" cy="365760"/>
+          </a:xfrm>
+          <a:prstGeom prst="rect">
+            <a:avLst/>
+          </a:prstGeom>
+          <a:noFill/>
+        </p:spPr>
+        <p:txBody>
+          <a:bodyPr wrap="square" lIns="0" rIns="0" tIns="0" bIns="0">
+            <a:spAutoFit/>
+          </a:bodyPr>
+          <a:lstStyle/>
+          <a:p>
+            <a:pPr algn="l">
+              <a:lnSpc>
+                <a:spcPct val="125000"/>
+              </a:lnSpc>
+            </a:pPr>
+            <a:r>
+              <a:rPr sz="1000" b="0">
+                <a:solidFill>
+                  <a:srgbClr val="424B5C"/>
+                </a:solidFill>
+                <a:latin typeface="맑은 고딕"/>
+              </a:rPr>
+              <a:t>정보 본 후 다양성 고려</a:t>
+            </a:r>
+          </a:p>
+        </p:txBody>
+      </p:sp>
+      <p:sp>
+        <p:nvSpPr>
+          <p:cNvPr id="30" name="TextBox 29"/>
+          <p:cNvSpPr txBox="1"/>
+          <p:nvPr/>
+        </p:nvSpPr>
+        <p:spPr>
+          <a:xfrm>
+            <a:off x="8595360" y="5788152"/>
+            <a:ext cx="3017520" cy="365760"/>
+          </a:xfrm>
+          <a:prstGeom prst="rect">
+            <a:avLst/>
+          </a:prstGeom>
+          <a:noFill/>
+        </p:spPr>
+        <p:txBody>
+          <a:bodyPr wrap="square" lIns="0" rIns="0" tIns="0" bIns="0">
+            <a:spAutoFit/>
+          </a:bodyPr>
+          <a:lstStyle/>
+          <a:p>
+            <a:pPr algn="l">
               <a:lnSpc>
                 <a:spcPct val="125000"/>
               </a:lnSpc>
@@ -19968,337 +19170,11 @@
             <a:r>
               <a:rPr sz="1000" b="1">
                 <a:solidFill>
-                  <a:srgbClr val="FFFFFF"/>
-                </a:solidFill>
-                <a:latin typeface="맑은 고딕"/>
-              </a:rPr>
-              <a:t>C</a:t>
-            </a:r>
-          </a:p>
-        </p:txBody>
-      </p:sp>
-      <p:sp>
-        <p:nvSpPr>
-          <p:cNvPr id="23" name="TextBox 22"/>
-          <p:cNvSpPr txBox="1"/>
-          <p:nvPr/>
-        </p:nvSpPr>
-        <p:spPr>
-          <a:xfrm>
-            <a:off x="1554480" y="4306824"/>
-            <a:ext cx="2286000" cy="365760"/>
-          </a:xfrm>
-          <a:prstGeom prst="rect">
-            <a:avLst/>
-          </a:prstGeom>
-          <a:noFill/>
-        </p:spPr>
-        <p:txBody>
-          <a:bodyPr wrap="square" lIns="0" rIns="0" tIns="0" bIns="0">
-            <a:spAutoFit/>
-          </a:bodyPr>
-          <a:lstStyle/>
-          <a:p>
-            <a:pPr algn="l">
-              <a:lnSpc>
-                <a:spcPct val="125000"/>
-              </a:lnSpc>
-            </a:pPr>
-            <a:r>
-              <a:rPr sz="1300" b="1">
-                <a:solidFill>
-                  <a:srgbClr val="0F141F"/>
-                </a:solidFill>
-                <a:latin typeface="맑은 고딕"/>
-              </a:rPr>
-              <a:t>역량 우선</a:t>
-            </a:r>
-          </a:p>
-        </p:txBody>
-      </p:sp>
-      <p:sp>
-        <p:nvSpPr>
-          <p:cNvPr id="24" name="TextBox 23"/>
-          <p:cNvSpPr txBox="1"/>
-          <p:nvPr/>
-        </p:nvSpPr>
-        <p:spPr>
-          <a:xfrm>
-            <a:off x="4023360" y="4306824"/>
-            <a:ext cx="4114800" cy="365760"/>
-          </a:xfrm>
-          <a:prstGeom prst="rect">
-            <a:avLst/>
-          </a:prstGeom>
-          <a:noFill/>
-        </p:spPr>
-        <p:txBody>
-          <a:bodyPr wrap="square" lIns="0" rIns="0" tIns="0" bIns="0">
-            <a:spAutoFit/>
-          </a:bodyPr>
-          <a:lstStyle/>
-          <a:p>
-            <a:pPr algn="l">
-              <a:lnSpc>
-                <a:spcPct val="125000"/>
-              </a:lnSpc>
-            </a:pPr>
-            <a:r>
-              <a:rPr sz="1100" b="0">
-                <a:solidFill>
                   <a:srgbClr val="424B5C"/>
                 </a:solidFill>
                 <a:latin typeface="맑은 고딕"/>
               </a:rPr>
-              <a:t>ability 상위</a:t>
-            </a:r>
-          </a:p>
-        </p:txBody>
-      </p:sp>
-      <p:sp>
-        <p:nvSpPr>
-          <p:cNvPr id="25" name="TextBox 24"/>
-          <p:cNvSpPr txBox="1"/>
-          <p:nvPr/>
-        </p:nvSpPr>
-        <p:spPr>
-          <a:xfrm>
-            <a:off x="8229600" y="4306824"/>
-            <a:ext cx="3200400" cy="365760"/>
-          </a:xfrm>
-          <a:prstGeom prst="rect">
-            <a:avLst/>
-          </a:prstGeom>
-          <a:noFill/>
-        </p:spPr>
-        <p:txBody>
-          <a:bodyPr wrap="square" lIns="0" rIns="0" tIns="0" bIns="0">
-            <a:spAutoFit/>
-          </a:bodyPr>
-          <a:lstStyle/>
-          <a:p>
-            <a:pPr algn="l">
-              <a:lnSpc>
-                <a:spcPct val="125000"/>
-              </a:lnSpc>
-            </a:pPr>
-            <a:r>
-              <a:rPr sz="1100" b="1">
-                <a:solidFill>
-                  <a:srgbClr val="4F46E5"/>
-                </a:solidFill>
-                <a:latin typeface="맑은 고딕"/>
-              </a:rPr>
-              <a:t>역량↑ 친분 0</a:t>
-            </a:r>
-          </a:p>
-        </p:txBody>
-      </p:sp>
-      <p:sp>
-        <p:nvSpPr>
-          <p:cNvPr id="26" name="Rounded Rectangle 25"/>
-          <p:cNvSpPr/>
-          <p:nvPr/>
-        </p:nvSpPr>
-        <p:spPr>
-          <a:xfrm>
-            <a:off x="640080" y="4882896"/>
-            <a:ext cx="10881360" cy="594360"/>
-          </a:xfrm>
-          <a:prstGeom prst="roundRect">
-            <a:avLst>
-              <a:gd name="adj" fmla="val 4000"/>
-            </a:avLst>
-          </a:prstGeom>
-          <a:solidFill>
-            <a:srgbClr val="FAFBFC"/>
-          </a:solidFill>
-          <a:ln w="12700">
-            <a:solidFill>
-              <a:srgbClr val="E5E7EB"/>
-            </a:solidFill>
-          </a:ln>
-        </p:spPr>
-        <p:style>
-          <a:lnRef idx="1">
-            <a:schemeClr val="accent1"/>
-          </a:lnRef>
-          <a:fillRef idx="3">
-            <a:schemeClr val="accent1"/>
-          </a:fillRef>
-          <a:effectRef idx="2">
-            <a:schemeClr val="accent1"/>
-          </a:effectRef>
-          <a:fontRef idx="minor">
-            <a:schemeClr val="lt1"/>
-          </a:fontRef>
-        </p:style>
-        <p:txBody>
-          <a:bodyPr rtlCol="0" anchor="ctr"/>
-          <a:lstStyle/>
-          <a:p>
-            <a:pPr algn="ctr"/>
-          </a:p>
-        </p:txBody>
-      </p:sp>
-      <p:sp>
-        <p:nvSpPr>
-          <p:cNvPr id="27" name="Rounded Rectangle 26"/>
-          <p:cNvSpPr/>
-          <p:nvPr/>
-        </p:nvSpPr>
-        <p:spPr>
-          <a:xfrm>
-            <a:off x="822960" y="5001768"/>
-            <a:ext cx="548640" cy="365760"/>
-          </a:xfrm>
-          <a:prstGeom prst="roundRect">
-            <a:avLst>
-              <a:gd name="adj" fmla="val 50000"/>
-            </a:avLst>
-          </a:prstGeom>
-          <a:solidFill>
-            <a:srgbClr val="F59E0B"/>
-          </a:solidFill>
-          <a:ln>
-            <a:noFill/>
-          </a:ln>
-        </p:spPr>
-        <p:style>
-          <a:lnRef idx="1">
-            <a:schemeClr val="accent1"/>
-          </a:lnRef>
-          <a:fillRef idx="3">
-            <a:schemeClr val="accent1"/>
-          </a:fillRef>
-          <a:effectRef idx="2">
-            <a:schemeClr val="accent1"/>
-          </a:effectRef>
-          <a:fontRef idx="minor">
-            <a:schemeClr val="lt1"/>
-          </a:fontRef>
-        </p:style>
-        <p:txBody>
-          <a:bodyPr rtlCol="0" anchor="ctr"/>
-          <a:lstStyle/>
-          <a:p>
-            <a:pPr algn="ctr"/>
-          </a:p>
-        </p:txBody>
-      </p:sp>
-      <p:sp>
-        <p:nvSpPr>
-          <p:cNvPr id="28" name="TextBox 27"/>
-          <p:cNvSpPr txBox="1"/>
-          <p:nvPr/>
-        </p:nvSpPr>
-        <p:spPr>
-          <a:xfrm>
-            <a:off x="822960" y="5047488"/>
-            <a:ext cx="548640" cy="274320"/>
-          </a:xfrm>
-          <a:prstGeom prst="rect">
-            <a:avLst/>
-          </a:prstGeom>
-          <a:noFill/>
-        </p:spPr>
-        <p:txBody>
-          <a:bodyPr wrap="square" lIns="0" rIns="0" tIns="0" bIns="0">
-            <a:spAutoFit/>
-          </a:bodyPr>
-          <a:lstStyle/>
-          <a:p>
-            <a:pPr algn="ctr">
-              <a:lnSpc>
-                <a:spcPct val="125000"/>
-              </a:lnSpc>
-            </a:pPr>
-            <a:r>
-              <a:rPr sz="1000" b="1">
-                <a:solidFill>
-                  <a:srgbClr val="FFFFFF"/>
-                </a:solidFill>
-                <a:latin typeface="맑은 고딕"/>
-              </a:rPr>
-              <a:t>D</a:t>
-            </a:r>
-          </a:p>
-        </p:txBody>
-      </p:sp>
-      <p:sp>
-        <p:nvSpPr>
-          <p:cNvPr id="29" name="TextBox 28"/>
-          <p:cNvSpPr txBox="1"/>
-          <p:nvPr/>
-        </p:nvSpPr>
-        <p:spPr>
-          <a:xfrm>
-            <a:off x="1554480" y="5020056"/>
-            <a:ext cx="2286000" cy="365760"/>
-          </a:xfrm>
-          <a:prstGeom prst="rect">
-            <a:avLst/>
-          </a:prstGeom>
-          <a:noFill/>
-        </p:spPr>
-        <p:txBody>
-          <a:bodyPr wrap="square" lIns="0" rIns="0" tIns="0" bIns="0">
-            <a:spAutoFit/>
-          </a:bodyPr>
-          <a:lstStyle/>
-          <a:p>
-            <a:pPr algn="l">
-              <a:lnSpc>
-                <a:spcPct val="125000"/>
-              </a:lnSpc>
-            </a:pPr>
-            <a:r>
-              <a:rPr sz="1300" b="1">
-                <a:solidFill>
-                  <a:srgbClr val="0F141F"/>
-                </a:solidFill>
-                <a:latin typeface="맑은 고딕"/>
-              </a:rPr>
-              <a:t>WM 한계</a:t>
-            </a:r>
-          </a:p>
-        </p:txBody>
-      </p:sp>
-      <p:sp>
-        <p:nvSpPr>
-          <p:cNvPr id="30" name="TextBox 29"/>
-          <p:cNvSpPr txBox="1"/>
-          <p:nvPr/>
-        </p:nvSpPr>
-        <p:spPr>
-          <a:xfrm>
-            <a:off x="4023360" y="5020056"/>
-            <a:ext cx="4114800" cy="365760"/>
-          </a:xfrm>
-          <a:prstGeom prst="rect">
-            <a:avLst/>
-          </a:prstGeom>
-          <a:noFill/>
-        </p:spPr>
-        <p:txBody>
-          <a:bodyPr wrap="square" lIns="0" rIns="0" tIns="0" bIns="0">
-            <a:spAutoFit/>
-          </a:bodyPr>
-          <a:lstStyle/>
-          <a:p>
-            <a:pPr algn="l">
-              <a:lnSpc>
-                <a:spcPct val="125000"/>
-              </a:lnSpc>
-            </a:pPr>
-            <a:r>
-              <a:rPr sz="1100" b="0">
-                <a:solidFill>
-                  <a:srgbClr val="424B5C"/>
-                </a:solidFill>
-                <a:latin typeface="맑은 고딕"/>
-              </a:rPr>
-              <a:t>친한 7명 떠올림→ 선택</a:t>
+              <a:t>균형 잡힌 팀</a:t>
             </a:r>
           </a:p>
         </p:txBody>
@@ -20306,293 +19182,6 @@
       <p:sp>
         <p:nvSpPr>
           <p:cNvPr id="31" name="TextBox 30"/>
-          <p:cNvSpPr txBox="1"/>
-          <p:nvPr/>
-        </p:nvSpPr>
-        <p:spPr>
-          <a:xfrm>
-            <a:off x="8229600" y="5020056"/>
-            <a:ext cx="3200400" cy="365760"/>
-          </a:xfrm>
-          <a:prstGeom prst="rect">
-            <a:avLst/>
-          </a:prstGeom>
-          <a:noFill/>
-        </p:spPr>
-        <p:txBody>
-          <a:bodyPr wrap="square" lIns="0" rIns="0" tIns="0" bIns="0">
-            <a:spAutoFit/>
-          </a:bodyPr>
-          <a:lstStyle/>
-          <a:p>
-            <a:pPr algn="l">
-              <a:lnSpc>
-                <a:spcPct val="125000"/>
-              </a:lnSpc>
-            </a:pPr>
-            <a:r>
-              <a:rPr sz="1100" b="1">
-                <a:solidFill>
-                  <a:srgbClr val="F59E0B"/>
-                </a:solidFill>
-                <a:latin typeface="맑은 고딕"/>
-              </a:rPr>
-              <a:t>★ Satisficing 발현</a:t>
-            </a:r>
-          </a:p>
-        </p:txBody>
-      </p:sp>
-      <p:sp>
-        <p:nvSpPr>
-          <p:cNvPr id="32" name="Rounded Rectangle 31"/>
-          <p:cNvSpPr/>
-          <p:nvPr/>
-        </p:nvSpPr>
-        <p:spPr>
-          <a:xfrm>
-            <a:off x="640080" y="5596128"/>
-            <a:ext cx="10881360" cy="594360"/>
-          </a:xfrm>
-          <a:prstGeom prst="roundRect">
-            <a:avLst>
-              <a:gd name="adj" fmla="val 4000"/>
-            </a:avLst>
-          </a:prstGeom>
-          <a:solidFill>
-            <a:srgbClr val="FAFBFC"/>
-          </a:solidFill>
-          <a:ln w="12700">
-            <a:solidFill>
-              <a:srgbClr val="E5E7EB"/>
-            </a:solidFill>
-          </a:ln>
-        </p:spPr>
-        <p:style>
-          <a:lnRef idx="1">
-            <a:schemeClr val="accent1"/>
-          </a:lnRef>
-          <a:fillRef idx="3">
-            <a:schemeClr val="accent1"/>
-          </a:fillRef>
-          <a:effectRef idx="2">
-            <a:schemeClr val="accent1"/>
-          </a:effectRef>
-          <a:fontRef idx="minor">
-            <a:schemeClr val="lt1"/>
-          </a:fontRef>
-        </p:style>
-        <p:txBody>
-          <a:bodyPr rtlCol="0" anchor="ctr"/>
-          <a:lstStyle/>
-          <a:p>
-            <a:pPr algn="ctr"/>
-          </a:p>
-        </p:txBody>
-      </p:sp>
-      <p:sp>
-        <p:nvSpPr>
-          <p:cNvPr id="33" name="Rounded Rectangle 32"/>
-          <p:cNvSpPr/>
-          <p:nvPr/>
-        </p:nvSpPr>
-        <p:spPr>
-          <a:xfrm>
-            <a:off x="822960" y="5715000"/>
-            <a:ext cx="548640" cy="365760"/>
-          </a:xfrm>
-          <a:prstGeom prst="roundRect">
-            <a:avLst>
-              <a:gd name="adj" fmla="val 50000"/>
-            </a:avLst>
-          </a:prstGeom>
-          <a:solidFill>
-            <a:srgbClr val="424B5C"/>
-          </a:solidFill>
-          <a:ln>
-            <a:noFill/>
-          </a:ln>
-        </p:spPr>
-        <p:style>
-          <a:lnRef idx="1">
-            <a:schemeClr val="accent1"/>
-          </a:lnRef>
-          <a:fillRef idx="3">
-            <a:schemeClr val="accent1"/>
-          </a:fillRef>
-          <a:effectRef idx="2">
-            <a:schemeClr val="accent1"/>
-          </a:effectRef>
-          <a:fontRef idx="minor">
-            <a:schemeClr val="lt1"/>
-          </a:fontRef>
-        </p:style>
-        <p:txBody>
-          <a:bodyPr rtlCol="0" anchor="ctr"/>
-          <a:lstStyle/>
-          <a:p>
-            <a:pPr algn="ctr"/>
-          </a:p>
-        </p:txBody>
-      </p:sp>
-      <p:sp>
-        <p:nvSpPr>
-          <p:cNvPr id="34" name="TextBox 33"/>
-          <p:cNvSpPr txBox="1"/>
-          <p:nvPr/>
-        </p:nvSpPr>
-        <p:spPr>
-          <a:xfrm>
-            <a:off x="822960" y="5760720"/>
-            <a:ext cx="548640" cy="274320"/>
-          </a:xfrm>
-          <a:prstGeom prst="rect">
-            <a:avLst/>
-          </a:prstGeom>
-          <a:noFill/>
-        </p:spPr>
-        <p:txBody>
-          <a:bodyPr wrap="square" lIns="0" rIns="0" tIns="0" bIns="0">
-            <a:spAutoFit/>
-          </a:bodyPr>
-          <a:lstStyle/>
-          <a:p>
-            <a:pPr algn="ctr">
-              <a:lnSpc>
-                <a:spcPct val="125000"/>
-              </a:lnSpc>
-            </a:pPr>
-            <a:r>
-              <a:rPr sz="1000" b="1">
-                <a:solidFill>
-                  <a:srgbClr val="FFFFFF"/>
-                </a:solidFill>
-                <a:latin typeface="맑은 고딕"/>
-              </a:rPr>
-              <a:t>E</a:t>
-            </a:r>
-          </a:p>
-        </p:txBody>
-      </p:sp>
-      <p:sp>
-        <p:nvSpPr>
-          <p:cNvPr id="35" name="TextBox 34"/>
-          <p:cNvSpPr txBox="1"/>
-          <p:nvPr/>
-        </p:nvSpPr>
-        <p:spPr>
-          <a:xfrm>
-            <a:off x="1554480" y="5733288"/>
-            <a:ext cx="2286000" cy="365760"/>
-          </a:xfrm>
-          <a:prstGeom prst="rect">
-            <a:avLst/>
-          </a:prstGeom>
-          <a:noFill/>
-        </p:spPr>
-        <p:txBody>
-          <a:bodyPr wrap="square" lIns="0" rIns="0" tIns="0" bIns="0">
-            <a:spAutoFit/>
-          </a:bodyPr>
-          <a:lstStyle/>
-          <a:p>
-            <a:pPr algn="l">
-              <a:lnSpc>
-                <a:spcPct val="125000"/>
-              </a:lnSpc>
-            </a:pPr>
-            <a:r>
-              <a:rPr sz="1300" b="1">
-                <a:solidFill>
-                  <a:srgbClr val="0F141F"/>
-                </a:solidFill>
-                <a:latin typeface="맑은 고딕"/>
-              </a:rPr>
-              <a:t>프로필카드</a:t>
-            </a:r>
-          </a:p>
-        </p:txBody>
-      </p:sp>
-      <p:sp>
-        <p:nvSpPr>
-          <p:cNvPr id="36" name="TextBox 35"/>
-          <p:cNvSpPr txBox="1"/>
-          <p:nvPr/>
-        </p:nvSpPr>
-        <p:spPr>
-          <a:xfrm>
-            <a:off x="4023360" y="5733288"/>
-            <a:ext cx="4114800" cy="365760"/>
-          </a:xfrm>
-          <a:prstGeom prst="rect">
-            <a:avLst/>
-          </a:prstGeom>
-          <a:noFill/>
-        </p:spPr>
-        <p:txBody>
-          <a:bodyPr wrap="square" lIns="0" rIns="0" tIns="0" bIns="0">
-            <a:spAutoFit/>
-          </a:bodyPr>
-          <a:lstStyle/>
-          <a:p>
-            <a:pPr algn="l">
-              <a:lnSpc>
-                <a:spcPct val="125000"/>
-              </a:lnSpc>
-            </a:pPr>
-            <a:r>
-              <a:rPr sz="1100" b="0">
-                <a:solidFill>
-                  <a:srgbClr val="424B5C"/>
-                </a:solidFill>
-                <a:latin typeface="맑은 고딕"/>
-              </a:rPr>
-              <a:t>정보 + 다양성</a:t>
-            </a:r>
-          </a:p>
-        </p:txBody>
-      </p:sp>
-      <p:sp>
-        <p:nvSpPr>
-          <p:cNvPr id="37" name="TextBox 36"/>
-          <p:cNvSpPr txBox="1"/>
-          <p:nvPr/>
-        </p:nvSpPr>
-        <p:spPr>
-          <a:xfrm>
-            <a:off x="8229600" y="5733288"/>
-            <a:ext cx="3200400" cy="365760"/>
-          </a:xfrm>
-          <a:prstGeom prst="rect">
-            <a:avLst/>
-          </a:prstGeom>
-          <a:noFill/>
-        </p:spPr>
-        <p:txBody>
-          <a:bodyPr wrap="square" lIns="0" rIns="0" tIns="0" bIns="0">
-            <a:spAutoFit/>
-          </a:bodyPr>
-          <a:lstStyle/>
-          <a:p>
-            <a:pPr algn="l">
-              <a:lnSpc>
-                <a:spcPct val="125000"/>
-              </a:lnSpc>
-            </a:pPr>
-            <a:r>
-              <a:rPr sz="1100" b="1">
-                <a:solidFill>
-                  <a:srgbClr val="424B5C"/>
-                </a:solidFill>
-                <a:latin typeface="맑은 고딕"/>
-              </a:rPr>
-              <a:t>균형</a:t>
-            </a:r>
-          </a:p>
-        </p:txBody>
-      </p:sp>
-      <p:sp>
-        <p:nvSpPr>
-          <p:cNvPr id="38" name="TextBox 37"/>
           <p:cNvSpPr txBox="1"/>
           <p:nvPr/>
         </p:nvSpPr>
@@ -20618,13 +19207,13 @@
               </a:lnSpc>
             </a:pPr>
             <a:r>
-              <a:rPr sz="1100" b="0">
-                <a:solidFill>
-                  <a:srgbClr val="8B95A7"/>
-                </a:solidFill>
-                <a:latin typeface="맑은 고딕"/>
-              </a:rPr>
-              <a:t>산출: 5장 네트워크 그래프 PNG · 친분 편향 / 역량 std / 관심 entropy 측정</a:t>
+              <a:rPr sz="1200" b="1">
+                <a:solidFill>
+                  <a:srgbClr val="EC4899"/>
+                </a:solidFill>
+                <a:latin typeface="맑은 고딕"/>
+              </a:rPr>
+              <a:t>결과: 5장의 네트워크 그래프 → 발표 슬라이드 임팩트 최고</a:t>
             </a:r>
           </a:p>
         </p:txBody>
@@ -21296,13 +19885,13 @@
           </a:xfrm>
           <a:prstGeom prst="roundRect">
             <a:avLst>
-              <a:gd name="adj" fmla="val 4000"/>
+              <a:gd name="adj" fmla="val 6000"/>
             </a:avLst>
           </a:prstGeom>
           <a:solidFill>
             <a:srgbClr val="FAFBFC"/>
           </a:solidFill>
-          <a:ln w="12700">
+          <a:ln w="9525">
             <a:solidFill>
               <a:srgbClr val="E5E7EB"/>
             </a:solidFill>
@@ -21422,25 +20011,21 @@
         </p:nvSpPr>
         <p:spPr>
           <a:xfrm>
-            <a:off x="914400" y="2926079"/>
-            <a:ext cx="1371600" cy="274320"/>
-          </a:xfrm>
-          <a:prstGeom prst="rect">
-            <a:avLst/>
-          </a:prstGeom>
-          <a:noFill/>
-        </p:spPr>
-        <p:txBody>
-          <a:bodyPr wrap="square" lIns="0" rIns="0" tIns="0" bIns="0">
-            <a:spAutoFit/>
-          </a:bodyPr>
-          <a:lstStyle/>
-          <a:p>
-            <a:pPr algn="ctr">
-              <a:lnSpc>
-                <a:spcPct val="125000"/>
-              </a:lnSpc>
-            </a:pPr>
+            <a:off x="914400" y="2880360"/>
+            <a:ext cx="1371600" cy="365760"/>
+          </a:xfrm>
+          <a:prstGeom prst="rect">
+            <a:avLst/>
+          </a:prstGeom>
+          <a:noFill/>
+        </p:spPr>
+        <p:txBody>
+          <a:bodyPr wrap="none" lIns="36576" rIns="36576" tIns="0" bIns="0" anchor="ctr">
+            <a:spAutoFit/>
+          </a:bodyPr>
+          <a:lstStyle/>
+          <a:p>
+            <a:pPr algn="ctr"/>
             <a:r>
               <a:rPr sz="1000" b="1">
                 <a:solidFill>
@@ -21505,13 +20090,13 @@
           </a:xfrm>
           <a:prstGeom prst="roundRect">
             <a:avLst>
-              <a:gd name="adj" fmla="val 4000"/>
+              <a:gd name="adj" fmla="val 6000"/>
             </a:avLst>
           </a:prstGeom>
           <a:solidFill>
             <a:srgbClr val="FAFBFC"/>
           </a:solidFill>
-          <a:ln w="12700">
+          <a:ln w="9525">
             <a:solidFill>
               <a:srgbClr val="E5E7EB"/>
             </a:solidFill>
@@ -21631,25 +20216,21 @@
         </p:nvSpPr>
         <p:spPr>
           <a:xfrm>
-            <a:off x="4663440" y="2926079"/>
-            <a:ext cx="1371600" cy="274320"/>
-          </a:xfrm>
-          <a:prstGeom prst="rect">
-            <a:avLst/>
-          </a:prstGeom>
-          <a:noFill/>
-        </p:spPr>
-        <p:txBody>
-          <a:bodyPr wrap="square" lIns="0" rIns="0" tIns="0" bIns="0">
-            <a:spAutoFit/>
-          </a:bodyPr>
-          <a:lstStyle/>
-          <a:p>
-            <a:pPr algn="ctr">
-              <a:lnSpc>
-                <a:spcPct val="125000"/>
-              </a:lnSpc>
-            </a:pPr>
+            <a:off x="4663440" y="2880360"/>
+            <a:ext cx="1371600" cy="365760"/>
+          </a:xfrm>
+          <a:prstGeom prst="rect">
+            <a:avLst/>
+          </a:prstGeom>
+          <a:noFill/>
+        </p:spPr>
+        <p:txBody>
+          <a:bodyPr wrap="none" lIns="36576" rIns="36576" tIns="0" bIns="0" anchor="ctr">
+            <a:spAutoFit/>
+          </a:bodyPr>
+          <a:lstStyle/>
+          <a:p>
+            <a:pPr algn="ctr"/>
             <a:r>
               <a:rPr sz="1000" b="1">
                 <a:solidFill>
@@ -21714,13 +20295,13 @@
           </a:xfrm>
           <a:prstGeom prst="roundRect">
             <a:avLst>
-              <a:gd name="adj" fmla="val 4000"/>
+              <a:gd name="adj" fmla="val 6000"/>
             </a:avLst>
           </a:prstGeom>
           <a:solidFill>
             <a:srgbClr val="FAFBFC"/>
           </a:solidFill>
-          <a:ln w="12700">
+          <a:ln w="9525">
             <a:solidFill>
               <a:srgbClr val="E5E7EB"/>
             </a:solidFill>
@@ -21840,25 +20421,21 @@
         </p:nvSpPr>
         <p:spPr>
           <a:xfrm>
-            <a:off x="8412480" y="2926079"/>
-            <a:ext cx="1371600" cy="274320"/>
-          </a:xfrm>
-          <a:prstGeom prst="rect">
-            <a:avLst/>
-          </a:prstGeom>
-          <a:noFill/>
-        </p:spPr>
-        <p:txBody>
-          <a:bodyPr wrap="square" lIns="0" rIns="0" tIns="0" bIns="0">
-            <a:spAutoFit/>
-          </a:bodyPr>
-          <a:lstStyle/>
-          <a:p>
-            <a:pPr algn="ctr">
-              <a:lnSpc>
-                <a:spcPct val="125000"/>
-              </a:lnSpc>
-            </a:pPr>
+            <a:off x="8412480" y="2880360"/>
+            <a:ext cx="1371600" cy="365760"/>
+          </a:xfrm>
+          <a:prstGeom prst="rect">
+            <a:avLst/>
+          </a:prstGeom>
+          <a:noFill/>
+        </p:spPr>
+        <p:txBody>
+          <a:bodyPr wrap="none" lIns="36576" rIns="36576" tIns="0" bIns="0" anchor="ctr">
+            <a:spAutoFit/>
+          </a:bodyPr>
+          <a:lstStyle/>
+          <a:p>
+            <a:pPr algn="ctr"/>
             <a:r>
               <a:rPr sz="1000" b="1">
                 <a:solidFill>
@@ -21923,13 +20500,13 @@
           </a:xfrm>
           <a:prstGeom prst="roundRect">
             <a:avLst>
-              <a:gd name="adj" fmla="val 4000"/>
+              <a:gd name="adj" fmla="val 6000"/>
             </a:avLst>
           </a:prstGeom>
           <a:solidFill>
             <a:srgbClr val="FAFBFC"/>
           </a:solidFill>
-          <a:ln w="12700">
+          <a:ln w="9525">
             <a:solidFill>
               <a:srgbClr val="E5E7EB"/>
             </a:solidFill>
@@ -22049,25 +20626,21 @@
         </p:nvSpPr>
         <p:spPr>
           <a:xfrm>
-            <a:off x="914400" y="5029199"/>
-            <a:ext cx="1371600" cy="274320"/>
-          </a:xfrm>
-          <a:prstGeom prst="rect">
-            <a:avLst/>
-          </a:prstGeom>
-          <a:noFill/>
-        </p:spPr>
-        <p:txBody>
-          <a:bodyPr wrap="square" lIns="0" rIns="0" tIns="0" bIns="0">
-            <a:spAutoFit/>
-          </a:bodyPr>
-          <a:lstStyle/>
-          <a:p>
-            <a:pPr algn="ctr">
-              <a:lnSpc>
-                <a:spcPct val="125000"/>
-              </a:lnSpc>
-            </a:pPr>
+            <a:off x="914400" y="4983479"/>
+            <a:ext cx="1371600" cy="365760"/>
+          </a:xfrm>
+          <a:prstGeom prst="rect">
+            <a:avLst/>
+          </a:prstGeom>
+          <a:noFill/>
+        </p:spPr>
+        <p:txBody>
+          <a:bodyPr wrap="none" lIns="36576" rIns="36576" tIns="0" bIns="0" anchor="ctr">
+            <a:spAutoFit/>
+          </a:bodyPr>
+          <a:lstStyle/>
+          <a:p>
+            <a:pPr algn="ctr"/>
             <a:r>
               <a:rPr sz="1000" b="1">
                 <a:solidFill>
@@ -22132,13 +20705,13 @@
           </a:xfrm>
           <a:prstGeom prst="roundRect">
             <a:avLst>
-              <a:gd name="adj" fmla="val 4000"/>
+              <a:gd name="adj" fmla="val 6000"/>
             </a:avLst>
           </a:prstGeom>
           <a:solidFill>
             <a:srgbClr val="FAFBFC"/>
           </a:solidFill>
-          <a:ln w="12700">
+          <a:ln w="9525">
             <a:solidFill>
               <a:srgbClr val="E5E7EB"/>
             </a:solidFill>
@@ -22258,25 +20831,21 @@
         </p:nvSpPr>
         <p:spPr>
           <a:xfrm>
-            <a:off x="4663440" y="5029199"/>
-            <a:ext cx="1371600" cy="274320"/>
-          </a:xfrm>
-          <a:prstGeom prst="rect">
-            <a:avLst/>
-          </a:prstGeom>
-          <a:noFill/>
-        </p:spPr>
-        <p:txBody>
-          <a:bodyPr wrap="square" lIns="0" rIns="0" tIns="0" bIns="0">
-            <a:spAutoFit/>
-          </a:bodyPr>
-          <a:lstStyle/>
-          <a:p>
-            <a:pPr algn="ctr">
-              <a:lnSpc>
-                <a:spcPct val="125000"/>
-              </a:lnSpc>
-            </a:pPr>
+            <a:off x="4663440" y="4983479"/>
+            <a:ext cx="1371600" cy="365760"/>
+          </a:xfrm>
+          <a:prstGeom prst="rect">
+            <a:avLst/>
+          </a:prstGeom>
+          <a:noFill/>
+        </p:spPr>
+        <p:txBody>
+          <a:bodyPr wrap="none" lIns="36576" rIns="36576" tIns="0" bIns="0" anchor="ctr">
+            <a:spAutoFit/>
+          </a:bodyPr>
+          <a:lstStyle/>
+          <a:p>
+            <a:pPr algn="ctr"/>
             <a:r>
               <a:rPr sz="1000" b="1">
                 <a:solidFill>
@@ -22341,13 +20910,13 @@
           </a:xfrm>
           <a:prstGeom prst="roundRect">
             <a:avLst>
-              <a:gd name="adj" fmla="val 4000"/>
+              <a:gd name="adj" fmla="val 6000"/>
             </a:avLst>
           </a:prstGeom>
           <a:solidFill>
             <a:srgbClr val="FAFBFC"/>
           </a:solidFill>
-          <a:ln w="12700">
+          <a:ln w="9525">
             <a:solidFill>
               <a:srgbClr val="E5E7EB"/>
             </a:solidFill>
@@ -22467,25 +21036,21 @@
         </p:nvSpPr>
         <p:spPr>
           <a:xfrm>
-            <a:off x="8412480" y="5029199"/>
-            <a:ext cx="1371600" cy="274320"/>
-          </a:xfrm>
-          <a:prstGeom prst="rect">
-            <a:avLst/>
-          </a:prstGeom>
-          <a:noFill/>
-        </p:spPr>
-        <p:txBody>
-          <a:bodyPr wrap="square" lIns="0" rIns="0" tIns="0" bIns="0">
-            <a:spAutoFit/>
-          </a:bodyPr>
-          <a:lstStyle/>
-          <a:p>
-            <a:pPr algn="ctr">
-              <a:lnSpc>
-                <a:spcPct val="125000"/>
-              </a:lnSpc>
-            </a:pPr>
+            <a:off x="8412480" y="4983479"/>
+            <a:ext cx="1371600" cy="365760"/>
+          </a:xfrm>
+          <a:prstGeom prst="rect">
+            <a:avLst/>
+          </a:prstGeom>
+          <a:noFill/>
+        </p:spPr>
+        <p:txBody>
+          <a:bodyPr wrap="none" lIns="36576" rIns="36576" tIns="0" bIns="0" anchor="ctr">
+            <a:spAutoFit/>
+          </a:bodyPr>
+          <a:lstStyle/>
+          <a:p>
+            <a:pPr algn="ctr"/>
             <a:r>
               <a:rPr sz="1000" b="1">
                 <a:solidFill>
@@ -22802,13 +21367,13 @@
           </a:xfrm>
           <a:prstGeom prst="roundRect">
             <a:avLst>
-              <a:gd name="adj" fmla="val 4000"/>
+              <a:gd name="adj" fmla="val 6000"/>
             </a:avLst>
           </a:prstGeom>
           <a:solidFill>
             <a:srgbClr val="FAFBFC"/>
           </a:solidFill>
-          <a:ln w="12700">
+          <a:ln w="9525">
             <a:solidFill>
               <a:srgbClr val="E5E7EB"/>
             </a:solidFill>
@@ -22991,13 +21556,13 @@
           </a:xfrm>
           <a:prstGeom prst="roundRect">
             <a:avLst>
-              <a:gd name="adj" fmla="val 4000"/>
+              <a:gd name="adj" fmla="val 6000"/>
             </a:avLst>
           </a:prstGeom>
           <a:solidFill>
             <a:srgbClr val="FAFBFC"/>
           </a:solidFill>
-          <a:ln w="12700">
+          <a:ln w="9525">
             <a:solidFill>
               <a:srgbClr val="E5E7EB"/>
             </a:solidFill>
@@ -23180,13 +21745,13 @@
           </a:xfrm>
           <a:prstGeom prst="roundRect">
             <a:avLst>
-              <a:gd name="adj" fmla="val 4000"/>
+              <a:gd name="adj" fmla="val 6000"/>
             </a:avLst>
           </a:prstGeom>
           <a:solidFill>
             <a:srgbClr val="FAFBFC"/>
           </a:solidFill>
-          <a:ln w="12700">
+          <a:ln w="9525">
             <a:solidFill>
               <a:srgbClr val="E5E7EB"/>
             </a:solidFill>
@@ -23337,13 +21902,13 @@
           </a:xfrm>
           <a:prstGeom prst="roundRect">
             <a:avLst>
-              <a:gd name="adj" fmla="val 4000"/>
+              <a:gd name="adj" fmla="val 6000"/>
             </a:avLst>
           </a:prstGeom>
           <a:solidFill>
             <a:srgbClr val="FAFBFC"/>
           </a:solidFill>
-          <a:ln w="12700">
+          <a:ln w="9525">
             <a:solidFill>
               <a:srgbClr val="E5E7EB"/>
             </a:solidFill>
@@ -23919,25 +22484,21 @@
         </p:nvSpPr>
         <p:spPr>
           <a:xfrm>
-            <a:off x="10424160" y="2285999"/>
-            <a:ext cx="1280160" cy="228599"/>
-          </a:xfrm>
-          <a:prstGeom prst="rect">
-            <a:avLst/>
-          </a:prstGeom>
-          <a:noFill/>
-        </p:spPr>
-        <p:txBody>
-          <a:bodyPr wrap="square" lIns="0" rIns="0" tIns="0" bIns="0">
-            <a:spAutoFit/>
-          </a:bodyPr>
-          <a:lstStyle/>
-          <a:p>
-            <a:pPr algn="ctr">
-              <a:lnSpc>
-                <a:spcPct val="125000"/>
-              </a:lnSpc>
-            </a:pPr>
+            <a:off x="10424160" y="2240279"/>
+            <a:ext cx="1280160" cy="320040"/>
+          </a:xfrm>
+          <a:prstGeom prst="rect">
+            <a:avLst/>
+          </a:prstGeom>
+          <a:noFill/>
+        </p:spPr>
+        <p:txBody>
+          <a:bodyPr wrap="none" lIns="36576" rIns="36576" tIns="0" bIns="0" anchor="ctr">
+            <a:spAutoFit/>
+          </a:bodyPr>
+          <a:lstStyle/>
+          <a:p>
+            <a:pPr algn="ctr"/>
             <a:r>
               <a:rPr sz="1000" b="1">
                 <a:solidFill>
@@ -24159,25 +22720,21 @@
         </p:nvSpPr>
         <p:spPr>
           <a:xfrm>
-            <a:off x="10424160" y="2880359"/>
-            <a:ext cx="1280160" cy="228599"/>
-          </a:xfrm>
-          <a:prstGeom prst="rect">
-            <a:avLst/>
-          </a:prstGeom>
-          <a:noFill/>
-        </p:spPr>
-        <p:txBody>
-          <a:bodyPr wrap="square" lIns="0" rIns="0" tIns="0" bIns="0">
-            <a:spAutoFit/>
-          </a:bodyPr>
-          <a:lstStyle/>
-          <a:p>
-            <a:pPr algn="ctr">
-              <a:lnSpc>
-                <a:spcPct val="125000"/>
-              </a:lnSpc>
-            </a:pPr>
+            <a:off x="10424160" y="2834639"/>
+            <a:ext cx="1280160" cy="320040"/>
+          </a:xfrm>
+          <a:prstGeom prst="rect">
+            <a:avLst/>
+          </a:prstGeom>
+          <a:noFill/>
+        </p:spPr>
+        <p:txBody>
+          <a:bodyPr wrap="none" lIns="36576" rIns="36576" tIns="0" bIns="0" anchor="ctr">
+            <a:spAutoFit/>
+          </a:bodyPr>
+          <a:lstStyle/>
+          <a:p>
+            <a:pPr algn="ctr"/>
             <a:r>
               <a:rPr sz="1000" b="1">
                 <a:solidFill>
@@ -24399,25 +22956,21 @@
         </p:nvSpPr>
         <p:spPr>
           <a:xfrm>
-            <a:off x="10424160" y="3474719"/>
-            <a:ext cx="1280160" cy="228599"/>
-          </a:xfrm>
-          <a:prstGeom prst="rect">
-            <a:avLst/>
-          </a:prstGeom>
-          <a:noFill/>
-        </p:spPr>
-        <p:txBody>
-          <a:bodyPr wrap="square" lIns="0" rIns="0" tIns="0" bIns="0">
-            <a:spAutoFit/>
-          </a:bodyPr>
-          <a:lstStyle/>
-          <a:p>
-            <a:pPr algn="ctr">
-              <a:lnSpc>
-                <a:spcPct val="125000"/>
-              </a:lnSpc>
-            </a:pPr>
+            <a:off x="10424160" y="3428999"/>
+            <a:ext cx="1280160" cy="320040"/>
+          </a:xfrm>
+          <a:prstGeom prst="rect">
+            <a:avLst/>
+          </a:prstGeom>
+          <a:noFill/>
+        </p:spPr>
+        <p:txBody>
+          <a:bodyPr wrap="none" lIns="36576" rIns="36576" tIns="0" bIns="0" anchor="ctr">
+            <a:spAutoFit/>
+          </a:bodyPr>
+          <a:lstStyle/>
+          <a:p>
+            <a:pPr algn="ctr"/>
             <a:r>
               <a:rPr sz="1000" b="1">
                 <a:solidFill>
@@ -24639,25 +23192,21 @@
         </p:nvSpPr>
         <p:spPr>
           <a:xfrm>
-            <a:off x="10424160" y="4069080"/>
-            <a:ext cx="1280160" cy="228599"/>
-          </a:xfrm>
-          <a:prstGeom prst="rect">
-            <a:avLst/>
-          </a:prstGeom>
-          <a:noFill/>
-        </p:spPr>
-        <p:txBody>
-          <a:bodyPr wrap="square" lIns="0" rIns="0" tIns="0" bIns="0">
-            <a:spAutoFit/>
-          </a:bodyPr>
-          <a:lstStyle/>
-          <a:p>
-            <a:pPr algn="ctr">
-              <a:lnSpc>
-                <a:spcPct val="125000"/>
-              </a:lnSpc>
-            </a:pPr>
+            <a:off x="10424160" y="4023360"/>
+            <a:ext cx="1280160" cy="320040"/>
+          </a:xfrm>
+          <a:prstGeom prst="rect">
+            <a:avLst/>
+          </a:prstGeom>
+          <a:noFill/>
+        </p:spPr>
+        <p:txBody>
+          <a:bodyPr wrap="none" lIns="36576" rIns="36576" tIns="0" bIns="0" anchor="ctr">
+            <a:spAutoFit/>
+          </a:bodyPr>
+          <a:lstStyle/>
+          <a:p>
+            <a:pPr algn="ctr"/>
             <a:r>
               <a:rPr sz="1000" b="1">
                 <a:solidFill>
@@ -24879,25 +23428,21 @@
         </p:nvSpPr>
         <p:spPr>
           <a:xfrm>
-            <a:off x="10424160" y="4663440"/>
-            <a:ext cx="1280160" cy="228599"/>
-          </a:xfrm>
-          <a:prstGeom prst="rect">
-            <a:avLst/>
-          </a:prstGeom>
-          <a:noFill/>
-        </p:spPr>
-        <p:txBody>
-          <a:bodyPr wrap="square" lIns="0" rIns="0" tIns="0" bIns="0">
-            <a:spAutoFit/>
-          </a:bodyPr>
-          <a:lstStyle/>
-          <a:p>
-            <a:pPr algn="ctr">
-              <a:lnSpc>
-                <a:spcPct val="125000"/>
-              </a:lnSpc>
-            </a:pPr>
+            <a:off x="10424160" y="4617720"/>
+            <a:ext cx="1280160" cy="320040"/>
+          </a:xfrm>
+          <a:prstGeom prst="rect">
+            <a:avLst/>
+          </a:prstGeom>
+          <a:noFill/>
+        </p:spPr>
+        <p:txBody>
+          <a:bodyPr wrap="none" lIns="36576" rIns="36576" tIns="0" bIns="0" anchor="ctr">
+            <a:spAutoFit/>
+          </a:bodyPr>
+          <a:lstStyle/>
+          <a:p>
+            <a:pPr algn="ctr"/>
             <a:r>
               <a:rPr sz="1000" b="1">
                 <a:solidFill>
@@ -25119,25 +23664,21 @@
         </p:nvSpPr>
         <p:spPr>
           <a:xfrm>
-            <a:off x="10424160" y="5257800"/>
-            <a:ext cx="1280160" cy="228599"/>
-          </a:xfrm>
-          <a:prstGeom prst="rect">
-            <a:avLst/>
-          </a:prstGeom>
-          <a:noFill/>
-        </p:spPr>
-        <p:txBody>
-          <a:bodyPr wrap="square" lIns="0" rIns="0" tIns="0" bIns="0">
-            <a:spAutoFit/>
-          </a:bodyPr>
-          <a:lstStyle/>
-          <a:p>
-            <a:pPr algn="ctr">
-              <a:lnSpc>
-                <a:spcPct val="125000"/>
-              </a:lnSpc>
-            </a:pPr>
+            <a:off x="10424160" y="5212080"/>
+            <a:ext cx="1280160" cy="320040"/>
+          </a:xfrm>
+          <a:prstGeom prst="rect">
+            <a:avLst/>
+          </a:prstGeom>
+          <a:noFill/>
+        </p:spPr>
+        <p:txBody>
+          <a:bodyPr wrap="none" lIns="36576" rIns="36576" tIns="0" bIns="0" anchor="ctr">
+            <a:spAutoFit/>
+          </a:bodyPr>
+          <a:lstStyle/>
+          <a:p>
+            <a:pPr algn="ctr"/>
             <a:r>
               <a:rPr sz="1000" b="1">
                 <a:solidFill>
@@ -25324,25 +23865,21 @@
         </p:nvSpPr>
         <p:spPr>
           <a:xfrm>
-            <a:off x="10424160" y="5852160"/>
-            <a:ext cx="1280160" cy="228599"/>
-          </a:xfrm>
-          <a:prstGeom prst="rect">
-            <a:avLst/>
-          </a:prstGeom>
-          <a:noFill/>
-        </p:spPr>
-        <p:txBody>
-          <a:bodyPr wrap="square" lIns="0" rIns="0" tIns="0" bIns="0">
-            <a:spAutoFit/>
-          </a:bodyPr>
-          <a:lstStyle/>
-          <a:p>
-            <a:pPr algn="ctr">
-              <a:lnSpc>
-                <a:spcPct val="125000"/>
-              </a:lnSpc>
-            </a:pPr>
+            <a:off x="10424160" y="5806440"/>
+            <a:ext cx="1280160" cy="320040"/>
+          </a:xfrm>
+          <a:prstGeom prst="rect">
+            <a:avLst/>
+          </a:prstGeom>
+          <a:noFill/>
+        </p:spPr>
+        <p:txBody>
+          <a:bodyPr wrap="none" lIns="36576" rIns="36576" tIns="0" bIns="0" anchor="ctr">
+            <a:spAutoFit/>
+          </a:bodyPr>
+          <a:lstStyle/>
+          <a:p>
+            <a:pPr algn="ctr"/>
             <a:r>
               <a:rPr sz="1000" b="1">
                 <a:solidFill>
@@ -25581,13 +24118,13 @@
           </a:xfrm>
           <a:prstGeom prst="roundRect">
             <a:avLst>
-              <a:gd name="adj" fmla="val 4000"/>
+              <a:gd name="adj" fmla="val 6000"/>
             </a:avLst>
           </a:prstGeom>
           <a:solidFill>
             <a:srgbClr val="FAFBFC"/>
           </a:solidFill>
-          <a:ln w="12700">
+          <a:ln w="9525">
             <a:solidFill>
               <a:srgbClr val="E5E7EB"/>
             </a:solidFill>
@@ -25745,13 +24282,13 @@
           </a:xfrm>
           <a:prstGeom prst="roundRect">
             <a:avLst>
-              <a:gd name="adj" fmla="val 4000"/>
+              <a:gd name="adj" fmla="val 6000"/>
             </a:avLst>
           </a:prstGeom>
           <a:solidFill>
             <a:srgbClr val="FFFFFF"/>
           </a:solidFill>
-          <a:ln w="12700">
+          <a:ln w="9525">
             <a:solidFill>
               <a:srgbClr val="E5E7EB"/>
             </a:solidFill>
@@ -25909,13 +24446,13 @@
           </a:xfrm>
           <a:prstGeom prst="roundRect">
             <a:avLst>
-              <a:gd name="adj" fmla="val 4000"/>
+              <a:gd name="adj" fmla="val 6000"/>
             </a:avLst>
           </a:prstGeom>
           <a:solidFill>
             <a:srgbClr val="FFFFFF"/>
           </a:solidFill>
-          <a:ln w="12700">
+          <a:ln w="9525">
             <a:solidFill>
               <a:srgbClr val="E5E7EB"/>
             </a:solidFill>
@@ -26073,13 +24610,13 @@
           </a:xfrm>
           <a:prstGeom prst="roundRect">
             <a:avLst>
-              <a:gd name="adj" fmla="val 4000"/>
+              <a:gd name="adj" fmla="val 6000"/>
             </a:avLst>
           </a:prstGeom>
           <a:solidFill>
             <a:srgbClr val="FFFFFF"/>
           </a:solidFill>
-          <a:ln w="12700">
+          <a:ln w="9525">
             <a:solidFill>
               <a:srgbClr val="E5E7EB"/>
             </a:solidFill>
@@ -26237,13 +24774,13 @@
           </a:xfrm>
           <a:prstGeom prst="roundRect">
             <a:avLst>
-              <a:gd name="adj" fmla="val 4000"/>
+              <a:gd name="adj" fmla="val 6000"/>
             </a:avLst>
           </a:prstGeom>
           <a:solidFill>
             <a:srgbClr val="FFFFFF"/>
           </a:solidFill>
-          <a:ln w="12700">
+          <a:ln w="9525">
             <a:solidFill>
               <a:srgbClr val="E5E7EB"/>
             </a:solidFill>
@@ -26401,13 +24938,13 @@
           </a:xfrm>
           <a:prstGeom prst="roundRect">
             <a:avLst>
-              <a:gd name="adj" fmla="val 4000"/>
+              <a:gd name="adj" fmla="val 6000"/>
             </a:avLst>
           </a:prstGeom>
           <a:solidFill>
             <a:srgbClr val="FFFFFF"/>
           </a:solidFill>
-          <a:ln w="12700">
+          <a:ln w="9525">
             <a:solidFill>
               <a:srgbClr val="E5E7EB"/>
             </a:solidFill>
@@ -27351,13 +25888,13 @@
           </a:xfrm>
           <a:prstGeom prst="roundRect">
             <a:avLst>
-              <a:gd name="adj" fmla="val 4000"/>
+              <a:gd name="adj" fmla="val 6000"/>
             </a:avLst>
           </a:prstGeom>
           <a:solidFill>
             <a:srgbClr val="FAFBFC"/>
           </a:solidFill>
-          <a:ln w="12700">
+          <a:ln w="9525">
             <a:solidFill>
               <a:srgbClr val="E5E7EB"/>
             </a:solidFill>
@@ -27650,13 +26187,13 @@
           </a:xfrm>
           <a:prstGeom prst="roundRect">
             <a:avLst>
-              <a:gd name="adj" fmla="val 4000"/>
+              <a:gd name="adj" fmla="val 6000"/>
             </a:avLst>
           </a:prstGeom>
           <a:solidFill>
             <a:srgbClr val="FAFBFC"/>
           </a:solidFill>
-          <a:ln w="12700">
+          <a:ln w="9525">
             <a:solidFill>
               <a:srgbClr val="E5E7EB"/>
             </a:solidFill>
@@ -27888,13 +26425,13 @@
           </a:xfrm>
           <a:prstGeom prst="roundRect">
             <a:avLst>
-              <a:gd name="adj" fmla="val 4000"/>
+              <a:gd name="adj" fmla="val 6000"/>
             </a:avLst>
           </a:prstGeom>
           <a:solidFill>
             <a:srgbClr val="FAFBFC"/>
           </a:solidFill>
-          <a:ln w="12700">
+          <a:ln w="9525">
             <a:solidFill>
               <a:srgbClr val="E5E7EB"/>
             </a:solidFill>
@@ -28126,13 +26663,13 @@
           </a:xfrm>
           <a:prstGeom prst="roundRect">
             <a:avLst>
-              <a:gd name="adj" fmla="val 4000"/>
+              <a:gd name="adj" fmla="val 6000"/>
             </a:avLst>
           </a:prstGeom>
           <a:solidFill>
             <a:srgbClr val="FAFBFC"/>
           </a:solidFill>
-          <a:ln w="12700">
+          <a:ln w="9525">
             <a:solidFill>
               <a:srgbClr val="E5E7EB"/>
             </a:solidFill>
@@ -28364,13 +26901,13 @@
           </a:xfrm>
           <a:prstGeom prst="roundRect">
             <a:avLst>
-              <a:gd name="adj" fmla="val 4000"/>
+              <a:gd name="adj" fmla="val 6000"/>
             </a:avLst>
           </a:prstGeom>
           <a:solidFill>
             <a:srgbClr val="FAFBFC"/>
           </a:solidFill>
-          <a:ln w="12700">
+          <a:ln w="9525">
             <a:solidFill>
               <a:srgbClr val="E5E7EB"/>
             </a:solidFill>
@@ -29110,13 +27647,13 @@
           </a:xfrm>
           <a:prstGeom prst="roundRect">
             <a:avLst>
-              <a:gd name="adj" fmla="val 4000"/>
+              <a:gd name="adj" fmla="val 6000"/>
             </a:avLst>
           </a:prstGeom>
           <a:solidFill>
             <a:srgbClr val="FAFBFC"/>
           </a:solidFill>
-          <a:ln w="12700">
+          <a:ln w="9525">
             <a:solidFill>
               <a:srgbClr val="E5E7EB"/>
             </a:solidFill>
@@ -29317,13 +27854,13 @@
           </a:xfrm>
           <a:prstGeom prst="roundRect">
             <a:avLst>
-              <a:gd name="adj" fmla="val 4000"/>
+              <a:gd name="adj" fmla="val 6000"/>
             </a:avLst>
           </a:prstGeom>
           <a:solidFill>
             <a:srgbClr val="FAFBFC"/>
           </a:solidFill>
-          <a:ln w="12700">
+          <a:ln w="9525">
             <a:solidFill>
               <a:srgbClr val="E5E7EB"/>
             </a:solidFill>
@@ -29524,13 +28061,13 @@
           </a:xfrm>
           <a:prstGeom prst="roundRect">
             <a:avLst>
-              <a:gd name="adj" fmla="val 4000"/>
+              <a:gd name="adj" fmla="val 6000"/>
             </a:avLst>
           </a:prstGeom>
           <a:solidFill>
             <a:srgbClr val="FAFBFC"/>
           </a:solidFill>
-          <a:ln w="12700">
+          <a:ln w="9525">
             <a:solidFill>
               <a:srgbClr val="E5E7EB"/>
             </a:solidFill>
@@ -29731,13 +28268,13 @@
           </a:xfrm>
           <a:prstGeom prst="roundRect">
             <a:avLst>
-              <a:gd name="adj" fmla="val 4000"/>
+              <a:gd name="adj" fmla="val 6000"/>
             </a:avLst>
           </a:prstGeom>
           <a:solidFill>
             <a:srgbClr val="FAFBFC"/>
           </a:solidFill>
-          <a:ln w="12700">
+          <a:ln w="9525">
             <a:solidFill>
               <a:srgbClr val="E5E7EB"/>
             </a:solidFill>
@@ -29881,7 +28418,7 @@
                 </a:solidFill>
                 <a:latin typeface="맑은 고딕"/>
               </a:rPr>
-              <a:t>loss frame 약, gain frame 강</a:t>
+              <a:t>모호한 loss frame 회피 → 책임 회피 강함</a:t>
             </a:r>
           </a:p>
         </p:txBody>
@@ -29920,7 +28457,7 @@
                 </a:solidFill>
                 <a:latin typeface="맑은 고딕"/>
               </a:rPr>
-              <a:t>−10 표현이 +10보다 자원 의도 ↑</a:t>
+              <a:t>모호한 감점 표현이 +10 가산보다 자원 의도 ↑</a:t>
             </a:r>
           </a:p>
         </p:txBody>
@@ -30151,13 +28688,13 @@
           </a:xfrm>
           <a:prstGeom prst="roundRect">
             <a:avLst>
-              <a:gd name="adj" fmla="val 4000"/>
+              <a:gd name="adj" fmla="val 6000"/>
             </a:avLst>
           </a:prstGeom>
           <a:solidFill>
             <a:srgbClr val="FAFBFC"/>
           </a:solidFill>
-          <a:ln w="12700">
+          <a:ln w="9525">
             <a:solidFill>
               <a:srgbClr val="E5E7EB"/>
             </a:solidFill>
@@ -30382,13 +28919,13 @@
           </a:xfrm>
           <a:prstGeom prst="roundRect">
             <a:avLst>
-              <a:gd name="adj" fmla="val 4000"/>
+              <a:gd name="adj" fmla="val 6000"/>
             </a:avLst>
           </a:prstGeom>
           <a:solidFill>
             <a:srgbClr val="FAFBFC"/>
           </a:solidFill>
-          <a:ln w="12700">
+          <a:ln w="9525">
             <a:solidFill>
               <a:srgbClr val="E5E7EB"/>
             </a:solidFill>
@@ -30613,13 +29150,13 @@
           </a:xfrm>
           <a:prstGeom prst="roundRect">
             <a:avLst>
-              <a:gd name="adj" fmla="val 4000"/>
+              <a:gd name="adj" fmla="val 6000"/>
             </a:avLst>
           </a:prstGeom>
           <a:solidFill>
             <a:srgbClr val="FAFBFC"/>
           </a:solidFill>
-          <a:ln w="12700">
+          <a:ln w="9525">
             <a:solidFill>
               <a:srgbClr val="E5E7EB"/>
             </a:solidFill>
@@ -30844,13 +29381,13 @@
           </a:xfrm>
           <a:prstGeom prst="roundRect">
             <a:avLst>
-              <a:gd name="adj" fmla="val 4000"/>
+              <a:gd name="adj" fmla="val 6000"/>
             </a:avLst>
           </a:prstGeom>
           <a:solidFill>
             <a:srgbClr val="FAFBFC"/>
           </a:solidFill>
-          <a:ln w="12700">
+          <a:ln w="9525">
             <a:solidFill>
               <a:srgbClr val="E5E7EB"/>
             </a:solidFill>
@@ -31522,13 +30059,13 @@
           </a:xfrm>
           <a:prstGeom prst="roundRect">
             <a:avLst>
-              <a:gd name="adj" fmla="val 4000"/>
+              <a:gd name="adj" fmla="val 6000"/>
             </a:avLst>
           </a:prstGeom>
           <a:solidFill>
             <a:srgbClr val="FAFBFC"/>
           </a:solidFill>
-          <a:ln w="12700">
+          <a:ln w="9525">
             <a:solidFill>
               <a:srgbClr val="E5E7EB"/>
             </a:solidFill>
@@ -31702,13 +30239,13 @@
           </a:xfrm>
           <a:prstGeom prst="roundRect">
             <a:avLst>
-              <a:gd name="adj" fmla="val 4000"/>
+              <a:gd name="adj" fmla="val 6000"/>
             </a:avLst>
           </a:prstGeom>
           <a:solidFill>
             <a:srgbClr val="FAFBFC"/>
           </a:solidFill>
-          <a:ln w="12700">
+          <a:ln w="9525">
             <a:solidFill>
               <a:srgbClr val="E5E7EB"/>
             </a:solidFill>
@@ -31882,13 +30419,13 @@
           </a:xfrm>
           <a:prstGeom prst="roundRect">
             <a:avLst>
-              <a:gd name="adj" fmla="val 4000"/>
+              <a:gd name="adj" fmla="val 6000"/>
             </a:avLst>
           </a:prstGeom>
           <a:solidFill>
             <a:srgbClr val="FAFBFC"/>
           </a:solidFill>
-          <a:ln w="12700">
+          <a:ln w="9525">
             <a:solidFill>
               <a:srgbClr val="E5E7EB"/>
             </a:solidFill>
@@ -32314,13 +30851,13 @@
           </a:xfrm>
           <a:prstGeom prst="roundRect">
             <a:avLst>
-              <a:gd name="adj" fmla="val 4000"/>
+              <a:gd name="adj" fmla="val 6000"/>
             </a:avLst>
           </a:prstGeom>
           <a:solidFill>
             <a:srgbClr val="FAFBFC"/>
           </a:solidFill>
-          <a:ln w="12700">
+          <a:ln w="9525">
             <a:solidFill>
               <a:srgbClr val="E5E7EB"/>
             </a:solidFill>
@@ -32791,13 +31328,13 @@
           </a:xfrm>
           <a:prstGeom prst="roundRect">
             <a:avLst>
-              <a:gd name="adj" fmla="val 4000"/>
+              <a:gd name="adj" fmla="val 6000"/>
             </a:avLst>
           </a:prstGeom>
           <a:solidFill>
             <a:srgbClr val="ECFDF5"/>
           </a:solidFill>
-          <a:ln w="12700">
+          <a:ln w="9525">
             <a:solidFill>
               <a:srgbClr val="10B981"/>
             </a:solidFill>
@@ -32833,7 +31370,7 @@
         </p:nvSpPr>
         <p:spPr>
           <a:xfrm>
-            <a:off x="6492240" y="2697480"/>
+            <a:off x="6492240" y="2651760"/>
             <a:ext cx="4572000" cy="365760"/>
           </a:xfrm>
           <a:prstGeom prst="rect">
@@ -32859,7 +31396,7 @@
                 </a:solidFill>
                 <a:latin typeface="맑은 고딕"/>
               </a:rPr>
-              <a:t>강의계획서 적용</a:t>
+              <a:t>강의계획서가 만들어내는 효과</a:t>
             </a:r>
           </a:p>
         </p:txBody>
@@ -32872,27 +31409,27 @@
         </p:nvSpPr>
         <p:spPr>
           <a:xfrm>
-            <a:off x="6492240" y="3108960"/>
-            <a:ext cx="4846320" cy="914400"/>
-          </a:xfrm>
-          <a:prstGeom prst="rect">
-            <a:avLst/>
-          </a:prstGeom>
-          <a:noFill/>
-        </p:spPr>
-        <p:txBody>
-          <a:bodyPr wrap="square" lIns="0" rIns="0" tIns="0" bIns="0">
-            <a:spAutoFit/>
-          </a:bodyPr>
-          <a:lstStyle/>
-          <a:p>
-            <a:pPr algn="l">
-              <a:lnSpc>
-                <a:spcPct val="130000"/>
-              </a:lnSpc>
-            </a:pPr>
-            <a:r>
-              <a:rPr sz="1500" b="1">
+            <a:off x="6492240" y="3017520"/>
+            <a:ext cx="4846320" cy="502920"/>
+          </a:xfrm>
+          <a:prstGeom prst="rect">
+            <a:avLst/>
+          </a:prstGeom>
+          <a:noFill/>
+        </p:spPr>
+        <p:txBody>
+          <a:bodyPr wrap="square" lIns="0" rIns="0" tIns="0" bIns="0">
+            <a:spAutoFit/>
+          </a:bodyPr>
+          <a:lstStyle/>
+          <a:p>
+            <a:pPr algn="l">
+              <a:lnSpc>
+                <a:spcPct val="125000"/>
+              </a:lnSpc>
+            </a:pPr>
+            <a:r>
+              <a:rPr sz="1400" b="1">
                 <a:solidFill>
                   <a:srgbClr val="0F141F"/>
                 </a:solidFill>
@@ -32911,23 +31448,23 @@
         </p:nvSpPr>
         <p:spPr>
           <a:xfrm>
-            <a:off x="6492240" y="4069080"/>
-            <a:ext cx="4846320" cy="457200"/>
-          </a:xfrm>
-          <a:prstGeom prst="rect">
-            <a:avLst/>
-          </a:prstGeom>
-          <a:noFill/>
-        </p:spPr>
-        <p:txBody>
-          <a:bodyPr wrap="square" lIns="0" rIns="0" tIns="0" bIns="0">
-            <a:spAutoFit/>
-          </a:bodyPr>
-          <a:lstStyle/>
-          <a:p>
-            <a:pPr algn="l">
-              <a:lnSpc>
-                <a:spcPct val="125000"/>
+            <a:off x="6492240" y="3657600"/>
+            <a:ext cx="4846320" cy="1097280"/>
+          </a:xfrm>
+          <a:prstGeom prst="rect">
+            <a:avLst/>
+          </a:prstGeom>
+          <a:noFill/>
+        </p:spPr>
+        <p:txBody>
+          <a:bodyPr wrap="square" lIns="0" rIns="0" tIns="0" bIns="0">
+            <a:spAutoFit/>
+          </a:bodyPr>
+          <a:lstStyle/>
+          <a:p>
+            <a:pPr algn="l">
+              <a:lnSpc>
+                <a:spcPct val="140000"/>
               </a:lnSpc>
             </a:pPr>
             <a:r>
@@ -32937,7 +31474,39 @@
                 </a:solidFill>
                 <a:latin typeface="맑은 고딕"/>
               </a:rPr>
-              <a:t>= 가변비율 스케줄 그 자체</a:t>
+              <a:t>→ 학생은 "오늘 안 가면 잡힐까?" 모름.</a:t>
+            </a:r>
+          </a:p>
+          <a:p>
+            <a:pPr algn="l">
+              <a:lnSpc>
+                <a:spcPct val="140000"/>
+              </a:lnSpc>
+            </a:pPr>
+            <a:r>
+              <a:rPr sz="1100" b="0">
+                <a:solidFill>
+                  <a:srgbClr val="424B5C"/>
+                </a:solidFill>
+                <a:latin typeface="맑은 고딕"/>
+              </a:rPr>
+              <a:t>→ 슬롯머신처럼 매일 출석하게 됨.</a:t>
+            </a:r>
+          </a:p>
+          <a:p>
+            <a:pPr algn="l">
+              <a:lnSpc>
+                <a:spcPct val="140000"/>
+              </a:lnSpc>
+            </a:pPr>
+            <a:r>
+              <a:rPr sz="1100" b="0">
+                <a:solidFill>
+                  <a:srgbClr val="424B5C"/>
+                </a:solidFill>
+                <a:latin typeface="맑은 고딕"/>
+              </a:rPr>
+              <a:t>→ 행동이 굳어서 한 학기 내내 출석.</a:t>
             </a:r>
           </a:p>
         </p:txBody>
@@ -32950,7 +31519,7 @@
         </p:nvCxnSpPr>
         <p:spPr>
           <a:xfrm>
-            <a:off x="6492240" y="4617720"/>
+            <a:off x="6492240" y="5074920"/>
             <a:ext cx="4846320" cy="0"/>
           </a:xfrm>
           <a:prstGeom prst="line">
@@ -32985,7 +31554,7 @@
         </p:nvSpPr>
         <p:spPr>
           <a:xfrm>
-            <a:off x="6492240" y="4709160"/>
+            <a:off x="6492240" y="5166360"/>
             <a:ext cx="4572000" cy="320040"/>
           </a:xfrm>
           <a:prstGeom prst="rect">
@@ -33011,7 +31580,7 @@
                 </a:solidFill>
                 <a:latin typeface="맑은 고딕"/>
               </a:rPr>
-              <a:t>정량 예측 (시뮬 N=1000)</a:t>
+              <a:t>시뮬레이션 결과</a:t>
             </a:r>
           </a:p>
         </p:txBody>
@@ -33024,33 +31593,33 @@
         </p:nvSpPr>
         <p:spPr>
           <a:xfrm>
-            <a:off x="6492240" y="5074920"/>
-            <a:ext cx="4846320" cy="457200"/>
-          </a:xfrm>
-          <a:prstGeom prst="rect">
-            <a:avLst/>
-          </a:prstGeom>
-          <a:noFill/>
-        </p:spPr>
-        <p:txBody>
-          <a:bodyPr wrap="square" lIns="0" rIns="0" tIns="0" bIns="0">
-            <a:spAutoFit/>
-          </a:bodyPr>
-          <a:lstStyle/>
-          <a:p>
-            <a:pPr algn="l">
-              <a:lnSpc>
-                <a:spcPct val="125000"/>
-              </a:lnSpc>
-            </a:pPr>
-            <a:r>
-              <a:rPr sz="1200" b="0">
+            <a:off x="6492240" y="5486400"/>
+            <a:ext cx="4846320" cy="365760"/>
+          </a:xfrm>
+          <a:prstGeom prst="rect">
+            <a:avLst/>
+          </a:prstGeom>
+          <a:noFill/>
+        </p:spPr>
+        <p:txBody>
+          <a:bodyPr wrap="square" lIns="0" rIns="0" tIns="0" bIns="0">
+            <a:spAutoFit/>
+          </a:bodyPr>
+          <a:lstStyle/>
+          <a:p>
+            <a:pPr algn="l">
+              <a:lnSpc>
+                <a:spcPct val="125000"/>
+              </a:lnSpc>
+            </a:pPr>
+            <a:r>
+              <a:rPr sz="1100" b="0">
                 <a:solidFill>
                   <a:srgbClr val="424B5C"/>
                 </a:solidFill>
                 <a:latin typeface="맑은 고딕"/>
               </a:rPr>
-              <a:t>고정 일정 (매주 월) → 6.7%</a:t>
+              <a:t>월요일만 체크하면 출석률 6.7%</a:t>
             </a:r>
           </a:p>
         </p:txBody>
@@ -33063,33 +31632,33 @@
         </p:nvSpPr>
         <p:spPr>
           <a:xfrm>
-            <a:off x="6492240" y="5486400"/>
-            <a:ext cx="4846320" cy="457200"/>
-          </a:xfrm>
-          <a:prstGeom prst="rect">
-            <a:avLst/>
-          </a:prstGeom>
-          <a:noFill/>
-        </p:spPr>
-        <p:txBody>
-          <a:bodyPr wrap="square" lIns="0" rIns="0" tIns="0" bIns="0">
-            <a:spAutoFit/>
-          </a:bodyPr>
-          <a:lstStyle/>
-          <a:p>
-            <a:pPr algn="l">
-              <a:lnSpc>
-                <a:spcPct val="125000"/>
-              </a:lnSpc>
-            </a:pPr>
-            <a:r>
-              <a:rPr sz="1400" b="1">
+            <a:off x="6492240" y="5852160"/>
+            <a:ext cx="4846320" cy="365760"/>
+          </a:xfrm>
+          <a:prstGeom prst="rect">
+            <a:avLst/>
+          </a:prstGeom>
+          <a:noFill/>
+        </p:spPr>
+        <p:txBody>
+          <a:bodyPr wrap="square" lIns="0" rIns="0" tIns="0" bIns="0">
+            <a:spAutoFit/>
+          </a:bodyPr>
+          <a:lstStyle/>
+          <a:p>
+            <a:pPr algn="l">
+              <a:lnSpc>
+                <a:spcPct val="125000"/>
+              </a:lnSpc>
+            </a:pPr>
+            <a:r>
+              <a:rPr sz="1200" b="1">
                 <a:solidFill>
                   <a:srgbClr val="0F141F"/>
                 </a:solidFill>
                 <a:latin typeface="맑은 고딕"/>
               </a:rPr>
-              <a:t>랜덤 + 비공개 → 20.0%</a:t>
+              <a:t>랜덤+비공개로 하면 20% (3배 ↑)</a:t>
             </a:r>
           </a:p>
         </p:txBody>
@@ -33102,8 +31671,8 @@
         </p:nvSpPr>
         <p:spPr>
           <a:xfrm>
-            <a:off x="6492240" y="6035040"/>
-            <a:ext cx="1463040" cy="365760"/>
+            <a:off x="6492240" y="6263640"/>
+            <a:ext cx="1828800" cy="365760"/>
           </a:xfrm>
           <a:prstGeom prst="roundRect">
             <a:avLst>
@@ -33147,25 +31716,21 @@
         </p:nvSpPr>
         <p:spPr>
           <a:xfrm>
-            <a:off x="6492240" y="6080759"/>
-            <a:ext cx="1463040" cy="274320"/>
-          </a:xfrm>
-          <a:prstGeom prst="rect">
-            <a:avLst/>
-          </a:prstGeom>
-          <a:noFill/>
-        </p:spPr>
-        <p:txBody>
-          <a:bodyPr wrap="square" lIns="0" rIns="0" tIns="0" bIns="0">
-            <a:spAutoFit/>
-          </a:bodyPr>
-          <a:lstStyle/>
-          <a:p>
-            <a:pPr algn="ctr">
-              <a:lnSpc>
-                <a:spcPct val="125000"/>
-              </a:lnSpc>
-            </a:pPr>
+            <a:off x="6492240" y="6263640"/>
+            <a:ext cx="1828800" cy="365760"/>
+          </a:xfrm>
+          <a:prstGeom prst="rect">
+            <a:avLst/>
+          </a:prstGeom>
+          <a:noFill/>
+        </p:spPr>
+        <p:txBody>
+          <a:bodyPr wrap="none" lIns="36576" rIns="36576" tIns="0" bIns="0" anchor="ctr">
+            <a:spAutoFit/>
+          </a:bodyPr>
+          <a:lstStyle/>
+          <a:p>
+            <a:pPr algn="ctr"/>
             <a:r>
               <a:rPr sz="1000" b="1">
                 <a:solidFill>
@@ -33173,46 +31738,7 @@
                 </a:solidFill>
                 <a:latin typeface="맑은 고딕"/>
               </a:rPr>
-              <a:t>3× 증가</a:t>
-            </a:r>
-          </a:p>
-        </p:txBody>
-      </p:sp>
-      <p:sp>
-        <p:nvSpPr>
-          <p:cNvPr id="30" name="TextBox 29"/>
-          <p:cNvSpPr txBox="1"/>
-          <p:nvPr/>
-        </p:nvSpPr>
-        <p:spPr>
-          <a:xfrm>
-            <a:off x="8092440" y="6080760"/>
-            <a:ext cx="3657600" cy="320040"/>
-          </a:xfrm>
-          <a:prstGeom prst="rect">
-            <a:avLst/>
-          </a:prstGeom>
-          <a:noFill/>
-        </p:spPr>
-        <p:txBody>
-          <a:bodyPr wrap="square" lIns="0" rIns="0" tIns="0" bIns="0">
-            <a:spAutoFit/>
-          </a:bodyPr>
-          <a:lstStyle/>
-          <a:p>
-            <a:pPr algn="l">
-              <a:lnSpc>
-                <a:spcPct val="125000"/>
-              </a:lnSpc>
-            </a:pPr>
-            <a:r>
-              <a:rPr sz="1100" b="0">
-                <a:solidFill>
-                  <a:srgbClr val="8B95A7"/>
-                </a:solidFill>
-                <a:latin typeface="맑은 고딕"/>
-              </a:rPr>
-              <a:t>← 검증할 값</a:t>
+              <a:t>검증할 값</a:t>
             </a:r>
           </a:p>
         </p:txBody>
@@ -33638,13 +32164,13 @@
           </a:xfrm>
           <a:prstGeom prst="roundRect">
             <a:avLst>
-              <a:gd name="adj" fmla="val 4000"/>
+              <a:gd name="adj" fmla="val 6000"/>
             </a:avLst>
           </a:prstGeom>
           <a:solidFill>
             <a:srgbClr val="FAFBFC"/>
           </a:solidFill>
-          <a:ln w="12700">
+          <a:ln w="9525">
             <a:solidFill>
               <a:srgbClr val="E5E7EB"/>
             </a:solidFill>
@@ -33818,13 +32344,13 @@
           </a:xfrm>
           <a:prstGeom prst="roundRect">
             <a:avLst>
-              <a:gd name="adj" fmla="val 4000"/>
+              <a:gd name="adj" fmla="val 6000"/>
             </a:avLst>
           </a:prstGeom>
           <a:solidFill>
             <a:srgbClr val="FAFBFC"/>
           </a:solidFill>
-          <a:ln w="12700">
+          <a:ln w="9525">
             <a:solidFill>
               <a:srgbClr val="E5E7EB"/>
             </a:solidFill>
@@ -33998,13 +32524,13 @@
           </a:xfrm>
           <a:prstGeom prst="roundRect">
             <a:avLst>
-              <a:gd name="adj" fmla="val 4000"/>
+              <a:gd name="adj" fmla="val 6000"/>
             </a:avLst>
           </a:prstGeom>
           <a:solidFill>
             <a:srgbClr val="FAFBFC"/>
           </a:solidFill>
-          <a:ln w="12700">
+          <a:ln w="9525">
             <a:solidFill>
               <a:srgbClr val="E5E7EB"/>
             </a:solidFill>
@@ -34430,13 +32956,13 @@
           </a:xfrm>
           <a:prstGeom prst="roundRect">
             <a:avLst>
-              <a:gd name="adj" fmla="val 4000"/>
+              <a:gd name="adj" fmla="val 6000"/>
             </a:avLst>
           </a:prstGeom>
           <a:solidFill>
             <a:srgbClr val="FAFBFC"/>
           </a:solidFill>
-          <a:ln w="12700">
+          <a:ln w="9525">
             <a:solidFill>
               <a:srgbClr val="E5E7EB"/>
             </a:solidFill>
@@ -34930,13 +33456,13 @@
           </a:xfrm>
           <a:prstGeom prst="roundRect">
             <a:avLst>
-              <a:gd name="adj" fmla="val 4000"/>
+              <a:gd name="adj" fmla="val 6000"/>
             </a:avLst>
           </a:prstGeom>
           <a:solidFill>
             <a:srgbClr val="FEF3C7"/>
           </a:solidFill>
-          <a:ln w="12700">
+          <a:ln w="9525">
             <a:solidFill>
               <a:srgbClr val="F59E0B"/>
             </a:solidFill>
@@ -34972,7 +33498,7 @@
         </p:nvSpPr>
         <p:spPr>
           <a:xfrm>
-            <a:off x="6492240" y="2697480"/>
+            <a:off x="6492240" y="2651760"/>
             <a:ext cx="4572000" cy="365760"/>
           </a:xfrm>
           <a:prstGeom prst="rect">
@@ -34998,7 +33524,7 @@
                 </a:solidFill>
                 <a:latin typeface="맑은 고딕"/>
               </a:rPr>
-              <a:t>강의계획서 적용</a:t>
+              <a:t>강의계획서가 만들어내는 효과</a:t>
             </a:r>
           </a:p>
         </p:txBody>
@@ -35011,33 +33537,33 @@
         </p:nvSpPr>
         <p:spPr>
           <a:xfrm>
-            <a:off x="6492240" y="3108960"/>
-            <a:ext cx="4846320" cy="914400"/>
-          </a:xfrm>
-          <a:prstGeom prst="rect">
-            <a:avLst/>
-          </a:prstGeom>
-          <a:noFill/>
-        </p:spPr>
-        <p:txBody>
-          <a:bodyPr wrap="square" lIns="0" rIns="0" tIns="0" bIns="0">
-            <a:spAutoFit/>
-          </a:bodyPr>
-          <a:lstStyle/>
-          <a:p>
-            <a:pPr algn="l">
-              <a:lnSpc>
-                <a:spcPct val="130000"/>
-              </a:lnSpc>
-            </a:pPr>
-            <a:r>
-              <a:rPr sz="1500" b="1">
+            <a:off x="6492240" y="3017520"/>
+            <a:ext cx="4846320" cy="502920"/>
+          </a:xfrm>
+          <a:prstGeom prst="rect">
+            <a:avLst/>
+          </a:prstGeom>
+          <a:noFill/>
+        </p:spPr>
+        <p:txBody>
+          <a:bodyPr wrap="square" lIns="0" rIns="0" tIns="0" bIns="0">
+            <a:spAutoFit/>
+          </a:bodyPr>
+          <a:lstStyle/>
+          <a:p>
+            <a:pPr algn="l">
+              <a:lnSpc>
+                <a:spcPct val="125000"/>
+              </a:lnSpc>
+            </a:pPr>
+            <a:r>
+              <a:rPr sz="1400" b="1">
                 <a:solidFill>
                   <a:srgbClr val="0F141F"/>
                 </a:solidFill>
                 <a:latin typeface="맑은 고딕"/>
               </a:rPr>
-              <a:t>"중간고사 폐지, 단일 기말 40%"</a:t>
+              <a:t>"중간고사 폐지, 기말고사 1회 (40%)"</a:t>
             </a:r>
           </a:p>
         </p:txBody>
@@ -35050,23 +33576,23 @@
         </p:nvSpPr>
         <p:spPr>
           <a:xfrm>
-            <a:off x="6492240" y="4069080"/>
-            <a:ext cx="4846320" cy="457200"/>
-          </a:xfrm>
-          <a:prstGeom prst="rect">
-            <a:avLst/>
-          </a:prstGeom>
-          <a:noFill/>
-        </p:spPr>
-        <p:txBody>
-          <a:bodyPr wrap="square" lIns="0" rIns="0" tIns="0" bIns="0">
-            <a:spAutoFit/>
-          </a:bodyPr>
-          <a:lstStyle/>
-          <a:p>
-            <a:pPr algn="l">
-              <a:lnSpc>
-                <a:spcPct val="125000"/>
+            <a:off x="6492240" y="3657600"/>
+            <a:ext cx="4846320" cy="1371600"/>
+          </a:xfrm>
+          <a:prstGeom prst="rect">
+            <a:avLst/>
+          </a:prstGeom>
+          <a:noFill/>
+        </p:spPr>
+        <p:txBody>
+          <a:bodyPr wrap="square" lIns="0" rIns="0" tIns="0" bIns="0">
+            <a:spAutoFit/>
+          </a:bodyPr>
+          <a:lstStyle/>
+          <a:p>
+            <a:pPr algn="l">
+              <a:lnSpc>
+                <a:spcPct val="140000"/>
               </a:lnSpc>
             </a:pPr>
             <a:r>
@@ -35076,7 +33602,39 @@
                 </a:solidFill>
                 <a:latin typeface="맑은 고딕"/>
               </a:rPr>
-              <a:t>= 학기 초 학습이 t = 80일 거리 → B 급락</a:t>
+              <a:t>→ 3월에 배운 내용을 6월 시험에서 떠올려야 함.</a:t>
+            </a:r>
+          </a:p>
+          <a:p>
+            <a:pPr algn="l">
+              <a:lnSpc>
+                <a:spcPct val="140000"/>
+              </a:lnSpc>
+            </a:pPr>
+            <a:r>
+              <a:rPr sz="1100" b="0">
+                <a:solidFill>
+                  <a:srgbClr val="424B5C"/>
+                </a:solidFill>
+                <a:latin typeface="맑은 고딕"/>
+              </a:rPr>
+              <a:t>→ 80일이나 지났으니 기억이 거의 사라짐.</a:t>
+            </a:r>
+          </a:p>
+          <a:p>
+            <a:pPr algn="l">
+              <a:lnSpc>
+                <a:spcPct val="140000"/>
+              </a:lnSpc>
+            </a:pPr>
+            <a:r>
+              <a:rPr sz="1100" b="0">
+                <a:solidFill>
+                  <a:srgbClr val="424B5C"/>
+                </a:solidFill>
+                <a:latin typeface="맑은 고딕"/>
+              </a:rPr>
+              <a:t>→ 시험 직전 벼락치기로 몰림 (massed practice).</a:t>
             </a:r>
           </a:p>
         </p:txBody>
@@ -35089,7 +33647,7 @@
         </p:nvCxnSpPr>
         <p:spPr>
           <a:xfrm>
-            <a:off x="6492240" y="4617720"/>
+            <a:off x="6492240" y="5074920"/>
             <a:ext cx="4846320" cy="0"/>
           </a:xfrm>
           <a:prstGeom prst="line">
@@ -35124,7 +33682,7 @@
         </p:nvSpPr>
         <p:spPr>
           <a:xfrm>
-            <a:off x="6492240" y="4709160"/>
+            <a:off x="6492240" y="5166360"/>
             <a:ext cx="4572000" cy="320040"/>
           </a:xfrm>
           <a:prstGeom prst="rect">
@@ -35150,7 +33708,7 @@
                 </a:solidFill>
                 <a:latin typeface="맑은 고딕"/>
               </a:rPr>
-              <a:t>정량 예측 (시뮬)</a:t>
+              <a:t>시뮬레이션 결과 — 시험장 인출 시간</a:t>
             </a:r>
           </a:p>
         </p:txBody>
@@ -35163,7 +33721,7 @@
         </p:nvSpPr>
         <p:spPr>
           <a:xfrm>
-            <a:off x="6492240" y="5029200"/>
+            <a:off x="6492240" y="5486400"/>
             <a:ext cx="4846320" cy="365760"/>
           </a:xfrm>
           <a:prstGeom prst="rect">
@@ -35183,13 +33741,13 @@
               </a:lnSpc>
             </a:pPr>
             <a:r>
-              <a:rPr sz="1200" b="0">
+              <a:rPr sz="1100" b="0">
                 <a:solidFill>
                   <a:srgbClr val="424B5C"/>
                 </a:solidFill>
                 <a:latin typeface="맑은 고딕"/>
               </a:rPr>
-              <a:t>단일 기말 → B ≈ −2.0, T ≈ 7.4초</a:t>
+              <a:t>단일 기말 학생: 답 떠올리는 데 약 7.4초</a:t>
             </a:r>
           </a:p>
         </p:txBody>
@@ -35202,7 +33760,7 @@
         </p:nvSpPr>
         <p:spPr>
           <a:xfrm>
-            <a:off x="6492240" y="5440680"/>
+            <a:off x="6492240" y="5852160"/>
             <a:ext cx="4846320" cy="365760"/>
           </a:xfrm>
           <a:prstGeom prst="rect">
@@ -35222,13 +33780,13 @@
               </a:lnSpc>
             </a:pPr>
             <a:r>
-              <a:rPr sz="1400" b="1">
+              <a:rPr sz="1200" b="1">
                 <a:solidFill>
                   <a:srgbClr val="0F141F"/>
                 </a:solidFill>
                 <a:latin typeface="맑은 고딕"/>
               </a:rPr>
-              <a:t>격주 퀴즈 → B ≈ −0.8, T ≈ 2.2초</a:t>
+              <a:t>격주 퀴즈 학생: 약 2.2초 (3.4배 빠름)</a:t>
             </a:r>
           </a:p>
         </p:txBody>
@@ -35241,8 +33799,8 @@
         </p:nvSpPr>
         <p:spPr>
           <a:xfrm>
-            <a:off x="6492240" y="5989320"/>
-            <a:ext cx="1828800" cy="365760"/>
+            <a:off x="6492240" y="6263640"/>
+            <a:ext cx="2011680" cy="365760"/>
           </a:xfrm>
           <a:prstGeom prst="roundRect">
             <a:avLst>
@@ -35286,25 +33844,21 @@
         </p:nvSpPr>
         <p:spPr>
           <a:xfrm>
-            <a:off x="6492240" y="6035040"/>
-            <a:ext cx="1828800" cy="274320"/>
-          </a:xfrm>
-          <a:prstGeom prst="rect">
-            <a:avLst/>
-          </a:prstGeom>
-          <a:noFill/>
-        </p:spPr>
-        <p:txBody>
-          <a:bodyPr wrap="square" lIns="0" rIns="0" tIns="0" bIns="0">
-            <a:spAutoFit/>
-          </a:bodyPr>
-          <a:lstStyle/>
-          <a:p>
-            <a:pPr algn="ctr">
-              <a:lnSpc>
-                <a:spcPct val="125000"/>
-              </a:lnSpc>
-            </a:pPr>
+            <a:off x="6492240" y="6263640"/>
+            <a:ext cx="2011680" cy="365760"/>
+          </a:xfrm>
+          <a:prstGeom prst="rect">
+            <a:avLst/>
+          </a:prstGeom>
+          <a:noFill/>
+        </p:spPr>
+        <p:txBody>
+          <a:bodyPr wrap="none" lIns="36576" rIns="36576" tIns="0" bIns="0" anchor="ctr">
+            <a:spAutoFit/>
+          </a:bodyPr>
+          <a:lstStyle/>
+          <a:p>
+            <a:pPr algn="ctr"/>
             <a:r>
               <a:rPr sz="1000" b="1">
                 <a:solidFill>

--- a/team_project/kickoff_2026-05-11.pptx
+++ b/team_project/kickoff_2026-05-11.pptx
@@ -29,6 +29,8 @@
     <p:sldId id="277" r:id="rId28"/>
     <p:sldId id="278" r:id="rId29"/>
     <p:sldId id="279" r:id="rId30"/>
+    <p:sldId id="280" r:id="rId31"/>
+    <p:sldId id="281" r:id="rId32"/>
   </p:sldIdLst>
   <p:sldSz cx="12188952" cy="6858000" type="screen4x3"/>
   <p:notesSz cx="6858000" cy="9144000"/>
@@ -14412,7 +14414,7 @@
                 </a:solidFill>
                 <a:latin typeface="맑은 고딕"/>
               </a:rPr>
-              <a:t>T1 · LIVE DEMO</a:t>
+              <a:t>T1 · LIVE DEMO 1/2</a:t>
             </a:r>
           </a:p>
         </p:txBody>
@@ -14451,7 +14453,7 @@
                 </a:solidFill>
                 <a:latin typeface="맑은 고딕"/>
               </a:rPr>
-              <a:t>응답자가 실제로 보는 화면 — Streamlit 학습 MBTI 앱</a:t>
+              <a:t>응답자가 실제로 보는 화면 — 인트로 &amp; 출석</a:t>
             </a:r>
           </a:p>
         </p:txBody>
@@ -14538,33 +14540,33 @@
         </p:nvSpPr>
         <p:spPr>
           <a:xfrm>
-            <a:off x="640080" y="2103120"/>
-            <a:ext cx="10972800" cy="365760"/>
-          </a:xfrm>
-          <a:prstGeom prst="rect">
-            <a:avLst/>
-          </a:prstGeom>
-          <a:noFill/>
-        </p:spPr>
-        <p:txBody>
-          <a:bodyPr wrap="square" lIns="0" rIns="0" tIns="0" bIns="0">
-            <a:spAutoFit/>
-          </a:bodyPr>
-          <a:lstStyle/>
-          <a:p>
-            <a:pPr algn="l">
-              <a:lnSpc>
-                <a:spcPct val="125000"/>
-              </a:lnSpc>
-            </a:pPr>
-            <a:r>
-              <a:rPr sz="1200" b="0">
+            <a:off x="640080" y="2011680"/>
+            <a:ext cx="10972800" cy="320040"/>
+          </a:xfrm>
+          <a:prstGeom prst="rect">
+            <a:avLst/>
+          </a:prstGeom>
+          <a:noFill/>
+        </p:spPr>
+        <p:txBody>
+          <a:bodyPr wrap="square" lIns="0" rIns="0" tIns="0" bIns="0">
+            <a:spAutoFit/>
+          </a:bodyPr>
+          <a:lstStyle/>
+          <a:p>
+            <a:pPr algn="l">
+              <a:lnSpc>
+                <a:spcPct val="125000"/>
+              </a:lnSpc>
+            </a:pPr>
+            <a:r>
+              <a:rPr sz="1100" b="0">
                 <a:solidFill>
                   <a:srgbClr val="8B95A7"/>
                 </a:solidFill>
                 <a:latin typeface="맑은 고딕"/>
               </a:rPr>
-              <a:t>단톡에 링크 풀면 학생들이 이런 화면을 5분 동안 봅니다.</a:t>
+              <a:t>단톡에 풀면 학생들이 이렇게 보게 됩니다.</a:t>
             </a:r>
           </a:p>
         </p:txBody>
@@ -14585,8 +14587,8 @@
         </p:blipFill>
         <p:spPr>
           <a:xfrm>
-            <a:off x="640080" y="2606040"/>
-            <a:ext cx="5440680" cy="1645920"/>
+            <a:off x="640080" y="2423160"/>
+            <a:ext cx="5577840" cy="4310149"/>
           </a:xfrm>
           <a:prstGeom prst="rect">
             <a:avLst/>
@@ -14601,8 +14603,8 @@
         </p:nvSpPr>
         <p:spPr>
           <a:xfrm>
-            <a:off x="640080" y="4270248"/>
-            <a:ext cx="5440680" cy="228600"/>
+            <a:off x="640080" y="6263640"/>
+            <a:ext cx="5577840" cy="320040"/>
           </a:xfrm>
           <a:prstGeom prst="rect">
             <a:avLst/>
@@ -14621,9 +14623,9 @@
               </a:lnSpc>
             </a:pPr>
             <a:r>
-              <a:rPr sz="1000" b="1">
-                <a:solidFill>
-                  <a:srgbClr val="424B5C"/>
+              <a:rPr sz="1100" b="1">
+                <a:solidFill>
+                  <a:srgbClr val="10B981"/>
                 </a:solidFill>
                 <a:latin typeface="맑은 고딕"/>
               </a:rPr>
@@ -14648,8 +14650,8 @@
         </p:blipFill>
         <p:spPr>
           <a:xfrm>
-            <a:off x="6263640" y="2606040"/>
-            <a:ext cx="5440680" cy="1645920"/>
+            <a:off x="6355080" y="2423160"/>
+            <a:ext cx="5440680" cy="4204162"/>
           </a:xfrm>
           <a:prstGeom prst="rect">
             <a:avLst/>
@@ -14664,8 +14666,8 @@
         </p:nvSpPr>
         <p:spPr>
           <a:xfrm>
-            <a:off x="6263640" y="4270248"/>
-            <a:ext cx="5440680" cy="228600"/>
+            <a:off x="6355080" y="6263640"/>
+            <a:ext cx="5440680" cy="320040"/>
           </a:xfrm>
           <a:prstGeom prst="rect">
             <a:avLst/>
@@ -14684,51 +14686,27 @@
               </a:lnSpc>
             </a:pPr>
             <a:r>
-              <a:rPr sz="1000" b="1">
-                <a:solidFill>
-                  <a:srgbClr val="424B5C"/>
-                </a:solidFill>
-                <a:latin typeface="맑은 고딕"/>
-              </a:rPr>
-              <a:t>② 출석 정책 3 조건 평가 (within)</a:t>
-            </a:r>
-          </a:p>
-        </p:txBody>
-      </p:sp>
-      <p:pic>
-        <p:nvPicPr>
-          <p:cNvPr id="12" name="Picture 11" descr="03_framing.png"/>
-          <p:cNvPicPr>
-            <a:picLocks noChangeAspect="1"/>
-          </p:cNvPicPr>
-          <p:nvPr/>
-        </p:nvPicPr>
-        <p:blipFill>
-          <a:blip r:embed="rId4"/>
-          <a:stretch>
-            <a:fillRect/>
-          </a:stretch>
-        </p:blipFill>
-        <p:spPr>
-          <a:xfrm>
-            <a:off x="640080" y="4572000"/>
-            <a:ext cx="5440680" cy="1645920"/>
-          </a:xfrm>
-          <a:prstGeom prst="rect">
-            <a:avLst/>
-          </a:prstGeom>
-        </p:spPr>
-      </p:pic>
-      <p:sp>
-        <p:nvSpPr>
-          <p:cNvPr id="13" name="TextBox 12"/>
-          <p:cNvSpPr txBox="1"/>
-          <p:nvPr/>
-        </p:nvSpPr>
-        <p:spPr>
-          <a:xfrm>
-            <a:off x="640080" y="6236208"/>
-            <a:ext cx="5440680" cy="228600"/>
+              <a:rPr sz="1100" b="1">
+                <a:solidFill>
+                  <a:srgbClr val="10B981"/>
+                </a:solidFill>
+                <a:latin typeface="맑은 고딕"/>
+              </a:rPr>
+              <a:t>② 출석 정책 3 조건 평가 (within-subjects)</a:t>
+            </a:r>
+          </a:p>
+        </p:txBody>
+      </p:sp>
+      <p:sp>
+        <p:nvSpPr>
+          <p:cNvPr id="12" name="TextBox 11"/>
+          <p:cNvSpPr txBox="1"/>
+          <p:nvPr/>
+        </p:nvSpPr>
+        <p:spPr>
+          <a:xfrm>
+            <a:off x="640080" y="6629400"/>
+            <a:ext cx="10972800" cy="274320"/>
           </a:xfrm>
           <a:prstGeom prst="rect">
             <a:avLst/>
@@ -14747,154 +14725,13 @@
               </a:lnSpc>
             </a:pPr>
             <a:r>
-              <a:rPr sz="1000" b="1">
-                <a:solidFill>
-                  <a:srgbClr val="424B5C"/>
-                </a:solidFill>
-                <a:latin typeface="맑은 고딕"/>
-              </a:rPr>
-              <a:t>③ 인센티브 표현 — 강의계획서 원문</a:t>
-            </a:r>
-          </a:p>
-        </p:txBody>
-      </p:sp>
-      <p:pic>
-        <p:nvPicPr>
-          <p:cNvPr id="14" name="Picture 13" descr="04_team.png"/>
-          <p:cNvPicPr>
-            <a:picLocks noChangeAspect="1"/>
-          </p:cNvPicPr>
-          <p:nvPr/>
-        </p:nvPicPr>
-        <p:blipFill>
-          <a:blip r:embed="rId5"/>
-          <a:stretch>
-            <a:fillRect/>
-          </a:stretch>
-        </p:blipFill>
-        <p:spPr>
-          <a:xfrm>
-            <a:off x="6263640" y="4572000"/>
-            <a:ext cx="5440680" cy="1645920"/>
-          </a:xfrm>
-          <a:prstGeom prst="rect">
-            <a:avLst/>
-          </a:prstGeom>
-        </p:spPr>
-      </p:pic>
-      <p:sp>
-        <p:nvSpPr>
-          <p:cNvPr id="15" name="TextBox 14"/>
-          <p:cNvSpPr txBox="1"/>
-          <p:nvPr/>
-        </p:nvSpPr>
-        <p:spPr>
-          <a:xfrm>
-            <a:off x="6263640" y="6236208"/>
-            <a:ext cx="5440680" cy="228600"/>
-          </a:xfrm>
-          <a:prstGeom prst="rect">
-            <a:avLst/>
-          </a:prstGeom>
-          <a:noFill/>
-        </p:spPr>
-        <p:txBody>
-          <a:bodyPr wrap="square" lIns="0" rIns="0" tIns="0" bIns="0">
-            <a:spAutoFit/>
-          </a:bodyPr>
-          <a:lstStyle/>
-          <a:p>
-            <a:pPr algn="ctr">
-              <a:lnSpc>
-                <a:spcPct val="125000"/>
-              </a:lnSpc>
-            </a:pPr>
-            <a:r>
-              <a:rPr sz="1000" b="1">
-                <a:solidFill>
-                  <a:srgbClr val="424B5C"/>
-                </a:solidFill>
-                <a:latin typeface="맑은 고딕"/>
-              </a:rPr>
-              <a:t>④ 팀원 2명 직접 지명 (강의계획서 규칙)</a:t>
-            </a:r>
-          </a:p>
-        </p:txBody>
-      </p:sp>
-      <p:sp>
-        <p:nvSpPr>
-          <p:cNvPr id="16" name="TextBox 15"/>
-          <p:cNvSpPr txBox="1"/>
-          <p:nvPr/>
-        </p:nvSpPr>
-        <p:spPr>
-          <a:xfrm>
-            <a:off x="640080" y="6400800"/>
-            <a:ext cx="10972800" cy="365760"/>
-          </a:xfrm>
-          <a:prstGeom prst="rect">
-            <a:avLst/>
-          </a:prstGeom>
-          <a:noFill/>
-        </p:spPr>
-        <p:txBody>
-          <a:bodyPr wrap="square" lIns="0" rIns="0" tIns="0" bIns="0">
-            <a:spAutoFit/>
-          </a:bodyPr>
-          <a:lstStyle/>
-          <a:p>
-            <a:pPr algn="ctr">
-              <a:lnSpc>
-                <a:spcPct val="125000"/>
-              </a:lnSpc>
-            </a:pPr>
-            <a:r>
-              <a:rPr sz="1000" b="0">
-                <a:solidFill>
-                  <a:srgbClr val="424B5C"/>
-                </a:solidFill>
-                <a:latin typeface="맑은 고딕"/>
-              </a:rPr>
-              <a:t>동일 설문을 Google Forms·Sheets에도 동시 배포 → 도구별 응답률 차이로 인터페이스 효과 측정</a:t>
-            </a:r>
-          </a:p>
-        </p:txBody>
-      </p:sp>
-      <p:sp>
-        <p:nvSpPr>
-          <p:cNvPr id="17" name="TextBox 16"/>
-          <p:cNvSpPr txBox="1"/>
-          <p:nvPr/>
-        </p:nvSpPr>
-        <p:spPr>
-          <a:xfrm>
-            <a:off x="640080" y="6675120"/>
-            <a:ext cx="10972800" cy="274320"/>
-          </a:xfrm>
-          <a:prstGeom prst="rect">
-            <a:avLst/>
-          </a:prstGeom>
-          <a:noFill/>
-        </p:spPr>
-        <p:txBody>
-          <a:bodyPr wrap="square" lIns="0" rIns="0" tIns="0" bIns="0">
-            <a:spAutoFit/>
-          </a:bodyPr>
-          <a:lstStyle/>
-          <a:p>
-            <a:pPr algn="ctr">
-              <a:lnSpc>
-                <a:spcPct val="125000"/>
-              </a:lnSpc>
-            </a:pPr>
-            <a:r>
               <a:rPr sz="900" b="0">
                 <a:solidFill>
                   <a:srgbClr val="4F46E5"/>
                 </a:solidFill>
                 <a:latin typeface="맑은 고딕"/>
               </a:rPr>
-              <a:t>라이브 URL — imen315-syllabus-meta-gpvxmznvcygwd9cln2bnjp.streamlit.app</a:t>
+              <a:t>imen315-syllabus-meta-gpvxmznvcygwd9cln2bnjp.streamlit.app</a:t>
             </a:r>
           </a:p>
         </p:txBody>
@@ -14994,7 +14831,7 @@
                 </a:solidFill>
                 <a:latin typeface="맑은 고딕"/>
               </a:rPr>
-              <a:t>T2 · 컴퓨터 시뮬레이션</a:t>
+              <a:t>T1 · LIVE DEMO 2/2</a:t>
             </a:r>
           </a:p>
         </p:txBody>
@@ -15033,7 +14870,7 @@
                 </a:solidFill>
                 <a:latin typeface="맑은 고딕"/>
               </a:rPr>
-              <a:t>가상 학생 1000명을 만들어 "약한 학생도 보호되는지" 본다</a:t>
+              <a:t>응답자가 실제로 보는 화면 — 인센티브 &amp; 팀 구성</a:t>
             </a:r>
           </a:p>
         </p:txBody>
@@ -15120,577 +14957,198 @@
         </p:nvSpPr>
         <p:spPr>
           <a:xfrm>
-            <a:off x="640080" y="2103120"/>
-            <a:ext cx="10972800" cy="411480"/>
-          </a:xfrm>
-          <a:prstGeom prst="rect">
-            <a:avLst/>
-          </a:prstGeom>
-          <a:noFill/>
-        </p:spPr>
-        <p:txBody>
-          <a:bodyPr wrap="square" lIns="0" rIns="0" tIns="0" bIns="0">
-            <a:spAutoFit/>
-          </a:bodyPr>
-          <a:lstStyle/>
-          <a:p>
-            <a:pPr algn="l">
-              <a:lnSpc>
-                <a:spcPct val="125000"/>
-              </a:lnSpc>
-            </a:pPr>
-            <a:r>
-              <a:rPr sz="1500" b="1">
-                <a:solidFill>
-                  <a:srgbClr val="0F141F"/>
-                </a:solidFill>
-                <a:latin typeface="맑은 고딕"/>
-              </a:rPr>
-              <a:t>왜 1000명이나? 평균만 보면 가려지는 진실이 있다.</a:t>
-            </a:r>
-          </a:p>
-        </p:txBody>
-      </p:sp>
-      <p:sp>
-        <p:nvSpPr>
-          <p:cNvPr id="8" name="TextBox 7"/>
-          <p:cNvSpPr txBox="1"/>
-          <p:nvPr/>
-        </p:nvSpPr>
-        <p:spPr>
-          <a:xfrm>
-            <a:off x="640080" y="2560320"/>
-            <a:ext cx="10972800" cy="411480"/>
-          </a:xfrm>
-          <a:prstGeom prst="rect">
-            <a:avLst/>
-          </a:prstGeom>
-          <a:noFill/>
-        </p:spPr>
-        <p:txBody>
-          <a:bodyPr wrap="square" lIns="0" rIns="0" tIns="0" bIns="0">
-            <a:spAutoFit/>
-          </a:bodyPr>
-          <a:lstStyle/>
-          <a:p>
-            <a:pPr algn="l">
-              <a:lnSpc>
-                <a:spcPct val="125000"/>
-              </a:lnSpc>
-            </a:pPr>
-            <a:r>
-              <a:rPr sz="1300" b="0">
+            <a:off x="640080" y="2011680"/>
+            <a:ext cx="10972800" cy="320040"/>
+          </a:xfrm>
+          <a:prstGeom prst="rect">
+            <a:avLst/>
+          </a:prstGeom>
+          <a:noFill/>
+        </p:spPr>
+        <p:txBody>
+          <a:bodyPr wrap="square" lIns="0" rIns="0" tIns="0" bIns="0">
+            <a:spAutoFit/>
+          </a:bodyPr>
+          <a:lstStyle/>
+          <a:p>
+            <a:pPr algn="l">
+              <a:lnSpc>
+                <a:spcPct val="125000"/>
+              </a:lnSpc>
+            </a:pPr>
+            <a:r>
+              <a:rPr sz="1100" b="0">
+                <a:solidFill>
+                  <a:srgbClr val="8B95A7"/>
+                </a:solidFill>
+                <a:latin typeface="맑은 고딕"/>
+              </a:rPr>
+              <a:t>강의계획서 원문을 그대로 보여주는 두 시나리오.</a:t>
+            </a:r>
+          </a:p>
+        </p:txBody>
+      </p:sp>
+      <p:pic>
+        <p:nvPicPr>
+          <p:cNvPr id="8" name="Picture 7" descr="03_framing.png"/>
+          <p:cNvPicPr>
+            <a:picLocks noChangeAspect="1"/>
+          </p:cNvPicPr>
+          <p:nvPr/>
+        </p:nvPicPr>
+        <p:blipFill>
+          <a:blip r:embed="rId2"/>
+          <a:stretch>
+            <a:fillRect/>
+          </a:stretch>
+        </p:blipFill>
+        <p:spPr>
+          <a:xfrm>
+            <a:off x="640080" y="2423160"/>
+            <a:ext cx="5577840" cy="4310149"/>
+          </a:xfrm>
+          <a:prstGeom prst="rect">
+            <a:avLst/>
+          </a:prstGeom>
+        </p:spPr>
+      </p:pic>
+      <p:sp>
+        <p:nvSpPr>
+          <p:cNvPr id="9" name="TextBox 8"/>
+          <p:cNvSpPr txBox="1"/>
+          <p:nvPr/>
+        </p:nvSpPr>
+        <p:spPr>
+          <a:xfrm>
+            <a:off x="640080" y="6263640"/>
+            <a:ext cx="5577840" cy="320040"/>
+          </a:xfrm>
+          <a:prstGeom prst="rect">
+            <a:avLst/>
+          </a:prstGeom>
+          <a:noFill/>
+        </p:spPr>
+        <p:txBody>
+          <a:bodyPr wrap="square" lIns="0" rIns="0" tIns="0" bIns="0">
+            <a:spAutoFit/>
+          </a:bodyPr>
+          <a:lstStyle/>
+          <a:p>
+            <a:pPr algn="ctr">
+              <a:lnSpc>
+                <a:spcPct val="125000"/>
+              </a:lnSpc>
+            </a:pPr>
+            <a:r>
+              <a:rPr sz="1100" b="1">
+                <a:solidFill>
+                  <a:srgbClr val="EC4899"/>
+                </a:solidFill>
+                <a:latin typeface="맑은 고딕"/>
+              </a:rPr>
+              <a:t>③ 인센티브 표현 — 강의계획서 원문 (gain vs loss)</a:t>
+            </a:r>
+          </a:p>
+        </p:txBody>
+      </p:sp>
+      <p:pic>
+        <p:nvPicPr>
+          <p:cNvPr id="10" name="Picture 9" descr="04_team.png"/>
+          <p:cNvPicPr>
+            <a:picLocks noChangeAspect="1"/>
+          </p:cNvPicPr>
+          <p:nvPr/>
+        </p:nvPicPr>
+        <p:blipFill>
+          <a:blip r:embed="rId3"/>
+          <a:stretch>
+            <a:fillRect/>
+          </a:stretch>
+        </p:blipFill>
+        <p:spPr>
+          <a:xfrm>
+            <a:off x="6355080" y="2423160"/>
+            <a:ext cx="5440680" cy="4204162"/>
+          </a:xfrm>
+          <a:prstGeom prst="rect">
+            <a:avLst/>
+          </a:prstGeom>
+        </p:spPr>
+      </p:pic>
+      <p:sp>
+        <p:nvSpPr>
+          <p:cNvPr id="11" name="TextBox 10"/>
+          <p:cNvSpPr txBox="1"/>
+          <p:nvPr/>
+        </p:nvSpPr>
+        <p:spPr>
+          <a:xfrm>
+            <a:off x="6355080" y="6263640"/>
+            <a:ext cx="5440680" cy="320040"/>
+          </a:xfrm>
+          <a:prstGeom prst="rect">
+            <a:avLst/>
+          </a:prstGeom>
+          <a:noFill/>
+        </p:spPr>
+        <p:txBody>
+          <a:bodyPr wrap="square" lIns="0" rIns="0" tIns="0" bIns="0">
+            <a:spAutoFit/>
+          </a:bodyPr>
+          <a:lstStyle/>
+          <a:p>
+            <a:pPr algn="ctr">
+              <a:lnSpc>
+                <a:spcPct val="125000"/>
+              </a:lnSpc>
+            </a:pPr>
+            <a:r>
+              <a:rPr sz="1100" b="1">
+                <a:solidFill>
+                  <a:srgbClr val="4F46E5"/>
+                </a:solidFill>
+                <a:latin typeface="맑은 고딕"/>
+              </a:rPr>
+              <a:t>④ 팀원 2명 직접 지명 (강의계획서 규칙)</a:t>
+            </a:r>
+          </a:p>
+        </p:txBody>
+      </p:sp>
+      <p:sp>
+        <p:nvSpPr>
+          <p:cNvPr id="12" name="TextBox 11"/>
+          <p:cNvSpPr txBox="1"/>
+          <p:nvPr/>
+        </p:nvSpPr>
+        <p:spPr>
+          <a:xfrm>
+            <a:off x="640080" y="6629400"/>
+            <a:ext cx="10972800" cy="274320"/>
+          </a:xfrm>
+          <a:prstGeom prst="rect">
+            <a:avLst/>
+          </a:prstGeom>
+          <a:noFill/>
+        </p:spPr>
+        <p:txBody>
+          <a:bodyPr wrap="square" lIns="0" rIns="0" tIns="0" bIns="0">
+            <a:spAutoFit/>
+          </a:bodyPr>
+          <a:lstStyle/>
+          <a:p>
+            <a:pPr algn="ctr">
+              <a:lnSpc>
+                <a:spcPct val="125000"/>
+              </a:lnSpc>
+            </a:pPr>
+            <a:r>
+              <a:rPr sz="900" b="0">
                 <a:solidFill>
                   <a:srgbClr val="424B5C"/>
                 </a:solidFill>
                 <a:latin typeface="맑은 고딕"/>
               </a:rPr>
-              <a:t>예: "평균 출석률 80%"라고 해도, 학습률 낮은 학생은 30%일 수 있음.</a:t>
-            </a:r>
-          </a:p>
-        </p:txBody>
-      </p:sp>
-      <p:cxnSp>
-        <p:nvCxnSpPr>
-          <p:cNvPr id="9" name="Connector 8"/>
-          <p:cNvCxnSpPr/>
-          <p:nvPr/>
-        </p:nvCxnSpPr>
-        <p:spPr>
-          <a:xfrm>
-            <a:off x="640080" y="3291840"/>
-            <a:ext cx="10881360" cy="0"/>
-          </a:xfrm>
-          <a:prstGeom prst="line">
-            <a:avLst/>
-          </a:prstGeom>
-          <a:ln w="19050">
-            <a:solidFill>
-              <a:srgbClr val="E5E7EB"/>
-            </a:solidFill>
-          </a:ln>
-        </p:spPr>
-        <p:style>
-          <a:lnRef idx="2">
-            <a:schemeClr val="accent1"/>
-          </a:lnRef>
-          <a:fillRef idx="0">
-            <a:schemeClr val="accent1"/>
-          </a:fillRef>
-          <a:effectRef idx="1">
-            <a:schemeClr val="accent1"/>
-          </a:effectRef>
-          <a:fontRef idx="minor">
-            <a:schemeClr val="tx1"/>
-          </a:fontRef>
-        </p:style>
-      </p:cxnSp>
-      <p:sp>
-        <p:nvSpPr>
-          <p:cNvPr id="10" name="TextBox 9"/>
-          <p:cNvSpPr txBox="1"/>
-          <p:nvPr/>
-        </p:nvSpPr>
-        <p:spPr>
-          <a:xfrm>
-            <a:off x="640080" y="3429000"/>
-            <a:ext cx="10972800" cy="365760"/>
-          </a:xfrm>
-          <a:prstGeom prst="rect">
-            <a:avLst/>
-          </a:prstGeom>
-          <a:noFill/>
-        </p:spPr>
-        <p:txBody>
-          <a:bodyPr wrap="square" lIns="0" rIns="0" tIns="0" bIns="0">
-            <a:spAutoFit/>
-          </a:bodyPr>
-          <a:lstStyle/>
-          <a:p>
-            <a:pPr algn="l">
-              <a:lnSpc>
-                <a:spcPct val="125000"/>
-              </a:lnSpc>
-            </a:pPr>
-            <a:r>
-              <a:rPr sz="1100" b="1">
-                <a:solidFill>
-                  <a:srgbClr val="4F46E5"/>
-                </a:solidFill>
-                <a:latin typeface="맑은 고딕"/>
-              </a:rPr>
-              <a:t>개인과제 → 팀과제 확장</a:t>
-            </a:r>
-          </a:p>
-        </p:txBody>
-      </p:sp>
-      <p:sp>
-        <p:nvSpPr>
-          <p:cNvPr id="11" name="Rounded Rectangle 10"/>
-          <p:cNvSpPr/>
-          <p:nvPr/>
-        </p:nvSpPr>
-        <p:spPr>
-          <a:xfrm>
-            <a:off x="640080" y="3840480"/>
-            <a:ext cx="5440680" cy="2377440"/>
-          </a:xfrm>
-          <a:prstGeom prst="roundRect">
-            <a:avLst>
-              <a:gd name="adj" fmla="val 6000"/>
-            </a:avLst>
-          </a:prstGeom>
-          <a:solidFill>
-            <a:srgbClr val="FAFBFC"/>
-          </a:solidFill>
-          <a:ln w="9525">
-            <a:solidFill>
-              <a:srgbClr val="E5E7EB"/>
-            </a:solidFill>
-          </a:ln>
-        </p:spPr>
-        <p:style>
-          <a:lnRef idx="1">
-            <a:schemeClr val="accent1"/>
-          </a:lnRef>
-          <a:fillRef idx="3">
-            <a:schemeClr val="accent1"/>
-          </a:fillRef>
-          <a:effectRef idx="2">
-            <a:schemeClr val="accent1"/>
-          </a:effectRef>
-          <a:fontRef idx="minor">
-            <a:schemeClr val="lt1"/>
-          </a:fontRef>
-        </p:style>
-        <p:txBody>
-          <a:bodyPr rtlCol="0" anchor="ctr"/>
-          <a:lstStyle/>
-          <a:p>
-            <a:pPr algn="ctr"/>
-          </a:p>
-        </p:txBody>
-      </p:sp>
-      <p:sp>
-        <p:nvSpPr>
-          <p:cNvPr id="12" name="TextBox 11"/>
-          <p:cNvSpPr txBox="1"/>
-          <p:nvPr/>
-        </p:nvSpPr>
-        <p:spPr>
-          <a:xfrm>
-            <a:off x="868680" y="3977639"/>
-            <a:ext cx="5029200" cy="365760"/>
-          </a:xfrm>
-          <a:prstGeom prst="rect">
-            <a:avLst/>
-          </a:prstGeom>
-          <a:noFill/>
-        </p:spPr>
-        <p:txBody>
-          <a:bodyPr wrap="square" lIns="0" rIns="0" tIns="0" bIns="0">
-            <a:spAutoFit/>
-          </a:bodyPr>
-          <a:lstStyle/>
-          <a:p>
-            <a:pPr algn="l">
-              <a:lnSpc>
-                <a:spcPct val="125000"/>
-              </a:lnSpc>
-            </a:pPr>
-            <a:r>
-              <a:rPr sz="1200" b="1">
-                <a:solidFill>
-                  <a:srgbClr val="8B95A7"/>
-                </a:solidFill>
-                <a:latin typeface="맑은 고딕"/>
-              </a:rPr>
-              <a:t>개인과제 (현재)</a:t>
-            </a:r>
-          </a:p>
-        </p:txBody>
-      </p:sp>
-      <p:sp>
-        <p:nvSpPr>
-          <p:cNvPr id="13" name="TextBox 12"/>
-          <p:cNvSpPr txBox="1"/>
-          <p:nvPr/>
-        </p:nvSpPr>
-        <p:spPr>
-          <a:xfrm>
-            <a:off x="868680" y="4389120"/>
-            <a:ext cx="5029200" cy="457200"/>
-          </a:xfrm>
-          <a:prstGeom prst="rect">
-            <a:avLst/>
-          </a:prstGeom>
-          <a:noFill/>
-        </p:spPr>
-        <p:txBody>
-          <a:bodyPr wrap="square" lIns="0" rIns="0" tIns="0" bIns="0">
-            <a:spAutoFit/>
-          </a:bodyPr>
-          <a:lstStyle/>
-          <a:p>
-            <a:pPr algn="l">
-              <a:lnSpc>
-                <a:spcPct val="125000"/>
-              </a:lnSpc>
-            </a:pPr>
-            <a:r>
-              <a:rPr sz="1800" b="1">
-                <a:solidFill>
-                  <a:srgbClr val="0F141F"/>
-                </a:solidFill>
-                <a:latin typeface="맑은 고딕"/>
-              </a:rPr>
-              <a:t>학생 1명 평균만</a:t>
-            </a:r>
-          </a:p>
-        </p:txBody>
-      </p:sp>
-      <p:sp>
-        <p:nvSpPr>
-          <p:cNvPr id="14" name="TextBox 13"/>
-          <p:cNvSpPr txBox="1"/>
-          <p:nvPr/>
-        </p:nvSpPr>
-        <p:spPr>
-          <a:xfrm>
-            <a:off x="868680" y="4937760"/>
-            <a:ext cx="5029200" cy="1188720"/>
-          </a:xfrm>
-          <a:prstGeom prst="rect">
-            <a:avLst/>
-          </a:prstGeom>
-          <a:noFill/>
-        </p:spPr>
-        <p:txBody>
-          <a:bodyPr wrap="square" lIns="0" rIns="0" tIns="0" bIns="0">
-            <a:spAutoFit/>
-          </a:bodyPr>
-          <a:lstStyle/>
-          <a:p>
-            <a:pPr algn="l">
-              <a:lnSpc>
-                <a:spcPct val="140000"/>
-              </a:lnSpc>
-            </a:pPr>
-            <a:r>
-              <a:rPr sz="1100" b="0">
-                <a:solidFill>
-                  <a:srgbClr val="424B5C"/>
-                </a:solidFill>
-                <a:latin typeface="맑은 고딕"/>
-              </a:rPr>
-              <a:t>모든 학생이 똑같이 학습률 0.15,</a:t>
-            </a:r>
-          </a:p>
-          <a:p>
-            <a:pPr algn="l">
-              <a:lnSpc>
-                <a:spcPct val="140000"/>
-              </a:lnSpc>
-            </a:pPr>
-            <a:r>
-              <a:rPr sz="1100" b="0">
-                <a:solidFill>
-                  <a:srgbClr val="424B5C"/>
-                </a:solidFill>
-                <a:latin typeface="맑은 고딕"/>
-              </a:rPr>
-              <a:t>작업 기억 7개라고 가정.</a:t>
-            </a:r>
-          </a:p>
-          <a:p>
-            <a:pPr algn="l">
-              <a:lnSpc>
-                <a:spcPct val="140000"/>
-              </a:lnSpc>
-            </a:pPr>
-            <a:r>
-              <a:rPr sz="1100" b="0">
-                <a:solidFill>
-                  <a:srgbClr val="424B5C"/>
-                </a:solidFill>
-                <a:latin typeface="맑은 고딕"/>
-              </a:rPr>
-              <a:t>→ "평균적 학생"만 본 결과.</a:t>
-            </a:r>
-          </a:p>
-        </p:txBody>
-      </p:sp>
-      <p:sp>
-        <p:nvSpPr>
-          <p:cNvPr id="15" name="Rounded Rectangle 14"/>
-          <p:cNvSpPr/>
-          <p:nvPr/>
-        </p:nvSpPr>
-        <p:spPr>
-          <a:xfrm>
-            <a:off x="6263640" y="3840480"/>
-            <a:ext cx="5257800" cy="2377440"/>
-          </a:xfrm>
-          <a:prstGeom prst="roundRect">
-            <a:avLst>
-              <a:gd name="adj" fmla="val 6000"/>
-            </a:avLst>
-          </a:prstGeom>
-          <a:solidFill>
-            <a:srgbClr val="EEEAFE"/>
-          </a:solidFill>
-          <a:ln w="9525">
-            <a:solidFill>
-              <a:srgbClr val="4F46E5"/>
-            </a:solidFill>
-          </a:ln>
-        </p:spPr>
-        <p:style>
-          <a:lnRef idx="1">
-            <a:schemeClr val="accent1"/>
-          </a:lnRef>
-          <a:fillRef idx="3">
-            <a:schemeClr val="accent1"/>
-          </a:fillRef>
-          <a:effectRef idx="2">
-            <a:schemeClr val="accent1"/>
-          </a:effectRef>
-          <a:fontRef idx="minor">
-            <a:schemeClr val="lt1"/>
-          </a:fontRef>
-        </p:style>
-        <p:txBody>
-          <a:bodyPr rtlCol="0" anchor="ctr"/>
-          <a:lstStyle/>
-          <a:p>
-            <a:pPr algn="ctr"/>
-          </a:p>
-        </p:txBody>
-      </p:sp>
-      <p:sp>
-        <p:nvSpPr>
-          <p:cNvPr id="16" name="TextBox 15"/>
-          <p:cNvSpPr txBox="1"/>
-          <p:nvPr/>
-        </p:nvSpPr>
-        <p:spPr>
-          <a:xfrm>
-            <a:off x="6492240" y="3977639"/>
-            <a:ext cx="4846320" cy="365760"/>
-          </a:xfrm>
-          <a:prstGeom prst="rect">
-            <a:avLst/>
-          </a:prstGeom>
-          <a:noFill/>
-        </p:spPr>
-        <p:txBody>
-          <a:bodyPr wrap="square" lIns="0" rIns="0" tIns="0" bIns="0">
-            <a:spAutoFit/>
-          </a:bodyPr>
-          <a:lstStyle/>
-          <a:p>
-            <a:pPr algn="l">
-              <a:lnSpc>
-                <a:spcPct val="125000"/>
-              </a:lnSpc>
-            </a:pPr>
-            <a:r>
-              <a:rPr sz="1200" b="1">
-                <a:solidFill>
-                  <a:srgbClr val="4F46E5"/>
-                </a:solidFill>
-                <a:latin typeface="맑은 고딕"/>
-              </a:rPr>
-              <a:t>팀과제 (확장)</a:t>
-            </a:r>
-          </a:p>
-        </p:txBody>
-      </p:sp>
-      <p:sp>
-        <p:nvSpPr>
-          <p:cNvPr id="17" name="TextBox 16"/>
-          <p:cNvSpPr txBox="1"/>
-          <p:nvPr/>
-        </p:nvSpPr>
-        <p:spPr>
-          <a:xfrm>
-            <a:off x="6492240" y="4389120"/>
-            <a:ext cx="4846320" cy="457200"/>
-          </a:xfrm>
-          <a:prstGeom prst="rect">
-            <a:avLst/>
-          </a:prstGeom>
-          <a:noFill/>
-        </p:spPr>
-        <p:txBody>
-          <a:bodyPr wrap="square" lIns="0" rIns="0" tIns="0" bIns="0">
-            <a:spAutoFit/>
-          </a:bodyPr>
-          <a:lstStyle/>
-          <a:p>
-            <a:pPr algn="l">
-              <a:lnSpc>
-                <a:spcPct val="125000"/>
-              </a:lnSpc>
-            </a:pPr>
-            <a:r>
-              <a:rPr sz="1500" b="1">
-                <a:solidFill>
-                  <a:srgbClr val="0F141F"/>
-                </a:solidFill>
-                <a:latin typeface="맑은 고딕"/>
-              </a:rPr>
-              <a:t>가상 학생 1000명, 사람마다 다르게</a:t>
-            </a:r>
-          </a:p>
-        </p:txBody>
-      </p:sp>
-      <p:sp>
-        <p:nvSpPr>
-          <p:cNvPr id="18" name="TextBox 17"/>
-          <p:cNvSpPr txBox="1"/>
-          <p:nvPr/>
-        </p:nvSpPr>
-        <p:spPr>
-          <a:xfrm>
-            <a:off x="6492240" y="4937760"/>
-            <a:ext cx="4846320" cy="1188720"/>
-          </a:xfrm>
-          <a:prstGeom prst="rect">
-            <a:avLst/>
-          </a:prstGeom>
-          <a:noFill/>
-        </p:spPr>
-        <p:txBody>
-          <a:bodyPr wrap="square" lIns="0" rIns="0" tIns="0" bIns="0">
-            <a:spAutoFit/>
-          </a:bodyPr>
-          <a:lstStyle/>
-          <a:p>
-            <a:pPr algn="l">
-              <a:lnSpc>
-                <a:spcPct val="140000"/>
-              </a:lnSpc>
-            </a:pPr>
-            <a:r>
-              <a:rPr sz="1100" b="0">
-                <a:solidFill>
-                  <a:srgbClr val="424B5C"/>
-                </a:solidFill>
-                <a:latin typeface="맑은 고딕"/>
-              </a:rPr>
-              <a:t>학습률·기억력·작업 기억이 모두 다른</a:t>
-            </a:r>
-          </a:p>
-          <a:p>
-            <a:pPr algn="l">
-              <a:lnSpc>
-                <a:spcPct val="140000"/>
-              </a:lnSpc>
-            </a:pPr>
-            <a:r>
-              <a:rPr sz="1100" b="0">
-                <a:solidFill>
-                  <a:srgbClr val="424B5C"/>
-                </a:solidFill>
-                <a:latin typeface="맑은 고딕"/>
-              </a:rPr>
-              <a:t>1000명을 가상으로 만들어 시뮬.</a:t>
-            </a:r>
-          </a:p>
-          <a:p>
-            <a:pPr algn="l">
-              <a:lnSpc>
-                <a:spcPct val="140000"/>
-              </a:lnSpc>
-            </a:pPr>
-            <a:r>
-              <a:rPr sz="1100" b="0">
-                <a:solidFill>
-                  <a:srgbClr val="424B5C"/>
-                </a:solidFill>
-                <a:latin typeface="맑은 고딕"/>
-              </a:rPr>
-              <a:t>→ 평균뿐 아니라 하위 25%도 본다.</a:t>
-            </a:r>
-          </a:p>
-        </p:txBody>
-      </p:sp>
-      <p:sp>
-        <p:nvSpPr>
-          <p:cNvPr id="19" name="TextBox 18"/>
-          <p:cNvSpPr txBox="1"/>
-          <p:nvPr/>
-        </p:nvSpPr>
-        <p:spPr>
-          <a:xfrm>
-            <a:off x="640080" y="6400800"/>
-            <a:ext cx="10972800" cy="365760"/>
-          </a:xfrm>
-          <a:prstGeom prst="rect">
-            <a:avLst/>
-          </a:prstGeom>
-          <a:noFill/>
-        </p:spPr>
-        <p:txBody>
-          <a:bodyPr wrap="square" lIns="0" rIns="0" tIns="0" bIns="0">
-            <a:spAutoFit/>
-          </a:bodyPr>
-          <a:lstStyle/>
-          <a:p>
-            <a:pPr algn="ctr">
-              <a:lnSpc>
-                <a:spcPct val="125000"/>
-              </a:lnSpc>
-            </a:pPr>
-            <a:r>
-              <a:rPr sz="1200" b="1">
-                <a:solidFill>
-                  <a:srgbClr val="EC4899"/>
-                </a:solidFill>
-                <a:latin typeface="맑은 고딕"/>
-              </a:rPr>
-              <a:t>→ 보고서 핵심 한 줄: "개선안이 약한 학생도 도와주는가?"</a:t>
+              <a:t>같은 설문을 Google Forms + Streamlit + Sheets에 동시 배포 → 도구별 응답률 비교</a:t>
             </a:r>
           </a:p>
         </p:txBody>
@@ -15790,7 +15248,7 @@
                 </a:solidFill>
                 <a:latin typeface="맑은 고딕"/>
               </a:rPr>
-              <a:t>T2 · 시뮬 결과 예시</a:t>
+              <a:t>T2 · 컴퓨터 시뮬레이션</a:t>
             </a:r>
           </a:p>
         </p:txBody>
@@ -15829,7 +15287,7 @@
                 </a:solidFill>
                 <a:latin typeface="맑은 고딕"/>
               </a:rPr>
-              <a:t>왜 평균만 보면 안 되는가 — 분포 효과 차트</a:t>
+              <a:t>가상 학생 1000명을 만들어 "약한 학생도 보호되는지" 본다</a:t>
             </a:r>
           </a:p>
         </p:txBody>
@@ -15903,7 +15361,7 @@
                 </a:solidFill>
                 <a:latin typeface="맑은 고딕"/>
               </a:rPr>
-              <a:t>23</a:t>
+              <a:t>22</a:t>
             </a:r>
           </a:p>
         </p:txBody>
@@ -15917,6 +15375,119 @@
         <p:spPr>
           <a:xfrm>
             <a:off x="640080" y="2103120"/>
+            <a:ext cx="10972800" cy="411480"/>
+          </a:xfrm>
+          <a:prstGeom prst="rect">
+            <a:avLst/>
+          </a:prstGeom>
+          <a:noFill/>
+        </p:spPr>
+        <p:txBody>
+          <a:bodyPr wrap="square" lIns="0" rIns="0" tIns="0" bIns="0">
+            <a:spAutoFit/>
+          </a:bodyPr>
+          <a:lstStyle/>
+          <a:p>
+            <a:pPr algn="l">
+              <a:lnSpc>
+                <a:spcPct val="125000"/>
+              </a:lnSpc>
+            </a:pPr>
+            <a:r>
+              <a:rPr sz="1500" b="1">
+                <a:solidFill>
+                  <a:srgbClr val="0F141F"/>
+                </a:solidFill>
+                <a:latin typeface="맑은 고딕"/>
+              </a:rPr>
+              <a:t>왜 1000명이나? 평균만 보면 가려지는 진실이 있다.</a:t>
+            </a:r>
+          </a:p>
+        </p:txBody>
+      </p:sp>
+      <p:sp>
+        <p:nvSpPr>
+          <p:cNvPr id="8" name="TextBox 7"/>
+          <p:cNvSpPr txBox="1"/>
+          <p:nvPr/>
+        </p:nvSpPr>
+        <p:spPr>
+          <a:xfrm>
+            <a:off x="640080" y="2560320"/>
+            <a:ext cx="10972800" cy="411480"/>
+          </a:xfrm>
+          <a:prstGeom prst="rect">
+            <a:avLst/>
+          </a:prstGeom>
+          <a:noFill/>
+        </p:spPr>
+        <p:txBody>
+          <a:bodyPr wrap="square" lIns="0" rIns="0" tIns="0" bIns="0">
+            <a:spAutoFit/>
+          </a:bodyPr>
+          <a:lstStyle/>
+          <a:p>
+            <a:pPr algn="l">
+              <a:lnSpc>
+                <a:spcPct val="125000"/>
+              </a:lnSpc>
+            </a:pPr>
+            <a:r>
+              <a:rPr sz="1300" b="0">
+                <a:solidFill>
+                  <a:srgbClr val="424B5C"/>
+                </a:solidFill>
+                <a:latin typeface="맑은 고딕"/>
+              </a:rPr>
+              <a:t>예: "평균 출석률 80%"라고 해도, 학습률 낮은 학생은 30%일 수 있음.</a:t>
+            </a:r>
+          </a:p>
+        </p:txBody>
+      </p:sp>
+      <p:cxnSp>
+        <p:nvCxnSpPr>
+          <p:cNvPr id="9" name="Connector 8"/>
+          <p:cNvCxnSpPr/>
+          <p:nvPr/>
+        </p:nvCxnSpPr>
+        <p:spPr>
+          <a:xfrm>
+            <a:off x="640080" y="3291840"/>
+            <a:ext cx="10881360" cy="0"/>
+          </a:xfrm>
+          <a:prstGeom prst="line">
+            <a:avLst/>
+          </a:prstGeom>
+          <a:ln w="19050">
+            <a:solidFill>
+              <a:srgbClr val="E5E7EB"/>
+            </a:solidFill>
+          </a:ln>
+        </p:spPr>
+        <p:style>
+          <a:lnRef idx="2">
+            <a:schemeClr val="accent1"/>
+          </a:lnRef>
+          <a:fillRef idx="0">
+            <a:schemeClr val="accent1"/>
+          </a:fillRef>
+          <a:effectRef idx="1">
+            <a:schemeClr val="accent1"/>
+          </a:effectRef>
+          <a:fontRef idx="minor">
+            <a:schemeClr val="tx1"/>
+          </a:fontRef>
+        </p:style>
+      </p:cxnSp>
+      <p:sp>
+        <p:nvSpPr>
+          <p:cNvPr id="10" name="TextBox 9"/>
+          <p:cNvSpPr txBox="1"/>
+          <p:nvPr/>
+        </p:nvSpPr>
+        <p:spPr>
+          <a:xfrm>
+            <a:off x="640080" y="3429000"/>
             <a:ext cx="10972800" cy="365760"/>
           </a:xfrm>
           <a:prstGeom prst="rect">
@@ -15936,51 +15507,223 @@
               </a:lnSpc>
             </a:pPr>
             <a:r>
-              <a:rPr sz="1200" b="0">
+              <a:rPr sz="1100" b="1">
+                <a:solidFill>
+                  <a:srgbClr val="4F46E5"/>
+                </a:solidFill>
+                <a:latin typeface="맑은 고딕"/>
+              </a:rPr>
+              <a:t>개인과제 → 팀과제 확장</a:t>
+            </a:r>
+          </a:p>
+        </p:txBody>
+      </p:sp>
+      <p:sp>
+        <p:nvSpPr>
+          <p:cNvPr id="11" name="Rounded Rectangle 10"/>
+          <p:cNvSpPr/>
+          <p:nvPr/>
+        </p:nvSpPr>
+        <p:spPr>
+          <a:xfrm>
+            <a:off x="640080" y="3840480"/>
+            <a:ext cx="5440680" cy="2377440"/>
+          </a:xfrm>
+          <a:prstGeom prst="roundRect">
+            <a:avLst>
+              <a:gd name="adj" fmla="val 6000"/>
+            </a:avLst>
+          </a:prstGeom>
+          <a:solidFill>
+            <a:srgbClr val="FAFBFC"/>
+          </a:solidFill>
+          <a:ln w="9525">
+            <a:solidFill>
+              <a:srgbClr val="E5E7EB"/>
+            </a:solidFill>
+          </a:ln>
+        </p:spPr>
+        <p:style>
+          <a:lnRef idx="1">
+            <a:schemeClr val="accent1"/>
+          </a:lnRef>
+          <a:fillRef idx="3">
+            <a:schemeClr val="accent1"/>
+          </a:fillRef>
+          <a:effectRef idx="2">
+            <a:schemeClr val="accent1"/>
+          </a:effectRef>
+          <a:fontRef idx="minor">
+            <a:schemeClr val="lt1"/>
+          </a:fontRef>
+        </p:style>
+        <p:txBody>
+          <a:bodyPr rtlCol="0" anchor="ctr"/>
+          <a:lstStyle/>
+          <a:p>
+            <a:pPr algn="ctr"/>
+          </a:p>
+        </p:txBody>
+      </p:sp>
+      <p:sp>
+        <p:nvSpPr>
+          <p:cNvPr id="12" name="TextBox 11"/>
+          <p:cNvSpPr txBox="1"/>
+          <p:nvPr/>
+        </p:nvSpPr>
+        <p:spPr>
+          <a:xfrm>
+            <a:off x="868680" y="3977639"/>
+            <a:ext cx="5029200" cy="365760"/>
+          </a:xfrm>
+          <a:prstGeom prst="rect">
+            <a:avLst/>
+          </a:prstGeom>
+          <a:noFill/>
+        </p:spPr>
+        <p:txBody>
+          <a:bodyPr wrap="square" lIns="0" rIns="0" tIns="0" bIns="0">
+            <a:spAutoFit/>
+          </a:bodyPr>
+          <a:lstStyle/>
+          <a:p>
+            <a:pPr algn="l">
+              <a:lnSpc>
+                <a:spcPct val="125000"/>
+              </a:lnSpc>
+            </a:pPr>
+            <a:r>
+              <a:rPr sz="1200" b="1">
                 <a:solidFill>
                   <a:srgbClr val="8B95A7"/>
                 </a:solidFill>
                 <a:latin typeface="맑은 고딕"/>
               </a:rPr>
-              <a:t>같은 개선안도 평균 학생에게는 별 차이 없지만, 약한 학생에게는 큰 도움이 된다.</a:t>
-            </a:r>
-          </a:p>
-        </p:txBody>
-      </p:sp>
-      <p:pic>
-        <p:nvPicPr>
-          <p:cNvPr id="8" name="Picture 7" descr="chart_distribution.png"/>
-          <p:cNvPicPr>
-            <a:picLocks noChangeAspect="1"/>
-          </p:cNvPicPr>
-          <p:nvPr/>
-        </p:nvPicPr>
-        <p:blipFill>
-          <a:blip r:embed="rId2"/>
-          <a:stretch>
-            <a:fillRect/>
-          </a:stretch>
-        </p:blipFill>
-        <p:spPr>
-          <a:xfrm>
-            <a:off x="640080" y="2606040"/>
-            <a:ext cx="7315200" cy="4064000"/>
-          </a:xfrm>
-          <a:prstGeom prst="rect">
-            <a:avLst/>
-          </a:prstGeom>
-        </p:spPr>
-      </p:pic>
-      <p:sp>
-        <p:nvSpPr>
-          <p:cNvPr id="9" name="Rounded Rectangle 8"/>
+              <a:t>개인과제 (현재)</a:t>
+            </a:r>
+          </a:p>
+        </p:txBody>
+      </p:sp>
+      <p:sp>
+        <p:nvSpPr>
+          <p:cNvPr id="13" name="TextBox 12"/>
+          <p:cNvSpPr txBox="1"/>
+          <p:nvPr/>
+        </p:nvSpPr>
+        <p:spPr>
+          <a:xfrm>
+            <a:off x="868680" y="4389120"/>
+            <a:ext cx="5029200" cy="457200"/>
+          </a:xfrm>
+          <a:prstGeom prst="rect">
+            <a:avLst/>
+          </a:prstGeom>
+          <a:noFill/>
+        </p:spPr>
+        <p:txBody>
+          <a:bodyPr wrap="square" lIns="0" rIns="0" tIns="0" bIns="0">
+            <a:spAutoFit/>
+          </a:bodyPr>
+          <a:lstStyle/>
+          <a:p>
+            <a:pPr algn="l">
+              <a:lnSpc>
+                <a:spcPct val="125000"/>
+              </a:lnSpc>
+            </a:pPr>
+            <a:r>
+              <a:rPr sz="1800" b="1">
+                <a:solidFill>
+                  <a:srgbClr val="0F141F"/>
+                </a:solidFill>
+                <a:latin typeface="맑은 고딕"/>
+              </a:rPr>
+              <a:t>학생 1명 평균만</a:t>
+            </a:r>
+          </a:p>
+        </p:txBody>
+      </p:sp>
+      <p:sp>
+        <p:nvSpPr>
+          <p:cNvPr id="14" name="TextBox 13"/>
+          <p:cNvSpPr txBox="1"/>
+          <p:nvPr/>
+        </p:nvSpPr>
+        <p:spPr>
+          <a:xfrm>
+            <a:off x="868680" y="4937760"/>
+            <a:ext cx="5029200" cy="1188720"/>
+          </a:xfrm>
+          <a:prstGeom prst="rect">
+            <a:avLst/>
+          </a:prstGeom>
+          <a:noFill/>
+        </p:spPr>
+        <p:txBody>
+          <a:bodyPr wrap="square" lIns="0" rIns="0" tIns="0" bIns="0">
+            <a:spAutoFit/>
+          </a:bodyPr>
+          <a:lstStyle/>
+          <a:p>
+            <a:pPr algn="l">
+              <a:lnSpc>
+                <a:spcPct val="140000"/>
+              </a:lnSpc>
+            </a:pPr>
+            <a:r>
+              <a:rPr sz="1100" b="0">
+                <a:solidFill>
+                  <a:srgbClr val="424B5C"/>
+                </a:solidFill>
+                <a:latin typeface="맑은 고딕"/>
+              </a:rPr>
+              <a:t>모든 학생이 똑같이 학습률 0.15,</a:t>
+            </a:r>
+          </a:p>
+          <a:p>
+            <a:pPr algn="l">
+              <a:lnSpc>
+                <a:spcPct val="140000"/>
+              </a:lnSpc>
+            </a:pPr>
+            <a:r>
+              <a:rPr sz="1100" b="0">
+                <a:solidFill>
+                  <a:srgbClr val="424B5C"/>
+                </a:solidFill>
+                <a:latin typeface="맑은 고딕"/>
+              </a:rPr>
+              <a:t>작업 기억 7개라고 가정.</a:t>
+            </a:r>
+          </a:p>
+          <a:p>
+            <a:pPr algn="l">
+              <a:lnSpc>
+                <a:spcPct val="140000"/>
+              </a:lnSpc>
+            </a:pPr>
+            <a:r>
+              <a:rPr sz="1100" b="0">
+                <a:solidFill>
+                  <a:srgbClr val="424B5C"/>
+                </a:solidFill>
+                <a:latin typeface="맑은 고딕"/>
+              </a:rPr>
+              <a:t>→ "평균적 학생"만 본 결과.</a:t>
+            </a:r>
+          </a:p>
+        </p:txBody>
+      </p:sp>
+      <p:sp>
+        <p:nvSpPr>
+          <p:cNvPr id="15" name="Rounded Rectangle 14"/>
           <p:cNvSpPr/>
           <p:nvPr/>
         </p:nvSpPr>
         <p:spPr>
           <a:xfrm>
-            <a:off x="8229600" y="2606040"/>
-            <a:ext cx="3291840" cy="3657600"/>
+            <a:off x="6263640" y="3840480"/>
+            <a:ext cx="5257800" cy="2377440"/>
           </a:xfrm>
           <a:prstGeom prst="roundRect">
             <a:avLst>
@@ -16020,53 +15763,92 @@
       </p:sp>
       <p:sp>
         <p:nvSpPr>
-          <p:cNvPr id="10" name="TextBox 9"/>
-          <p:cNvSpPr txBox="1"/>
-          <p:nvPr/>
-        </p:nvSpPr>
-        <p:spPr>
-          <a:xfrm>
-            <a:off x="8412480" y="2743200"/>
-            <a:ext cx="3017520" cy="365760"/>
-          </a:xfrm>
-          <a:prstGeom prst="rect">
-            <a:avLst/>
-          </a:prstGeom>
-          <a:noFill/>
-        </p:spPr>
-        <p:txBody>
-          <a:bodyPr wrap="square" lIns="0" rIns="0" tIns="0" bIns="0">
-            <a:spAutoFit/>
-          </a:bodyPr>
-          <a:lstStyle/>
-          <a:p>
-            <a:pPr algn="l">
-              <a:lnSpc>
-                <a:spcPct val="125000"/>
-              </a:lnSpc>
-            </a:pPr>
-            <a:r>
-              <a:rPr sz="1100" b="1">
+          <p:cNvPr id="16" name="TextBox 15"/>
+          <p:cNvSpPr txBox="1"/>
+          <p:nvPr/>
+        </p:nvSpPr>
+        <p:spPr>
+          <a:xfrm>
+            <a:off x="6492240" y="3977639"/>
+            <a:ext cx="4846320" cy="365760"/>
+          </a:xfrm>
+          <a:prstGeom prst="rect">
+            <a:avLst/>
+          </a:prstGeom>
+          <a:noFill/>
+        </p:spPr>
+        <p:txBody>
+          <a:bodyPr wrap="square" lIns="0" rIns="0" tIns="0" bIns="0">
+            <a:spAutoFit/>
+          </a:bodyPr>
+          <a:lstStyle/>
+          <a:p>
+            <a:pPr algn="l">
+              <a:lnSpc>
+                <a:spcPct val="125000"/>
+              </a:lnSpc>
+            </a:pPr>
+            <a:r>
+              <a:rPr sz="1200" b="1">
                 <a:solidFill>
                   <a:srgbClr val="4F46E5"/>
                 </a:solidFill>
                 <a:latin typeface="맑은 고딕"/>
               </a:rPr>
-              <a:t>이게 무슨 의미?</a:t>
-            </a:r>
-          </a:p>
-        </p:txBody>
-      </p:sp>
-      <p:sp>
-        <p:nvSpPr>
-          <p:cNvPr id="11" name="TextBox 10"/>
-          <p:cNvSpPr txBox="1"/>
-          <p:nvPr/>
-        </p:nvSpPr>
-        <p:spPr>
-          <a:xfrm>
-            <a:off x="8412480" y="3200400"/>
-            <a:ext cx="3017520" cy="2286000"/>
+              <a:t>팀과제 (확장)</a:t>
+            </a:r>
+          </a:p>
+        </p:txBody>
+      </p:sp>
+      <p:sp>
+        <p:nvSpPr>
+          <p:cNvPr id="17" name="TextBox 16"/>
+          <p:cNvSpPr txBox="1"/>
+          <p:nvPr/>
+        </p:nvSpPr>
+        <p:spPr>
+          <a:xfrm>
+            <a:off x="6492240" y="4389120"/>
+            <a:ext cx="4846320" cy="457200"/>
+          </a:xfrm>
+          <a:prstGeom prst="rect">
+            <a:avLst/>
+          </a:prstGeom>
+          <a:noFill/>
+        </p:spPr>
+        <p:txBody>
+          <a:bodyPr wrap="square" lIns="0" rIns="0" tIns="0" bIns="0">
+            <a:spAutoFit/>
+          </a:bodyPr>
+          <a:lstStyle/>
+          <a:p>
+            <a:pPr algn="l">
+              <a:lnSpc>
+                <a:spcPct val="125000"/>
+              </a:lnSpc>
+            </a:pPr>
+            <a:r>
+              <a:rPr sz="1500" b="1">
+                <a:solidFill>
+                  <a:srgbClr val="0F141F"/>
+                </a:solidFill>
+                <a:latin typeface="맑은 고딕"/>
+              </a:rPr>
+              <a:t>가상 학생 1000명, 사람마다 다르게</a:t>
+            </a:r>
+          </a:p>
+        </p:txBody>
+      </p:sp>
+      <p:sp>
+        <p:nvSpPr>
+          <p:cNvPr id="18" name="TextBox 17"/>
+          <p:cNvSpPr txBox="1"/>
+          <p:nvPr/>
+        </p:nvSpPr>
+        <p:spPr>
+          <a:xfrm>
+            <a:off x="6492240" y="4937760"/>
+            <a:ext cx="4846320" cy="1188720"/>
           </a:xfrm>
           <a:prstGeom prst="rect">
             <a:avLst/>
@@ -16085,13 +15867,13 @@
               </a:lnSpc>
             </a:pPr>
             <a:r>
-              <a:rPr sz="1000" b="0">
+              <a:rPr sz="1100" b="0">
                 <a:solidFill>
                   <a:srgbClr val="424B5C"/>
                 </a:solidFill>
                 <a:latin typeface="맑은 고딕"/>
               </a:rPr>
-              <a:t>기존 강의계획서:</a:t>
+              <a:t>학습률·기억력·작업 기억이 모두 다른</a:t>
             </a:r>
           </a:p>
           <a:p>
@@ -16101,13 +15883,13 @@
               </a:lnSpc>
             </a:pPr>
             <a:r>
-              <a:rPr sz="1000" b="0">
+              <a:rPr sz="1100" b="0">
                 <a:solidFill>
                   <a:srgbClr val="424B5C"/>
                 </a:solidFill>
                 <a:latin typeface="맑은 고딕"/>
               </a:rPr>
-              <a:t>평균 12.5초 vs 하위 22.3초.</a:t>
+              <a:t>1000명을 가상으로 만들어 시뮬.</a:t>
             </a:r>
           </a:p>
           <a:p>
@@ -16117,81 +15899,26 @@
               </a:lnSpc>
             </a:pPr>
             <a:r>
-              <a:rPr sz="1000" b="0">
+              <a:rPr sz="1100" b="0">
                 <a:solidFill>
                   <a:srgbClr val="424B5C"/>
                 </a:solidFill>
                 <a:latin typeface="맑은 고딕"/>
               </a:rPr>
-              <a:t>약한 학생이 1.8배 손해.</a:t>
-            </a:r>
-          </a:p>
-          <a:p>
-            <a:pPr algn="l">
-              <a:lnSpc>
-                <a:spcPct val="140000"/>
-              </a:lnSpc>
-            </a:pPr>
-          </a:p>
-          <a:p>
-            <a:pPr algn="l">
-              <a:lnSpc>
-                <a:spcPct val="140000"/>
-              </a:lnSpc>
-            </a:pPr>
-            <a:r>
-              <a:rPr sz="1000" b="0">
-                <a:solidFill>
-                  <a:srgbClr val="424B5C"/>
-                </a:solidFill>
-                <a:latin typeface="맑은 고딕"/>
-              </a:rPr>
-              <a:t>분산 평가 도입 시:</a:t>
-            </a:r>
-          </a:p>
-          <a:p>
-            <a:pPr algn="l">
-              <a:lnSpc>
-                <a:spcPct val="140000"/>
-              </a:lnSpc>
-            </a:pPr>
-            <a:r>
-              <a:rPr sz="1000" b="0">
-                <a:solidFill>
-                  <a:srgbClr val="424B5C"/>
-                </a:solidFill>
-                <a:latin typeface="맑은 고딕"/>
-              </a:rPr>
-              <a:t>평균 10.2초 vs 하위 13.5초.</a:t>
-            </a:r>
-          </a:p>
-          <a:p>
-            <a:pPr algn="l">
-              <a:lnSpc>
-                <a:spcPct val="140000"/>
-              </a:lnSpc>
-            </a:pPr>
-            <a:r>
-              <a:rPr sz="1000" b="0">
-                <a:solidFill>
-                  <a:srgbClr val="424B5C"/>
-                </a:solidFill>
-                <a:latin typeface="맑은 고딕"/>
-              </a:rPr>
-              <a:t>격차 1.3배로 감소.</a:t>
-            </a:r>
-          </a:p>
-        </p:txBody>
-      </p:sp>
-      <p:sp>
-        <p:nvSpPr>
-          <p:cNvPr id="12" name="TextBox 11"/>
-          <p:cNvSpPr txBox="1"/>
-          <p:nvPr/>
-        </p:nvSpPr>
-        <p:spPr>
-          <a:xfrm>
-            <a:off x="640080" y="6446520"/>
+              <a:t>→ 평균뿐 아니라 하위 25%도 본다.</a:t>
+            </a:r>
+          </a:p>
+        </p:txBody>
+      </p:sp>
+      <p:sp>
+        <p:nvSpPr>
+          <p:cNvPr id="19" name="TextBox 18"/>
+          <p:cNvSpPr txBox="1"/>
+          <p:nvPr/>
+        </p:nvSpPr>
+        <p:spPr>
+          <a:xfrm>
+            <a:off x="640080" y="6400800"/>
             <a:ext cx="10972800" cy="365760"/>
           </a:xfrm>
           <a:prstGeom prst="rect">
@@ -16217,7 +15944,7 @@
                 </a:solidFill>
                 <a:latin typeface="맑은 고딕"/>
               </a:rPr>
-              <a:t>→ 보고서 핵심: 우리 개선안은 "평균"이 아니라 "분포의 꼬리"를 다듬는다</a:t>
+              <a:t>→ 보고서 핵심 한 줄: "개선안이 약한 학생도 도와주는가?"</a:t>
             </a:r>
           </a:p>
         </p:txBody>
@@ -16317,7 +16044,7 @@
                 </a:solidFill>
                 <a:latin typeface="맑은 고딕"/>
               </a:rPr>
-              <a:t>T3 · 친분 그래프 시뮬</a:t>
+              <a:t>T2 · 시뮬 입력 예시</a:t>
             </a:r>
           </a:p>
         </p:txBody>
@@ -16356,7 +16083,7 @@
                 </a:solidFill>
                 <a:latin typeface="맑은 고딕"/>
               </a:rPr>
-              <a:t>친구 관계를 그림으로 그려서 "팀장이 누구를 뽑는지" 시뮬</a:t>
+              <a:t>가상 학생 1000명 중 1명을 어떻게 설정하는가</a:t>
             </a:r>
           </a:p>
         </p:txBody>
@@ -16430,7 +16157,7 @@
                 </a:solidFill>
                 <a:latin typeface="맑은 고딕"/>
               </a:rPr>
-              <a:t>23</a:t>
+              <a:t>24</a:t>
             </a:r>
           </a:p>
         </p:txBody>
@@ -16443,47 +16170,8 @@
         </p:nvSpPr>
         <p:spPr>
           <a:xfrm>
-            <a:off x="640080" y="2103120"/>
-            <a:ext cx="10972800" cy="411480"/>
-          </a:xfrm>
-          <a:prstGeom prst="rect">
-            <a:avLst/>
-          </a:prstGeom>
-          <a:noFill/>
-        </p:spPr>
-        <p:txBody>
-          <a:bodyPr wrap="square" lIns="0" rIns="0" tIns="0" bIns="0">
-            <a:spAutoFit/>
-          </a:bodyPr>
-          <a:lstStyle/>
-          <a:p>
-            <a:pPr algn="l">
-              <a:lnSpc>
-                <a:spcPct val="125000"/>
-              </a:lnSpc>
-            </a:pPr>
-            <a:r>
-              <a:rPr sz="1500" b="1">
-                <a:solidFill>
-                  <a:srgbClr val="0F141F"/>
-                </a:solidFill>
-                <a:latin typeface="맑은 고딕"/>
-              </a:rPr>
-              <a:t>사람 모집 없이도 친분 휴리스틱을 검증할 수 있다.</a:t>
-            </a:r>
-          </a:p>
-        </p:txBody>
-      </p:sp>
-      <p:sp>
-        <p:nvSpPr>
-          <p:cNvPr id="8" name="TextBox 7"/>
-          <p:cNvSpPr txBox="1"/>
-          <p:nvPr/>
-        </p:nvSpPr>
-        <p:spPr>
-          <a:xfrm>
-            <a:off x="640080" y="2560320"/>
-            <a:ext cx="10972800" cy="411480"/>
+            <a:off x="640080" y="2011680"/>
+            <a:ext cx="10972800" cy="365760"/>
           </a:xfrm>
           <a:prstGeom prst="rect">
             <a:avLst/>
@@ -16504,32 +16192,157 @@
             <a:r>
               <a:rPr sz="1200" b="0">
                 <a:solidFill>
-                  <a:srgbClr val="424B5C"/>
-                </a:solidFill>
-                <a:latin typeface="맑은 고딕"/>
-              </a:rPr>
-              <a:t>가상 학생 30명에 친한 정도를 다 설정 → 팀장이 5가지 방식으로 뽑게 함 → 그림으로 비교.</a:t>
+                  <a:srgbClr val="8B95A7"/>
+                </a:solidFill>
+                <a:latin typeface="맑은 고딕"/>
+              </a:rPr>
+              <a:t>1000명을 모두 똑같이 만들면 의미 없음. 학생마다 인지 능력이 다르게 무작위 배정함.</a:t>
+            </a:r>
+          </a:p>
+        </p:txBody>
+      </p:sp>
+      <p:sp>
+        <p:nvSpPr>
+          <p:cNvPr id="8" name="Rounded Rectangle 7"/>
+          <p:cNvSpPr/>
+          <p:nvPr/>
+        </p:nvSpPr>
+        <p:spPr>
+          <a:xfrm>
+            <a:off x="640080" y="2606040"/>
+            <a:ext cx="5486400" cy="3931920"/>
+          </a:xfrm>
+          <a:prstGeom prst="roundRect">
+            <a:avLst>
+              <a:gd name="adj" fmla="val 6000"/>
+            </a:avLst>
+          </a:prstGeom>
+          <a:solidFill>
+            <a:srgbClr val="EEEAFE"/>
+          </a:solidFill>
+          <a:ln w="9525">
+            <a:solidFill>
+              <a:srgbClr val="4F46E5"/>
+            </a:solidFill>
+          </a:ln>
+        </p:spPr>
+        <p:style>
+          <a:lnRef idx="1">
+            <a:schemeClr val="accent1"/>
+          </a:lnRef>
+          <a:fillRef idx="3">
+            <a:schemeClr val="accent1"/>
+          </a:fillRef>
+          <a:effectRef idx="2">
+            <a:schemeClr val="accent1"/>
+          </a:effectRef>
+          <a:fontRef idx="minor">
+            <a:schemeClr val="lt1"/>
+          </a:fontRef>
+        </p:style>
+        <p:txBody>
+          <a:bodyPr rtlCol="0" anchor="ctr"/>
+          <a:lstStyle/>
+          <a:p>
+            <a:pPr algn="ctr"/>
+          </a:p>
+        </p:txBody>
+      </p:sp>
+      <p:sp>
+        <p:nvSpPr>
+          <p:cNvPr id="9" name="TextBox 8"/>
+          <p:cNvSpPr txBox="1"/>
+          <p:nvPr/>
+        </p:nvSpPr>
+        <p:spPr>
+          <a:xfrm>
+            <a:off x="868680" y="2743200"/>
+            <a:ext cx="5029200" cy="365760"/>
+          </a:xfrm>
+          <a:prstGeom prst="rect">
+            <a:avLst/>
+          </a:prstGeom>
+          <a:noFill/>
+        </p:spPr>
+        <p:txBody>
+          <a:bodyPr wrap="square" lIns="0" rIns="0" tIns="0" bIns="0">
+            <a:spAutoFit/>
+          </a:bodyPr>
+          <a:lstStyle/>
+          <a:p>
+            <a:pPr algn="l">
+              <a:lnSpc>
+                <a:spcPct val="125000"/>
+              </a:lnSpc>
+            </a:pPr>
+            <a:r>
+              <a:rPr sz="1400" b="1">
+                <a:solidFill>
+                  <a:srgbClr val="4F46E5"/>
+                </a:solidFill>
+                <a:latin typeface="맑은 고딕"/>
+              </a:rPr>
+              <a:t>예시 학생 #1 · '김민준'</a:t>
+            </a:r>
+          </a:p>
+        </p:txBody>
+      </p:sp>
+      <p:sp>
+        <p:nvSpPr>
+          <p:cNvPr id="10" name="TextBox 9"/>
+          <p:cNvSpPr txBox="1"/>
+          <p:nvPr/>
+        </p:nvSpPr>
+        <p:spPr>
+          <a:xfrm>
+            <a:off x="868680" y="3108960"/>
+            <a:ext cx="5029200" cy="320040"/>
+          </a:xfrm>
+          <a:prstGeom prst="rect">
+            <a:avLst/>
+          </a:prstGeom>
+          <a:noFill/>
+        </p:spPr>
+        <p:txBody>
+          <a:bodyPr wrap="square" lIns="0" rIns="0" tIns="0" bIns="0">
+            <a:spAutoFit/>
+          </a:bodyPr>
+          <a:lstStyle/>
+          <a:p>
+            <a:pPr algn="l">
+              <a:lnSpc>
+                <a:spcPct val="125000"/>
+              </a:lnSpc>
+            </a:pPr>
+            <a:r>
+              <a:rPr sz="1000" b="0">
+                <a:solidFill>
+                  <a:srgbClr val="8B95A7"/>
+                </a:solidFill>
+                <a:latin typeface="맑은 고딕"/>
+              </a:rPr>
+              <a:t>코드가 1000명을 만들 때 첫 번째 학생</a:t>
             </a:r>
           </a:p>
         </p:txBody>
       </p:sp>
       <p:cxnSp>
         <p:nvCxnSpPr>
-          <p:cNvPr id="9" name="Connector 8"/>
+          <p:cNvPr id="11" name="Connector 10"/>
           <p:cNvCxnSpPr/>
           <p:nvPr/>
         </p:nvCxnSpPr>
         <p:spPr>
           <a:xfrm>
-            <a:off x="640080" y="3291840"/>
-            <a:ext cx="10881360" cy="0"/>
+            <a:off x="868680" y="3520440"/>
+            <a:ext cx="5074920" cy="0"/>
           </a:xfrm>
           <a:prstGeom prst="line">
             <a:avLst/>
           </a:prstGeom>
           <a:ln w="19050">
             <a:solidFill>
-              <a:srgbClr val="E5E7EB"/>
+              <a:srgbClr val="4F46E5"/>
             </a:solidFill>
           </a:ln>
         </p:spPr>
@@ -16550,14 +16363,14 @@
       </p:cxnSp>
       <p:sp>
         <p:nvSpPr>
-          <p:cNvPr id="10" name="TextBox 9"/>
-          <p:cNvSpPr txBox="1"/>
-          <p:nvPr/>
-        </p:nvSpPr>
-        <p:spPr>
-          <a:xfrm>
-            <a:off x="640080" y="3429000"/>
-            <a:ext cx="10972800" cy="365760"/>
+          <p:cNvPr id="12" name="TextBox 11"/>
+          <p:cNvSpPr txBox="1"/>
+          <p:nvPr/>
+        </p:nvSpPr>
+        <p:spPr>
+          <a:xfrm>
+            <a:off x="868680" y="3657600"/>
+            <a:ext cx="2286000" cy="320040"/>
           </a:xfrm>
           <a:prstGeom prst="rect">
             <a:avLst/>
@@ -16578,713 +16391,727 @@
             <a:r>
               <a:rPr sz="1100" b="1">
                 <a:solidFill>
+                  <a:srgbClr val="0F141F"/>
+                </a:solidFill>
+                <a:latin typeface="맑은 고딕"/>
+              </a:rPr>
+              <a:t>학습률 α</a:t>
+            </a:r>
+          </a:p>
+        </p:txBody>
+      </p:sp>
+      <p:sp>
+        <p:nvSpPr>
+          <p:cNvPr id="13" name="TextBox 12"/>
+          <p:cNvSpPr txBox="1"/>
+          <p:nvPr/>
+        </p:nvSpPr>
+        <p:spPr>
+          <a:xfrm>
+            <a:off x="3108960" y="3657600"/>
+            <a:ext cx="1371600" cy="365760"/>
+          </a:xfrm>
+          <a:prstGeom prst="rect">
+            <a:avLst/>
+          </a:prstGeom>
+          <a:noFill/>
+        </p:spPr>
+        <p:txBody>
+          <a:bodyPr wrap="square" lIns="0" rIns="0" tIns="0" bIns="0">
+            <a:spAutoFit/>
+          </a:bodyPr>
+          <a:lstStyle/>
+          <a:p>
+            <a:pPr algn="l">
+              <a:lnSpc>
+                <a:spcPct val="125000"/>
+              </a:lnSpc>
+            </a:pPr>
+            <a:r>
+              <a:rPr sz="1800" b="1">
+                <a:solidFill>
                   <a:srgbClr val="4F46E5"/>
                 </a:solidFill>
                 <a:latin typeface="맑은 고딕"/>
               </a:rPr>
-              <a:t>5가지 팀장 선택 방식 (그림 5장 산출)</a:t>
-            </a:r>
-          </a:p>
-        </p:txBody>
-      </p:sp>
-      <p:sp>
-        <p:nvSpPr>
-          <p:cNvPr id="11" name="TextBox 10"/>
-          <p:cNvSpPr txBox="1"/>
-          <p:nvPr/>
-        </p:nvSpPr>
-        <p:spPr>
-          <a:xfrm>
-            <a:off x="868680" y="3931920"/>
-            <a:ext cx="365760" cy="320040"/>
-          </a:xfrm>
-          <a:prstGeom prst="rect">
-            <a:avLst/>
-          </a:prstGeom>
-          <a:noFill/>
-        </p:spPr>
-        <p:txBody>
-          <a:bodyPr wrap="square" lIns="0" rIns="0" tIns="0" bIns="0">
-            <a:spAutoFit/>
-          </a:bodyPr>
-          <a:lstStyle/>
-          <a:p>
-            <a:pPr algn="l">
-              <a:lnSpc>
-                <a:spcPct val="125000"/>
-              </a:lnSpc>
-            </a:pPr>
-            <a:r>
-              <a:rPr sz="1400" b="1">
-                <a:solidFill>
-                  <a:srgbClr val="10B981"/>
-                </a:solidFill>
-                <a:latin typeface="맑은 고딕"/>
-              </a:rPr>
-              <a:t>①</a:t>
-            </a:r>
-          </a:p>
-        </p:txBody>
-      </p:sp>
-      <p:sp>
-        <p:nvSpPr>
-          <p:cNvPr id="12" name="TextBox 11"/>
-          <p:cNvSpPr txBox="1"/>
-          <p:nvPr/>
-        </p:nvSpPr>
-        <p:spPr>
-          <a:xfrm>
-            <a:off x="1371600" y="3886200"/>
-            <a:ext cx="3200400" cy="365760"/>
-          </a:xfrm>
-          <a:prstGeom prst="rect">
-            <a:avLst/>
-          </a:prstGeom>
-          <a:noFill/>
-        </p:spPr>
-        <p:txBody>
-          <a:bodyPr wrap="square" lIns="0" rIns="0" tIns="0" bIns="0">
-            <a:spAutoFit/>
-          </a:bodyPr>
-          <a:lstStyle/>
-          <a:p>
-            <a:pPr algn="l">
-              <a:lnSpc>
-                <a:spcPct val="125000"/>
-              </a:lnSpc>
-            </a:pPr>
-            <a:r>
-              <a:rPr sz="1200" b="1">
+              <a:t>0.18</a:t>
+            </a:r>
+          </a:p>
+        </p:txBody>
+      </p:sp>
+      <p:sp>
+        <p:nvSpPr>
+          <p:cNvPr id="14" name="TextBox 13"/>
+          <p:cNvSpPr txBox="1"/>
+          <p:nvPr/>
+        </p:nvSpPr>
+        <p:spPr>
+          <a:xfrm>
+            <a:off x="868680" y="4023360"/>
+            <a:ext cx="5029200" cy="274320"/>
+          </a:xfrm>
+          <a:prstGeom prst="rect">
+            <a:avLst/>
+          </a:prstGeom>
+          <a:noFill/>
+        </p:spPr>
+        <p:txBody>
+          <a:bodyPr wrap="square" lIns="0" rIns="0" tIns="0" bIns="0">
+            <a:spAutoFit/>
+          </a:bodyPr>
+          <a:lstStyle/>
+          <a:p>
+            <a:pPr algn="l">
+              <a:lnSpc>
+                <a:spcPct val="125000"/>
+              </a:lnSpc>
+            </a:pPr>
+            <a:r>
+              <a:rPr sz="900" b="0">
+                <a:solidFill>
+                  <a:srgbClr val="424B5C"/>
+                </a:solidFill>
+                <a:latin typeface="맑은 고딕"/>
+              </a:rPr>
+              <a:t>평균(0.15)보다 약간 높음 — 새 경험을 빨리 받아들임</a:t>
+            </a:r>
+          </a:p>
+        </p:txBody>
+      </p:sp>
+      <p:sp>
+        <p:nvSpPr>
+          <p:cNvPr id="15" name="TextBox 14"/>
+          <p:cNvSpPr txBox="1"/>
+          <p:nvPr/>
+        </p:nvSpPr>
+        <p:spPr>
+          <a:xfrm>
+            <a:off x="868680" y="4343400"/>
+            <a:ext cx="2286000" cy="320040"/>
+          </a:xfrm>
+          <a:prstGeom prst="rect">
+            <a:avLst/>
+          </a:prstGeom>
+          <a:noFill/>
+        </p:spPr>
+        <p:txBody>
+          <a:bodyPr wrap="square" lIns="0" rIns="0" tIns="0" bIns="0">
+            <a:spAutoFit/>
+          </a:bodyPr>
+          <a:lstStyle/>
+          <a:p>
+            <a:pPr algn="l">
+              <a:lnSpc>
+                <a:spcPct val="125000"/>
+              </a:lnSpc>
+            </a:pPr>
+            <a:r>
+              <a:rPr sz="1100" b="1">
                 <a:solidFill>
                   <a:srgbClr val="0F141F"/>
                 </a:solidFill>
                 <a:latin typeface="맑은 고딕"/>
               </a:rPr>
-              <a:t>무작위로 뽑기</a:t>
-            </a:r>
-          </a:p>
-        </p:txBody>
-      </p:sp>
-      <p:sp>
-        <p:nvSpPr>
-          <p:cNvPr id="13" name="TextBox 12"/>
-          <p:cNvSpPr txBox="1"/>
-          <p:nvPr/>
-        </p:nvSpPr>
-        <p:spPr>
-          <a:xfrm>
-            <a:off x="4754880" y="3886200"/>
-            <a:ext cx="3657600" cy="365760"/>
-          </a:xfrm>
-          <a:prstGeom prst="rect">
-            <a:avLst/>
-          </a:prstGeom>
-          <a:noFill/>
-        </p:spPr>
-        <p:txBody>
-          <a:bodyPr wrap="square" lIns="0" rIns="0" tIns="0" bIns="0">
-            <a:spAutoFit/>
-          </a:bodyPr>
-          <a:lstStyle/>
-          <a:p>
-            <a:pPr algn="l">
-              <a:lnSpc>
-                <a:spcPct val="125000"/>
-              </a:lnSpc>
-            </a:pPr>
-            <a:r>
-              <a:rPr sz="1000" b="0">
+              <a:t>망각 d</a:t>
+            </a:r>
+          </a:p>
+        </p:txBody>
+      </p:sp>
+      <p:sp>
+        <p:nvSpPr>
+          <p:cNvPr id="16" name="TextBox 15"/>
+          <p:cNvSpPr txBox="1"/>
+          <p:nvPr/>
+        </p:nvSpPr>
+        <p:spPr>
+          <a:xfrm>
+            <a:off x="3108960" y="4343400"/>
+            <a:ext cx="1371600" cy="365760"/>
+          </a:xfrm>
+          <a:prstGeom prst="rect">
+            <a:avLst/>
+          </a:prstGeom>
+          <a:noFill/>
+        </p:spPr>
+        <p:txBody>
+          <a:bodyPr wrap="square" lIns="0" rIns="0" tIns="0" bIns="0">
+            <a:spAutoFit/>
+          </a:bodyPr>
+          <a:lstStyle/>
+          <a:p>
+            <a:pPr algn="l">
+              <a:lnSpc>
+                <a:spcPct val="125000"/>
+              </a:lnSpc>
+            </a:pPr>
+            <a:r>
+              <a:rPr sz="1800" b="1">
+                <a:solidFill>
+                  <a:srgbClr val="4F46E5"/>
+                </a:solidFill>
+                <a:latin typeface="맑은 고딕"/>
+              </a:rPr>
+              <a:t>0.42</a:t>
+            </a:r>
+          </a:p>
+        </p:txBody>
+      </p:sp>
+      <p:sp>
+        <p:nvSpPr>
+          <p:cNvPr id="17" name="TextBox 16"/>
+          <p:cNvSpPr txBox="1"/>
+          <p:nvPr/>
+        </p:nvSpPr>
+        <p:spPr>
+          <a:xfrm>
+            <a:off x="868680" y="4709160"/>
+            <a:ext cx="5029200" cy="274320"/>
+          </a:xfrm>
+          <a:prstGeom prst="rect">
+            <a:avLst/>
+          </a:prstGeom>
+          <a:noFill/>
+        </p:spPr>
+        <p:txBody>
+          <a:bodyPr wrap="square" lIns="0" rIns="0" tIns="0" bIns="0">
+            <a:spAutoFit/>
+          </a:bodyPr>
+          <a:lstStyle/>
+          <a:p>
+            <a:pPr algn="l">
+              <a:lnSpc>
+                <a:spcPct val="125000"/>
+              </a:lnSpc>
+            </a:pPr>
+            <a:r>
+              <a:rPr sz="900" b="0">
                 <a:solidFill>
                   <a:srgbClr val="424B5C"/>
                 </a:solidFill>
                 <a:latin typeface="맑은 고딕"/>
               </a:rPr>
-              <a:t>그냥 랜덤 5명</a:t>
-            </a:r>
-          </a:p>
-        </p:txBody>
-      </p:sp>
-      <p:sp>
-        <p:nvSpPr>
-          <p:cNvPr id="14" name="TextBox 13"/>
-          <p:cNvSpPr txBox="1"/>
-          <p:nvPr/>
-        </p:nvSpPr>
-        <p:spPr>
-          <a:xfrm>
-            <a:off x="8595360" y="3886200"/>
-            <a:ext cx="3017520" cy="365760"/>
-          </a:xfrm>
-          <a:prstGeom prst="rect">
-            <a:avLst/>
-          </a:prstGeom>
-          <a:noFill/>
-        </p:spPr>
-        <p:txBody>
-          <a:bodyPr wrap="square" lIns="0" rIns="0" tIns="0" bIns="0">
-            <a:spAutoFit/>
-          </a:bodyPr>
-          <a:lstStyle/>
-          <a:p>
-            <a:pPr algn="l">
-              <a:lnSpc>
-                <a:spcPct val="125000"/>
-              </a:lnSpc>
-            </a:pPr>
-            <a:r>
-              <a:rPr sz="1000" b="1">
-                <a:solidFill>
-                  <a:srgbClr val="10B981"/>
-                </a:solidFill>
-                <a:latin typeface="맑은 고딕"/>
-              </a:rPr>
-              <a:t>친분 편향 0 → 비교 기준</a:t>
-            </a:r>
-          </a:p>
-        </p:txBody>
-      </p:sp>
-      <p:sp>
-        <p:nvSpPr>
-          <p:cNvPr id="15" name="TextBox 14"/>
-          <p:cNvSpPr txBox="1"/>
-          <p:nvPr/>
-        </p:nvSpPr>
-        <p:spPr>
-          <a:xfrm>
-            <a:off x="868680" y="4407407"/>
-            <a:ext cx="365760" cy="320040"/>
-          </a:xfrm>
-          <a:prstGeom prst="rect">
-            <a:avLst/>
-          </a:prstGeom>
-          <a:noFill/>
-        </p:spPr>
-        <p:txBody>
-          <a:bodyPr wrap="square" lIns="0" rIns="0" tIns="0" bIns="0">
-            <a:spAutoFit/>
-          </a:bodyPr>
-          <a:lstStyle/>
-          <a:p>
-            <a:pPr algn="l">
-              <a:lnSpc>
-                <a:spcPct val="125000"/>
-              </a:lnSpc>
-            </a:pPr>
-            <a:r>
-              <a:rPr sz="1400" b="1">
+              <a:t>평균(0.50)보다 낮음 — 기억이 천천히 사라짐</a:t>
+            </a:r>
+          </a:p>
+        </p:txBody>
+      </p:sp>
+      <p:sp>
+        <p:nvSpPr>
+          <p:cNvPr id="18" name="TextBox 17"/>
+          <p:cNvSpPr txBox="1"/>
+          <p:nvPr/>
+        </p:nvSpPr>
+        <p:spPr>
+          <a:xfrm>
+            <a:off x="868680" y="5029200"/>
+            <a:ext cx="2286000" cy="320040"/>
+          </a:xfrm>
+          <a:prstGeom prst="rect">
+            <a:avLst/>
+          </a:prstGeom>
+          <a:noFill/>
+        </p:spPr>
+        <p:txBody>
+          <a:bodyPr wrap="square" lIns="0" rIns="0" tIns="0" bIns="0">
+            <a:spAutoFit/>
+          </a:bodyPr>
+          <a:lstStyle/>
+          <a:p>
+            <a:pPr algn="l">
+              <a:lnSpc>
+                <a:spcPct val="125000"/>
+              </a:lnSpc>
+            </a:pPr>
+            <a:r>
+              <a:rPr sz="1100" b="1">
+                <a:solidFill>
+                  <a:srgbClr val="0F141F"/>
+                </a:solidFill>
+                <a:latin typeface="맑은 고딕"/>
+              </a:rPr>
+              <a:t>작업 기억 WM</a:t>
+            </a:r>
+          </a:p>
+        </p:txBody>
+      </p:sp>
+      <p:sp>
+        <p:nvSpPr>
+          <p:cNvPr id="19" name="TextBox 18"/>
+          <p:cNvSpPr txBox="1"/>
+          <p:nvPr/>
+        </p:nvSpPr>
+        <p:spPr>
+          <a:xfrm>
+            <a:off x="3108960" y="5029200"/>
+            <a:ext cx="1371600" cy="365760"/>
+          </a:xfrm>
+          <a:prstGeom prst="rect">
+            <a:avLst/>
+          </a:prstGeom>
+          <a:noFill/>
+        </p:spPr>
+        <p:txBody>
+          <a:bodyPr wrap="square" lIns="0" rIns="0" tIns="0" bIns="0">
+            <a:spAutoFit/>
+          </a:bodyPr>
+          <a:lstStyle/>
+          <a:p>
+            <a:pPr algn="l">
+              <a:lnSpc>
+                <a:spcPct val="125000"/>
+              </a:lnSpc>
+            </a:pPr>
+            <a:r>
+              <a:rPr sz="1800" b="1">
+                <a:solidFill>
+                  <a:srgbClr val="4F46E5"/>
+                </a:solidFill>
+                <a:latin typeface="맑은 고딕"/>
+              </a:rPr>
+              <a:t>8 chunks</a:t>
+            </a:r>
+          </a:p>
+        </p:txBody>
+      </p:sp>
+      <p:sp>
+        <p:nvSpPr>
+          <p:cNvPr id="20" name="TextBox 19"/>
+          <p:cNvSpPr txBox="1"/>
+          <p:nvPr/>
+        </p:nvSpPr>
+        <p:spPr>
+          <a:xfrm>
+            <a:off x="868680" y="5394960"/>
+            <a:ext cx="5029200" cy="274320"/>
+          </a:xfrm>
+          <a:prstGeom prst="rect">
+            <a:avLst/>
+          </a:prstGeom>
+          <a:noFill/>
+        </p:spPr>
+        <p:txBody>
+          <a:bodyPr wrap="square" lIns="0" rIns="0" tIns="0" bIns="0">
+            <a:spAutoFit/>
+          </a:bodyPr>
+          <a:lstStyle/>
+          <a:p>
+            <a:pPr algn="l">
+              <a:lnSpc>
+                <a:spcPct val="125000"/>
+              </a:lnSpc>
+            </a:pPr>
+            <a:r>
+              <a:rPr sz="900" b="0">
+                <a:solidFill>
+                  <a:srgbClr val="424B5C"/>
+                </a:solidFill>
+                <a:latin typeface="맑은 고딕"/>
+              </a:rPr>
+              <a:t>평균(7)보다 1 큼 — 한 번에 더 많이 처리</a:t>
+            </a:r>
+          </a:p>
+        </p:txBody>
+      </p:sp>
+      <p:sp>
+        <p:nvSpPr>
+          <p:cNvPr id="21" name="TextBox 20"/>
+          <p:cNvSpPr txBox="1"/>
+          <p:nvPr/>
+        </p:nvSpPr>
+        <p:spPr>
+          <a:xfrm>
+            <a:off x="868680" y="5715000"/>
+            <a:ext cx="2286000" cy="320040"/>
+          </a:xfrm>
+          <a:prstGeom prst="rect">
+            <a:avLst/>
+          </a:prstGeom>
+          <a:noFill/>
+        </p:spPr>
+        <p:txBody>
+          <a:bodyPr wrap="square" lIns="0" rIns="0" tIns="0" bIns="0">
+            <a:spAutoFit/>
+          </a:bodyPr>
+          <a:lstStyle/>
+          <a:p>
+            <a:pPr algn="l">
+              <a:lnSpc>
+                <a:spcPct val="125000"/>
+              </a:lnSpc>
+            </a:pPr>
+            <a:r>
+              <a:rPr sz="1100" b="1">
+                <a:solidFill>
+                  <a:srgbClr val="0F141F"/>
+                </a:solidFill>
+                <a:latin typeface="맑은 고딕"/>
+              </a:rPr>
+              <a:t>동기 motivation</a:t>
+            </a:r>
+          </a:p>
+        </p:txBody>
+      </p:sp>
+      <p:sp>
+        <p:nvSpPr>
+          <p:cNvPr id="22" name="TextBox 21"/>
+          <p:cNvSpPr txBox="1"/>
+          <p:nvPr/>
+        </p:nvSpPr>
+        <p:spPr>
+          <a:xfrm>
+            <a:off x="3108960" y="5715000"/>
+            <a:ext cx="1371600" cy="365760"/>
+          </a:xfrm>
+          <a:prstGeom prst="rect">
+            <a:avLst/>
+          </a:prstGeom>
+          <a:noFill/>
+        </p:spPr>
+        <p:txBody>
+          <a:bodyPr wrap="square" lIns="0" rIns="0" tIns="0" bIns="0">
+            <a:spAutoFit/>
+          </a:bodyPr>
+          <a:lstStyle/>
+          <a:p>
+            <a:pPr algn="l">
+              <a:lnSpc>
+                <a:spcPct val="125000"/>
+              </a:lnSpc>
+            </a:pPr>
+            <a:r>
+              <a:rPr sz="1800" b="1">
+                <a:solidFill>
+                  <a:srgbClr val="4F46E5"/>
+                </a:solidFill>
+                <a:latin typeface="맑은 고딕"/>
+              </a:rPr>
+              <a:t>0.67</a:t>
+            </a:r>
+          </a:p>
+        </p:txBody>
+      </p:sp>
+      <p:sp>
+        <p:nvSpPr>
+          <p:cNvPr id="23" name="TextBox 22"/>
+          <p:cNvSpPr txBox="1"/>
+          <p:nvPr/>
+        </p:nvSpPr>
+        <p:spPr>
+          <a:xfrm>
+            <a:off x="868680" y="6080760"/>
+            <a:ext cx="5029200" cy="274320"/>
+          </a:xfrm>
+          <a:prstGeom prst="rect">
+            <a:avLst/>
+          </a:prstGeom>
+          <a:noFill/>
+        </p:spPr>
+        <p:txBody>
+          <a:bodyPr wrap="square" lIns="0" rIns="0" tIns="0" bIns="0">
+            <a:spAutoFit/>
+          </a:bodyPr>
+          <a:lstStyle/>
+          <a:p>
+            <a:pPr algn="l">
+              <a:lnSpc>
+                <a:spcPct val="125000"/>
+              </a:lnSpc>
+            </a:pPr>
+            <a:r>
+              <a:rPr sz="900" b="0">
+                <a:solidFill>
+                  <a:srgbClr val="424B5C"/>
+                </a:solidFill>
+                <a:latin typeface="맑은 고딕"/>
+              </a:rPr>
+              <a:t>평균(0.50)보다 높음 — 자발적 학습 의지 있음</a:t>
+            </a:r>
+          </a:p>
+        </p:txBody>
+      </p:sp>
+      <p:sp>
+        <p:nvSpPr>
+          <p:cNvPr id="24" name="TextBox 23"/>
+          <p:cNvSpPr txBox="1"/>
+          <p:nvPr/>
+        </p:nvSpPr>
+        <p:spPr>
+          <a:xfrm>
+            <a:off x="6400800" y="2606040"/>
+            <a:ext cx="5486400" cy="365760"/>
+          </a:xfrm>
+          <a:prstGeom prst="rect">
+            <a:avLst/>
+          </a:prstGeom>
+          <a:noFill/>
+        </p:spPr>
+        <p:txBody>
+          <a:bodyPr wrap="square" lIns="0" rIns="0" tIns="0" bIns="0">
+            <a:spAutoFit/>
+          </a:bodyPr>
+          <a:lstStyle/>
+          <a:p>
+            <a:pPr algn="l">
+              <a:lnSpc>
+                <a:spcPct val="125000"/>
+              </a:lnSpc>
+            </a:pPr>
+            <a:r>
+              <a:rPr sz="1100" b="1">
+                <a:solidFill>
+                  <a:srgbClr val="4F46E5"/>
+                </a:solidFill>
+                <a:latin typeface="맑은 고딕"/>
+              </a:rPr>
+              <a:t>어떻게 무작위 추출하는가 (실제 코드)</a:t>
+            </a:r>
+          </a:p>
+        </p:txBody>
+      </p:sp>
+      <p:sp>
+        <p:nvSpPr>
+          <p:cNvPr id="25" name="TextBox 24"/>
+          <p:cNvSpPr txBox="1"/>
+          <p:nvPr/>
+        </p:nvSpPr>
+        <p:spPr>
+          <a:xfrm>
+            <a:off x="6400800" y="3017520"/>
+            <a:ext cx="5486400" cy="1371600"/>
+          </a:xfrm>
+          <a:prstGeom prst="rect">
+            <a:avLst/>
+          </a:prstGeom>
+          <a:noFill/>
+        </p:spPr>
+        <p:txBody>
+          <a:bodyPr wrap="square" lIns="0" rIns="0" tIns="0" bIns="0">
+            <a:spAutoFit/>
+          </a:bodyPr>
+          <a:lstStyle/>
+          <a:p>
+            <a:pPr algn="l">
+              <a:lnSpc>
+                <a:spcPct val="140000"/>
+              </a:lnSpc>
+            </a:pPr>
+            <a:r>
+              <a:rPr sz="1100" b="0">
+                <a:solidFill>
+                  <a:srgbClr val="424B5C"/>
+                </a:solidFill>
+                <a:latin typeface="맑은 고딕"/>
+              </a:rPr>
+              <a:t>rng = np.random.default_rng(42)</a:t>
+            </a:r>
+          </a:p>
+          <a:p>
+            <a:pPr algn="l">
+              <a:lnSpc>
+                <a:spcPct val="140000"/>
+              </a:lnSpc>
+            </a:pPr>
+            <a:r>
+              <a:rPr sz="1100" b="0">
+                <a:solidFill>
+                  <a:srgbClr val="424B5C"/>
+                </a:solidFill>
+                <a:latin typeface="맑은 고딕"/>
+              </a:rPr>
+              <a:t>alpha = rng.normal(0.15, 0.05)</a:t>
+            </a:r>
+          </a:p>
+          <a:p>
+            <a:pPr algn="l">
+              <a:lnSpc>
+                <a:spcPct val="140000"/>
+              </a:lnSpc>
+            </a:pPr>
+            <a:r>
+              <a:rPr sz="1100" b="0">
+                <a:solidFill>
+                  <a:srgbClr val="424B5C"/>
+                </a:solidFill>
+                <a:latin typeface="맑은 고딕"/>
+              </a:rPr>
+              <a:t>d     = rng.normal(0.50, 0.10)</a:t>
+            </a:r>
+          </a:p>
+          <a:p>
+            <a:pPr algn="l">
+              <a:lnSpc>
+                <a:spcPct val="140000"/>
+              </a:lnSpc>
+            </a:pPr>
+            <a:r>
+              <a:rPr sz="1100" b="0">
+                <a:solidFill>
+                  <a:srgbClr val="424B5C"/>
+                </a:solidFill>
+                <a:latin typeface="맑은 고딕"/>
+              </a:rPr>
+              <a:t>WM    = rng.choice([5,6,7,8,9])</a:t>
+            </a:r>
+          </a:p>
+          <a:p>
+            <a:pPr algn="l">
+              <a:lnSpc>
+                <a:spcPct val="140000"/>
+              </a:lnSpc>
+            </a:pPr>
+            <a:r>
+              <a:rPr sz="1100" b="0">
+                <a:solidFill>
+                  <a:srgbClr val="424B5C"/>
+                </a:solidFill>
+                <a:latin typeface="맑은 고딕"/>
+              </a:rPr>
+              <a:t>motiv = rng.normal(0.50, 0.20)</a:t>
+            </a:r>
+          </a:p>
+        </p:txBody>
+      </p:sp>
+      <p:cxnSp>
+        <p:nvCxnSpPr>
+          <p:cNvPr id="26" name="Connector 25"/>
+          <p:cNvCxnSpPr/>
+          <p:nvPr/>
+        </p:nvCxnSpPr>
+        <p:spPr>
+          <a:xfrm>
+            <a:off x="6400800" y="4526280"/>
+            <a:ext cx="5120640" cy="0"/>
+          </a:xfrm>
+          <a:prstGeom prst="line">
+            <a:avLst/>
+          </a:prstGeom>
+          <a:ln w="19050">
+            <a:solidFill>
+              <a:srgbClr val="E5E7EB"/>
+            </a:solidFill>
+          </a:ln>
+        </p:spPr>
+        <p:style>
+          <a:lnRef idx="2">
+            <a:schemeClr val="accent1"/>
+          </a:lnRef>
+          <a:fillRef idx="0">
+            <a:schemeClr val="accent1"/>
+          </a:fillRef>
+          <a:effectRef idx="1">
+            <a:schemeClr val="accent1"/>
+          </a:effectRef>
+          <a:fontRef idx="minor">
+            <a:schemeClr val="tx1"/>
+          </a:fontRef>
+        </p:style>
+      </p:cxnSp>
+      <p:sp>
+        <p:nvSpPr>
+          <p:cNvPr id="27" name="TextBox 26"/>
+          <p:cNvSpPr txBox="1"/>
+          <p:nvPr/>
+        </p:nvSpPr>
+        <p:spPr>
+          <a:xfrm>
+            <a:off x="6400800" y="4663440"/>
+            <a:ext cx="5486400" cy="365760"/>
+          </a:xfrm>
+          <a:prstGeom prst="rect">
+            <a:avLst/>
+          </a:prstGeom>
+          <a:noFill/>
+        </p:spPr>
+        <p:txBody>
+          <a:bodyPr wrap="square" lIns="0" rIns="0" tIns="0" bIns="0">
+            <a:spAutoFit/>
+          </a:bodyPr>
+          <a:lstStyle/>
+          <a:p>
+            <a:pPr algn="l">
+              <a:lnSpc>
+                <a:spcPct val="125000"/>
+              </a:lnSpc>
+            </a:pPr>
+            <a:r>
+              <a:rPr sz="1100" b="1">
                 <a:solidFill>
                   <a:srgbClr val="EC4899"/>
                 </a:solidFill>
                 <a:latin typeface="맑은 고딕"/>
               </a:rPr>
-              <a:t>②</a:t>
-            </a:r>
-          </a:p>
-        </p:txBody>
-      </p:sp>
-      <p:sp>
-        <p:nvSpPr>
-          <p:cNvPr id="16" name="TextBox 15"/>
-          <p:cNvSpPr txBox="1"/>
-          <p:nvPr/>
-        </p:nvSpPr>
-        <p:spPr>
-          <a:xfrm>
-            <a:off x="1371600" y="4361688"/>
-            <a:ext cx="3200400" cy="365760"/>
-          </a:xfrm>
-          <a:prstGeom prst="rect">
-            <a:avLst/>
-          </a:prstGeom>
-          <a:noFill/>
-        </p:spPr>
-        <p:txBody>
-          <a:bodyPr wrap="square" lIns="0" rIns="0" tIns="0" bIns="0">
-            <a:spAutoFit/>
-          </a:bodyPr>
-          <a:lstStyle/>
-          <a:p>
-            <a:pPr algn="l">
-              <a:lnSpc>
-                <a:spcPct val="125000"/>
-              </a:lnSpc>
-            </a:pPr>
-            <a:r>
-              <a:rPr sz="1200" b="1">
-                <a:solidFill>
-                  <a:srgbClr val="0F141F"/>
-                </a:solidFill>
-                <a:latin typeface="맑은 고딕"/>
-              </a:rPr>
-              <a:t>친한 사람만</a:t>
-            </a:r>
-          </a:p>
-        </p:txBody>
-      </p:sp>
-      <p:sp>
-        <p:nvSpPr>
-          <p:cNvPr id="17" name="TextBox 16"/>
-          <p:cNvSpPr txBox="1"/>
-          <p:nvPr/>
-        </p:nvSpPr>
-        <p:spPr>
-          <a:xfrm>
-            <a:off x="4754880" y="4361688"/>
-            <a:ext cx="3657600" cy="365760"/>
-          </a:xfrm>
-          <a:prstGeom prst="rect">
-            <a:avLst/>
-          </a:prstGeom>
-          <a:noFill/>
-        </p:spPr>
-        <p:txBody>
-          <a:bodyPr wrap="square" lIns="0" rIns="0" tIns="0" bIns="0">
-            <a:spAutoFit/>
-          </a:bodyPr>
-          <a:lstStyle/>
-          <a:p>
-            <a:pPr algn="l">
-              <a:lnSpc>
-                <a:spcPct val="125000"/>
-              </a:lnSpc>
-            </a:pPr>
-            <a:r>
-              <a:rPr sz="1000" b="0">
+              <a:t>1000명 → 각자 다른 4가지 속성 조합</a:t>
+            </a:r>
+          </a:p>
+        </p:txBody>
+      </p:sp>
+      <p:sp>
+        <p:nvSpPr>
+          <p:cNvPr id="28" name="TextBox 27"/>
+          <p:cNvSpPr txBox="1"/>
+          <p:nvPr/>
+        </p:nvSpPr>
+        <p:spPr>
+          <a:xfrm>
+            <a:off x="6400800" y="5029200"/>
+            <a:ext cx="5486400" cy="1463040"/>
+          </a:xfrm>
+          <a:prstGeom prst="rect">
+            <a:avLst/>
+          </a:prstGeom>
+          <a:noFill/>
+        </p:spPr>
+        <p:txBody>
+          <a:bodyPr wrap="square" lIns="0" rIns="0" tIns="0" bIns="0">
+            <a:spAutoFit/>
+          </a:bodyPr>
+          <a:lstStyle/>
+          <a:p>
+            <a:pPr algn="l">
+              <a:lnSpc>
+                <a:spcPct val="140000"/>
+              </a:lnSpc>
+            </a:pPr>
+            <a:r>
+              <a:rPr sz="1100" b="0">
                 <a:solidFill>
                   <a:srgbClr val="424B5C"/>
                 </a:solidFill>
                 <a:latin typeface="맑은 고딕"/>
               </a:rPr>
-              <a:t>친밀도 상위 5명</a:t>
-            </a:r>
-          </a:p>
-        </p:txBody>
-      </p:sp>
-      <p:sp>
-        <p:nvSpPr>
-          <p:cNvPr id="18" name="TextBox 17"/>
-          <p:cNvSpPr txBox="1"/>
-          <p:nvPr/>
-        </p:nvSpPr>
-        <p:spPr>
-          <a:xfrm>
-            <a:off x="8595360" y="4361688"/>
-            <a:ext cx="3017520" cy="365760"/>
-          </a:xfrm>
-          <a:prstGeom prst="rect">
-            <a:avLst/>
-          </a:prstGeom>
-          <a:noFill/>
-        </p:spPr>
-        <p:txBody>
-          <a:bodyPr wrap="square" lIns="0" rIns="0" tIns="0" bIns="0">
-            <a:spAutoFit/>
-          </a:bodyPr>
-          <a:lstStyle/>
-          <a:p>
-            <a:pPr algn="l">
-              <a:lnSpc>
-                <a:spcPct val="125000"/>
-              </a:lnSpc>
-            </a:pPr>
-            <a:r>
-              <a:rPr sz="1000" b="1">
-                <a:solidFill>
-                  <a:srgbClr val="EC4899"/>
-                </a:solidFill>
-                <a:latin typeface="맑은 고딕"/>
-              </a:rPr>
-              <a:t>친분 100%, 역량 낮음 (현실)</a:t>
-            </a:r>
-          </a:p>
-        </p:txBody>
-      </p:sp>
-      <p:sp>
-        <p:nvSpPr>
-          <p:cNvPr id="19" name="TextBox 18"/>
-          <p:cNvSpPr txBox="1"/>
-          <p:nvPr/>
-        </p:nvSpPr>
-        <p:spPr>
-          <a:xfrm>
-            <a:off x="868680" y="4882896"/>
-            <a:ext cx="365760" cy="320040"/>
-          </a:xfrm>
-          <a:prstGeom prst="rect">
-            <a:avLst/>
-          </a:prstGeom>
-          <a:noFill/>
-        </p:spPr>
-        <p:txBody>
-          <a:bodyPr wrap="square" lIns="0" rIns="0" tIns="0" bIns="0">
-            <a:spAutoFit/>
-          </a:bodyPr>
-          <a:lstStyle/>
-          <a:p>
-            <a:pPr algn="l">
-              <a:lnSpc>
-                <a:spcPct val="125000"/>
-              </a:lnSpc>
-            </a:pPr>
-            <a:r>
-              <a:rPr sz="1400" b="1">
-                <a:solidFill>
-                  <a:srgbClr val="4F46E5"/>
-                </a:solidFill>
-                <a:latin typeface="맑은 고딕"/>
-              </a:rPr>
-              <a:t>③</a:t>
-            </a:r>
-          </a:p>
-        </p:txBody>
-      </p:sp>
-      <p:sp>
-        <p:nvSpPr>
-          <p:cNvPr id="20" name="TextBox 19"/>
-          <p:cNvSpPr txBox="1"/>
-          <p:nvPr/>
-        </p:nvSpPr>
-        <p:spPr>
-          <a:xfrm>
-            <a:off x="1371600" y="4837176"/>
-            <a:ext cx="3200400" cy="365760"/>
-          </a:xfrm>
-          <a:prstGeom prst="rect">
-            <a:avLst/>
-          </a:prstGeom>
-          <a:noFill/>
-        </p:spPr>
-        <p:txBody>
-          <a:bodyPr wrap="square" lIns="0" rIns="0" tIns="0" bIns="0">
-            <a:spAutoFit/>
-          </a:bodyPr>
-          <a:lstStyle/>
-          <a:p>
-            <a:pPr algn="l">
-              <a:lnSpc>
-                <a:spcPct val="125000"/>
-              </a:lnSpc>
-            </a:pPr>
-            <a:r>
-              <a:rPr sz="1200" b="1">
-                <a:solidFill>
-                  <a:srgbClr val="0F141F"/>
-                </a:solidFill>
-                <a:latin typeface="맑은 고딕"/>
-              </a:rPr>
-              <a:t>잘하는 사람만</a:t>
-            </a:r>
-          </a:p>
-        </p:txBody>
-      </p:sp>
-      <p:sp>
-        <p:nvSpPr>
-          <p:cNvPr id="21" name="TextBox 20"/>
-          <p:cNvSpPr txBox="1"/>
-          <p:nvPr/>
-        </p:nvSpPr>
-        <p:spPr>
-          <a:xfrm>
-            <a:off x="4754880" y="4837176"/>
-            <a:ext cx="3657600" cy="365760"/>
-          </a:xfrm>
-          <a:prstGeom prst="rect">
-            <a:avLst/>
-          </a:prstGeom>
-          <a:noFill/>
-        </p:spPr>
-        <p:txBody>
-          <a:bodyPr wrap="square" lIns="0" rIns="0" tIns="0" bIns="0">
-            <a:spAutoFit/>
-          </a:bodyPr>
-          <a:lstStyle/>
-          <a:p>
-            <a:pPr algn="l">
-              <a:lnSpc>
-                <a:spcPct val="125000"/>
-              </a:lnSpc>
-            </a:pPr>
-            <a:r>
-              <a:rPr sz="1000" b="0">
+              <a:t>→ 김민준 같은 학생은 잘 적응하지만,</a:t>
+            </a:r>
+          </a:p>
+          <a:p>
+            <a:pPr algn="l">
+              <a:lnSpc>
+                <a:spcPct val="140000"/>
+              </a:lnSpc>
+            </a:pPr>
+            <a:r>
+              <a:rPr sz="1100" b="0">
                 <a:solidFill>
                   <a:srgbClr val="424B5C"/>
                 </a:solidFill>
                 <a:latin typeface="맑은 고딕"/>
               </a:rPr>
-              <a:t>역량 상위 5명</a:t>
-            </a:r>
-          </a:p>
-        </p:txBody>
-      </p:sp>
-      <p:sp>
-        <p:nvSpPr>
-          <p:cNvPr id="22" name="TextBox 21"/>
-          <p:cNvSpPr txBox="1"/>
-          <p:nvPr/>
-        </p:nvSpPr>
-        <p:spPr>
-          <a:xfrm>
-            <a:off x="8595360" y="4837176"/>
-            <a:ext cx="3017520" cy="365760"/>
-          </a:xfrm>
-          <a:prstGeom prst="rect">
-            <a:avLst/>
-          </a:prstGeom>
-          <a:noFill/>
-        </p:spPr>
-        <p:txBody>
-          <a:bodyPr wrap="square" lIns="0" rIns="0" tIns="0" bIns="0">
-            <a:spAutoFit/>
-          </a:bodyPr>
-          <a:lstStyle/>
-          <a:p>
-            <a:pPr algn="l">
-              <a:lnSpc>
-                <a:spcPct val="125000"/>
-              </a:lnSpc>
-            </a:pPr>
-            <a:r>
-              <a:rPr sz="1000" b="1">
-                <a:solidFill>
-                  <a:srgbClr val="4F46E5"/>
-                </a:solidFill>
-                <a:latin typeface="맑은 고딕"/>
-              </a:rPr>
-              <a:t>역량 100%, 친분 0 (이상)</a:t>
-            </a:r>
-          </a:p>
-        </p:txBody>
-      </p:sp>
-      <p:sp>
-        <p:nvSpPr>
-          <p:cNvPr id="23" name="TextBox 22"/>
-          <p:cNvSpPr txBox="1"/>
-          <p:nvPr/>
-        </p:nvSpPr>
-        <p:spPr>
-          <a:xfrm>
-            <a:off x="868680" y="5358384"/>
-            <a:ext cx="365760" cy="320040"/>
-          </a:xfrm>
-          <a:prstGeom prst="rect">
-            <a:avLst/>
-          </a:prstGeom>
-          <a:noFill/>
-        </p:spPr>
-        <p:txBody>
-          <a:bodyPr wrap="square" lIns="0" rIns="0" tIns="0" bIns="0">
-            <a:spAutoFit/>
-          </a:bodyPr>
-          <a:lstStyle/>
-          <a:p>
-            <a:pPr algn="l">
-              <a:lnSpc>
-                <a:spcPct val="125000"/>
-              </a:lnSpc>
-            </a:pPr>
-            <a:r>
-              <a:rPr sz="1400" b="1">
-                <a:solidFill>
-                  <a:srgbClr val="F59E0B"/>
-                </a:solidFill>
-                <a:latin typeface="맑은 고딕"/>
-              </a:rPr>
-              <a:t>④</a:t>
-            </a:r>
-          </a:p>
-        </p:txBody>
-      </p:sp>
-      <p:sp>
-        <p:nvSpPr>
-          <p:cNvPr id="24" name="TextBox 23"/>
-          <p:cNvSpPr txBox="1"/>
-          <p:nvPr/>
-        </p:nvSpPr>
-        <p:spPr>
-          <a:xfrm>
-            <a:off x="1371600" y="5312664"/>
-            <a:ext cx="3200400" cy="365760"/>
-          </a:xfrm>
-          <a:prstGeom prst="rect">
-            <a:avLst/>
-          </a:prstGeom>
-          <a:noFill/>
-        </p:spPr>
-        <p:txBody>
-          <a:bodyPr wrap="square" lIns="0" rIns="0" tIns="0" bIns="0">
-            <a:spAutoFit/>
-          </a:bodyPr>
-          <a:lstStyle/>
-          <a:p>
-            <a:pPr algn="l">
-              <a:lnSpc>
-                <a:spcPct val="125000"/>
-              </a:lnSpc>
-            </a:pPr>
-            <a:r>
-              <a:rPr sz="1200" b="1">
-                <a:solidFill>
-                  <a:srgbClr val="0F141F"/>
-                </a:solidFill>
-                <a:latin typeface="맑은 고딕"/>
-              </a:rPr>
-              <a:t>머리에 떠오르는 사람</a:t>
-            </a:r>
-          </a:p>
-        </p:txBody>
-      </p:sp>
-      <p:sp>
-        <p:nvSpPr>
-          <p:cNvPr id="25" name="TextBox 24"/>
-          <p:cNvSpPr txBox="1"/>
-          <p:nvPr/>
-        </p:nvSpPr>
-        <p:spPr>
-          <a:xfrm>
-            <a:off x="4754880" y="5312664"/>
-            <a:ext cx="3657600" cy="365760"/>
-          </a:xfrm>
-          <a:prstGeom prst="rect">
-            <a:avLst/>
-          </a:prstGeom>
-          <a:noFill/>
-        </p:spPr>
-        <p:txBody>
-          <a:bodyPr wrap="square" lIns="0" rIns="0" tIns="0" bIns="0">
-            <a:spAutoFit/>
-          </a:bodyPr>
-          <a:lstStyle/>
-          <a:p>
-            <a:pPr algn="l">
-              <a:lnSpc>
-                <a:spcPct val="125000"/>
-              </a:lnSpc>
-            </a:pPr>
-            <a:r>
-              <a:rPr sz="1000" b="0">
+              <a:t>→ α=0.08, WM=5 같은 학생은 같은 강의계획서에서 훨씬 큰 어려움.</a:t>
+            </a:r>
+          </a:p>
+          <a:p>
+            <a:pPr algn="l">
+              <a:lnSpc>
+                <a:spcPct val="140000"/>
+              </a:lnSpc>
+            </a:pPr>
+            <a:r>
+              <a:rPr sz="1100" b="0">
                 <a:solidFill>
                   <a:srgbClr val="424B5C"/>
                 </a:solidFill>
                 <a:latin typeface="맑은 고딕"/>
               </a:rPr>
-              <a:t>친한 7명 떠올리고 그 중 5명</a:t>
-            </a:r>
-          </a:p>
-        </p:txBody>
-      </p:sp>
-      <p:sp>
-        <p:nvSpPr>
-          <p:cNvPr id="26" name="TextBox 25"/>
-          <p:cNvSpPr txBox="1"/>
-          <p:nvPr/>
-        </p:nvSpPr>
-        <p:spPr>
-          <a:xfrm>
-            <a:off x="8595360" y="5312664"/>
-            <a:ext cx="3017520" cy="365760"/>
-          </a:xfrm>
-          <a:prstGeom prst="rect">
-            <a:avLst/>
-          </a:prstGeom>
-          <a:noFill/>
-        </p:spPr>
-        <p:txBody>
-          <a:bodyPr wrap="square" lIns="0" rIns="0" tIns="0" bIns="0">
-            <a:spAutoFit/>
-          </a:bodyPr>
-          <a:lstStyle/>
-          <a:p>
-            <a:pPr algn="l">
-              <a:lnSpc>
-                <a:spcPct val="125000"/>
-              </a:lnSpc>
-            </a:pPr>
-            <a:r>
-              <a:rPr sz="1000" b="1">
-                <a:solidFill>
-                  <a:srgbClr val="F59E0B"/>
-                </a:solidFill>
-                <a:latin typeface="맑은 고딕"/>
-              </a:rPr>
-              <a:t>현실의 satisficing</a:t>
-            </a:r>
-          </a:p>
-        </p:txBody>
-      </p:sp>
-      <p:sp>
-        <p:nvSpPr>
-          <p:cNvPr id="27" name="TextBox 26"/>
-          <p:cNvSpPr txBox="1"/>
-          <p:nvPr/>
-        </p:nvSpPr>
-        <p:spPr>
-          <a:xfrm>
-            <a:off x="868680" y="5833872"/>
-            <a:ext cx="365760" cy="320040"/>
-          </a:xfrm>
-          <a:prstGeom prst="rect">
-            <a:avLst/>
-          </a:prstGeom>
-          <a:noFill/>
-        </p:spPr>
-        <p:txBody>
-          <a:bodyPr wrap="square" lIns="0" rIns="0" tIns="0" bIns="0">
-            <a:spAutoFit/>
-          </a:bodyPr>
-          <a:lstStyle/>
-          <a:p>
-            <a:pPr algn="l">
-              <a:lnSpc>
-                <a:spcPct val="125000"/>
-              </a:lnSpc>
-            </a:pPr>
-            <a:r>
-              <a:rPr sz="1400" b="1">
-                <a:solidFill>
-                  <a:srgbClr val="424B5C"/>
-                </a:solidFill>
-                <a:latin typeface="맑은 고딕"/>
-              </a:rPr>
-              <a:t>⑤</a:t>
-            </a:r>
-          </a:p>
-        </p:txBody>
-      </p:sp>
-      <p:sp>
-        <p:nvSpPr>
-          <p:cNvPr id="28" name="TextBox 27"/>
-          <p:cNvSpPr txBox="1"/>
-          <p:nvPr/>
-        </p:nvSpPr>
-        <p:spPr>
-          <a:xfrm>
-            <a:off x="1371600" y="5788152"/>
-            <a:ext cx="3200400" cy="365760"/>
-          </a:xfrm>
-          <a:prstGeom prst="rect">
-            <a:avLst/>
-          </a:prstGeom>
-          <a:noFill/>
-        </p:spPr>
-        <p:txBody>
-          <a:bodyPr wrap="square" lIns="0" rIns="0" tIns="0" bIns="0">
-            <a:spAutoFit/>
-          </a:bodyPr>
-          <a:lstStyle/>
-          <a:p>
-            <a:pPr algn="l">
-              <a:lnSpc>
-                <a:spcPct val="125000"/>
-              </a:lnSpc>
-            </a:pPr>
-            <a:r>
-              <a:rPr sz="1200" b="1">
-                <a:solidFill>
-                  <a:srgbClr val="0F141F"/>
-                </a:solidFill>
-                <a:latin typeface="맑은 고딕"/>
-              </a:rPr>
-              <a:t>프로필 카드 보고</a:t>
+              <a:t>→ 우리는 이 1000명 중 "가장 약한 25%"가 보호되는지 본다.</a:t>
             </a:r>
           </a:p>
         </p:txBody>
@@ -17297,86 +17124,8 @@
         </p:nvSpPr>
         <p:spPr>
           <a:xfrm>
-            <a:off x="4754880" y="5788152"/>
-            <a:ext cx="3657600" cy="365760"/>
-          </a:xfrm>
-          <a:prstGeom prst="rect">
-            <a:avLst/>
-          </a:prstGeom>
-          <a:noFill/>
-        </p:spPr>
-        <p:txBody>
-          <a:bodyPr wrap="square" lIns="0" rIns="0" tIns="0" bIns="0">
-            <a:spAutoFit/>
-          </a:bodyPr>
-          <a:lstStyle/>
-          <a:p>
-            <a:pPr algn="l">
-              <a:lnSpc>
-                <a:spcPct val="125000"/>
-              </a:lnSpc>
-            </a:pPr>
-            <a:r>
-              <a:rPr sz="1000" b="0">
-                <a:solidFill>
-                  <a:srgbClr val="424B5C"/>
-                </a:solidFill>
-                <a:latin typeface="맑은 고딕"/>
-              </a:rPr>
-              <a:t>정보 본 후 다양성 고려</a:t>
-            </a:r>
-          </a:p>
-        </p:txBody>
-      </p:sp>
-      <p:sp>
-        <p:nvSpPr>
-          <p:cNvPr id="30" name="TextBox 29"/>
-          <p:cNvSpPr txBox="1"/>
-          <p:nvPr/>
-        </p:nvSpPr>
-        <p:spPr>
-          <a:xfrm>
-            <a:off x="8595360" y="5788152"/>
-            <a:ext cx="3017520" cy="365760"/>
-          </a:xfrm>
-          <a:prstGeom prst="rect">
-            <a:avLst/>
-          </a:prstGeom>
-          <a:noFill/>
-        </p:spPr>
-        <p:txBody>
-          <a:bodyPr wrap="square" lIns="0" rIns="0" tIns="0" bIns="0">
-            <a:spAutoFit/>
-          </a:bodyPr>
-          <a:lstStyle/>
-          <a:p>
-            <a:pPr algn="l">
-              <a:lnSpc>
-                <a:spcPct val="125000"/>
-              </a:lnSpc>
-            </a:pPr>
-            <a:r>
-              <a:rPr sz="1000" b="1">
-                <a:solidFill>
-                  <a:srgbClr val="424B5C"/>
-                </a:solidFill>
-                <a:latin typeface="맑은 고딕"/>
-              </a:rPr>
-              <a:t>균형 잡힌 팀</a:t>
-            </a:r>
-          </a:p>
-        </p:txBody>
-      </p:sp>
-      <p:sp>
-        <p:nvSpPr>
-          <p:cNvPr id="31" name="TextBox 30"/>
-          <p:cNvSpPr txBox="1"/>
-          <p:nvPr/>
-        </p:nvSpPr>
-        <p:spPr>
-          <a:xfrm>
-            <a:off x="640080" y="6400800"/>
-            <a:ext cx="10972800" cy="365760"/>
+            <a:off x="640080" y="6629400"/>
+            <a:ext cx="10972800" cy="274320"/>
           </a:xfrm>
           <a:prstGeom prst="rect">
             <a:avLst/>
@@ -17395,13 +17144,13 @@
               </a:lnSpc>
             </a:pPr>
             <a:r>
-              <a:rPr sz="1200" b="1">
-                <a:solidFill>
-                  <a:srgbClr val="EC4899"/>
-                </a:solidFill>
-                <a:latin typeface="맑은 고딕"/>
-              </a:rPr>
-              <a:t>결과: 5장의 네트워크 그래프 → 발표 슬라이드 임팩트 최고</a:t>
+              <a:rPr sz="900" b="0">
+                <a:solidFill>
+                  <a:srgbClr val="8B95A7"/>
+                </a:solidFill>
+                <a:latin typeface="맑은 고딕"/>
+              </a:rPr>
+              <a:t>이 설정값은 문헌 표준값 · T1 설문으로 본 강 학생 실제 값을 수집해 보정 예정</a:t>
             </a:r>
           </a:p>
         </p:txBody>
@@ -17415,6 +17164,1717 @@
 </file>
 
 <file path=ppt/slides/slide24.xml><?xml version="1.0" encoding="utf-8"?>
+<p:sld xmlns:a="http://schemas.openxmlformats.org/drawingml/2006/main" xmlns:p="http://schemas.openxmlformats.org/presentationml/2006/main" xmlns:r="http://schemas.openxmlformats.org/officeDocument/2006/relationships">
+  <p:cSld>
+    <p:spTree>
+      <p:nvGrpSpPr>
+        <p:cNvPr id="1" name=""/>
+        <p:cNvGrpSpPr/>
+        <p:nvPr/>
+      </p:nvGrpSpPr>
+      <p:grpSpPr/>
+      <p:sp>
+        <p:nvSpPr>
+          <p:cNvPr id="2" name="Rectangle 1"/>
+          <p:cNvSpPr/>
+          <p:nvPr/>
+        </p:nvSpPr>
+        <p:spPr>
+          <a:xfrm>
+            <a:off x="0" y="0"/>
+            <a:ext cx="12188952" cy="6858000"/>
+          </a:xfrm>
+          <a:prstGeom prst="rect">
+            <a:avLst/>
+          </a:prstGeom>
+          <a:solidFill>
+            <a:srgbClr val="FFFFFF"/>
+          </a:solidFill>
+          <a:ln>
+            <a:noFill/>
+          </a:ln>
+        </p:spPr>
+        <p:style>
+          <a:lnRef idx="1">
+            <a:schemeClr val="accent1"/>
+          </a:lnRef>
+          <a:fillRef idx="3">
+            <a:schemeClr val="accent1"/>
+          </a:fillRef>
+          <a:effectRef idx="2">
+            <a:schemeClr val="accent1"/>
+          </a:effectRef>
+          <a:fontRef idx="minor">
+            <a:schemeClr val="lt1"/>
+          </a:fontRef>
+        </p:style>
+        <p:txBody>
+          <a:bodyPr rtlCol="0" anchor="ctr"/>
+          <a:lstStyle/>
+          <a:p>
+            <a:pPr algn="ctr"/>
+          </a:p>
+        </p:txBody>
+      </p:sp>
+      <p:sp>
+        <p:nvSpPr>
+          <p:cNvPr id="3" name="TextBox 2"/>
+          <p:cNvSpPr txBox="1"/>
+          <p:nvPr/>
+        </p:nvSpPr>
+        <p:spPr>
+          <a:xfrm>
+            <a:off x="640080" y="502920"/>
+            <a:ext cx="10972800" cy="320040"/>
+          </a:xfrm>
+          <a:prstGeom prst="rect">
+            <a:avLst/>
+          </a:prstGeom>
+          <a:noFill/>
+        </p:spPr>
+        <p:txBody>
+          <a:bodyPr wrap="square" lIns="0" rIns="0" tIns="0" bIns="0">
+            <a:spAutoFit/>
+          </a:bodyPr>
+          <a:lstStyle/>
+          <a:p>
+            <a:pPr algn="l">
+              <a:lnSpc>
+                <a:spcPct val="125000"/>
+              </a:lnSpc>
+            </a:pPr>
+            <a:r>
+              <a:rPr sz="1100" b="1">
+                <a:solidFill>
+                  <a:srgbClr val="4F46E5"/>
+                </a:solidFill>
+                <a:latin typeface="맑은 고딕"/>
+              </a:rPr>
+              <a:t>T2 · 시뮬 결과 예시</a:t>
+            </a:r>
+          </a:p>
+        </p:txBody>
+      </p:sp>
+      <p:sp>
+        <p:nvSpPr>
+          <p:cNvPr id="4" name="TextBox 3"/>
+          <p:cNvSpPr txBox="1"/>
+          <p:nvPr/>
+        </p:nvSpPr>
+        <p:spPr>
+          <a:xfrm>
+            <a:off x="640080" y="868680"/>
+            <a:ext cx="10972800" cy="822960"/>
+          </a:xfrm>
+          <a:prstGeom prst="rect">
+            <a:avLst/>
+          </a:prstGeom>
+          <a:noFill/>
+        </p:spPr>
+        <p:txBody>
+          <a:bodyPr wrap="square" lIns="0" rIns="0" tIns="0" bIns="0">
+            <a:spAutoFit/>
+          </a:bodyPr>
+          <a:lstStyle/>
+          <a:p>
+            <a:pPr algn="l">
+              <a:lnSpc>
+                <a:spcPct val="125000"/>
+              </a:lnSpc>
+            </a:pPr>
+            <a:r>
+              <a:rPr sz="2800" b="1">
+                <a:solidFill>
+                  <a:srgbClr val="0F141F"/>
+                </a:solidFill>
+                <a:latin typeface="맑은 고딕"/>
+              </a:rPr>
+              <a:t>왜 평균만 보면 안 되는가 — 분포 효과 차트</a:t>
+            </a:r>
+          </a:p>
+        </p:txBody>
+      </p:sp>
+      <p:cxnSp>
+        <p:nvCxnSpPr>
+          <p:cNvPr id="5" name="Connector 4"/>
+          <p:cNvCxnSpPr/>
+          <p:nvPr/>
+        </p:nvCxnSpPr>
+        <p:spPr>
+          <a:xfrm>
+            <a:off x="640080" y="1783080"/>
+            <a:ext cx="10881360" cy="0"/>
+          </a:xfrm>
+          <a:prstGeom prst="line">
+            <a:avLst/>
+          </a:prstGeom>
+          <a:ln w="19050">
+            <a:solidFill>
+              <a:srgbClr val="E5E7EB"/>
+            </a:solidFill>
+          </a:ln>
+        </p:spPr>
+        <p:style>
+          <a:lnRef idx="2">
+            <a:schemeClr val="accent1"/>
+          </a:lnRef>
+          <a:fillRef idx="0">
+            <a:schemeClr val="accent1"/>
+          </a:fillRef>
+          <a:effectRef idx="1">
+            <a:schemeClr val="accent1"/>
+          </a:effectRef>
+          <a:fontRef idx="minor">
+            <a:schemeClr val="tx1"/>
+          </a:fontRef>
+        </p:style>
+      </p:cxnSp>
+      <p:sp>
+        <p:nvSpPr>
+          <p:cNvPr id="6" name="TextBox 5"/>
+          <p:cNvSpPr txBox="1"/>
+          <p:nvPr/>
+        </p:nvSpPr>
+        <p:spPr>
+          <a:xfrm>
+            <a:off x="11247120" y="6446520"/>
+            <a:ext cx="731520" cy="274320"/>
+          </a:xfrm>
+          <a:prstGeom prst="rect">
+            <a:avLst/>
+          </a:prstGeom>
+          <a:noFill/>
+        </p:spPr>
+        <p:txBody>
+          <a:bodyPr wrap="square" lIns="0" rIns="0" tIns="0" bIns="0">
+            <a:spAutoFit/>
+          </a:bodyPr>
+          <a:lstStyle/>
+          <a:p>
+            <a:pPr algn="r">
+              <a:lnSpc>
+                <a:spcPct val="125000"/>
+              </a:lnSpc>
+            </a:pPr>
+            <a:r>
+              <a:rPr sz="900" b="0">
+                <a:solidFill>
+                  <a:srgbClr val="8B95A7"/>
+                </a:solidFill>
+                <a:latin typeface="맑은 고딕"/>
+              </a:rPr>
+              <a:t>23</a:t>
+            </a:r>
+          </a:p>
+        </p:txBody>
+      </p:sp>
+      <p:sp>
+        <p:nvSpPr>
+          <p:cNvPr id="7" name="TextBox 6"/>
+          <p:cNvSpPr txBox="1"/>
+          <p:nvPr/>
+        </p:nvSpPr>
+        <p:spPr>
+          <a:xfrm>
+            <a:off x="640080" y="2103120"/>
+            <a:ext cx="10972800" cy="365760"/>
+          </a:xfrm>
+          <a:prstGeom prst="rect">
+            <a:avLst/>
+          </a:prstGeom>
+          <a:noFill/>
+        </p:spPr>
+        <p:txBody>
+          <a:bodyPr wrap="square" lIns="0" rIns="0" tIns="0" bIns="0">
+            <a:spAutoFit/>
+          </a:bodyPr>
+          <a:lstStyle/>
+          <a:p>
+            <a:pPr algn="l">
+              <a:lnSpc>
+                <a:spcPct val="125000"/>
+              </a:lnSpc>
+            </a:pPr>
+            <a:r>
+              <a:rPr sz="1200" b="0">
+                <a:solidFill>
+                  <a:srgbClr val="8B95A7"/>
+                </a:solidFill>
+                <a:latin typeface="맑은 고딕"/>
+              </a:rPr>
+              <a:t>같은 개선안도 평균 학생에게는 별 차이 없지만, 약한 학생에게는 큰 도움이 된다.</a:t>
+            </a:r>
+          </a:p>
+        </p:txBody>
+      </p:sp>
+      <p:pic>
+        <p:nvPicPr>
+          <p:cNvPr id="8" name="Picture 7" descr="chart_distribution.png"/>
+          <p:cNvPicPr>
+            <a:picLocks noChangeAspect="1"/>
+          </p:cNvPicPr>
+          <p:nvPr/>
+        </p:nvPicPr>
+        <p:blipFill>
+          <a:blip r:embed="rId2"/>
+          <a:stretch>
+            <a:fillRect/>
+          </a:stretch>
+        </p:blipFill>
+        <p:spPr>
+          <a:xfrm>
+            <a:off x="640080" y="2606040"/>
+            <a:ext cx="7315200" cy="4064000"/>
+          </a:xfrm>
+          <a:prstGeom prst="rect">
+            <a:avLst/>
+          </a:prstGeom>
+        </p:spPr>
+      </p:pic>
+      <p:sp>
+        <p:nvSpPr>
+          <p:cNvPr id="9" name="Rounded Rectangle 8"/>
+          <p:cNvSpPr/>
+          <p:nvPr/>
+        </p:nvSpPr>
+        <p:spPr>
+          <a:xfrm>
+            <a:off x="8229600" y="2606040"/>
+            <a:ext cx="3291840" cy="3657600"/>
+          </a:xfrm>
+          <a:prstGeom prst="roundRect">
+            <a:avLst>
+              <a:gd name="adj" fmla="val 6000"/>
+            </a:avLst>
+          </a:prstGeom>
+          <a:solidFill>
+            <a:srgbClr val="EEEAFE"/>
+          </a:solidFill>
+          <a:ln w="9525">
+            <a:solidFill>
+              <a:srgbClr val="4F46E5"/>
+            </a:solidFill>
+          </a:ln>
+        </p:spPr>
+        <p:style>
+          <a:lnRef idx="1">
+            <a:schemeClr val="accent1"/>
+          </a:lnRef>
+          <a:fillRef idx="3">
+            <a:schemeClr val="accent1"/>
+          </a:fillRef>
+          <a:effectRef idx="2">
+            <a:schemeClr val="accent1"/>
+          </a:effectRef>
+          <a:fontRef idx="minor">
+            <a:schemeClr val="lt1"/>
+          </a:fontRef>
+        </p:style>
+        <p:txBody>
+          <a:bodyPr rtlCol="0" anchor="ctr"/>
+          <a:lstStyle/>
+          <a:p>
+            <a:pPr algn="ctr"/>
+          </a:p>
+        </p:txBody>
+      </p:sp>
+      <p:sp>
+        <p:nvSpPr>
+          <p:cNvPr id="10" name="TextBox 9"/>
+          <p:cNvSpPr txBox="1"/>
+          <p:nvPr/>
+        </p:nvSpPr>
+        <p:spPr>
+          <a:xfrm>
+            <a:off x="8412480" y="2743200"/>
+            <a:ext cx="3017520" cy="365760"/>
+          </a:xfrm>
+          <a:prstGeom prst="rect">
+            <a:avLst/>
+          </a:prstGeom>
+          <a:noFill/>
+        </p:spPr>
+        <p:txBody>
+          <a:bodyPr wrap="square" lIns="0" rIns="0" tIns="0" bIns="0">
+            <a:spAutoFit/>
+          </a:bodyPr>
+          <a:lstStyle/>
+          <a:p>
+            <a:pPr algn="l">
+              <a:lnSpc>
+                <a:spcPct val="125000"/>
+              </a:lnSpc>
+            </a:pPr>
+            <a:r>
+              <a:rPr sz="1100" b="1">
+                <a:solidFill>
+                  <a:srgbClr val="4F46E5"/>
+                </a:solidFill>
+                <a:latin typeface="맑은 고딕"/>
+              </a:rPr>
+              <a:t>이게 무슨 의미?</a:t>
+            </a:r>
+          </a:p>
+        </p:txBody>
+      </p:sp>
+      <p:sp>
+        <p:nvSpPr>
+          <p:cNvPr id="11" name="TextBox 10"/>
+          <p:cNvSpPr txBox="1"/>
+          <p:nvPr/>
+        </p:nvSpPr>
+        <p:spPr>
+          <a:xfrm>
+            <a:off x="8412480" y="3200400"/>
+            <a:ext cx="3017520" cy="2286000"/>
+          </a:xfrm>
+          <a:prstGeom prst="rect">
+            <a:avLst/>
+          </a:prstGeom>
+          <a:noFill/>
+        </p:spPr>
+        <p:txBody>
+          <a:bodyPr wrap="square" lIns="0" rIns="0" tIns="0" bIns="0">
+            <a:spAutoFit/>
+          </a:bodyPr>
+          <a:lstStyle/>
+          <a:p>
+            <a:pPr algn="l">
+              <a:lnSpc>
+                <a:spcPct val="140000"/>
+              </a:lnSpc>
+            </a:pPr>
+            <a:r>
+              <a:rPr sz="1000" b="0">
+                <a:solidFill>
+                  <a:srgbClr val="424B5C"/>
+                </a:solidFill>
+                <a:latin typeface="맑은 고딕"/>
+              </a:rPr>
+              <a:t>기존 강의계획서:</a:t>
+            </a:r>
+          </a:p>
+          <a:p>
+            <a:pPr algn="l">
+              <a:lnSpc>
+                <a:spcPct val="140000"/>
+              </a:lnSpc>
+            </a:pPr>
+            <a:r>
+              <a:rPr sz="1000" b="0">
+                <a:solidFill>
+                  <a:srgbClr val="424B5C"/>
+                </a:solidFill>
+                <a:latin typeface="맑은 고딕"/>
+              </a:rPr>
+              <a:t>평균 12.5초 vs 하위 22.3초.</a:t>
+            </a:r>
+          </a:p>
+          <a:p>
+            <a:pPr algn="l">
+              <a:lnSpc>
+                <a:spcPct val="140000"/>
+              </a:lnSpc>
+            </a:pPr>
+            <a:r>
+              <a:rPr sz="1000" b="0">
+                <a:solidFill>
+                  <a:srgbClr val="424B5C"/>
+                </a:solidFill>
+                <a:latin typeface="맑은 고딕"/>
+              </a:rPr>
+              <a:t>약한 학생이 1.8배 손해.</a:t>
+            </a:r>
+          </a:p>
+          <a:p>
+            <a:pPr algn="l">
+              <a:lnSpc>
+                <a:spcPct val="140000"/>
+              </a:lnSpc>
+            </a:pPr>
+          </a:p>
+          <a:p>
+            <a:pPr algn="l">
+              <a:lnSpc>
+                <a:spcPct val="140000"/>
+              </a:lnSpc>
+            </a:pPr>
+            <a:r>
+              <a:rPr sz="1000" b="0">
+                <a:solidFill>
+                  <a:srgbClr val="424B5C"/>
+                </a:solidFill>
+                <a:latin typeface="맑은 고딕"/>
+              </a:rPr>
+              <a:t>분산 평가 도입 시:</a:t>
+            </a:r>
+          </a:p>
+          <a:p>
+            <a:pPr algn="l">
+              <a:lnSpc>
+                <a:spcPct val="140000"/>
+              </a:lnSpc>
+            </a:pPr>
+            <a:r>
+              <a:rPr sz="1000" b="0">
+                <a:solidFill>
+                  <a:srgbClr val="424B5C"/>
+                </a:solidFill>
+                <a:latin typeface="맑은 고딕"/>
+              </a:rPr>
+              <a:t>평균 10.2초 vs 하위 13.5초.</a:t>
+            </a:r>
+          </a:p>
+          <a:p>
+            <a:pPr algn="l">
+              <a:lnSpc>
+                <a:spcPct val="140000"/>
+              </a:lnSpc>
+            </a:pPr>
+            <a:r>
+              <a:rPr sz="1000" b="0">
+                <a:solidFill>
+                  <a:srgbClr val="424B5C"/>
+                </a:solidFill>
+                <a:latin typeface="맑은 고딕"/>
+              </a:rPr>
+              <a:t>격차 1.3배로 감소.</a:t>
+            </a:r>
+          </a:p>
+        </p:txBody>
+      </p:sp>
+      <p:sp>
+        <p:nvSpPr>
+          <p:cNvPr id="12" name="TextBox 11"/>
+          <p:cNvSpPr txBox="1"/>
+          <p:nvPr/>
+        </p:nvSpPr>
+        <p:spPr>
+          <a:xfrm>
+            <a:off x="640080" y="6446520"/>
+            <a:ext cx="10972800" cy="365760"/>
+          </a:xfrm>
+          <a:prstGeom prst="rect">
+            <a:avLst/>
+          </a:prstGeom>
+          <a:noFill/>
+        </p:spPr>
+        <p:txBody>
+          <a:bodyPr wrap="square" lIns="0" rIns="0" tIns="0" bIns="0">
+            <a:spAutoFit/>
+          </a:bodyPr>
+          <a:lstStyle/>
+          <a:p>
+            <a:pPr algn="ctr">
+              <a:lnSpc>
+                <a:spcPct val="125000"/>
+              </a:lnSpc>
+            </a:pPr>
+            <a:r>
+              <a:rPr sz="1200" b="1">
+                <a:solidFill>
+                  <a:srgbClr val="EC4899"/>
+                </a:solidFill>
+                <a:latin typeface="맑은 고딕"/>
+              </a:rPr>
+              <a:t>→ 보고서 핵심: 우리 개선안은 "평균"이 아니라 "분포의 꼬리"를 다듬는다</a:t>
+            </a:r>
+          </a:p>
+        </p:txBody>
+      </p:sp>
+    </p:spTree>
+  </p:cSld>
+  <p:clrMapOvr>
+    <a:masterClrMapping/>
+  </p:clrMapOvr>
+</p:sld>
+</file>
+
+<file path=ppt/slides/slide25.xml><?xml version="1.0" encoding="utf-8"?>
+<p:sld xmlns:a="http://schemas.openxmlformats.org/drawingml/2006/main" xmlns:p="http://schemas.openxmlformats.org/presentationml/2006/main" xmlns:r="http://schemas.openxmlformats.org/officeDocument/2006/relationships">
+  <p:cSld>
+    <p:spTree>
+      <p:nvGrpSpPr>
+        <p:cNvPr id="1" name=""/>
+        <p:cNvGrpSpPr/>
+        <p:nvPr/>
+      </p:nvGrpSpPr>
+      <p:grpSpPr/>
+      <p:sp>
+        <p:nvSpPr>
+          <p:cNvPr id="2" name="Rectangle 1"/>
+          <p:cNvSpPr/>
+          <p:nvPr/>
+        </p:nvSpPr>
+        <p:spPr>
+          <a:xfrm>
+            <a:off x="0" y="0"/>
+            <a:ext cx="12188952" cy="6858000"/>
+          </a:xfrm>
+          <a:prstGeom prst="rect">
+            <a:avLst/>
+          </a:prstGeom>
+          <a:solidFill>
+            <a:srgbClr val="FFFFFF"/>
+          </a:solidFill>
+          <a:ln>
+            <a:noFill/>
+          </a:ln>
+        </p:spPr>
+        <p:style>
+          <a:lnRef idx="1">
+            <a:schemeClr val="accent1"/>
+          </a:lnRef>
+          <a:fillRef idx="3">
+            <a:schemeClr val="accent1"/>
+          </a:fillRef>
+          <a:effectRef idx="2">
+            <a:schemeClr val="accent1"/>
+          </a:effectRef>
+          <a:fontRef idx="minor">
+            <a:schemeClr val="lt1"/>
+          </a:fontRef>
+        </p:style>
+        <p:txBody>
+          <a:bodyPr rtlCol="0" anchor="ctr"/>
+          <a:lstStyle/>
+          <a:p>
+            <a:pPr algn="ctr"/>
+          </a:p>
+        </p:txBody>
+      </p:sp>
+      <p:sp>
+        <p:nvSpPr>
+          <p:cNvPr id="3" name="TextBox 2"/>
+          <p:cNvSpPr txBox="1"/>
+          <p:nvPr/>
+        </p:nvSpPr>
+        <p:spPr>
+          <a:xfrm>
+            <a:off x="640080" y="502920"/>
+            <a:ext cx="10972800" cy="320040"/>
+          </a:xfrm>
+          <a:prstGeom prst="rect">
+            <a:avLst/>
+          </a:prstGeom>
+          <a:noFill/>
+        </p:spPr>
+        <p:txBody>
+          <a:bodyPr wrap="square" lIns="0" rIns="0" tIns="0" bIns="0">
+            <a:spAutoFit/>
+          </a:bodyPr>
+          <a:lstStyle/>
+          <a:p>
+            <a:pPr algn="l">
+              <a:lnSpc>
+                <a:spcPct val="125000"/>
+              </a:lnSpc>
+            </a:pPr>
+            <a:r>
+              <a:rPr sz="1100" b="1">
+                <a:solidFill>
+                  <a:srgbClr val="4F46E5"/>
+                </a:solidFill>
+                <a:latin typeface="맑은 고딕"/>
+              </a:rPr>
+              <a:t>T3 · 친분 그래프 시뮬</a:t>
+            </a:r>
+          </a:p>
+        </p:txBody>
+      </p:sp>
+      <p:sp>
+        <p:nvSpPr>
+          <p:cNvPr id="4" name="TextBox 3"/>
+          <p:cNvSpPr txBox="1"/>
+          <p:nvPr/>
+        </p:nvSpPr>
+        <p:spPr>
+          <a:xfrm>
+            <a:off x="640080" y="868680"/>
+            <a:ext cx="10972800" cy="822960"/>
+          </a:xfrm>
+          <a:prstGeom prst="rect">
+            <a:avLst/>
+          </a:prstGeom>
+          <a:noFill/>
+        </p:spPr>
+        <p:txBody>
+          <a:bodyPr wrap="square" lIns="0" rIns="0" tIns="0" bIns="0">
+            <a:spAutoFit/>
+          </a:bodyPr>
+          <a:lstStyle/>
+          <a:p>
+            <a:pPr algn="l">
+              <a:lnSpc>
+                <a:spcPct val="125000"/>
+              </a:lnSpc>
+            </a:pPr>
+            <a:r>
+              <a:rPr sz="2800" b="1">
+                <a:solidFill>
+                  <a:srgbClr val="0F141F"/>
+                </a:solidFill>
+                <a:latin typeface="맑은 고딕"/>
+              </a:rPr>
+              <a:t>친구 관계를 그림으로 그려서 "팀장이 누구를 뽑는지" 시뮬</a:t>
+            </a:r>
+          </a:p>
+        </p:txBody>
+      </p:sp>
+      <p:cxnSp>
+        <p:nvCxnSpPr>
+          <p:cNvPr id="5" name="Connector 4"/>
+          <p:cNvCxnSpPr/>
+          <p:nvPr/>
+        </p:nvCxnSpPr>
+        <p:spPr>
+          <a:xfrm>
+            <a:off x="640080" y="1783080"/>
+            <a:ext cx="10881360" cy="0"/>
+          </a:xfrm>
+          <a:prstGeom prst="line">
+            <a:avLst/>
+          </a:prstGeom>
+          <a:ln w="19050">
+            <a:solidFill>
+              <a:srgbClr val="E5E7EB"/>
+            </a:solidFill>
+          </a:ln>
+        </p:spPr>
+        <p:style>
+          <a:lnRef idx="2">
+            <a:schemeClr val="accent1"/>
+          </a:lnRef>
+          <a:fillRef idx="0">
+            <a:schemeClr val="accent1"/>
+          </a:fillRef>
+          <a:effectRef idx="1">
+            <a:schemeClr val="accent1"/>
+          </a:effectRef>
+          <a:fontRef idx="minor">
+            <a:schemeClr val="tx1"/>
+          </a:fontRef>
+        </p:style>
+      </p:cxnSp>
+      <p:sp>
+        <p:nvSpPr>
+          <p:cNvPr id="6" name="TextBox 5"/>
+          <p:cNvSpPr txBox="1"/>
+          <p:nvPr/>
+        </p:nvSpPr>
+        <p:spPr>
+          <a:xfrm>
+            <a:off x="11247120" y="6446520"/>
+            <a:ext cx="731520" cy="274320"/>
+          </a:xfrm>
+          <a:prstGeom prst="rect">
+            <a:avLst/>
+          </a:prstGeom>
+          <a:noFill/>
+        </p:spPr>
+        <p:txBody>
+          <a:bodyPr wrap="square" lIns="0" rIns="0" tIns="0" bIns="0">
+            <a:spAutoFit/>
+          </a:bodyPr>
+          <a:lstStyle/>
+          <a:p>
+            <a:pPr algn="r">
+              <a:lnSpc>
+                <a:spcPct val="125000"/>
+              </a:lnSpc>
+            </a:pPr>
+            <a:r>
+              <a:rPr sz="900" b="0">
+                <a:solidFill>
+                  <a:srgbClr val="8B95A7"/>
+                </a:solidFill>
+                <a:latin typeface="맑은 고딕"/>
+              </a:rPr>
+              <a:t>23</a:t>
+            </a:r>
+          </a:p>
+        </p:txBody>
+      </p:sp>
+      <p:sp>
+        <p:nvSpPr>
+          <p:cNvPr id="7" name="TextBox 6"/>
+          <p:cNvSpPr txBox="1"/>
+          <p:nvPr/>
+        </p:nvSpPr>
+        <p:spPr>
+          <a:xfrm>
+            <a:off x="640080" y="2103120"/>
+            <a:ext cx="10972800" cy="411480"/>
+          </a:xfrm>
+          <a:prstGeom prst="rect">
+            <a:avLst/>
+          </a:prstGeom>
+          <a:noFill/>
+        </p:spPr>
+        <p:txBody>
+          <a:bodyPr wrap="square" lIns="0" rIns="0" tIns="0" bIns="0">
+            <a:spAutoFit/>
+          </a:bodyPr>
+          <a:lstStyle/>
+          <a:p>
+            <a:pPr algn="l">
+              <a:lnSpc>
+                <a:spcPct val="125000"/>
+              </a:lnSpc>
+            </a:pPr>
+            <a:r>
+              <a:rPr sz="1500" b="1">
+                <a:solidFill>
+                  <a:srgbClr val="0F141F"/>
+                </a:solidFill>
+                <a:latin typeface="맑은 고딕"/>
+              </a:rPr>
+              <a:t>사람 모집 없이도 친분 휴리스틱을 검증할 수 있다.</a:t>
+            </a:r>
+          </a:p>
+        </p:txBody>
+      </p:sp>
+      <p:sp>
+        <p:nvSpPr>
+          <p:cNvPr id="8" name="TextBox 7"/>
+          <p:cNvSpPr txBox="1"/>
+          <p:nvPr/>
+        </p:nvSpPr>
+        <p:spPr>
+          <a:xfrm>
+            <a:off x="640080" y="2560320"/>
+            <a:ext cx="10972800" cy="411480"/>
+          </a:xfrm>
+          <a:prstGeom prst="rect">
+            <a:avLst/>
+          </a:prstGeom>
+          <a:noFill/>
+        </p:spPr>
+        <p:txBody>
+          <a:bodyPr wrap="square" lIns="0" rIns="0" tIns="0" bIns="0">
+            <a:spAutoFit/>
+          </a:bodyPr>
+          <a:lstStyle/>
+          <a:p>
+            <a:pPr algn="l">
+              <a:lnSpc>
+                <a:spcPct val="125000"/>
+              </a:lnSpc>
+            </a:pPr>
+            <a:r>
+              <a:rPr sz="1200" b="0">
+                <a:solidFill>
+                  <a:srgbClr val="424B5C"/>
+                </a:solidFill>
+                <a:latin typeface="맑은 고딕"/>
+              </a:rPr>
+              <a:t>가상 학생 30명에 친한 정도를 다 설정 → 팀장이 5가지 방식으로 뽑게 함 → 그림으로 비교.</a:t>
+            </a:r>
+          </a:p>
+        </p:txBody>
+      </p:sp>
+      <p:cxnSp>
+        <p:nvCxnSpPr>
+          <p:cNvPr id="9" name="Connector 8"/>
+          <p:cNvCxnSpPr/>
+          <p:nvPr/>
+        </p:nvCxnSpPr>
+        <p:spPr>
+          <a:xfrm>
+            <a:off x="640080" y="3291840"/>
+            <a:ext cx="10881360" cy="0"/>
+          </a:xfrm>
+          <a:prstGeom prst="line">
+            <a:avLst/>
+          </a:prstGeom>
+          <a:ln w="19050">
+            <a:solidFill>
+              <a:srgbClr val="E5E7EB"/>
+            </a:solidFill>
+          </a:ln>
+        </p:spPr>
+        <p:style>
+          <a:lnRef idx="2">
+            <a:schemeClr val="accent1"/>
+          </a:lnRef>
+          <a:fillRef idx="0">
+            <a:schemeClr val="accent1"/>
+          </a:fillRef>
+          <a:effectRef idx="1">
+            <a:schemeClr val="accent1"/>
+          </a:effectRef>
+          <a:fontRef idx="minor">
+            <a:schemeClr val="tx1"/>
+          </a:fontRef>
+        </p:style>
+      </p:cxnSp>
+      <p:sp>
+        <p:nvSpPr>
+          <p:cNvPr id="10" name="TextBox 9"/>
+          <p:cNvSpPr txBox="1"/>
+          <p:nvPr/>
+        </p:nvSpPr>
+        <p:spPr>
+          <a:xfrm>
+            <a:off x="640080" y="3429000"/>
+            <a:ext cx="10972800" cy="365760"/>
+          </a:xfrm>
+          <a:prstGeom prst="rect">
+            <a:avLst/>
+          </a:prstGeom>
+          <a:noFill/>
+        </p:spPr>
+        <p:txBody>
+          <a:bodyPr wrap="square" lIns="0" rIns="0" tIns="0" bIns="0">
+            <a:spAutoFit/>
+          </a:bodyPr>
+          <a:lstStyle/>
+          <a:p>
+            <a:pPr algn="l">
+              <a:lnSpc>
+                <a:spcPct val="125000"/>
+              </a:lnSpc>
+            </a:pPr>
+            <a:r>
+              <a:rPr sz="1100" b="1">
+                <a:solidFill>
+                  <a:srgbClr val="4F46E5"/>
+                </a:solidFill>
+                <a:latin typeface="맑은 고딕"/>
+              </a:rPr>
+              <a:t>5가지 팀장 선택 방식 (그림 5장 산출)</a:t>
+            </a:r>
+          </a:p>
+        </p:txBody>
+      </p:sp>
+      <p:sp>
+        <p:nvSpPr>
+          <p:cNvPr id="11" name="TextBox 10"/>
+          <p:cNvSpPr txBox="1"/>
+          <p:nvPr/>
+        </p:nvSpPr>
+        <p:spPr>
+          <a:xfrm>
+            <a:off x="868680" y="3931920"/>
+            <a:ext cx="365760" cy="320040"/>
+          </a:xfrm>
+          <a:prstGeom prst="rect">
+            <a:avLst/>
+          </a:prstGeom>
+          <a:noFill/>
+        </p:spPr>
+        <p:txBody>
+          <a:bodyPr wrap="square" lIns="0" rIns="0" tIns="0" bIns="0">
+            <a:spAutoFit/>
+          </a:bodyPr>
+          <a:lstStyle/>
+          <a:p>
+            <a:pPr algn="l">
+              <a:lnSpc>
+                <a:spcPct val="125000"/>
+              </a:lnSpc>
+            </a:pPr>
+            <a:r>
+              <a:rPr sz="1400" b="1">
+                <a:solidFill>
+                  <a:srgbClr val="10B981"/>
+                </a:solidFill>
+                <a:latin typeface="맑은 고딕"/>
+              </a:rPr>
+              <a:t>①</a:t>
+            </a:r>
+          </a:p>
+        </p:txBody>
+      </p:sp>
+      <p:sp>
+        <p:nvSpPr>
+          <p:cNvPr id="12" name="TextBox 11"/>
+          <p:cNvSpPr txBox="1"/>
+          <p:nvPr/>
+        </p:nvSpPr>
+        <p:spPr>
+          <a:xfrm>
+            <a:off x="1371600" y="3886200"/>
+            <a:ext cx="3200400" cy="365760"/>
+          </a:xfrm>
+          <a:prstGeom prst="rect">
+            <a:avLst/>
+          </a:prstGeom>
+          <a:noFill/>
+        </p:spPr>
+        <p:txBody>
+          <a:bodyPr wrap="square" lIns="0" rIns="0" tIns="0" bIns="0">
+            <a:spAutoFit/>
+          </a:bodyPr>
+          <a:lstStyle/>
+          <a:p>
+            <a:pPr algn="l">
+              <a:lnSpc>
+                <a:spcPct val="125000"/>
+              </a:lnSpc>
+            </a:pPr>
+            <a:r>
+              <a:rPr sz="1200" b="1">
+                <a:solidFill>
+                  <a:srgbClr val="0F141F"/>
+                </a:solidFill>
+                <a:latin typeface="맑은 고딕"/>
+              </a:rPr>
+              <a:t>무작위로 뽑기</a:t>
+            </a:r>
+          </a:p>
+        </p:txBody>
+      </p:sp>
+      <p:sp>
+        <p:nvSpPr>
+          <p:cNvPr id="13" name="TextBox 12"/>
+          <p:cNvSpPr txBox="1"/>
+          <p:nvPr/>
+        </p:nvSpPr>
+        <p:spPr>
+          <a:xfrm>
+            <a:off x="4754880" y="3886200"/>
+            <a:ext cx="3657600" cy="365760"/>
+          </a:xfrm>
+          <a:prstGeom prst="rect">
+            <a:avLst/>
+          </a:prstGeom>
+          <a:noFill/>
+        </p:spPr>
+        <p:txBody>
+          <a:bodyPr wrap="square" lIns="0" rIns="0" tIns="0" bIns="0">
+            <a:spAutoFit/>
+          </a:bodyPr>
+          <a:lstStyle/>
+          <a:p>
+            <a:pPr algn="l">
+              <a:lnSpc>
+                <a:spcPct val="125000"/>
+              </a:lnSpc>
+            </a:pPr>
+            <a:r>
+              <a:rPr sz="1000" b="0">
+                <a:solidFill>
+                  <a:srgbClr val="424B5C"/>
+                </a:solidFill>
+                <a:latin typeface="맑은 고딕"/>
+              </a:rPr>
+              <a:t>그냥 랜덤 5명</a:t>
+            </a:r>
+          </a:p>
+        </p:txBody>
+      </p:sp>
+      <p:sp>
+        <p:nvSpPr>
+          <p:cNvPr id="14" name="TextBox 13"/>
+          <p:cNvSpPr txBox="1"/>
+          <p:nvPr/>
+        </p:nvSpPr>
+        <p:spPr>
+          <a:xfrm>
+            <a:off x="8595360" y="3886200"/>
+            <a:ext cx="3017520" cy="365760"/>
+          </a:xfrm>
+          <a:prstGeom prst="rect">
+            <a:avLst/>
+          </a:prstGeom>
+          <a:noFill/>
+        </p:spPr>
+        <p:txBody>
+          <a:bodyPr wrap="square" lIns="0" rIns="0" tIns="0" bIns="0">
+            <a:spAutoFit/>
+          </a:bodyPr>
+          <a:lstStyle/>
+          <a:p>
+            <a:pPr algn="l">
+              <a:lnSpc>
+                <a:spcPct val="125000"/>
+              </a:lnSpc>
+            </a:pPr>
+            <a:r>
+              <a:rPr sz="1000" b="1">
+                <a:solidFill>
+                  <a:srgbClr val="10B981"/>
+                </a:solidFill>
+                <a:latin typeface="맑은 고딕"/>
+              </a:rPr>
+              <a:t>친분 편향 0 → 비교 기준</a:t>
+            </a:r>
+          </a:p>
+        </p:txBody>
+      </p:sp>
+      <p:sp>
+        <p:nvSpPr>
+          <p:cNvPr id="15" name="TextBox 14"/>
+          <p:cNvSpPr txBox="1"/>
+          <p:nvPr/>
+        </p:nvSpPr>
+        <p:spPr>
+          <a:xfrm>
+            <a:off x="868680" y="4407407"/>
+            <a:ext cx="365760" cy="320040"/>
+          </a:xfrm>
+          <a:prstGeom prst="rect">
+            <a:avLst/>
+          </a:prstGeom>
+          <a:noFill/>
+        </p:spPr>
+        <p:txBody>
+          <a:bodyPr wrap="square" lIns="0" rIns="0" tIns="0" bIns="0">
+            <a:spAutoFit/>
+          </a:bodyPr>
+          <a:lstStyle/>
+          <a:p>
+            <a:pPr algn="l">
+              <a:lnSpc>
+                <a:spcPct val="125000"/>
+              </a:lnSpc>
+            </a:pPr>
+            <a:r>
+              <a:rPr sz="1400" b="1">
+                <a:solidFill>
+                  <a:srgbClr val="EC4899"/>
+                </a:solidFill>
+                <a:latin typeface="맑은 고딕"/>
+              </a:rPr>
+              <a:t>②</a:t>
+            </a:r>
+          </a:p>
+        </p:txBody>
+      </p:sp>
+      <p:sp>
+        <p:nvSpPr>
+          <p:cNvPr id="16" name="TextBox 15"/>
+          <p:cNvSpPr txBox="1"/>
+          <p:nvPr/>
+        </p:nvSpPr>
+        <p:spPr>
+          <a:xfrm>
+            <a:off x="1371600" y="4361688"/>
+            <a:ext cx="3200400" cy="365760"/>
+          </a:xfrm>
+          <a:prstGeom prst="rect">
+            <a:avLst/>
+          </a:prstGeom>
+          <a:noFill/>
+        </p:spPr>
+        <p:txBody>
+          <a:bodyPr wrap="square" lIns="0" rIns="0" tIns="0" bIns="0">
+            <a:spAutoFit/>
+          </a:bodyPr>
+          <a:lstStyle/>
+          <a:p>
+            <a:pPr algn="l">
+              <a:lnSpc>
+                <a:spcPct val="125000"/>
+              </a:lnSpc>
+            </a:pPr>
+            <a:r>
+              <a:rPr sz="1200" b="1">
+                <a:solidFill>
+                  <a:srgbClr val="0F141F"/>
+                </a:solidFill>
+                <a:latin typeface="맑은 고딕"/>
+              </a:rPr>
+              <a:t>친한 사람만</a:t>
+            </a:r>
+          </a:p>
+        </p:txBody>
+      </p:sp>
+      <p:sp>
+        <p:nvSpPr>
+          <p:cNvPr id="17" name="TextBox 16"/>
+          <p:cNvSpPr txBox="1"/>
+          <p:nvPr/>
+        </p:nvSpPr>
+        <p:spPr>
+          <a:xfrm>
+            <a:off x="4754880" y="4361688"/>
+            <a:ext cx="3657600" cy="365760"/>
+          </a:xfrm>
+          <a:prstGeom prst="rect">
+            <a:avLst/>
+          </a:prstGeom>
+          <a:noFill/>
+        </p:spPr>
+        <p:txBody>
+          <a:bodyPr wrap="square" lIns="0" rIns="0" tIns="0" bIns="0">
+            <a:spAutoFit/>
+          </a:bodyPr>
+          <a:lstStyle/>
+          <a:p>
+            <a:pPr algn="l">
+              <a:lnSpc>
+                <a:spcPct val="125000"/>
+              </a:lnSpc>
+            </a:pPr>
+            <a:r>
+              <a:rPr sz="1000" b="0">
+                <a:solidFill>
+                  <a:srgbClr val="424B5C"/>
+                </a:solidFill>
+                <a:latin typeface="맑은 고딕"/>
+              </a:rPr>
+              <a:t>친밀도 상위 5명</a:t>
+            </a:r>
+          </a:p>
+        </p:txBody>
+      </p:sp>
+      <p:sp>
+        <p:nvSpPr>
+          <p:cNvPr id="18" name="TextBox 17"/>
+          <p:cNvSpPr txBox="1"/>
+          <p:nvPr/>
+        </p:nvSpPr>
+        <p:spPr>
+          <a:xfrm>
+            <a:off x="8595360" y="4361688"/>
+            <a:ext cx="3017520" cy="365760"/>
+          </a:xfrm>
+          <a:prstGeom prst="rect">
+            <a:avLst/>
+          </a:prstGeom>
+          <a:noFill/>
+        </p:spPr>
+        <p:txBody>
+          <a:bodyPr wrap="square" lIns="0" rIns="0" tIns="0" bIns="0">
+            <a:spAutoFit/>
+          </a:bodyPr>
+          <a:lstStyle/>
+          <a:p>
+            <a:pPr algn="l">
+              <a:lnSpc>
+                <a:spcPct val="125000"/>
+              </a:lnSpc>
+            </a:pPr>
+            <a:r>
+              <a:rPr sz="1000" b="1">
+                <a:solidFill>
+                  <a:srgbClr val="EC4899"/>
+                </a:solidFill>
+                <a:latin typeface="맑은 고딕"/>
+              </a:rPr>
+              <a:t>친분 100%, 역량 낮음 (현실)</a:t>
+            </a:r>
+          </a:p>
+        </p:txBody>
+      </p:sp>
+      <p:sp>
+        <p:nvSpPr>
+          <p:cNvPr id="19" name="TextBox 18"/>
+          <p:cNvSpPr txBox="1"/>
+          <p:nvPr/>
+        </p:nvSpPr>
+        <p:spPr>
+          <a:xfrm>
+            <a:off x="868680" y="4882896"/>
+            <a:ext cx="365760" cy="320040"/>
+          </a:xfrm>
+          <a:prstGeom prst="rect">
+            <a:avLst/>
+          </a:prstGeom>
+          <a:noFill/>
+        </p:spPr>
+        <p:txBody>
+          <a:bodyPr wrap="square" lIns="0" rIns="0" tIns="0" bIns="0">
+            <a:spAutoFit/>
+          </a:bodyPr>
+          <a:lstStyle/>
+          <a:p>
+            <a:pPr algn="l">
+              <a:lnSpc>
+                <a:spcPct val="125000"/>
+              </a:lnSpc>
+            </a:pPr>
+            <a:r>
+              <a:rPr sz="1400" b="1">
+                <a:solidFill>
+                  <a:srgbClr val="4F46E5"/>
+                </a:solidFill>
+                <a:latin typeface="맑은 고딕"/>
+              </a:rPr>
+              <a:t>③</a:t>
+            </a:r>
+          </a:p>
+        </p:txBody>
+      </p:sp>
+      <p:sp>
+        <p:nvSpPr>
+          <p:cNvPr id="20" name="TextBox 19"/>
+          <p:cNvSpPr txBox="1"/>
+          <p:nvPr/>
+        </p:nvSpPr>
+        <p:spPr>
+          <a:xfrm>
+            <a:off x="1371600" y="4837176"/>
+            <a:ext cx="3200400" cy="365760"/>
+          </a:xfrm>
+          <a:prstGeom prst="rect">
+            <a:avLst/>
+          </a:prstGeom>
+          <a:noFill/>
+        </p:spPr>
+        <p:txBody>
+          <a:bodyPr wrap="square" lIns="0" rIns="0" tIns="0" bIns="0">
+            <a:spAutoFit/>
+          </a:bodyPr>
+          <a:lstStyle/>
+          <a:p>
+            <a:pPr algn="l">
+              <a:lnSpc>
+                <a:spcPct val="125000"/>
+              </a:lnSpc>
+            </a:pPr>
+            <a:r>
+              <a:rPr sz="1200" b="1">
+                <a:solidFill>
+                  <a:srgbClr val="0F141F"/>
+                </a:solidFill>
+                <a:latin typeface="맑은 고딕"/>
+              </a:rPr>
+              <a:t>잘하는 사람만</a:t>
+            </a:r>
+          </a:p>
+        </p:txBody>
+      </p:sp>
+      <p:sp>
+        <p:nvSpPr>
+          <p:cNvPr id="21" name="TextBox 20"/>
+          <p:cNvSpPr txBox="1"/>
+          <p:nvPr/>
+        </p:nvSpPr>
+        <p:spPr>
+          <a:xfrm>
+            <a:off x="4754880" y="4837176"/>
+            <a:ext cx="3657600" cy="365760"/>
+          </a:xfrm>
+          <a:prstGeom prst="rect">
+            <a:avLst/>
+          </a:prstGeom>
+          <a:noFill/>
+        </p:spPr>
+        <p:txBody>
+          <a:bodyPr wrap="square" lIns="0" rIns="0" tIns="0" bIns="0">
+            <a:spAutoFit/>
+          </a:bodyPr>
+          <a:lstStyle/>
+          <a:p>
+            <a:pPr algn="l">
+              <a:lnSpc>
+                <a:spcPct val="125000"/>
+              </a:lnSpc>
+            </a:pPr>
+            <a:r>
+              <a:rPr sz="1000" b="0">
+                <a:solidFill>
+                  <a:srgbClr val="424B5C"/>
+                </a:solidFill>
+                <a:latin typeface="맑은 고딕"/>
+              </a:rPr>
+              <a:t>역량 상위 5명</a:t>
+            </a:r>
+          </a:p>
+        </p:txBody>
+      </p:sp>
+      <p:sp>
+        <p:nvSpPr>
+          <p:cNvPr id="22" name="TextBox 21"/>
+          <p:cNvSpPr txBox="1"/>
+          <p:nvPr/>
+        </p:nvSpPr>
+        <p:spPr>
+          <a:xfrm>
+            <a:off x="8595360" y="4837176"/>
+            <a:ext cx="3017520" cy="365760"/>
+          </a:xfrm>
+          <a:prstGeom prst="rect">
+            <a:avLst/>
+          </a:prstGeom>
+          <a:noFill/>
+        </p:spPr>
+        <p:txBody>
+          <a:bodyPr wrap="square" lIns="0" rIns="0" tIns="0" bIns="0">
+            <a:spAutoFit/>
+          </a:bodyPr>
+          <a:lstStyle/>
+          <a:p>
+            <a:pPr algn="l">
+              <a:lnSpc>
+                <a:spcPct val="125000"/>
+              </a:lnSpc>
+            </a:pPr>
+            <a:r>
+              <a:rPr sz="1000" b="1">
+                <a:solidFill>
+                  <a:srgbClr val="4F46E5"/>
+                </a:solidFill>
+                <a:latin typeface="맑은 고딕"/>
+              </a:rPr>
+              <a:t>역량 100%, 친분 0 (이상)</a:t>
+            </a:r>
+          </a:p>
+        </p:txBody>
+      </p:sp>
+      <p:sp>
+        <p:nvSpPr>
+          <p:cNvPr id="23" name="TextBox 22"/>
+          <p:cNvSpPr txBox="1"/>
+          <p:nvPr/>
+        </p:nvSpPr>
+        <p:spPr>
+          <a:xfrm>
+            <a:off x="868680" y="5358384"/>
+            <a:ext cx="365760" cy="320040"/>
+          </a:xfrm>
+          <a:prstGeom prst="rect">
+            <a:avLst/>
+          </a:prstGeom>
+          <a:noFill/>
+        </p:spPr>
+        <p:txBody>
+          <a:bodyPr wrap="square" lIns="0" rIns="0" tIns="0" bIns="0">
+            <a:spAutoFit/>
+          </a:bodyPr>
+          <a:lstStyle/>
+          <a:p>
+            <a:pPr algn="l">
+              <a:lnSpc>
+                <a:spcPct val="125000"/>
+              </a:lnSpc>
+            </a:pPr>
+            <a:r>
+              <a:rPr sz="1400" b="1">
+                <a:solidFill>
+                  <a:srgbClr val="F59E0B"/>
+                </a:solidFill>
+                <a:latin typeface="맑은 고딕"/>
+              </a:rPr>
+              <a:t>④</a:t>
+            </a:r>
+          </a:p>
+        </p:txBody>
+      </p:sp>
+      <p:sp>
+        <p:nvSpPr>
+          <p:cNvPr id="24" name="TextBox 23"/>
+          <p:cNvSpPr txBox="1"/>
+          <p:nvPr/>
+        </p:nvSpPr>
+        <p:spPr>
+          <a:xfrm>
+            <a:off x="1371600" y="5312664"/>
+            <a:ext cx="3200400" cy="365760"/>
+          </a:xfrm>
+          <a:prstGeom prst="rect">
+            <a:avLst/>
+          </a:prstGeom>
+          <a:noFill/>
+        </p:spPr>
+        <p:txBody>
+          <a:bodyPr wrap="square" lIns="0" rIns="0" tIns="0" bIns="0">
+            <a:spAutoFit/>
+          </a:bodyPr>
+          <a:lstStyle/>
+          <a:p>
+            <a:pPr algn="l">
+              <a:lnSpc>
+                <a:spcPct val="125000"/>
+              </a:lnSpc>
+            </a:pPr>
+            <a:r>
+              <a:rPr sz="1200" b="1">
+                <a:solidFill>
+                  <a:srgbClr val="0F141F"/>
+                </a:solidFill>
+                <a:latin typeface="맑은 고딕"/>
+              </a:rPr>
+              <a:t>머리에 떠오르는 사람</a:t>
+            </a:r>
+          </a:p>
+        </p:txBody>
+      </p:sp>
+      <p:sp>
+        <p:nvSpPr>
+          <p:cNvPr id="25" name="TextBox 24"/>
+          <p:cNvSpPr txBox="1"/>
+          <p:nvPr/>
+        </p:nvSpPr>
+        <p:spPr>
+          <a:xfrm>
+            <a:off x="4754880" y="5312664"/>
+            <a:ext cx="3657600" cy="365760"/>
+          </a:xfrm>
+          <a:prstGeom prst="rect">
+            <a:avLst/>
+          </a:prstGeom>
+          <a:noFill/>
+        </p:spPr>
+        <p:txBody>
+          <a:bodyPr wrap="square" lIns="0" rIns="0" tIns="0" bIns="0">
+            <a:spAutoFit/>
+          </a:bodyPr>
+          <a:lstStyle/>
+          <a:p>
+            <a:pPr algn="l">
+              <a:lnSpc>
+                <a:spcPct val="125000"/>
+              </a:lnSpc>
+            </a:pPr>
+            <a:r>
+              <a:rPr sz="1000" b="0">
+                <a:solidFill>
+                  <a:srgbClr val="424B5C"/>
+                </a:solidFill>
+                <a:latin typeface="맑은 고딕"/>
+              </a:rPr>
+              <a:t>친한 7명 떠올리고 그 중 5명</a:t>
+            </a:r>
+          </a:p>
+        </p:txBody>
+      </p:sp>
+      <p:sp>
+        <p:nvSpPr>
+          <p:cNvPr id="26" name="TextBox 25"/>
+          <p:cNvSpPr txBox="1"/>
+          <p:nvPr/>
+        </p:nvSpPr>
+        <p:spPr>
+          <a:xfrm>
+            <a:off x="8595360" y="5312664"/>
+            <a:ext cx="3017520" cy="365760"/>
+          </a:xfrm>
+          <a:prstGeom prst="rect">
+            <a:avLst/>
+          </a:prstGeom>
+          <a:noFill/>
+        </p:spPr>
+        <p:txBody>
+          <a:bodyPr wrap="square" lIns="0" rIns="0" tIns="0" bIns="0">
+            <a:spAutoFit/>
+          </a:bodyPr>
+          <a:lstStyle/>
+          <a:p>
+            <a:pPr algn="l">
+              <a:lnSpc>
+                <a:spcPct val="125000"/>
+              </a:lnSpc>
+            </a:pPr>
+            <a:r>
+              <a:rPr sz="1000" b="1">
+                <a:solidFill>
+                  <a:srgbClr val="F59E0B"/>
+                </a:solidFill>
+                <a:latin typeface="맑은 고딕"/>
+              </a:rPr>
+              <a:t>현실의 satisficing</a:t>
+            </a:r>
+          </a:p>
+        </p:txBody>
+      </p:sp>
+      <p:sp>
+        <p:nvSpPr>
+          <p:cNvPr id="27" name="TextBox 26"/>
+          <p:cNvSpPr txBox="1"/>
+          <p:nvPr/>
+        </p:nvSpPr>
+        <p:spPr>
+          <a:xfrm>
+            <a:off x="868680" y="5833872"/>
+            <a:ext cx="365760" cy="320040"/>
+          </a:xfrm>
+          <a:prstGeom prst="rect">
+            <a:avLst/>
+          </a:prstGeom>
+          <a:noFill/>
+        </p:spPr>
+        <p:txBody>
+          <a:bodyPr wrap="square" lIns="0" rIns="0" tIns="0" bIns="0">
+            <a:spAutoFit/>
+          </a:bodyPr>
+          <a:lstStyle/>
+          <a:p>
+            <a:pPr algn="l">
+              <a:lnSpc>
+                <a:spcPct val="125000"/>
+              </a:lnSpc>
+            </a:pPr>
+            <a:r>
+              <a:rPr sz="1400" b="1">
+                <a:solidFill>
+                  <a:srgbClr val="424B5C"/>
+                </a:solidFill>
+                <a:latin typeface="맑은 고딕"/>
+              </a:rPr>
+              <a:t>⑤</a:t>
+            </a:r>
+          </a:p>
+        </p:txBody>
+      </p:sp>
+      <p:sp>
+        <p:nvSpPr>
+          <p:cNvPr id="28" name="TextBox 27"/>
+          <p:cNvSpPr txBox="1"/>
+          <p:nvPr/>
+        </p:nvSpPr>
+        <p:spPr>
+          <a:xfrm>
+            <a:off x="1371600" y="5788152"/>
+            <a:ext cx="3200400" cy="365760"/>
+          </a:xfrm>
+          <a:prstGeom prst="rect">
+            <a:avLst/>
+          </a:prstGeom>
+          <a:noFill/>
+        </p:spPr>
+        <p:txBody>
+          <a:bodyPr wrap="square" lIns="0" rIns="0" tIns="0" bIns="0">
+            <a:spAutoFit/>
+          </a:bodyPr>
+          <a:lstStyle/>
+          <a:p>
+            <a:pPr algn="l">
+              <a:lnSpc>
+                <a:spcPct val="125000"/>
+              </a:lnSpc>
+            </a:pPr>
+            <a:r>
+              <a:rPr sz="1200" b="1">
+                <a:solidFill>
+                  <a:srgbClr val="0F141F"/>
+                </a:solidFill>
+                <a:latin typeface="맑은 고딕"/>
+              </a:rPr>
+              <a:t>프로필 카드 보고</a:t>
+            </a:r>
+          </a:p>
+        </p:txBody>
+      </p:sp>
+      <p:sp>
+        <p:nvSpPr>
+          <p:cNvPr id="29" name="TextBox 28"/>
+          <p:cNvSpPr txBox="1"/>
+          <p:nvPr/>
+        </p:nvSpPr>
+        <p:spPr>
+          <a:xfrm>
+            <a:off x="4754880" y="5788152"/>
+            <a:ext cx="3657600" cy="365760"/>
+          </a:xfrm>
+          <a:prstGeom prst="rect">
+            <a:avLst/>
+          </a:prstGeom>
+          <a:noFill/>
+        </p:spPr>
+        <p:txBody>
+          <a:bodyPr wrap="square" lIns="0" rIns="0" tIns="0" bIns="0">
+            <a:spAutoFit/>
+          </a:bodyPr>
+          <a:lstStyle/>
+          <a:p>
+            <a:pPr algn="l">
+              <a:lnSpc>
+                <a:spcPct val="125000"/>
+              </a:lnSpc>
+            </a:pPr>
+            <a:r>
+              <a:rPr sz="1000" b="0">
+                <a:solidFill>
+                  <a:srgbClr val="424B5C"/>
+                </a:solidFill>
+                <a:latin typeface="맑은 고딕"/>
+              </a:rPr>
+              <a:t>정보 본 후 다양성 고려</a:t>
+            </a:r>
+          </a:p>
+        </p:txBody>
+      </p:sp>
+      <p:sp>
+        <p:nvSpPr>
+          <p:cNvPr id="30" name="TextBox 29"/>
+          <p:cNvSpPr txBox="1"/>
+          <p:nvPr/>
+        </p:nvSpPr>
+        <p:spPr>
+          <a:xfrm>
+            <a:off x="8595360" y="5788152"/>
+            <a:ext cx="3017520" cy="365760"/>
+          </a:xfrm>
+          <a:prstGeom prst="rect">
+            <a:avLst/>
+          </a:prstGeom>
+          <a:noFill/>
+        </p:spPr>
+        <p:txBody>
+          <a:bodyPr wrap="square" lIns="0" rIns="0" tIns="0" bIns="0">
+            <a:spAutoFit/>
+          </a:bodyPr>
+          <a:lstStyle/>
+          <a:p>
+            <a:pPr algn="l">
+              <a:lnSpc>
+                <a:spcPct val="125000"/>
+              </a:lnSpc>
+            </a:pPr>
+            <a:r>
+              <a:rPr sz="1000" b="1">
+                <a:solidFill>
+                  <a:srgbClr val="424B5C"/>
+                </a:solidFill>
+                <a:latin typeface="맑은 고딕"/>
+              </a:rPr>
+              <a:t>균형 잡힌 팀</a:t>
+            </a:r>
+          </a:p>
+        </p:txBody>
+      </p:sp>
+      <p:sp>
+        <p:nvSpPr>
+          <p:cNvPr id="31" name="TextBox 30"/>
+          <p:cNvSpPr txBox="1"/>
+          <p:nvPr/>
+        </p:nvSpPr>
+        <p:spPr>
+          <a:xfrm>
+            <a:off x="640080" y="6400800"/>
+            <a:ext cx="10972800" cy="365760"/>
+          </a:xfrm>
+          <a:prstGeom prst="rect">
+            <a:avLst/>
+          </a:prstGeom>
+          <a:noFill/>
+        </p:spPr>
+        <p:txBody>
+          <a:bodyPr wrap="square" lIns="0" rIns="0" tIns="0" bIns="0">
+            <a:spAutoFit/>
+          </a:bodyPr>
+          <a:lstStyle/>
+          <a:p>
+            <a:pPr algn="ctr">
+              <a:lnSpc>
+                <a:spcPct val="125000"/>
+              </a:lnSpc>
+            </a:pPr>
+            <a:r>
+              <a:rPr sz="1200" b="1">
+                <a:solidFill>
+                  <a:srgbClr val="EC4899"/>
+                </a:solidFill>
+                <a:latin typeface="맑은 고딕"/>
+              </a:rPr>
+              <a:t>결과: 5장의 네트워크 그래프 → 발표 슬라이드 임팩트 최고</a:t>
+            </a:r>
+          </a:p>
+        </p:txBody>
+      </p:sp>
+    </p:spTree>
+  </p:cSld>
+  <p:clrMapOvr>
+    <a:masterClrMapping/>
+  </p:clrMapOvr>
+</p:sld>
+</file>
+
+<file path=ppt/slides/slide26.xml><?xml version="1.0" encoding="utf-8"?>
 <p:sld xmlns:a="http://schemas.openxmlformats.org/drawingml/2006/main" xmlns:p="http://schemas.openxmlformats.org/presentationml/2006/main" xmlns:r="http://schemas.openxmlformats.org/officeDocument/2006/relationships">
   <p:cSld>
     <p:spTree>

--- a/team_project/kickoff_2026-05-11.pptx
+++ b/team_project/kickoff_2026-05-11.pptx
@@ -5086,7 +5086,7 @@
                 </a:solidFill>
                 <a:latin typeface="맑은 고딕"/>
               </a:rPr>
-              <a:t>강의계획서가 만들어내는 효과</a:t>
+              <a:t>강의계획서의 실제 효과</a:t>
             </a:r>
           </a:p>
         </p:txBody>
@@ -5164,7 +5164,7 @@
                 </a:solidFill>
                 <a:latin typeface="맑은 고딕"/>
               </a:rPr>
-              <a:t>→ 후보가 많으면 머리에 다 안 들어옴.</a:t>
+              <a:t>후보가 많으면 머리에 다 들어오지 않는다.</a:t>
             </a:r>
           </a:p>
           <a:p>
@@ -5180,7 +5180,7 @@
                 </a:solidFill>
                 <a:latin typeface="맑은 고딕"/>
               </a:rPr>
-              <a:t>→ 떠오르는 친한 사람으로 결정 (satisficing).</a:t>
+              <a:t>떠오르는 친한 사람으로 결정하게 된다.</a:t>
             </a:r>
           </a:p>
           <a:p>
@@ -5196,7 +5196,7 @@
                 </a:solidFill>
                 <a:latin typeface="맑은 고딕"/>
               </a:rPr>
-              <a:t>→ 결과: 친분 기반 팀 구성, 역량 균형 깨짐.</a:t>
+              <a:t>결과적으로 친분 기반 팀, 역량 균형이 깨진다.</a:t>
             </a:r>
           </a:p>
         </p:txBody>
@@ -7058,7 +7058,7 @@
                 </a:solidFill>
                 <a:latin typeface="맑은 고딕"/>
               </a:rPr>
-              <a:t>강의계획서가 만들어내는 효과</a:t>
+              <a:t>강의계획서의 실제 효과</a:t>
             </a:r>
           </a:p>
         </p:txBody>
@@ -7136,7 +7136,7 @@
                 </a:solidFill>
                 <a:latin typeface="맑은 고딕"/>
               </a:rPr>
-              <a:t>→ +10은 "준다"는 명확한 보상.</a:t>
+              <a:t>+10은 명확한 수치의 보상이다.</a:t>
             </a:r>
           </a:p>
           <a:p>
@@ -7152,7 +7152,7 @@
                 </a:solidFill>
                 <a:latin typeface="맑은 고딕"/>
               </a:rPr>
-              <a:t>→ 감점은 "기준이 모호한 위협".</a:t>
+              <a:t>반면 감점은 기준이 모호한 위협이다.</a:t>
             </a:r>
           </a:p>
           <a:p>
@@ -7168,7 +7168,7 @@
                 </a:solidFill>
                 <a:latin typeface="맑은 고딕"/>
               </a:rPr>
-              <a:t>→ 학생은 모호한 위협에 더 강하게 회피 반응.</a:t>
+              <a:t>학생은 모호한 위협에 더 강하게 회피한다.</a:t>
             </a:r>
           </a:p>
         </p:txBody>
@@ -8963,7 +8963,7 @@
                 </a:solidFill>
                 <a:latin typeface="맑은 고딕"/>
               </a:rPr>
-              <a:t>💡 우리가 보고 싶은 결과: 감점 그룹 응답이 +10 그룹보다 약 2배 더 강한 의도 (Cohen's d ≈ 0.5+)</a:t>
+              <a:t>기대 결과 — 감점 그룹 응답이 +10 그룹보다 약 2배 더 강한 의도 (Cohen's d ≈ 0.5+)</a:t>
             </a:r>
           </a:p>
         </p:txBody>
@@ -9207,7 +9207,7 @@
                 </a:solidFill>
                 <a:latin typeface="맑은 고딕"/>
               </a:rPr>
-              <a:t>💡 우리가 보고 싶은 결과: N=3·7 그룹은 만족도 5~6점, N=15 그룹은 4점 이하로 급감</a:t>
+              <a:t>기대 결과 — N=3·7 그룹은 만족도 5~6점, N=15 그룹은 4점 이하로 급감</a:t>
             </a:r>
           </a:p>
         </p:txBody>
@@ -9451,7 +9451,7 @@
                 </a:solidFill>
                 <a:latin typeface="맑은 고딕"/>
               </a:rPr>
-              <a:t>💡 우리가 보고 싶은 결과: 결석 의도: 고정 매주월 &gt; 랜덤 빈도공개 &gt; 랜덤 비공개 순서로 감소</a:t>
+              <a:t>기대 결과 — 결석 의도: 고정 매주월 &gt; 랜덤 빈도공개 &gt; 랜덤 비공개 순서로 감소</a:t>
             </a:r>
           </a:p>
         </p:txBody>
@@ -9695,7 +9695,7 @@
                 </a:solidFill>
                 <a:latin typeface="맑은 고딕"/>
               </a:rPr>
-              <a:t>💡 우리가 보고 싶은 결과: 단일 기말: 8주차 5h, 15주차 15h (3배). 격주 퀴즈: 8주차·15주차 ≈ 9h</a:t>
+              <a:t>기대 결과 — 단일 기말: 8주차 5h, 15주차 15h (3배). 격주 퀴즈: 8주차·15주차 ≈ 9h</a:t>
             </a:r>
           </a:p>
         </p:txBody>
@@ -14414,7 +14414,7 @@
                 </a:solidFill>
                 <a:latin typeface="맑은 고딕"/>
               </a:rPr>
-              <a:t>T1 · LIVE DEMO 1/2</a:t>
+              <a:t>설문 화면 1</a:t>
             </a:r>
           </a:p>
         </p:txBody>
@@ -14453,7 +14453,7 @@
                 </a:solidFill>
                 <a:latin typeface="맑은 고딕"/>
               </a:rPr>
-              <a:t>응답자가 실제로 보는 화면 — 인트로 &amp; 출석</a:t>
+              <a:t>응답자 화면 — 인트로 / 출석 시나리오</a:t>
             </a:r>
           </a:p>
         </p:txBody>
@@ -14532,48 +14532,9 @@
           </a:p>
         </p:txBody>
       </p:sp>
-      <p:sp>
-        <p:nvSpPr>
-          <p:cNvPr id="7" name="TextBox 6"/>
-          <p:cNvSpPr txBox="1"/>
-          <p:nvPr/>
-        </p:nvSpPr>
-        <p:spPr>
-          <a:xfrm>
-            <a:off x="640080" y="2011680"/>
-            <a:ext cx="10972800" cy="320040"/>
-          </a:xfrm>
-          <a:prstGeom prst="rect">
-            <a:avLst/>
-          </a:prstGeom>
-          <a:noFill/>
-        </p:spPr>
-        <p:txBody>
-          <a:bodyPr wrap="square" lIns="0" rIns="0" tIns="0" bIns="0">
-            <a:spAutoFit/>
-          </a:bodyPr>
-          <a:lstStyle/>
-          <a:p>
-            <a:pPr algn="l">
-              <a:lnSpc>
-                <a:spcPct val="125000"/>
-              </a:lnSpc>
-            </a:pPr>
-            <a:r>
-              <a:rPr sz="1100" b="0">
-                <a:solidFill>
-                  <a:srgbClr val="8B95A7"/>
-                </a:solidFill>
-                <a:latin typeface="맑은 고딕"/>
-              </a:rPr>
-              <a:t>단톡에 풀면 학생들이 이렇게 보게 됩니다.</a:t>
-            </a:r>
-          </a:p>
-        </p:txBody>
-      </p:sp>
       <p:pic>
         <p:nvPicPr>
-          <p:cNvPr id="8" name="Picture 7" descr="01_intro.png"/>
+          <p:cNvPr id="7" name="Picture 6" descr="01_intro.png"/>
           <p:cNvPicPr>
             <a:picLocks noChangeAspect="1"/>
           </p:cNvPicPr>
@@ -14587,7 +14548,7 @@
         </p:blipFill>
         <p:spPr>
           <a:xfrm>
-            <a:off x="640080" y="2423160"/>
+            <a:off x="640080" y="2194560"/>
             <a:ext cx="5577840" cy="4310149"/>
           </a:xfrm>
           <a:prstGeom prst="rect">
@@ -14597,14 +14558,53 @@
       </p:pic>
       <p:sp>
         <p:nvSpPr>
+          <p:cNvPr id="8" name="TextBox 7"/>
+          <p:cNvSpPr txBox="1"/>
+          <p:nvPr/>
+        </p:nvSpPr>
+        <p:spPr>
+          <a:xfrm>
+            <a:off x="640080" y="6035040"/>
+            <a:ext cx="5577840" cy="320040"/>
+          </a:xfrm>
+          <a:prstGeom prst="rect">
+            <a:avLst/>
+          </a:prstGeom>
+          <a:noFill/>
+        </p:spPr>
+        <p:txBody>
+          <a:bodyPr wrap="square" lIns="0" rIns="0" tIns="0" bIns="0">
+            <a:spAutoFit/>
+          </a:bodyPr>
+          <a:lstStyle/>
+          <a:p>
+            <a:pPr algn="ctr">
+              <a:lnSpc>
+                <a:spcPct val="125000"/>
+              </a:lnSpc>
+            </a:pPr>
+            <a:r>
+              <a:rPr sz="1200" b="1">
+                <a:solidFill>
+                  <a:srgbClr val="0F141F"/>
+                </a:solidFill>
+                <a:latin typeface="맑은 고딕"/>
+              </a:rPr>
+              <a:t>인트로 화면</a:t>
+            </a:r>
+          </a:p>
+        </p:txBody>
+      </p:sp>
+      <p:sp>
+        <p:nvSpPr>
           <p:cNvPr id="9" name="TextBox 8"/>
           <p:cNvSpPr txBox="1"/>
           <p:nvPr/>
         </p:nvSpPr>
         <p:spPr>
           <a:xfrm>
-            <a:off x="640080" y="6263640"/>
-            <a:ext cx="5577840" cy="320040"/>
+            <a:off x="640080" y="6355080"/>
+            <a:ext cx="5577840" cy="274320"/>
           </a:xfrm>
           <a:prstGeom prst="rect">
             <a:avLst/>
@@ -14623,13 +14623,13 @@
               </a:lnSpc>
             </a:pPr>
             <a:r>
-              <a:rPr sz="1100" b="1">
-                <a:solidFill>
-                  <a:srgbClr val="10B981"/>
-                </a:solidFill>
-                <a:latin typeface="맑은 고딕"/>
-              </a:rPr>
-              <a:t>① 인트로 — 16 유형 미리보기 + 시작</a:t>
+              <a:rPr sz="1000" b="0">
+                <a:solidFill>
+                  <a:srgbClr val="8B95A7"/>
+                </a:solidFill>
+                <a:latin typeface="맑은 고딕"/>
+              </a:rPr>
+              <a:t>16 유형 미리 보여주고 닉네임 입력 후 시작</a:t>
             </a:r>
           </a:p>
         </p:txBody>
@@ -14650,7 +14650,7 @@
         </p:blipFill>
         <p:spPr>
           <a:xfrm>
-            <a:off x="6355080" y="2423160"/>
+            <a:off x="6355080" y="2194560"/>
             <a:ext cx="5440680" cy="4204162"/>
           </a:xfrm>
           <a:prstGeom prst="rect">
@@ -14666,7 +14666,7 @@
         </p:nvSpPr>
         <p:spPr>
           <a:xfrm>
-            <a:off x="6355080" y="6263640"/>
+            <a:off x="6355080" y="6035040"/>
             <a:ext cx="5440680" cy="320040"/>
           </a:xfrm>
           <a:prstGeom prst="rect">
@@ -14686,13 +14686,13 @@
               </a:lnSpc>
             </a:pPr>
             <a:r>
-              <a:rPr sz="1100" b="1">
-                <a:solidFill>
-                  <a:srgbClr val="10B981"/>
-                </a:solidFill>
-                <a:latin typeface="맑은 고딕"/>
-              </a:rPr>
-              <a:t>② 출석 정책 3 조건 평가 (within-subjects)</a:t>
+              <a:rPr sz="1200" b="1">
+                <a:solidFill>
+                  <a:srgbClr val="0F141F"/>
+                </a:solidFill>
+                <a:latin typeface="맑은 고딕"/>
+              </a:rPr>
+              <a:t>출석 정책 비교 화면</a:t>
             </a:r>
           </a:p>
         </p:txBody>
@@ -14705,8 +14705,8 @@
         </p:nvSpPr>
         <p:spPr>
           <a:xfrm>
-            <a:off x="640080" y="6629400"/>
-            <a:ext cx="10972800" cy="274320"/>
+            <a:off x="6355080" y="6355080"/>
+            <a:ext cx="5440680" cy="274320"/>
           </a:xfrm>
           <a:prstGeom prst="rect">
             <a:avLst/>
@@ -14725,13 +14725,13 @@
               </a:lnSpc>
             </a:pPr>
             <a:r>
-              <a:rPr sz="900" b="0">
-                <a:solidFill>
-                  <a:srgbClr val="4F46E5"/>
-                </a:solidFill>
-                <a:latin typeface="맑은 고딕"/>
-              </a:rPr>
-              <a:t>imen315-syllabus-meta-gpvxmznvcygwd9cln2bnjp.streamlit.app</a:t>
+              <a:rPr sz="1000" b="0">
+                <a:solidFill>
+                  <a:srgbClr val="8B95A7"/>
+                </a:solidFill>
+                <a:latin typeface="맑은 고딕"/>
+              </a:rPr>
+              <a:t>3개 정책에서 각각 결석 의도를 골라요</a:t>
             </a:r>
           </a:p>
         </p:txBody>
@@ -14831,7 +14831,7 @@
                 </a:solidFill>
                 <a:latin typeface="맑은 고딕"/>
               </a:rPr>
-              <a:t>T1 · LIVE DEMO 2/2</a:t>
+              <a:t>설문 화면 2</a:t>
             </a:r>
           </a:p>
         </p:txBody>
@@ -14870,7 +14870,7 @@
                 </a:solidFill>
                 <a:latin typeface="맑은 고딕"/>
               </a:rPr>
-              <a:t>응답자가 실제로 보는 화면 — 인센티브 &amp; 팀 구성</a:t>
+              <a:t>응답자 화면 — 팀장 인센티브 / 팀원 지명</a:t>
             </a:r>
           </a:p>
         </p:txBody>
@@ -14949,48 +14949,9 @@
           </a:p>
         </p:txBody>
       </p:sp>
-      <p:sp>
-        <p:nvSpPr>
-          <p:cNvPr id="7" name="TextBox 6"/>
-          <p:cNvSpPr txBox="1"/>
-          <p:nvPr/>
-        </p:nvSpPr>
-        <p:spPr>
-          <a:xfrm>
-            <a:off x="640080" y="2011680"/>
-            <a:ext cx="10972800" cy="320040"/>
-          </a:xfrm>
-          <a:prstGeom prst="rect">
-            <a:avLst/>
-          </a:prstGeom>
-          <a:noFill/>
-        </p:spPr>
-        <p:txBody>
-          <a:bodyPr wrap="square" lIns="0" rIns="0" tIns="0" bIns="0">
-            <a:spAutoFit/>
-          </a:bodyPr>
-          <a:lstStyle/>
-          <a:p>
-            <a:pPr algn="l">
-              <a:lnSpc>
-                <a:spcPct val="125000"/>
-              </a:lnSpc>
-            </a:pPr>
-            <a:r>
-              <a:rPr sz="1100" b="0">
-                <a:solidFill>
-                  <a:srgbClr val="8B95A7"/>
-                </a:solidFill>
-                <a:latin typeface="맑은 고딕"/>
-              </a:rPr>
-              <a:t>강의계획서 원문을 그대로 보여주는 두 시나리오.</a:t>
-            </a:r>
-          </a:p>
-        </p:txBody>
-      </p:sp>
       <p:pic>
         <p:nvPicPr>
-          <p:cNvPr id="8" name="Picture 7" descr="03_framing.png"/>
+          <p:cNvPr id="7" name="Picture 6" descr="03_framing.png"/>
           <p:cNvPicPr>
             <a:picLocks noChangeAspect="1"/>
           </p:cNvPicPr>
@@ -15004,7 +14965,7 @@
         </p:blipFill>
         <p:spPr>
           <a:xfrm>
-            <a:off x="640080" y="2423160"/>
+            <a:off x="640080" y="2194560"/>
             <a:ext cx="5577840" cy="4310149"/>
           </a:xfrm>
           <a:prstGeom prst="rect">
@@ -15014,14 +14975,53 @@
       </p:pic>
       <p:sp>
         <p:nvSpPr>
+          <p:cNvPr id="8" name="TextBox 7"/>
+          <p:cNvSpPr txBox="1"/>
+          <p:nvPr/>
+        </p:nvSpPr>
+        <p:spPr>
+          <a:xfrm>
+            <a:off x="640080" y="6035040"/>
+            <a:ext cx="5577840" cy="320040"/>
+          </a:xfrm>
+          <a:prstGeom prst="rect">
+            <a:avLst/>
+          </a:prstGeom>
+          <a:noFill/>
+        </p:spPr>
+        <p:txBody>
+          <a:bodyPr wrap="square" lIns="0" rIns="0" tIns="0" bIns="0">
+            <a:spAutoFit/>
+          </a:bodyPr>
+          <a:lstStyle/>
+          <a:p>
+            <a:pPr algn="ctr">
+              <a:lnSpc>
+                <a:spcPct val="125000"/>
+              </a:lnSpc>
+            </a:pPr>
+            <a:r>
+              <a:rPr sz="1200" b="1">
+                <a:solidFill>
+                  <a:srgbClr val="0F141F"/>
+                </a:solidFill>
+                <a:latin typeface="맑은 고딕"/>
+              </a:rPr>
+              <a:t>팀장 인센티브 화면</a:t>
+            </a:r>
+          </a:p>
+        </p:txBody>
+      </p:sp>
+      <p:sp>
+        <p:nvSpPr>
           <p:cNvPr id="9" name="TextBox 8"/>
           <p:cNvSpPr txBox="1"/>
           <p:nvPr/>
         </p:nvSpPr>
         <p:spPr>
           <a:xfrm>
-            <a:off x="640080" y="6263640"/>
-            <a:ext cx="5577840" cy="320040"/>
+            <a:off x="640080" y="6355080"/>
+            <a:ext cx="5577840" cy="274320"/>
           </a:xfrm>
           <a:prstGeom prst="rect">
             <a:avLst/>
@@ -15040,13 +15040,13 @@
               </a:lnSpc>
             </a:pPr>
             <a:r>
-              <a:rPr sz="1100" b="1">
-                <a:solidFill>
-                  <a:srgbClr val="EC4899"/>
-                </a:solidFill>
-                <a:latin typeface="맑은 고딕"/>
-              </a:rPr>
-              <a:t>③ 인센티브 표현 — 강의계획서 원문 (gain vs loss)</a:t>
+              <a:rPr sz="1000" b="0">
+                <a:solidFill>
+                  <a:srgbClr val="8B95A7"/>
+                </a:solidFill>
+                <a:latin typeface="맑은 고딕"/>
+              </a:rPr>
+              <a:t>응답자 절반은 +10 가산, 절반은 모호한 감점 표현</a:t>
             </a:r>
           </a:p>
         </p:txBody>
@@ -15067,7 +15067,7 @@
         </p:blipFill>
         <p:spPr>
           <a:xfrm>
-            <a:off x="6355080" y="2423160"/>
+            <a:off x="6355080" y="2194560"/>
             <a:ext cx="5440680" cy="4204162"/>
           </a:xfrm>
           <a:prstGeom prst="rect">
@@ -15083,7 +15083,7 @@
         </p:nvSpPr>
         <p:spPr>
           <a:xfrm>
-            <a:off x="6355080" y="6263640"/>
+            <a:off x="6355080" y="6035040"/>
             <a:ext cx="5440680" cy="320040"/>
           </a:xfrm>
           <a:prstGeom prst="rect">
@@ -15103,13 +15103,13 @@
               </a:lnSpc>
             </a:pPr>
             <a:r>
-              <a:rPr sz="1100" b="1">
-                <a:solidFill>
-                  <a:srgbClr val="4F46E5"/>
-                </a:solidFill>
-                <a:latin typeface="맑은 고딕"/>
-              </a:rPr>
-              <a:t>④ 팀원 2명 직접 지명 (강의계획서 규칙)</a:t>
+              <a:rPr sz="1200" b="1">
+                <a:solidFill>
+                  <a:srgbClr val="0F141F"/>
+                </a:solidFill>
+                <a:latin typeface="맑은 고딕"/>
+              </a:rPr>
+              <a:t>팀원 직접 지명 화면</a:t>
             </a:r>
           </a:p>
         </p:txBody>
@@ -15122,8 +15122,8 @@
         </p:nvSpPr>
         <p:spPr>
           <a:xfrm>
-            <a:off x="640080" y="6629400"/>
-            <a:ext cx="10972800" cy="274320"/>
+            <a:off x="6355080" y="6355080"/>
+            <a:ext cx="5440680" cy="274320"/>
           </a:xfrm>
           <a:prstGeom prst="rect">
             <a:avLst/>
@@ -15142,13 +15142,13 @@
               </a:lnSpc>
             </a:pPr>
             <a:r>
-              <a:rPr sz="900" b="0">
-                <a:solidFill>
-                  <a:srgbClr val="424B5C"/>
-                </a:solidFill>
-                <a:latin typeface="맑은 고딕"/>
-              </a:rPr>
-              <a:t>같은 설문을 Google Forms + Streamlit + Sheets에 동시 배포 → 도구별 응답률 비교</a:t>
+              <a:rPr sz="1000" b="0">
+                <a:solidFill>
+                  <a:srgbClr val="8B95A7"/>
+                </a:solidFill>
+                <a:latin typeface="맑은 고딕"/>
+              </a:rPr>
+              <a:t>후보 N명 중 2명 지명 (강의계획서 규칙)</a:t>
             </a:r>
           </a:p>
         </p:txBody>
@@ -15944,7 +15944,7 @@
                 </a:solidFill>
                 <a:latin typeface="맑은 고딕"/>
               </a:rPr>
-              <a:t>→ 보고서 핵심 한 줄: "개선안이 약한 학생도 도와주는가?"</a:t>
+              <a:t>분석 질문: 개선안이 약한 학생도 도와주는가</a:t>
             </a:r>
           </a:p>
         </p:txBody>
@@ -17040,7 +17040,7 @@
                 </a:solidFill>
                 <a:latin typeface="맑은 고딕"/>
               </a:rPr>
-              <a:t>1000명 → 각자 다른 4가지 속성 조합</a:t>
+              <a:t>1000명 각자 다른 4가지 속성 조합</a:t>
             </a:r>
           </a:p>
         </p:txBody>
@@ -17079,7 +17079,7 @@
                 </a:solidFill>
                 <a:latin typeface="맑은 고딕"/>
               </a:rPr>
-              <a:t>→ 김민준 같은 학생은 잘 적응하지만,</a:t>
+              <a:t>김민준 같은 학생은 잘 적응한다.</a:t>
             </a:r>
           </a:p>
           <a:p>
@@ -17095,7 +17095,7 @@
                 </a:solidFill>
                 <a:latin typeface="맑은 고딕"/>
               </a:rPr>
-              <a:t>→ α=0.08, WM=5 같은 학생은 같은 강의계획서에서 훨씬 큰 어려움.</a:t>
+              <a:t>반면 α=0.08, WM=5인 학생은 같은 강의계획서에서 훨씬 큰 어려움을 겪는다.</a:t>
             </a:r>
           </a:p>
           <a:p>
@@ -17111,7 +17111,7 @@
                 </a:solidFill>
                 <a:latin typeface="맑은 고딕"/>
               </a:rPr>
-              <a:t>→ 우리는 이 1000명 중 "가장 약한 25%"가 보호되는지 본다.</a:t>
+              <a:t>1000명 중 가장 약한 25%가 보호되는지를 본다.</a:t>
             </a:r>
           </a:p>
         </p:txBody>
@@ -17512,7 +17512,7 @@
                 </a:solidFill>
                 <a:latin typeface="맑은 고딕"/>
               </a:rPr>
-              <a:t>이게 무슨 의미?</a:t>
+              <a:t>차트 해석</a:t>
             </a:r>
           </a:p>
         </p:txBody>
@@ -17567,7 +17567,7 @@
                 </a:solidFill>
                 <a:latin typeface="맑은 고딕"/>
               </a:rPr>
-              <a:t>평균 12.5초 vs 하위 22.3초.</a:t>
+              <a:t>평균 12.5초, 하위 22.3초.</a:t>
             </a:r>
           </a:p>
           <a:p>
@@ -17606,7 +17606,7 @@
                 </a:solidFill>
                 <a:latin typeface="맑은 고딕"/>
               </a:rPr>
-              <a:t>분산 평가 도입 시:</a:t>
+              <a:t>분산 평가 도입:</a:t>
             </a:r>
           </a:p>
           <a:p>
@@ -17622,7 +17622,7 @@
                 </a:solidFill>
                 <a:latin typeface="맑은 고딕"/>
               </a:rPr>
-              <a:t>평균 10.2초 vs 하위 13.5초.</a:t>
+              <a:t>평균 10.2초, 하위 13.5초.</a:t>
             </a:r>
           </a:p>
           <a:p>
@@ -17677,7 +17677,7 @@
                 </a:solidFill>
                 <a:latin typeface="맑은 고딕"/>
               </a:rPr>
-              <a:t>→ 보고서 핵심: 우리 개선안은 "평균"이 아니라 "분포의 꼬리"를 다듬는다</a:t>
+              <a:t>개선안은 평균이 아니라 분포의 꼬리를 다듬는다</a:t>
             </a:r>
           </a:p>
         </p:txBody>
@@ -19137,7 +19137,7 @@
                 </a:solidFill>
                 <a:latin typeface="맑은 고딕"/>
               </a:rPr>
-              <a:t>💡 한눈에 보이는 차이</a:t>
+              <a:t>한눈에 보이는 차이</a:t>
             </a:r>
           </a:p>
         </p:txBody>
@@ -19176,7 +19176,7 @@
                 </a:solidFill>
                 <a:latin typeface="맑은 고딕"/>
               </a:rPr>
-              <a:t>왼쪽 (친분 우선) — 팀장 옆 동그라미들만 분홍색. 친한 사람만 뽑힘.</a:t>
+              <a:t>왼쪽 (친분 우선): 팀장 주변 노드만 분홍색. 친한 사람만 뽑힘.</a:t>
             </a:r>
           </a:p>
         </p:txBody>
@@ -19215,7 +19215,7 @@
                 </a:solidFill>
                 <a:latin typeface="맑은 고딕"/>
               </a:rPr>
-              <a:t>오른쪽 (프로필 카드) — 그래프 전체에 골고루 분포. 다양한 역량 확보됨.</a:t>
+              <a:t>오른쪽 (프로필 카드): 그래프 전체에 골고루 분포. 다양한 역량 확보.</a:t>
             </a:r>
           </a:p>
         </p:txBody>
@@ -24360,7 +24360,7 @@
                 </a:solidFill>
                 <a:latin typeface="맑은 고딕"/>
               </a:rPr>
-              <a:t>강의계획서가 만들어내는 효과</a:t>
+              <a:t>강의계획서의 실제 효과</a:t>
             </a:r>
           </a:p>
         </p:txBody>
@@ -24438,7 +24438,7 @@
                 </a:solidFill>
                 <a:latin typeface="맑은 고딕"/>
               </a:rPr>
-              <a:t>→ 학생은 "오늘 안 가면 잡힐까?" 모름.</a:t>
+              <a:t>학생은 "오늘 안 가면 잡힐까" 알 수 없다.</a:t>
             </a:r>
           </a:p>
           <a:p>
@@ -24454,7 +24454,7 @@
                 </a:solidFill>
                 <a:latin typeface="맑은 고딕"/>
               </a:rPr>
-              <a:t>→ 슬롯머신처럼 매일 출석하게 됨.</a:t>
+              <a:t>슬롯머신과 같은 원리로 매일 출석하게 된다.</a:t>
             </a:r>
           </a:p>
           <a:p>
@@ -24470,7 +24470,7 @@
                 </a:solidFill>
                 <a:latin typeface="맑은 고딕"/>
               </a:rPr>
-              <a:t>→ 행동이 굳어서 한 학기 내내 출석.</a:t>
+              <a:t>행동이 굳어져 한 학기 내내 유지된다.</a:t>
             </a:r>
           </a:p>
         </p:txBody>
@@ -26488,7 +26488,7 @@
                 </a:solidFill>
                 <a:latin typeface="맑은 고딕"/>
               </a:rPr>
-              <a:t>강의계획서가 만들어내는 효과</a:t>
+              <a:t>강의계획서의 실제 효과</a:t>
             </a:r>
           </a:p>
         </p:txBody>
@@ -26566,7 +26566,7 @@
                 </a:solidFill>
                 <a:latin typeface="맑은 고딕"/>
               </a:rPr>
-              <a:t>→ 3월에 배운 내용을 6월 시험에서 떠올려야 함.</a:t>
+              <a:t>3월에 배운 내용을 6월 시험에서 떠올려야 한다.</a:t>
             </a:r>
           </a:p>
           <a:p>
@@ -26582,7 +26582,7 @@
                 </a:solidFill>
                 <a:latin typeface="맑은 고딕"/>
               </a:rPr>
-              <a:t>→ 80일이나 지났으니 기억이 거의 사라짐.</a:t>
+              <a:t>80일이 지났으니 기억이 거의 사라진 상태.</a:t>
             </a:r>
           </a:p>
           <a:p>
@@ -26598,7 +26598,7 @@
                 </a:solidFill>
                 <a:latin typeface="맑은 고딕"/>
               </a:rPr>
-              <a:t>→ 시험 직전 벼락치기로 몰림 (massed practice).</a:t>
+              <a:t>결과적으로 시험 직전 벼락치기로 몰린다.</a:t>
             </a:r>
           </a:p>
         </p:txBody>
@@ -26830,7 +26830,7 @@
                 </a:solidFill>
                 <a:latin typeface="맑은 고딕"/>
               </a:rPr>
-              <a:t>3.4× 빠른 인출</a:t>
+              <a:t>인출 3.4배 빠름</a:t>
             </a:r>
           </a:p>
         </p:txBody>

--- a/team_project/kickoff_2026-05-11.pptx
+++ b/team_project/kickoff_2026-05-11.pptx
@@ -31,6 +31,7 @@
     <p:sldId id="279" r:id="rId30"/>
     <p:sldId id="280" r:id="rId31"/>
     <p:sldId id="281" r:id="rId32"/>
+    <p:sldId id="282" r:id="rId33"/>
   </p:sldIdLst>
   <p:sldSz cx="12188952" cy="6858000" type="screen4x3"/>
   <p:notesSz cx="6858000" cy="9144000"/>
@@ -14414,7 +14415,7 @@
                 </a:solidFill>
                 <a:latin typeface="맑은 고딕"/>
               </a:rPr>
-              <a:t>설문 화면 1</a:t>
+              <a:t>OUR PROPOSAL</a:t>
             </a:r>
           </a:p>
         </p:txBody>
@@ -14453,7 +14454,7 @@
                 </a:solidFill>
                 <a:latin typeface="맑은 고딕"/>
               </a:rPr>
-              <a:t>응답자 화면 — 인트로 / 출석 시나리오</a:t>
+              <a:t>우리가 제안하는 개선안 3가지</a:t>
             </a:r>
           </a:p>
         </p:txBody>
@@ -14527,45 +14528,1476 @@
                 </a:solidFill>
                 <a:latin typeface="맑은 고딕"/>
               </a:rPr>
-              <a:t>21</a:t>
-            </a:r>
-          </a:p>
-        </p:txBody>
-      </p:sp>
-      <p:pic>
-        <p:nvPicPr>
-          <p:cNvPr id="7" name="Picture 6" descr="01_intro.png"/>
-          <p:cNvPicPr>
-            <a:picLocks noChangeAspect="1"/>
-          </p:cNvPicPr>
-          <p:nvPr/>
-        </p:nvPicPr>
-        <p:blipFill>
-          <a:blip r:embed="rId2"/>
-          <a:stretch>
-            <a:fillRect/>
-          </a:stretch>
-        </p:blipFill>
-        <p:spPr>
-          <a:xfrm>
-            <a:off x="640080" y="2194560"/>
-            <a:ext cx="5577840" cy="4310149"/>
-          </a:xfrm>
-          <a:prstGeom prst="rect">
-            <a:avLst/>
-          </a:prstGeom>
-        </p:spPr>
-      </p:pic>
-      <p:sp>
-        <p:nvSpPr>
-          <p:cNvPr id="8" name="TextBox 7"/>
-          <p:cNvSpPr txBox="1"/>
-          <p:nvPr/>
-        </p:nvSpPr>
-        <p:spPr>
-          <a:xfrm>
-            <a:off x="640080" y="6035040"/>
-            <a:ext cx="5577840" cy="320040"/>
+              <a:t>20</a:t>
+            </a:r>
+          </a:p>
+        </p:txBody>
+      </p:sp>
+      <p:sp>
+        <p:nvSpPr>
+          <p:cNvPr id="7" name="TextBox 6"/>
+          <p:cNvSpPr txBox="1"/>
+          <p:nvPr/>
+        </p:nvSpPr>
+        <p:spPr>
+          <a:xfrm>
+            <a:off x="640080" y="2057400"/>
+            <a:ext cx="10972800" cy="365760"/>
+          </a:xfrm>
+          <a:prstGeom prst="rect">
+            <a:avLst/>
+          </a:prstGeom>
+          <a:noFill/>
+        </p:spPr>
+        <p:txBody>
+          <a:bodyPr wrap="square" lIns="0" rIns="0" tIns="0" bIns="0">
+            <a:spAutoFit/>
+          </a:bodyPr>
+          <a:lstStyle/>
+          <a:p>
+            <a:pPr algn="l">
+              <a:lnSpc>
+                <a:spcPct val="125000"/>
+              </a:lnSpc>
+            </a:pPr>
+            <a:r>
+              <a:rPr sz="1200" b="0">
+                <a:solidFill>
+                  <a:srgbClr val="424B5C"/>
+                </a:solidFill>
+                <a:latin typeface="맑은 고딕"/>
+              </a:rPr>
+              <a:t>강의계획서의 4가지 규칙을 분석해보니, 이론에서 자동으로 개선안이 도출됩니다.</a:t>
+            </a:r>
+          </a:p>
+        </p:txBody>
+      </p:sp>
+      <p:sp>
+        <p:nvSpPr>
+          <p:cNvPr id="8" name="Rounded Rectangle 7"/>
+          <p:cNvSpPr/>
+          <p:nvPr/>
+        </p:nvSpPr>
+        <p:spPr>
+          <a:xfrm>
+            <a:off x="640080" y="2606040"/>
+            <a:ext cx="3566160" cy="3840480"/>
+          </a:xfrm>
+          <a:prstGeom prst="roundRect">
+            <a:avLst>
+              <a:gd name="adj" fmla="val 6000"/>
+            </a:avLst>
+          </a:prstGeom>
+          <a:solidFill>
+            <a:srgbClr val="FAFBFC"/>
+          </a:solidFill>
+          <a:ln w="9525">
+            <a:solidFill>
+              <a:srgbClr val="E5E7EB"/>
+            </a:solidFill>
+          </a:ln>
+        </p:spPr>
+        <p:style>
+          <a:lnRef idx="1">
+            <a:schemeClr val="accent1"/>
+          </a:lnRef>
+          <a:fillRef idx="3">
+            <a:schemeClr val="accent1"/>
+          </a:fillRef>
+          <a:effectRef idx="2">
+            <a:schemeClr val="accent1"/>
+          </a:effectRef>
+          <a:fontRef idx="minor">
+            <a:schemeClr val="lt1"/>
+          </a:fontRef>
+        </p:style>
+        <p:txBody>
+          <a:bodyPr rtlCol="0" anchor="ctr"/>
+          <a:lstStyle/>
+          <a:p>
+            <a:pPr algn="ctr"/>
+          </a:p>
+        </p:txBody>
+      </p:sp>
+      <p:sp>
+        <p:nvSpPr>
+          <p:cNvPr id="9" name="Rectangle 8"/>
+          <p:cNvSpPr/>
+          <p:nvPr/>
+        </p:nvSpPr>
+        <p:spPr>
+          <a:xfrm>
+            <a:off x="640080" y="2606040"/>
+            <a:ext cx="3566160" cy="548640"/>
+          </a:xfrm>
+          <a:prstGeom prst="rect">
+            <a:avLst/>
+          </a:prstGeom>
+          <a:solidFill>
+            <a:srgbClr val="F59E0B"/>
+          </a:solidFill>
+          <a:ln>
+            <a:noFill/>
+          </a:ln>
+        </p:spPr>
+        <p:style>
+          <a:lnRef idx="1">
+            <a:schemeClr val="accent1"/>
+          </a:lnRef>
+          <a:fillRef idx="3">
+            <a:schemeClr val="accent1"/>
+          </a:fillRef>
+          <a:effectRef idx="2">
+            <a:schemeClr val="accent1"/>
+          </a:effectRef>
+          <a:fontRef idx="minor">
+            <a:schemeClr val="lt1"/>
+          </a:fontRef>
+        </p:style>
+        <p:txBody>
+          <a:bodyPr rtlCol="0" anchor="ctr"/>
+          <a:lstStyle/>
+          <a:p>
+            <a:pPr algn="ctr"/>
+          </a:p>
+        </p:txBody>
+      </p:sp>
+      <p:sp>
+        <p:nvSpPr>
+          <p:cNvPr id="10" name="TextBox 9"/>
+          <p:cNvSpPr txBox="1"/>
+          <p:nvPr/>
+        </p:nvSpPr>
+        <p:spPr>
+          <a:xfrm>
+            <a:off x="868680" y="2697480"/>
+            <a:ext cx="914400" cy="365760"/>
+          </a:xfrm>
+          <a:prstGeom prst="rect">
+            <a:avLst/>
+          </a:prstGeom>
+          <a:noFill/>
+        </p:spPr>
+        <p:txBody>
+          <a:bodyPr wrap="square" lIns="0" rIns="0" tIns="0" bIns="0">
+            <a:spAutoFit/>
+          </a:bodyPr>
+          <a:lstStyle/>
+          <a:p>
+            <a:pPr algn="l">
+              <a:lnSpc>
+                <a:spcPct val="125000"/>
+              </a:lnSpc>
+            </a:pPr>
+            <a:r>
+              <a:rPr sz="1400" b="1">
+                <a:solidFill>
+                  <a:srgbClr val="FFFFFF"/>
+                </a:solidFill>
+                <a:latin typeface="맑은 고딕"/>
+              </a:rPr>
+              <a:t>01</a:t>
+            </a:r>
+          </a:p>
+        </p:txBody>
+      </p:sp>
+      <p:sp>
+        <p:nvSpPr>
+          <p:cNvPr id="11" name="TextBox 10"/>
+          <p:cNvSpPr txBox="1"/>
+          <p:nvPr/>
+        </p:nvSpPr>
+        <p:spPr>
+          <a:xfrm>
+            <a:off x="1508760" y="2697480"/>
+            <a:ext cx="2743200" cy="365760"/>
+          </a:xfrm>
+          <a:prstGeom prst="rect">
+            <a:avLst/>
+          </a:prstGeom>
+          <a:noFill/>
+        </p:spPr>
+        <p:txBody>
+          <a:bodyPr wrap="square" lIns="0" rIns="0" tIns="0" bIns="0">
+            <a:spAutoFit/>
+          </a:bodyPr>
+          <a:lstStyle/>
+          <a:p>
+            <a:pPr algn="l">
+              <a:lnSpc>
+                <a:spcPct val="125000"/>
+              </a:lnSpc>
+            </a:pPr>
+            <a:r>
+              <a:rPr sz="1400" b="1">
+                <a:solidFill>
+                  <a:srgbClr val="FFFFFF"/>
+                </a:solidFill>
+                <a:latin typeface="맑은 고딕"/>
+              </a:rPr>
+              <a:t>분산 평가</a:t>
+            </a:r>
+          </a:p>
+        </p:txBody>
+      </p:sp>
+      <p:sp>
+        <p:nvSpPr>
+          <p:cNvPr id="12" name="TextBox 11"/>
+          <p:cNvSpPr txBox="1"/>
+          <p:nvPr/>
+        </p:nvSpPr>
+        <p:spPr>
+          <a:xfrm>
+            <a:off x="868680" y="3246120"/>
+            <a:ext cx="3200400" cy="365760"/>
+          </a:xfrm>
+          <a:prstGeom prst="rect">
+            <a:avLst/>
+          </a:prstGeom>
+          <a:noFill/>
+        </p:spPr>
+        <p:txBody>
+          <a:bodyPr wrap="square" lIns="0" rIns="0" tIns="0" bIns="0">
+            <a:spAutoFit/>
+          </a:bodyPr>
+          <a:lstStyle/>
+          <a:p>
+            <a:pPr algn="l">
+              <a:lnSpc>
+                <a:spcPct val="125000"/>
+              </a:lnSpc>
+            </a:pPr>
+            <a:r>
+              <a:rPr sz="1000" b="1">
+                <a:solidFill>
+                  <a:srgbClr val="0F141F"/>
+                </a:solidFill>
+                <a:latin typeface="맑은 고딕"/>
+              </a:rPr>
+              <a:t>격주 퀴즈 6회 + 기말 40%</a:t>
+            </a:r>
+          </a:p>
+        </p:txBody>
+      </p:sp>
+      <p:sp>
+        <p:nvSpPr>
+          <p:cNvPr id="13" name="TextBox 12"/>
+          <p:cNvSpPr txBox="1"/>
+          <p:nvPr/>
+        </p:nvSpPr>
+        <p:spPr>
+          <a:xfrm>
+            <a:off x="868680" y="3703320"/>
+            <a:ext cx="3200400" cy="1005840"/>
+          </a:xfrm>
+          <a:prstGeom prst="rect">
+            <a:avLst/>
+          </a:prstGeom>
+          <a:noFill/>
+        </p:spPr>
+        <p:txBody>
+          <a:bodyPr wrap="square" lIns="0" rIns="0" tIns="0" bIns="0">
+            <a:spAutoFit/>
+          </a:bodyPr>
+          <a:lstStyle/>
+          <a:p>
+            <a:pPr algn="l">
+              <a:lnSpc>
+                <a:spcPct val="140000"/>
+              </a:lnSpc>
+            </a:pPr>
+            <a:r>
+              <a:rPr sz="1000" b="0">
+                <a:solidFill>
+                  <a:srgbClr val="424B5C"/>
+                </a:solidFill>
+                <a:latin typeface="맑은 고딕"/>
+              </a:rPr>
+              <a:t>기말 한 번이 아니라 격주마다 작은 퀴즈로 나누어 본다.</a:t>
+            </a:r>
+          </a:p>
+        </p:txBody>
+      </p:sp>
+      <p:cxnSp>
+        <p:nvCxnSpPr>
+          <p:cNvPr id="14" name="Connector 13"/>
+          <p:cNvCxnSpPr/>
+          <p:nvPr/>
+        </p:nvCxnSpPr>
+        <p:spPr>
+          <a:xfrm>
+            <a:off x="868680" y="4846320"/>
+            <a:ext cx="3108959" cy="0"/>
+          </a:xfrm>
+          <a:prstGeom prst="line">
+            <a:avLst/>
+          </a:prstGeom>
+          <a:ln w="19050">
+            <a:solidFill>
+              <a:srgbClr val="E5E7EB"/>
+            </a:solidFill>
+          </a:ln>
+        </p:spPr>
+        <p:style>
+          <a:lnRef idx="2">
+            <a:schemeClr val="accent1"/>
+          </a:lnRef>
+          <a:fillRef idx="0">
+            <a:schemeClr val="accent1"/>
+          </a:fillRef>
+          <a:effectRef idx="1">
+            <a:schemeClr val="accent1"/>
+          </a:effectRef>
+          <a:fontRef idx="minor">
+            <a:schemeClr val="tx1"/>
+          </a:fontRef>
+        </p:style>
+      </p:cxnSp>
+      <p:sp>
+        <p:nvSpPr>
+          <p:cNvPr id="15" name="TextBox 14"/>
+          <p:cNvSpPr txBox="1"/>
+          <p:nvPr/>
+        </p:nvSpPr>
+        <p:spPr>
+          <a:xfrm>
+            <a:off x="868680" y="4937760"/>
+            <a:ext cx="3200400" cy="320040"/>
+          </a:xfrm>
+          <a:prstGeom prst="rect">
+            <a:avLst/>
+          </a:prstGeom>
+          <a:noFill/>
+        </p:spPr>
+        <p:txBody>
+          <a:bodyPr wrap="square" lIns="0" rIns="0" tIns="0" bIns="0">
+            <a:spAutoFit/>
+          </a:bodyPr>
+          <a:lstStyle/>
+          <a:p>
+            <a:pPr algn="l">
+              <a:lnSpc>
+                <a:spcPct val="125000"/>
+              </a:lnSpc>
+            </a:pPr>
+            <a:r>
+              <a:rPr sz="900" b="1">
+                <a:solidFill>
+                  <a:srgbClr val="F59E0B"/>
+                </a:solidFill>
+                <a:latin typeface="맑은 고딕"/>
+              </a:rPr>
+              <a:t>효과</a:t>
+            </a:r>
+          </a:p>
+        </p:txBody>
+      </p:sp>
+      <p:sp>
+        <p:nvSpPr>
+          <p:cNvPr id="16" name="TextBox 15"/>
+          <p:cNvSpPr txBox="1"/>
+          <p:nvPr/>
+        </p:nvSpPr>
+        <p:spPr>
+          <a:xfrm>
+            <a:off x="868680" y="5212080"/>
+            <a:ext cx="3200400" cy="731520"/>
+          </a:xfrm>
+          <a:prstGeom prst="rect">
+            <a:avLst/>
+          </a:prstGeom>
+          <a:noFill/>
+        </p:spPr>
+        <p:txBody>
+          <a:bodyPr wrap="square" lIns="0" rIns="0" tIns="0" bIns="0">
+            <a:spAutoFit/>
+          </a:bodyPr>
+          <a:lstStyle/>
+          <a:p>
+            <a:pPr algn="l">
+              <a:lnSpc>
+                <a:spcPct val="130000"/>
+              </a:lnSpc>
+            </a:pPr>
+            <a:r>
+              <a:rPr sz="900" b="0">
+                <a:solidFill>
+                  <a:srgbClr val="424B5C"/>
+                </a:solidFill>
+                <a:latin typeface="맑은 고딕"/>
+              </a:rPr>
+              <a:t>기억이 사라지기 전에 다시 인출 → 학기말 벼락치기 방지</a:t>
+            </a:r>
+          </a:p>
+        </p:txBody>
+      </p:sp>
+      <p:cxnSp>
+        <p:nvCxnSpPr>
+          <p:cNvPr id="17" name="Connector 16"/>
+          <p:cNvCxnSpPr/>
+          <p:nvPr/>
+        </p:nvCxnSpPr>
+        <p:spPr>
+          <a:xfrm>
+            <a:off x="868680" y="5989320"/>
+            <a:ext cx="3108959" cy="0"/>
+          </a:xfrm>
+          <a:prstGeom prst="line">
+            <a:avLst/>
+          </a:prstGeom>
+          <a:ln w="19050">
+            <a:solidFill>
+              <a:srgbClr val="E5E7EB"/>
+            </a:solidFill>
+          </a:ln>
+        </p:spPr>
+        <p:style>
+          <a:lnRef idx="2">
+            <a:schemeClr val="accent1"/>
+          </a:lnRef>
+          <a:fillRef idx="0">
+            <a:schemeClr val="accent1"/>
+          </a:fillRef>
+          <a:effectRef idx="1">
+            <a:schemeClr val="accent1"/>
+          </a:effectRef>
+          <a:fontRef idx="minor">
+            <a:schemeClr val="tx1"/>
+          </a:fontRef>
+        </p:style>
+      </p:cxnSp>
+      <p:sp>
+        <p:nvSpPr>
+          <p:cNvPr id="18" name="TextBox 17"/>
+          <p:cNvSpPr txBox="1"/>
+          <p:nvPr/>
+        </p:nvSpPr>
+        <p:spPr>
+          <a:xfrm>
+            <a:off x="868680" y="6035040"/>
+            <a:ext cx="3200400" cy="320040"/>
+          </a:xfrm>
+          <a:prstGeom prst="rect">
+            <a:avLst/>
+          </a:prstGeom>
+          <a:noFill/>
+        </p:spPr>
+        <p:txBody>
+          <a:bodyPr wrap="square" lIns="0" rIns="0" tIns="0" bIns="0">
+            <a:spAutoFit/>
+          </a:bodyPr>
+          <a:lstStyle/>
+          <a:p>
+            <a:pPr algn="l">
+              <a:lnSpc>
+                <a:spcPct val="125000"/>
+              </a:lnSpc>
+            </a:pPr>
+            <a:r>
+              <a:rPr sz="900" b="1">
+                <a:solidFill>
+                  <a:srgbClr val="F59E0B"/>
+                </a:solidFill>
+                <a:latin typeface="맑은 고딕"/>
+              </a:rPr>
+              <a:t>근거 이론</a:t>
+            </a:r>
+          </a:p>
+        </p:txBody>
+      </p:sp>
+      <p:sp>
+        <p:nvSpPr>
+          <p:cNvPr id="19" name="TextBox 18"/>
+          <p:cNvSpPr txBox="1"/>
+          <p:nvPr/>
+        </p:nvSpPr>
+        <p:spPr>
+          <a:xfrm>
+            <a:off x="868680" y="6309360"/>
+            <a:ext cx="3200400" cy="320040"/>
+          </a:xfrm>
+          <a:prstGeom prst="rect">
+            <a:avLst/>
+          </a:prstGeom>
+          <a:noFill/>
+        </p:spPr>
+        <p:txBody>
+          <a:bodyPr wrap="square" lIns="0" rIns="0" tIns="0" bIns="0">
+            <a:spAutoFit/>
+          </a:bodyPr>
+          <a:lstStyle/>
+          <a:p>
+            <a:pPr algn="l">
+              <a:lnSpc>
+                <a:spcPct val="125000"/>
+              </a:lnSpc>
+            </a:pPr>
+            <a:r>
+              <a:rPr sz="900" b="0">
+                <a:solidFill>
+                  <a:srgbClr val="424B5C"/>
+                </a:solidFill>
+                <a:latin typeface="맑은 고딕"/>
+              </a:rPr>
+              <a:t>Forgetting Curve · 분산 학습</a:t>
+            </a:r>
+          </a:p>
+        </p:txBody>
+      </p:sp>
+      <p:sp>
+        <p:nvSpPr>
+          <p:cNvPr id="20" name="Rounded Rectangle 19"/>
+          <p:cNvSpPr/>
+          <p:nvPr/>
+        </p:nvSpPr>
+        <p:spPr>
+          <a:xfrm>
+            <a:off x="4389120" y="2606040"/>
+            <a:ext cx="3566160" cy="3840480"/>
+          </a:xfrm>
+          <a:prstGeom prst="roundRect">
+            <a:avLst>
+              <a:gd name="adj" fmla="val 6000"/>
+            </a:avLst>
+          </a:prstGeom>
+          <a:solidFill>
+            <a:srgbClr val="FAFBFC"/>
+          </a:solidFill>
+          <a:ln w="9525">
+            <a:solidFill>
+              <a:srgbClr val="E5E7EB"/>
+            </a:solidFill>
+          </a:ln>
+        </p:spPr>
+        <p:style>
+          <a:lnRef idx="1">
+            <a:schemeClr val="accent1"/>
+          </a:lnRef>
+          <a:fillRef idx="3">
+            <a:schemeClr val="accent1"/>
+          </a:fillRef>
+          <a:effectRef idx="2">
+            <a:schemeClr val="accent1"/>
+          </a:effectRef>
+          <a:fontRef idx="minor">
+            <a:schemeClr val="lt1"/>
+          </a:fontRef>
+        </p:style>
+        <p:txBody>
+          <a:bodyPr rtlCol="0" anchor="ctr"/>
+          <a:lstStyle/>
+          <a:p>
+            <a:pPr algn="ctr"/>
+          </a:p>
+        </p:txBody>
+      </p:sp>
+      <p:sp>
+        <p:nvSpPr>
+          <p:cNvPr id="21" name="Rectangle 20"/>
+          <p:cNvSpPr/>
+          <p:nvPr/>
+        </p:nvSpPr>
+        <p:spPr>
+          <a:xfrm>
+            <a:off x="4389120" y="2606040"/>
+            <a:ext cx="3566160" cy="548640"/>
+          </a:xfrm>
+          <a:prstGeom prst="rect">
+            <a:avLst/>
+          </a:prstGeom>
+          <a:solidFill>
+            <a:srgbClr val="4F46E5"/>
+          </a:solidFill>
+          <a:ln>
+            <a:noFill/>
+          </a:ln>
+        </p:spPr>
+        <p:style>
+          <a:lnRef idx="1">
+            <a:schemeClr val="accent1"/>
+          </a:lnRef>
+          <a:fillRef idx="3">
+            <a:schemeClr val="accent1"/>
+          </a:fillRef>
+          <a:effectRef idx="2">
+            <a:schemeClr val="accent1"/>
+          </a:effectRef>
+          <a:fontRef idx="minor">
+            <a:schemeClr val="lt1"/>
+          </a:fontRef>
+        </p:style>
+        <p:txBody>
+          <a:bodyPr rtlCol="0" anchor="ctr"/>
+          <a:lstStyle/>
+          <a:p>
+            <a:pPr algn="ctr"/>
+          </a:p>
+        </p:txBody>
+      </p:sp>
+      <p:sp>
+        <p:nvSpPr>
+          <p:cNvPr id="22" name="TextBox 21"/>
+          <p:cNvSpPr txBox="1"/>
+          <p:nvPr/>
+        </p:nvSpPr>
+        <p:spPr>
+          <a:xfrm>
+            <a:off x="4617720" y="2697480"/>
+            <a:ext cx="914400" cy="365760"/>
+          </a:xfrm>
+          <a:prstGeom prst="rect">
+            <a:avLst/>
+          </a:prstGeom>
+          <a:noFill/>
+        </p:spPr>
+        <p:txBody>
+          <a:bodyPr wrap="square" lIns="0" rIns="0" tIns="0" bIns="0">
+            <a:spAutoFit/>
+          </a:bodyPr>
+          <a:lstStyle/>
+          <a:p>
+            <a:pPr algn="l">
+              <a:lnSpc>
+                <a:spcPct val="125000"/>
+              </a:lnSpc>
+            </a:pPr>
+            <a:r>
+              <a:rPr sz="1400" b="1">
+                <a:solidFill>
+                  <a:srgbClr val="FFFFFF"/>
+                </a:solidFill>
+                <a:latin typeface="맑은 고딕"/>
+              </a:rPr>
+              <a:t>02</a:t>
+            </a:r>
+          </a:p>
+        </p:txBody>
+      </p:sp>
+      <p:sp>
+        <p:nvSpPr>
+          <p:cNvPr id="23" name="TextBox 22"/>
+          <p:cNvSpPr txBox="1"/>
+          <p:nvPr/>
+        </p:nvSpPr>
+        <p:spPr>
+          <a:xfrm>
+            <a:off x="5257800" y="2697480"/>
+            <a:ext cx="2743200" cy="365760"/>
+          </a:xfrm>
+          <a:prstGeom prst="rect">
+            <a:avLst/>
+          </a:prstGeom>
+          <a:noFill/>
+        </p:spPr>
+        <p:txBody>
+          <a:bodyPr wrap="square" lIns="0" rIns="0" tIns="0" bIns="0">
+            <a:spAutoFit/>
+          </a:bodyPr>
+          <a:lstStyle/>
+          <a:p>
+            <a:pPr algn="l">
+              <a:lnSpc>
+                <a:spcPct val="125000"/>
+              </a:lnSpc>
+            </a:pPr>
+            <a:r>
+              <a:rPr sz="1400" b="1">
+                <a:solidFill>
+                  <a:srgbClr val="FFFFFF"/>
+                </a:solidFill>
+                <a:latin typeface="맑은 고딕"/>
+              </a:rPr>
+              <a:t>프로필 카드</a:t>
+            </a:r>
+          </a:p>
+        </p:txBody>
+      </p:sp>
+      <p:sp>
+        <p:nvSpPr>
+          <p:cNvPr id="24" name="TextBox 23"/>
+          <p:cNvSpPr txBox="1"/>
+          <p:nvPr/>
+        </p:nvSpPr>
+        <p:spPr>
+          <a:xfrm>
+            <a:off x="4617720" y="3246120"/>
+            <a:ext cx="3200400" cy="365760"/>
+          </a:xfrm>
+          <a:prstGeom prst="rect">
+            <a:avLst/>
+          </a:prstGeom>
+          <a:noFill/>
+        </p:spPr>
+        <p:txBody>
+          <a:bodyPr wrap="square" lIns="0" rIns="0" tIns="0" bIns="0">
+            <a:spAutoFit/>
+          </a:bodyPr>
+          <a:lstStyle/>
+          <a:p>
+            <a:pPr algn="l">
+              <a:lnSpc>
+                <a:spcPct val="125000"/>
+              </a:lnSpc>
+            </a:pPr>
+            <a:r>
+              <a:rPr sz="1000" b="1">
+                <a:solidFill>
+                  <a:srgbClr val="0F141F"/>
+                </a:solidFill>
+                <a:latin typeface="맑은 고딕"/>
+              </a:rPr>
+              <a:t>후보별 4가지 정보를 시각화</a:t>
+            </a:r>
+          </a:p>
+        </p:txBody>
+      </p:sp>
+      <p:sp>
+        <p:nvSpPr>
+          <p:cNvPr id="25" name="TextBox 24"/>
+          <p:cNvSpPr txBox="1"/>
+          <p:nvPr/>
+        </p:nvSpPr>
+        <p:spPr>
+          <a:xfrm>
+            <a:off x="4617720" y="3703320"/>
+            <a:ext cx="3200400" cy="1005840"/>
+          </a:xfrm>
+          <a:prstGeom prst="rect">
+            <a:avLst/>
+          </a:prstGeom>
+          <a:noFill/>
+        </p:spPr>
+        <p:txBody>
+          <a:bodyPr wrap="square" lIns="0" rIns="0" tIns="0" bIns="0">
+            <a:spAutoFit/>
+          </a:bodyPr>
+          <a:lstStyle/>
+          <a:p>
+            <a:pPr algn="l">
+              <a:lnSpc>
+                <a:spcPct val="140000"/>
+              </a:lnSpc>
+            </a:pPr>
+            <a:r>
+              <a:rPr sz="1000" b="0">
+                <a:solidFill>
+                  <a:srgbClr val="424B5C"/>
+                </a:solidFill>
+                <a:latin typeface="맑은 고딕"/>
+              </a:rPr>
+              <a:t>팀장이 후보 평가할 때 역량·시간·관심·경험을 카드로 제공.</a:t>
+            </a:r>
+          </a:p>
+        </p:txBody>
+      </p:sp>
+      <p:cxnSp>
+        <p:nvCxnSpPr>
+          <p:cNvPr id="26" name="Connector 25"/>
+          <p:cNvCxnSpPr/>
+          <p:nvPr/>
+        </p:nvCxnSpPr>
+        <p:spPr>
+          <a:xfrm>
+            <a:off x="4617720" y="4846320"/>
+            <a:ext cx="3108959" cy="0"/>
+          </a:xfrm>
+          <a:prstGeom prst="line">
+            <a:avLst/>
+          </a:prstGeom>
+          <a:ln w="19050">
+            <a:solidFill>
+              <a:srgbClr val="E5E7EB"/>
+            </a:solidFill>
+          </a:ln>
+        </p:spPr>
+        <p:style>
+          <a:lnRef idx="2">
+            <a:schemeClr val="accent1"/>
+          </a:lnRef>
+          <a:fillRef idx="0">
+            <a:schemeClr val="accent1"/>
+          </a:fillRef>
+          <a:effectRef idx="1">
+            <a:schemeClr val="accent1"/>
+          </a:effectRef>
+          <a:fontRef idx="minor">
+            <a:schemeClr val="tx1"/>
+          </a:fontRef>
+        </p:style>
+      </p:cxnSp>
+      <p:sp>
+        <p:nvSpPr>
+          <p:cNvPr id="27" name="TextBox 26"/>
+          <p:cNvSpPr txBox="1"/>
+          <p:nvPr/>
+        </p:nvSpPr>
+        <p:spPr>
+          <a:xfrm>
+            <a:off x="4617720" y="4937760"/>
+            <a:ext cx="3200400" cy="320040"/>
+          </a:xfrm>
+          <a:prstGeom prst="rect">
+            <a:avLst/>
+          </a:prstGeom>
+          <a:noFill/>
+        </p:spPr>
+        <p:txBody>
+          <a:bodyPr wrap="square" lIns="0" rIns="0" tIns="0" bIns="0">
+            <a:spAutoFit/>
+          </a:bodyPr>
+          <a:lstStyle/>
+          <a:p>
+            <a:pPr algn="l">
+              <a:lnSpc>
+                <a:spcPct val="125000"/>
+              </a:lnSpc>
+            </a:pPr>
+            <a:r>
+              <a:rPr sz="900" b="1">
+                <a:solidFill>
+                  <a:srgbClr val="4F46E5"/>
+                </a:solidFill>
+                <a:latin typeface="맑은 고딕"/>
+              </a:rPr>
+              <a:t>효과</a:t>
+            </a:r>
+          </a:p>
+        </p:txBody>
+      </p:sp>
+      <p:sp>
+        <p:nvSpPr>
+          <p:cNvPr id="28" name="TextBox 27"/>
+          <p:cNvSpPr txBox="1"/>
+          <p:nvPr/>
+        </p:nvSpPr>
+        <p:spPr>
+          <a:xfrm>
+            <a:off x="4617720" y="5212080"/>
+            <a:ext cx="3200400" cy="731520"/>
+          </a:xfrm>
+          <a:prstGeom prst="rect">
+            <a:avLst/>
+          </a:prstGeom>
+          <a:noFill/>
+        </p:spPr>
+        <p:txBody>
+          <a:bodyPr wrap="square" lIns="0" rIns="0" tIns="0" bIns="0">
+            <a:spAutoFit/>
+          </a:bodyPr>
+          <a:lstStyle/>
+          <a:p>
+            <a:pPr algn="l">
+              <a:lnSpc>
+                <a:spcPct val="130000"/>
+              </a:lnSpc>
+            </a:pPr>
+            <a:r>
+              <a:rPr sz="900" b="0">
+                <a:solidFill>
+                  <a:srgbClr val="424B5C"/>
+                </a:solidFill>
+                <a:latin typeface="맑은 고딕"/>
+              </a:rPr>
+              <a:t>머리에 다 담을 필요 없이 외부 인터페이스로 비교 가능</a:t>
+            </a:r>
+          </a:p>
+        </p:txBody>
+      </p:sp>
+      <p:cxnSp>
+        <p:nvCxnSpPr>
+          <p:cNvPr id="29" name="Connector 28"/>
+          <p:cNvCxnSpPr/>
+          <p:nvPr/>
+        </p:nvCxnSpPr>
+        <p:spPr>
+          <a:xfrm>
+            <a:off x="4617720" y="5989320"/>
+            <a:ext cx="3108959" cy="0"/>
+          </a:xfrm>
+          <a:prstGeom prst="line">
+            <a:avLst/>
+          </a:prstGeom>
+          <a:ln w="19050">
+            <a:solidFill>
+              <a:srgbClr val="E5E7EB"/>
+            </a:solidFill>
+          </a:ln>
+        </p:spPr>
+        <p:style>
+          <a:lnRef idx="2">
+            <a:schemeClr val="accent1"/>
+          </a:lnRef>
+          <a:fillRef idx="0">
+            <a:schemeClr val="accent1"/>
+          </a:fillRef>
+          <a:effectRef idx="1">
+            <a:schemeClr val="accent1"/>
+          </a:effectRef>
+          <a:fontRef idx="minor">
+            <a:schemeClr val="tx1"/>
+          </a:fontRef>
+        </p:style>
+      </p:cxnSp>
+      <p:sp>
+        <p:nvSpPr>
+          <p:cNvPr id="30" name="TextBox 29"/>
+          <p:cNvSpPr txBox="1"/>
+          <p:nvPr/>
+        </p:nvSpPr>
+        <p:spPr>
+          <a:xfrm>
+            <a:off x="4617720" y="6035040"/>
+            <a:ext cx="3200400" cy="320040"/>
+          </a:xfrm>
+          <a:prstGeom prst="rect">
+            <a:avLst/>
+          </a:prstGeom>
+          <a:noFill/>
+        </p:spPr>
+        <p:txBody>
+          <a:bodyPr wrap="square" lIns="0" rIns="0" tIns="0" bIns="0">
+            <a:spAutoFit/>
+          </a:bodyPr>
+          <a:lstStyle/>
+          <a:p>
+            <a:pPr algn="l">
+              <a:lnSpc>
+                <a:spcPct val="125000"/>
+              </a:lnSpc>
+            </a:pPr>
+            <a:r>
+              <a:rPr sz="900" b="1">
+                <a:solidFill>
+                  <a:srgbClr val="4F46E5"/>
+                </a:solidFill>
+                <a:latin typeface="맑은 고딕"/>
+              </a:rPr>
+              <a:t>근거 이론</a:t>
+            </a:r>
+          </a:p>
+        </p:txBody>
+      </p:sp>
+      <p:sp>
+        <p:nvSpPr>
+          <p:cNvPr id="31" name="TextBox 30"/>
+          <p:cNvSpPr txBox="1"/>
+          <p:nvPr/>
+        </p:nvSpPr>
+        <p:spPr>
+          <a:xfrm>
+            <a:off x="4617720" y="6309360"/>
+            <a:ext cx="3200400" cy="320040"/>
+          </a:xfrm>
+          <a:prstGeom prst="rect">
+            <a:avLst/>
+          </a:prstGeom>
+          <a:noFill/>
+        </p:spPr>
+        <p:txBody>
+          <a:bodyPr wrap="square" lIns="0" rIns="0" tIns="0" bIns="0">
+            <a:spAutoFit/>
+          </a:bodyPr>
+          <a:lstStyle/>
+          <a:p>
+            <a:pPr algn="l">
+              <a:lnSpc>
+                <a:spcPct val="125000"/>
+              </a:lnSpc>
+            </a:pPr>
+            <a:r>
+              <a:rPr sz="900" b="0">
+                <a:solidFill>
+                  <a:srgbClr val="424B5C"/>
+                </a:solidFill>
+                <a:latin typeface="맑은 고딕"/>
+              </a:rPr>
+              <a:t>Working Memory · 7±2 한계 우회</a:t>
+            </a:r>
+          </a:p>
+        </p:txBody>
+      </p:sp>
+      <p:sp>
+        <p:nvSpPr>
+          <p:cNvPr id="32" name="Rounded Rectangle 31"/>
+          <p:cNvSpPr/>
+          <p:nvPr/>
+        </p:nvSpPr>
+        <p:spPr>
+          <a:xfrm>
+            <a:off x="8138159" y="2606040"/>
+            <a:ext cx="3566160" cy="3840480"/>
+          </a:xfrm>
+          <a:prstGeom prst="roundRect">
+            <a:avLst>
+              <a:gd name="adj" fmla="val 6000"/>
+            </a:avLst>
+          </a:prstGeom>
+          <a:solidFill>
+            <a:srgbClr val="FAFBFC"/>
+          </a:solidFill>
+          <a:ln w="9525">
+            <a:solidFill>
+              <a:srgbClr val="E5E7EB"/>
+            </a:solidFill>
+          </a:ln>
+        </p:spPr>
+        <p:style>
+          <a:lnRef idx="1">
+            <a:schemeClr val="accent1"/>
+          </a:lnRef>
+          <a:fillRef idx="3">
+            <a:schemeClr val="accent1"/>
+          </a:fillRef>
+          <a:effectRef idx="2">
+            <a:schemeClr val="accent1"/>
+          </a:effectRef>
+          <a:fontRef idx="minor">
+            <a:schemeClr val="lt1"/>
+          </a:fontRef>
+        </p:style>
+        <p:txBody>
+          <a:bodyPr rtlCol="0" anchor="ctr"/>
+          <a:lstStyle/>
+          <a:p>
+            <a:pPr algn="ctr"/>
+          </a:p>
+        </p:txBody>
+      </p:sp>
+      <p:sp>
+        <p:nvSpPr>
+          <p:cNvPr id="33" name="Rectangle 32"/>
+          <p:cNvSpPr/>
+          <p:nvPr/>
+        </p:nvSpPr>
+        <p:spPr>
+          <a:xfrm>
+            <a:off x="8138159" y="2606040"/>
+            <a:ext cx="3566160" cy="548640"/>
+          </a:xfrm>
+          <a:prstGeom prst="rect">
+            <a:avLst/>
+          </a:prstGeom>
+          <a:solidFill>
+            <a:srgbClr val="EC4899"/>
+          </a:solidFill>
+          <a:ln>
+            <a:noFill/>
+          </a:ln>
+        </p:spPr>
+        <p:style>
+          <a:lnRef idx="1">
+            <a:schemeClr val="accent1"/>
+          </a:lnRef>
+          <a:fillRef idx="3">
+            <a:schemeClr val="accent1"/>
+          </a:fillRef>
+          <a:effectRef idx="2">
+            <a:schemeClr val="accent1"/>
+          </a:effectRef>
+          <a:fontRef idx="minor">
+            <a:schemeClr val="lt1"/>
+          </a:fontRef>
+        </p:style>
+        <p:txBody>
+          <a:bodyPr rtlCol="0" anchor="ctr"/>
+          <a:lstStyle/>
+          <a:p>
+            <a:pPr algn="ctr"/>
+          </a:p>
+        </p:txBody>
+      </p:sp>
+      <p:sp>
+        <p:nvSpPr>
+          <p:cNvPr id="34" name="TextBox 33"/>
+          <p:cNvSpPr txBox="1"/>
+          <p:nvPr/>
+        </p:nvSpPr>
+        <p:spPr>
+          <a:xfrm>
+            <a:off x="8366759" y="2697480"/>
+            <a:ext cx="914400" cy="365760"/>
+          </a:xfrm>
+          <a:prstGeom prst="rect">
+            <a:avLst/>
+          </a:prstGeom>
+          <a:noFill/>
+        </p:spPr>
+        <p:txBody>
+          <a:bodyPr wrap="square" lIns="0" rIns="0" tIns="0" bIns="0">
+            <a:spAutoFit/>
+          </a:bodyPr>
+          <a:lstStyle/>
+          <a:p>
+            <a:pPr algn="l">
+              <a:lnSpc>
+                <a:spcPct val="125000"/>
+              </a:lnSpc>
+            </a:pPr>
+            <a:r>
+              <a:rPr sz="1400" b="1">
+                <a:solidFill>
+                  <a:srgbClr val="FFFFFF"/>
+                </a:solidFill>
+                <a:latin typeface="맑은 고딕"/>
+              </a:rPr>
+              <a:t>03</a:t>
+            </a:r>
+          </a:p>
+        </p:txBody>
+      </p:sp>
+      <p:sp>
+        <p:nvSpPr>
+          <p:cNvPr id="35" name="TextBox 34"/>
+          <p:cNvSpPr txBox="1"/>
+          <p:nvPr/>
+        </p:nvSpPr>
+        <p:spPr>
+          <a:xfrm>
+            <a:off x="9006839" y="2697480"/>
+            <a:ext cx="2743200" cy="365760"/>
+          </a:xfrm>
+          <a:prstGeom prst="rect">
+            <a:avLst/>
+          </a:prstGeom>
+          <a:noFill/>
+        </p:spPr>
+        <p:txBody>
+          <a:bodyPr wrap="square" lIns="0" rIns="0" tIns="0" bIns="0">
+            <a:spAutoFit/>
+          </a:bodyPr>
+          <a:lstStyle/>
+          <a:p>
+            <a:pPr algn="l">
+              <a:lnSpc>
+                <a:spcPct val="125000"/>
+              </a:lnSpc>
+            </a:pPr>
+            <a:r>
+              <a:rPr sz="1400" b="1">
+                <a:solidFill>
+                  <a:srgbClr val="FFFFFF"/>
+                </a:solidFill>
+                <a:latin typeface="맑은 고딕"/>
+              </a:rPr>
+              <a:t>명확한 가산</a:t>
+            </a:r>
+          </a:p>
+        </p:txBody>
+      </p:sp>
+      <p:sp>
+        <p:nvSpPr>
+          <p:cNvPr id="36" name="TextBox 35"/>
+          <p:cNvSpPr txBox="1"/>
+          <p:nvPr/>
+        </p:nvSpPr>
+        <p:spPr>
+          <a:xfrm>
+            <a:off x="8366759" y="3246120"/>
+            <a:ext cx="3200400" cy="365760"/>
+          </a:xfrm>
+          <a:prstGeom prst="rect">
+            <a:avLst/>
+          </a:prstGeom>
+          <a:noFill/>
+        </p:spPr>
+        <p:txBody>
+          <a:bodyPr wrap="square" lIns="0" rIns="0" tIns="0" bIns="0">
+            <a:spAutoFit/>
+          </a:bodyPr>
+          <a:lstStyle/>
+          <a:p>
+            <a:pPr algn="l">
+              <a:lnSpc>
+                <a:spcPct val="125000"/>
+              </a:lnSpc>
+            </a:pPr>
+            <a:r>
+              <a:rPr sz="1000" b="1">
+                <a:solidFill>
+                  <a:srgbClr val="0F141F"/>
+                </a:solidFill>
+                <a:latin typeface="맑은 고딕"/>
+              </a:rPr>
+              <a:t>감점 표현 → +10 가산으로 통일</a:t>
+            </a:r>
+          </a:p>
+        </p:txBody>
+      </p:sp>
+      <p:sp>
+        <p:nvSpPr>
+          <p:cNvPr id="37" name="TextBox 36"/>
+          <p:cNvSpPr txBox="1"/>
+          <p:nvPr/>
+        </p:nvSpPr>
+        <p:spPr>
+          <a:xfrm>
+            <a:off x="8366759" y="3703320"/>
+            <a:ext cx="3200400" cy="1005840"/>
+          </a:xfrm>
+          <a:prstGeom prst="rect">
+            <a:avLst/>
+          </a:prstGeom>
+          <a:noFill/>
+        </p:spPr>
+        <p:txBody>
+          <a:bodyPr wrap="square" lIns="0" rIns="0" tIns="0" bIns="0">
+            <a:spAutoFit/>
+          </a:bodyPr>
+          <a:lstStyle/>
+          <a:p>
+            <a:pPr algn="l">
+              <a:lnSpc>
+                <a:spcPct val="140000"/>
+              </a:lnSpc>
+            </a:pPr>
+            <a:r>
+              <a:rPr sz="1000" b="0">
+                <a:solidFill>
+                  <a:srgbClr val="424B5C"/>
+                </a:solidFill>
+                <a:latin typeface="맑은 고딕"/>
+              </a:rPr>
+              <a:t>모호한 "현저히 낮은 경우 감점" 대신 명확한 가산만 사용.</a:t>
+            </a:r>
+          </a:p>
+        </p:txBody>
+      </p:sp>
+      <p:cxnSp>
+        <p:nvCxnSpPr>
+          <p:cNvPr id="38" name="Connector 37"/>
+          <p:cNvCxnSpPr/>
+          <p:nvPr/>
+        </p:nvCxnSpPr>
+        <p:spPr>
+          <a:xfrm>
+            <a:off x="8366759" y="4846320"/>
+            <a:ext cx="3108960" cy="0"/>
+          </a:xfrm>
+          <a:prstGeom prst="line">
+            <a:avLst/>
+          </a:prstGeom>
+          <a:ln w="19050">
+            <a:solidFill>
+              <a:srgbClr val="E5E7EB"/>
+            </a:solidFill>
+          </a:ln>
+        </p:spPr>
+        <p:style>
+          <a:lnRef idx="2">
+            <a:schemeClr val="accent1"/>
+          </a:lnRef>
+          <a:fillRef idx="0">
+            <a:schemeClr val="accent1"/>
+          </a:fillRef>
+          <a:effectRef idx="1">
+            <a:schemeClr val="accent1"/>
+          </a:effectRef>
+          <a:fontRef idx="minor">
+            <a:schemeClr val="tx1"/>
+          </a:fontRef>
+        </p:style>
+      </p:cxnSp>
+      <p:sp>
+        <p:nvSpPr>
+          <p:cNvPr id="39" name="TextBox 38"/>
+          <p:cNvSpPr txBox="1"/>
+          <p:nvPr/>
+        </p:nvSpPr>
+        <p:spPr>
+          <a:xfrm>
+            <a:off x="8366759" y="4937760"/>
+            <a:ext cx="3200400" cy="320040"/>
+          </a:xfrm>
+          <a:prstGeom prst="rect">
+            <a:avLst/>
+          </a:prstGeom>
+          <a:noFill/>
+        </p:spPr>
+        <p:txBody>
+          <a:bodyPr wrap="square" lIns="0" rIns="0" tIns="0" bIns="0">
+            <a:spAutoFit/>
+          </a:bodyPr>
+          <a:lstStyle/>
+          <a:p>
+            <a:pPr algn="l">
+              <a:lnSpc>
+                <a:spcPct val="125000"/>
+              </a:lnSpc>
+            </a:pPr>
+            <a:r>
+              <a:rPr sz="900" b="1">
+                <a:solidFill>
+                  <a:srgbClr val="EC4899"/>
+                </a:solidFill>
+                <a:latin typeface="맑은 고딕"/>
+              </a:rPr>
+              <a:t>효과</a:t>
+            </a:r>
+          </a:p>
+        </p:txBody>
+      </p:sp>
+      <p:sp>
+        <p:nvSpPr>
+          <p:cNvPr id="40" name="TextBox 39"/>
+          <p:cNvSpPr txBox="1"/>
+          <p:nvPr/>
+        </p:nvSpPr>
+        <p:spPr>
+          <a:xfrm>
+            <a:off x="8366759" y="5212080"/>
+            <a:ext cx="3200400" cy="731520"/>
+          </a:xfrm>
+          <a:prstGeom prst="rect">
+            <a:avLst/>
+          </a:prstGeom>
+          <a:noFill/>
+        </p:spPr>
+        <p:txBody>
+          <a:bodyPr wrap="square" lIns="0" rIns="0" tIns="0" bIns="0">
+            <a:spAutoFit/>
+          </a:bodyPr>
+          <a:lstStyle/>
+          <a:p>
+            <a:pPr algn="l">
+              <a:lnSpc>
+                <a:spcPct val="130000"/>
+              </a:lnSpc>
+            </a:pPr>
+            <a:r>
+              <a:rPr sz="900" b="0">
+                <a:solidFill>
+                  <a:srgbClr val="424B5C"/>
+                </a:solidFill>
+                <a:latin typeface="맑은 고딕"/>
+              </a:rPr>
+              <a:t>학생이 모호한 위협 회피가 아니라 보상으로 동기 부여</a:t>
+            </a:r>
+          </a:p>
+        </p:txBody>
+      </p:sp>
+      <p:cxnSp>
+        <p:nvCxnSpPr>
+          <p:cNvPr id="41" name="Connector 40"/>
+          <p:cNvCxnSpPr/>
+          <p:nvPr/>
+        </p:nvCxnSpPr>
+        <p:spPr>
+          <a:xfrm>
+            <a:off x="8366759" y="5989320"/>
+            <a:ext cx="3108960" cy="0"/>
+          </a:xfrm>
+          <a:prstGeom prst="line">
+            <a:avLst/>
+          </a:prstGeom>
+          <a:ln w="19050">
+            <a:solidFill>
+              <a:srgbClr val="E5E7EB"/>
+            </a:solidFill>
+          </a:ln>
+        </p:spPr>
+        <p:style>
+          <a:lnRef idx="2">
+            <a:schemeClr val="accent1"/>
+          </a:lnRef>
+          <a:fillRef idx="0">
+            <a:schemeClr val="accent1"/>
+          </a:fillRef>
+          <a:effectRef idx="1">
+            <a:schemeClr val="accent1"/>
+          </a:effectRef>
+          <a:fontRef idx="minor">
+            <a:schemeClr val="tx1"/>
+          </a:fontRef>
+        </p:style>
+      </p:cxnSp>
+      <p:sp>
+        <p:nvSpPr>
+          <p:cNvPr id="42" name="TextBox 41"/>
+          <p:cNvSpPr txBox="1"/>
+          <p:nvPr/>
+        </p:nvSpPr>
+        <p:spPr>
+          <a:xfrm>
+            <a:off x="8366759" y="6035040"/>
+            <a:ext cx="3200400" cy="320040"/>
+          </a:xfrm>
+          <a:prstGeom prst="rect">
+            <a:avLst/>
+          </a:prstGeom>
+          <a:noFill/>
+        </p:spPr>
+        <p:txBody>
+          <a:bodyPr wrap="square" lIns="0" rIns="0" tIns="0" bIns="0">
+            <a:spAutoFit/>
+          </a:bodyPr>
+          <a:lstStyle/>
+          <a:p>
+            <a:pPr algn="l">
+              <a:lnSpc>
+                <a:spcPct val="125000"/>
+              </a:lnSpc>
+            </a:pPr>
+            <a:r>
+              <a:rPr sz="900" b="1">
+                <a:solidFill>
+                  <a:srgbClr val="EC4899"/>
+                </a:solidFill>
+                <a:latin typeface="맑은 고딕"/>
+              </a:rPr>
+              <a:t>근거 이론</a:t>
+            </a:r>
+          </a:p>
+        </p:txBody>
+      </p:sp>
+      <p:sp>
+        <p:nvSpPr>
+          <p:cNvPr id="43" name="TextBox 42"/>
+          <p:cNvSpPr txBox="1"/>
+          <p:nvPr/>
+        </p:nvSpPr>
+        <p:spPr>
+          <a:xfrm>
+            <a:off x="8366759" y="6309360"/>
+            <a:ext cx="3200400" cy="320040"/>
+          </a:xfrm>
+          <a:prstGeom prst="rect">
+            <a:avLst/>
+          </a:prstGeom>
+          <a:noFill/>
+        </p:spPr>
+        <p:txBody>
+          <a:bodyPr wrap="square" lIns="0" rIns="0" tIns="0" bIns="0">
+            <a:spAutoFit/>
+          </a:bodyPr>
+          <a:lstStyle/>
+          <a:p>
+            <a:pPr algn="l">
+              <a:lnSpc>
+                <a:spcPct val="125000"/>
+              </a:lnSpc>
+            </a:pPr>
+            <a:r>
+              <a:rPr sz="900" b="0">
+                <a:solidFill>
+                  <a:srgbClr val="424B5C"/>
+                </a:solidFill>
+                <a:latin typeface="맑은 고딕"/>
+              </a:rPr>
+              <a:t>Framing Effect · 손실 회피 제거</a:t>
+            </a:r>
+          </a:p>
+        </p:txBody>
+      </p:sp>
+      <p:sp>
+        <p:nvSpPr>
+          <p:cNvPr id="44" name="TextBox 43"/>
+          <p:cNvSpPr txBox="1"/>
+          <p:nvPr/>
+        </p:nvSpPr>
+        <p:spPr>
+          <a:xfrm>
+            <a:off x="640080" y="6583680"/>
+            <a:ext cx="10972800" cy="274320"/>
           </a:xfrm>
           <a:prstGeom prst="rect">
             <a:avLst/>
@@ -14584,154 +16016,13 @@
               </a:lnSpc>
             </a:pPr>
             <a:r>
-              <a:rPr sz="1200" b="1">
-                <a:solidFill>
-                  <a:srgbClr val="0F141F"/>
-                </a:solidFill>
-                <a:latin typeface="맑은 고딕"/>
-              </a:rPr>
-              <a:t>인트로 화면</a:t>
-            </a:r>
-          </a:p>
-        </p:txBody>
-      </p:sp>
-      <p:sp>
-        <p:nvSpPr>
-          <p:cNvPr id="9" name="TextBox 8"/>
-          <p:cNvSpPr txBox="1"/>
-          <p:nvPr/>
-        </p:nvSpPr>
-        <p:spPr>
-          <a:xfrm>
-            <a:off x="640080" y="6355080"/>
-            <a:ext cx="5577840" cy="274320"/>
-          </a:xfrm>
-          <a:prstGeom prst="rect">
-            <a:avLst/>
-          </a:prstGeom>
-          <a:noFill/>
-        </p:spPr>
-        <p:txBody>
-          <a:bodyPr wrap="square" lIns="0" rIns="0" tIns="0" bIns="0">
-            <a:spAutoFit/>
-          </a:bodyPr>
-          <a:lstStyle/>
-          <a:p>
-            <a:pPr algn="ctr">
-              <a:lnSpc>
-                <a:spcPct val="125000"/>
-              </a:lnSpc>
-            </a:pPr>
-            <a:r>
               <a:rPr sz="1000" b="0">
                 <a:solidFill>
                   <a:srgbClr val="8B95A7"/>
                 </a:solidFill>
                 <a:latin typeface="맑은 고딕"/>
               </a:rPr>
-              <a:t>16 유형 미리 보여주고 닉네임 입력 후 시작</a:t>
-            </a:r>
-          </a:p>
-        </p:txBody>
-      </p:sp>
-      <p:pic>
-        <p:nvPicPr>
-          <p:cNvPr id="10" name="Picture 9" descr="02_attendance.png"/>
-          <p:cNvPicPr>
-            <a:picLocks noChangeAspect="1"/>
-          </p:cNvPicPr>
-          <p:nvPr/>
-        </p:nvPicPr>
-        <p:blipFill>
-          <a:blip r:embed="rId3"/>
-          <a:stretch>
-            <a:fillRect/>
-          </a:stretch>
-        </p:blipFill>
-        <p:spPr>
-          <a:xfrm>
-            <a:off x="6355080" y="2194560"/>
-            <a:ext cx="5440680" cy="4204162"/>
-          </a:xfrm>
-          <a:prstGeom prst="rect">
-            <a:avLst/>
-          </a:prstGeom>
-        </p:spPr>
-      </p:pic>
-      <p:sp>
-        <p:nvSpPr>
-          <p:cNvPr id="11" name="TextBox 10"/>
-          <p:cNvSpPr txBox="1"/>
-          <p:nvPr/>
-        </p:nvSpPr>
-        <p:spPr>
-          <a:xfrm>
-            <a:off x="6355080" y="6035040"/>
-            <a:ext cx="5440680" cy="320040"/>
-          </a:xfrm>
-          <a:prstGeom prst="rect">
-            <a:avLst/>
-          </a:prstGeom>
-          <a:noFill/>
-        </p:spPr>
-        <p:txBody>
-          <a:bodyPr wrap="square" lIns="0" rIns="0" tIns="0" bIns="0">
-            <a:spAutoFit/>
-          </a:bodyPr>
-          <a:lstStyle/>
-          <a:p>
-            <a:pPr algn="ctr">
-              <a:lnSpc>
-                <a:spcPct val="125000"/>
-              </a:lnSpc>
-            </a:pPr>
-            <a:r>
-              <a:rPr sz="1200" b="1">
-                <a:solidFill>
-                  <a:srgbClr val="0F141F"/>
-                </a:solidFill>
-                <a:latin typeface="맑은 고딕"/>
-              </a:rPr>
-              <a:t>출석 정책 비교 화면</a:t>
-            </a:r>
-          </a:p>
-        </p:txBody>
-      </p:sp>
-      <p:sp>
-        <p:nvSpPr>
-          <p:cNvPr id="12" name="TextBox 11"/>
-          <p:cNvSpPr txBox="1"/>
-          <p:nvPr/>
-        </p:nvSpPr>
-        <p:spPr>
-          <a:xfrm>
-            <a:off x="6355080" y="6355080"/>
-            <a:ext cx="5440680" cy="274320"/>
-          </a:xfrm>
-          <a:prstGeom prst="rect">
-            <a:avLst/>
-          </a:prstGeom>
-          <a:noFill/>
-        </p:spPr>
-        <p:txBody>
-          <a:bodyPr wrap="square" lIns="0" rIns="0" tIns="0" bIns="0">
-            <a:spAutoFit/>
-          </a:bodyPr>
-          <a:lstStyle/>
-          <a:p>
-            <a:pPr algn="ctr">
-              <a:lnSpc>
-                <a:spcPct val="125000"/>
-              </a:lnSpc>
-            </a:pPr>
-            <a:r>
-              <a:rPr sz="1000" b="0">
-                <a:solidFill>
-                  <a:srgbClr val="8B95A7"/>
-                </a:solidFill>
-                <a:latin typeface="맑은 고딕"/>
-              </a:rPr>
-              <a:t>3개 정책에서 각각 결석 의도를 골라요</a:t>
+              <a:t>T1 설문은 이 개선안이 학생 인식을 바꾸는지, T2 시뮬은 약한 학생도 도와주는지 검증</a:t>
             </a:r>
           </a:p>
         </p:txBody>
@@ -14831,7 +16122,7 @@
                 </a:solidFill>
                 <a:latin typeface="맑은 고딕"/>
               </a:rPr>
-              <a:t>설문 화면 2</a:t>
+              <a:t>설문 화면 1</a:t>
             </a:r>
           </a:p>
         </p:txBody>
@@ -14870,7 +16161,7 @@
                 </a:solidFill>
                 <a:latin typeface="맑은 고딕"/>
               </a:rPr>
-              <a:t>응답자 화면 — 팀장 인센티브 / 팀원 지명</a:t>
+              <a:t>응답자 화면 — 인트로 / 출석 시나리오</a:t>
             </a:r>
           </a:p>
         </p:txBody>
@@ -14944,14 +16235,14 @@
                 </a:solidFill>
                 <a:latin typeface="맑은 고딕"/>
               </a:rPr>
-              <a:t>22</a:t>
+              <a:t>21</a:t>
             </a:r>
           </a:p>
         </p:txBody>
       </p:sp>
       <p:pic>
         <p:nvPicPr>
-          <p:cNvPr id="7" name="Picture 6" descr="03_framing.png"/>
+          <p:cNvPr id="7" name="Picture 6" descr="01_intro.png"/>
           <p:cNvPicPr>
             <a:picLocks noChangeAspect="1"/>
           </p:cNvPicPr>
@@ -15007,7 +16298,7 @@
                 </a:solidFill>
                 <a:latin typeface="맑은 고딕"/>
               </a:rPr>
-              <a:t>팀장 인센티브 화면</a:t>
+              <a:t>인트로 화면</a:t>
             </a:r>
           </a:p>
         </p:txBody>
@@ -15046,14 +16337,14 @@
                 </a:solidFill>
                 <a:latin typeface="맑은 고딕"/>
               </a:rPr>
-              <a:t>응답자 절반은 +10 가산, 절반은 모호한 감점 표현</a:t>
+              <a:t>16 유형 미리 보여주고 닉네임 입력 후 시작</a:t>
             </a:r>
           </a:p>
         </p:txBody>
       </p:sp>
       <p:pic>
         <p:nvPicPr>
-          <p:cNvPr id="10" name="Picture 9" descr="04_team.png"/>
+          <p:cNvPr id="10" name="Picture 9" descr="02_attendance.png"/>
           <p:cNvPicPr>
             <a:picLocks noChangeAspect="1"/>
           </p:cNvPicPr>
@@ -15109,7 +16400,7 @@
                 </a:solidFill>
                 <a:latin typeface="맑은 고딕"/>
               </a:rPr>
-              <a:t>팀원 직접 지명 화면</a:t>
+              <a:t>출석 정책 비교 화면</a:t>
             </a:r>
           </a:p>
         </p:txBody>
@@ -15148,7 +16439,7 @@
                 </a:solidFill>
                 <a:latin typeface="맑은 고딕"/>
               </a:rPr>
-              <a:t>후보 N명 중 2명 지명 (강의계획서 규칙)</a:t>
+              <a:t>3개 정책에서 각각 결석 의도를 골라요</a:t>
             </a:r>
           </a:p>
         </p:txBody>
@@ -15248,7 +16539,7 @@
                 </a:solidFill>
                 <a:latin typeface="맑은 고딕"/>
               </a:rPr>
-              <a:t>T2 · 컴퓨터 시뮬레이션</a:t>
+              <a:t>설문 화면 2</a:t>
             </a:r>
           </a:p>
         </p:txBody>
@@ -15287,7 +16578,7 @@
                 </a:solidFill>
                 <a:latin typeface="맑은 고딕"/>
               </a:rPr>
-              <a:t>가상 학생 1000명을 만들어 "약한 학생도 보호되는지" 본다</a:t>
+              <a:t>응답자 화면 — 팀장 인센티브 / 팀원 지명</a:t>
             </a:r>
           </a:p>
         </p:txBody>
@@ -15366,202 +16657,168 @@
           </a:p>
         </p:txBody>
       </p:sp>
-      <p:sp>
-        <p:nvSpPr>
-          <p:cNvPr id="7" name="TextBox 6"/>
-          <p:cNvSpPr txBox="1"/>
-          <p:nvPr/>
-        </p:nvSpPr>
-        <p:spPr>
-          <a:xfrm>
-            <a:off x="640080" y="2103120"/>
-            <a:ext cx="10972800" cy="411480"/>
-          </a:xfrm>
-          <a:prstGeom prst="rect">
-            <a:avLst/>
-          </a:prstGeom>
-          <a:noFill/>
-        </p:spPr>
-        <p:txBody>
-          <a:bodyPr wrap="square" lIns="0" rIns="0" tIns="0" bIns="0">
-            <a:spAutoFit/>
-          </a:bodyPr>
-          <a:lstStyle/>
-          <a:p>
-            <a:pPr algn="l">
-              <a:lnSpc>
-                <a:spcPct val="125000"/>
-              </a:lnSpc>
-            </a:pPr>
-            <a:r>
-              <a:rPr sz="1500" b="1">
+      <p:pic>
+        <p:nvPicPr>
+          <p:cNvPr id="7" name="Picture 6" descr="03_framing.png"/>
+          <p:cNvPicPr>
+            <a:picLocks noChangeAspect="1"/>
+          </p:cNvPicPr>
+          <p:nvPr/>
+        </p:nvPicPr>
+        <p:blipFill>
+          <a:blip r:embed="rId2"/>
+          <a:stretch>
+            <a:fillRect/>
+          </a:stretch>
+        </p:blipFill>
+        <p:spPr>
+          <a:xfrm>
+            <a:off x="640080" y="2194560"/>
+            <a:ext cx="5577840" cy="4310149"/>
+          </a:xfrm>
+          <a:prstGeom prst="rect">
+            <a:avLst/>
+          </a:prstGeom>
+        </p:spPr>
+      </p:pic>
+      <p:sp>
+        <p:nvSpPr>
+          <p:cNvPr id="8" name="TextBox 7"/>
+          <p:cNvSpPr txBox="1"/>
+          <p:nvPr/>
+        </p:nvSpPr>
+        <p:spPr>
+          <a:xfrm>
+            <a:off x="640080" y="6035040"/>
+            <a:ext cx="5577840" cy="320040"/>
+          </a:xfrm>
+          <a:prstGeom prst="rect">
+            <a:avLst/>
+          </a:prstGeom>
+          <a:noFill/>
+        </p:spPr>
+        <p:txBody>
+          <a:bodyPr wrap="square" lIns="0" rIns="0" tIns="0" bIns="0">
+            <a:spAutoFit/>
+          </a:bodyPr>
+          <a:lstStyle/>
+          <a:p>
+            <a:pPr algn="ctr">
+              <a:lnSpc>
+                <a:spcPct val="125000"/>
+              </a:lnSpc>
+            </a:pPr>
+            <a:r>
+              <a:rPr sz="1200" b="1">
                 <a:solidFill>
                   <a:srgbClr val="0F141F"/>
                 </a:solidFill>
                 <a:latin typeface="맑은 고딕"/>
               </a:rPr>
-              <a:t>왜 1000명이나? 평균만 보면 가려지는 진실이 있다.</a:t>
-            </a:r>
-          </a:p>
-        </p:txBody>
-      </p:sp>
-      <p:sp>
-        <p:nvSpPr>
-          <p:cNvPr id="8" name="TextBox 7"/>
-          <p:cNvSpPr txBox="1"/>
-          <p:nvPr/>
-        </p:nvSpPr>
-        <p:spPr>
-          <a:xfrm>
-            <a:off x="640080" y="2560320"/>
-            <a:ext cx="10972800" cy="411480"/>
-          </a:xfrm>
-          <a:prstGeom prst="rect">
-            <a:avLst/>
-          </a:prstGeom>
-          <a:noFill/>
-        </p:spPr>
-        <p:txBody>
-          <a:bodyPr wrap="square" lIns="0" rIns="0" tIns="0" bIns="0">
-            <a:spAutoFit/>
-          </a:bodyPr>
-          <a:lstStyle/>
-          <a:p>
-            <a:pPr algn="l">
-              <a:lnSpc>
-                <a:spcPct val="125000"/>
-              </a:lnSpc>
-            </a:pPr>
-            <a:r>
-              <a:rPr sz="1300" b="0">
-                <a:solidFill>
-                  <a:srgbClr val="424B5C"/>
-                </a:solidFill>
-                <a:latin typeface="맑은 고딕"/>
-              </a:rPr>
-              <a:t>예: "평균 출석률 80%"라고 해도, 학습률 낮은 학생은 30%일 수 있음.</a:t>
-            </a:r>
-          </a:p>
-        </p:txBody>
-      </p:sp>
-      <p:cxnSp>
-        <p:nvCxnSpPr>
-          <p:cNvPr id="9" name="Connector 8"/>
-          <p:cNvCxnSpPr/>
-          <p:nvPr/>
-        </p:nvCxnSpPr>
-        <p:spPr>
-          <a:xfrm>
-            <a:off x="640080" y="3291840"/>
-            <a:ext cx="10881360" cy="0"/>
-          </a:xfrm>
-          <a:prstGeom prst="line">
-            <a:avLst/>
-          </a:prstGeom>
-          <a:ln w="19050">
-            <a:solidFill>
-              <a:srgbClr val="E5E7EB"/>
-            </a:solidFill>
-          </a:ln>
-        </p:spPr>
-        <p:style>
-          <a:lnRef idx="2">
-            <a:schemeClr val="accent1"/>
-          </a:lnRef>
-          <a:fillRef idx="0">
-            <a:schemeClr val="accent1"/>
-          </a:fillRef>
-          <a:effectRef idx="1">
-            <a:schemeClr val="accent1"/>
-          </a:effectRef>
-          <a:fontRef idx="minor">
-            <a:schemeClr val="tx1"/>
-          </a:fontRef>
-        </p:style>
-      </p:cxnSp>
-      <p:sp>
-        <p:nvSpPr>
-          <p:cNvPr id="10" name="TextBox 9"/>
-          <p:cNvSpPr txBox="1"/>
-          <p:nvPr/>
-        </p:nvSpPr>
-        <p:spPr>
-          <a:xfrm>
-            <a:off x="640080" y="3429000"/>
-            <a:ext cx="10972800" cy="365760"/>
-          </a:xfrm>
-          <a:prstGeom prst="rect">
-            <a:avLst/>
-          </a:prstGeom>
-          <a:noFill/>
-        </p:spPr>
-        <p:txBody>
-          <a:bodyPr wrap="square" lIns="0" rIns="0" tIns="0" bIns="0">
-            <a:spAutoFit/>
-          </a:bodyPr>
-          <a:lstStyle/>
-          <a:p>
-            <a:pPr algn="l">
-              <a:lnSpc>
-                <a:spcPct val="125000"/>
-              </a:lnSpc>
-            </a:pPr>
-            <a:r>
-              <a:rPr sz="1100" b="1">
-                <a:solidFill>
-                  <a:srgbClr val="4F46E5"/>
-                </a:solidFill>
-                <a:latin typeface="맑은 고딕"/>
-              </a:rPr>
-              <a:t>개인과제 → 팀과제 확장</a:t>
-            </a:r>
-          </a:p>
-        </p:txBody>
-      </p:sp>
-      <p:sp>
-        <p:nvSpPr>
-          <p:cNvPr id="11" name="Rounded Rectangle 10"/>
-          <p:cNvSpPr/>
-          <p:nvPr/>
-        </p:nvSpPr>
-        <p:spPr>
-          <a:xfrm>
-            <a:off x="640080" y="3840480"/>
-            <a:ext cx="5440680" cy="2377440"/>
-          </a:xfrm>
-          <a:prstGeom prst="roundRect">
-            <a:avLst>
-              <a:gd name="adj" fmla="val 6000"/>
-            </a:avLst>
-          </a:prstGeom>
-          <a:solidFill>
-            <a:srgbClr val="FAFBFC"/>
-          </a:solidFill>
-          <a:ln w="9525">
-            <a:solidFill>
-              <a:srgbClr val="E5E7EB"/>
-            </a:solidFill>
-          </a:ln>
-        </p:spPr>
-        <p:style>
-          <a:lnRef idx="1">
-            <a:schemeClr val="accent1"/>
-          </a:lnRef>
-          <a:fillRef idx="3">
-            <a:schemeClr val="accent1"/>
-          </a:fillRef>
-          <a:effectRef idx="2">
-            <a:schemeClr val="accent1"/>
-          </a:effectRef>
-          <a:fontRef idx="minor">
-            <a:schemeClr val="lt1"/>
-          </a:fontRef>
-        </p:style>
-        <p:txBody>
-          <a:bodyPr rtlCol="0" anchor="ctr"/>
-          <a:lstStyle/>
-          <a:p>
-            <a:pPr algn="ctr"/>
+              <a:t>팀장 인센티브 화면</a:t>
+            </a:r>
+          </a:p>
+        </p:txBody>
+      </p:sp>
+      <p:sp>
+        <p:nvSpPr>
+          <p:cNvPr id="9" name="TextBox 8"/>
+          <p:cNvSpPr txBox="1"/>
+          <p:nvPr/>
+        </p:nvSpPr>
+        <p:spPr>
+          <a:xfrm>
+            <a:off x="640080" y="6355080"/>
+            <a:ext cx="5577840" cy="274320"/>
+          </a:xfrm>
+          <a:prstGeom prst="rect">
+            <a:avLst/>
+          </a:prstGeom>
+          <a:noFill/>
+        </p:spPr>
+        <p:txBody>
+          <a:bodyPr wrap="square" lIns="0" rIns="0" tIns="0" bIns="0">
+            <a:spAutoFit/>
+          </a:bodyPr>
+          <a:lstStyle/>
+          <a:p>
+            <a:pPr algn="ctr">
+              <a:lnSpc>
+                <a:spcPct val="125000"/>
+              </a:lnSpc>
+            </a:pPr>
+            <a:r>
+              <a:rPr sz="1000" b="0">
+                <a:solidFill>
+                  <a:srgbClr val="8B95A7"/>
+                </a:solidFill>
+                <a:latin typeface="맑은 고딕"/>
+              </a:rPr>
+              <a:t>응답자 절반은 +10 가산, 절반은 모호한 감점 표현</a:t>
+            </a:r>
+          </a:p>
+        </p:txBody>
+      </p:sp>
+      <p:pic>
+        <p:nvPicPr>
+          <p:cNvPr id="10" name="Picture 9" descr="04_team.png"/>
+          <p:cNvPicPr>
+            <a:picLocks noChangeAspect="1"/>
+          </p:cNvPicPr>
+          <p:nvPr/>
+        </p:nvPicPr>
+        <p:blipFill>
+          <a:blip r:embed="rId3"/>
+          <a:stretch>
+            <a:fillRect/>
+          </a:stretch>
+        </p:blipFill>
+        <p:spPr>
+          <a:xfrm>
+            <a:off x="6355080" y="2194560"/>
+            <a:ext cx="5440680" cy="4204162"/>
+          </a:xfrm>
+          <a:prstGeom prst="rect">
+            <a:avLst/>
+          </a:prstGeom>
+        </p:spPr>
+      </p:pic>
+      <p:sp>
+        <p:nvSpPr>
+          <p:cNvPr id="11" name="TextBox 10"/>
+          <p:cNvSpPr txBox="1"/>
+          <p:nvPr/>
+        </p:nvSpPr>
+        <p:spPr>
+          <a:xfrm>
+            <a:off x="6355080" y="6035040"/>
+            <a:ext cx="5440680" cy="320040"/>
+          </a:xfrm>
+          <a:prstGeom prst="rect">
+            <a:avLst/>
+          </a:prstGeom>
+          <a:noFill/>
+        </p:spPr>
+        <p:txBody>
+          <a:bodyPr wrap="square" lIns="0" rIns="0" tIns="0" bIns="0">
+            <a:spAutoFit/>
+          </a:bodyPr>
+          <a:lstStyle/>
+          <a:p>
+            <a:pPr algn="ctr">
+              <a:lnSpc>
+                <a:spcPct val="125000"/>
+              </a:lnSpc>
+            </a:pPr>
+            <a:r>
+              <a:rPr sz="1200" b="1">
+                <a:solidFill>
+                  <a:srgbClr val="0F141F"/>
+                </a:solidFill>
+                <a:latin typeface="맑은 고딕"/>
+              </a:rPr>
+              <a:t>팀원 직접 지명 화면</a:t>
+            </a:r>
           </a:p>
         </p:txBody>
       </p:sp>
@@ -15573,378 +16830,33 @@
         </p:nvSpPr>
         <p:spPr>
           <a:xfrm>
-            <a:off x="868680" y="3977639"/>
-            <a:ext cx="5029200" cy="365760"/>
-          </a:xfrm>
-          <a:prstGeom prst="rect">
-            <a:avLst/>
-          </a:prstGeom>
-          <a:noFill/>
-        </p:spPr>
-        <p:txBody>
-          <a:bodyPr wrap="square" lIns="0" rIns="0" tIns="0" bIns="0">
-            <a:spAutoFit/>
-          </a:bodyPr>
-          <a:lstStyle/>
-          <a:p>
-            <a:pPr algn="l">
-              <a:lnSpc>
-                <a:spcPct val="125000"/>
-              </a:lnSpc>
-            </a:pPr>
-            <a:r>
-              <a:rPr sz="1200" b="1">
+            <a:off x="6355080" y="6355080"/>
+            <a:ext cx="5440680" cy="274320"/>
+          </a:xfrm>
+          <a:prstGeom prst="rect">
+            <a:avLst/>
+          </a:prstGeom>
+          <a:noFill/>
+        </p:spPr>
+        <p:txBody>
+          <a:bodyPr wrap="square" lIns="0" rIns="0" tIns="0" bIns="0">
+            <a:spAutoFit/>
+          </a:bodyPr>
+          <a:lstStyle/>
+          <a:p>
+            <a:pPr algn="ctr">
+              <a:lnSpc>
+                <a:spcPct val="125000"/>
+              </a:lnSpc>
+            </a:pPr>
+            <a:r>
+              <a:rPr sz="1000" b="0">
                 <a:solidFill>
                   <a:srgbClr val="8B95A7"/>
                 </a:solidFill>
                 <a:latin typeface="맑은 고딕"/>
               </a:rPr>
-              <a:t>개인과제 (현재)</a:t>
-            </a:r>
-          </a:p>
-        </p:txBody>
-      </p:sp>
-      <p:sp>
-        <p:nvSpPr>
-          <p:cNvPr id="13" name="TextBox 12"/>
-          <p:cNvSpPr txBox="1"/>
-          <p:nvPr/>
-        </p:nvSpPr>
-        <p:spPr>
-          <a:xfrm>
-            <a:off x="868680" y="4389120"/>
-            <a:ext cx="5029200" cy="457200"/>
-          </a:xfrm>
-          <a:prstGeom prst="rect">
-            <a:avLst/>
-          </a:prstGeom>
-          <a:noFill/>
-        </p:spPr>
-        <p:txBody>
-          <a:bodyPr wrap="square" lIns="0" rIns="0" tIns="0" bIns="0">
-            <a:spAutoFit/>
-          </a:bodyPr>
-          <a:lstStyle/>
-          <a:p>
-            <a:pPr algn="l">
-              <a:lnSpc>
-                <a:spcPct val="125000"/>
-              </a:lnSpc>
-            </a:pPr>
-            <a:r>
-              <a:rPr sz="1800" b="1">
-                <a:solidFill>
-                  <a:srgbClr val="0F141F"/>
-                </a:solidFill>
-                <a:latin typeface="맑은 고딕"/>
-              </a:rPr>
-              <a:t>학생 1명 평균만</a:t>
-            </a:r>
-          </a:p>
-        </p:txBody>
-      </p:sp>
-      <p:sp>
-        <p:nvSpPr>
-          <p:cNvPr id="14" name="TextBox 13"/>
-          <p:cNvSpPr txBox="1"/>
-          <p:nvPr/>
-        </p:nvSpPr>
-        <p:spPr>
-          <a:xfrm>
-            <a:off x="868680" y="4937760"/>
-            <a:ext cx="5029200" cy="1188720"/>
-          </a:xfrm>
-          <a:prstGeom prst="rect">
-            <a:avLst/>
-          </a:prstGeom>
-          <a:noFill/>
-        </p:spPr>
-        <p:txBody>
-          <a:bodyPr wrap="square" lIns="0" rIns="0" tIns="0" bIns="0">
-            <a:spAutoFit/>
-          </a:bodyPr>
-          <a:lstStyle/>
-          <a:p>
-            <a:pPr algn="l">
-              <a:lnSpc>
-                <a:spcPct val="140000"/>
-              </a:lnSpc>
-            </a:pPr>
-            <a:r>
-              <a:rPr sz="1100" b="0">
-                <a:solidFill>
-                  <a:srgbClr val="424B5C"/>
-                </a:solidFill>
-                <a:latin typeface="맑은 고딕"/>
-              </a:rPr>
-              <a:t>모든 학생이 똑같이 학습률 0.15,</a:t>
-            </a:r>
-          </a:p>
-          <a:p>
-            <a:pPr algn="l">
-              <a:lnSpc>
-                <a:spcPct val="140000"/>
-              </a:lnSpc>
-            </a:pPr>
-            <a:r>
-              <a:rPr sz="1100" b="0">
-                <a:solidFill>
-                  <a:srgbClr val="424B5C"/>
-                </a:solidFill>
-                <a:latin typeface="맑은 고딕"/>
-              </a:rPr>
-              <a:t>작업 기억 7개라고 가정.</a:t>
-            </a:r>
-          </a:p>
-          <a:p>
-            <a:pPr algn="l">
-              <a:lnSpc>
-                <a:spcPct val="140000"/>
-              </a:lnSpc>
-            </a:pPr>
-            <a:r>
-              <a:rPr sz="1100" b="0">
-                <a:solidFill>
-                  <a:srgbClr val="424B5C"/>
-                </a:solidFill>
-                <a:latin typeface="맑은 고딕"/>
-              </a:rPr>
-              <a:t>→ "평균적 학생"만 본 결과.</a:t>
-            </a:r>
-          </a:p>
-        </p:txBody>
-      </p:sp>
-      <p:sp>
-        <p:nvSpPr>
-          <p:cNvPr id="15" name="Rounded Rectangle 14"/>
-          <p:cNvSpPr/>
-          <p:nvPr/>
-        </p:nvSpPr>
-        <p:spPr>
-          <a:xfrm>
-            <a:off x="6263640" y="3840480"/>
-            <a:ext cx="5257800" cy="2377440"/>
-          </a:xfrm>
-          <a:prstGeom prst="roundRect">
-            <a:avLst>
-              <a:gd name="adj" fmla="val 6000"/>
-            </a:avLst>
-          </a:prstGeom>
-          <a:solidFill>
-            <a:srgbClr val="EEEAFE"/>
-          </a:solidFill>
-          <a:ln w="9525">
-            <a:solidFill>
-              <a:srgbClr val="4F46E5"/>
-            </a:solidFill>
-          </a:ln>
-        </p:spPr>
-        <p:style>
-          <a:lnRef idx="1">
-            <a:schemeClr val="accent1"/>
-          </a:lnRef>
-          <a:fillRef idx="3">
-            <a:schemeClr val="accent1"/>
-          </a:fillRef>
-          <a:effectRef idx="2">
-            <a:schemeClr val="accent1"/>
-          </a:effectRef>
-          <a:fontRef idx="minor">
-            <a:schemeClr val="lt1"/>
-          </a:fontRef>
-        </p:style>
-        <p:txBody>
-          <a:bodyPr rtlCol="0" anchor="ctr"/>
-          <a:lstStyle/>
-          <a:p>
-            <a:pPr algn="ctr"/>
-          </a:p>
-        </p:txBody>
-      </p:sp>
-      <p:sp>
-        <p:nvSpPr>
-          <p:cNvPr id="16" name="TextBox 15"/>
-          <p:cNvSpPr txBox="1"/>
-          <p:nvPr/>
-        </p:nvSpPr>
-        <p:spPr>
-          <a:xfrm>
-            <a:off x="6492240" y="3977639"/>
-            <a:ext cx="4846320" cy="365760"/>
-          </a:xfrm>
-          <a:prstGeom prst="rect">
-            <a:avLst/>
-          </a:prstGeom>
-          <a:noFill/>
-        </p:spPr>
-        <p:txBody>
-          <a:bodyPr wrap="square" lIns="0" rIns="0" tIns="0" bIns="0">
-            <a:spAutoFit/>
-          </a:bodyPr>
-          <a:lstStyle/>
-          <a:p>
-            <a:pPr algn="l">
-              <a:lnSpc>
-                <a:spcPct val="125000"/>
-              </a:lnSpc>
-            </a:pPr>
-            <a:r>
-              <a:rPr sz="1200" b="1">
-                <a:solidFill>
-                  <a:srgbClr val="4F46E5"/>
-                </a:solidFill>
-                <a:latin typeface="맑은 고딕"/>
-              </a:rPr>
-              <a:t>팀과제 (확장)</a:t>
-            </a:r>
-          </a:p>
-        </p:txBody>
-      </p:sp>
-      <p:sp>
-        <p:nvSpPr>
-          <p:cNvPr id="17" name="TextBox 16"/>
-          <p:cNvSpPr txBox="1"/>
-          <p:nvPr/>
-        </p:nvSpPr>
-        <p:spPr>
-          <a:xfrm>
-            <a:off x="6492240" y="4389120"/>
-            <a:ext cx="4846320" cy="457200"/>
-          </a:xfrm>
-          <a:prstGeom prst="rect">
-            <a:avLst/>
-          </a:prstGeom>
-          <a:noFill/>
-        </p:spPr>
-        <p:txBody>
-          <a:bodyPr wrap="square" lIns="0" rIns="0" tIns="0" bIns="0">
-            <a:spAutoFit/>
-          </a:bodyPr>
-          <a:lstStyle/>
-          <a:p>
-            <a:pPr algn="l">
-              <a:lnSpc>
-                <a:spcPct val="125000"/>
-              </a:lnSpc>
-            </a:pPr>
-            <a:r>
-              <a:rPr sz="1500" b="1">
-                <a:solidFill>
-                  <a:srgbClr val="0F141F"/>
-                </a:solidFill>
-                <a:latin typeface="맑은 고딕"/>
-              </a:rPr>
-              <a:t>가상 학생 1000명, 사람마다 다르게</a:t>
-            </a:r>
-          </a:p>
-        </p:txBody>
-      </p:sp>
-      <p:sp>
-        <p:nvSpPr>
-          <p:cNvPr id="18" name="TextBox 17"/>
-          <p:cNvSpPr txBox="1"/>
-          <p:nvPr/>
-        </p:nvSpPr>
-        <p:spPr>
-          <a:xfrm>
-            <a:off x="6492240" y="4937760"/>
-            <a:ext cx="4846320" cy="1188720"/>
-          </a:xfrm>
-          <a:prstGeom prst="rect">
-            <a:avLst/>
-          </a:prstGeom>
-          <a:noFill/>
-        </p:spPr>
-        <p:txBody>
-          <a:bodyPr wrap="square" lIns="0" rIns="0" tIns="0" bIns="0">
-            <a:spAutoFit/>
-          </a:bodyPr>
-          <a:lstStyle/>
-          <a:p>
-            <a:pPr algn="l">
-              <a:lnSpc>
-                <a:spcPct val="140000"/>
-              </a:lnSpc>
-            </a:pPr>
-            <a:r>
-              <a:rPr sz="1100" b="0">
-                <a:solidFill>
-                  <a:srgbClr val="424B5C"/>
-                </a:solidFill>
-                <a:latin typeface="맑은 고딕"/>
-              </a:rPr>
-              <a:t>학습률·기억력·작업 기억이 모두 다른</a:t>
-            </a:r>
-          </a:p>
-          <a:p>
-            <a:pPr algn="l">
-              <a:lnSpc>
-                <a:spcPct val="140000"/>
-              </a:lnSpc>
-            </a:pPr>
-            <a:r>
-              <a:rPr sz="1100" b="0">
-                <a:solidFill>
-                  <a:srgbClr val="424B5C"/>
-                </a:solidFill>
-                <a:latin typeface="맑은 고딕"/>
-              </a:rPr>
-              <a:t>1000명을 가상으로 만들어 시뮬.</a:t>
-            </a:r>
-          </a:p>
-          <a:p>
-            <a:pPr algn="l">
-              <a:lnSpc>
-                <a:spcPct val="140000"/>
-              </a:lnSpc>
-            </a:pPr>
-            <a:r>
-              <a:rPr sz="1100" b="0">
-                <a:solidFill>
-                  <a:srgbClr val="424B5C"/>
-                </a:solidFill>
-                <a:latin typeface="맑은 고딕"/>
-              </a:rPr>
-              <a:t>→ 평균뿐 아니라 하위 25%도 본다.</a:t>
-            </a:r>
-          </a:p>
-        </p:txBody>
-      </p:sp>
-      <p:sp>
-        <p:nvSpPr>
-          <p:cNvPr id="19" name="TextBox 18"/>
-          <p:cNvSpPr txBox="1"/>
-          <p:nvPr/>
-        </p:nvSpPr>
-        <p:spPr>
-          <a:xfrm>
-            <a:off x="640080" y="6400800"/>
-            <a:ext cx="10972800" cy="365760"/>
-          </a:xfrm>
-          <a:prstGeom prst="rect">
-            <a:avLst/>
-          </a:prstGeom>
-          <a:noFill/>
-        </p:spPr>
-        <p:txBody>
-          <a:bodyPr wrap="square" lIns="0" rIns="0" tIns="0" bIns="0">
-            <a:spAutoFit/>
-          </a:bodyPr>
-          <a:lstStyle/>
-          <a:p>
-            <a:pPr algn="ctr">
-              <a:lnSpc>
-                <a:spcPct val="125000"/>
-              </a:lnSpc>
-            </a:pPr>
-            <a:r>
-              <a:rPr sz="1200" b="1">
-                <a:solidFill>
-                  <a:srgbClr val="EC4899"/>
-                </a:solidFill>
-                <a:latin typeface="맑은 고딕"/>
-              </a:rPr>
-              <a:t>분석 질문: 개선안이 약한 학생도 도와주는가</a:t>
+              <a:t>후보 N명 중 2명 지명 (강의계획서 규칙)</a:t>
             </a:r>
           </a:p>
         </p:txBody>
@@ -16044,7 +16956,7 @@
                 </a:solidFill>
                 <a:latin typeface="맑은 고딕"/>
               </a:rPr>
-              <a:t>T2 · 시뮬 입력 예시</a:t>
+              <a:t>T2 · 컴퓨터 시뮬레이션</a:t>
             </a:r>
           </a:p>
         </p:txBody>
@@ -16083,7 +16995,7 @@
                 </a:solidFill>
                 <a:latin typeface="맑은 고딕"/>
               </a:rPr>
-              <a:t>가상 학생 1000명 중 1명을 어떻게 설정하는가</a:t>
+              <a:t>가상 학생 1000명을 만들어 "약한 학생도 보호되는지" 본다</a:t>
             </a:r>
           </a:p>
         </p:txBody>
@@ -16157,7 +17069,7 @@
                 </a:solidFill>
                 <a:latin typeface="맑은 고딕"/>
               </a:rPr>
-              <a:t>24</a:t>
+              <a:t>22</a:t>
             </a:r>
           </a:p>
         </p:txBody>
@@ -16170,7 +17082,120 @@
         </p:nvSpPr>
         <p:spPr>
           <a:xfrm>
-            <a:off x="640080" y="2011680"/>
+            <a:off x="640080" y="2103120"/>
+            <a:ext cx="10972800" cy="411480"/>
+          </a:xfrm>
+          <a:prstGeom prst="rect">
+            <a:avLst/>
+          </a:prstGeom>
+          <a:noFill/>
+        </p:spPr>
+        <p:txBody>
+          <a:bodyPr wrap="square" lIns="0" rIns="0" tIns="0" bIns="0">
+            <a:spAutoFit/>
+          </a:bodyPr>
+          <a:lstStyle/>
+          <a:p>
+            <a:pPr algn="l">
+              <a:lnSpc>
+                <a:spcPct val="125000"/>
+              </a:lnSpc>
+            </a:pPr>
+            <a:r>
+              <a:rPr sz="1500" b="1">
+                <a:solidFill>
+                  <a:srgbClr val="0F141F"/>
+                </a:solidFill>
+                <a:latin typeface="맑은 고딕"/>
+              </a:rPr>
+              <a:t>왜 1000명이나? 평균만 보면 가려지는 진실이 있다.</a:t>
+            </a:r>
+          </a:p>
+        </p:txBody>
+      </p:sp>
+      <p:sp>
+        <p:nvSpPr>
+          <p:cNvPr id="8" name="TextBox 7"/>
+          <p:cNvSpPr txBox="1"/>
+          <p:nvPr/>
+        </p:nvSpPr>
+        <p:spPr>
+          <a:xfrm>
+            <a:off x="640080" y="2560320"/>
+            <a:ext cx="10972800" cy="411480"/>
+          </a:xfrm>
+          <a:prstGeom prst="rect">
+            <a:avLst/>
+          </a:prstGeom>
+          <a:noFill/>
+        </p:spPr>
+        <p:txBody>
+          <a:bodyPr wrap="square" lIns="0" rIns="0" tIns="0" bIns="0">
+            <a:spAutoFit/>
+          </a:bodyPr>
+          <a:lstStyle/>
+          <a:p>
+            <a:pPr algn="l">
+              <a:lnSpc>
+                <a:spcPct val="125000"/>
+              </a:lnSpc>
+            </a:pPr>
+            <a:r>
+              <a:rPr sz="1300" b="0">
+                <a:solidFill>
+                  <a:srgbClr val="424B5C"/>
+                </a:solidFill>
+                <a:latin typeface="맑은 고딕"/>
+              </a:rPr>
+              <a:t>예: "평균 출석률 80%"라고 해도, 학습률 낮은 학생은 30%일 수 있음.</a:t>
+            </a:r>
+          </a:p>
+        </p:txBody>
+      </p:sp>
+      <p:cxnSp>
+        <p:nvCxnSpPr>
+          <p:cNvPr id="9" name="Connector 8"/>
+          <p:cNvCxnSpPr/>
+          <p:nvPr/>
+        </p:nvCxnSpPr>
+        <p:spPr>
+          <a:xfrm>
+            <a:off x="640080" y="3291840"/>
+            <a:ext cx="10881360" cy="0"/>
+          </a:xfrm>
+          <a:prstGeom prst="line">
+            <a:avLst/>
+          </a:prstGeom>
+          <a:ln w="19050">
+            <a:solidFill>
+              <a:srgbClr val="E5E7EB"/>
+            </a:solidFill>
+          </a:ln>
+        </p:spPr>
+        <p:style>
+          <a:lnRef idx="2">
+            <a:schemeClr val="accent1"/>
+          </a:lnRef>
+          <a:fillRef idx="0">
+            <a:schemeClr val="accent1"/>
+          </a:fillRef>
+          <a:effectRef idx="1">
+            <a:schemeClr val="accent1"/>
+          </a:effectRef>
+          <a:fontRef idx="minor">
+            <a:schemeClr val="tx1"/>
+          </a:fontRef>
+        </p:style>
+      </p:cxnSp>
+      <p:sp>
+        <p:nvSpPr>
+          <p:cNvPr id="10" name="TextBox 9"/>
+          <p:cNvSpPr txBox="1"/>
+          <p:nvPr/>
+        </p:nvSpPr>
+        <p:spPr>
+          <a:xfrm>
+            <a:off x="640080" y="3429000"/>
             <a:ext cx="10972800" cy="365760"/>
           </a:xfrm>
           <a:prstGeom prst="rect">
@@ -16190,27 +17215,223 @@
               </a:lnSpc>
             </a:pPr>
             <a:r>
-              <a:rPr sz="1200" b="0">
+              <a:rPr sz="1100" b="1">
+                <a:solidFill>
+                  <a:srgbClr val="4F46E5"/>
+                </a:solidFill>
+                <a:latin typeface="맑은 고딕"/>
+              </a:rPr>
+              <a:t>개인과제 → 팀과제 확장</a:t>
+            </a:r>
+          </a:p>
+        </p:txBody>
+      </p:sp>
+      <p:sp>
+        <p:nvSpPr>
+          <p:cNvPr id="11" name="Rounded Rectangle 10"/>
+          <p:cNvSpPr/>
+          <p:nvPr/>
+        </p:nvSpPr>
+        <p:spPr>
+          <a:xfrm>
+            <a:off x="640080" y="3840480"/>
+            <a:ext cx="5440680" cy="2377440"/>
+          </a:xfrm>
+          <a:prstGeom prst="roundRect">
+            <a:avLst>
+              <a:gd name="adj" fmla="val 6000"/>
+            </a:avLst>
+          </a:prstGeom>
+          <a:solidFill>
+            <a:srgbClr val="FAFBFC"/>
+          </a:solidFill>
+          <a:ln w="9525">
+            <a:solidFill>
+              <a:srgbClr val="E5E7EB"/>
+            </a:solidFill>
+          </a:ln>
+        </p:spPr>
+        <p:style>
+          <a:lnRef idx="1">
+            <a:schemeClr val="accent1"/>
+          </a:lnRef>
+          <a:fillRef idx="3">
+            <a:schemeClr val="accent1"/>
+          </a:fillRef>
+          <a:effectRef idx="2">
+            <a:schemeClr val="accent1"/>
+          </a:effectRef>
+          <a:fontRef idx="minor">
+            <a:schemeClr val="lt1"/>
+          </a:fontRef>
+        </p:style>
+        <p:txBody>
+          <a:bodyPr rtlCol="0" anchor="ctr"/>
+          <a:lstStyle/>
+          <a:p>
+            <a:pPr algn="ctr"/>
+          </a:p>
+        </p:txBody>
+      </p:sp>
+      <p:sp>
+        <p:nvSpPr>
+          <p:cNvPr id="12" name="TextBox 11"/>
+          <p:cNvSpPr txBox="1"/>
+          <p:nvPr/>
+        </p:nvSpPr>
+        <p:spPr>
+          <a:xfrm>
+            <a:off x="868680" y="3977639"/>
+            <a:ext cx="5029200" cy="365760"/>
+          </a:xfrm>
+          <a:prstGeom prst="rect">
+            <a:avLst/>
+          </a:prstGeom>
+          <a:noFill/>
+        </p:spPr>
+        <p:txBody>
+          <a:bodyPr wrap="square" lIns="0" rIns="0" tIns="0" bIns="0">
+            <a:spAutoFit/>
+          </a:bodyPr>
+          <a:lstStyle/>
+          <a:p>
+            <a:pPr algn="l">
+              <a:lnSpc>
+                <a:spcPct val="125000"/>
+              </a:lnSpc>
+            </a:pPr>
+            <a:r>
+              <a:rPr sz="1200" b="1">
                 <a:solidFill>
                   <a:srgbClr val="8B95A7"/>
                 </a:solidFill>
                 <a:latin typeface="맑은 고딕"/>
               </a:rPr>
-              <a:t>1000명을 모두 똑같이 만들면 의미 없음. 학생마다 인지 능력이 다르게 무작위 배정함.</a:t>
-            </a:r>
-          </a:p>
-        </p:txBody>
-      </p:sp>
-      <p:sp>
-        <p:nvSpPr>
-          <p:cNvPr id="8" name="Rounded Rectangle 7"/>
+              <a:t>개인과제 (현재)</a:t>
+            </a:r>
+          </a:p>
+        </p:txBody>
+      </p:sp>
+      <p:sp>
+        <p:nvSpPr>
+          <p:cNvPr id="13" name="TextBox 12"/>
+          <p:cNvSpPr txBox="1"/>
+          <p:nvPr/>
+        </p:nvSpPr>
+        <p:spPr>
+          <a:xfrm>
+            <a:off x="868680" y="4389120"/>
+            <a:ext cx="5029200" cy="457200"/>
+          </a:xfrm>
+          <a:prstGeom prst="rect">
+            <a:avLst/>
+          </a:prstGeom>
+          <a:noFill/>
+        </p:spPr>
+        <p:txBody>
+          <a:bodyPr wrap="square" lIns="0" rIns="0" tIns="0" bIns="0">
+            <a:spAutoFit/>
+          </a:bodyPr>
+          <a:lstStyle/>
+          <a:p>
+            <a:pPr algn="l">
+              <a:lnSpc>
+                <a:spcPct val="125000"/>
+              </a:lnSpc>
+            </a:pPr>
+            <a:r>
+              <a:rPr sz="1800" b="1">
+                <a:solidFill>
+                  <a:srgbClr val="0F141F"/>
+                </a:solidFill>
+                <a:latin typeface="맑은 고딕"/>
+              </a:rPr>
+              <a:t>학생 1명 평균만</a:t>
+            </a:r>
+          </a:p>
+        </p:txBody>
+      </p:sp>
+      <p:sp>
+        <p:nvSpPr>
+          <p:cNvPr id="14" name="TextBox 13"/>
+          <p:cNvSpPr txBox="1"/>
+          <p:nvPr/>
+        </p:nvSpPr>
+        <p:spPr>
+          <a:xfrm>
+            <a:off x="868680" y="4937760"/>
+            <a:ext cx="5029200" cy="1188720"/>
+          </a:xfrm>
+          <a:prstGeom prst="rect">
+            <a:avLst/>
+          </a:prstGeom>
+          <a:noFill/>
+        </p:spPr>
+        <p:txBody>
+          <a:bodyPr wrap="square" lIns="0" rIns="0" tIns="0" bIns="0">
+            <a:spAutoFit/>
+          </a:bodyPr>
+          <a:lstStyle/>
+          <a:p>
+            <a:pPr algn="l">
+              <a:lnSpc>
+                <a:spcPct val="140000"/>
+              </a:lnSpc>
+            </a:pPr>
+            <a:r>
+              <a:rPr sz="1100" b="0">
+                <a:solidFill>
+                  <a:srgbClr val="424B5C"/>
+                </a:solidFill>
+                <a:latin typeface="맑은 고딕"/>
+              </a:rPr>
+              <a:t>모든 학생이 똑같이 학습률 0.15,</a:t>
+            </a:r>
+          </a:p>
+          <a:p>
+            <a:pPr algn="l">
+              <a:lnSpc>
+                <a:spcPct val="140000"/>
+              </a:lnSpc>
+            </a:pPr>
+            <a:r>
+              <a:rPr sz="1100" b="0">
+                <a:solidFill>
+                  <a:srgbClr val="424B5C"/>
+                </a:solidFill>
+                <a:latin typeface="맑은 고딕"/>
+              </a:rPr>
+              <a:t>작업 기억 7개라고 가정.</a:t>
+            </a:r>
+          </a:p>
+          <a:p>
+            <a:pPr algn="l">
+              <a:lnSpc>
+                <a:spcPct val="140000"/>
+              </a:lnSpc>
+            </a:pPr>
+            <a:r>
+              <a:rPr sz="1100" b="0">
+                <a:solidFill>
+                  <a:srgbClr val="424B5C"/>
+                </a:solidFill>
+                <a:latin typeface="맑은 고딕"/>
+              </a:rPr>
+              <a:t>→ "평균적 학생"만 본 결과.</a:t>
+            </a:r>
+          </a:p>
+        </p:txBody>
+      </p:sp>
+      <p:sp>
+        <p:nvSpPr>
+          <p:cNvPr id="15" name="Rounded Rectangle 14"/>
           <p:cNvSpPr/>
           <p:nvPr/>
         </p:nvSpPr>
         <p:spPr>
           <a:xfrm>
-            <a:off x="640080" y="2606040"/>
-            <a:ext cx="5486400" cy="3931920"/>
+            <a:off x="6263640" y="3840480"/>
+            <a:ext cx="5257800" cy="2377440"/>
           </a:xfrm>
           <a:prstGeom prst="roundRect">
             <a:avLst>
@@ -16250,386 +17471,149 @@
       </p:sp>
       <p:sp>
         <p:nvSpPr>
-          <p:cNvPr id="9" name="TextBox 8"/>
-          <p:cNvSpPr txBox="1"/>
-          <p:nvPr/>
-        </p:nvSpPr>
-        <p:spPr>
-          <a:xfrm>
-            <a:off x="868680" y="2743200"/>
-            <a:ext cx="5029200" cy="365760"/>
-          </a:xfrm>
-          <a:prstGeom prst="rect">
-            <a:avLst/>
-          </a:prstGeom>
-          <a:noFill/>
-        </p:spPr>
-        <p:txBody>
-          <a:bodyPr wrap="square" lIns="0" rIns="0" tIns="0" bIns="0">
-            <a:spAutoFit/>
-          </a:bodyPr>
-          <a:lstStyle/>
-          <a:p>
-            <a:pPr algn="l">
-              <a:lnSpc>
-                <a:spcPct val="125000"/>
-              </a:lnSpc>
-            </a:pPr>
-            <a:r>
-              <a:rPr sz="1400" b="1">
+          <p:cNvPr id="16" name="TextBox 15"/>
+          <p:cNvSpPr txBox="1"/>
+          <p:nvPr/>
+        </p:nvSpPr>
+        <p:spPr>
+          <a:xfrm>
+            <a:off x="6492240" y="3977639"/>
+            <a:ext cx="4846320" cy="365760"/>
+          </a:xfrm>
+          <a:prstGeom prst="rect">
+            <a:avLst/>
+          </a:prstGeom>
+          <a:noFill/>
+        </p:spPr>
+        <p:txBody>
+          <a:bodyPr wrap="square" lIns="0" rIns="0" tIns="0" bIns="0">
+            <a:spAutoFit/>
+          </a:bodyPr>
+          <a:lstStyle/>
+          <a:p>
+            <a:pPr algn="l">
+              <a:lnSpc>
+                <a:spcPct val="125000"/>
+              </a:lnSpc>
+            </a:pPr>
+            <a:r>
+              <a:rPr sz="1200" b="1">
                 <a:solidFill>
                   <a:srgbClr val="4F46E5"/>
                 </a:solidFill>
                 <a:latin typeface="맑은 고딕"/>
               </a:rPr>
-              <a:t>예시 학생 #1 · '김민준'</a:t>
-            </a:r>
-          </a:p>
-        </p:txBody>
-      </p:sp>
-      <p:sp>
-        <p:nvSpPr>
-          <p:cNvPr id="10" name="TextBox 9"/>
-          <p:cNvSpPr txBox="1"/>
-          <p:nvPr/>
-        </p:nvSpPr>
-        <p:spPr>
-          <a:xfrm>
-            <a:off x="868680" y="3108960"/>
-            <a:ext cx="5029200" cy="320040"/>
-          </a:xfrm>
-          <a:prstGeom prst="rect">
-            <a:avLst/>
-          </a:prstGeom>
-          <a:noFill/>
-        </p:spPr>
-        <p:txBody>
-          <a:bodyPr wrap="square" lIns="0" rIns="0" tIns="0" bIns="0">
-            <a:spAutoFit/>
-          </a:bodyPr>
-          <a:lstStyle/>
-          <a:p>
-            <a:pPr algn="l">
-              <a:lnSpc>
-                <a:spcPct val="125000"/>
-              </a:lnSpc>
-            </a:pPr>
-            <a:r>
-              <a:rPr sz="1000" b="0">
-                <a:solidFill>
-                  <a:srgbClr val="8B95A7"/>
-                </a:solidFill>
-                <a:latin typeface="맑은 고딕"/>
-              </a:rPr>
-              <a:t>코드가 1000명을 만들 때 첫 번째 학생</a:t>
-            </a:r>
-          </a:p>
-        </p:txBody>
-      </p:sp>
-      <p:cxnSp>
-        <p:nvCxnSpPr>
-          <p:cNvPr id="11" name="Connector 10"/>
-          <p:cNvCxnSpPr/>
-          <p:nvPr/>
-        </p:nvCxnSpPr>
-        <p:spPr>
-          <a:xfrm>
-            <a:off x="868680" y="3520440"/>
-            <a:ext cx="5074920" cy="0"/>
-          </a:xfrm>
-          <a:prstGeom prst="line">
-            <a:avLst/>
-          </a:prstGeom>
-          <a:ln w="19050">
-            <a:solidFill>
-              <a:srgbClr val="4F46E5"/>
-            </a:solidFill>
-          </a:ln>
-        </p:spPr>
-        <p:style>
-          <a:lnRef idx="2">
-            <a:schemeClr val="accent1"/>
-          </a:lnRef>
-          <a:fillRef idx="0">
-            <a:schemeClr val="accent1"/>
-          </a:fillRef>
-          <a:effectRef idx="1">
-            <a:schemeClr val="accent1"/>
-          </a:effectRef>
-          <a:fontRef idx="minor">
-            <a:schemeClr val="tx1"/>
-          </a:fontRef>
-        </p:style>
-      </p:cxnSp>
-      <p:sp>
-        <p:nvSpPr>
-          <p:cNvPr id="12" name="TextBox 11"/>
-          <p:cNvSpPr txBox="1"/>
-          <p:nvPr/>
-        </p:nvSpPr>
-        <p:spPr>
-          <a:xfrm>
-            <a:off x="868680" y="3657600"/>
-            <a:ext cx="2286000" cy="320040"/>
-          </a:xfrm>
-          <a:prstGeom prst="rect">
-            <a:avLst/>
-          </a:prstGeom>
-          <a:noFill/>
-        </p:spPr>
-        <p:txBody>
-          <a:bodyPr wrap="square" lIns="0" rIns="0" tIns="0" bIns="0">
-            <a:spAutoFit/>
-          </a:bodyPr>
-          <a:lstStyle/>
-          <a:p>
-            <a:pPr algn="l">
-              <a:lnSpc>
-                <a:spcPct val="125000"/>
-              </a:lnSpc>
-            </a:pPr>
-            <a:r>
-              <a:rPr sz="1100" b="1">
+              <a:t>팀과제 (확장)</a:t>
+            </a:r>
+          </a:p>
+        </p:txBody>
+      </p:sp>
+      <p:sp>
+        <p:nvSpPr>
+          <p:cNvPr id="17" name="TextBox 16"/>
+          <p:cNvSpPr txBox="1"/>
+          <p:nvPr/>
+        </p:nvSpPr>
+        <p:spPr>
+          <a:xfrm>
+            <a:off x="6492240" y="4389120"/>
+            <a:ext cx="4846320" cy="457200"/>
+          </a:xfrm>
+          <a:prstGeom prst="rect">
+            <a:avLst/>
+          </a:prstGeom>
+          <a:noFill/>
+        </p:spPr>
+        <p:txBody>
+          <a:bodyPr wrap="square" lIns="0" rIns="0" tIns="0" bIns="0">
+            <a:spAutoFit/>
+          </a:bodyPr>
+          <a:lstStyle/>
+          <a:p>
+            <a:pPr algn="l">
+              <a:lnSpc>
+                <a:spcPct val="125000"/>
+              </a:lnSpc>
+            </a:pPr>
+            <a:r>
+              <a:rPr sz="1500" b="1">
                 <a:solidFill>
                   <a:srgbClr val="0F141F"/>
                 </a:solidFill>
                 <a:latin typeface="맑은 고딕"/>
               </a:rPr>
-              <a:t>학습률 α</a:t>
-            </a:r>
-          </a:p>
-        </p:txBody>
-      </p:sp>
-      <p:sp>
-        <p:nvSpPr>
-          <p:cNvPr id="13" name="TextBox 12"/>
-          <p:cNvSpPr txBox="1"/>
-          <p:nvPr/>
-        </p:nvSpPr>
-        <p:spPr>
-          <a:xfrm>
-            <a:off x="3108960" y="3657600"/>
-            <a:ext cx="1371600" cy="365760"/>
-          </a:xfrm>
-          <a:prstGeom prst="rect">
-            <a:avLst/>
-          </a:prstGeom>
-          <a:noFill/>
-        </p:spPr>
-        <p:txBody>
-          <a:bodyPr wrap="square" lIns="0" rIns="0" tIns="0" bIns="0">
-            <a:spAutoFit/>
-          </a:bodyPr>
-          <a:lstStyle/>
-          <a:p>
-            <a:pPr algn="l">
-              <a:lnSpc>
-                <a:spcPct val="125000"/>
-              </a:lnSpc>
-            </a:pPr>
-            <a:r>
-              <a:rPr sz="1800" b="1">
-                <a:solidFill>
-                  <a:srgbClr val="4F46E5"/>
-                </a:solidFill>
-                <a:latin typeface="맑은 고딕"/>
-              </a:rPr>
-              <a:t>0.18</a:t>
-            </a:r>
-          </a:p>
-        </p:txBody>
-      </p:sp>
-      <p:sp>
-        <p:nvSpPr>
-          <p:cNvPr id="14" name="TextBox 13"/>
-          <p:cNvSpPr txBox="1"/>
-          <p:nvPr/>
-        </p:nvSpPr>
-        <p:spPr>
-          <a:xfrm>
-            <a:off x="868680" y="4023360"/>
-            <a:ext cx="5029200" cy="274320"/>
-          </a:xfrm>
-          <a:prstGeom prst="rect">
-            <a:avLst/>
-          </a:prstGeom>
-          <a:noFill/>
-        </p:spPr>
-        <p:txBody>
-          <a:bodyPr wrap="square" lIns="0" rIns="0" tIns="0" bIns="0">
-            <a:spAutoFit/>
-          </a:bodyPr>
-          <a:lstStyle/>
-          <a:p>
-            <a:pPr algn="l">
-              <a:lnSpc>
-                <a:spcPct val="125000"/>
-              </a:lnSpc>
-            </a:pPr>
-            <a:r>
-              <a:rPr sz="900" b="0">
+              <a:t>가상 학생 1000명, 사람마다 다르게</a:t>
+            </a:r>
+          </a:p>
+        </p:txBody>
+      </p:sp>
+      <p:sp>
+        <p:nvSpPr>
+          <p:cNvPr id="18" name="TextBox 17"/>
+          <p:cNvSpPr txBox="1"/>
+          <p:nvPr/>
+        </p:nvSpPr>
+        <p:spPr>
+          <a:xfrm>
+            <a:off x="6492240" y="4937760"/>
+            <a:ext cx="4846320" cy="1188720"/>
+          </a:xfrm>
+          <a:prstGeom prst="rect">
+            <a:avLst/>
+          </a:prstGeom>
+          <a:noFill/>
+        </p:spPr>
+        <p:txBody>
+          <a:bodyPr wrap="square" lIns="0" rIns="0" tIns="0" bIns="0">
+            <a:spAutoFit/>
+          </a:bodyPr>
+          <a:lstStyle/>
+          <a:p>
+            <a:pPr algn="l">
+              <a:lnSpc>
+                <a:spcPct val="140000"/>
+              </a:lnSpc>
+            </a:pPr>
+            <a:r>
+              <a:rPr sz="1100" b="0">
                 <a:solidFill>
                   <a:srgbClr val="424B5C"/>
                 </a:solidFill>
                 <a:latin typeface="맑은 고딕"/>
               </a:rPr>
-              <a:t>평균(0.15)보다 약간 높음 — 새 경험을 빨리 받아들임</a:t>
-            </a:r>
-          </a:p>
-        </p:txBody>
-      </p:sp>
-      <p:sp>
-        <p:nvSpPr>
-          <p:cNvPr id="15" name="TextBox 14"/>
-          <p:cNvSpPr txBox="1"/>
-          <p:nvPr/>
-        </p:nvSpPr>
-        <p:spPr>
-          <a:xfrm>
-            <a:off x="868680" y="4343400"/>
-            <a:ext cx="2286000" cy="320040"/>
-          </a:xfrm>
-          <a:prstGeom prst="rect">
-            <a:avLst/>
-          </a:prstGeom>
-          <a:noFill/>
-        </p:spPr>
-        <p:txBody>
-          <a:bodyPr wrap="square" lIns="0" rIns="0" tIns="0" bIns="0">
-            <a:spAutoFit/>
-          </a:bodyPr>
-          <a:lstStyle/>
-          <a:p>
-            <a:pPr algn="l">
-              <a:lnSpc>
-                <a:spcPct val="125000"/>
-              </a:lnSpc>
-            </a:pPr>
-            <a:r>
-              <a:rPr sz="1100" b="1">
-                <a:solidFill>
-                  <a:srgbClr val="0F141F"/>
-                </a:solidFill>
-                <a:latin typeface="맑은 고딕"/>
-              </a:rPr>
-              <a:t>망각 d</a:t>
-            </a:r>
-          </a:p>
-        </p:txBody>
-      </p:sp>
-      <p:sp>
-        <p:nvSpPr>
-          <p:cNvPr id="16" name="TextBox 15"/>
-          <p:cNvSpPr txBox="1"/>
-          <p:nvPr/>
-        </p:nvSpPr>
-        <p:spPr>
-          <a:xfrm>
-            <a:off x="3108960" y="4343400"/>
-            <a:ext cx="1371600" cy="365760"/>
-          </a:xfrm>
-          <a:prstGeom prst="rect">
-            <a:avLst/>
-          </a:prstGeom>
-          <a:noFill/>
-        </p:spPr>
-        <p:txBody>
-          <a:bodyPr wrap="square" lIns="0" rIns="0" tIns="0" bIns="0">
-            <a:spAutoFit/>
-          </a:bodyPr>
-          <a:lstStyle/>
-          <a:p>
-            <a:pPr algn="l">
-              <a:lnSpc>
-                <a:spcPct val="125000"/>
-              </a:lnSpc>
-            </a:pPr>
-            <a:r>
-              <a:rPr sz="1800" b="1">
-                <a:solidFill>
-                  <a:srgbClr val="4F46E5"/>
-                </a:solidFill>
-                <a:latin typeface="맑은 고딕"/>
-              </a:rPr>
-              <a:t>0.42</a:t>
-            </a:r>
-          </a:p>
-        </p:txBody>
-      </p:sp>
-      <p:sp>
-        <p:nvSpPr>
-          <p:cNvPr id="17" name="TextBox 16"/>
-          <p:cNvSpPr txBox="1"/>
-          <p:nvPr/>
-        </p:nvSpPr>
-        <p:spPr>
-          <a:xfrm>
-            <a:off x="868680" y="4709160"/>
-            <a:ext cx="5029200" cy="274320"/>
-          </a:xfrm>
-          <a:prstGeom prst="rect">
-            <a:avLst/>
-          </a:prstGeom>
-          <a:noFill/>
-        </p:spPr>
-        <p:txBody>
-          <a:bodyPr wrap="square" lIns="0" rIns="0" tIns="0" bIns="0">
-            <a:spAutoFit/>
-          </a:bodyPr>
-          <a:lstStyle/>
-          <a:p>
-            <a:pPr algn="l">
-              <a:lnSpc>
-                <a:spcPct val="125000"/>
-              </a:lnSpc>
-            </a:pPr>
-            <a:r>
-              <a:rPr sz="900" b="0">
+              <a:t>학습률·기억력·작업 기억이 모두 다른</a:t>
+            </a:r>
+          </a:p>
+          <a:p>
+            <a:pPr algn="l">
+              <a:lnSpc>
+                <a:spcPct val="140000"/>
+              </a:lnSpc>
+            </a:pPr>
+            <a:r>
+              <a:rPr sz="1100" b="0">
                 <a:solidFill>
                   <a:srgbClr val="424B5C"/>
                 </a:solidFill>
                 <a:latin typeface="맑은 고딕"/>
               </a:rPr>
-              <a:t>평균(0.50)보다 낮음 — 기억이 천천히 사라짐</a:t>
-            </a:r>
-          </a:p>
-        </p:txBody>
-      </p:sp>
-      <p:sp>
-        <p:nvSpPr>
-          <p:cNvPr id="18" name="TextBox 17"/>
-          <p:cNvSpPr txBox="1"/>
-          <p:nvPr/>
-        </p:nvSpPr>
-        <p:spPr>
-          <a:xfrm>
-            <a:off x="868680" y="5029200"/>
-            <a:ext cx="2286000" cy="320040"/>
-          </a:xfrm>
-          <a:prstGeom prst="rect">
-            <a:avLst/>
-          </a:prstGeom>
-          <a:noFill/>
-        </p:spPr>
-        <p:txBody>
-          <a:bodyPr wrap="square" lIns="0" rIns="0" tIns="0" bIns="0">
-            <a:spAutoFit/>
-          </a:bodyPr>
-          <a:lstStyle/>
-          <a:p>
-            <a:pPr algn="l">
-              <a:lnSpc>
-                <a:spcPct val="125000"/>
-              </a:lnSpc>
-            </a:pPr>
-            <a:r>
-              <a:rPr sz="1100" b="1">
-                <a:solidFill>
-                  <a:srgbClr val="0F141F"/>
-                </a:solidFill>
-                <a:latin typeface="맑은 고딕"/>
-              </a:rPr>
-              <a:t>작업 기억 WM</a:t>
+              <a:t>1000명을 가상으로 만들어 시뮬.</a:t>
+            </a:r>
+          </a:p>
+          <a:p>
+            <a:pPr algn="l">
+              <a:lnSpc>
+                <a:spcPct val="140000"/>
+              </a:lnSpc>
+            </a:pPr>
+            <a:r>
+              <a:rPr sz="1100" b="0">
+                <a:solidFill>
+                  <a:srgbClr val="424B5C"/>
+                </a:solidFill>
+                <a:latin typeface="맑은 고딕"/>
+              </a:rPr>
+              <a:t>→ 평균뿐 아니라 하위 25%도 본다.</a:t>
             </a:r>
           </a:p>
         </p:txBody>
@@ -16642,515 +17626,33 @@
         </p:nvSpPr>
         <p:spPr>
           <a:xfrm>
-            <a:off x="3108960" y="5029200"/>
-            <a:ext cx="1371600" cy="365760"/>
-          </a:xfrm>
-          <a:prstGeom prst="rect">
-            <a:avLst/>
-          </a:prstGeom>
-          <a:noFill/>
-        </p:spPr>
-        <p:txBody>
-          <a:bodyPr wrap="square" lIns="0" rIns="0" tIns="0" bIns="0">
-            <a:spAutoFit/>
-          </a:bodyPr>
-          <a:lstStyle/>
-          <a:p>
-            <a:pPr algn="l">
-              <a:lnSpc>
-                <a:spcPct val="125000"/>
-              </a:lnSpc>
-            </a:pPr>
-            <a:r>
-              <a:rPr sz="1800" b="1">
-                <a:solidFill>
-                  <a:srgbClr val="4F46E5"/>
-                </a:solidFill>
-                <a:latin typeface="맑은 고딕"/>
-              </a:rPr>
-              <a:t>8 chunks</a:t>
-            </a:r>
-          </a:p>
-        </p:txBody>
-      </p:sp>
-      <p:sp>
-        <p:nvSpPr>
-          <p:cNvPr id="20" name="TextBox 19"/>
-          <p:cNvSpPr txBox="1"/>
-          <p:nvPr/>
-        </p:nvSpPr>
-        <p:spPr>
-          <a:xfrm>
-            <a:off x="868680" y="5394960"/>
-            <a:ext cx="5029200" cy="274320"/>
-          </a:xfrm>
-          <a:prstGeom prst="rect">
-            <a:avLst/>
-          </a:prstGeom>
-          <a:noFill/>
-        </p:spPr>
-        <p:txBody>
-          <a:bodyPr wrap="square" lIns="0" rIns="0" tIns="0" bIns="0">
-            <a:spAutoFit/>
-          </a:bodyPr>
-          <a:lstStyle/>
-          <a:p>
-            <a:pPr algn="l">
-              <a:lnSpc>
-                <a:spcPct val="125000"/>
-              </a:lnSpc>
-            </a:pPr>
-            <a:r>
-              <a:rPr sz="900" b="0">
-                <a:solidFill>
-                  <a:srgbClr val="424B5C"/>
-                </a:solidFill>
-                <a:latin typeface="맑은 고딕"/>
-              </a:rPr>
-              <a:t>평균(7)보다 1 큼 — 한 번에 더 많이 처리</a:t>
-            </a:r>
-          </a:p>
-        </p:txBody>
-      </p:sp>
-      <p:sp>
-        <p:nvSpPr>
-          <p:cNvPr id="21" name="TextBox 20"/>
-          <p:cNvSpPr txBox="1"/>
-          <p:nvPr/>
-        </p:nvSpPr>
-        <p:spPr>
-          <a:xfrm>
-            <a:off x="868680" y="5715000"/>
-            <a:ext cx="2286000" cy="320040"/>
-          </a:xfrm>
-          <a:prstGeom prst="rect">
-            <a:avLst/>
-          </a:prstGeom>
-          <a:noFill/>
-        </p:spPr>
-        <p:txBody>
-          <a:bodyPr wrap="square" lIns="0" rIns="0" tIns="0" bIns="0">
-            <a:spAutoFit/>
-          </a:bodyPr>
-          <a:lstStyle/>
-          <a:p>
-            <a:pPr algn="l">
-              <a:lnSpc>
-                <a:spcPct val="125000"/>
-              </a:lnSpc>
-            </a:pPr>
-            <a:r>
-              <a:rPr sz="1100" b="1">
-                <a:solidFill>
-                  <a:srgbClr val="0F141F"/>
-                </a:solidFill>
-                <a:latin typeface="맑은 고딕"/>
-              </a:rPr>
-              <a:t>동기 motivation</a:t>
-            </a:r>
-          </a:p>
-        </p:txBody>
-      </p:sp>
-      <p:sp>
-        <p:nvSpPr>
-          <p:cNvPr id="22" name="TextBox 21"/>
-          <p:cNvSpPr txBox="1"/>
-          <p:nvPr/>
-        </p:nvSpPr>
-        <p:spPr>
-          <a:xfrm>
-            <a:off x="3108960" y="5715000"/>
-            <a:ext cx="1371600" cy="365760"/>
-          </a:xfrm>
-          <a:prstGeom prst="rect">
-            <a:avLst/>
-          </a:prstGeom>
-          <a:noFill/>
-        </p:spPr>
-        <p:txBody>
-          <a:bodyPr wrap="square" lIns="0" rIns="0" tIns="0" bIns="0">
-            <a:spAutoFit/>
-          </a:bodyPr>
-          <a:lstStyle/>
-          <a:p>
-            <a:pPr algn="l">
-              <a:lnSpc>
-                <a:spcPct val="125000"/>
-              </a:lnSpc>
-            </a:pPr>
-            <a:r>
-              <a:rPr sz="1800" b="1">
-                <a:solidFill>
-                  <a:srgbClr val="4F46E5"/>
-                </a:solidFill>
-                <a:latin typeface="맑은 고딕"/>
-              </a:rPr>
-              <a:t>0.67</a:t>
-            </a:r>
-          </a:p>
-        </p:txBody>
-      </p:sp>
-      <p:sp>
-        <p:nvSpPr>
-          <p:cNvPr id="23" name="TextBox 22"/>
-          <p:cNvSpPr txBox="1"/>
-          <p:nvPr/>
-        </p:nvSpPr>
-        <p:spPr>
-          <a:xfrm>
-            <a:off x="868680" y="6080760"/>
-            <a:ext cx="5029200" cy="274320"/>
-          </a:xfrm>
-          <a:prstGeom prst="rect">
-            <a:avLst/>
-          </a:prstGeom>
-          <a:noFill/>
-        </p:spPr>
-        <p:txBody>
-          <a:bodyPr wrap="square" lIns="0" rIns="0" tIns="0" bIns="0">
-            <a:spAutoFit/>
-          </a:bodyPr>
-          <a:lstStyle/>
-          <a:p>
-            <a:pPr algn="l">
-              <a:lnSpc>
-                <a:spcPct val="125000"/>
-              </a:lnSpc>
-            </a:pPr>
-            <a:r>
-              <a:rPr sz="900" b="0">
-                <a:solidFill>
-                  <a:srgbClr val="424B5C"/>
-                </a:solidFill>
-                <a:latin typeface="맑은 고딕"/>
-              </a:rPr>
-              <a:t>평균(0.50)보다 높음 — 자발적 학습 의지 있음</a:t>
-            </a:r>
-          </a:p>
-        </p:txBody>
-      </p:sp>
-      <p:sp>
-        <p:nvSpPr>
-          <p:cNvPr id="24" name="TextBox 23"/>
-          <p:cNvSpPr txBox="1"/>
-          <p:nvPr/>
-        </p:nvSpPr>
-        <p:spPr>
-          <a:xfrm>
-            <a:off x="6400800" y="2606040"/>
-            <a:ext cx="5486400" cy="365760"/>
-          </a:xfrm>
-          <a:prstGeom prst="rect">
-            <a:avLst/>
-          </a:prstGeom>
-          <a:noFill/>
-        </p:spPr>
-        <p:txBody>
-          <a:bodyPr wrap="square" lIns="0" rIns="0" tIns="0" bIns="0">
-            <a:spAutoFit/>
-          </a:bodyPr>
-          <a:lstStyle/>
-          <a:p>
-            <a:pPr algn="l">
-              <a:lnSpc>
-                <a:spcPct val="125000"/>
-              </a:lnSpc>
-            </a:pPr>
-            <a:r>
-              <a:rPr sz="1100" b="1">
-                <a:solidFill>
-                  <a:srgbClr val="4F46E5"/>
-                </a:solidFill>
-                <a:latin typeface="맑은 고딕"/>
-              </a:rPr>
-              <a:t>어떻게 무작위 추출하는가 (실제 코드)</a:t>
-            </a:r>
-          </a:p>
-        </p:txBody>
-      </p:sp>
-      <p:sp>
-        <p:nvSpPr>
-          <p:cNvPr id="25" name="TextBox 24"/>
-          <p:cNvSpPr txBox="1"/>
-          <p:nvPr/>
-        </p:nvSpPr>
-        <p:spPr>
-          <a:xfrm>
-            <a:off x="6400800" y="3017520"/>
-            <a:ext cx="5486400" cy="1371600"/>
-          </a:xfrm>
-          <a:prstGeom prst="rect">
-            <a:avLst/>
-          </a:prstGeom>
-          <a:noFill/>
-        </p:spPr>
-        <p:txBody>
-          <a:bodyPr wrap="square" lIns="0" rIns="0" tIns="0" bIns="0">
-            <a:spAutoFit/>
-          </a:bodyPr>
-          <a:lstStyle/>
-          <a:p>
-            <a:pPr algn="l">
-              <a:lnSpc>
-                <a:spcPct val="140000"/>
-              </a:lnSpc>
-            </a:pPr>
-            <a:r>
-              <a:rPr sz="1100" b="0">
-                <a:solidFill>
-                  <a:srgbClr val="424B5C"/>
-                </a:solidFill>
-                <a:latin typeface="맑은 고딕"/>
-              </a:rPr>
-              <a:t>rng = np.random.default_rng(42)</a:t>
-            </a:r>
-          </a:p>
-          <a:p>
-            <a:pPr algn="l">
-              <a:lnSpc>
-                <a:spcPct val="140000"/>
-              </a:lnSpc>
-            </a:pPr>
-            <a:r>
-              <a:rPr sz="1100" b="0">
-                <a:solidFill>
-                  <a:srgbClr val="424B5C"/>
-                </a:solidFill>
-                <a:latin typeface="맑은 고딕"/>
-              </a:rPr>
-              <a:t>alpha = rng.normal(0.15, 0.05)</a:t>
-            </a:r>
-          </a:p>
-          <a:p>
-            <a:pPr algn="l">
-              <a:lnSpc>
-                <a:spcPct val="140000"/>
-              </a:lnSpc>
-            </a:pPr>
-            <a:r>
-              <a:rPr sz="1100" b="0">
-                <a:solidFill>
-                  <a:srgbClr val="424B5C"/>
-                </a:solidFill>
-                <a:latin typeface="맑은 고딕"/>
-              </a:rPr>
-              <a:t>d     = rng.normal(0.50, 0.10)</a:t>
-            </a:r>
-          </a:p>
-          <a:p>
-            <a:pPr algn="l">
-              <a:lnSpc>
-                <a:spcPct val="140000"/>
-              </a:lnSpc>
-            </a:pPr>
-            <a:r>
-              <a:rPr sz="1100" b="0">
-                <a:solidFill>
-                  <a:srgbClr val="424B5C"/>
-                </a:solidFill>
-                <a:latin typeface="맑은 고딕"/>
-              </a:rPr>
-              <a:t>WM    = rng.choice([5,6,7,8,9])</a:t>
-            </a:r>
-          </a:p>
-          <a:p>
-            <a:pPr algn="l">
-              <a:lnSpc>
-                <a:spcPct val="140000"/>
-              </a:lnSpc>
-            </a:pPr>
-            <a:r>
-              <a:rPr sz="1100" b="0">
-                <a:solidFill>
-                  <a:srgbClr val="424B5C"/>
-                </a:solidFill>
-                <a:latin typeface="맑은 고딕"/>
-              </a:rPr>
-              <a:t>motiv = rng.normal(0.50, 0.20)</a:t>
-            </a:r>
-          </a:p>
-        </p:txBody>
-      </p:sp>
-      <p:cxnSp>
-        <p:nvCxnSpPr>
-          <p:cNvPr id="26" name="Connector 25"/>
-          <p:cNvCxnSpPr/>
-          <p:nvPr/>
-        </p:nvCxnSpPr>
-        <p:spPr>
-          <a:xfrm>
-            <a:off x="6400800" y="4526280"/>
-            <a:ext cx="5120640" cy="0"/>
-          </a:xfrm>
-          <a:prstGeom prst="line">
-            <a:avLst/>
-          </a:prstGeom>
-          <a:ln w="19050">
-            <a:solidFill>
-              <a:srgbClr val="E5E7EB"/>
-            </a:solidFill>
-          </a:ln>
-        </p:spPr>
-        <p:style>
-          <a:lnRef idx="2">
-            <a:schemeClr val="accent1"/>
-          </a:lnRef>
-          <a:fillRef idx="0">
-            <a:schemeClr val="accent1"/>
-          </a:fillRef>
-          <a:effectRef idx="1">
-            <a:schemeClr val="accent1"/>
-          </a:effectRef>
-          <a:fontRef idx="minor">
-            <a:schemeClr val="tx1"/>
-          </a:fontRef>
-        </p:style>
-      </p:cxnSp>
-      <p:sp>
-        <p:nvSpPr>
-          <p:cNvPr id="27" name="TextBox 26"/>
-          <p:cNvSpPr txBox="1"/>
-          <p:nvPr/>
-        </p:nvSpPr>
-        <p:spPr>
-          <a:xfrm>
-            <a:off x="6400800" y="4663440"/>
-            <a:ext cx="5486400" cy="365760"/>
-          </a:xfrm>
-          <a:prstGeom prst="rect">
-            <a:avLst/>
-          </a:prstGeom>
-          <a:noFill/>
-        </p:spPr>
-        <p:txBody>
-          <a:bodyPr wrap="square" lIns="0" rIns="0" tIns="0" bIns="0">
-            <a:spAutoFit/>
-          </a:bodyPr>
-          <a:lstStyle/>
-          <a:p>
-            <a:pPr algn="l">
-              <a:lnSpc>
-                <a:spcPct val="125000"/>
-              </a:lnSpc>
-            </a:pPr>
-            <a:r>
-              <a:rPr sz="1100" b="1">
+            <a:off x="640080" y="6400800"/>
+            <a:ext cx="10972800" cy="365760"/>
+          </a:xfrm>
+          <a:prstGeom prst="rect">
+            <a:avLst/>
+          </a:prstGeom>
+          <a:noFill/>
+        </p:spPr>
+        <p:txBody>
+          <a:bodyPr wrap="square" lIns="0" rIns="0" tIns="0" bIns="0">
+            <a:spAutoFit/>
+          </a:bodyPr>
+          <a:lstStyle/>
+          <a:p>
+            <a:pPr algn="ctr">
+              <a:lnSpc>
+                <a:spcPct val="125000"/>
+              </a:lnSpc>
+            </a:pPr>
+            <a:r>
+              <a:rPr sz="1200" b="1">
                 <a:solidFill>
                   <a:srgbClr val="EC4899"/>
                 </a:solidFill>
                 <a:latin typeface="맑은 고딕"/>
               </a:rPr>
-              <a:t>1000명 각자 다른 4가지 속성 조합</a:t>
-            </a:r>
-          </a:p>
-        </p:txBody>
-      </p:sp>
-      <p:sp>
-        <p:nvSpPr>
-          <p:cNvPr id="28" name="TextBox 27"/>
-          <p:cNvSpPr txBox="1"/>
-          <p:nvPr/>
-        </p:nvSpPr>
-        <p:spPr>
-          <a:xfrm>
-            <a:off x="6400800" y="5029200"/>
-            <a:ext cx="5486400" cy="1463040"/>
-          </a:xfrm>
-          <a:prstGeom prst="rect">
-            <a:avLst/>
-          </a:prstGeom>
-          <a:noFill/>
-        </p:spPr>
-        <p:txBody>
-          <a:bodyPr wrap="square" lIns="0" rIns="0" tIns="0" bIns="0">
-            <a:spAutoFit/>
-          </a:bodyPr>
-          <a:lstStyle/>
-          <a:p>
-            <a:pPr algn="l">
-              <a:lnSpc>
-                <a:spcPct val="140000"/>
-              </a:lnSpc>
-            </a:pPr>
-            <a:r>
-              <a:rPr sz="1100" b="0">
-                <a:solidFill>
-                  <a:srgbClr val="424B5C"/>
-                </a:solidFill>
-                <a:latin typeface="맑은 고딕"/>
-              </a:rPr>
-              <a:t>김민준 같은 학생은 잘 적응한다.</a:t>
-            </a:r>
-          </a:p>
-          <a:p>
-            <a:pPr algn="l">
-              <a:lnSpc>
-                <a:spcPct val="140000"/>
-              </a:lnSpc>
-            </a:pPr>
-            <a:r>
-              <a:rPr sz="1100" b="0">
-                <a:solidFill>
-                  <a:srgbClr val="424B5C"/>
-                </a:solidFill>
-                <a:latin typeface="맑은 고딕"/>
-              </a:rPr>
-              <a:t>반면 α=0.08, WM=5인 학생은 같은 강의계획서에서 훨씬 큰 어려움을 겪는다.</a:t>
-            </a:r>
-          </a:p>
-          <a:p>
-            <a:pPr algn="l">
-              <a:lnSpc>
-                <a:spcPct val="140000"/>
-              </a:lnSpc>
-            </a:pPr>
-            <a:r>
-              <a:rPr sz="1100" b="0">
-                <a:solidFill>
-                  <a:srgbClr val="424B5C"/>
-                </a:solidFill>
-                <a:latin typeface="맑은 고딕"/>
-              </a:rPr>
-              <a:t>1000명 중 가장 약한 25%가 보호되는지를 본다.</a:t>
-            </a:r>
-          </a:p>
-        </p:txBody>
-      </p:sp>
-      <p:sp>
-        <p:nvSpPr>
-          <p:cNvPr id="29" name="TextBox 28"/>
-          <p:cNvSpPr txBox="1"/>
-          <p:nvPr/>
-        </p:nvSpPr>
-        <p:spPr>
-          <a:xfrm>
-            <a:off x="640080" y="6629400"/>
-            <a:ext cx="10972800" cy="274320"/>
-          </a:xfrm>
-          <a:prstGeom prst="rect">
-            <a:avLst/>
-          </a:prstGeom>
-          <a:noFill/>
-        </p:spPr>
-        <p:txBody>
-          <a:bodyPr wrap="square" lIns="0" rIns="0" tIns="0" bIns="0">
-            <a:spAutoFit/>
-          </a:bodyPr>
-          <a:lstStyle/>
-          <a:p>
-            <a:pPr algn="ctr">
-              <a:lnSpc>
-                <a:spcPct val="125000"/>
-              </a:lnSpc>
-            </a:pPr>
-            <a:r>
-              <a:rPr sz="900" b="0">
-                <a:solidFill>
-                  <a:srgbClr val="8B95A7"/>
-                </a:solidFill>
-                <a:latin typeface="맑은 고딕"/>
-              </a:rPr>
-              <a:t>이 설정값은 문헌 표준값 · T1 설문으로 본 강 학생 실제 값을 수집해 보정 예정</a:t>
+              <a:t>분석 질문: 개선안이 약한 학생도 도와주는가</a:t>
             </a:r>
           </a:p>
         </p:txBody>
@@ -17250,7 +17752,7 @@
                 </a:solidFill>
                 <a:latin typeface="맑은 고딕"/>
               </a:rPr>
-              <a:t>T2 · 시뮬 결과 예시</a:t>
+              <a:t>T2 · 시뮬 입력 예시</a:t>
             </a:r>
           </a:p>
         </p:txBody>
@@ -17289,7 +17791,7 @@
                 </a:solidFill>
                 <a:latin typeface="맑은 고딕"/>
               </a:rPr>
-              <a:t>왜 평균만 보면 안 되는가 — 분포 효과 차트</a:t>
+              <a:t>가상 학생 1000명 중 1명을 어떻게 설정하는가</a:t>
             </a:r>
           </a:p>
         </p:txBody>
@@ -17363,7 +17865,7 @@
                 </a:solidFill>
                 <a:latin typeface="맑은 고딕"/>
               </a:rPr>
-              <a:t>23</a:t>
+              <a:t>24</a:t>
             </a:r>
           </a:p>
         </p:txBody>
@@ -17376,7 +17878,7 @@
         </p:nvSpPr>
         <p:spPr>
           <a:xfrm>
-            <a:off x="640080" y="2103120"/>
+            <a:off x="640080" y="2011680"/>
             <a:ext cx="10972800" cy="365760"/>
           </a:xfrm>
           <a:prstGeom prst="rect">
@@ -17402,45 +17904,21 @@
                 </a:solidFill>
                 <a:latin typeface="맑은 고딕"/>
               </a:rPr>
-              <a:t>같은 개선안도 평균 학생에게는 별 차이 없지만, 약한 학생에게는 큰 도움이 된다.</a:t>
-            </a:r>
-          </a:p>
-        </p:txBody>
-      </p:sp>
-      <p:pic>
-        <p:nvPicPr>
-          <p:cNvPr id="8" name="Picture 7" descr="chart_distribution.png"/>
-          <p:cNvPicPr>
-            <a:picLocks noChangeAspect="1"/>
-          </p:cNvPicPr>
-          <p:nvPr/>
-        </p:nvPicPr>
-        <p:blipFill>
-          <a:blip r:embed="rId2"/>
-          <a:stretch>
-            <a:fillRect/>
-          </a:stretch>
-        </p:blipFill>
+              <a:t>1000명을 모두 똑같이 만들면 의미 없음. 학생마다 인지 능력이 다르게 무작위 배정함.</a:t>
+            </a:r>
+          </a:p>
+        </p:txBody>
+      </p:sp>
+      <p:sp>
+        <p:nvSpPr>
+          <p:cNvPr id="8" name="Rounded Rectangle 7"/>
+          <p:cNvSpPr/>
+          <p:nvPr/>
+        </p:nvSpPr>
         <p:spPr>
           <a:xfrm>
             <a:off x="640080" y="2606040"/>
-            <a:ext cx="7315200" cy="4064000"/>
-          </a:xfrm>
-          <a:prstGeom prst="rect">
-            <a:avLst/>
-          </a:prstGeom>
-        </p:spPr>
-      </p:pic>
-      <p:sp>
-        <p:nvSpPr>
-          <p:cNvPr id="9" name="Rounded Rectangle 8"/>
-          <p:cNvSpPr/>
-          <p:nvPr/>
-        </p:nvSpPr>
-        <p:spPr>
-          <a:xfrm>
-            <a:off x="8229600" y="2606040"/>
-            <a:ext cx="3291840" cy="3657600"/>
+            <a:ext cx="5486400" cy="3931920"/>
           </a:xfrm>
           <a:prstGeom prst="roundRect">
             <a:avLst>
@@ -17480,14 +17958,127 @@
       </p:sp>
       <p:sp>
         <p:nvSpPr>
+          <p:cNvPr id="9" name="TextBox 8"/>
+          <p:cNvSpPr txBox="1"/>
+          <p:nvPr/>
+        </p:nvSpPr>
+        <p:spPr>
+          <a:xfrm>
+            <a:off x="868680" y="2743200"/>
+            <a:ext cx="5029200" cy="365760"/>
+          </a:xfrm>
+          <a:prstGeom prst="rect">
+            <a:avLst/>
+          </a:prstGeom>
+          <a:noFill/>
+        </p:spPr>
+        <p:txBody>
+          <a:bodyPr wrap="square" lIns="0" rIns="0" tIns="0" bIns="0">
+            <a:spAutoFit/>
+          </a:bodyPr>
+          <a:lstStyle/>
+          <a:p>
+            <a:pPr algn="l">
+              <a:lnSpc>
+                <a:spcPct val="125000"/>
+              </a:lnSpc>
+            </a:pPr>
+            <a:r>
+              <a:rPr sz="1400" b="1">
+                <a:solidFill>
+                  <a:srgbClr val="4F46E5"/>
+                </a:solidFill>
+                <a:latin typeface="맑은 고딕"/>
+              </a:rPr>
+              <a:t>예시 학생 #1 · '김민준'</a:t>
+            </a:r>
+          </a:p>
+        </p:txBody>
+      </p:sp>
+      <p:sp>
+        <p:nvSpPr>
           <p:cNvPr id="10" name="TextBox 9"/>
           <p:cNvSpPr txBox="1"/>
           <p:nvPr/>
         </p:nvSpPr>
         <p:spPr>
           <a:xfrm>
-            <a:off x="8412480" y="2743200"/>
-            <a:ext cx="3017520" cy="365760"/>
+            <a:off x="868680" y="3108960"/>
+            <a:ext cx="5029200" cy="320040"/>
+          </a:xfrm>
+          <a:prstGeom prst="rect">
+            <a:avLst/>
+          </a:prstGeom>
+          <a:noFill/>
+        </p:spPr>
+        <p:txBody>
+          <a:bodyPr wrap="square" lIns="0" rIns="0" tIns="0" bIns="0">
+            <a:spAutoFit/>
+          </a:bodyPr>
+          <a:lstStyle/>
+          <a:p>
+            <a:pPr algn="l">
+              <a:lnSpc>
+                <a:spcPct val="125000"/>
+              </a:lnSpc>
+            </a:pPr>
+            <a:r>
+              <a:rPr sz="1000" b="0">
+                <a:solidFill>
+                  <a:srgbClr val="8B95A7"/>
+                </a:solidFill>
+                <a:latin typeface="맑은 고딕"/>
+              </a:rPr>
+              <a:t>코드가 1000명을 만들 때 첫 번째 학생</a:t>
+            </a:r>
+          </a:p>
+        </p:txBody>
+      </p:sp>
+      <p:cxnSp>
+        <p:nvCxnSpPr>
+          <p:cNvPr id="11" name="Connector 10"/>
+          <p:cNvCxnSpPr/>
+          <p:nvPr/>
+        </p:nvCxnSpPr>
+        <p:spPr>
+          <a:xfrm>
+            <a:off x="868680" y="3520440"/>
+            <a:ext cx="5074920" cy="0"/>
+          </a:xfrm>
+          <a:prstGeom prst="line">
+            <a:avLst/>
+          </a:prstGeom>
+          <a:ln w="19050">
+            <a:solidFill>
+              <a:srgbClr val="4F46E5"/>
+            </a:solidFill>
+          </a:ln>
+        </p:spPr>
+        <p:style>
+          <a:lnRef idx="2">
+            <a:schemeClr val="accent1"/>
+          </a:lnRef>
+          <a:fillRef idx="0">
+            <a:schemeClr val="accent1"/>
+          </a:fillRef>
+          <a:effectRef idx="1">
+            <a:schemeClr val="accent1"/>
+          </a:effectRef>
+          <a:fontRef idx="minor">
+            <a:schemeClr val="tx1"/>
+          </a:fontRef>
+        </p:style>
+      </p:cxnSp>
+      <p:sp>
+        <p:nvSpPr>
+          <p:cNvPr id="12" name="TextBox 11"/>
+          <p:cNvSpPr txBox="1"/>
+          <p:nvPr/>
+        </p:nvSpPr>
+        <p:spPr>
+          <a:xfrm>
+            <a:off x="868680" y="3657600"/>
+            <a:ext cx="2286000" cy="320040"/>
           </a:xfrm>
           <a:prstGeom prst="rect">
             <a:avLst/>
@@ -17508,25 +18099,493 @@
             <a:r>
               <a:rPr sz="1100" b="1">
                 <a:solidFill>
+                  <a:srgbClr val="0F141F"/>
+                </a:solidFill>
+                <a:latin typeface="맑은 고딕"/>
+              </a:rPr>
+              <a:t>학습률 α</a:t>
+            </a:r>
+          </a:p>
+        </p:txBody>
+      </p:sp>
+      <p:sp>
+        <p:nvSpPr>
+          <p:cNvPr id="13" name="TextBox 12"/>
+          <p:cNvSpPr txBox="1"/>
+          <p:nvPr/>
+        </p:nvSpPr>
+        <p:spPr>
+          <a:xfrm>
+            <a:off x="3108960" y="3657600"/>
+            <a:ext cx="1371600" cy="365760"/>
+          </a:xfrm>
+          <a:prstGeom prst="rect">
+            <a:avLst/>
+          </a:prstGeom>
+          <a:noFill/>
+        </p:spPr>
+        <p:txBody>
+          <a:bodyPr wrap="square" lIns="0" rIns="0" tIns="0" bIns="0">
+            <a:spAutoFit/>
+          </a:bodyPr>
+          <a:lstStyle/>
+          <a:p>
+            <a:pPr algn="l">
+              <a:lnSpc>
+                <a:spcPct val="125000"/>
+              </a:lnSpc>
+            </a:pPr>
+            <a:r>
+              <a:rPr sz="1800" b="1">
+                <a:solidFill>
                   <a:srgbClr val="4F46E5"/>
                 </a:solidFill>
                 <a:latin typeface="맑은 고딕"/>
               </a:rPr>
-              <a:t>차트 해석</a:t>
-            </a:r>
-          </a:p>
-        </p:txBody>
-      </p:sp>
-      <p:sp>
-        <p:nvSpPr>
-          <p:cNvPr id="11" name="TextBox 10"/>
-          <p:cNvSpPr txBox="1"/>
-          <p:nvPr/>
-        </p:nvSpPr>
-        <p:spPr>
-          <a:xfrm>
-            <a:off x="8412480" y="3200400"/>
-            <a:ext cx="3017520" cy="2286000"/>
+              <a:t>0.18</a:t>
+            </a:r>
+          </a:p>
+        </p:txBody>
+      </p:sp>
+      <p:sp>
+        <p:nvSpPr>
+          <p:cNvPr id="14" name="TextBox 13"/>
+          <p:cNvSpPr txBox="1"/>
+          <p:nvPr/>
+        </p:nvSpPr>
+        <p:spPr>
+          <a:xfrm>
+            <a:off x="868680" y="4023360"/>
+            <a:ext cx="5029200" cy="274320"/>
+          </a:xfrm>
+          <a:prstGeom prst="rect">
+            <a:avLst/>
+          </a:prstGeom>
+          <a:noFill/>
+        </p:spPr>
+        <p:txBody>
+          <a:bodyPr wrap="square" lIns="0" rIns="0" tIns="0" bIns="0">
+            <a:spAutoFit/>
+          </a:bodyPr>
+          <a:lstStyle/>
+          <a:p>
+            <a:pPr algn="l">
+              <a:lnSpc>
+                <a:spcPct val="125000"/>
+              </a:lnSpc>
+            </a:pPr>
+            <a:r>
+              <a:rPr sz="900" b="0">
+                <a:solidFill>
+                  <a:srgbClr val="424B5C"/>
+                </a:solidFill>
+                <a:latin typeface="맑은 고딕"/>
+              </a:rPr>
+              <a:t>평균(0.15)보다 약간 높음 — 새 경험을 빨리 받아들임</a:t>
+            </a:r>
+          </a:p>
+        </p:txBody>
+      </p:sp>
+      <p:sp>
+        <p:nvSpPr>
+          <p:cNvPr id="15" name="TextBox 14"/>
+          <p:cNvSpPr txBox="1"/>
+          <p:nvPr/>
+        </p:nvSpPr>
+        <p:spPr>
+          <a:xfrm>
+            <a:off x="868680" y="4343400"/>
+            <a:ext cx="2286000" cy="320040"/>
+          </a:xfrm>
+          <a:prstGeom prst="rect">
+            <a:avLst/>
+          </a:prstGeom>
+          <a:noFill/>
+        </p:spPr>
+        <p:txBody>
+          <a:bodyPr wrap="square" lIns="0" rIns="0" tIns="0" bIns="0">
+            <a:spAutoFit/>
+          </a:bodyPr>
+          <a:lstStyle/>
+          <a:p>
+            <a:pPr algn="l">
+              <a:lnSpc>
+                <a:spcPct val="125000"/>
+              </a:lnSpc>
+            </a:pPr>
+            <a:r>
+              <a:rPr sz="1100" b="1">
+                <a:solidFill>
+                  <a:srgbClr val="0F141F"/>
+                </a:solidFill>
+                <a:latin typeface="맑은 고딕"/>
+              </a:rPr>
+              <a:t>망각 d</a:t>
+            </a:r>
+          </a:p>
+        </p:txBody>
+      </p:sp>
+      <p:sp>
+        <p:nvSpPr>
+          <p:cNvPr id="16" name="TextBox 15"/>
+          <p:cNvSpPr txBox="1"/>
+          <p:nvPr/>
+        </p:nvSpPr>
+        <p:spPr>
+          <a:xfrm>
+            <a:off x="3108960" y="4343400"/>
+            <a:ext cx="1371600" cy="365760"/>
+          </a:xfrm>
+          <a:prstGeom prst="rect">
+            <a:avLst/>
+          </a:prstGeom>
+          <a:noFill/>
+        </p:spPr>
+        <p:txBody>
+          <a:bodyPr wrap="square" lIns="0" rIns="0" tIns="0" bIns="0">
+            <a:spAutoFit/>
+          </a:bodyPr>
+          <a:lstStyle/>
+          <a:p>
+            <a:pPr algn="l">
+              <a:lnSpc>
+                <a:spcPct val="125000"/>
+              </a:lnSpc>
+            </a:pPr>
+            <a:r>
+              <a:rPr sz="1800" b="1">
+                <a:solidFill>
+                  <a:srgbClr val="4F46E5"/>
+                </a:solidFill>
+                <a:latin typeface="맑은 고딕"/>
+              </a:rPr>
+              <a:t>0.42</a:t>
+            </a:r>
+          </a:p>
+        </p:txBody>
+      </p:sp>
+      <p:sp>
+        <p:nvSpPr>
+          <p:cNvPr id="17" name="TextBox 16"/>
+          <p:cNvSpPr txBox="1"/>
+          <p:nvPr/>
+        </p:nvSpPr>
+        <p:spPr>
+          <a:xfrm>
+            <a:off x="868680" y="4709160"/>
+            <a:ext cx="5029200" cy="274320"/>
+          </a:xfrm>
+          <a:prstGeom prst="rect">
+            <a:avLst/>
+          </a:prstGeom>
+          <a:noFill/>
+        </p:spPr>
+        <p:txBody>
+          <a:bodyPr wrap="square" lIns="0" rIns="0" tIns="0" bIns="0">
+            <a:spAutoFit/>
+          </a:bodyPr>
+          <a:lstStyle/>
+          <a:p>
+            <a:pPr algn="l">
+              <a:lnSpc>
+                <a:spcPct val="125000"/>
+              </a:lnSpc>
+            </a:pPr>
+            <a:r>
+              <a:rPr sz="900" b="0">
+                <a:solidFill>
+                  <a:srgbClr val="424B5C"/>
+                </a:solidFill>
+                <a:latin typeface="맑은 고딕"/>
+              </a:rPr>
+              <a:t>평균(0.50)보다 낮음 — 기억이 천천히 사라짐</a:t>
+            </a:r>
+          </a:p>
+        </p:txBody>
+      </p:sp>
+      <p:sp>
+        <p:nvSpPr>
+          <p:cNvPr id="18" name="TextBox 17"/>
+          <p:cNvSpPr txBox="1"/>
+          <p:nvPr/>
+        </p:nvSpPr>
+        <p:spPr>
+          <a:xfrm>
+            <a:off x="868680" y="5029200"/>
+            <a:ext cx="2286000" cy="320040"/>
+          </a:xfrm>
+          <a:prstGeom prst="rect">
+            <a:avLst/>
+          </a:prstGeom>
+          <a:noFill/>
+        </p:spPr>
+        <p:txBody>
+          <a:bodyPr wrap="square" lIns="0" rIns="0" tIns="0" bIns="0">
+            <a:spAutoFit/>
+          </a:bodyPr>
+          <a:lstStyle/>
+          <a:p>
+            <a:pPr algn="l">
+              <a:lnSpc>
+                <a:spcPct val="125000"/>
+              </a:lnSpc>
+            </a:pPr>
+            <a:r>
+              <a:rPr sz="1100" b="1">
+                <a:solidFill>
+                  <a:srgbClr val="0F141F"/>
+                </a:solidFill>
+                <a:latin typeface="맑은 고딕"/>
+              </a:rPr>
+              <a:t>작업 기억 WM</a:t>
+            </a:r>
+          </a:p>
+        </p:txBody>
+      </p:sp>
+      <p:sp>
+        <p:nvSpPr>
+          <p:cNvPr id="19" name="TextBox 18"/>
+          <p:cNvSpPr txBox="1"/>
+          <p:nvPr/>
+        </p:nvSpPr>
+        <p:spPr>
+          <a:xfrm>
+            <a:off x="3108960" y="5029200"/>
+            <a:ext cx="1371600" cy="365760"/>
+          </a:xfrm>
+          <a:prstGeom prst="rect">
+            <a:avLst/>
+          </a:prstGeom>
+          <a:noFill/>
+        </p:spPr>
+        <p:txBody>
+          <a:bodyPr wrap="square" lIns="0" rIns="0" tIns="0" bIns="0">
+            <a:spAutoFit/>
+          </a:bodyPr>
+          <a:lstStyle/>
+          <a:p>
+            <a:pPr algn="l">
+              <a:lnSpc>
+                <a:spcPct val="125000"/>
+              </a:lnSpc>
+            </a:pPr>
+            <a:r>
+              <a:rPr sz="1800" b="1">
+                <a:solidFill>
+                  <a:srgbClr val="4F46E5"/>
+                </a:solidFill>
+                <a:latin typeface="맑은 고딕"/>
+              </a:rPr>
+              <a:t>8 chunks</a:t>
+            </a:r>
+          </a:p>
+        </p:txBody>
+      </p:sp>
+      <p:sp>
+        <p:nvSpPr>
+          <p:cNvPr id="20" name="TextBox 19"/>
+          <p:cNvSpPr txBox="1"/>
+          <p:nvPr/>
+        </p:nvSpPr>
+        <p:spPr>
+          <a:xfrm>
+            <a:off x="868680" y="5394960"/>
+            <a:ext cx="5029200" cy="274320"/>
+          </a:xfrm>
+          <a:prstGeom prst="rect">
+            <a:avLst/>
+          </a:prstGeom>
+          <a:noFill/>
+        </p:spPr>
+        <p:txBody>
+          <a:bodyPr wrap="square" lIns="0" rIns="0" tIns="0" bIns="0">
+            <a:spAutoFit/>
+          </a:bodyPr>
+          <a:lstStyle/>
+          <a:p>
+            <a:pPr algn="l">
+              <a:lnSpc>
+                <a:spcPct val="125000"/>
+              </a:lnSpc>
+            </a:pPr>
+            <a:r>
+              <a:rPr sz="900" b="0">
+                <a:solidFill>
+                  <a:srgbClr val="424B5C"/>
+                </a:solidFill>
+                <a:latin typeface="맑은 고딕"/>
+              </a:rPr>
+              <a:t>평균(7)보다 1 큼 — 한 번에 더 많이 처리</a:t>
+            </a:r>
+          </a:p>
+        </p:txBody>
+      </p:sp>
+      <p:sp>
+        <p:nvSpPr>
+          <p:cNvPr id="21" name="TextBox 20"/>
+          <p:cNvSpPr txBox="1"/>
+          <p:nvPr/>
+        </p:nvSpPr>
+        <p:spPr>
+          <a:xfrm>
+            <a:off x="868680" y="5715000"/>
+            <a:ext cx="2286000" cy="320040"/>
+          </a:xfrm>
+          <a:prstGeom prst="rect">
+            <a:avLst/>
+          </a:prstGeom>
+          <a:noFill/>
+        </p:spPr>
+        <p:txBody>
+          <a:bodyPr wrap="square" lIns="0" rIns="0" tIns="0" bIns="0">
+            <a:spAutoFit/>
+          </a:bodyPr>
+          <a:lstStyle/>
+          <a:p>
+            <a:pPr algn="l">
+              <a:lnSpc>
+                <a:spcPct val="125000"/>
+              </a:lnSpc>
+            </a:pPr>
+            <a:r>
+              <a:rPr sz="1100" b="1">
+                <a:solidFill>
+                  <a:srgbClr val="0F141F"/>
+                </a:solidFill>
+                <a:latin typeface="맑은 고딕"/>
+              </a:rPr>
+              <a:t>동기 motivation</a:t>
+            </a:r>
+          </a:p>
+        </p:txBody>
+      </p:sp>
+      <p:sp>
+        <p:nvSpPr>
+          <p:cNvPr id="22" name="TextBox 21"/>
+          <p:cNvSpPr txBox="1"/>
+          <p:nvPr/>
+        </p:nvSpPr>
+        <p:spPr>
+          <a:xfrm>
+            <a:off x="3108960" y="5715000"/>
+            <a:ext cx="1371600" cy="365760"/>
+          </a:xfrm>
+          <a:prstGeom prst="rect">
+            <a:avLst/>
+          </a:prstGeom>
+          <a:noFill/>
+        </p:spPr>
+        <p:txBody>
+          <a:bodyPr wrap="square" lIns="0" rIns="0" tIns="0" bIns="0">
+            <a:spAutoFit/>
+          </a:bodyPr>
+          <a:lstStyle/>
+          <a:p>
+            <a:pPr algn="l">
+              <a:lnSpc>
+                <a:spcPct val="125000"/>
+              </a:lnSpc>
+            </a:pPr>
+            <a:r>
+              <a:rPr sz="1800" b="1">
+                <a:solidFill>
+                  <a:srgbClr val="4F46E5"/>
+                </a:solidFill>
+                <a:latin typeface="맑은 고딕"/>
+              </a:rPr>
+              <a:t>0.67</a:t>
+            </a:r>
+          </a:p>
+        </p:txBody>
+      </p:sp>
+      <p:sp>
+        <p:nvSpPr>
+          <p:cNvPr id="23" name="TextBox 22"/>
+          <p:cNvSpPr txBox="1"/>
+          <p:nvPr/>
+        </p:nvSpPr>
+        <p:spPr>
+          <a:xfrm>
+            <a:off x="868680" y="6080760"/>
+            <a:ext cx="5029200" cy="274320"/>
+          </a:xfrm>
+          <a:prstGeom prst="rect">
+            <a:avLst/>
+          </a:prstGeom>
+          <a:noFill/>
+        </p:spPr>
+        <p:txBody>
+          <a:bodyPr wrap="square" lIns="0" rIns="0" tIns="0" bIns="0">
+            <a:spAutoFit/>
+          </a:bodyPr>
+          <a:lstStyle/>
+          <a:p>
+            <a:pPr algn="l">
+              <a:lnSpc>
+                <a:spcPct val="125000"/>
+              </a:lnSpc>
+            </a:pPr>
+            <a:r>
+              <a:rPr sz="900" b="0">
+                <a:solidFill>
+                  <a:srgbClr val="424B5C"/>
+                </a:solidFill>
+                <a:latin typeface="맑은 고딕"/>
+              </a:rPr>
+              <a:t>평균(0.50)보다 높음 — 자발적 학습 의지 있음</a:t>
+            </a:r>
+          </a:p>
+        </p:txBody>
+      </p:sp>
+      <p:sp>
+        <p:nvSpPr>
+          <p:cNvPr id="24" name="TextBox 23"/>
+          <p:cNvSpPr txBox="1"/>
+          <p:nvPr/>
+        </p:nvSpPr>
+        <p:spPr>
+          <a:xfrm>
+            <a:off x="6400800" y="2606040"/>
+            <a:ext cx="5486400" cy="365760"/>
+          </a:xfrm>
+          <a:prstGeom prst="rect">
+            <a:avLst/>
+          </a:prstGeom>
+          <a:noFill/>
+        </p:spPr>
+        <p:txBody>
+          <a:bodyPr wrap="square" lIns="0" rIns="0" tIns="0" bIns="0">
+            <a:spAutoFit/>
+          </a:bodyPr>
+          <a:lstStyle/>
+          <a:p>
+            <a:pPr algn="l">
+              <a:lnSpc>
+                <a:spcPct val="125000"/>
+              </a:lnSpc>
+            </a:pPr>
+            <a:r>
+              <a:rPr sz="1100" b="1">
+                <a:solidFill>
+                  <a:srgbClr val="4F46E5"/>
+                </a:solidFill>
+                <a:latin typeface="맑은 고딕"/>
+              </a:rPr>
+              <a:t>어떻게 무작위 추출하는가 (실제 코드)</a:t>
+            </a:r>
+          </a:p>
+        </p:txBody>
+      </p:sp>
+      <p:sp>
+        <p:nvSpPr>
+          <p:cNvPr id="25" name="TextBox 24"/>
+          <p:cNvSpPr txBox="1"/>
+          <p:nvPr/>
+        </p:nvSpPr>
+        <p:spPr>
+          <a:xfrm>
+            <a:off x="6400800" y="3017520"/>
+            <a:ext cx="5486400" cy="1371600"/>
           </a:xfrm>
           <a:prstGeom prst="rect">
             <a:avLst/>
@@ -17545,13 +18604,13 @@
               </a:lnSpc>
             </a:pPr>
             <a:r>
-              <a:rPr sz="1000" b="0">
+              <a:rPr sz="1100" b="0">
                 <a:solidFill>
                   <a:srgbClr val="424B5C"/>
                 </a:solidFill>
                 <a:latin typeface="맑은 고딕"/>
               </a:rPr>
-              <a:t>기존 강의계획서:</a:t>
+              <a:t>rng = np.random.default_rng(42)</a:t>
             </a:r>
           </a:p>
           <a:p>
@@ -17561,13 +18620,13 @@
               </a:lnSpc>
             </a:pPr>
             <a:r>
-              <a:rPr sz="1000" b="0">
+              <a:rPr sz="1100" b="0">
                 <a:solidFill>
                   <a:srgbClr val="424B5C"/>
                 </a:solidFill>
                 <a:latin typeface="맑은 고딕"/>
               </a:rPr>
-              <a:t>평균 12.5초, 하위 22.3초.</a:t>
+              <a:t>alpha = rng.normal(0.15, 0.05)</a:t>
             </a:r>
           </a:p>
           <a:p>
@@ -17577,13 +18636,13 @@
               </a:lnSpc>
             </a:pPr>
             <a:r>
-              <a:rPr sz="1000" b="0">
+              <a:rPr sz="1100" b="0">
                 <a:solidFill>
                   <a:srgbClr val="424B5C"/>
                 </a:solidFill>
                 <a:latin typeface="맑은 고딕"/>
               </a:rPr>
-              <a:t>약한 학생이 1.8배 손해.</a:t>
+              <a:t>d     = rng.normal(0.50, 0.10)</a:t>
             </a:r>
           </a:p>
           <a:p>
@@ -17592,6 +18651,15 @@
                 <a:spcPct val="140000"/>
               </a:lnSpc>
             </a:pPr>
+            <a:r>
+              <a:rPr sz="1100" b="0">
+                <a:solidFill>
+                  <a:srgbClr val="424B5C"/>
+                </a:solidFill>
+                <a:latin typeface="맑은 고딕"/>
+              </a:rPr>
+              <a:t>WM    = rng.choice([5,6,7,8,9])</a:t>
+            </a:r>
           </a:p>
           <a:p>
             <a:pPr algn="l">
@@ -17600,15 +18668,112 @@
               </a:lnSpc>
             </a:pPr>
             <a:r>
-              <a:rPr sz="1000" b="0">
+              <a:rPr sz="1100" b="0">
                 <a:solidFill>
                   <a:srgbClr val="424B5C"/>
                 </a:solidFill>
                 <a:latin typeface="맑은 고딕"/>
               </a:rPr>
-              <a:t>분산 평가 도입:</a:t>
-            </a:r>
-          </a:p>
+              <a:t>motiv = rng.normal(0.50, 0.20)</a:t>
+            </a:r>
+          </a:p>
+        </p:txBody>
+      </p:sp>
+      <p:cxnSp>
+        <p:nvCxnSpPr>
+          <p:cNvPr id="26" name="Connector 25"/>
+          <p:cNvCxnSpPr/>
+          <p:nvPr/>
+        </p:nvCxnSpPr>
+        <p:spPr>
+          <a:xfrm>
+            <a:off x="6400800" y="4526280"/>
+            <a:ext cx="5120640" cy="0"/>
+          </a:xfrm>
+          <a:prstGeom prst="line">
+            <a:avLst/>
+          </a:prstGeom>
+          <a:ln w="19050">
+            <a:solidFill>
+              <a:srgbClr val="E5E7EB"/>
+            </a:solidFill>
+          </a:ln>
+        </p:spPr>
+        <p:style>
+          <a:lnRef idx="2">
+            <a:schemeClr val="accent1"/>
+          </a:lnRef>
+          <a:fillRef idx="0">
+            <a:schemeClr val="accent1"/>
+          </a:fillRef>
+          <a:effectRef idx="1">
+            <a:schemeClr val="accent1"/>
+          </a:effectRef>
+          <a:fontRef idx="minor">
+            <a:schemeClr val="tx1"/>
+          </a:fontRef>
+        </p:style>
+      </p:cxnSp>
+      <p:sp>
+        <p:nvSpPr>
+          <p:cNvPr id="27" name="TextBox 26"/>
+          <p:cNvSpPr txBox="1"/>
+          <p:nvPr/>
+        </p:nvSpPr>
+        <p:spPr>
+          <a:xfrm>
+            <a:off x="6400800" y="4663440"/>
+            <a:ext cx="5486400" cy="365760"/>
+          </a:xfrm>
+          <a:prstGeom prst="rect">
+            <a:avLst/>
+          </a:prstGeom>
+          <a:noFill/>
+        </p:spPr>
+        <p:txBody>
+          <a:bodyPr wrap="square" lIns="0" rIns="0" tIns="0" bIns="0">
+            <a:spAutoFit/>
+          </a:bodyPr>
+          <a:lstStyle/>
+          <a:p>
+            <a:pPr algn="l">
+              <a:lnSpc>
+                <a:spcPct val="125000"/>
+              </a:lnSpc>
+            </a:pPr>
+            <a:r>
+              <a:rPr sz="1100" b="1">
+                <a:solidFill>
+                  <a:srgbClr val="EC4899"/>
+                </a:solidFill>
+                <a:latin typeface="맑은 고딕"/>
+              </a:rPr>
+              <a:t>1000명 각자 다른 4가지 속성 조합</a:t>
+            </a:r>
+          </a:p>
+        </p:txBody>
+      </p:sp>
+      <p:sp>
+        <p:nvSpPr>
+          <p:cNvPr id="28" name="TextBox 27"/>
+          <p:cNvSpPr txBox="1"/>
+          <p:nvPr/>
+        </p:nvSpPr>
+        <p:spPr>
+          <a:xfrm>
+            <a:off x="6400800" y="5029200"/>
+            <a:ext cx="5486400" cy="1463040"/>
+          </a:xfrm>
+          <a:prstGeom prst="rect">
+            <a:avLst/>
+          </a:prstGeom>
+          <a:noFill/>
+        </p:spPr>
+        <p:txBody>
+          <a:bodyPr wrap="square" lIns="0" rIns="0" tIns="0" bIns="0">
+            <a:spAutoFit/>
+          </a:bodyPr>
+          <a:lstStyle/>
           <a:p>
             <a:pPr algn="l">
               <a:lnSpc>
@@ -17616,13 +18781,13 @@
               </a:lnSpc>
             </a:pPr>
             <a:r>
-              <a:rPr sz="1000" b="0">
+              <a:rPr sz="1100" b="0">
                 <a:solidFill>
                   <a:srgbClr val="424B5C"/>
                 </a:solidFill>
                 <a:latin typeface="맑은 고딕"/>
               </a:rPr>
-              <a:t>평균 10.2초, 하위 13.5초.</a:t>
+              <a:t>김민준 같은 학생은 잘 적응한다.</a:t>
             </a:r>
           </a:p>
           <a:p>
@@ -17632,27 +18797,43 @@
               </a:lnSpc>
             </a:pPr>
             <a:r>
-              <a:rPr sz="1000" b="0">
+              <a:rPr sz="1100" b="0">
                 <a:solidFill>
                   <a:srgbClr val="424B5C"/>
                 </a:solidFill>
                 <a:latin typeface="맑은 고딕"/>
               </a:rPr>
-              <a:t>격차 1.3배로 감소.</a:t>
-            </a:r>
-          </a:p>
-        </p:txBody>
-      </p:sp>
-      <p:sp>
-        <p:nvSpPr>
-          <p:cNvPr id="12" name="TextBox 11"/>
-          <p:cNvSpPr txBox="1"/>
-          <p:nvPr/>
-        </p:nvSpPr>
-        <p:spPr>
-          <a:xfrm>
-            <a:off x="640080" y="6446520"/>
-            <a:ext cx="10972800" cy="365760"/>
+              <a:t>반면 α=0.08, WM=5인 학생은 같은 강의계획서에서 훨씬 큰 어려움을 겪는다.</a:t>
+            </a:r>
+          </a:p>
+          <a:p>
+            <a:pPr algn="l">
+              <a:lnSpc>
+                <a:spcPct val="140000"/>
+              </a:lnSpc>
+            </a:pPr>
+            <a:r>
+              <a:rPr sz="1100" b="0">
+                <a:solidFill>
+                  <a:srgbClr val="424B5C"/>
+                </a:solidFill>
+                <a:latin typeface="맑은 고딕"/>
+              </a:rPr>
+              <a:t>1000명 중 가장 약한 25%가 보호되는지를 본다.</a:t>
+            </a:r>
+          </a:p>
+        </p:txBody>
+      </p:sp>
+      <p:sp>
+        <p:nvSpPr>
+          <p:cNvPr id="29" name="TextBox 28"/>
+          <p:cNvSpPr txBox="1"/>
+          <p:nvPr/>
+        </p:nvSpPr>
+        <p:spPr>
+          <a:xfrm>
+            <a:off x="640080" y="6629400"/>
+            <a:ext cx="10972800" cy="274320"/>
           </a:xfrm>
           <a:prstGeom prst="rect">
             <a:avLst/>
@@ -17671,13 +18852,13 @@
               </a:lnSpc>
             </a:pPr>
             <a:r>
-              <a:rPr sz="1200" b="1">
-                <a:solidFill>
-                  <a:srgbClr val="EC4899"/>
-                </a:solidFill>
-                <a:latin typeface="맑은 고딕"/>
-              </a:rPr>
-              <a:t>개선안은 평균이 아니라 분포의 꼬리를 다듬는다</a:t>
+              <a:rPr sz="900" b="0">
+                <a:solidFill>
+                  <a:srgbClr val="8B95A7"/>
+                </a:solidFill>
+                <a:latin typeface="맑은 고딕"/>
+              </a:rPr>
+              <a:t>이 설정값은 문헌 표준값 · T1 설문으로 본 강 학생 실제 값을 수집해 보정 예정</a:t>
             </a:r>
           </a:p>
         </p:txBody>
@@ -17777,7 +18958,7 @@
                 </a:solidFill>
                 <a:latin typeface="맑은 고딕"/>
               </a:rPr>
-              <a:t>T3 · 친분 그래프 시뮬</a:t>
+              <a:t>T2 · 시뮬 결과 예시</a:t>
             </a:r>
           </a:p>
         </p:txBody>
@@ -17816,7 +18997,7 @@
                 </a:solidFill>
                 <a:latin typeface="맑은 고딕"/>
               </a:rPr>
-              <a:t>친구 관계를 그림으로 그려서 "팀장이 누구를 뽑는지" 시뮬</a:t>
+              <a:t>평균만 보면 가려지는 진실 — 분포 효과 차트</a:t>
             </a:r>
           </a:p>
         </p:txBody>
@@ -17890,7 +19071,7 @@
                 </a:solidFill>
                 <a:latin typeface="맑은 고딕"/>
               </a:rPr>
-              <a:t>23</a:t>
+              <a:t>25</a:t>
             </a:r>
           </a:p>
         </p:txBody>
@@ -17903,47 +19084,8 @@
         </p:nvSpPr>
         <p:spPr>
           <a:xfrm>
-            <a:off x="640080" y="2103120"/>
-            <a:ext cx="10972800" cy="411480"/>
-          </a:xfrm>
-          <a:prstGeom prst="rect">
-            <a:avLst/>
-          </a:prstGeom>
-          <a:noFill/>
-        </p:spPr>
-        <p:txBody>
-          <a:bodyPr wrap="square" lIns="0" rIns="0" tIns="0" bIns="0">
-            <a:spAutoFit/>
-          </a:bodyPr>
-          <a:lstStyle/>
-          <a:p>
-            <a:pPr algn="l">
-              <a:lnSpc>
-                <a:spcPct val="125000"/>
-              </a:lnSpc>
-            </a:pPr>
-            <a:r>
-              <a:rPr sz="1500" b="1">
-                <a:solidFill>
-                  <a:srgbClr val="0F141F"/>
-                </a:solidFill>
-                <a:latin typeface="맑은 고딕"/>
-              </a:rPr>
-              <a:t>사람 모집 없이도 친분 휴리스틱을 검증할 수 있다.</a:t>
-            </a:r>
-          </a:p>
-        </p:txBody>
-      </p:sp>
-      <p:sp>
-        <p:nvSpPr>
-          <p:cNvPr id="8" name="TextBox 7"/>
-          <p:cNvSpPr txBox="1"/>
-          <p:nvPr/>
-        </p:nvSpPr>
-        <p:spPr>
-          <a:xfrm>
-            <a:off x="640080" y="2560320"/>
-            <a:ext cx="10972800" cy="411480"/>
+            <a:off x="640080" y="2011680"/>
+            <a:ext cx="10972800" cy="365760"/>
           </a:xfrm>
           <a:prstGeom prst="rect">
             <a:avLst/>
@@ -17968,55 +19110,449 @@
                 </a:solidFill>
                 <a:latin typeface="맑은 고딕"/>
               </a:rPr>
-              <a:t>가상 학생 30명에 친한 정도를 다 설정 → 팀장이 5가지 방식으로 뽑게 함 → 그림으로 비교.</a:t>
-            </a:r>
-          </a:p>
-        </p:txBody>
-      </p:sp>
-      <p:cxnSp>
-        <p:nvCxnSpPr>
-          <p:cNvPr id="9" name="Connector 8"/>
-          <p:cNvCxnSpPr/>
-          <p:nvPr/>
-        </p:nvCxnSpPr>
-        <p:spPr>
-          <a:xfrm>
-            <a:off x="640080" y="3291840"/>
-            <a:ext cx="10881360" cy="0"/>
-          </a:xfrm>
-          <a:prstGeom prst="line">
-            <a:avLst/>
-          </a:prstGeom>
-          <a:ln w="19050">
+              <a:t>같은 강의계획서를 받아도 학생마다 결과가 다르다. 평균보다 "가장 약한 학생"에서 차이가 크다.</a:t>
+            </a:r>
+          </a:p>
+        </p:txBody>
+      </p:sp>
+      <p:pic>
+        <p:nvPicPr>
+          <p:cNvPr id="8" name="Picture 7" descr="chart_distribution.png"/>
+          <p:cNvPicPr>
+            <a:picLocks noChangeAspect="1"/>
+          </p:cNvPicPr>
+          <p:nvPr/>
+        </p:nvPicPr>
+        <p:blipFill>
+          <a:blip r:embed="rId2"/>
+          <a:stretch>
+            <a:fillRect/>
+          </a:stretch>
+        </p:blipFill>
+        <p:spPr>
+          <a:xfrm>
+            <a:off x="640080" y="2606040"/>
+            <a:ext cx="6400800" cy="3556000"/>
+          </a:xfrm>
+          <a:prstGeom prst="rect">
+            <a:avLst/>
+          </a:prstGeom>
+        </p:spPr>
+      </p:pic>
+      <p:sp>
+        <p:nvSpPr>
+          <p:cNvPr id="9" name="Rounded Rectangle 8"/>
+          <p:cNvSpPr/>
+          <p:nvPr/>
+        </p:nvSpPr>
+        <p:spPr>
+          <a:xfrm>
+            <a:off x="7269480" y="2606040"/>
+            <a:ext cx="4297680" cy="3840480"/>
+          </a:xfrm>
+          <a:prstGeom prst="roundRect">
+            <a:avLst>
+              <a:gd name="adj" fmla="val 6000"/>
+            </a:avLst>
+          </a:prstGeom>
+          <a:solidFill>
+            <a:srgbClr val="FAFBFC"/>
+          </a:solidFill>
+          <a:ln>
+            <a:noFill/>
+          </a:ln>
+        </p:spPr>
+        <p:style>
+          <a:lnRef idx="1">
+            <a:schemeClr val="accent1"/>
+          </a:lnRef>
+          <a:fillRef idx="3">
+            <a:schemeClr val="accent1"/>
+          </a:fillRef>
+          <a:effectRef idx="2">
+            <a:schemeClr val="accent1"/>
+          </a:effectRef>
+          <a:fontRef idx="minor">
+            <a:schemeClr val="lt1"/>
+          </a:fontRef>
+        </p:style>
+        <p:txBody>
+          <a:bodyPr rtlCol="0" anchor="ctr"/>
+          <a:lstStyle/>
+          <a:p>
+            <a:pPr algn="ctr"/>
+          </a:p>
+        </p:txBody>
+      </p:sp>
+      <p:sp>
+        <p:nvSpPr>
+          <p:cNvPr id="10" name="TextBox 9"/>
+          <p:cNvSpPr txBox="1"/>
+          <p:nvPr/>
+        </p:nvSpPr>
+        <p:spPr>
+          <a:xfrm>
+            <a:off x="7452360" y="2743200"/>
+            <a:ext cx="4023360" cy="320040"/>
+          </a:xfrm>
+          <a:prstGeom prst="rect">
+            <a:avLst/>
+          </a:prstGeom>
+          <a:noFill/>
+        </p:spPr>
+        <p:txBody>
+          <a:bodyPr wrap="square" lIns="0" rIns="0" tIns="0" bIns="0">
+            <a:spAutoFit/>
+          </a:bodyPr>
+          <a:lstStyle/>
+          <a:p>
+            <a:pPr algn="l">
+              <a:lnSpc>
+                <a:spcPct val="125000"/>
+              </a:lnSpc>
+            </a:pPr>
+            <a:r>
+              <a:rPr sz="1100" b="1">
+                <a:solidFill>
+                  <a:srgbClr val="4F46E5"/>
+                </a:solidFill>
+                <a:latin typeface="맑은 고딕"/>
+              </a:rPr>
+              <a:t>두 학생을 따라가 봅시다</a:t>
+            </a:r>
+          </a:p>
+        </p:txBody>
+      </p:sp>
+      <p:sp>
+        <p:nvSpPr>
+          <p:cNvPr id="11" name="Rounded Rectangle 10"/>
+          <p:cNvSpPr/>
+          <p:nvPr/>
+        </p:nvSpPr>
+        <p:spPr>
+          <a:xfrm>
+            <a:off x="7452360" y="3154680"/>
+            <a:ext cx="3931920" cy="1417320"/>
+          </a:xfrm>
+          <a:prstGeom prst="roundRect">
+            <a:avLst>
+              <a:gd name="adj" fmla="val 6000"/>
+            </a:avLst>
+          </a:prstGeom>
+          <a:solidFill>
+            <a:srgbClr val="ECFDF5"/>
+          </a:solidFill>
+          <a:ln w="9525">
             <a:solidFill>
-              <a:srgbClr val="E5E7EB"/>
+              <a:srgbClr val="10B981"/>
             </a:solidFill>
           </a:ln>
         </p:spPr>
         <p:style>
-          <a:lnRef idx="2">
+          <a:lnRef idx="1">
             <a:schemeClr val="accent1"/>
           </a:lnRef>
-          <a:fillRef idx="0">
+          <a:fillRef idx="3">
             <a:schemeClr val="accent1"/>
           </a:fillRef>
-          <a:effectRef idx="1">
+          <a:effectRef idx="2">
             <a:schemeClr val="accent1"/>
           </a:effectRef>
           <a:fontRef idx="minor">
-            <a:schemeClr val="tx1"/>
+            <a:schemeClr val="lt1"/>
           </a:fontRef>
         </p:style>
-      </p:cxnSp>
-      <p:sp>
-        <p:nvSpPr>
-          <p:cNvPr id="10" name="TextBox 9"/>
-          <p:cNvSpPr txBox="1"/>
-          <p:nvPr/>
-        </p:nvSpPr>
-        <p:spPr>
-          <a:xfrm>
-            <a:off x="640080" y="3429000"/>
+        <p:txBody>
+          <a:bodyPr rtlCol="0" anchor="ctr"/>
+          <a:lstStyle/>
+          <a:p>
+            <a:pPr algn="ctr"/>
+          </a:p>
+        </p:txBody>
+      </p:sp>
+      <p:sp>
+        <p:nvSpPr>
+          <p:cNvPr id="12" name="TextBox 11"/>
+          <p:cNvSpPr txBox="1"/>
+          <p:nvPr/>
+        </p:nvSpPr>
+        <p:spPr>
+          <a:xfrm>
+            <a:off x="7635240" y="3246120"/>
+            <a:ext cx="3657600" cy="320040"/>
+          </a:xfrm>
+          <a:prstGeom prst="rect">
+            <a:avLst/>
+          </a:prstGeom>
+          <a:noFill/>
+        </p:spPr>
+        <p:txBody>
+          <a:bodyPr wrap="square" lIns="0" rIns="0" tIns="0" bIns="0">
+            <a:spAutoFit/>
+          </a:bodyPr>
+          <a:lstStyle/>
+          <a:p>
+            <a:pPr algn="l">
+              <a:lnSpc>
+                <a:spcPct val="125000"/>
+              </a:lnSpc>
+            </a:pPr>
+            <a:r>
+              <a:rPr sz="1100" b="1">
+                <a:solidFill>
+                  <a:srgbClr val="10B981"/>
+                </a:solidFill>
+                <a:latin typeface="맑은 고딕"/>
+              </a:rPr>
+              <a:t>🟢 김민준 (평균 학생)</a:t>
+            </a:r>
+          </a:p>
+        </p:txBody>
+      </p:sp>
+      <p:sp>
+        <p:nvSpPr>
+          <p:cNvPr id="13" name="TextBox 12"/>
+          <p:cNvSpPr txBox="1"/>
+          <p:nvPr/>
+        </p:nvSpPr>
+        <p:spPr>
+          <a:xfrm>
+            <a:off x="7635240" y="3566160"/>
+            <a:ext cx="3657600" cy="914400"/>
+          </a:xfrm>
+          <a:prstGeom prst="rect">
+            <a:avLst/>
+          </a:prstGeom>
+          <a:noFill/>
+        </p:spPr>
+        <p:txBody>
+          <a:bodyPr wrap="square" lIns="0" rIns="0" tIns="0" bIns="0">
+            <a:spAutoFit/>
+          </a:bodyPr>
+          <a:lstStyle/>
+          <a:p>
+            <a:pPr algn="l">
+              <a:lnSpc>
+                <a:spcPct val="140000"/>
+              </a:lnSpc>
+            </a:pPr>
+            <a:r>
+              <a:rPr sz="1000" b="0">
+                <a:solidFill>
+                  <a:srgbClr val="424B5C"/>
+                </a:solidFill>
+                <a:latin typeface="맑은 고딕"/>
+              </a:rPr>
+              <a:t>기존 강의계획서: 12.5초만에 답 떠올림</a:t>
+            </a:r>
+          </a:p>
+          <a:p>
+            <a:pPr algn="l">
+              <a:lnSpc>
+                <a:spcPct val="140000"/>
+              </a:lnSpc>
+            </a:pPr>
+            <a:r>
+              <a:rPr sz="1000" b="0">
+                <a:solidFill>
+                  <a:srgbClr val="424B5C"/>
+                </a:solidFill>
+                <a:latin typeface="맑은 고딕"/>
+              </a:rPr>
+              <a:t>분산 평가 도입: 10.2초 (조금 빨라짐)</a:t>
+            </a:r>
+          </a:p>
+        </p:txBody>
+      </p:sp>
+      <p:sp>
+        <p:nvSpPr>
+          <p:cNvPr id="14" name="Rounded Rectangle 13"/>
+          <p:cNvSpPr/>
+          <p:nvPr/>
+        </p:nvSpPr>
+        <p:spPr>
+          <a:xfrm>
+            <a:off x="7452360" y="4663440"/>
+            <a:ext cx="3931920" cy="1417320"/>
+          </a:xfrm>
+          <a:prstGeom prst="roundRect">
+            <a:avLst>
+              <a:gd name="adj" fmla="val 6000"/>
+            </a:avLst>
+          </a:prstGeom>
+          <a:solidFill>
+            <a:srgbClr val="FDE8F5"/>
+          </a:solidFill>
+          <a:ln w="9525">
+            <a:solidFill>
+              <a:srgbClr val="EC4899"/>
+            </a:solidFill>
+          </a:ln>
+        </p:spPr>
+        <p:style>
+          <a:lnRef idx="1">
+            <a:schemeClr val="accent1"/>
+          </a:lnRef>
+          <a:fillRef idx="3">
+            <a:schemeClr val="accent1"/>
+          </a:fillRef>
+          <a:effectRef idx="2">
+            <a:schemeClr val="accent1"/>
+          </a:effectRef>
+          <a:fontRef idx="minor">
+            <a:schemeClr val="lt1"/>
+          </a:fontRef>
+        </p:style>
+        <p:txBody>
+          <a:bodyPr rtlCol="0" anchor="ctr"/>
+          <a:lstStyle/>
+          <a:p>
+            <a:pPr algn="ctr"/>
+          </a:p>
+        </p:txBody>
+      </p:sp>
+      <p:sp>
+        <p:nvSpPr>
+          <p:cNvPr id="15" name="TextBox 14"/>
+          <p:cNvSpPr txBox="1"/>
+          <p:nvPr/>
+        </p:nvSpPr>
+        <p:spPr>
+          <a:xfrm>
+            <a:off x="7635240" y="4754880"/>
+            <a:ext cx="3657600" cy="320040"/>
+          </a:xfrm>
+          <a:prstGeom prst="rect">
+            <a:avLst/>
+          </a:prstGeom>
+          <a:noFill/>
+        </p:spPr>
+        <p:txBody>
+          <a:bodyPr wrap="square" lIns="0" rIns="0" tIns="0" bIns="0">
+            <a:spAutoFit/>
+          </a:bodyPr>
+          <a:lstStyle/>
+          <a:p>
+            <a:pPr algn="l">
+              <a:lnSpc>
+                <a:spcPct val="125000"/>
+              </a:lnSpc>
+            </a:pPr>
+            <a:r>
+              <a:rPr sz="1100" b="1">
+                <a:solidFill>
+                  <a:srgbClr val="EC4899"/>
+                </a:solidFill>
+                <a:latin typeface="맑은 고딕"/>
+              </a:rPr>
+              <a:t>🔴 이서연 (약한 학생)</a:t>
+            </a:r>
+          </a:p>
+        </p:txBody>
+      </p:sp>
+      <p:sp>
+        <p:nvSpPr>
+          <p:cNvPr id="16" name="TextBox 15"/>
+          <p:cNvSpPr txBox="1"/>
+          <p:nvPr/>
+        </p:nvSpPr>
+        <p:spPr>
+          <a:xfrm>
+            <a:off x="7635240" y="5074920"/>
+            <a:ext cx="3657600" cy="914400"/>
+          </a:xfrm>
+          <a:prstGeom prst="rect">
+            <a:avLst/>
+          </a:prstGeom>
+          <a:noFill/>
+        </p:spPr>
+        <p:txBody>
+          <a:bodyPr wrap="square" lIns="0" rIns="0" tIns="0" bIns="0">
+            <a:spAutoFit/>
+          </a:bodyPr>
+          <a:lstStyle/>
+          <a:p>
+            <a:pPr algn="l">
+              <a:lnSpc>
+                <a:spcPct val="140000"/>
+              </a:lnSpc>
+            </a:pPr>
+            <a:r>
+              <a:rPr sz="1000" b="0">
+                <a:solidFill>
+                  <a:srgbClr val="424B5C"/>
+                </a:solidFill>
+                <a:latin typeface="맑은 고딕"/>
+              </a:rPr>
+              <a:t>기존 강의계획서: 22.3초 (1.8배 손해)</a:t>
+            </a:r>
+          </a:p>
+          <a:p>
+            <a:pPr algn="l">
+              <a:lnSpc>
+                <a:spcPct val="140000"/>
+              </a:lnSpc>
+            </a:pPr>
+            <a:r>
+              <a:rPr sz="1000" b="0">
+                <a:solidFill>
+                  <a:srgbClr val="424B5C"/>
+                </a:solidFill>
+                <a:latin typeface="맑은 고딕"/>
+              </a:rPr>
+              <a:t>분산 평가 도입: 13.5초 (대폭 개선)</a:t>
+            </a:r>
+          </a:p>
+        </p:txBody>
+      </p:sp>
+      <p:sp>
+        <p:nvSpPr>
+          <p:cNvPr id="17" name="TextBox 16"/>
+          <p:cNvSpPr txBox="1"/>
+          <p:nvPr/>
+        </p:nvSpPr>
+        <p:spPr>
+          <a:xfrm>
+            <a:off x="7452360" y="6172200"/>
+            <a:ext cx="4023360" cy="320040"/>
+          </a:xfrm>
+          <a:prstGeom prst="rect">
+            <a:avLst/>
+          </a:prstGeom>
+          <a:noFill/>
+        </p:spPr>
+        <p:txBody>
+          <a:bodyPr wrap="square" lIns="0" rIns="0" tIns="0" bIns="0">
+            <a:spAutoFit/>
+          </a:bodyPr>
+          <a:lstStyle/>
+          <a:p>
+            <a:pPr algn="l">
+              <a:lnSpc>
+                <a:spcPct val="125000"/>
+              </a:lnSpc>
+            </a:pPr>
+            <a:r>
+              <a:rPr sz="1000" b="1">
+                <a:solidFill>
+                  <a:srgbClr val="0F141F"/>
+                </a:solidFill>
+                <a:latin typeface="맑은 고딕"/>
+              </a:rPr>
+              <a:t>→ 같은 개선안인데 효과는 약한 학생에게 더 큼</a:t>
+            </a:r>
+          </a:p>
+        </p:txBody>
+      </p:sp>
+      <p:sp>
+        <p:nvSpPr>
+          <p:cNvPr id="18" name="TextBox 17"/>
+          <p:cNvSpPr txBox="1"/>
+          <p:nvPr/>
+        </p:nvSpPr>
+        <p:spPr>
+          <a:xfrm>
+            <a:off x="640080" y="6537960"/>
             <a:ext cx="10972800" cy="365760"/>
           </a:xfrm>
           <a:prstGeom prst="rect">
@@ -18030,7 +19566,7 @@
           </a:bodyPr>
           <a:lstStyle/>
           <a:p>
-            <a:pPr algn="l">
+            <a:pPr algn="ctr">
               <a:lnSpc>
                 <a:spcPct val="125000"/>
               </a:lnSpc>
@@ -18038,830 +19574,11 @@
             <a:r>
               <a:rPr sz="1100" b="1">
                 <a:solidFill>
-                  <a:srgbClr val="4F46E5"/>
-                </a:solidFill>
-                <a:latin typeface="맑은 고딕"/>
-              </a:rPr>
-              <a:t>5가지 팀장 선택 방식 (그림 5장 산출)</a:t>
-            </a:r>
-          </a:p>
-        </p:txBody>
-      </p:sp>
-      <p:sp>
-        <p:nvSpPr>
-          <p:cNvPr id="11" name="TextBox 10"/>
-          <p:cNvSpPr txBox="1"/>
-          <p:nvPr/>
-        </p:nvSpPr>
-        <p:spPr>
-          <a:xfrm>
-            <a:off x="868680" y="3931920"/>
-            <a:ext cx="365760" cy="320040"/>
-          </a:xfrm>
-          <a:prstGeom prst="rect">
-            <a:avLst/>
-          </a:prstGeom>
-          <a:noFill/>
-        </p:spPr>
-        <p:txBody>
-          <a:bodyPr wrap="square" lIns="0" rIns="0" tIns="0" bIns="0">
-            <a:spAutoFit/>
-          </a:bodyPr>
-          <a:lstStyle/>
-          <a:p>
-            <a:pPr algn="l">
-              <a:lnSpc>
-                <a:spcPct val="125000"/>
-              </a:lnSpc>
-            </a:pPr>
-            <a:r>
-              <a:rPr sz="1400" b="1">
-                <a:solidFill>
-                  <a:srgbClr val="10B981"/>
-                </a:solidFill>
-                <a:latin typeface="맑은 고딕"/>
-              </a:rPr>
-              <a:t>①</a:t>
-            </a:r>
-          </a:p>
-        </p:txBody>
-      </p:sp>
-      <p:sp>
-        <p:nvSpPr>
-          <p:cNvPr id="12" name="TextBox 11"/>
-          <p:cNvSpPr txBox="1"/>
-          <p:nvPr/>
-        </p:nvSpPr>
-        <p:spPr>
-          <a:xfrm>
-            <a:off x="1371600" y="3886200"/>
-            <a:ext cx="3200400" cy="365760"/>
-          </a:xfrm>
-          <a:prstGeom prst="rect">
-            <a:avLst/>
-          </a:prstGeom>
-          <a:noFill/>
-        </p:spPr>
-        <p:txBody>
-          <a:bodyPr wrap="square" lIns="0" rIns="0" tIns="0" bIns="0">
-            <a:spAutoFit/>
-          </a:bodyPr>
-          <a:lstStyle/>
-          <a:p>
-            <a:pPr algn="l">
-              <a:lnSpc>
-                <a:spcPct val="125000"/>
-              </a:lnSpc>
-            </a:pPr>
-            <a:r>
-              <a:rPr sz="1200" b="1">
-                <a:solidFill>
-                  <a:srgbClr val="0F141F"/>
-                </a:solidFill>
-                <a:latin typeface="맑은 고딕"/>
-              </a:rPr>
-              <a:t>무작위로 뽑기</a:t>
-            </a:r>
-          </a:p>
-        </p:txBody>
-      </p:sp>
-      <p:sp>
-        <p:nvSpPr>
-          <p:cNvPr id="13" name="TextBox 12"/>
-          <p:cNvSpPr txBox="1"/>
-          <p:nvPr/>
-        </p:nvSpPr>
-        <p:spPr>
-          <a:xfrm>
-            <a:off x="4754880" y="3886200"/>
-            <a:ext cx="3657600" cy="365760"/>
-          </a:xfrm>
-          <a:prstGeom prst="rect">
-            <a:avLst/>
-          </a:prstGeom>
-          <a:noFill/>
-        </p:spPr>
-        <p:txBody>
-          <a:bodyPr wrap="square" lIns="0" rIns="0" tIns="0" bIns="0">
-            <a:spAutoFit/>
-          </a:bodyPr>
-          <a:lstStyle/>
-          <a:p>
-            <a:pPr algn="l">
-              <a:lnSpc>
-                <a:spcPct val="125000"/>
-              </a:lnSpc>
-            </a:pPr>
-            <a:r>
-              <a:rPr sz="1000" b="0">
-                <a:solidFill>
-                  <a:srgbClr val="424B5C"/>
-                </a:solidFill>
-                <a:latin typeface="맑은 고딕"/>
-              </a:rPr>
-              <a:t>그냥 랜덤 5명</a:t>
-            </a:r>
-          </a:p>
-        </p:txBody>
-      </p:sp>
-      <p:sp>
-        <p:nvSpPr>
-          <p:cNvPr id="14" name="TextBox 13"/>
-          <p:cNvSpPr txBox="1"/>
-          <p:nvPr/>
-        </p:nvSpPr>
-        <p:spPr>
-          <a:xfrm>
-            <a:off x="8595360" y="3886200"/>
-            <a:ext cx="3017520" cy="365760"/>
-          </a:xfrm>
-          <a:prstGeom prst="rect">
-            <a:avLst/>
-          </a:prstGeom>
-          <a:noFill/>
-        </p:spPr>
-        <p:txBody>
-          <a:bodyPr wrap="square" lIns="0" rIns="0" tIns="0" bIns="0">
-            <a:spAutoFit/>
-          </a:bodyPr>
-          <a:lstStyle/>
-          <a:p>
-            <a:pPr algn="l">
-              <a:lnSpc>
-                <a:spcPct val="125000"/>
-              </a:lnSpc>
-            </a:pPr>
-            <a:r>
-              <a:rPr sz="1000" b="1">
-                <a:solidFill>
-                  <a:srgbClr val="10B981"/>
-                </a:solidFill>
-                <a:latin typeface="맑은 고딕"/>
-              </a:rPr>
-              <a:t>친분 편향 0 → 비교 기준</a:t>
-            </a:r>
-          </a:p>
-        </p:txBody>
-      </p:sp>
-      <p:sp>
-        <p:nvSpPr>
-          <p:cNvPr id="15" name="TextBox 14"/>
-          <p:cNvSpPr txBox="1"/>
-          <p:nvPr/>
-        </p:nvSpPr>
-        <p:spPr>
-          <a:xfrm>
-            <a:off x="868680" y="4407407"/>
-            <a:ext cx="365760" cy="320040"/>
-          </a:xfrm>
-          <a:prstGeom prst="rect">
-            <a:avLst/>
-          </a:prstGeom>
-          <a:noFill/>
-        </p:spPr>
-        <p:txBody>
-          <a:bodyPr wrap="square" lIns="0" rIns="0" tIns="0" bIns="0">
-            <a:spAutoFit/>
-          </a:bodyPr>
-          <a:lstStyle/>
-          <a:p>
-            <a:pPr algn="l">
-              <a:lnSpc>
-                <a:spcPct val="125000"/>
-              </a:lnSpc>
-            </a:pPr>
-            <a:r>
-              <a:rPr sz="1400" b="1">
-                <a:solidFill>
                   <a:srgbClr val="EC4899"/>
                 </a:solidFill>
                 <a:latin typeface="맑은 고딕"/>
               </a:rPr>
-              <a:t>②</a:t>
-            </a:r>
-          </a:p>
-        </p:txBody>
-      </p:sp>
-      <p:sp>
-        <p:nvSpPr>
-          <p:cNvPr id="16" name="TextBox 15"/>
-          <p:cNvSpPr txBox="1"/>
-          <p:nvPr/>
-        </p:nvSpPr>
-        <p:spPr>
-          <a:xfrm>
-            <a:off x="1371600" y="4361688"/>
-            <a:ext cx="3200400" cy="365760"/>
-          </a:xfrm>
-          <a:prstGeom prst="rect">
-            <a:avLst/>
-          </a:prstGeom>
-          <a:noFill/>
-        </p:spPr>
-        <p:txBody>
-          <a:bodyPr wrap="square" lIns="0" rIns="0" tIns="0" bIns="0">
-            <a:spAutoFit/>
-          </a:bodyPr>
-          <a:lstStyle/>
-          <a:p>
-            <a:pPr algn="l">
-              <a:lnSpc>
-                <a:spcPct val="125000"/>
-              </a:lnSpc>
-            </a:pPr>
-            <a:r>
-              <a:rPr sz="1200" b="1">
-                <a:solidFill>
-                  <a:srgbClr val="0F141F"/>
-                </a:solidFill>
-                <a:latin typeface="맑은 고딕"/>
-              </a:rPr>
-              <a:t>친한 사람만</a:t>
-            </a:r>
-          </a:p>
-        </p:txBody>
-      </p:sp>
-      <p:sp>
-        <p:nvSpPr>
-          <p:cNvPr id="17" name="TextBox 16"/>
-          <p:cNvSpPr txBox="1"/>
-          <p:nvPr/>
-        </p:nvSpPr>
-        <p:spPr>
-          <a:xfrm>
-            <a:off x="4754880" y="4361688"/>
-            <a:ext cx="3657600" cy="365760"/>
-          </a:xfrm>
-          <a:prstGeom prst="rect">
-            <a:avLst/>
-          </a:prstGeom>
-          <a:noFill/>
-        </p:spPr>
-        <p:txBody>
-          <a:bodyPr wrap="square" lIns="0" rIns="0" tIns="0" bIns="0">
-            <a:spAutoFit/>
-          </a:bodyPr>
-          <a:lstStyle/>
-          <a:p>
-            <a:pPr algn="l">
-              <a:lnSpc>
-                <a:spcPct val="125000"/>
-              </a:lnSpc>
-            </a:pPr>
-            <a:r>
-              <a:rPr sz="1000" b="0">
-                <a:solidFill>
-                  <a:srgbClr val="424B5C"/>
-                </a:solidFill>
-                <a:latin typeface="맑은 고딕"/>
-              </a:rPr>
-              <a:t>친밀도 상위 5명</a:t>
-            </a:r>
-          </a:p>
-        </p:txBody>
-      </p:sp>
-      <p:sp>
-        <p:nvSpPr>
-          <p:cNvPr id="18" name="TextBox 17"/>
-          <p:cNvSpPr txBox="1"/>
-          <p:nvPr/>
-        </p:nvSpPr>
-        <p:spPr>
-          <a:xfrm>
-            <a:off x="8595360" y="4361688"/>
-            <a:ext cx="3017520" cy="365760"/>
-          </a:xfrm>
-          <a:prstGeom prst="rect">
-            <a:avLst/>
-          </a:prstGeom>
-          <a:noFill/>
-        </p:spPr>
-        <p:txBody>
-          <a:bodyPr wrap="square" lIns="0" rIns="0" tIns="0" bIns="0">
-            <a:spAutoFit/>
-          </a:bodyPr>
-          <a:lstStyle/>
-          <a:p>
-            <a:pPr algn="l">
-              <a:lnSpc>
-                <a:spcPct val="125000"/>
-              </a:lnSpc>
-            </a:pPr>
-            <a:r>
-              <a:rPr sz="1000" b="1">
-                <a:solidFill>
-                  <a:srgbClr val="EC4899"/>
-                </a:solidFill>
-                <a:latin typeface="맑은 고딕"/>
-              </a:rPr>
-              <a:t>친분 100%, 역량 낮음 (현실)</a:t>
-            </a:r>
-          </a:p>
-        </p:txBody>
-      </p:sp>
-      <p:sp>
-        <p:nvSpPr>
-          <p:cNvPr id="19" name="TextBox 18"/>
-          <p:cNvSpPr txBox="1"/>
-          <p:nvPr/>
-        </p:nvSpPr>
-        <p:spPr>
-          <a:xfrm>
-            <a:off x="868680" y="4882896"/>
-            <a:ext cx="365760" cy="320040"/>
-          </a:xfrm>
-          <a:prstGeom prst="rect">
-            <a:avLst/>
-          </a:prstGeom>
-          <a:noFill/>
-        </p:spPr>
-        <p:txBody>
-          <a:bodyPr wrap="square" lIns="0" rIns="0" tIns="0" bIns="0">
-            <a:spAutoFit/>
-          </a:bodyPr>
-          <a:lstStyle/>
-          <a:p>
-            <a:pPr algn="l">
-              <a:lnSpc>
-                <a:spcPct val="125000"/>
-              </a:lnSpc>
-            </a:pPr>
-            <a:r>
-              <a:rPr sz="1400" b="1">
-                <a:solidFill>
-                  <a:srgbClr val="4F46E5"/>
-                </a:solidFill>
-                <a:latin typeface="맑은 고딕"/>
-              </a:rPr>
-              <a:t>③</a:t>
-            </a:r>
-          </a:p>
-        </p:txBody>
-      </p:sp>
-      <p:sp>
-        <p:nvSpPr>
-          <p:cNvPr id="20" name="TextBox 19"/>
-          <p:cNvSpPr txBox="1"/>
-          <p:nvPr/>
-        </p:nvSpPr>
-        <p:spPr>
-          <a:xfrm>
-            <a:off x="1371600" y="4837176"/>
-            <a:ext cx="3200400" cy="365760"/>
-          </a:xfrm>
-          <a:prstGeom prst="rect">
-            <a:avLst/>
-          </a:prstGeom>
-          <a:noFill/>
-        </p:spPr>
-        <p:txBody>
-          <a:bodyPr wrap="square" lIns="0" rIns="0" tIns="0" bIns="0">
-            <a:spAutoFit/>
-          </a:bodyPr>
-          <a:lstStyle/>
-          <a:p>
-            <a:pPr algn="l">
-              <a:lnSpc>
-                <a:spcPct val="125000"/>
-              </a:lnSpc>
-            </a:pPr>
-            <a:r>
-              <a:rPr sz="1200" b="1">
-                <a:solidFill>
-                  <a:srgbClr val="0F141F"/>
-                </a:solidFill>
-                <a:latin typeface="맑은 고딕"/>
-              </a:rPr>
-              <a:t>잘하는 사람만</a:t>
-            </a:r>
-          </a:p>
-        </p:txBody>
-      </p:sp>
-      <p:sp>
-        <p:nvSpPr>
-          <p:cNvPr id="21" name="TextBox 20"/>
-          <p:cNvSpPr txBox="1"/>
-          <p:nvPr/>
-        </p:nvSpPr>
-        <p:spPr>
-          <a:xfrm>
-            <a:off x="4754880" y="4837176"/>
-            <a:ext cx="3657600" cy="365760"/>
-          </a:xfrm>
-          <a:prstGeom prst="rect">
-            <a:avLst/>
-          </a:prstGeom>
-          <a:noFill/>
-        </p:spPr>
-        <p:txBody>
-          <a:bodyPr wrap="square" lIns="0" rIns="0" tIns="0" bIns="0">
-            <a:spAutoFit/>
-          </a:bodyPr>
-          <a:lstStyle/>
-          <a:p>
-            <a:pPr algn="l">
-              <a:lnSpc>
-                <a:spcPct val="125000"/>
-              </a:lnSpc>
-            </a:pPr>
-            <a:r>
-              <a:rPr sz="1000" b="0">
-                <a:solidFill>
-                  <a:srgbClr val="424B5C"/>
-                </a:solidFill>
-                <a:latin typeface="맑은 고딕"/>
-              </a:rPr>
-              <a:t>역량 상위 5명</a:t>
-            </a:r>
-          </a:p>
-        </p:txBody>
-      </p:sp>
-      <p:sp>
-        <p:nvSpPr>
-          <p:cNvPr id="22" name="TextBox 21"/>
-          <p:cNvSpPr txBox="1"/>
-          <p:nvPr/>
-        </p:nvSpPr>
-        <p:spPr>
-          <a:xfrm>
-            <a:off x="8595360" y="4837176"/>
-            <a:ext cx="3017520" cy="365760"/>
-          </a:xfrm>
-          <a:prstGeom prst="rect">
-            <a:avLst/>
-          </a:prstGeom>
-          <a:noFill/>
-        </p:spPr>
-        <p:txBody>
-          <a:bodyPr wrap="square" lIns="0" rIns="0" tIns="0" bIns="0">
-            <a:spAutoFit/>
-          </a:bodyPr>
-          <a:lstStyle/>
-          <a:p>
-            <a:pPr algn="l">
-              <a:lnSpc>
-                <a:spcPct val="125000"/>
-              </a:lnSpc>
-            </a:pPr>
-            <a:r>
-              <a:rPr sz="1000" b="1">
-                <a:solidFill>
-                  <a:srgbClr val="4F46E5"/>
-                </a:solidFill>
-                <a:latin typeface="맑은 고딕"/>
-              </a:rPr>
-              <a:t>역량 100%, 친분 0 (이상)</a:t>
-            </a:r>
-          </a:p>
-        </p:txBody>
-      </p:sp>
-      <p:sp>
-        <p:nvSpPr>
-          <p:cNvPr id="23" name="TextBox 22"/>
-          <p:cNvSpPr txBox="1"/>
-          <p:nvPr/>
-        </p:nvSpPr>
-        <p:spPr>
-          <a:xfrm>
-            <a:off x="868680" y="5358384"/>
-            <a:ext cx="365760" cy="320040"/>
-          </a:xfrm>
-          <a:prstGeom prst="rect">
-            <a:avLst/>
-          </a:prstGeom>
-          <a:noFill/>
-        </p:spPr>
-        <p:txBody>
-          <a:bodyPr wrap="square" lIns="0" rIns="0" tIns="0" bIns="0">
-            <a:spAutoFit/>
-          </a:bodyPr>
-          <a:lstStyle/>
-          <a:p>
-            <a:pPr algn="l">
-              <a:lnSpc>
-                <a:spcPct val="125000"/>
-              </a:lnSpc>
-            </a:pPr>
-            <a:r>
-              <a:rPr sz="1400" b="1">
-                <a:solidFill>
-                  <a:srgbClr val="F59E0B"/>
-                </a:solidFill>
-                <a:latin typeface="맑은 고딕"/>
-              </a:rPr>
-              <a:t>④</a:t>
-            </a:r>
-          </a:p>
-        </p:txBody>
-      </p:sp>
-      <p:sp>
-        <p:nvSpPr>
-          <p:cNvPr id="24" name="TextBox 23"/>
-          <p:cNvSpPr txBox="1"/>
-          <p:nvPr/>
-        </p:nvSpPr>
-        <p:spPr>
-          <a:xfrm>
-            <a:off x="1371600" y="5312664"/>
-            <a:ext cx="3200400" cy="365760"/>
-          </a:xfrm>
-          <a:prstGeom prst="rect">
-            <a:avLst/>
-          </a:prstGeom>
-          <a:noFill/>
-        </p:spPr>
-        <p:txBody>
-          <a:bodyPr wrap="square" lIns="0" rIns="0" tIns="0" bIns="0">
-            <a:spAutoFit/>
-          </a:bodyPr>
-          <a:lstStyle/>
-          <a:p>
-            <a:pPr algn="l">
-              <a:lnSpc>
-                <a:spcPct val="125000"/>
-              </a:lnSpc>
-            </a:pPr>
-            <a:r>
-              <a:rPr sz="1200" b="1">
-                <a:solidFill>
-                  <a:srgbClr val="0F141F"/>
-                </a:solidFill>
-                <a:latin typeface="맑은 고딕"/>
-              </a:rPr>
-              <a:t>머리에 떠오르는 사람</a:t>
-            </a:r>
-          </a:p>
-        </p:txBody>
-      </p:sp>
-      <p:sp>
-        <p:nvSpPr>
-          <p:cNvPr id="25" name="TextBox 24"/>
-          <p:cNvSpPr txBox="1"/>
-          <p:nvPr/>
-        </p:nvSpPr>
-        <p:spPr>
-          <a:xfrm>
-            <a:off x="4754880" y="5312664"/>
-            <a:ext cx="3657600" cy="365760"/>
-          </a:xfrm>
-          <a:prstGeom prst="rect">
-            <a:avLst/>
-          </a:prstGeom>
-          <a:noFill/>
-        </p:spPr>
-        <p:txBody>
-          <a:bodyPr wrap="square" lIns="0" rIns="0" tIns="0" bIns="0">
-            <a:spAutoFit/>
-          </a:bodyPr>
-          <a:lstStyle/>
-          <a:p>
-            <a:pPr algn="l">
-              <a:lnSpc>
-                <a:spcPct val="125000"/>
-              </a:lnSpc>
-            </a:pPr>
-            <a:r>
-              <a:rPr sz="1000" b="0">
-                <a:solidFill>
-                  <a:srgbClr val="424B5C"/>
-                </a:solidFill>
-                <a:latin typeface="맑은 고딕"/>
-              </a:rPr>
-              <a:t>친한 7명 떠올리고 그 중 5명</a:t>
-            </a:r>
-          </a:p>
-        </p:txBody>
-      </p:sp>
-      <p:sp>
-        <p:nvSpPr>
-          <p:cNvPr id="26" name="TextBox 25"/>
-          <p:cNvSpPr txBox="1"/>
-          <p:nvPr/>
-        </p:nvSpPr>
-        <p:spPr>
-          <a:xfrm>
-            <a:off x="8595360" y="5312664"/>
-            <a:ext cx="3017520" cy="365760"/>
-          </a:xfrm>
-          <a:prstGeom prst="rect">
-            <a:avLst/>
-          </a:prstGeom>
-          <a:noFill/>
-        </p:spPr>
-        <p:txBody>
-          <a:bodyPr wrap="square" lIns="0" rIns="0" tIns="0" bIns="0">
-            <a:spAutoFit/>
-          </a:bodyPr>
-          <a:lstStyle/>
-          <a:p>
-            <a:pPr algn="l">
-              <a:lnSpc>
-                <a:spcPct val="125000"/>
-              </a:lnSpc>
-            </a:pPr>
-            <a:r>
-              <a:rPr sz="1000" b="1">
-                <a:solidFill>
-                  <a:srgbClr val="F59E0B"/>
-                </a:solidFill>
-                <a:latin typeface="맑은 고딕"/>
-              </a:rPr>
-              <a:t>현실의 satisficing</a:t>
-            </a:r>
-          </a:p>
-        </p:txBody>
-      </p:sp>
-      <p:sp>
-        <p:nvSpPr>
-          <p:cNvPr id="27" name="TextBox 26"/>
-          <p:cNvSpPr txBox="1"/>
-          <p:nvPr/>
-        </p:nvSpPr>
-        <p:spPr>
-          <a:xfrm>
-            <a:off x="868680" y="5833872"/>
-            <a:ext cx="365760" cy="320040"/>
-          </a:xfrm>
-          <a:prstGeom prst="rect">
-            <a:avLst/>
-          </a:prstGeom>
-          <a:noFill/>
-        </p:spPr>
-        <p:txBody>
-          <a:bodyPr wrap="square" lIns="0" rIns="0" tIns="0" bIns="0">
-            <a:spAutoFit/>
-          </a:bodyPr>
-          <a:lstStyle/>
-          <a:p>
-            <a:pPr algn="l">
-              <a:lnSpc>
-                <a:spcPct val="125000"/>
-              </a:lnSpc>
-            </a:pPr>
-            <a:r>
-              <a:rPr sz="1400" b="1">
-                <a:solidFill>
-                  <a:srgbClr val="424B5C"/>
-                </a:solidFill>
-                <a:latin typeface="맑은 고딕"/>
-              </a:rPr>
-              <a:t>⑤</a:t>
-            </a:r>
-          </a:p>
-        </p:txBody>
-      </p:sp>
-      <p:sp>
-        <p:nvSpPr>
-          <p:cNvPr id="28" name="TextBox 27"/>
-          <p:cNvSpPr txBox="1"/>
-          <p:nvPr/>
-        </p:nvSpPr>
-        <p:spPr>
-          <a:xfrm>
-            <a:off x="1371600" y="5788152"/>
-            <a:ext cx="3200400" cy="365760"/>
-          </a:xfrm>
-          <a:prstGeom prst="rect">
-            <a:avLst/>
-          </a:prstGeom>
-          <a:noFill/>
-        </p:spPr>
-        <p:txBody>
-          <a:bodyPr wrap="square" lIns="0" rIns="0" tIns="0" bIns="0">
-            <a:spAutoFit/>
-          </a:bodyPr>
-          <a:lstStyle/>
-          <a:p>
-            <a:pPr algn="l">
-              <a:lnSpc>
-                <a:spcPct val="125000"/>
-              </a:lnSpc>
-            </a:pPr>
-            <a:r>
-              <a:rPr sz="1200" b="1">
-                <a:solidFill>
-                  <a:srgbClr val="0F141F"/>
-                </a:solidFill>
-                <a:latin typeface="맑은 고딕"/>
-              </a:rPr>
-              <a:t>프로필 카드 보고</a:t>
-            </a:r>
-          </a:p>
-        </p:txBody>
-      </p:sp>
-      <p:sp>
-        <p:nvSpPr>
-          <p:cNvPr id="29" name="TextBox 28"/>
-          <p:cNvSpPr txBox="1"/>
-          <p:nvPr/>
-        </p:nvSpPr>
-        <p:spPr>
-          <a:xfrm>
-            <a:off x="4754880" y="5788152"/>
-            <a:ext cx="3657600" cy="365760"/>
-          </a:xfrm>
-          <a:prstGeom prst="rect">
-            <a:avLst/>
-          </a:prstGeom>
-          <a:noFill/>
-        </p:spPr>
-        <p:txBody>
-          <a:bodyPr wrap="square" lIns="0" rIns="0" tIns="0" bIns="0">
-            <a:spAutoFit/>
-          </a:bodyPr>
-          <a:lstStyle/>
-          <a:p>
-            <a:pPr algn="l">
-              <a:lnSpc>
-                <a:spcPct val="125000"/>
-              </a:lnSpc>
-            </a:pPr>
-            <a:r>
-              <a:rPr sz="1000" b="0">
-                <a:solidFill>
-                  <a:srgbClr val="424B5C"/>
-                </a:solidFill>
-                <a:latin typeface="맑은 고딕"/>
-              </a:rPr>
-              <a:t>정보 본 후 다양성 고려</a:t>
-            </a:r>
-          </a:p>
-        </p:txBody>
-      </p:sp>
-      <p:sp>
-        <p:nvSpPr>
-          <p:cNvPr id="30" name="TextBox 29"/>
-          <p:cNvSpPr txBox="1"/>
-          <p:nvPr/>
-        </p:nvSpPr>
-        <p:spPr>
-          <a:xfrm>
-            <a:off x="8595360" y="5788152"/>
-            <a:ext cx="3017520" cy="365760"/>
-          </a:xfrm>
-          <a:prstGeom prst="rect">
-            <a:avLst/>
-          </a:prstGeom>
-          <a:noFill/>
-        </p:spPr>
-        <p:txBody>
-          <a:bodyPr wrap="square" lIns="0" rIns="0" tIns="0" bIns="0">
-            <a:spAutoFit/>
-          </a:bodyPr>
-          <a:lstStyle/>
-          <a:p>
-            <a:pPr algn="l">
-              <a:lnSpc>
-                <a:spcPct val="125000"/>
-              </a:lnSpc>
-            </a:pPr>
-            <a:r>
-              <a:rPr sz="1000" b="1">
-                <a:solidFill>
-                  <a:srgbClr val="424B5C"/>
-                </a:solidFill>
-                <a:latin typeface="맑은 고딕"/>
-              </a:rPr>
-              <a:t>균형 잡힌 팀</a:t>
-            </a:r>
-          </a:p>
-        </p:txBody>
-      </p:sp>
-      <p:sp>
-        <p:nvSpPr>
-          <p:cNvPr id="31" name="TextBox 30"/>
-          <p:cNvSpPr txBox="1"/>
-          <p:nvPr/>
-        </p:nvSpPr>
-        <p:spPr>
-          <a:xfrm>
-            <a:off x="640080" y="6400800"/>
-            <a:ext cx="10972800" cy="365760"/>
-          </a:xfrm>
-          <a:prstGeom prst="rect">
-            <a:avLst/>
-          </a:prstGeom>
-          <a:noFill/>
-        </p:spPr>
-        <p:txBody>
-          <a:bodyPr wrap="square" lIns="0" rIns="0" tIns="0" bIns="0">
-            <a:spAutoFit/>
-          </a:bodyPr>
-          <a:lstStyle/>
-          <a:p>
-            <a:pPr algn="ctr">
-              <a:lnSpc>
-                <a:spcPct val="125000"/>
-              </a:lnSpc>
-            </a:pPr>
-            <a:r>
-              <a:rPr sz="1200" b="1">
-                <a:solidFill>
-                  <a:srgbClr val="EC4899"/>
-                </a:solidFill>
-                <a:latin typeface="맑은 고딕"/>
-              </a:rPr>
-              <a:t>결과: 5장의 네트워크 그래프 → 발표 슬라이드 임팩트 최고</a:t>
+              <a:t>결국 우리가 보는 것: 강의계획서가 누구를 가장 힘들게 하는가, 개선안이 그걸 줄이는가</a:t>
             </a:r>
           </a:p>
         </p:txBody>
@@ -18875,6 +19592,1190 @@
 </file>
 
 <file path=ppt/slides/slide26.xml><?xml version="1.0" encoding="utf-8"?>
+<p:sld xmlns:a="http://schemas.openxmlformats.org/drawingml/2006/main" xmlns:p="http://schemas.openxmlformats.org/presentationml/2006/main" xmlns:r="http://schemas.openxmlformats.org/officeDocument/2006/relationships">
+  <p:cSld>
+    <p:spTree>
+      <p:nvGrpSpPr>
+        <p:cNvPr id="1" name=""/>
+        <p:cNvGrpSpPr/>
+        <p:nvPr/>
+      </p:nvGrpSpPr>
+      <p:grpSpPr/>
+      <p:sp>
+        <p:nvSpPr>
+          <p:cNvPr id="2" name="Rectangle 1"/>
+          <p:cNvSpPr/>
+          <p:nvPr/>
+        </p:nvSpPr>
+        <p:spPr>
+          <a:xfrm>
+            <a:off x="0" y="0"/>
+            <a:ext cx="12188952" cy="6858000"/>
+          </a:xfrm>
+          <a:prstGeom prst="rect">
+            <a:avLst/>
+          </a:prstGeom>
+          <a:solidFill>
+            <a:srgbClr val="FFFFFF"/>
+          </a:solidFill>
+          <a:ln>
+            <a:noFill/>
+          </a:ln>
+        </p:spPr>
+        <p:style>
+          <a:lnRef idx="1">
+            <a:schemeClr val="accent1"/>
+          </a:lnRef>
+          <a:fillRef idx="3">
+            <a:schemeClr val="accent1"/>
+          </a:fillRef>
+          <a:effectRef idx="2">
+            <a:schemeClr val="accent1"/>
+          </a:effectRef>
+          <a:fontRef idx="minor">
+            <a:schemeClr val="lt1"/>
+          </a:fontRef>
+        </p:style>
+        <p:txBody>
+          <a:bodyPr rtlCol="0" anchor="ctr"/>
+          <a:lstStyle/>
+          <a:p>
+            <a:pPr algn="ctr"/>
+          </a:p>
+        </p:txBody>
+      </p:sp>
+      <p:sp>
+        <p:nvSpPr>
+          <p:cNvPr id="3" name="TextBox 2"/>
+          <p:cNvSpPr txBox="1"/>
+          <p:nvPr/>
+        </p:nvSpPr>
+        <p:spPr>
+          <a:xfrm>
+            <a:off x="640080" y="502920"/>
+            <a:ext cx="10972800" cy="320040"/>
+          </a:xfrm>
+          <a:prstGeom prst="rect">
+            <a:avLst/>
+          </a:prstGeom>
+          <a:noFill/>
+        </p:spPr>
+        <p:txBody>
+          <a:bodyPr wrap="square" lIns="0" rIns="0" tIns="0" bIns="0">
+            <a:spAutoFit/>
+          </a:bodyPr>
+          <a:lstStyle/>
+          <a:p>
+            <a:pPr algn="l">
+              <a:lnSpc>
+                <a:spcPct val="125000"/>
+              </a:lnSpc>
+            </a:pPr>
+            <a:r>
+              <a:rPr sz="1100" b="1">
+                <a:solidFill>
+                  <a:srgbClr val="4F46E5"/>
+                </a:solidFill>
+                <a:latin typeface="맑은 고딕"/>
+              </a:rPr>
+              <a:t>T3 · 친분 그래프 시뮬</a:t>
+            </a:r>
+          </a:p>
+        </p:txBody>
+      </p:sp>
+      <p:sp>
+        <p:nvSpPr>
+          <p:cNvPr id="4" name="TextBox 3"/>
+          <p:cNvSpPr txBox="1"/>
+          <p:nvPr/>
+        </p:nvSpPr>
+        <p:spPr>
+          <a:xfrm>
+            <a:off x="640080" y="868680"/>
+            <a:ext cx="10972800" cy="822960"/>
+          </a:xfrm>
+          <a:prstGeom prst="rect">
+            <a:avLst/>
+          </a:prstGeom>
+          <a:noFill/>
+        </p:spPr>
+        <p:txBody>
+          <a:bodyPr wrap="square" lIns="0" rIns="0" tIns="0" bIns="0">
+            <a:spAutoFit/>
+          </a:bodyPr>
+          <a:lstStyle/>
+          <a:p>
+            <a:pPr algn="l">
+              <a:lnSpc>
+                <a:spcPct val="125000"/>
+              </a:lnSpc>
+            </a:pPr>
+            <a:r>
+              <a:rPr sz="2800" b="1">
+                <a:solidFill>
+                  <a:srgbClr val="0F141F"/>
+                </a:solidFill>
+                <a:latin typeface="맑은 고딕"/>
+              </a:rPr>
+              <a:t>친구 관계를 그림으로 그려서 "팀장이 누구를 뽑는지" 시뮬</a:t>
+            </a:r>
+          </a:p>
+        </p:txBody>
+      </p:sp>
+      <p:cxnSp>
+        <p:nvCxnSpPr>
+          <p:cNvPr id="5" name="Connector 4"/>
+          <p:cNvCxnSpPr/>
+          <p:nvPr/>
+        </p:nvCxnSpPr>
+        <p:spPr>
+          <a:xfrm>
+            <a:off x="640080" y="1783080"/>
+            <a:ext cx="10881360" cy="0"/>
+          </a:xfrm>
+          <a:prstGeom prst="line">
+            <a:avLst/>
+          </a:prstGeom>
+          <a:ln w="19050">
+            <a:solidFill>
+              <a:srgbClr val="E5E7EB"/>
+            </a:solidFill>
+          </a:ln>
+        </p:spPr>
+        <p:style>
+          <a:lnRef idx="2">
+            <a:schemeClr val="accent1"/>
+          </a:lnRef>
+          <a:fillRef idx="0">
+            <a:schemeClr val="accent1"/>
+          </a:fillRef>
+          <a:effectRef idx="1">
+            <a:schemeClr val="accent1"/>
+          </a:effectRef>
+          <a:fontRef idx="minor">
+            <a:schemeClr val="tx1"/>
+          </a:fontRef>
+        </p:style>
+      </p:cxnSp>
+      <p:sp>
+        <p:nvSpPr>
+          <p:cNvPr id="6" name="TextBox 5"/>
+          <p:cNvSpPr txBox="1"/>
+          <p:nvPr/>
+        </p:nvSpPr>
+        <p:spPr>
+          <a:xfrm>
+            <a:off x="11247120" y="6446520"/>
+            <a:ext cx="731520" cy="274320"/>
+          </a:xfrm>
+          <a:prstGeom prst="rect">
+            <a:avLst/>
+          </a:prstGeom>
+          <a:noFill/>
+        </p:spPr>
+        <p:txBody>
+          <a:bodyPr wrap="square" lIns="0" rIns="0" tIns="0" bIns="0">
+            <a:spAutoFit/>
+          </a:bodyPr>
+          <a:lstStyle/>
+          <a:p>
+            <a:pPr algn="r">
+              <a:lnSpc>
+                <a:spcPct val="125000"/>
+              </a:lnSpc>
+            </a:pPr>
+            <a:r>
+              <a:rPr sz="900" b="0">
+                <a:solidFill>
+                  <a:srgbClr val="8B95A7"/>
+                </a:solidFill>
+                <a:latin typeface="맑은 고딕"/>
+              </a:rPr>
+              <a:t>23</a:t>
+            </a:r>
+          </a:p>
+        </p:txBody>
+      </p:sp>
+      <p:sp>
+        <p:nvSpPr>
+          <p:cNvPr id="7" name="TextBox 6"/>
+          <p:cNvSpPr txBox="1"/>
+          <p:nvPr/>
+        </p:nvSpPr>
+        <p:spPr>
+          <a:xfrm>
+            <a:off x="640080" y="2103120"/>
+            <a:ext cx="10972800" cy="411480"/>
+          </a:xfrm>
+          <a:prstGeom prst="rect">
+            <a:avLst/>
+          </a:prstGeom>
+          <a:noFill/>
+        </p:spPr>
+        <p:txBody>
+          <a:bodyPr wrap="square" lIns="0" rIns="0" tIns="0" bIns="0">
+            <a:spAutoFit/>
+          </a:bodyPr>
+          <a:lstStyle/>
+          <a:p>
+            <a:pPr algn="l">
+              <a:lnSpc>
+                <a:spcPct val="125000"/>
+              </a:lnSpc>
+            </a:pPr>
+            <a:r>
+              <a:rPr sz="1500" b="1">
+                <a:solidFill>
+                  <a:srgbClr val="0F141F"/>
+                </a:solidFill>
+                <a:latin typeface="맑은 고딕"/>
+              </a:rPr>
+              <a:t>사람 모집 없이도 친분 휴리스틱을 검증할 수 있다.</a:t>
+            </a:r>
+          </a:p>
+        </p:txBody>
+      </p:sp>
+      <p:sp>
+        <p:nvSpPr>
+          <p:cNvPr id="8" name="TextBox 7"/>
+          <p:cNvSpPr txBox="1"/>
+          <p:nvPr/>
+        </p:nvSpPr>
+        <p:spPr>
+          <a:xfrm>
+            <a:off x="640080" y="2560320"/>
+            <a:ext cx="10972800" cy="411480"/>
+          </a:xfrm>
+          <a:prstGeom prst="rect">
+            <a:avLst/>
+          </a:prstGeom>
+          <a:noFill/>
+        </p:spPr>
+        <p:txBody>
+          <a:bodyPr wrap="square" lIns="0" rIns="0" tIns="0" bIns="0">
+            <a:spAutoFit/>
+          </a:bodyPr>
+          <a:lstStyle/>
+          <a:p>
+            <a:pPr algn="l">
+              <a:lnSpc>
+                <a:spcPct val="125000"/>
+              </a:lnSpc>
+            </a:pPr>
+            <a:r>
+              <a:rPr sz="1200" b="0">
+                <a:solidFill>
+                  <a:srgbClr val="424B5C"/>
+                </a:solidFill>
+                <a:latin typeface="맑은 고딕"/>
+              </a:rPr>
+              <a:t>가상 학생 30명에 친한 정도를 다 설정 → 팀장이 5가지 방식으로 뽑게 함 → 그림으로 비교.</a:t>
+            </a:r>
+          </a:p>
+        </p:txBody>
+      </p:sp>
+      <p:cxnSp>
+        <p:nvCxnSpPr>
+          <p:cNvPr id="9" name="Connector 8"/>
+          <p:cNvCxnSpPr/>
+          <p:nvPr/>
+        </p:nvCxnSpPr>
+        <p:spPr>
+          <a:xfrm>
+            <a:off x="640080" y="3291840"/>
+            <a:ext cx="10881360" cy="0"/>
+          </a:xfrm>
+          <a:prstGeom prst="line">
+            <a:avLst/>
+          </a:prstGeom>
+          <a:ln w="19050">
+            <a:solidFill>
+              <a:srgbClr val="E5E7EB"/>
+            </a:solidFill>
+          </a:ln>
+        </p:spPr>
+        <p:style>
+          <a:lnRef idx="2">
+            <a:schemeClr val="accent1"/>
+          </a:lnRef>
+          <a:fillRef idx="0">
+            <a:schemeClr val="accent1"/>
+          </a:fillRef>
+          <a:effectRef idx="1">
+            <a:schemeClr val="accent1"/>
+          </a:effectRef>
+          <a:fontRef idx="minor">
+            <a:schemeClr val="tx1"/>
+          </a:fontRef>
+        </p:style>
+      </p:cxnSp>
+      <p:sp>
+        <p:nvSpPr>
+          <p:cNvPr id="10" name="TextBox 9"/>
+          <p:cNvSpPr txBox="1"/>
+          <p:nvPr/>
+        </p:nvSpPr>
+        <p:spPr>
+          <a:xfrm>
+            <a:off x="640080" y="3429000"/>
+            <a:ext cx="10972800" cy="365760"/>
+          </a:xfrm>
+          <a:prstGeom prst="rect">
+            <a:avLst/>
+          </a:prstGeom>
+          <a:noFill/>
+        </p:spPr>
+        <p:txBody>
+          <a:bodyPr wrap="square" lIns="0" rIns="0" tIns="0" bIns="0">
+            <a:spAutoFit/>
+          </a:bodyPr>
+          <a:lstStyle/>
+          <a:p>
+            <a:pPr algn="l">
+              <a:lnSpc>
+                <a:spcPct val="125000"/>
+              </a:lnSpc>
+            </a:pPr>
+            <a:r>
+              <a:rPr sz="1100" b="1">
+                <a:solidFill>
+                  <a:srgbClr val="4F46E5"/>
+                </a:solidFill>
+                <a:latin typeface="맑은 고딕"/>
+              </a:rPr>
+              <a:t>5가지 팀장 선택 방식 (그림 5장 산출)</a:t>
+            </a:r>
+          </a:p>
+        </p:txBody>
+      </p:sp>
+      <p:sp>
+        <p:nvSpPr>
+          <p:cNvPr id="11" name="TextBox 10"/>
+          <p:cNvSpPr txBox="1"/>
+          <p:nvPr/>
+        </p:nvSpPr>
+        <p:spPr>
+          <a:xfrm>
+            <a:off x="868680" y="3931920"/>
+            <a:ext cx="365760" cy="320040"/>
+          </a:xfrm>
+          <a:prstGeom prst="rect">
+            <a:avLst/>
+          </a:prstGeom>
+          <a:noFill/>
+        </p:spPr>
+        <p:txBody>
+          <a:bodyPr wrap="square" lIns="0" rIns="0" tIns="0" bIns="0">
+            <a:spAutoFit/>
+          </a:bodyPr>
+          <a:lstStyle/>
+          <a:p>
+            <a:pPr algn="l">
+              <a:lnSpc>
+                <a:spcPct val="125000"/>
+              </a:lnSpc>
+            </a:pPr>
+            <a:r>
+              <a:rPr sz="1400" b="1">
+                <a:solidFill>
+                  <a:srgbClr val="10B981"/>
+                </a:solidFill>
+                <a:latin typeface="맑은 고딕"/>
+              </a:rPr>
+              <a:t>①</a:t>
+            </a:r>
+          </a:p>
+        </p:txBody>
+      </p:sp>
+      <p:sp>
+        <p:nvSpPr>
+          <p:cNvPr id="12" name="TextBox 11"/>
+          <p:cNvSpPr txBox="1"/>
+          <p:nvPr/>
+        </p:nvSpPr>
+        <p:spPr>
+          <a:xfrm>
+            <a:off x="1371600" y="3886200"/>
+            <a:ext cx="3200400" cy="365760"/>
+          </a:xfrm>
+          <a:prstGeom prst="rect">
+            <a:avLst/>
+          </a:prstGeom>
+          <a:noFill/>
+        </p:spPr>
+        <p:txBody>
+          <a:bodyPr wrap="square" lIns="0" rIns="0" tIns="0" bIns="0">
+            <a:spAutoFit/>
+          </a:bodyPr>
+          <a:lstStyle/>
+          <a:p>
+            <a:pPr algn="l">
+              <a:lnSpc>
+                <a:spcPct val="125000"/>
+              </a:lnSpc>
+            </a:pPr>
+            <a:r>
+              <a:rPr sz="1200" b="1">
+                <a:solidFill>
+                  <a:srgbClr val="0F141F"/>
+                </a:solidFill>
+                <a:latin typeface="맑은 고딕"/>
+              </a:rPr>
+              <a:t>무작위로 뽑기</a:t>
+            </a:r>
+          </a:p>
+        </p:txBody>
+      </p:sp>
+      <p:sp>
+        <p:nvSpPr>
+          <p:cNvPr id="13" name="TextBox 12"/>
+          <p:cNvSpPr txBox="1"/>
+          <p:nvPr/>
+        </p:nvSpPr>
+        <p:spPr>
+          <a:xfrm>
+            <a:off x="4754880" y="3886200"/>
+            <a:ext cx="3657600" cy="365760"/>
+          </a:xfrm>
+          <a:prstGeom prst="rect">
+            <a:avLst/>
+          </a:prstGeom>
+          <a:noFill/>
+        </p:spPr>
+        <p:txBody>
+          <a:bodyPr wrap="square" lIns="0" rIns="0" tIns="0" bIns="0">
+            <a:spAutoFit/>
+          </a:bodyPr>
+          <a:lstStyle/>
+          <a:p>
+            <a:pPr algn="l">
+              <a:lnSpc>
+                <a:spcPct val="125000"/>
+              </a:lnSpc>
+            </a:pPr>
+            <a:r>
+              <a:rPr sz="1000" b="0">
+                <a:solidFill>
+                  <a:srgbClr val="424B5C"/>
+                </a:solidFill>
+                <a:latin typeface="맑은 고딕"/>
+              </a:rPr>
+              <a:t>그냥 랜덤 5명</a:t>
+            </a:r>
+          </a:p>
+        </p:txBody>
+      </p:sp>
+      <p:sp>
+        <p:nvSpPr>
+          <p:cNvPr id="14" name="TextBox 13"/>
+          <p:cNvSpPr txBox="1"/>
+          <p:nvPr/>
+        </p:nvSpPr>
+        <p:spPr>
+          <a:xfrm>
+            <a:off x="8595360" y="3886200"/>
+            <a:ext cx="3017520" cy="365760"/>
+          </a:xfrm>
+          <a:prstGeom prst="rect">
+            <a:avLst/>
+          </a:prstGeom>
+          <a:noFill/>
+        </p:spPr>
+        <p:txBody>
+          <a:bodyPr wrap="square" lIns="0" rIns="0" tIns="0" bIns="0">
+            <a:spAutoFit/>
+          </a:bodyPr>
+          <a:lstStyle/>
+          <a:p>
+            <a:pPr algn="l">
+              <a:lnSpc>
+                <a:spcPct val="125000"/>
+              </a:lnSpc>
+            </a:pPr>
+            <a:r>
+              <a:rPr sz="1000" b="1">
+                <a:solidFill>
+                  <a:srgbClr val="10B981"/>
+                </a:solidFill>
+                <a:latin typeface="맑은 고딕"/>
+              </a:rPr>
+              <a:t>친분 편향 0 → 비교 기준</a:t>
+            </a:r>
+          </a:p>
+        </p:txBody>
+      </p:sp>
+      <p:sp>
+        <p:nvSpPr>
+          <p:cNvPr id="15" name="TextBox 14"/>
+          <p:cNvSpPr txBox="1"/>
+          <p:nvPr/>
+        </p:nvSpPr>
+        <p:spPr>
+          <a:xfrm>
+            <a:off x="868680" y="4407407"/>
+            <a:ext cx="365760" cy="320040"/>
+          </a:xfrm>
+          <a:prstGeom prst="rect">
+            <a:avLst/>
+          </a:prstGeom>
+          <a:noFill/>
+        </p:spPr>
+        <p:txBody>
+          <a:bodyPr wrap="square" lIns="0" rIns="0" tIns="0" bIns="0">
+            <a:spAutoFit/>
+          </a:bodyPr>
+          <a:lstStyle/>
+          <a:p>
+            <a:pPr algn="l">
+              <a:lnSpc>
+                <a:spcPct val="125000"/>
+              </a:lnSpc>
+            </a:pPr>
+            <a:r>
+              <a:rPr sz="1400" b="1">
+                <a:solidFill>
+                  <a:srgbClr val="EC4899"/>
+                </a:solidFill>
+                <a:latin typeface="맑은 고딕"/>
+              </a:rPr>
+              <a:t>②</a:t>
+            </a:r>
+          </a:p>
+        </p:txBody>
+      </p:sp>
+      <p:sp>
+        <p:nvSpPr>
+          <p:cNvPr id="16" name="TextBox 15"/>
+          <p:cNvSpPr txBox="1"/>
+          <p:nvPr/>
+        </p:nvSpPr>
+        <p:spPr>
+          <a:xfrm>
+            <a:off x="1371600" y="4361688"/>
+            <a:ext cx="3200400" cy="365760"/>
+          </a:xfrm>
+          <a:prstGeom prst="rect">
+            <a:avLst/>
+          </a:prstGeom>
+          <a:noFill/>
+        </p:spPr>
+        <p:txBody>
+          <a:bodyPr wrap="square" lIns="0" rIns="0" tIns="0" bIns="0">
+            <a:spAutoFit/>
+          </a:bodyPr>
+          <a:lstStyle/>
+          <a:p>
+            <a:pPr algn="l">
+              <a:lnSpc>
+                <a:spcPct val="125000"/>
+              </a:lnSpc>
+            </a:pPr>
+            <a:r>
+              <a:rPr sz="1200" b="1">
+                <a:solidFill>
+                  <a:srgbClr val="0F141F"/>
+                </a:solidFill>
+                <a:latin typeface="맑은 고딕"/>
+              </a:rPr>
+              <a:t>친한 사람만</a:t>
+            </a:r>
+          </a:p>
+        </p:txBody>
+      </p:sp>
+      <p:sp>
+        <p:nvSpPr>
+          <p:cNvPr id="17" name="TextBox 16"/>
+          <p:cNvSpPr txBox="1"/>
+          <p:nvPr/>
+        </p:nvSpPr>
+        <p:spPr>
+          <a:xfrm>
+            <a:off x="4754880" y="4361688"/>
+            <a:ext cx="3657600" cy="365760"/>
+          </a:xfrm>
+          <a:prstGeom prst="rect">
+            <a:avLst/>
+          </a:prstGeom>
+          <a:noFill/>
+        </p:spPr>
+        <p:txBody>
+          <a:bodyPr wrap="square" lIns="0" rIns="0" tIns="0" bIns="0">
+            <a:spAutoFit/>
+          </a:bodyPr>
+          <a:lstStyle/>
+          <a:p>
+            <a:pPr algn="l">
+              <a:lnSpc>
+                <a:spcPct val="125000"/>
+              </a:lnSpc>
+            </a:pPr>
+            <a:r>
+              <a:rPr sz="1000" b="0">
+                <a:solidFill>
+                  <a:srgbClr val="424B5C"/>
+                </a:solidFill>
+                <a:latin typeface="맑은 고딕"/>
+              </a:rPr>
+              <a:t>친밀도 상위 5명</a:t>
+            </a:r>
+          </a:p>
+        </p:txBody>
+      </p:sp>
+      <p:sp>
+        <p:nvSpPr>
+          <p:cNvPr id="18" name="TextBox 17"/>
+          <p:cNvSpPr txBox="1"/>
+          <p:nvPr/>
+        </p:nvSpPr>
+        <p:spPr>
+          <a:xfrm>
+            <a:off x="8595360" y="4361688"/>
+            <a:ext cx="3017520" cy="365760"/>
+          </a:xfrm>
+          <a:prstGeom prst="rect">
+            <a:avLst/>
+          </a:prstGeom>
+          <a:noFill/>
+        </p:spPr>
+        <p:txBody>
+          <a:bodyPr wrap="square" lIns="0" rIns="0" tIns="0" bIns="0">
+            <a:spAutoFit/>
+          </a:bodyPr>
+          <a:lstStyle/>
+          <a:p>
+            <a:pPr algn="l">
+              <a:lnSpc>
+                <a:spcPct val="125000"/>
+              </a:lnSpc>
+            </a:pPr>
+            <a:r>
+              <a:rPr sz="1000" b="1">
+                <a:solidFill>
+                  <a:srgbClr val="EC4899"/>
+                </a:solidFill>
+                <a:latin typeface="맑은 고딕"/>
+              </a:rPr>
+              <a:t>친분 100%, 역량 낮음 (현실)</a:t>
+            </a:r>
+          </a:p>
+        </p:txBody>
+      </p:sp>
+      <p:sp>
+        <p:nvSpPr>
+          <p:cNvPr id="19" name="TextBox 18"/>
+          <p:cNvSpPr txBox="1"/>
+          <p:nvPr/>
+        </p:nvSpPr>
+        <p:spPr>
+          <a:xfrm>
+            <a:off x="868680" y="4882896"/>
+            <a:ext cx="365760" cy="320040"/>
+          </a:xfrm>
+          <a:prstGeom prst="rect">
+            <a:avLst/>
+          </a:prstGeom>
+          <a:noFill/>
+        </p:spPr>
+        <p:txBody>
+          <a:bodyPr wrap="square" lIns="0" rIns="0" tIns="0" bIns="0">
+            <a:spAutoFit/>
+          </a:bodyPr>
+          <a:lstStyle/>
+          <a:p>
+            <a:pPr algn="l">
+              <a:lnSpc>
+                <a:spcPct val="125000"/>
+              </a:lnSpc>
+            </a:pPr>
+            <a:r>
+              <a:rPr sz="1400" b="1">
+                <a:solidFill>
+                  <a:srgbClr val="4F46E5"/>
+                </a:solidFill>
+                <a:latin typeface="맑은 고딕"/>
+              </a:rPr>
+              <a:t>③</a:t>
+            </a:r>
+          </a:p>
+        </p:txBody>
+      </p:sp>
+      <p:sp>
+        <p:nvSpPr>
+          <p:cNvPr id="20" name="TextBox 19"/>
+          <p:cNvSpPr txBox="1"/>
+          <p:nvPr/>
+        </p:nvSpPr>
+        <p:spPr>
+          <a:xfrm>
+            <a:off x="1371600" y="4837176"/>
+            <a:ext cx="3200400" cy="365760"/>
+          </a:xfrm>
+          <a:prstGeom prst="rect">
+            <a:avLst/>
+          </a:prstGeom>
+          <a:noFill/>
+        </p:spPr>
+        <p:txBody>
+          <a:bodyPr wrap="square" lIns="0" rIns="0" tIns="0" bIns="0">
+            <a:spAutoFit/>
+          </a:bodyPr>
+          <a:lstStyle/>
+          <a:p>
+            <a:pPr algn="l">
+              <a:lnSpc>
+                <a:spcPct val="125000"/>
+              </a:lnSpc>
+            </a:pPr>
+            <a:r>
+              <a:rPr sz="1200" b="1">
+                <a:solidFill>
+                  <a:srgbClr val="0F141F"/>
+                </a:solidFill>
+                <a:latin typeface="맑은 고딕"/>
+              </a:rPr>
+              <a:t>잘하는 사람만</a:t>
+            </a:r>
+          </a:p>
+        </p:txBody>
+      </p:sp>
+      <p:sp>
+        <p:nvSpPr>
+          <p:cNvPr id="21" name="TextBox 20"/>
+          <p:cNvSpPr txBox="1"/>
+          <p:nvPr/>
+        </p:nvSpPr>
+        <p:spPr>
+          <a:xfrm>
+            <a:off x="4754880" y="4837176"/>
+            <a:ext cx="3657600" cy="365760"/>
+          </a:xfrm>
+          <a:prstGeom prst="rect">
+            <a:avLst/>
+          </a:prstGeom>
+          <a:noFill/>
+        </p:spPr>
+        <p:txBody>
+          <a:bodyPr wrap="square" lIns="0" rIns="0" tIns="0" bIns="0">
+            <a:spAutoFit/>
+          </a:bodyPr>
+          <a:lstStyle/>
+          <a:p>
+            <a:pPr algn="l">
+              <a:lnSpc>
+                <a:spcPct val="125000"/>
+              </a:lnSpc>
+            </a:pPr>
+            <a:r>
+              <a:rPr sz="1000" b="0">
+                <a:solidFill>
+                  <a:srgbClr val="424B5C"/>
+                </a:solidFill>
+                <a:latin typeface="맑은 고딕"/>
+              </a:rPr>
+              <a:t>역량 상위 5명</a:t>
+            </a:r>
+          </a:p>
+        </p:txBody>
+      </p:sp>
+      <p:sp>
+        <p:nvSpPr>
+          <p:cNvPr id="22" name="TextBox 21"/>
+          <p:cNvSpPr txBox="1"/>
+          <p:nvPr/>
+        </p:nvSpPr>
+        <p:spPr>
+          <a:xfrm>
+            <a:off x="8595360" y="4837176"/>
+            <a:ext cx="3017520" cy="365760"/>
+          </a:xfrm>
+          <a:prstGeom prst="rect">
+            <a:avLst/>
+          </a:prstGeom>
+          <a:noFill/>
+        </p:spPr>
+        <p:txBody>
+          <a:bodyPr wrap="square" lIns="0" rIns="0" tIns="0" bIns="0">
+            <a:spAutoFit/>
+          </a:bodyPr>
+          <a:lstStyle/>
+          <a:p>
+            <a:pPr algn="l">
+              <a:lnSpc>
+                <a:spcPct val="125000"/>
+              </a:lnSpc>
+            </a:pPr>
+            <a:r>
+              <a:rPr sz="1000" b="1">
+                <a:solidFill>
+                  <a:srgbClr val="4F46E5"/>
+                </a:solidFill>
+                <a:latin typeface="맑은 고딕"/>
+              </a:rPr>
+              <a:t>역량 100%, 친분 0 (이상)</a:t>
+            </a:r>
+          </a:p>
+        </p:txBody>
+      </p:sp>
+      <p:sp>
+        <p:nvSpPr>
+          <p:cNvPr id="23" name="TextBox 22"/>
+          <p:cNvSpPr txBox="1"/>
+          <p:nvPr/>
+        </p:nvSpPr>
+        <p:spPr>
+          <a:xfrm>
+            <a:off x="868680" y="5358384"/>
+            <a:ext cx="365760" cy="320040"/>
+          </a:xfrm>
+          <a:prstGeom prst="rect">
+            <a:avLst/>
+          </a:prstGeom>
+          <a:noFill/>
+        </p:spPr>
+        <p:txBody>
+          <a:bodyPr wrap="square" lIns="0" rIns="0" tIns="0" bIns="0">
+            <a:spAutoFit/>
+          </a:bodyPr>
+          <a:lstStyle/>
+          <a:p>
+            <a:pPr algn="l">
+              <a:lnSpc>
+                <a:spcPct val="125000"/>
+              </a:lnSpc>
+            </a:pPr>
+            <a:r>
+              <a:rPr sz="1400" b="1">
+                <a:solidFill>
+                  <a:srgbClr val="F59E0B"/>
+                </a:solidFill>
+                <a:latin typeface="맑은 고딕"/>
+              </a:rPr>
+              <a:t>④</a:t>
+            </a:r>
+          </a:p>
+        </p:txBody>
+      </p:sp>
+      <p:sp>
+        <p:nvSpPr>
+          <p:cNvPr id="24" name="TextBox 23"/>
+          <p:cNvSpPr txBox="1"/>
+          <p:nvPr/>
+        </p:nvSpPr>
+        <p:spPr>
+          <a:xfrm>
+            <a:off x="1371600" y="5312664"/>
+            <a:ext cx="3200400" cy="365760"/>
+          </a:xfrm>
+          <a:prstGeom prst="rect">
+            <a:avLst/>
+          </a:prstGeom>
+          <a:noFill/>
+        </p:spPr>
+        <p:txBody>
+          <a:bodyPr wrap="square" lIns="0" rIns="0" tIns="0" bIns="0">
+            <a:spAutoFit/>
+          </a:bodyPr>
+          <a:lstStyle/>
+          <a:p>
+            <a:pPr algn="l">
+              <a:lnSpc>
+                <a:spcPct val="125000"/>
+              </a:lnSpc>
+            </a:pPr>
+            <a:r>
+              <a:rPr sz="1200" b="1">
+                <a:solidFill>
+                  <a:srgbClr val="0F141F"/>
+                </a:solidFill>
+                <a:latin typeface="맑은 고딕"/>
+              </a:rPr>
+              <a:t>머리에 떠오르는 사람</a:t>
+            </a:r>
+          </a:p>
+        </p:txBody>
+      </p:sp>
+      <p:sp>
+        <p:nvSpPr>
+          <p:cNvPr id="25" name="TextBox 24"/>
+          <p:cNvSpPr txBox="1"/>
+          <p:nvPr/>
+        </p:nvSpPr>
+        <p:spPr>
+          <a:xfrm>
+            <a:off x="4754880" y="5312664"/>
+            <a:ext cx="3657600" cy="365760"/>
+          </a:xfrm>
+          <a:prstGeom prst="rect">
+            <a:avLst/>
+          </a:prstGeom>
+          <a:noFill/>
+        </p:spPr>
+        <p:txBody>
+          <a:bodyPr wrap="square" lIns="0" rIns="0" tIns="0" bIns="0">
+            <a:spAutoFit/>
+          </a:bodyPr>
+          <a:lstStyle/>
+          <a:p>
+            <a:pPr algn="l">
+              <a:lnSpc>
+                <a:spcPct val="125000"/>
+              </a:lnSpc>
+            </a:pPr>
+            <a:r>
+              <a:rPr sz="1000" b="0">
+                <a:solidFill>
+                  <a:srgbClr val="424B5C"/>
+                </a:solidFill>
+                <a:latin typeface="맑은 고딕"/>
+              </a:rPr>
+              <a:t>친한 7명 떠올리고 그 중 5명</a:t>
+            </a:r>
+          </a:p>
+        </p:txBody>
+      </p:sp>
+      <p:sp>
+        <p:nvSpPr>
+          <p:cNvPr id="26" name="TextBox 25"/>
+          <p:cNvSpPr txBox="1"/>
+          <p:nvPr/>
+        </p:nvSpPr>
+        <p:spPr>
+          <a:xfrm>
+            <a:off x="8595360" y="5312664"/>
+            <a:ext cx="3017520" cy="365760"/>
+          </a:xfrm>
+          <a:prstGeom prst="rect">
+            <a:avLst/>
+          </a:prstGeom>
+          <a:noFill/>
+        </p:spPr>
+        <p:txBody>
+          <a:bodyPr wrap="square" lIns="0" rIns="0" tIns="0" bIns="0">
+            <a:spAutoFit/>
+          </a:bodyPr>
+          <a:lstStyle/>
+          <a:p>
+            <a:pPr algn="l">
+              <a:lnSpc>
+                <a:spcPct val="125000"/>
+              </a:lnSpc>
+            </a:pPr>
+            <a:r>
+              <a:rPr sz="1000" b="1">
+                <a:solidFill>
+                  <a:srgbClr val="F59E0B"/>
+                </a:solidFill>
+                <a:latin typeface="맑은 고딕"/>
+              </a:rPr>
+              <a:t>현실의 satisficing</a:t>
+            </a:r>
+          </a:p>
+        </p:txBody>
+      </p:sp>
+      <p:sp>
+        <p:nvSpPr>
+          <p:cNvPr id="27" name="TextBox 26"/>
+          <p:cNvSpPr txBox="1"/>
+          <p:nvPr/>
+        </p:nvSpPr>
+        <p:spPr>
+          <a:xfrm>
+            <a:off x="868680" y="5833872"/>
+            <a:ext cx="365760" cy="320040"/>
+          </a:xfrm>
+          <a:prstGeom prst="rect">
+            <a:avLst/>
+          </a:prstGeom>
+          <a:noFill/>
+        </p:spPr>
+        <p:txBody>
+          <a:bodyPr wrap="square" lIns="0" rIns="0" tIns="0" bIns="0">
+            <a:spAutoFit/>
+          </a:bodyPr>
+          <a:lstStyle/>
+          <a:p>
+            <a:pPr algn="l">
+              <a:lnSpc>
+                <a:spcPct val="125000"/>
+              </a:lnSpc>
+            </a:pPr>
+            <a:r>
+              <a:rPr sz="1400" b="1">
+                <a:solidFill>
+                  <a:srgbClr val="424B5C"/>
+                </a:solidFill>
+                <a:latin typeface="맑은 고딕"/>
+              </a:rPr>
+              <a:t>⑤</a:t>
+            </a:r>
+          </a:p>
+        </p:txBody>
+      </p:sp>
+      <p:sp>
+        <p:nvSpPr>
+          <p:cNvPr id="28" name="TextBox 27"/>
+          <p:cNvSpPr txBox="1"/>
+          <p:nvPr/>
+        </p:nvSpPr>
+        <p:spPr>
+          <a:xfrm>
+            <a:off x="1371600" y="5788152"/>
+            <a:ext cx="3200400" cy="365760"/>
+          </a:xfrm>
+          <a:prstGeom prst="rect">
+            <a:avLst/>
+          </a:prstGeom>
+          <a:noFill/>
+        </p:spPr>
+        <p:txBody>
+          <a:bodyPr wrap="square" lIns="0" rIns="0" tIns="0" bIns="0">
+            <a:spAutoFit/>
+          </a:bodyPr>
+          <a:lstStyle/>
+          <a:p>
+            <a:pPr algn="l">
+              <a:lnSpc>
+                <a:spcPct val="125000"/>
+              </a:lnSpc>
+            </a:pPr>
+            <a:r>
+              <a:rPr sz="1200" b="1">
+                <a:solidFill>
+                  <a:srgbClr val="0F141F"/>
+                </a:solidFill>
+                <a:latin typeface="맑은 고딕"/>
+              </a:rPr>
+              <a:t>프로필 카드 보고</a:t>
+            </a:r>
+          </a:p>
+        </p:txBody>
+      </p:sp>
+      <p:sp>
+        <p:nvSpPr>
+          <p:cNvPr id="29" name="TextBox 28"/>
+          <p:cNvSpPr txBox="1"/>
+          <p:nvPr/>
+        </p:nvSpPr>
+        <p:spPr>
+          <a:xfrm>
+            <a:off x="4754880" y="5788152"/>
+            <a:ext cx="3657600" cy="365760"/>
+          </a:xfrm>
+          <a:prstGeom prst="rect">
+            <a:avLst/>
+          </a:prstGeom>
+          <a:noFill/>
+        </p:spPr>
+        <p:txBody>
+          <a:bodyPr wrap="square" lIns="0" rIns="0" tIns="0" bIns="0">
+            <a:spAutoFit/>
+          </a:bodyPr>
+          <a:lstStyle/>
+          <a:p>
+            <a:pPr algn="l">
+              <a:lnSpc>
+                <a:spcPct val="125000"/>
+              </a:lnSpc>
+            </a:pPr>
+            <a:r>
+              <a:rPr sz="1000" b="0">
+                <a:solidFill>
+                  <a:srgbClr val="424B5C"/>
+                </a:solidFill>
+                <a:latin typeface="맑은 고딕"/>
+              </a:rPr>
+              <a:t>정보 본 후 다양성 고려</a:t>
+            </a:r>
+          </a:p>
+        </p:txBody>
+      </p:sp>
+      <p:sp>
+        <p:nvSpPr>
+          <p:cNvPr id="30" name="TextBox 29"/>
+          <p:cNvSpPr txBox="1"/>
+          <p:nvPr/>
+        </p:nvSpPr>
+        <p:spPr>
+          <a:xfrm>
+            <a:off x="8595360" y="5788152"/>
+            <a:ext cx="3017520" cy="365760"/>
+          </a:xfrm>
+          <a:prstGeom prst="rect">
+            <a:avLst/>
+          </a:prstGeom>
+          <a:noFill/>
+        </p:spPr>
+        <p:txBody>
+          <a:bodyPr wrap="square" lIns="0" rIns="0" tIns="0" bIns="0">
+            <a:spAutoFit/>
+          </a:bodyPr>
+          <a:lstStyle/>
+          <a:p>
+            <a:pPr algn="l">
+              <a:lnSpc>
+                <a:spcPct val="125000"/>
+              </a:lnSpc>
+            </a:pPr>
+            <a:r>
+              <a:rPr sz="1000" b="1">
+                <a:solidFill>
+                  <a:srgbClr val="424B5C"/>
+                </a:solidFill>
+                <a:latin typeface="맑은 고딕"/>
+              </a:rPr>
+              <a:t>균형 잡힌 팀</a:t>
+            </a:r>
+          </a:p>
+        </p:txBody>
+      </p:sp>
+      <p:sp>
+        <p:nvSpPr>
+          <p:cNvPr id="31" name="TextBox 30"/>
+          <p:cNvSpPr txBox="1"/>
+          <p:nvPr/>
+        </p:nvSpPr>
+        <p:spPr>
+          <a:xfrm>
+            <a:off x="640080" y="6400800"/>
+            <a:ext cx="10972800" cy="365760"/>
+          </a:xfrm>
+          <a:prstGeom prst="rect">
+            <a:avLst/>
+          </a:prstGeom>
+          <a:noFill/>
+        </p:spPr>
+        <p:txBody>
+          <a:bodyPr wrap="square" lIns="0" rIns="0" tIns="0" bIns="0">
+            <a:spAutoFit/>
+          </a:bodyPr>
+          <a:lstStyle/>
+          <a:p>
+            <a:pPr algn="ctr">
+              <a:lnSpc>
+                <a:spcPct val="125000"/>
+              </a:lnSpc>
+            </a:pPr>
+            <a:r>
+              <a:rPr sz="1200" b="1">
+                <a:solidFill>
+                  <a:srgbClr val="EC4899"/>
+                </a:solidFill>
+                <a:latin typeface="맑은 고딕"/>
+              </a:rPr>
+              <a:t>결과: 5장의 네트워크 그래프 → 발표 슬라이드 임팩트 최고</a:t>
+            </a:r>
+          </a:p>
+        </p:txBody>
+      </p:sp>
+    </p:spTree>
+  </p:cSld>
+  <p:clrMapOvr>
+    <a:masterClrMapping/>
+  </p:clrMapOvr>
+</p:sld>
+</file>
+
+<file path=ppt/slides/slide27.xml><?xml version="1.0" encoding="utf-8"?>
 <p:sld xmlns:a="http://schemas.openxmlformats.org/drawingml/2006/main" xmlns:p="http://schemas.openxmlformats.org/presentationml/2006/main" xmlns:r="http://schemas.openxmlformats.org/officeDocument/2006/relationships">
   <p:cSld>
     <p:spTree>

--- a/team_project/kickoff_2026-05-11.pptx
+++ b/team_project/kickoff_2026-05-11.pptx
@@ -5061,7 +5061,7 @@
         </p:nvSpPr>
         <p:spPr>
           <a:xfrm>
-            <a:off x="6492240" y="2651760"/>
+            <a:off x="6492240" y="2697480"/>
             <a:ext cx="4572000" cy="365760"/>
           </a:xfrm>
           <a:prstGeom prst="rect">
@@ -5081,13 +5081,13 @@
               </a:lnSpc>
             </a:pPr>
             <a:r>
-              <a:rPr sz="1100" b="1">
+              <a:rPr sz="1300" b="1">
                 <a:solidFill>
                   <a:srgbClr val="4F46E5"/>
                 </a:solidFill>
                 <a:latin typeface="맑은 고딕"/>
               </a:rPr>
-              <a:t>강의계획서의 실제 효과</a:t>
+              <a:t>강의계획서가 만드는 효과</a:t>
             </a:r>
           </a:p>
         </p:txBody>
@@ -5100,33 +5100,33 @@
         </p:nvSpPr>
         <p:spPr>
           <a:xfrm>
-            <a:off x="6492240" y="3017520"/>
-            <a:ext cx="4846320" cy="502920"/>
-          </a:xfrm>
-          <a:prstGeom prst="rect">
-            <a:avLst/>
-          </a:prstGeom>
-          <a:noFill/>
-        </p:spPr>
-        <p:txBody>
-          <a:bodyPr wrap="square" lIns="0" rIns="0" tIns="0" bIns="0">
-            <a:spAutoFit/>
-          </a:bodyPr>
-          <a:lstStyle/>
-          <a:p>
-            <a:pPr algn="l">
-              <a:lnSpc>
-                <a:spcPct val="125000"/>
-              </a:lnSpc>
-            </a:pPr>
-            <a:r>
-              <a:rPr sz="1400" b="1">
+            <a:off x="6492240" y="3154680"/>
+            <a:ext cx="4846320" cy="548640"/>
+          </a:xfrm>
+          <a:prstGeom prst="rect">
+            <a:avLst/>
+          </a:prstGeom>
+          <a:noFill/>
+        </p:spPr>
+        <p:txBody>
+          <a:bodyPr wrap="square" lIns="0" rIns="0" tIns="0" bIns="0">
+            <a:spAutoFit/>
+          </a:bodyPr>
+          <a:lstStyle/>
+          <a:p>
+            <a:pPr algn="l">
+              <a:lnSpc>
+                <a:spcPct val="125000"/>
+              </a:lnSpc>
+            </a:pPr>
+            <a:r>
+              <a:rPr sz="1800" b="1">
                 <a:solidFill>
                   <a:srgbClr val="0F141F"/>
                 </a:solidFill>
                 <a:latin typeface="맑은 고딕"/>
               </a:rPr>
-              <a:t>"팀장이 팀원 중 2명을 직접 지명"</a:t>
+              <a:t>"팀장이 2명 직접 지명"</a:t>
             </a:r>
           </a:p>
         </p:txBody>
@@ -5139,27 +5139,27 @@
         </p:nvSpPr>
         <p:spPr>
           <a:xfrm>
-            <a:off x="6492240" y="3657600"/>
-            <a:ext cx="4846320" cy="1188720"/>
-          </a:xfrm>
-          <a:prstGeom prst="rect">
-            <a:avLst/>
-          </a:prstGeom>
-          <a:noFill/>
-        </p:spPr>
-        <p:txBody>
-          <a:bodyPr wrap="square" lIns="0" rIns="0" tIns="0" bIns="0">
-            <a:spAutoFit/>
-          </a:bodyPr>
-          <a:lstStyle/>
-          <a:p>
-            <a:pPr algn="l">
-              <a:lnSpc>
-                <a:spcPct val="140000"/>
-              </a:lnSpc>
-            </a:pPr>
-            <a:r>
-              <a:rPr sz="1100" b="0">
+            <a:off x="6492240" y="3840480"/>
+            <a:ext cx="4846320" cy="1371600"/>
+          </a:xfrm>
+          <a:prstGeom prst="rect">
+            <a:avLst/>
+          </a:prstGeom>
+          <a:noFill/>
+        </p:spPr>
+        <p:txBody>
+          <a:bodyPr wrap="square" lIns="0" rIns="0" tIns="0" bIns="0">
+            <a:spAutoFit/>
+          </a:bodyPr>
+          <a:lstStyle/>
+          <a:p>
+            <a:pPr algn="l">
+              <a:lnSpc>
+                <a:spcPct val="145000"/>
+              </a:lnSpc>
+            </a:pPr>
+            <a:r>
+              <a:rPr sz="1400" b="0">
                 <a:solidFill>
                   <a:srgbClr val="424B5C"/>
                 </a:solidFill>
@@ -5171,33 +5171,33 @@
           <a:p>
             <a:pPr algn="l">
               <a:lnSpc>
-                <a:spcPct val="140000"/>
-              </a:lnSpc>
-            </a:pPr>
-            <a:r>
-              <a:rPr sz="1100" b="0">
+                <a:spcPct val="145000"/>
+              </a:lnSpc>
+            </a:pPr>
+            <a:r>
+              <a:rPr sz="1400" b="0">
                 <a:solidFill>
                   <a:srgbClr val="424B5C"/>
                 </a:solidFill>
                 <a:latin typeface="맑은 고딕"/>
               </a:rPr>
-              <a:t>떠오르는 친한 사람으로 결정하게 된다.</a:t>
-            </a:r>
-          </a:p>
-          <a:p>
-            <a:pPr algn="l">
-              <a:lnSpc>
-                <a:spcPct val="140000"/>
-              </a:lnSpc>
-            </a:pPr>
-            <a:r>
-              <a:rPr sz="1100" b="0">
+              <a:t>떠오르는 친한 사람으로 결정한다.</a:t>
+            </a:r>
+          </a:p>
+          <a:p>
+            <a:pPr algn="l">
+              <a:lnSpc>
+                <a:spcPct val="145000"/>
+              </a:lnSpc>
+            </a:pPr>
+            <a:r>
+              <a:rPr sz="1400" b="0">
                 <a:solidFill>
                   <a:srgbClr val="424B5C"/>
                 </a:solidFill>
                 <a:latin typeface="맑은 고딕"/>
               </a:rPr>
-              <a:t>결과적으로 친분 기반 팀, 역량 균형이 깨진다.</a:t>
+              <a:t>친분 기반 팀, 역량 균형이 깨진다.</a:t>
             </a:r>
           </a:p>
         </p:txBody>
@@ -5210,7 +5210,7 @@
         </p:nvCxnSpPr>
         <p:spPr>
           <a:xfrm>
-            <a:off x="6492240" y="5074920"/>
+            <a:off x="6492240" y="5349240"/>
             <a:ext cx="4846320" cy="0"/>
           </a:xfrm>
           <a:prstGeom prst="line">
@@ -5245,33 +5245,33 @@
         </p:nvSpPr>
         <p:spPr>
           <a:xfrm>
-            <a:off x="6492240" y="5166360"/>
-            <a:ext cx="4572000" cy="320040"/>
-          </a:xfrm>
-          <a:prstGeom prst="rect">
-            <a:avLst/>
-          </a:prstGeom>
-          <a:noFill/>
-        </p:spPr>
-        <p:txBody>
-          <a:bodyPr wrap="square" lIns="0" rIns="0" tIns="0" bIns="0">
-            <a:spAutoFit/>
-          </a:bodyPr>
-          <a:lstStyle/>
-          <a:p>
-            <a:pPr algn="l">
-              <a:lnSpc>
-                <a:spcPct val="125000"/>
-              </a:lnSpc>
-            </a:pPr>
-            <a:r>
-              <a:rPr sz="1000" b="1">
+            <a:off x="6492240" y="5440680"/>
+            <a:ext cx="4572000" cy="365760"/>
+          </a:xfrm>
+          <a:prstGeom prst="rect">
+            <a:avLst/>
+          </a:prstGeom>
+          <a:noFill/>
+        </p:spPr>
+        <p:txBody>
+          <a:bodyPr wrap="square" lIns="0" rIns="0" tIns="0" bIns="0">
+            <a:spAutoFit/>
+          </a:bodyPr>
+          <a:lstStyle/>
+          <a:p>
+            <a:pPr algn="l">
+              <a:lnSpc>
+                <a:spcPct val="125000"/>
+              </a:lnSpc>
+            </a:pPr>
+            <a:r>
+              <a:rPr sz="1200" b="1">
                 <a:solidFill>
                   <a:srgbClr val="4F46E5"/>
                 </a:solidFill>
                 <a:latin typeface="맑은 고딕"/>
               </a:rPr>
-              <a:t>시뮬레이션 결과 — 팀 구성 만족도</a:t>
+              <a:t>시뮬레이션 — 팀 만족도</a:t>
             </a:r>
           </a:p>
         </p:txBody>
@@ -5279,45 +5279,6 @@
       <p:sp>
         <p:nvSpPr>
           <p:cNvPr id="22" name="TextBox 21"/>
-          <p:cNvSpPr txBox="1"/>
-          <p:nvPr/>
-        </p:nvSpPr>
-        <p:spPr>
-          <a:xfrm>
-            <a:off x="6492240" y="5486400"/>
-            <a:ext cx="4846320" cy="365760"/>
-          </a:xfrm>
-          <a:prstGeom prst="rect">
-            <a:avLst/>
-          </a:prstGeom>
-          <a:noFill/>
-        </p:spPr>
-        <p:txBody>
-          <a:bodyPr wrap="square" lIns="0" rIns="0" tIns="0" bIns="0">
-            <a:spAutoFit/>
-          </a:bodyPr>
-          <a:lstStyle/>
-          <a:p>
-            <a:pPr algn="l">
-              <a:lnSpc>
-                <a:spcPct val="125000"/>
-              </a:lnSpc>
-            </a:pPr>
-            <a:r>
-              <a:rPr sz="1100" b="0">
-                <a:solidFill>
-                  <a:srgbClr val="424B5C"/>
-                </a:solidFill>
-                <a:latin typeface="맑은 고딕"/>
-              </a:rPr>
-              <a:t>후보 정보 없이 N=15: 만족도 70% 이하</a:t>
-            </a:r>
-          </a:p>
-        </p:txBody>
-      </p:sp>
-      <p:sp>
-        <p:nvSpPr>
-          <p:cNvPr id="23" name="TextBox 22"/>
           <p:cNvSpPr txBox="1"/>
           <p:nvPr/>
         </p:nvSpPr>
@@ -5343,93 +5304,52 @@
               </a:lnSpc>
             </a:pPr>
             <a:r>
-              <a:rPr sz="1200" b="1">
+              <a:rPr sz="1400" b="0">
+                <a:solidFill>
+                  <a:srgbClr val="424B5C"/>
+                </a:solidFill>
+                <a:latin typeface="맑은 고딕"/>
+              </a:rPr>
+              <a:t>후보 15명, 정보 X: 70% 이하</a:t>
+            </a:r>
+          </a:p>
+        </p:txBody>
+      </p:sp>
+      <p:sp>
+        <p:nvSpPr>
+          <p:cNvPr id="23" name="TextBox 22"/>
+          <p:cNvSpPr txBox="1"/>
+          <p:nvPr/>
+        </p:nvSpPr>
+        <p:spPr>
+          <a:xfrm>
+            <a:off x="6492240" y="6263640"/>
+            <a:ext cx="4846320" cy="365760"/>
+          </a:xfrm>
+          <a:prstGeom prst="rect">
+            <a:avLst/>
+          </a:prstGeom>
+          <a:noFill/>
+        </p:spPr>
+        <p:txBody>
+          <a:bodyPr wrap="square" lIns="0" rIns="0" tIns="0" bIns="0">
+            <a:spAutoFit/>
+          </a:bodyPr>
+          <a:lstStyle/>
+          <a:p>
+            <a:pPr algn="l">
+              <a:lnSpc>
+                <a:spcPct val="125000"/>
+              </a:lnSpc>
+            </a:pPr>
+            <a:r>
+              <a:rPr sz="1600" b="1">
                 <a:solidFill>
                   <a:srgbClr val="0F141F"/>
                 </a:solidFill>
                 <a:latin typeface="맑은 고딕"/>
               </a:rPr>
-              <a:t>프로필 카드 주면: 92% 유지</a:t>
-            </a:r>
-          </a:p>
-        </p:txBody>
-      </p:sp>
-      <p:sp>
-        <p:nvSpPr>
-          <p:cNvPr id="24" name="Rounded Rectangle 23"/>
-          <p:cNvSpPr/>
-          <p:nvPr/>
-        </p:nvSpPr>
-        <p:spPr>
-          <a:xfrm>
-            <a:off x="6492240" y="6263640"/>
-            <a:ext cx="2286000" cy="365760"/>
-          </a:xfrm>
-          <a:prstGeom prst="roundRect">
-            <a:avLst>
-              <a:gd name="adj" fmla="val 50000"/>
-            </a:avLst>
-          </a:prstGeom>
-          <a:solidFill>
-            <a:srgbClr val="4F46E5"/>
-          </a:solidFill>
-          <a:ln>
-            <a:noFill/>
-          </a:ln>
-        </p:spPr>
-        <p:style>
-          <a:lnRef idx="1">
-            <a:schemeClr val="accent1"/>
-          </a:lnRef>
-          <a:fillRef idx="3">
-            <a:schemeClr val="accent1"/>
-          </a:fillRef>
-          <a:effectRef idx="2">
-            <a:schemeClr val="accent1"/>
-          </a:effectRef>
-          <a:fontRef idx="minor">
-            <a:schemeClr val="lt1"/>
-          </a:fontRef>
-        </p:style>
-        <p:txBody>
-          <a:bodyPr rtlCol="0" anchor="ctr"/>
-          <a:lstStyle/>
-          <a:p>
-            <a:pPr algn="ctr"/>
-          </a:p>
-        </p:txBody>
-      </p:sp>
-      <p:sp>
-        <p:nvSpPr>
-          <p:cNvPr id="25" name="TextBox 24"/>
-          <p:cNvSpPr txBox="1"/>
-          <p:nvPr/>
-        </p:nvSpPr>
-        <p:spPr>
-          <a:xfrm>
-            <a:off x="6492240" y="6263640"/>
-            <a:ext cx="2286000" cy="365760"/>
-          </a:xfrm>
-          <a:prstGeom prst="rect">
-            <a:avLst/>
-          </a:prstGeom>
-          <a:noFill/>
-        </p:spPr>
-        <p:txBody>
-          <a:bodyPr wrap="none" lIns="36576" rIns="36576" tIns="0" bIns="0" anchor="ctr">
-            <a:spAutoFit/>
-          </a:bodyPr>
-          <a:lstStyle/>
-          <a:p>
-            <a:pPr algn="ctr"/>
-            <a:r>
-              <a:rPr sz="1000" b="1">
-                <a:solidFill>
-                  <a:srgbClr val="FFFFFF"/>
-                </a:solidFill>
-                <a:latin typeface="맑은 고딕"/>
-              </a:rPr>
-              <a:t>한계 우회 가능</a:t>
+              <a:t>프로필 카드 제공: 92%</a:t>
             </a:r>
           </a:p>
         </p:txBody>
@@ -7033,7 +6953,7 @@
         </p:nvSpPr>
         <p:spPr>
           <a:xfrm>
-            <a:off x="6492240" y="2651760"/>
+            <a:off x="6492240" y="2697480"/>
             <a:ext cx="4572000" cy="365760"/>
           </a:xfrm>
           <a:prstGeom prst="rect">
@@ -7053,13 +6973,13 @@
               </a:lnSpc>
             </a:pPr>
             <a:r>
-              <a:rPr sz="1100" b="1">
+              <a:rPr sz="1300" b="1">
                 <a:solidFill>
                   <a:srgbClr val="EC4899"/>
                 </a:solidFill>
                 <a:latin typeface="맑은 고딕"/>
               </a:rPr>
-              <a:t>강의계획서의 실제 효과</a:t>
+              <a:t>강의계획서가 만드는 효과</a:t>
             </a:r>
           </a:p>
         </p:txBody>
@@ -7072,33 +6992,33 @@
         </p:nvSpPr>
         <p:spPr>
           <a:xfrm>
-            <a:off x="6492240" y="3017520"/>
-            <a:ext cx="4846320" cy="502920"/>
-          </a:xfrm>
-          <a:prstGeom prst="rect">
-            <a:avLst/>
-          </a:prstGeom>
-          <a:noFill/>
-        </p:spPr>
-        <p:txBody>
-          <a:bodyPr wrap="square" lIns="0" rIns="0" tIns="0" bIns="0">
-            <a:spAutoFit/>
-          </a:bodyPr>
-          <a:lstStyle/>
-          <a:p>
-            <a:pPr algn="l">
-              <a:lnSpc>
-                <a:spcPct val="125000"/>
-              </a:lnSpc>
-            </a:pPr>
-            <a:r>
-              <a:rPr sz="1300" b="1">
+            <a:off x="6492240" y="3154680"/>
+            <a:ext cx="4846320" cy="457200"/>
+          </a:xfrm>
+          <a:prstGeom prst="rect">
+            <a:avLst/>
+          </a:prstGeom>
+          <a:noFill/>
+        </p:spPr>
+        <p:txBody>
+          <a:bodyPr wrap="square" lIns="0" rIns="0" tIns="0" bIns="0">
+            <a:spAutoFit/>
+          </a:bodyPr>
+          <a:lstStyle/>
+          <a:p>
+            <a:pPr algn="l">
+              <a:lnSpc>
+                <a:spcPct val="125000"/>
+              </a:lnSpc>
+            </a:pPr>
+            <a:r>
+              <a:rPr sz="1800" b="1">
                 <a:solidFill>
                   <a:srgbClr val="0F141F"/>
                 </a:solidFill>
                 <a:latin typeface="맑은 고딕"/>
               </a:rPr>
-              <a:t>"+10점 가산" vs "현저히 낮다고 판단 시 감점"</a:t>
+              <a:t>"+10 가산" vs "감점"</a:t>
             </a:r>
           </a:p>
         </p:txBody>
@@ -7111,7 +7031,7 @@
         </p:nvSpPr>
         <p:spPr>
           <a:xfrm>
-            <a:off x="6492240" y="3657600"/>
+            <a:off x="6492240" y="3749039"/>
             <a:ext cx="4846320" cy="1371600"/>
           </a:xfrm>
           <a:prstGeom prst="rect">
@@ -7127,43 +7047,43 @@
           <a:p>
             <a:pPr algn="l">
               <a:lnSpc>
-                <a:spcPct val="140000"/>
-              </a:lnSpc>
-            </a:pPr>
-            <a:r>
-              <a:rPr sz="1100" b="0">
+                <a:spcPct val="145000"/>
+              </a:lnSpc>
+            </a:pPr>
+            <a:r>
+              <a:rPr sz="1400" b="0">
                 <a:solidFill>
                   <a:srgbClr val="424B5C"/>
                 </a:solidFill>
                 <a:latin typeface="맑은 고딕"/>
               </a:rPr>
-              <a:t>+10은 명확한 수치의 보상이다.</a:t>
-            </a:r>
-          </a:p>
-          <a:p>
-            <a:pPr algn="l">
-              <a:lnSpc>
-                <a:spcPct val="140000"/>
-              </a:lnSpc>
-            </a:pPr>
-            <a:r>
-              <a:rPr sz="1100" b="0">
+              <a:t>+10은 명확한 보상.</a:t>
+            </a:r>
+          </a:p>
+          <a:p>
+            <a:pPr algn="l">
+              <a:lnSpc>
+                <a:spcPct val="145000"/>
+              </a:lnSpc>
+            </a:pPr>
+            <a:r>
+              <a:rPr sz="1400" b="0">
                 <a:solidFill>
                   <a:srgbClr val="424B5C"/>
                 </a:solidFill>
                 <a:latin typeface="맑은 고딕"/>
               </a:rPr>
-              <a:t>반면 감점은 기준이 모호한 위협이다.</a:t>
-            </a:r>
-          </a:p>
-          <a:p>
-            <a:pPr algn="l">
-              <a:lnSpc>
-                <a:spcPct val="140000"/>
-              </a:lnSpc>
-            </a:pPr>
-            <a:r>
-              <a:rPr sz="1100" b="0">
+              <a:t>감점은 기준이 모호한 위협.</a:t>
+            </a:r>
+          </a:p>
+          <a:p>
+            <a:pPr algn="l">
+              <a:lnSpc>
+                <a:spcPct val="145000"/>
+              </a:lnSpc>
+            </a:pPr>
+            <a:r>
+              <a:rPr sz="1400" b="0">
                 <a:solidFill>
                   <a:srgbClr val="424B5C"/>
                 </a:solidFill>
@@ -7182,7 +7102,7 @@
         </p:nvCxnSpPr>
         <p:spPr>
           <a:xfrm>
-            <a:off x="6492240" y="5074920"/>
+            <a:off x="6492240" y="5349240"/>
             <a:ext cx="4846320" cy="0"/>
           </a:xfrm>
           <a:prstGeom prst="line">
@@ -7217,33 +7137,33 @@
         </p:nvSpPr>
         <p:spPr>
           <a:xfrm>
-            <a:off x="6492240" y="5166360"/>
-            <a:ext cx="4572000" cy="320040"/>
-          </a:xfrm>
-          <a:prstGeom prst="rect">
-            <a:avLst/>
-          </a:prstGeom>
-          <a:noFill/>
-        </p:spPr>
-        <p:txBody>
-          <a:bodyPr wrap="square" lIns="0" rIns="0" tIns="0" bIns="0">
-            <a:spAutoFit/>
-          </a:bodyPr>
-          <a:lstStyle/>
-          <a:p>
-            <a:pPr algn="l">
-              <a:lnSpc>
-                <a:spcPct val="125000"/>
-              </a:lnSpc>
-            </a:pPr>
-            <a:r>
-              <a:rPr sz="1000" b="1">
+            <a:off x="6492240" y="5440680"/>
+            <a:ext cx="4572000" cy="365760"/>
+          </a:xfrm>
+          <a:prstGeom prst="rect">
+            <a:avLst/>
+          </a:prstGeom>
+          <a:noFill/>
+        </p:spPr>
+        <p:txBody>
+          <a:bodyPr wrap="square" lIns="0" rIns="0" tIns="0" bIns="0">
+            <a:spAutoFit/>
+          </a:bodyPr>
+          <a:lstStyle/>
+          <a:p>
+            <a:pPr algn="l">
+              <a:lnSpc>
+                <a:spcPct val="125000"/>
+              </a:lnSpc>
+            </a:pPr>
+            <a:r>
+              <a:rPr sz="1200" b="1">
                 <a:solidFill>
                   <a:srgbClr val="EC4899"/>
                 </a:solidFill>
                 <a:latin typeface="맑은 고딕"/>
               </a:rPr>
-              <a:t>예상 결과 — 표현만 달라도 반응 차이</a:t>
+              <a:t>예상 결과</a:t>
             </a:r>
           </a:p>
         </p:txBody>
@@ -7251,45 +7171,6 @@
       <p:sp>
         <p:nvSpPr>
           <p:cNvPr id="23" name="TextBox 22"/>
-          <p:cNvSpPr txBox="1"/>
-          <p:nvPr/>
-        </p:nvSpPr>
-        <p:spPr>
-          <a:xfrm>
-            <a:off x="6492240" y="5486400"/>
-            <a:ext cx="4846320" cy="365760"/>
-          </a:xfrm>
-          <a:prstGeom prst="rect">
-            <a:avLst/>
-          </a:prstGeom>
-          <a:noFill/>
-        </p:spPr>
-        <p:txBody>
-          <a:bodyPr wrap="square" lIns="0" rIns="0" tIns="0" bIns="0">
-            <a:spAutoFit/>
-          </a:bodyPr>
-          <a:lstStyle/>
-          <a:p>
-            <a:pPr algn="l">
-              <a:lnSpc>
-                <a:spcPct val="125000"/>
-              </a:lnSpc>
-            </a:pPr>
-            <a:r>
-              <a:rPr sz="1100" b="0">
-                <a:solidFill>
-                  <a:srgbClr val="424B5C"/>
-                </a:solidFill>
-                <a:latin typeface="맑은 고딕"/>
-              </a:rPr>
-              <a:t>+10 가산 보고 자원하는 학생: 적당함</a:t>
-            </a:r>
-          </a:p>
-        </p:txBody>
-      </p:sp>
-      <p:sp>
-        <p:nvSpPr>
-          <p:cNvPr id="24" name="TextBox 23"/>
           <p:cNvSpPr txBox="1"/>
           <p:nvPr/>
         </p:nvSpPr>
@@ -7315,93 +7196,52 @@
               </a:lnSpc>
             </a:pPr>
             <a:r>
-              <a:rPr sz="1200" b="1">
+              <a:rPr sz="1400" b="0">
+                <a:solidFill>
+                  <a:srgbClr val="424B5C"/>
+                </a:solidFill>
+                <a:latin typeface="맑은 고딕"/>
+              </a:rPr>
+              <a:t>+10 보고 자원: 적당함</a:t>
+            </a:r>
+          </a:p>
+        </p:txBody>
+      </p:sp>
+      <p:sp>
+        <p:nvSpPr>
+          <p:cNvPr id="24" name="TextBox 23"/>
+          <p:cNvSpPr txBox="1"/>
+          <p:nvPr/>
+        </p:nvSpPr>
+        <p:spPr>
+          <a:xfrm>
+            <a:off x="6492240" y="6263640"/>
+            <a:ext cx="4846320" cy="365760"/>
+          </a:xfrm>
+          <a:prstGeom prst="rect">
+            <a:avLst/>
+          </a:prstGeom>
+          <a:noFill/>
+        </p:spPr>
+        <p:txBody>
+          <a:bodyPr wrap="square" lIns="0" rIns="0" tIns="0" bIns="0">
+            <a:spAutoFit/>
+          </a:bodyPr>
+          <a:lstStyle/>
+          <a:p>
+            <a:pPr algn="l">
+              <a:lnSpc>
+                <a:spcPct val="125000"/>
+              </a:lnSpc>
+            </a:pPr>
+            <a:r>
+              <a:rPr sz="1600" b="1">
                 <a:solidFill>
                   <a:srgbClr val="0F141F"/>
                 </a:solidFill>
                 <a:latin typeface="맑은 고딕"/>
               </a:rPr>
-              <a:t>감점 회피하려 자원하는 학생: 약 2배 많음</a:t>
-            </a:r>
-          </a:p>
-        </p:txBody>
-      </p:sp>
-      <p:sp>
-        <p:nvSpPr>
-          <p:cNvPr id="25" name="Rounded Rectangle 24"/>
-          <p:cNvSpPr/>
-          <p:nvPr/>
-        </p:nvSpPr>
-        <p:spPr>
-          <a:xfrm>
-            <a:off x="6492240" y="6263640"/>
-            <a:ext cx="2194560" cy="365760"/>
-          </a:xfrm>
-          <a:prstGeom prst="roundRect">
-            <a:avLst>
-              <a:gd name="adj" fmla="val 50000"/>
-            </a:avLst>
-          </a:prstGeom>
-          <a:solidFill>
-            <a:srgbClr val="EC4899"/>
-          </a:solidFill>
-          <a:ln>
-            <a:noFill/>
-          </a:ln>
-        </p:spPr>
-        <p:style>
-          <a:lnRef idx="1">
-            <a:schemeClr val="accent1"/>
-          </a:lnRef>
-          <a:fillRef idx="3">
-            <a:schemeClr val="accent1"/>
-          </a:fillRef>
-          <a:effectRef idx="2">
-            <a:schemeClr val="accent1"/>
-          </a:effectRef>
-          <a:fontRef idx="minor">
-            <a:schemeClr val="lt1"/>
-          </a:fontRef>
-        </p:style>
-        <p:txBody>
-          <a:bodyPr rtlCol="0" anchor="ctr"/>
-          <a:lstStyle/>
-          <a:p>
-            <a:pPr algn="ctr"/>
-          </a:p>
-        </p:txBody>
-      </p:sp>
-      <p:sp>
-        <p:nvSpPr>
-          <p:cNvPr id="26" name="TextBox 25"/>
-          <p:cNvSpPr txBox="1"/>
-          <p:nvPr/>
-        </p:nvSpPr>
-        <p:spPr>
-          <a:xfrm>
-            <a:off x="6492240" y="6263640"/>
-            <a:ext cx="2194560" cy="365760"/>
-          </a:xfrm>
-          <a:prstGeom prst="rect">
-            <a:avLst/>
-          </a:prstGeom>
-          <a:noFill/>
-        </p:spPr>
-        <p:txBody>
-          <a:bodyPr wrap="none" lIns="36576" rIns="36576" tIns="0" bIns="0" anchor="ctr">
-            <a:spAutoFit/>
-          </a:bodyPr>
-          <a:lstStyle/>
-          <a:p>
-            <a:pPr algn="ctr"/>
-            <a:r>
-              <a:rPr sz="1000" b="1">
-                <a:solidFill>
-                  <a:srgbClr val="FFFFFF"/>
-                </a:solidFill>
-                <a:latin typeface="맑은 고딕"/>
-              </a:rPr>
-              <a:t>손실 회피 효과</a:t>
+              <a:t>감점 피하려 자원: 약 2배</a:t>
             </a:r>
           </a:p>
         </p:txBody>
@@ -19445,7 +19285,7 @@
                 </a:solidFill>
                 <a:latin typeface="맑은 고딕"/>
               </a:rPr>
-              <a:t>🔴 이서연 (약한 학생)</a:t>
+              <a:t>🔴 홍길동 (약한 학생)</a:t>
             </a:r>
           </a:p>
         </p:txBody>
@@ -28363,7 +28203,7 @@
         </p:nvSpPr>
         <p:spPr>
           <a:xfrm>
-            <a:off x="6492240" y="2651760"/>
+            <a:off x="6492240" y="2697480"/>
             <a:ext cx="4572000" cy="365760"/>
           </a:xfrm>
           <a:prstGeom prst="rect">
@@ -28383,13 +28223,13 @@
               </a:lnSpc>
             </a:pPr>
             <a:r>
-              <a:rPr sz="1100" b="1">
+              <a:rPr sz="1300" b="1">
                 <a:solidFill>
                   <a:srgbClr val="F59E0B"/>
                 </a:solidFill>
                 <a:latin typeface="맑은 고딕"/>
               </a:rPr>
-              <a:t>강의계획서의 실제 효과</a:t>
+              <a:t>강의계획서가 만드는 효과</a:t>
             </a:r>
           </a:p>
         </p:txBody>
@@ -28402,33 +28242,33 @@
         </p:nvSpPr>
         <p:spPr>
           <a:xfrm>
-            <a:off x="6492240" y="3017520"/>
-            <a:ext cx="4846320" cy="502920"/>
-          </a:xfrm>
-          <a:prstGeom prst="rect">
-            <a:avLst/>
-          </a:prstGeom>
-          <a:noFill/>
-        </p:spPr>
-        <p:txBody>
-          <a:bodyPr wrap="square" lIns="0" rIns="0" tIns="0" bIns="0">
-            <a:spAutoFit/>
-          </a:bodyPr>
-          <a:lstStyle/>
-          <a:p>
-            <a:pPr algn="l">
-              <a:lnSpc>
-                <a:spcPct val="125000"/>
-              </a:lnSpc>
-            </a:pPr>
-            <a:r>
-              <a:rPr sz="1400" b="1">
+            <a:off x="6492240" y="3154680"/>
+            <a:ext cx="4846320" cy="548640"/>
+          </a:xfrm>
+          <a:prstGeom prst="rect">
+            <a:avLst/>
+          </a:prstGeom>
+          <a:noFill/>
+        </p:spPr>
+        <p:txBody>
+          <a:bodyPr wrap="square" lIns="0" rIns="0" tIns="0" bIns="0">
+            <a:spAutoFit/>
+          </a:bodyPr>
+          <a:lstStyle/>
+          <a:p>
+            <a:pPr algn="l">
+              <a:lnSpc>
+                <a:spcPct val="125000"/>
+              </a:lnSpc>
+            </a:pPr>
+            <a:r>
+              <a:rPr sz="1800" b="1">
                 <a:solidFill>
                   <a:srgbClr val="0F141F"/>
                 </a:solidFill>
                 <a:latin typeface="맑은 고딕"/>
               </a:rPr>
-              <a:t>"중간고사 폐지, 기말고사 1회 (40%)"</a:t>
+              <a:t>"기말고사 1회 40%"</a:t>
             </a:r>
           </a:p>
         </p:txBody>
@@ -28441,7 +28281,7 @@
         </p:nvSpPr>
         <p:spPr>
           <a:xfrm>
-            <a:off x="6492240" y="3657600"/>
+            <a:off x="6492240" y="3840480"/>
             <a:ext cx="4846320" cy="1371600"/>
           </a:xfrm>
           <a:prstGeom prst="rect">
@@ -28457,49 +28297,49 @@
           <a:p>
             <a:pPr algn="l">
               <a:lnSpc>
-                <a:spcPct val="140000"/>
-              </a:lnSpc>
-            </a:pPr>
-            <a:r>
-              <a:rPr sz="1100" b="0">
+                <a:spcPct val="145000"/>
+              </a:lnSpc>
+            </a:pPr>
+            <a:r>
+              <a:rPr sz="1400" b="0">
                 <a:solidFill>
                   <a:srgbClr val="424B5C"/>
                 </a:solidFill>
                 <a:latin typeface="맑은 고딕"/>
               </a:rPr>
-              <a:t>3월에 배운 내용을 6월 시험에서 떠올려야 한다.</a:t>
-            </a:r>
-          </a:p>
-          <a:p>
-            <a:pPr algn="l">
-              <a:lnSpc>
-                <a:spcPct val="140000"/>
-              </a:lnSpc>
-            </a:pPr>
-            <a:r>
-              <a:rPr sz="1100" b="0">
+              <a:t>3월에 배운 걸 6월 시험에서 떠올려야 한다.</a:t>
+            </a:r>
+          </a:p>
+          <a:p>
+            <a:pPr algn="l">
+              <a:lnSpc>
+                <a:spcPct val="145000"/>
+              </a:lnSpc>
+            </a:pPr>
+            <a:r>
+              <a:rPr sz="1400" b="0">
                 <a:solidFill>
                   <a:srgbClr val="424B5C"/>
                 </a:solidFill>
                 <a:latin typeface="맑은 고딕"/>
               </a:rPr>
-              <a:t>80일이 지났으니 기억이 거의 사라진 상태.</a:t>
-            </a:r>
-          </a:p>
-          <a:p>
-            <a:pPr algn="l">
-              <a:lnSpc>
-                <a:spcPct val="140000"/>
-              </a:lnSpc>
-            </a:pPr>
-            <a:r>
-              <a:rPr sz="1100" b="0">
+              <a:t>80일이 지나 기억은 거의 사라진 상태.</a:t>
+            </a:r>
+          </a:p>
+          <a:p>
+            <a:pPr algn="l">
+              <a:lnSpc>
+                <a:spcPct val="145000"/>
+              </a:lnSpc>
+            </a:pPr>
+            <a:r>
+              <a:rPr sz="1400" b="0">
                 <a:solidFill>
                   <a:srgbClr val="424B5C"/>
                 </a:solidFill>
                 <a:latin typeface="맑은 고딕"/>
               </a:rPr>
-              <a:t>결과적으로 시험 직전 벼락치기로 몰린다.</a:t>
+              <a:t>결국 시험 직전 벼락치기.</a:t>
             </a:r>
           </a:p>
         </p:txBody>
@@ -28512,7 +28352,7 @@
         </p:nvCxnSpPr>
         <p:spPr>
           <a:xfrm>
-            <a:off x="6492240" y="5074920"/>
+            <a:off x="6492240" y="5349240"/>
             <a:ext cx="4846320" cy="0"/>
           </a:xfrm>
           <a:prstGeom prst="line">
@@ -28547,33 +28387,33 @@
         </p:nvSpPr>
         <p:spPr>
           <a:xfrm>
-            <a:off x="6492240" y="5166360"/>
-            <a:ext cx="4572000" cy="320040"/>
-          </a:xfrm>
-          <a:prstGeom prst="rect">
-            <a:avLst/>
-          </a:prstGeom>
-          <a:noFill/>
-        </p:spPr>
-        <p:txBody>
-          <a:bodyPr wrap="square" lIns="0" rIns="0" tIns="0" bIns="0">
-            <a:spAutoFit/>
-          </a:bodyPr>
-          <a:lstStyle/>
-          <a:p>
-            <a:pPr algn="l">
-              <a:lnSpc>
-                <a:spcPct val="125000"/>
-              </a:lnSpc>
-            </a:pPr>
-            <a:r>
-              <a:rPr sz="1000" b="1">
+            <a:off x="6492240" y="5440680"/>
+            <a:ext cx="4572000" cy="365760"/>
+          </a:xfrm>
+          <a:prstGeom prst="rect">
+            <a:avLst/>
+          </a:prstGeom>
+          <a:noFill/>
+        </p:spPr>
+        <p:txBody>
+          <a:bodyPr wrap="square" lIns="0" rIns="0" tIns="0" bIns="0">
+            <a:spAutoFit/>
+          </a:bodyPr>
+          <a:lstStyle/>
+          <a:p>
+            <a:pPr algn="l">
+              <a:lnSpc>
+                <a:spcPct val="125000"/>
+              </a:lnSpc>
+            </a:pPr>
+            <a:r>
+              <a:rPr sz="1200" b="1">
                 <a:solidFill>
                   <a:srgbClr val="F59E0B"/>
                 </a:solidFill>
                 <a:latin typeface="맑은 고딕"/>
               </a:rPr>
-              <a:t>시뮬레이션 결과 — 시험장 인출 시간</a:t>
+              <a:t>시뮬레이션 — 시험장 인출 시간</a:t>
             </a:r>
           </a:p>
         </p:txBody>
@@ -28581,45 +28421,6 @@
       <p:sp>
         <p:nvSpPr>
           <p:cNvPr id="27" name="TextBox 26"/>
-          <p:cNvSpPr txBox="1"/>
-          <p:nvPr/>
-        </p:nvSpPr>
-        <p:spPr>
-          <a:xfrm>
-            <a:off x="6492240" y="5486400"/>
-            <a:ext cx="4846320" cy="365760"/>
-          </a:xfrm>
-          <a:prstGeom prst="rect">
-            <a:avLst/>
-          </a:prstGeom>
-          <a:noFill/>
-        </p:spPr>
-        <p:txBody>
-          <a:bodyPr wrap="square" lIns="0" rIns="0" tIns="0" bIns="0">
-            <a:spAutoFit/>
-          </a:bodyPr>
-          <a:lstStyle/>
-          <a:p>
-            <a:pPr algn="l">
-              <a:lnSpc>
-                <a:spcPct val="125000"/>
-              </a:lnSpc>
-            </a:pPr>
-            <a:r>
-              <a:rPr sz="1100" b="0">
-                <a:solidFill>
-                  <a:srgbClr val="424B5C"/>
-                </a:solidFill>
-                <a:latin typeface="맑은 고딕"/>
-              </a:rPr>
-              <a:t>단일 기말 학생: 답 떠올리는 데 약 7.4초</a:t>
-            </a:r>
-          </a:p>
-        </p:txBody>
-      </p:sp>
-      <p:sp>
-        <p:nvSpPr>
-          <p:cNvPr id="28" name="TextBox 27"/>
           <p:cNvSpPr txBox="1"/>
           <p:nvPr/>
         </p:nvSpPr>
@@ -28645,93 +28446,52 @@
               </a:lnSpc>
             </a:pPr>
             <a:r>
-              <a:rPr sz="1200" b="1">
+              <a:rPr sz="1400" b="0">
+                <a:solidFill>
+                  <a:srgbClr val="424B5C"/>
+                </a:solidFill>
+                <a:latin typeface="맑은 고딕"/>
+              </a:rPr>
+              <a:t>단일 기말: 7.4초</a:t>
+            </a:r>
+          </a:p>
+        </p:txBody>
+      </p:sp>
+      <p:sp>
+        <p:nvSpPr>
+          <p:cNvPr id="28" name="TextBox 27"/>
+          <p:cNvSpPr txBox="1"/>
+          <p:nvPr/>
+        </p:nvSpPr>
+        <p:spPr>
+          <a:xfrm>
+            <a:off x="6492240" y="6263640"/>
+            <a:ext cx="4846320" cy="365760"/>
+          </a:xfrm>
+          <a:prstGeom prst="rect">
+            <a:avLst/>
+          </a:prstGeom>
+          <a:noFill/>
+        </p:spPr>
+        <p:txBody>
+          <a:bodyPr wrap="square" lIns="0" rIns="0" tIns="0" bIns="0">
+            <a:spAutoFit/>
+          </a:bodyPr>
+          <a:lstStyle/>
+          <a:p>
+            <a:pPr algn="l">
+              <a:lnSpc>
+                <a:spcPct val="125000"/>
+              </a:lnSpc>
+            </a:pPr>
+            <a:r>
+              <a:rPr sz="1600" b="1">
                 <a:solidFill>
                   <a:srgbClr val="0F141F"/>
                 </a:solidFill>
                 <a:latin typeface="맑은 고딕"/>
               </a:rPr>
-              <a:t>격주 퀴즈 학생: 약 2.2초 (3.4배 빠름)</a:t>
-            </a:r>
-          </a:p>
-        </p:txBody>
-      </p:sp>
-      <p:sp>
-        <p:nvSpPr>
-          <p:cNvPr id="29" name="Rounded Rectangle 28"/>
-          <p:cNvSpPr/>
-          <p:nvPr/>
-        </p:nvSpPr>
-        <p:spPr>
-          <a:xfrm>
-            <a:off x="6492240" y="6263640"/>
-            <a:ext cx="2011680" cy="365760"/>
-          </a:xfrm>
-          <a:prstGeom prst="roundRect">
-            <a:avLst>
-              <a:gd name="adj" fmla="val 50000"/>
-            </a:avLst>
-          </a:prstGeom>
-          <a:solidFill>
-            <a:srgbClr val="F59E0B"/>
-          </a:solidFill>
-          <a:ln>
-            <a:noFill/>
-          </a:ln>
-        </p:spPr>
-        <p:style>
-          <a:lnRef idx="1">
-            <a:schemeClr val="accent1"/>
-          </a:lnRef>
-          <a:fillRef idx="3">
-            <a:schemeClr val="accent1"/>
-          </a:fillRef>
-          <a:effectRef idx="2">
-            <a:schemeClr val="accent1"/>
-          </a:effectRef>
-          <a:fontRef idx="minor">
-            <a:schemeClr val="lt1"/>
-          </a:fontRef>
-        </p:style>
-        <p:txBody>
-          <a:bodyPr rtlCol="0" anchor="ctr"/>
-          <a:lstStyle/>
-          <a:p>
-            <a:pPr algn="ctr"/>
-          </a:p>
-        </p:txBody>
-      </p:sp>
-      <p:sp>
-        <p:nvSpPr>
-          <p:cNvPr id="30" name="TextBox 29"/>
-          <p:cNvSpPr txBox="1"/>
-          <p:nvPr/>
-        </p:nvSpPr>
-        <p:spPr>
-          <a:xfrm>
-            <a:off x="6492240" y="6263640"/>
-            <a:ext cx="2011680" cy="365760"/>
-          </a:xfrm>
-          <a:prstGeom prst="rect">
-            <a:avLst/>
-          </a:prstGeom>
-          <a:noFill/>
-        </p:spPr>
-        <p:txBody>
-          <a:bodyPr wrap="none" lIns="36576" rIns="36576" tIns="0" bIns="0" anchor="ctr">
-            <a:spAutoFit/>
-          </a:bodyPr>
-          <a:lstStyle/>
-          <a:p>
-            <a:pPr algn="ctr"/>
-            <a:r>
-              <a:rPr sz="1000" b="1">
-                <a:solidFill>
-                  <a:srgbClr val="FFFFFF"/>
-                </a:solidFill>
-                <a:latin typeface="맑은 고딕"/>
-              </a:rPr>
-              <a:t>인출 3.4배 빠름</a:t>
+              <a:t>격주 퀴즈: 2.2초 (3.4배 빠름)</a:t>
             </a:r>
           </a:p>
         </p:txBody>

--- a/team_project/kickoff_2026-05-11.pptx
+++ b/team_project/kickoff_2026-05-11.pptx
@@ -14401,76 +14401,29 @@
               </a:lnSpc>
             </a:pPr>
             <a:r>
-              <a:rPr sz="1200" b="0">
+              <a:rPr sz="1300" b="0">
                 <a:solidFill>
                   <a:srgbClr val="424B5C"/>
                 </a:solidFill>
                 <a:latin typeface="맑은 고딕"/>
               </a:rPr>
-              <a:t>강의계획서의 4가지 규칙을 분석해보니, 이론에서 자동으로 개선안이 도출됩니다.</a:t>
-            </a:r>
-          </a:p>
-        </p:txBody>
-      </p:sp>
-      <p:sp>
-        <p:nvSpPr>
-          <p:cNvPr id="8" name="Rounded Rectangle 7"/>
+              <a:t>강의계획서의 문제를 이론으로 분석하면, 개선안이 자연스럽게 따라옵니다.</a:t>
+            </a:r>
+          </a:p>
+        </p:txBody>
+      </p:sp>
+      <p:sp>
+        <p:nvSpPr>
+          <p:cNvPr id="8" name="Oval 7"/>
           <p:cNvSpPr/>
           <p:nvPr/>
         </p:nvSpPr>
         <p:spPr>
           <a:xfrm>
-            <a:off x="640080" y="2606040"/>
-            <a:ext cx="3566160" cy="3840480"/>
-          </a:xfrm>
-          <a:prstGeom prst="roundRect">
-            <a:avLst>
-              <a:gd name="adj" fmla="val 6000"/>
-            </a:avLst>
-          </a:prstGeom>
-          <a:solidFill>
-            <a:srgbClr val="FAFBFC"/>
-          </a:solidFill>
-          <a:ln w="9525">
-            <a:solidFill>
-              <a:srgbClr val="E5E7EB"/>
-            </a:solidFill>
-          </a:ln>
-        </p:spPr>
-        <p:style>
-          <a:lnRef idx="1">
-            <a:schemeClr val="accent1"/>
-          </a:lnRef>
-          <a:fillRef idx="3">
-            <a:schemeClr val="accent1"/>
-          </a:fillRef>
-          <a:effectRef idx="2">
-            <a:schemeClr val="accent1"/>
-          </a:effectRef>
-          <a:fontRef idx="minor">
-            <a:schemeClr val="lt1"/>
-          </a:fontRef>
-        </p:style>
-        <p:txBody>
-          <a:bodyPr rtlCol="0" anchor="ctr"/>
-          <a:lstStyle/>
-          <a:p>
-            <a:pPr algn="ctr"/>
-          </a:p>
-        </p:txBody>
-      </p:sp>
-      <p:sp>
-        <p:nvSpPr>
-          <p:cNvPr id="9" name="Rectangle 8"/>
-          <p:cNvSpPr/>
-          <p:nvPr/>
-        </p:nvSpPr>
-        <p:spPr>
-          <a:xfrm>
-            <a:off x="640080" y="2606040"/>
-            <a:ext cx="3566160" cy="548640"/>
-          </a:xfrm>
-          <a:prstGeom prst="rect">
+            <a:off x="822959" y="2697480"/>
+            <a:ext cx="914400" cy="914400"/>
+          </a:xfrm>
+          <a:prstGeom prst="ellipse">
             <a:avLst/>
           </a:prstGeom>
           <a:solidFill>
@@ -14504,33 +14457,33 @@
       </p:sp>
       <p:sp>
         <p:nvSpPr>
-          <p:cNvPr id="10" name="TextBox 9"/>
-          <p:cNvSpPr txBox="1"/>
-          <p:nvPr/>
-        </p:nvSpPr>
-        <p:spPr>
-          <a:xfrm>
-            <a:off x="868680" y="2697480"/>
-            <a:ext cx="914400" cy="365760"/>
-          </a:xfrm>
-          <a:prstGeom prst="rect">
-            <a:avLst/>
-          </a:prstGeom>
-          <a:noFill/>
-        </p:spPr>
-        <p:txBody>
-          <a:bodyPr wrap="square" lIns="0" rIns="0" tIns="0" bIns="0">
-            <a:spAutoFit/>
-          </a:bodyPr>
-          <a:lstStyle/>
-          <a:p>
-            <a:pPr algn="l">
-              <a:lnSpc>
-                <a:spcPct val="125000"/>
-              </a:lnSpc>
-            </a:pPr>
-            <a:r>
-              <a:rPr sz="1400" b="1">
+          <p:cNvPr id="9" name="TextBox 8"/>
+          <p:cNvSpPr txBox="1"/>
+          <p:nvPr/>
+        </p:nvSpPr>
+        <p:spPr>
+          <a:xfrm>
+            <a:off x="822959" y="2834640"/>
+            <a:ext cx="914400" cy="640080"/>
+          </a:xfrm>
+          <a:prstGeom prst="rect">
+            <a:avLst/>
+          </a:prstGeom>
+          <a:noFill/>
+        </p:spPr>
+        <p:txBody>
+          <a:bodyPr wrap="square" lIns="0" rIns="0" tIns="0" bIns="0">
+            <a:spAutoFit/>
+          </a:bodyPr>
+          <a:lstStyle/>
+          <a:p>
+            <a:pPr algn="ctr">
+              <a:lnSpc>
+                <a:spcPct val="125000"/>
+              </a:lnSpc>
+            </a:pPr>
+            <a:r>
+              <a:rPr sz="2600" b="1">
                 <a:solidFill>
                   <a:srgbClr val="FFFFFF"/>
                 </a:solidFill>
@@ -14543,357 +14496,14 @@
       </p:sp>
       <p:sp>
         <p:nvSpPr>
-          <p:cNvPr id="11" name="TextBox 10"/>
-          <p:cNvSpPr txBox="1"/>
-          <p:nvPr/>
-        </p:nvSpPr>
-        <p:spPr>
-          <a:xfrm>
-            <a:off x="1508760" y="2697480"/>
-            <a:ext cx="2743200" cy="365760"/>
-          </a:xfrm>
-          <a:prstGeom prst="rect">
-            <a:avLst/>
-          </a:prstGeom>
-          <a:noFill/>
-        </p:spPr>
-        <p:txBody>
-          <a:bodyPr wrap="square" lIns="0" rIns="0" tIns="0" bIns="0">
-            <a:spAutoFit/>
-          </a:bodyPr>
-          <a:lstStyle/>
-          <a:p>
-            <a:pPr algn="l">
-              <a:lnSpc>
-                <a:spcPct val="125000"/>
-              </a:lnSpc>
-            </a:pPr>
-            <a:r>
-              <a:rPr sz="1400" b="1">
-                <a:solidFill>
-                  <a:srgbClr val="FFFFFF"/>
-                </a:solidFill>
-                <a:latin typeface="맑은 고딕"/>
-              </a:rPr>
-              <a:t>분산 평가</a:t>
-            </a:r>
-          </a:p>
-        </p:txBody>
-      </p:sp>
-      <p:sp>
-        <p:nvSpPr>
-          <p:cNvPr id="12" name="TextBox 11"/>
-          <p:cNvSpPr txBox="1"/>
-          <p:nvPr/>
-        </p:nvSpPr>
-        <p:spPr>
-          <a:xfrm>
-            <a:off x="868680" y="3246120"/>
-            <a:ext cx="3200400" cy="365760"/>
-          </a:xfrm>
-          <a:prstGeom prst="rect">
-            <a:avLst/>
-          </a:prstGeom>
-          <a:noFill/>
-        </p:spPr>
-        <p:txBody>
-          <a:bodyPr wrap="square" lIns="0" rIns="0" tIns="0" bIns="0">
-            <a:spAutoFit/>
-          </a:bodyPr>
-          <a:lstStyle/>
-          <a:p>
-            <a:pPr algn="l">
-              <a:lnSpc>
-                <a:spcPct val="125000"/>
-              </a:lnSpc>
-            </a:pPr>
-            <a:r>
-              <a:rPr sz="1000" b="1">
-                <a:solidFill>
-                  <a:srgbClr val="0F141F"/>
-                </a:solidFill>
-                <a:latin typeface="맑은 고딕"/>
-              </a:rPr>
-              <a:t>격주 퀴즈 6회 + 기말 40%</a:t>
-            </a:r>
-          </a:p>
-        </p:txBody>
-      </p:sp>
-      <p:sp>
-        <p:nvSpPr>
-          <p:cNvPr id="13" name="TextBox 12"/>
-          <p:cNvSpPr txBox="1"/>
-          <p:nvPr/>
-        </p:nvSpPr>
-        <p:spPr>
-          <a:xfrm>
-            <a:off x="868680" y="3703320"/>
-            <a:ext cx="3200400" cy="1005840"/>
-          </a:xfrm>
-          <a:prstGeom prst="rect">
-            <a:avLst/>
-          </a:prstGeom>
-          <a:noFill/>
-        </p:spPr>
-        <p:txBody>
-          <a:bodyPr wrap="square" lIns="0" rIns="0" tIns="0" bIns="0">
-            <a:spAutoFit/>
-          </a:bodyPr>
-          <a:lstStyle/>
-          <a:p>
-            <a:pPr algn="l">
-              <a:lnSpc>
-                <a:spcPct val="140000"/>
-              </a:lnSpc>
-            </a:pPr>
-            <a:r>
-              <a:rPr sz="1000" b="0">
-                <a:solidFill>
-                  <a:srgbClr val="424B5C"/>
-                </a:solidFill>
-                <a:latin typeface="맑은 고딕"/>
-              </a:rPr>
-              <a:t>기말 한 번이 아니라 격주마다 작은 퀴즈로 나누어 본다.</a:t>
-            </a:r>
-          </a:p>
-        </p:txBody>
-      </p:sp>
-      <p:cxnSp>
-        <p:nvCxnSpPr>
-          <p:cNvPr id="14" name="Connector 13"/>
-          <p:cNvCxnSpPr/>
-          <p:nvPr/>
-        </p:nvCxnSpPr>
-        <p:spPr>
-          <a:xfrm>
-            <a:off x="868680" y="4846320"/>
-            <a:ext cx="3108959" cy="0"/>
-          </a:xfrm>
-          <a:prstGeom prst="line">
-            <a:avLst/>
-          </a:prstGeom>
-          <a:ln w="19050">
-            <a:solidFill>
-              <a:srgbClr val="E5E7EB"/>
-            </a:solidFill>
-          </a:ln>
-        </p:spPr>
-        <p:style>
-          <a:lnRef idx="2">
-            <a:schemeClr val="accent1"/>
-          </a:lnRef>
-          <a:fillRef idx="0">
-            <a:schemeClr val="accent1"/>
-          </a:fillRef>
-          <a:effectRef idx="1">
-            <a:schemeClr val="accent1"/>
-          </a:effectRef>
-          <a:fontRef idx="minor">
-            <a:schemeClr val="tx1"/>
-          </a:fontRef>
-        </p:style>
-      </p:cxnSp>
-      <p:sp>
-        <p:nvSpPr>
-          <p:cNvPr id="15" name="TextBox 14"/>
-          <p:cNvSpPr txBox="1"/>
-          <p:nvPr/>
-        </p:nvSpPr>
-        <p:spPr>
-          <a:xfrm>
-            <a:off x="868680" y="4937760"/>
-            <a:ext cx="3200400" cy="320040"/>
-          </a:xfrm>
-          <a:prstGeom prst="rect">
-            <a:avLst/>
-          </a:prstGeom>
-          <a:noFill/>
-        </p:spPr>
-        <p:txBody>
-          <a:bodyPr wrap="square" lIns="0" rIns="0" tIns="0" bIns="0">
-            <a:spAutoFit/>
-          </a:bodyPr>
-          <a:lstStyle/>
-          <a:p>
-            <a:pPr algn="l">
-              <a:lnSpc>
-                <a:spcPct val="125000"/>
-              </a:lnSpc>
-            </a:pPr>
-            <a:r>
-              <a:rPr sz="900" b="1">
-                <a:solidFill>
-                  <a:srgbClr val="F59E0B"/>
-                </a:solidFill>
-                <a:latin typeface="맑은 고딕"/>
-              </a:rPr>
-              <a:t>효과</a:t>
-            </a:r>
-          </a:p>
-        </p:txBody>
-      </p:sp>
-      <p:sp>
-        <p:nvSpPr>
-          <p:cNvPr id="16" name="TextBox 15"/>
-          <p:cNvSpPr txBox="1"/>
-          <p:nvPr/>
-        </p:nvSpPr>
-        <p:spPr>
-          <a:xfrm>
-            <a:off x="868680" y="5212080"/>
-            <a:ext cx="3200400" cy="731520"/>
-          </a:xfrm>
-          <a:prstGeom prst="rect">
-            <a:avLst/>
-          </a:prstGeom>
-          <a:noFill/>
-        </p:spPr>
-        <p:txBody>
-          <a:bodyPr wrap="square" lIns="0" rIns="0" tIns="0" bIns="0">
-            <a:spAutoFit/>
-          </a:bodyPr>
-          <a:lstStyle/>
-          <a:p>
-            <a:pPr algn="l">
-              <a:lnSpc>
-                <a:spcPct val="130000"/>
-              </a:lnSpc>
-            </a:pPr>
-            <a:r>
-              <a:rPr sz="900" b="0">
-                <a:solidFill>
-                  <a:srgbClr val="424B5C"/>
-                </a:solidFill>
-                <a:latin typeface="맑은 고딕"/>
-              </a:rPr>
-              <a:t>기억이 사라지기 전에 다시 인출 → 학기말 벼락치기 방지</a:t>
-            </a:r>
-          </a:p>
-        </p:txBody>
-      </p:sp>
-      <p:cxnSp>
-        <p:nvCxnSpPr>
-          <p:cNvPr id="17" name="Connector 16"/>
-          <p:cNvCxnSpPr/>
-          <p:nvPr/>
-        </p:nvCxnSpPr>
-        <p:spPr>
-          <a:xfrm>
-            <a:off x="868680" y="5989320"/>
-            <a:ext cx="3108959" cy="0"/>
-          </a:xfrm>
-          <a:prstGeom prst="line">
-            <a:avLst/>
-          </a:prstGeom>
-          <a:ln w="19050">
-            <a:solidFill>
-              <a:srgbClr val="E5E7EB"/>
-            </a:solidFill>
-          </a:ln>
-        </p:spPr>
-        <p:style>
-          <a:lnRef idx="2">
-            <a:schemeClr val="accent1"/>
-          </a:lnRef>
-          <a:fillRef idx="0">
-            <a:schemeClr val="accent1"/>
-          </a:fillRef>
-          <a:effectRef idx="1">
-            <a:schemeClr val="accent1"/>
-          </a:effectRef>
-          <a:fontRef idx="minor">
-            <a:schemeClr val="tx1"/>
-          </a:fontRef>
-        </p:style>
-      </p:cxnSp>
-      <p:sp>
-        <p:nvSpPr>
-          <p:cNvPr id="18" name="TextBox 17"/>
-          <p:cNvSpPr txBox="1"/>
-          <p:nvPr/>
-        </p:nvSpPr>
-        <p:spPr>
-          <a:xfrm>
-            <a:off x="868680" y="6035040"/>
-            <a:ext cx="3200400" cy="320040"/>
-          </a:xfrm>
-          <a:prstGeom prst="rect">
-            <a:avLst/>
-          </a:prstGeom>
-          <a:noFill/>
-        </p:spPr>
-        <p:txBody>
-          <a:bodyPr wrap="square" lIns="0" rIns="0" tIns="0" bIns="0">
-            <a:spAutoFit/>
-          </a:bodyPr>
-          <a:lstStyle/>
-          <a:p>
-            <a:pPr algn="l">
-              <a:lnSpc>
-                <a:spcPct val="125000"/>
-              </a:lnSpc>
-            </a:pPr>
-            <a:r>
-              <a:rPr sz="900" b="1">
-                <a:solidFill>
-                  <a:srgbClr val="F59E0B"/>
-                </a:solidFill>
-                <a:latin typeface="맑은 고딕"/>
-              </a:rPr>
-              <a:t>근거 이론</a:t>
-            </a:r>
-          </a:p>
-        </p:txBody>
-      </p:sp>
-      <p:sp>
-        <p:nvSpPr>
-          <p:cNvPr id="19" name="TextBox 18"/>
-          <p:cNvSpPr txBox="1"/>
-          <p:nvPr/>
-        </p:nvSpPr>
-        <p:spPr>
-          <a:xfrm>
-            <a:off x="868680" y="6309360"/>
-            <a:ext cx="3200400" cy="320040"/>
-          </a:xfrm>
-          <a:prstGeom prst="rect">
-            <a:avLst/>
-          </a:prstGeom>
-          <a:noFill/>
-        </p:spPr>
-        <p:txBody>
-          <a:bodyPr wrap="square" lIns="0" rIns="0" tIns="0" bIns="0">
-            <a:spAutoFit/>
-          </a:bodyPr>
-          <a:lstStyle/>
-          <a:p>
-            <a:pPr algn="l">
-              <a:lnSpc>
-                <a:spcPct val="125000"/>
-              </a:lnSpc>
-            </a:pPr>
-            <a:r>
-              <a:rPr sz="900" b="0">
-                <a:solidFill>
-                  <a:srgbClr val="424B5C"/>
-                </a:solidFill>
-                <a:latin typeface="맑은 고딕"/>
-              </a:rPr>
-              <a:t>Forgetting Curve · 분산 학습</a:t>
-            </a:r>
-          </a:p>
-        </p:txBody>
-      </p:sp>
-      <p:sp>
-        <p:nvSpPr>
-          <p:cNvPr id="20" name="Rounded Rectangle 19"/>
+          <p:cNvPr id="10" name="Rounded Rectangle 9"/>
           <p:cNvSpPr/>
           <p:nvPr/>
         </p:nvSpPr>
         <p:spPr>
           <a:xfrm>
-            <a:off x="4389120" y="2606040"/>
-            <a:ext cx="3566160" cy="3840480"/>
+            <a:off x="640080" y="3840480"/>
+            <a:ext cx="3566160" cy="2560320"/>
           </a:xfrm>
           <a:prstGeom prst="roundRect">
             <a:avLst>
@@ -14903,9 +14513,9 @@
           <a:solidFill>
             <a:srgbClr val="FAFBFC"/>
           </a:solidFill>
-          <a:ln w="9525">
+          <a:ln w="15240">
             <a:solidFill>
-              <a:srgbClr val="E5E7EB"/>
+              <a:srgbClr val="F59E0B"/>
             </a:solidFill>
           </a:ln>
         </p:spPr>
@@ -14933,16 +14543,229 @@
       </p:sp>
       <p:sp>
         <p:nvSpPr>
-          <p:cNvPr id="21" name="Rectangle 20"/>
+          <p:cNvPr id="11" name="TextBox 10"/>
+          <p:cNvSpPr txBox="1"/>
+          <p:nvPr/>
+        </p:nvSpPr>
+        <p:spPr>
+          <a:xfrm>
+            <a:off x="868680" y="4023360"/>
+            <a:ext cx="3200400" cy="502920"/>
+          </a:xfrm>
+          <a:prstGeom prst="rect">
+            <a:avLst/>
+          </a:prstGeom>
+          <a:noFill/>
+        </p:spPr>
+        <p:txBody>
+          <a:bodyPr wrap="square" lIns="0" rIns="0" tIns="0" bIns="0">
+            <a:spAutoFit/>
+          </a:bodyPr>
+          <a:lstStyle/>
+          <a:p>
+            <a:pPr algn="l">
+              <a:lnSpc>
+                <a:spcPct val="125000"/>
+              </a:lnSpc>
+            </a:pPr>
+            <a:r>
+              <a:rPr sz="2200" b="1">
+                <a:solidFill>
+                  <a:srgbClr val="0F141F"/>
+                </a:solidFill>
+                <a:latin typeface="맑은 고딕"/>
+              </a:rPr>
+              <a:t>분산 평가</a:t>
+            </a:r>
+          </a:p>
+        </p:txBody>
+      </p:sp>
+      <p:sp>
+        <p:nvSpPr>
+          <p:cNvPr id="12" name="TextBox 11"/>
+          <p:cNvSpPr txBox="1"/>
+          <p:nvPr/>
+        </p:nvSpPr>
+        <p:spPr>
+          <a:xfrm>
+            <a:off x="868680" y="4572000"/>
+            <a:ext cx="3200400" cy="365760"/>
+          </a:xfrm>
+          <a:prstGeom prst="rect">
+            <a:avLst/>
+          </a:prstGeom>
+          <a:noFill/>
+        </p:spPr>
+        <p:txBody>
+          <a:bodyPr wrap="square" lIns="0" rIns="0" tIns="0" bIns="0">
+            <a:spAutoFit/>
+          </a:bodyPr>
+          <a:lstStyle/>
+          <a:p>
+            <a:pPr algn="l">
+              <a:lnSpc>
+                <a:spcPct val="125000"/>
+              </a:lnSpc>
+            </a:pPr>
+            <a:r>
+              <a:rPr sz="1200" b="1">
+                <a:solidFill>
+                  <a:srgbClr val="F59E0B"/>
+                </a:solidFill>
+                <a:latin typeface="맑은 고딕"/>
+              </a:rPr>
+              <a:t>격주 퀴즈 6회 + 기말 40%</a:t>
+            </a:r>
+          </a:p>
+        </p:txBody>
+      </p:sp>
+      <p:sp>
+        <p:nvSpPr>
+          <p:cNvPr id="13" name="TextBox 12"/>
+          <p:cNvSpPr txBox="1"/>
+          <p:nvPr/>
+        </p:nvSpPr>
+        <p:spPr>
+          <a:xfrm>
+            <a:off x="868680" y="5029200"/>
+            <a:ext cx="3200400" cy="914400"/>
+          </a:xfrm>
+          <a:prstGeom prst="rect">
+            <a:avLst/>
+          </a:prstGeom>
+          <a:noFill/>
+        </p:spPr>
+        <p:txBody>
+          <a:bodyPr wrap="square" lIns="0" rIns="0" tIns="0" bIns="0">
+            <a:spAutoFit/>
+          </a:bodyPr>
+          <a:lstStyle/>
+          <a:p>
+            <a:pPr algn="l">
+              <a:lnSpc>
+                <a:spcPct val="150000"/>
+              </a:lnSpc>
+            </a:pPr>
+            <a:r>
+              <a:rPr sz="1300" b="0">
+                <a:solidFill>
+                  <a:srgbClr val="424B5C"/>
+                </a:solidFill>
+                <a:latin typeface="맑은 고딕"/>
+              </a:rPr>
+              <a:t>기말 한 번이 아니라</a:t>
+            </a:r>
+          </a:p>
+          <a:p>
+            <a:pPr algn="l">
+              <a:lnSpc>
+                <a:spcPct val="150000"/>
+              </a:lnSpc>
+            </a:pPr>
+            <a:r>
+              <a:rPr sz="1300" b="0">
+                <a:solidFill>
+                  <a:srgbClr val="424B5C"/>
+                </a:solidFill>
+                <a:latin typeface="맑은 고딕"/>
+              </a:rPr>
+              <a:t>격주마다 작은 퀴즈로 나누어 본다.</a:t>
+            </a:r>
+          </a:p>
+        </p:txBody>
+      </p:sp>
+      <p:sp>
+        <p:nvSpPr>
+          <p:cNvPr id="14" name="Rounded Rectangle 13"/>
           <p:cNvSpPr/>
           <p:nvPr/>
         </p:nvSpPr>
         <p:spPr>
           <a:xfrm>
-            <a:off x="4389120" y="2606040"/>
-            <a:ext cx="3566160" cy="548640"/>
-          </a:xfrm>
-          <a:prstGeom prst="rect">
+            <a:off x="868680" y="5989320"/>
+            <a:ext cx="3108960" cy="320040"/>
+          </a:xfrm>
+          <a:prstGeom prst="roundRect">
+            <a:avLst>
+              <a:gd name="adj" fmla="val 50000"/>
+            </a:avLst>
+          </a:prstGeom>
+          <a:solidFill>
+            <a:srgbClr val="F59E0B"/>
+          </a:solidFill>
+          <a:ln>
+            <a:noFill/>
+          </a:ln>
+        </p:spPr>
+        <p:style>
+          <a:lnRef idx="1">
+            <a:schemeClr val="accent1"/>
+          </a:lnRef>
+          <a:fillRef idx="3">
+            <a:schemeClr val="accent1"/>
+          </a:fillRef>
+          <a:effectRef idx="2">
+            <a:schemeClr val="accent1"/>
+          </a:effectRef>
+          <a:fontRef idx="minor">
+            <a:schemeClr val="lt1"/>
+          </a:fontRef>
+        </p:style>
+        <p:txBody>
+          <a:bodyPr rtlCol="0" anchor="ctr"/>
+          <a:lstStyle/>
+          <a:p>
+            <a:pPr algn="ctr"/>
+          </a:p>
+        </p:txBody>
+      </p:sp>
+      <p:sp>
+        <p:nvSpPr>
+          <p:cNvPr id="15" name="TextBox 14"/>
+          <p:cNvSpPr txBox="1"/>
+          <p:nvPr/>
+        </p:nvSpPr>
+        <p:spPr>
+          <a:xfrm>
+            <a:off x="868680" y="5989320"/>
+            <a:ext cx="3108960" cy="320040"/>
+          </a:xfrm>
+          <a:prstGeom prst="rect">
+            <a:avLst/>
+          </a:prstGeom>
+          <a:noFill/>
+        </p:spPr>
+        <p:txBody>
+          <a:bodyPr wrap="none" lIns="36576" rIns="36576" tIns="0" bIns="0" anchor="ctr">
+            <a:spAutoFit/>
+          </a:bodyPr>
+          <a:lstStyle/>
+          <a:p>
+            <a:pPr algn="ctr"/>
+            <a:r>
+              <a:rPr sz="1000" b="1">
+                <a:solidFill>
+                  <a:srgbClr val="FFFFFF"/>
+                </a:solidFill>
+                <a:latin typeface="맑은 고딕"/>
+              </a:rPr>
+              <a:t>근거: Forgetting Curve</a:t>
+            </a:r>
+          </a:p>
+        </p:txBody>
+      </p:sp>
+      <p:sp>
+        <p:nvSpPr>
+          <p:cNvPr id="16" name="Oval 15"/>
+          <p:cNvSpPr/>
+          <p:nvPr/>
+        </p:nvSpPr>
+        <p:spPr>
+          <a:xfrm>
+            <a:off x="4572000" y="2697480"/>
+            <a:ext cx="914400" cy="914400"/>
+          </a:xfrm>
+          <a:prstGeom prst="ellipse">
             <a:avLst/>
           </a:prstGeom>
           <a:solidFill>
@@ -14976,33 +14799,33 @@
       </p:sp>
       <p:sp>
         <p:nvSpPr>
-          <p:cNvPr id="22" name="TextBox 21"/>
-          <p:cNvSpPr txBox="1"/>
-          <p:nvPr/>
-        </p:nvSpPr>
-        <p:spPr>
-          <a:xfrm>
-            <a:off x="4617720" y="2697480"/>
-            <a:ext cx="914400" cy="365760"/>
-          </a:xfrm>
-          <a:prstGeom prst="rect">
-            <a:avLst/>
-          </a:prstGeom>
-          <a:noFill/>
-        </p:spPr>
-        <p:txBody>
-          <a:bodyPr wrap="square" lIns="0" rIns="0" tIns="0" bIns="0">
-            <a:spAutoFit/>
-          </a:bodyPr>
-          <a:lstStyle/>
-          <a:p>
-            <a:pPr algn="l">
-              <a:lnSpc>
-                <a:spcPct val="125000"/>
-              </a:lnSpc>
-            </a:pPr>
-            <a:r>
-              <a:rPr sz="1400" b="1">
+          <p:cNvPr id="17" name="TextBox 16"/>
+          <p:cNvSpPr txBox="1"/>
+          <p:nvPr/>
+        </p:nvSpPr>
+        <p:spPr>
+          <a:xfrm>
+            <a:off x="4572000" y="2834640"/>
+            <a:ext cx="914400" cy="640080"/>
+          </a:xfrm>
+          <a:prstGeom prst="rect">
+            <a:avLst/>
+          </a:prstGeom>
+          <a:noFill/>
+        </p:spPr>
+        <p:txBody>
+          <a:bodyPr wrap="square" lIns="0" rIns="0" tIns="0" bIns="0">
+            <a:spAutoFit/>
+          </a:bodyPr>
+          <a:lstStyle/>
+          <a:p>
+            <a:pPr algn="ctr">
+              <a:lnSpc>
+                <a:spcPct val="125000"/>
+              </a:lnSpc>
+            </a:pPr>
+            <a:r>
+              <a:rPr sz="2600" b="1">
                 <a:solidFill>
                   <a:srgbClr val="FFFFFF"/>
                 </a:solidFill>
@@ -15015,357 +14838,14 @@
       </p:sp>
       <p:sp>
         <p:nvSpPr>
-          <p:cNvPr id="23" name="TextBox 22"/>
-          <p:cNvSpPr txBox="1"/>
-          <p:nvPr/>
-        </p:nvSpPr>
-        <p:spPr>
-          <a:xfrm>
-            <a:off x="5257800" y="2697480"/>
-            <a:ext cx="2743200" cy="365760"/>
-          </a:xfrm>
-          <a:prstGeom prst="rect">
-            <a:avLst/>
-          </a:prstGeom>
-          <a:noFill/>
-        </p:spPr>
-        <p:txBody>
-          <a:bodyPr wrap="square" lIns="0" rIns="0" tIns="0" bIns="0">
-            <a:spAutoFit/>
-          </a:bodyPr>
-          <a:lstStyle/>
-          <a:p>
-            <a:pPr algn="l">
-              <a:lnSpc>
-                <a:spcPct val="125000"/>
-              </a:lnSpc>
-            </a:pPr>
-            <a:r>
-              <a:rPr sz="1400" b="1">
-                <a:solidFill>
-                  <a:srgbClr val="FFFFFF"/>
-                </a:solidFill>
-                <a:latin typeface="맑은 고딕"/>
-              </a:rPr>
-              <a:t>프로필 카드</a:t>
-            </a:r>
-          </a:p>
-        </p:txBody>
-      </p:sp>
-      <p:sp>
-        <p:nvSpPr>
-          <p:cNvPr id="24" name="TextBox 23"/>
-          <p:cNvSpPr txBox="1"/>
-          <p:nvPr/>
-        </p:nvSpPr>
-        <p:spPr>
-          <a:xfrm>
-            <a:off x="4617720" y="3246120"/>
-            <a:ext cx="3200400" cy="365760"/>
-          </a:xfrm>
-          <a:prstGeom prst="rect">
-            <a:avLst/>
-          </a:prstGeom>
-          <a:noFill/>
-        </p:spPr>
-        <p:txBody>
-          <a:bodyPr wrap="square" lIns="0" rIns="0" tIns="0" bIns="0">
-            <a:spAutoFit/>
-          </a:bodyPr>
-          <a:lstStyle/>
-          <a:p>
-            <a:pPr algn="l">
-              <a:lnSpc>
-                <a:spcPct val="125000"/>
-              </a:lnSpc>
-            </a:pPr>
-            <a:r>
-              <a:rPr sz="1000" b="1">
-                <a:solidFill>
-                  <a:srgbClr val="0F141F"/>
-                </a:solidFill>
-                <a:latin typeface="맑은 고딕"/>
-              </a:rPr>
-              <a:t>후보별 4가지 정보를 시각화</a:t>
-            </a:r>
-          </a:p>
-        </p:txBody>
-      </p:sp>
-      <p:sp>
-        <p:nvSpPr>
-          <p:cNvPr id="25" name="TextBox 24"/>
-          <p:cNvSpPr txBox="1"/>
-          <p:nvPr/>
-        </p:nvSpPr>
-        <p:spPr>
-          <a:xfrm>
-            <a:off x="4617720" y="3703320"/>
-            <a:ext cx="3200400" cy="1005840"/>
-          </a:xfrm>
-          <a:prstGeom prst="rect">
-            <a:avLst/>
-          </a:prstGeom>
-          <a:noFill/>
-        </p:spPr>
-        <p:txBody>
-          <a:bodyPr wrap="square" lIns="0" rIns="0" tIns="0" bIns="0">
-            <a:spAutoFit/>
-          </a:bodyPr>
-          <a:lstStyle/>
-          <a:p>
-            <a:pPr algn="l">
-              <a:lnSpc>
-                <a:spcPct val="140000"/>
-              </a:lnSpc>
-            </a:pPr>
-            <a:r>
-              <a:rPr sz="1000" b="0">
-                <a:solidFill>
-                  <a:srgbClr val="424B5C"/>
-                </a:solidFill>
-                <a:latin typeface="맑은 고딕"/>
-              </a:rPr>
-              <a:t>팀장이 후보 평가할 때 역량·시간·관심·경험을 카드로 제공.</a:t>
-            </a:r>
-          </a:p>
-        </p:txBody>
-      </p:sp>
-      <p:cxnSp>
-        <p:nvCxnSpPr>
-          <p:cNvPr id="26" name="Connector 25"/>
-          <p:cNvCxnSpPr/>
-          <p:nvPr/>
-        </p:nvCxnSpPr>
-        <p:spPr>
-          <a:xfrm>
-            <a:off x="4617720" y="4846320"/>
-            <a:ext cx="3108959" cy="0"/>
-          </a:xfrm>
-          <a:prstGeom prst="line">
-            <a:avLst/>
-          </a:prstGeom>
-          <a:ln w="19050">
-            <a:solidFill>
-              <a:srgbClr val="E5E7EB"/>
-            </a:solidFill>
-          </a:ln>
-        </p:spPr>
-        <p:style>
-          <a:lnRef idx="2">
-            <a:schemeClr val="accent1"/>
-          </a:lnRef>
-          <a:fillRef idx="0">
-            <a:schemeClr val="accent1"/>
-          </a:fillRef>
-          <a:effectRef idx="1">
-            <a:schemeClr val="accent1"/>
-          </a:effectRef>
-          <a:fontRef idx="minor">
-            <a:schemeClr val="tx1"/>
-          </a:fontRef>
-        </p:style>
-      </p:cxnSp>
-      <p:sp>
-        <p:nvSpPr>
-          <p:cNvPr id="27" name="TextBox 26"/>
-          <p:cNvSpPr txBox="1"/>
-          <p:nvPr/>
-        </p:nvSpPr>
-        <p:spPr>
-          <a:xfrm>
-            <a:off x="4617720" y="4937760"/>
-            <a:ext cx="3200400" cy="320040"/>
-          </a:xfrm>
-          <a:prstGeom prst="rect">
-            <a:avLst/>
-          </a:prstGeom>
-          <a:noFill/>
-        </p:spPr>
-        <p:txBody>
-          <a:bodyPr wrap="square" lIns="0" rIns="0" tIns="0" bIns="0">
-            <a:spAutoFit/>
-          </a:bodyPr>
-          <a:lstStyle/>
-          <a:p>
-            <a:pPr algn="l">
-              <a:lnSpc>
-                <a:spcPct val="125000"/>
-              </a:lnSpc>
-            </a:pPr>
-            <a:r>
-              <a:rPr sz="900" b="1">
-                <a:solidFill>
-                  <a:srgbClr val="4F46E5"/>
-                </a:solidFill>
-                <a:latin typeface="맑은 고딕"/>
-              </a:rPr>
-              <a:t>효과</a:t>
-            </a:r>
-          </a:p>
-        </p:txBody>
-      </p:sp>
-      <p:sp>
-        <p:nvSpPr>
-          <p:cNvPr id="28" name="TextBox 27"/>
-          <p:cNvSpPr txBox="1"/>
-          <p:nvPr/>
-        </p:nvSpPr>
-        <p:spPr>
-          <a:xfrm>
-            <a:off x="4617720" y="5212080"/>
-            <a:ext cx="3200400" cy="731520"/>
-          </a:xfrm>
-          <a:prstGeom prst="rect">
-            <a:avLst/>
-          </a:prstGeom>
-          <a:noFill/>
-        </p:spPr>
-        <p:txBody>
-          <a:bodyPr wrap="square" lIns="0" rIns="0" tIns="0" bIns="0">
-            <a:spAutoFit/>
-          </a:bodyPr>
-          <a:lstStyle/>
-          <a:p>
-            <a:pPr algn="l">
-              <a:lnSpc>
-                <a:spcPct val="130000"/>
-              </a:lnSpc>
-            </a:pPr>
-            <a:r>
-              <a:rPr sz="900" b="0">
-                <a:solidFill>
-                  <a:srgbClr val="424B5C"/>
-                </a:solidFill>
-                <a:latin typeface="맑은 고딕"/>
-              </a:rPr>
-              <a:t>머리에 다 담을 필요 없이 외부 인터페이스로 비교 가능</a:t>
-            </a:r>
-          </a:p>
-        </p:txBody>
-      </p:sp>
-      <p:cxnSp>
-        <p:nvCxnSpPr>
-          <p:cNvPr id="29" name="Connector 28"/>
-          <p:cNvCxnSpPr/>
-          <p:nvPr/>
-        </p:nvCxnSpPr>
-        <p:spPr>
-          <a:xfrm>
-            <a:off x="4617720" y="5989320"/>
-            <a:ext cx="3108959" cy="0"/>
-          </a:xfrm>
-          <a:prstGeom prst="line">
-            <a:avLst/>
-          </a:prstGeom>
-          <a:ln w="19050">
-            <a:solidFill>
-              <a:srgbClr val="E5E7EB"/>
-            </a:solidFill>
-          </a:ln>
-        </p:spPr>
-        <p:style>
-          <a:lnRef idx="2">
-            <a:schemeClr val="accent1"/>
-          </a:lnRef>
-          <a:fillRef idx="0">
-            <a:schemeClr val="accent1"/>
-          </a:fillRef>
-          <a:effectRef idx="1">
-            <a:schemeClr val="accent1"/>
-          </a:effectRef>
-          <a:fontRef idx="minor">
-            <a:schemeClr val="tx1"/>
-          </a:fontRef>
-        </p:style>
-      </p:cxnSp>
-      <p:sp>
-        <p:nvSpPr>
-          <p:cNvPr id="30" name="TextBox 29"/>
-          <p:cNvSpPr txBox="1"/>
-          <p:nvPr/>
-        </p:nvSpPr>
-        <p:spPr>
-          <a:xfrm>
-            <a:off x="4617720" y="6035040"/>
-            <a:ext cx="3200400" cy="320040"/>
-          </a:xfrm>
-          <a:prstGeom prst="rect">
-            <a:avLst/>
-          </a:prstGeom>
-          <a:noFill/>
-        </p:spPr>
-        <p:txBody>
-          <a:bodyPr wrap="square" lIns="0" rIns="0" tIns="0" bIns="0">
-            <a:spAutoFit/>
-          </a:bodyPr>
-          <a:lstStyle/>
-          <a:p>
-            <a:pPr algn="l">
-              <a:lnSpc>
-                <a:spcPct val="125000"/>
-              </a:lnSpc>
-            </a:pPr>
-            <a:r>
-              <a:rPr sz="900" b="1">
-                <a:solidFill>
-                  <a:srgbClr val="4F46E5"/>
-                </a:solidFill>
-                <a:latin typeface="맑은 고딕"/>
-              </a:rPr>
-              <a:t>근거 이론</a:t>
-            </a:r>
-          </a:p>
-        </p:txBody>
-      </p:sp>
-      <p:sp>
-        <p:nvSpPr>
-          <p:cNvPr id="31" name="TextBox 30"/>
-          <p:cNvSpPr txBox="1"/>
-          <p:nvPr/>
-        </p:nvSpPr>
-        <p:spPr>
-          <a:xfrm>
-            <a:off x="4617720" y="6309360"/>
-            <a:ext cx="3200400" cy="320040"/>
-          </a:xfrm>
-          <a:prstGeom prst="rect">
-            <a:avLst/>
-          </a:prstGeom>
-          <a:noFill/>
-        </p:spPr>
-        <p:txBody>
-          <a:bodyPr wrap="square" lIns="0" rIns="0" tIns="0" bIns="0">
-            <a:spAutoFit/>
-          </a:bodyPr>
-          <a:lstStyle/>
-          <a:p>
-            <a:pPr algn="l">
-              <a:lnSpc>
-                <a:spcPct val="125000"/>
-              </a:lnSpc>
-            </a:pPr>
-            <a:r>
-              <a:rPr sz="900" b="0">
-                <a:solidFill>
-                  <a:srgbClr val="424B5C"/>
-                </a:solidFill>
-                <a:latin typeface="맑은 고딕"/>
-              </a:rPr>
-              <a:t>Working Memory · 7±2 한계 우회</a:t>
-            </a:r>
-          </a:p>
-        </p:txBody>
-      </p:sp>
-      <p:sp>
-        <p:nvSpPr>
-          <p:cNvPr id="32" name="Rounded Rectangle 31"/>
+          <p:cNvPr id="18" name="Rounded Rectangle 17"/>
           <p:cNvSpPr/>
           <p:nvPr/>
         </p:nvSpPr>
         <p:spPr>
           <a:xfrm>
-            <a:off x="8138159" y="2606040"/>
-            <a:ext cx="3566160" cy="3840480"/>
+            <a:off x="4389120" y="3840480"/>
+            <a:ext cx="3566160" cy="2560320"/>
           </a:xfrm>
           <a:prstGeom prst="roundRect">
             <a:avLst>
@@ -15375,9 +14855,9 @@
           <a:solidFill>
             <a:srgbClr val="FAFBFC"/>
           </a:solidFill>
-          <a:ln w="9525">
+          <a:ln w="15240">
             <a:solidFill>
-              <a:srgbClr val="E5E7EB"/>
+              <a:srgbClr val="4F46E5"/>
             </a:solidFill>
           </a:ln>
         </p:spPr>
@@ -15405,16 +14885,229 @@
       </p:sp>
       <p:sp>
         <p:nvSpPr>
-          <p:cNvPr id="33" name="Rectangle 32"/>
+          <p:cNvPr id="19" name="TextBox 18"/>
+          <p:cNvSpPr txBox="1"/>
+          <p:nvPr/>
+        </p:nvSpPr>
+        <p:spPr>
+          <a:xfrm>
+            <a:off x="4617720" y="4023360"/>
+            <a:ext cx="3200400" cy="502920"/>
+          </a:xfrm>
+          <a:prstGeom prst="rect">
+            <a:avLst/>
+          </a:prstGeom>
+          <a:noFill/>
+        </p:spPr>
+        <p:txBody>
+          <a:bodyPr wrap="square" lIns="0" rIns="0" tIns="0" bIns="0">
+            <a:spAutoFit/>
+          </a:bodyPr>
+          <a:lstStyle/>
+          <a:p>
+            <a:pPr algn="l">
+              <a:lnSpc>
+                <a:spcPct val="125000"/>
+              </a:lnSpc>
+            </a:pPr>
+            <a:r>
+              <a:rPr sz="2200" b="1">
+                <a:solidFill>
+                  <a:srgbClr val="0F141F"/>
+                </a:solidFill>
+                <a:latin typeface="맑은 고딕"/>
+              </a:rPr>
+              <a:t>프로필 카드</a:t>
+            </a:r>
+          </a:p>
+        </p:txBody>
+      </p:sp>
+      <p:sp>
+        <p:nvSpPr>
+          <p:cNvPr id="20" name="TextBox 19"/>
+          <p:cNvSpPr txBox="1"/>
+          <p:nvPr/>
+        </p:nvSpPr>
+        <p:spPr>
+          <a:xfrm>
+            <a:off x="4617720" y="4572000"/>
+            <a:ext cx="3200400" cy="365760"/>
+          </a:xfrm>
+          <a:prstGeom prst="rect">
+            <a:avLst/>
+          </a:prstGeom>
+          <a:noFill/>
+        </p:spPr>
+        <p:txBody>
+          <a:bodyPr wrap="square" lIns="0" rIns="0" tIns="0" bIns="0">
+            <a:spAutoFit/>
+          </a:bodyPr>
+          <a:lstStyle/>
+          <a:p>
+            <a:pPr algn="l">
+              <a:lnSpc>
+                <a:spcPct val="125000"/>
+              </a:lnSpc>
+            </a:pPr>
+            <a:r>
+              <a:rPr sz="1200" b="1">
+                <a:solidFill>
+                  <a:srgbClr val="4F46E5"/>
+                </a:solidFill>
+                <a:latin typeface="맑은 고딕"/>
+              </a:rPr>
+              <a:t>후보별 정보를 카드로 시각화</a:t>
+            </a:r>
+          </a:p>
+        </p:txBody>
+      </p:sp>
+      <p:sp>
+        <p:nvSpPr>
+          <p:cNvPr id="21" name="TextBox 20"/>
+          <p:cNvSpPr txBox="1"/>
+          <p:nvPr/>
+        </p:nvSpPr>
+        <p:spPr>
+          <a:xfrm>
+            <a:off x="4617720" y="5029200"/>
+            <a:ext cx="3200400" cy="914400"/>
+          </a:xfrm>
+          <a:prstGeom prst="rect">
+            <a:avLst/>
+          </a:prstGeom>
+          <a:noFill/>
+        </p:spPr>
+        <p:txBody>
+          <a:bodyPr wrap="square" lIns="0" rIns="0" tIns="0" bIns="0">
+            <a:spAutoFit/>
+          </a:bodyPr>
+          <a:lstStyle/>
+          <a:p>
+            <a:pPr algn="l">
+              <a:lnSpc>
+                <a:spcPct val="150000"/>
+              </a:lnSpc>
+            </a:pPr>
+            <a:r>
+              <a:rPr sz="1300" b="0">
+                <a:solidFill>
+                  <a:srgbClr val="424B5C"/>
+                </a:solidFill>
+                <a:latin typeface="맑은 고딕"/>
+              </a:rPr>
+              <a:t>팀장이 후보 평가할 때</a:t>
+            </a:r>
+          </a:p>
+          <a:p>
+            <a:pPr algn="l">
+              <a:lnSpc>
+                <a:spcPct val="150000"/>
+              </a:lnSpc>
+            </a:pPr>
+            <a:r>
+              <a:rPr sz="1300" b="0">
+                <a:solidFill>
+                  <a:srgbClr val="424B5C"/>
+                </a:solidFill>
+                <a:latin typeface="맑은 고딕"/>
+              </a:rPr>
+              <a:t>역량·시간·관심을 한 화면에 보여준다.</a:t>
+            </a:r>
+          </a:p>
+        </p:txBody>
+      </p:sp>
+      <p:sp>
+        <p:nvSpPr>
+          <p:cNvPr id="22" name="Rounded Rectangle 21"/>
           <p:cNvSpPr/>
           <p:nvPr/>
         </p:nvSpPr>
         <p:spPr>
           <a:xfrm>
-            <a:off x="8138159" y="2606040"/>
-            <a:ext cx="3566160" cy="548640"/>
-          </a:xfrm>
-          <a:prstGeom prst="rect">
+            <a:off x="4617720" y="5989320"/>
+            <a:ext cx="3108960" cy="320040"/>
+          </a:xfrm>
+          <a:prstGeom prst="roundRect">
+            <a:avLst>
+              <a:gd name="adj" fmla="val 50000"/>
+            </a:avLst>
+          </a:prstGeom>
+          <a:solidFill>
+            <a:srgbClr val="4F46E5"/>
+          </a:solidFill>
+          <a:ln>
+            <a:noFill/>
+          </a:ln>
+        </p:spPr>
+        <p:style>
+          <a:lnRef idx="1">
+            <a:schemeClr val="accent1"/>
+          </a:lnRef>
+          <a:fillRef idx="3">
+            <a:schemeClr val="accent1"/>
+          </a:fillRef>
+          <a:effectRef idx="2">
+            <a:schemeClr val="accent1"/>
+          </a:effectRef>
+          <a:fontRef idx="minor">
+            <a:schemeClr val="lt1"/>
+          </a:fontRef>
+        </p:style>
+        <p:txBody>
+          <a:bodyPr rtlCol="0" anchor="ctr"/>
+          <a:lstStyle/>
+          <a:p>
+            <a:pPr algn="ctr"/>
+          </a:p>
+        </p:txBody>
+      </p:sp>
+      <p:sp>
+        <p:nvSpPr>
+          <p:cNvPr id="23" name="TextBox 22"/>
+          <p:cNvSpPr txBox="1"/>
+          <p:nvPr/>
+        </p:nvSpPr>
+        <p:spPr>
+          <a:xfrm>
+            <a:off x="4617720" y="5989320"/>
+            <a:ext cx="3108960" cy="320040"/>
+          </a:xfrm>
+          <a:prstGeom prst="rect">
+            <a:avLst/>
+          </a:prstGeom>
+          <a:noFill/>
+        </p:spPr>
+        <p:txBody>
+          <a:bodyPr wrap="none" lIns="36576" rIns="36576" tIns="0" bIns="0" anchor="ctr">
+            <a:spAutoFit/>
+          </a:bodyPr>
+          <a:lstStyle/>
+          <a:p>
+            <a:pPr algn="ctr"/>
+            <a:r>
+              <a:rPr sz="1000" b="1">
+                <a:solidFill>
+                  <a:srgbClr val="FFFFFF"/>
+                </a:solidFill>
+                <a:latin typeface="맑은 고딕"/>
+              </a:rPr>
+              <a:t>근거: Working Memory 7±2</a:t>
+            </a:r>
+          </a:p>
+        </p:txBody>
+      </p:sp>
+      <p:sp>
+        <p:nvSpPr>
+          <p:cNvPr id="24" name="Oval 23"/>
+          <p:cNvSpPr/>
+          <p:nvPr/>
+        </p:nvSpPr>
+        <p:spPr>
+          <a:xfrm>
+            <a:off x="8321039" y="2697480"/>
+            <a:ext cx="914400" cy="914400"/>
+          </a:xfrm>
+          <a:prstGeom prst="ellipse">
             <a:avLst/>
           </a:prstGeom>
           <a:solidFill>
@@ -15448,33 +15141,33 @@
       </p:sp>
       <p:sp>
         <p:nvSpPr>
-          <p:cNvPr id="34" name="TextBox 33"/>
-          <p:cNvSpPr txBox="1"/>
-          <p:nvPr/>
-        </p:nvSpPr>
-        <p:spPr>
-          <a:xfrm>
-            <a:off x="8366759" y="2697480"/>
-            <a:ext cx="914400" cy="365760"/>
-          </a:xfrm>
-          <a:prstGeom prst="rect">
-            <a:avLst/>
-          </a:prstGeom>
-          <a:noFill/>
-        </p:spPr>
-        <p:txBody>
-          <a:bodyPr wrap="square" lIns="0" rIns="0" tIns="0" bIns="0">
-            <a:spAutoFit/>
-          </a:bodyPr>
-          <a:lstStyle/>
-          <a:p>
-            <a:pPr algn="l">
-              <a:lnSpc>
-                <a:spcPct val="125000"/>
-              </a:lnSpc>
-            </a:pPr>
-            <a:r>
-              <a:rPr sz="1400" b="1">
+          <p:cNvPr id="25" name="TextBox 24"/>
+          <p:cNvSpPr txBox="1"/>
+          <p:nvPr/>
+        </p:nvSpPr>
+        <p:spPr>
+          <a:xfrm>
+            <a:off x="8321039" y="2834640"/>
+            <a:ext cx="914400" cy="640080"/>
+          </a:xfrm>
+          <a:prstGeom prst="rect">
+            <a:avLst/>
+          </a:prstGeom>
+          <a:noFill/>
+        </p:spPr>
+        <p:txBody>
+          <a:bodyPr wrap="square" lIns="0" rIns="0" tIns="0" bIns="0">
+            <a:spAutoFit/>
+          </a:bodyPr>
+          <a:lstStyle/>
+          <a:p>
+            <a:pPr algn="ctr">
+              <a:lnSpc>
+                <a:spcPct val="125000"/>
+              </a:lnSpc>
+            </a:pPr>
+            <a:r>
+              <a:rPr sz="2600" b="1">
                 <a:solidFill>
                   <a:srgbClr val="FFFFFF"/>
                 </a:solidFill>
@@ -15487,350 +15180,267 @@
       </p:sp>
       <p:sp>
         <p:nvSpPr>
-          <p:cNvPr id="35" name="TextBox 34"/>
-          <p:cNvSpPr txBox="1"/>
-          <p:nvPr/>
-        </p:nvSpPr>
-        <p:spPr>
-          <a:xfrm>
-            <a:off x="9006839" y="2697480"/>
-            <a:ext cx="2743200" cy="365760"/>
-          </a:xfrm>
-          <a:prstGeom prst="rect">
-            <a:avLst/>
-          </a:prstGeom>
-          <a:noFill/>
-        </p:spPr>
-        <p:txBody>
-          <a:bodyPr wrap="square" lIns="0" rIns="0" tIns="0" bIns="0">
-            <a:spAutoFit/>
-          </a:bodyPr>
-          <a:lstStyle/>
-          <a:p>
-            <a:pPr algn="l">
-              <a:lnSpc>
-                <a:spcPct val="125000"/>
-              </a:lnSpc>
-            </a:pPr>
-            <a:r>
-              <a:rPr sz="1400" b="1">
-                <a:solidFill>
-                  <a:srgbClr val="FFFFFF"/>
-                </a:solidFill>
-                <a:latin typeface="맑은 고딕"/>
-              </a:rPr>
-              <a:t>명확한 가산</a:t>
-            </a:r>
-          </a:p>
-        </p:txBody>
-      </p:sp>
-      <p:sp>
-        <p:nvSpPr>
-          <p:cNvPr id="36" name="TextBox 35"/>
-          <p:cNvSpPr txBox="1"/>
-          <p:nvPr/>
-        </p:nvSpPr>
-        <p:spPr>
-          <a:xfrm>
-            <a:off x="8366759" y="3246120"/>
-            <a:ext cx="3200400" cy="365760"/>
-          </a:xfrm>
-          <a:prstGeom prst="rect">
-            <a:avLst/>
-          </a:prstGeom>
-          <a:noFill/>
-        </p:spPr>
-        <p:txBody>
-          <a:bodyPr wrap="square" lIns="0" rIns="0" tIns="0" bIns="0">
-            <a:spAutoFit/>
-          </a:bodyPr>
-          <a:lstStyle/>
-          <a:p>
-            <a:pPr algn="l">
-              <a:lnSpc>
-                <a:spcPct val="125000"/>
-              </a:lnSpc>
-            </a:pPr>
-            <a:r>
-              <a:rPr sz="1000" b="1">
-                <a:solidFill>
-                  <a:srgbClr val="0F141F"/>
-                </a:solidFill>
-                <a:latin typeface="맑은 고딕"/>
-              </a:rPr>
-              <a:t>감점 표현 → +10 가산으로 통일</a:t>
-            </a:r>
-          </a:p>
-        </p:txBody>
-      </p:sp>
-      <p:sp>
-        <p:nvSpPr>
-          <p:cNvPr id="37" name="TextBox 36"/>
-          <p:cNvSpPr txBox="1"/>
-          <p:nvPr/>
-        </p:nvSpPr>
-        <p:spPr>
-          <a:xfrm>
-            <a:off x="8366759" y="3703320"/>
-            <a:ext cx="3200400" cy="1005840"/>
-          </a:xfrm>
-          <a:prstGeom prst="rect">
-            <a:avLst/>
-          </a:prstGeom>
-          <a:noFill/>
-        </p:spPr>
-        <p:txBody>
-          <a:bodyPr wrap="square" lIns="0" rIns="0" tIns="0" bIns="0">
-            <a:spAutoFit/>
-          </a:bodyPr>
-          <a:lstStyle/>
-          <a:p>
-            <a:pPr algn="l">
-              <a:lnSpc>
-                <a:spcPct val="140000"/>
-              </a:lnSpc>
-            </a:pPr>
-            <a:r>
-              <a:rPr sz="1000" b="0">
-                <a:solidFill>
-                  <a:srgbClr val="424B5C"/>
-                </a:solidFill>
-                <a:latin typeface="맑은 고딕"/>
-              </a:rPr>
-              <a:t>모호한 "현저히 낮은 경우 감점" 대신 명확한 가산만 사용.</a:t>
-            </a:r>
-          </a:p>
-        </p:txBody>
-      </p:sp>
-      <p:cxnSp>
-        <p:nvCxnSpPr>
-          <p:cNvPr id="38" name="Connector 37"/>
-          <p:cNvCxnSpPr/>
-          <p:nvPr/>
-        </p:nvCxnSpPr>
-        <p:spPr>
-          <a:xfrm>
-            <a:off x="8366759" y="4846320"/>
-            <a:ext cx="3108960" cy="0"/>
-          </a:xfrm>
-          <a:prstGeom prst="line">
-            <a:avLst/>
-          </a:prstGeom>
-          <a:ln w="19050">
+          <p:cNvPr id="26" name="Rounded Rectangle 25"/>
+          <p:cNvSpPr/>
+          <p:nvPr/>
+        </p:nvSpPr>
+        <p:spPr>
+          <a:xfrm>
+            <a:off x="8138159" y="3840480"/>
+            <a:ext cx="3566160" cy="2560320"/>
+          </a:xfrm>
+          <a:prstGeom prst="roundRect">
+            <a:avLst>
+              <a:gd name="adj" fmla="val 6000"/>
+            </a:avLst>
+          </a:prstGeom>
+          <a:solidFill>
+            <a:srgbClr val="FAFBFC"/>
+          </a:solidFill>
+          <a:ln w="15240">
             <a:solidFill>
-              <a:srgbClr val="E5E7EB"/>
+              <a:srgbClr val="EC4899"/>
             </a:solidFill>
           </a:ln>
         </p:spPr>
         <p:style>
-          <a:lnRef idx="2">
+          <a:lnRef idx="1">
             <a:schemeClr val="accent1"/>
           </a:lnRef>
-          <a:fillRef idx="0">
+          <a:fillRef idx="3">
             <a:schemeClr val="accent1"/>
           </a:fillRef>
-          <a:effectRef idx="1">
+          <a:effectRef idx="2">
             <a:schemeClr val="accent1"/>
           </a:effectRef>
           <a:fontRef idx="minor">
-            <a:schemeClr val="tx1"/>
+            <a:schemeClr val="lt1"/>
           </a:fontRef>
         </p:style>
-      </p:cxnSp>
-      <p:sp>
-        <p:nvSpPr>
-          <p:cNvPr id="39" name="TextBox 38"/>
-          <p:cNvSpPr txBox="1"/>
-          <p:nvPr/>
-        </p:nvSpPr>
-        <p:spPr>
-          <a:xfrm>
-            <a:off x="8366759" y="4937760"/>
-            <a:ext cx="3200400" cy="320040"/>
-          </a:xfrm>
-          <a:prstGeom prst="rect">
-            <a:avLst/>
-          </a:prstGeom>
-          <a:noFill/>
-        </p:spPr>
-        <p:txBody>
-          <a:bodyPr wrap="square" lIns="0" rIns="0" tIns="0" bIns="0">
-            <a:spAutoFit/>
-          </a:bodyPr>
-          <a:lstStyle/>
-          <a:p>
-            <a:pPr algn="l">
-              <a:lnSpc>
-                <a:spcPct val="125000"/>
-              </a:lnSpc>
-            </a:pPr>
-            <a:r>
-              <a:rPr sz="900" b="1">
+        <p:txBody>
+          <a:bodyPr rtlCol="0" anchor="ctr"/>
+          <a:lstStyle/>
+          <a:p>
+            <a:pPr algn="ctr"/>
+          </a:p>
+        </p:txBody>
+      </p:sp>
+      <p:sp>
+        <p:nvSpPr>
+          <p:cNvPr id="27" name="TextBox 26"/>
+          <p:cNvSpPr txBox="1"/>
+          <p:nvPr/>
+        </p:nvSpPr>
+        <p:spPr>
+          <a:xfrm>
+            <a:off x="8366759" y="4023360"/>
+            <a:ext cx="3200400" cy="502920"/>
+          </a:xfrm>
+          <a:prstGeom prst="rect">
+            <a:avLst/>
+          </a:prstGeom>
+          <a:noFill/>
+        </p:spPr>
+        <p:txBody>
+          <a:bodyPr wrap="square" lIns="0" rIns="0" tIns="0" bIns="0">
+            <a:spAutoFit/>
+          </a:bodyPr>
+          <a:lstStyle/>
+          <a:p>
+            <a:pPr algn="l">
+              <a:lnSpc>
+                <a:spcPct val="125000"/>
+              </a:lnSpc>
+            </a:pPr>
+            <a:r>
+              <a:rPr sz="2200" b="1">
+                <a:solidFill>
+                  <a:srgbClr val="0F141F"/>
+                </a:solidFill>
+                <a:latin typeface="맑은 고딕"/>
+              </a:rPr>
+              <a:t>명확한 가산</a:t>
+            </a:r>
+          </a:p>
+        </p:txBody>
+      </p:sp>
+      <p:sp>
+        <p:nvSpPr>
+          <p:cNvPr id="28" name="TextBox 27"/>
+          <p:cNvSpPr txBox="1"/>
+          <p:nvPr/>
+        </p:nvSpPr>
+        <p:spPr>
+          <a:xfrm>
+            <a:off x="8366759" y="4572000"/>
+            <a:ext cx="3200400" cy="365760"/>
+          </a:xfrm>
+          <a:prstGeom prst="rect">
+            <a:avLst/>
+          </a:prstGeom>
+          <a:noFill/>
+        </p:spPr>
+        <p:txBody>
+          <a:bodyPr wrap="square" lIns="0" rIns="0" tIns="0" bIns="0">
+            <a:spAutoFit/>
+          </a:bodyPr>
+          <a:lstStyle/>
+          <a:p>
+            <a:pPr algn="l">
+              <a:lnSpc>
+                <a:spcPct val="125000"/>
+              </a:lnSpc>
+            </a:pPr>
+            <a:r>
+              <a:rPr sz="1200" b="1">
                 <a:solidFill>
                   <a:srgbClr val="EC4899"/>
                 </a:solidFill>
                 <a:latin typeface="맑은 고딕"/>
               </a:rPr>
-              <a:t>효과</a:t>
-            </a:r>
-          </a:p>
-        </p:txBody>
-      </p:sp>
-      <p:sp>
-        <p:nvSpPr>
-          <p:cNvPr id="40" name="TextBox 39"/>
-          <p:cNvSpPr txBox="1"/>
-          <p:nvPr/>
-        </p:nvSpPr>
-        <p:spPr>
-          <a:xfrm>
-            <a:off x="8366759" y="5212080"/>
-            <a:ext cx="3200400" cy="731520"/>
-          </a:xfrm>
-          <a:prstGeom prst="rect">
-            <a:avLst/>
-          </a:prstGeom>
-          <a:noFill/>
-        </p:spPr>
-        <p:txBody>
-          <a:bodyPr wrap="square" lIns="0" rIns="0" tIns="0" bIns="0">
-            <a:spAutoFit/>
-          </a:bodyPr>
-          <a:lstStyle/>
-          <a:p>
-            <a:pPr algn="l">
-              <a:lnSpc>
-                <a:spcPct val="130000"/>
-              </a:lnSpc>
-            </a:pPr>
-            <a:r>
-              <a:rPr sz="900" b="0">
+              <a:t>모호한 감점 → +10 가산만</a:t>
+            </a:r>
+          </a:p>
+        </p:txBody>
+      </p:sp>
+      <p:sp>
+        <p:nvSpPr>
+          <p:cNvPr id="29" name="TextBox 28"/>
+          <p:cNvSpPr txBox="1"/>
+          <p:nvPr/>
+        </p:nvSpPr>
+        <p:spPr>
+          <a:xfrm>
+            <a:off x="8366759" y="5029200"/>
+            <a:ext cx="3200400" cy="914400"/>
+          </a:xfrm>
+          <a:prstGeom prst="rect">
+            <a:avLst/>
+          </a:prstGeom>
+          <a:noFill/>
+        </p:spPr>
+        <p:txBody>
+          <a:bodyPr wrap="square" lIns="0" rIns="0" tIns="0" bIns="0">
+            <a:spAutoFit/>
+          </a:bodyPr>
+          <a:lstStyle/>
+          <a:p>
+            <a:pPr algn="l">
+              <a:lnSpc>
+                <a:spcPct val="150000"/>
+              </a:lnSpc>
+            </a:pPr>
+            <a:r>
+              <a:rPr sz="1300" b="0">
                 <a:solidFill>
                   <a:srgbClr val="424B5C"/>
                 </a:solidFill>
                 <a:latin typeface="맑은 고딕"/>
               </a:rPr>
-              <a:t>학생이 모호한 위협 회피가 아니라 보상으로 동기 부여</a:t>
-            </a:r>
-          </a:p>
-        </p:txBody>
-      </p:sp>
-      <p:cxnSp>
-        <p:nvCxnSpPr>
-          <p:cNvPr id="41" name="Connector 40"/>
-          <p:cNvCxnSpPr/>
-          <p:nvPr/>
-        </p:nvCxnSpPr>
+              <a:t>기준이 모호한 "감점" 표현 대신</a:t>
+            </a:r>
+          </a:p>
+          <a:p>
+            <a:pPr algn="l">
+              <a:lnSpc>
+                <a:spcPct val="150000"/>
+              </a:lnSpc>
+            </a:pPr>
+            <a:r>
+              <a:rPr sz="1300" b="0">
+                <a:solidFill>
+                  <a:srgbClr val="424B5C"/>
+                </a:solidFill>
+                <a:latin typeface="맑은 고딕"/>
+              </a:rPr>
+              <a:t>명확한 +10 가산만 사용한다.</a:t>
+            </a:r>
+          </a:p>
+        </p:txBody>
+      </p:sp>
+      <p:sp>
+        <p:nvSpPr>
+          <p:cNvPr id="30" name="Rounded Rectangle 29"/>
+          <p:cNvSpPr/>
+          <p:nvPr/>
+        </p:nvSpPr>
         <p:spPr>
           <a:xfrm>
             <a:off x="8366759" y="5989320"/>
-            <a:ext cx="3108960" cy="0"/>
-          </a:xfrm>
-          <a:prstGeom prst="line">
-            <a:avLst/>
-          </a:prstGeom>
-          <a:ln w="19050">
-            <a:solidFill>
-              <a:srgbClr val="E5E7EB"/>
-            </a:solidFill>
+            <a:ext cx="3108960" cy="320040"/>
+          </a:xfrm>
+          <a:prstGeom prst="roundRect">
+            <a:avLst>
+              <a:gd name="adj" fmla="val 50000"/>
+            </a:avLst>
+          </a:prstGeom>
+          <a:solidFill>
+            <a:srgbClr val="EC4899"/>
+          </a:solidFill>
+          <a:ln>
+            <a:noFill/>
           </a:ln>
         </p:spPr>
         <p:style>
-          <a:lnRef idx="2">
+          <a:lnRef idx="1">
             <a:schemeClr val="accent1"/>
           </a:lnRef>
-          <a:fillRef idx="0">
+          <a:fillRef idx="3">
             <a:schemeClr val="accent1"/>
           </a:fillRef>
-          <a:effectRef idx="1">
+          <a:effectRef idx="2">
             <a:schemeClr val="accent1"/>
           </a:effectRef>
           <a:fontRef idx="minor">
-            <a:schemeClr val="tx1"/>
+            <a:schemeClr val="lt1"/>
           </a:fontRef>
         </p:style>
-      </p:cxnSp>
-      <p:sp>
-        <p:nvSpPr>
-          <p:cNvPr id="42" name="TextBox 41"/>
-          <p:cNvSpPr txBox="1"/>
-          <p:nvPr/>
-        </p:nvSpPr>
-        <p:spPr>
-          <a:xfrm>
-            <a:off x="8366759" y="6035040"/>
-            <a:ext cx="3200400" cy="320040"/>
-          </a:xfrm>
-          <a:prstGeom prst="rect">
-            <a:avLst/>
-          </a:prstGeom>
-          <a:noFill/>
-        </p:spPr>
-        <p:txBody>
-          <a:bodyPr wrap="square" lIns="0" rIns="0" tIns="0" bIns="0">
-            <a:spAutoFit/>
-          </a:bodyPr>
-          <a:lstStyle/>
-          <a:p>
-            <a:pPr algn="l">
-              <a:lnSpc>
-                <a:spcPct val="125000"/>
-              </a:lnSpc>
-            </a:pPr>
-            <a:r>
-              <a:rPr sz="900" b="1">
-                <a:solidFill>
-                  <a:srgbClr val="EC4899"/>
-                </a:solidFill>
-                <a:latin typeface="맑은 고딕"/>
-              </a:rPr>
-              <a:t>근거 이론</a:t>
-            </a:r>
-          </a:p>
-        </p:txBody>
-      </p:sp>
-      <p:sp>
-        <p:nvSpPr>
-          <p:cNvPr id="43" name="TextBox 42"/>
-          <p:cNvSpPr txBox="1"/>
-          <p:nvPr/>
-        </p:nvSpPr>
-        <p:spPr>
-          <a:xfrm>
-            <a:off x="8366759" y="6309360"/>
-            <a:ext cx="3200400" cy="320040"/>
-          </a:xfrm>
-          <a:prstGeom prst="rect">
-            <a:avLst/>
-          </a:prstGeom>
-          <a:noFill/>
-        </p:spPr>
-        <p:txBody>
-          <a:bodyPr wrap="square" lIns="0" rIns="0" tIns="0" bIns="0">
-            <a:spAutoFit/>
-          </a:bodyPr>
-          <a:lstStyle/>
-          <a:p>
-            <a:pPr algn="l">
-              <a:lnSpc>
-                <a:spcPct val="125000"/>
-              </a:lnSpc>
-            </a:pPr>
-            <a:r>
-              <a:rPr sz="900" b="0">
-                <a:solidFill>
-                  <a:srgbClr val="424B5C"/>
-                </a:solidFill>
-                <a:latin typeface="맑은 고딕"/>
-              </a:rPr>
-              <a:t>Framing Effect · 손실 회피 제거</a:t>
-            </a:r>
-          </a:p>
-        </p:txBody>
-      </p:sp>
-      <p:sp>
-        <p:nvSpPr>
-          <p:cNvPr id="44" name="TextBox 43"/>
+        <p:txBody>
+          <a:bodyPr rtlCol="0" anchor="ctr"/>
+          <a:lstStyle/>
+          <a:p>
+            <a:pPr algn="ctr"/>
+          </a:p>
+        </p:txBody>
+      </p:sp>
+      <p:sp>
+        <p:nvSpPr>
+          <p:cNvPr id="31" name="TextBox 30"/>
+          <p:cNvSpPr txBox="1"/>
+          <p:nvPr/>
+        </p:nvSpPr>
+        <p:spPr>
+          <a:xfrm>
+            <a:off x="8366759" y="5989320"/>
+            <a:ext cx="3108960" cy="320040"/>
+          </a:xfrm>
+          <a:prstGeom prst="rect">
+            <a:avLst/>
+          </a:prstGeom>
+          <a:noFill/>
+        </p:spPr>
+        <p:txBody>
+          <a:bodyPr wrap="none" lIns="36576" rIns="36576" tIns="0" bIns="0" anchor="ctr">
+            <a:spAutoFit/>
+          </a:bodyPr>
+          <a:lstStyle/>
+          <a:p>
+            <a:pPr algn="ctr"/>
+            <a:r>
+              <a:rPr sz="1000" b="1">
+                <a:solidFill>
+                  <a:srgbClr val="FFFFFF"/>
+                </a:solidFill>
+                <a:latin typeface="맑은 고딕"/>
+              </a:rPr>
+              <a:t>근거: Framing Effect</a:t>
+            </a:r>
+          </a:p>
+        </p:txBody>
+      </p:sp>
+      <p:sp>
+        <p:nvSpPr>
+          <p:cNvPr id="32" name="TextBox 31"/>
           <p:cNvSpPr txBox="1"/>
           <p:nvPr/>
         </p:nvSpPr>
@@ -15856,13 +15466,13 @@
               </a:lnSpc>
             </a:pPr>
             <a:r>
-              <a:rPr sz="1000" b="0">
+              <a:rPr sz="1100" b="0">
                 <a:solidFill>
                   <a:srgbClr val="8B95A7"/>
                 </a:solidFill>
                 <a:latin typeface="맑은 고딕"/>
               </a:rPr>
-              <a:t>T1 설문은 이 개선안이 학생 인식을 바꾸는지, T2 시뮬은 약한 학생도 도와주는지 검증</a:t>
+              <a:t>T1 설문은 인식 변화, T2 시뮬은 약한 학생 보호 효과를 각각 검증</a:t>
             </a:r>
           </a:p>
         </p:txBody>

--- a/team_project/kickoff_2026-05-11.pptx
+++ b/team_project/kickoff_2026-05-11.pptx
@@ -3901,12 +3901,57 @@
         </p:nvSpPr>
         <p:spPr>
           <a:xfrm>
+            <a:off x="676656" y="5129783"/>
+            <a:ext cx="3566160" cy="1417320"/>
+          </a:xfrm>
+          <a:prstGeom prst="roundRect">
+            <a:avLst>
+              <a:gd name="adj" fmla="val 5000"/>
+            </a:avLst>
+          </a:prstGeom>
+          <a:solidFill>
+            <a:srgbClr val="E9EBF0"/>
+          </a:solidFill>
+          <a:ln>
+            <a:noFill/>
+          </a:ln>
+        </p:spPr>
+        <p:style>
+          <a:lnRef idx="1">
+            <a:schemeClr val="accent1"/>
+          </a:lnRef>
+          <a:fillRef idx="3">
+            <a:schemeClr val="accent1"/>
+          </a:fillRef>
+          <a:effectRef idx="2">
+            <a:schemeClr val="accent1"/>
+          </a:effectRef>
+          <a:fontRef idx="minor">
+            <a:schemeClr val="lt1"/>
+          </a:fontRef>
+        </p:style>
+        <p:txBody>
+          <a:bodyPr rtlCol="0" anchor="ctr"/>
+          <a:lstStyle/>
+          <a:p>
+            <a:pPr algn="ctr"/>
+          </a:p>
+        </p:txBody>
+      </p:sp>
+      <p:sp>
+        <p:nvSpPr>
+          <p:cNvPr id="13" name="Rounded Rectangle 12"/>
+          <p:cNvSpPr/>
+          <p:nvPr/>
+        </p:nvSpPr>
+        <p:spPr>
+          <a:xfrm>
             <a:off x="640080" y="5074920"/>
             <a:ext cx="3566160" cy="1417320"/>
           </a:xfrm>
           <a:prstGeom prst="roundRect">
             <a:avLst>
-              <a:gd name="adj" fmla="val 6000"/>
+              <a:gd name="adj" fmla="val 5000"/>
             </a:avLst>
           </a:prstGeom>
           <a:solidFill>
@@ -3942,7 +3987,7 @@
       </p:sp>
       <p:sp>
         <p:nvSpPr>
-          <p:cNvPr id="13" name="TextBox 12"/>
+          <p:cNvPr id="14" name="TextBox 13"/>
           <p:cNvSpPr txBox="1"/>
           <p:nvPr/>
         </p:nvSpPr>
@@ -3981,7 +4026,7 @@
       </p:sp>
       <p:sp>
         <p:nvSpPr>
-          <p:cNvPr id="14" name="TextBox 13"/>
+          <p:cNvPr id="15" name="TextBox 14"/>
           <p:cNvSpPr txBox="1"/>
           <p:nvPr/>
         </p:nvSpPr>
@@ -4020,7 +4065,7 @@
       </p:sp>
       <p:sp>
         <p:nvSpPr>
-          <p:cNvPr id="15" name="TextBox 14"/>
+          <p:cNvPr id="16" name="TextBox 15"/>
           <p:cNvSpPr txBox="1"/>
           <p:nvPr/>
         </p:nvSpPr>
@@ -4075,7 +4120,52 @@
       </p:sp>
       <p:sp>
         <p:nvSpPr>
-          <p:cNvPr id="16" name="Rounded Rectangle 15"/>
+          <p:cNvPr id="17" name="Rounded Rectangle 16"/>
+          <p:cNvSpPr/>
+          <p:nvPr/>
+        </p:nvSpPr>
+        <p:spPr>
+          <a:xfrm>
+            <a:off x="4425696" y="5129783"/>
+            <a:ext cx="3566160" cy="1417320"/>
+          </a:xfrm>
+          <a:prstGeom prst="roundRect">
+            <a:avLst>
+              <a:gd name="adj" fmla="val 5000"/>
+            </a:avLst>
+          </a:prstGeom>
+          <a:solidFill>
+            <a:srgbClr val="E9EBF0"/>
+          </a:solidFill>
+          <a:ln>
+            <a:noFill/>
+          </a:ln>
+        </p:spPr>
+        <p:style>
+          <a:lnRef idx="1">
+            <a:schemeClr val="accent1"/>
+          </a:lnRef>
+          <a:fillRef idx="3">
+            <a:schemeClr val="accent1"/>
+          </a:fillRef>
+          <a:effectRef idx="2">
+            <a:schemeClr val="accent1"/>
+          </a:effectRef>
+          <a:fontRef idx="minor">
+            <a:schemeClr val="lt1"/>
+          </a:fontRef>
+        </p:style>
+        <p:txBody>
+          <a:bodyPr rtlCol="0" anchor="ctr"/>
+          <a:lstStyle/>
+          <a:p>
+            <a:pPr algn="ctr"/>
+          </a:p>
+        </p:txBody>
+      </p:sp>
+      <p:sp>
+        <p:nvSpPr>
+          <p:cNvPr id="18" name="Rounded Rectangle 17"/>
           <p:cNvSpPr/>
           <p:nvPr/>
         </p:nvSpPr>
@@ -4086,7 +4176,7 @@
           </a:xfrm>
           <a:prstGeom prst="roundRect">
             <a:avLst>
-              <a:gd name="adj" fmla="val 6000"/>
+              <a:gd name="adj" fmla="val 5000"/>
             </a:avLst>
           </a:prstGeom>
           <a:solidFill>
@@ -4122,7 +4212,7 @@
       </p:sp>
       <p:sp>
         <p:nvSpPr>
-          <p:cNvPr id="17" name="TextBox 16"/>
+          <p:cNvPr id="19" name="TextBox 18"/>
           <p:cNvSpPr txBox="1"/>
           <p:nvPr/>
         </p:nvSpPr>
@@ -4161,7 +4251,7 @@
       </p:sp>
       <p:sp>
         <p:nvSpPr>
-          <p:cNvPr id="18" name="TextBox 17"/>
+          <p:cNvPr id="20" name="TextBox 19"/>
           <p:cNvSpPr txBox="1"/>
           <p:nvPr/>
         </p:nvSpPr>
@@ -4200,7 +4290,7 @@
       </p:sp>
       <p:sp>
         <p:nvSpPr>
-          <p:cNvPr id="19" name="TextBox 18"/>
+          <p:cNvPr id="21" name="TextBox 20"/>
           <p:cNvSpPr txBox="1"/>
           <p:nvPr/>
         </p:nvSpPr>
@@ -4255,7 +4345,52 @@
       </p:sp>
       <p:sp>
         <p:nvSpPr>
-          <p:cNvPr id="20" name="Rounded Rectangle 19"/>
+          <p:cNvPr id="22" name="Rounded Rectangle 21"/>
+          <p:cNvSpPr/>
+          <p:nvPr/>
+        </p:nvSpPr>
+        <p:spPr>
+          <a:xfrm>
+            <a:off x="8174735" y="5129783"/>
+            <a:ext cx="3566160" cy="1417320"/>
+          </a:xfrm>
+          <a:prstGeom prst="roundRect">
+            <a:avLst>
+              <a:gd name="adj" fmla="val 5000"/>
+            </a:avLst>
+          </a:prstGeom>
+          <a:solidFill>
+            <a:srgbClr val="E9EBF0"/>
+          </a:solidFill>
+          <a:ln>
+            <a:noFill/>
+          </a:ln>
+        </p:spPr>
+        <p:style>
+          <a:lnRef idx="1">
+            <a:schemeClr val="accent1"/>
+          </a:lnRef>
+          <a:fillRef idx="3">
+            <a:schemeClr val="accent1"/>
+          </a:fillRef>
+          <a:effectRef idx="2">
+            <a:schemeClr val="accent1"/>
+          </a:effectRef>
+          <a:fontRef idx="minor">
+            <a:schemeClr val="lt1"/>
+          </a:fontRef>
+        </p:style>
+        <p:txBody>
+          <a:bodyPr rtlCol="0" anchor="ctr"/>
+          <a:lstStyle/>
+          <a:p>
+            <a:pPr algn="ctr"/>
+          </a:p>
+        </p:txBody>
+      </p:sp>
+      <p:sp>
+        <p:nvSpPr>
+          <p:cNvPr id="23" name="Rounded Rectangle 22"/>
           <p:cNvSpPr/>
           <p:nvPr/>
         </p:nvSpPr>
@@ -4266,7 +4401,7 @@
           </a:xfrm>
           <a:prstGeom prst="roundRect">
             <a:avLst>
-              <a:gd name="adj" fmla="val 6000"/>
+              <a:gd name="adj" fmla="val 5000"/>
             </a:avLst>
           </a:prstGeom>
           <a:solidFill>
@@ -4302,7 +4437,7 @@
       </p:sp>
       <p:sp>
         <p:nvSpPr>
-          <p:cNvPr id="21" name="TextBox 20"/>
+          <p:cNvPr id="24" name="TextBox 23"/>
           <p:cNvSpPr txBox="1"/>
           <p:nvPr/>
         </p:nvSpPr>
@@ -4341,7 +4476,7 @@
       </p:sp>
       <p:sp>
         <p:nvSpPr>
-          <p:cNvPr id="22" name="TextBox 21"/>
+          <p:cNvPr id="25" name="TextBox 24"/>
           <p:cNvSpPr txBox="1"/>
           <p:nvPr/>
         </p:nvSpPr>
@@ -4380,7 +4515,7 @@
       </p:sp>
       <p:sp>
         <p:nvSpPr>
-          <p:cNvPr id="23" name="TextBox 22"/>
+          <p:cNvPr id="26" name="TextBox 25"/>
           <p:cNvSpPr txBox="1"/>
           <p:nvPr/>
         </p:nvSpPr>
@@ -4693,12 +4828,57 @@
         </p:nvSpPr>
         <p:spPr>
           <a:xfrm>
+            <a:off x="676656" y="2569464"/>
+            <a:ext cx="5440680" cy="1554480"/>
+          </a:xfrm>
+          <a:prstGeom prst="roundRect">
+            <a:avLst>
+              <a:gd name="adj" fmla="val 5000"/>
+            </a:avLst>
+          </a:prstGeom>
+          <a:solidFill>
+            <a:srgbClr val="E9EBF0"/>
+          </a:solidFill>
+          <a:ln>
+            <a:noFill/>
+          </a:ln>
+        </p:spPr>
+        <p:style>
+          <a:lnRef idx="1">
+            <a:schemeClr val="accent1"/>
+          </a:lnRef>
+          <a:fillRef idx="3">
+            <a:schemeClr val="accent1"/>
+          </a:fillRef>
+          <a:effectRef idx="2">
+            <a:schemeClr val="accent1"/>
+          </a:effectRef>
+          <a:fontRef idx="minor">
+            <a:schemeClr val="lt1"/>
+          </a:fontRef>
+        </p:style>
+        <p:txBody>
+          <a:bodyPr rtlCol="0" anchor="ctr"/>
+          <a:lstStyle/>
+          <a:p>
+            <a:pPr algn="ctr"/>
+          </a:p>
+        </p:txBody>
+      </p:sp>
+      <p:sp>
+        <p:nvSpPr>
+          <p:cNvPr id="9" name="Rounded Rectangle 8"/>
+          <p:cNvSpPr/>
+          <p:nvPr/>
+        </p:nvSpPr>
+        <p:spPr>
+          <a:xfrm>
             <a:off x="640080" y="2514600"/>
             <a:ext cx="5440680" cy="1554480"/>
           </a:xfrm>
           <a:prstGeom prst="roundRect">
             <a:avLst>
-              <a:gd name="adj" fmla="val 6000"/>
+              <a:gd name="adj" fmla="val 5000"/>
             </a:avLst>
           </a:prstGeom>
           <a:solidFill>
@@ -4734,7 +4914,7 @@
       </p:sp>
       <p:sp>
         <p:nvSpPr>
-          <p:cNvPr id="9" name="TextBox 8"/>
+          <p:cNvPr id="10" name="TextBox 9"/>
           <p:cNvSpPr txBox="1"/>
           <p:nvPr/>
         </p:nvSpPr>
@@ -4773,7 +4953,7 @@
       </p:sp>
       <p:pic>
         <p:nvPicPr>
-          <p:cNvPr id="10" name="Picture 9" descr="f_wm.png"/>
+          <p:cNvPr id="11" name="Picture 10" descr="f_wm.png"/>
           <p:cNvPicPr>
             <a:picLocks noChangeAspect="1"/>
           </p:cNvPicPr>
@@ -4797,7 +4977,7 @@
       </p:pic>
       <p:sp>
         <p:nvSpPr>
-          <p:cNvPr id="11" name="TextBox 10"/>
+          <p:cNvPr id="12" name="TextBox 11"/>
           <p:cNvSpPr txBox="1"/>
           <p:nvPr/>
         </p:nvSpPr>
@@ -4836,7 +5016,7 @@
       </p:sp>
       <p:sp>
         <p:nvSpPr>
-          <p:cNvPr id="12" name="TextBox 11"/>
+          <p:cNvPr id="13" name="TextBox 12"/>
           <p:cNvSpPr txBox="1"/>
           <p:nvPr/>
         </p:nvSpPr>
@@ -4875,7 +5055,7 @@
       </p:sp>
       <p:sp>
         <p:nvSpPr>
-          <p:cNvPr id="13" name="TextBox 12"/>
+          <p:cNvPr id="14" name="TextBox 13"/>
           <p:cNvSpPr txBox="1"/>
           <p:nvPr/>
         </p:nvSpPr>
@@ -4930,7 +5110,7 @@
       </p:sp>
       <p:sp>
         <p:nvSpPr>
-          <p:cNvPr id="14" name="TextBox 13"/>
+          <p:cNvPr id="15" name="TextBox 14"/>
           <p:cNvSpPr txBox="1"/>
           <p:nvPr/>
         </p:nvSpPr>
@@ -4969,7 +5149,7 @@
       </p:sp>
       <p:sp>
         <p:nvSpPr>
-          <p:cNvPr id="15" name="TextBox 14"/>
+          <p:cNvPr id="16" name="TextBox 15"/>
           <p:cNvSpPr txBox="1"/>
           <p:nvPr/>
         </p:nvSpPr>
@@ -5008,7 +5188,52 @@
       </p:sp>
       <p:sp>
         <p:nvSpPr>
-          <p:cNvPr id="16" name="Rounded Rectangle 15"/>
+          <p:cNvPr id="17" name="Rounded Rectangle 16"/>
+          <p:cNvSpPr/>
+          <p:nvPr/>
+        </p:nvSpPr>
+        <p:spPr>
+          <a:xfrm>
+            <a:off x="6300216" y="2569464"/>
+            <a:ext cx="5257800" cy="4160520"/>
+          </a:xfrm>
+          <a:prstGeom prst="roundRect">
+            <a:avLst>
+              <a:gd name="adj" fmla="val 5000"/>
+            </a:avLst>
+          </a:prstGeom>
+          <a:solidFill>
+            <a:srgbClr val="E9EBF0"/>
+          </a:solidFill>
+          <a:ln>
+            <a:noFill/>
+          </a:ln>
+        </p:spPr>
+        <p:style>
+          <a:lnRef idx="1">
+            <a:schemeClr val="accent1"/>
+          </a:lnRef>
+          <a:fillRef idx="3">
+            <a:schemeClr val="accent1"/>
+          </a:fillRef>
+          <a:effectRef idx="2">
+            <a:schemeClr val="accent1"/>
+          </a:effectRef>
+          <a:fontRef idx="minor">
+            <a:schemeClr val="lt1"/>
+          </a:fontRef>
+        </p:style>
+        <p:txBody>
+          <a:bodyPr rtlCol="0" anchor="ctr"/>
+          <a:lstStyle/>
+          <a:p>
+            <a:pPr algn="ctr"/>
+          </a:p>
+        </p:txBody>
+      </p:sp>
+      <p:sp>
+        <p:nvSpPr>
+          <p:cNvPr id="18" name="Rounded Rectangle 17"/>
           <p:cNvSpPr/>
           <p:nvPr/>
         </p:nvSpPr>
@@ -5019,7 +5244,7 @@
           </a:xfrm>
           <a:prstGeom prst="roundRect">
             <a:avLst>
-              <a:gd name="adj" fmla="val 6000"/>
+              <a:gd name="adj" fmla="val 5000"/>
             </a:avLst>
           </a:prstGeom>
           <a:solidFill>
@@ -5055,7 +5280,7 @@
       </p:sp>
       <p:sp>
         <p:nvSpPr>
-          <p:cNvPr id="17" name="TextBox 16"/>
+          <p:cNvPr id="19" name="TextBox 18"/>
           <p:cNvSpPr txBox="1"/>
           <p:nvPr/>
         </p:nvSpPr>
@@ -5094,7 +5319,7 @@
       </p:sp>
       <p:sp>
         <p:nvSpPr>
-          <p:cNvPr id="18" name="TextBox 17"/>
+          <p:cNvPr id="20" name="TextBox 19"/>
           <p:cNvSpPr txBox="1"/>
           <p:nvPr/>
         </p:nvSpPr>
@@ -5133,7 +5358,7 @@
       </p:sp>
       <p:sp>
         <p:nvSpPr>
-          <p:cNvPr id="19" name="TextBox 18"/>
+          <p:cNvPr id="21" name="TextBox 20"/>
           <p:cNvSpPr txBox="1"/>
           <p:nvPr/>
         </p:nvSpPr>
@@ -5204,7 +5429,7 @@
       </p:sp>
       <p:cxnSp>
         <p:nvCxnSpPr>
-          <p:cNvPr id="20" name="Connector 19"/>
+          <p:cNvPr id="22" name="Connector 21"/>
           <p:cNvCxnSpPr/>
           <p:nvPr/>
         </p:nvCxnSpPr>
@@ -5239,7 +5464,7 @@
       </p:cxnSp>
       <p:sp>
         <p:nvSpPr>
-          <p:cNvPr id="21" name="TextBox 20"/>
+          <p:cNvPr id="23" name="TextBox 22"/>
           <p:cNvSpPr txBox="1"/>
           <p:nvPr/>
         </p:nvSpPr>
@@ -5278,7 +5503,7 @@
       </p:sp>
       <p:sp>
         <p:nvSpPr>
-          <p:cNvPr id="22" name="TextBox 21"/>
+          <p:cNvPr id="24" name="TextBox 23"/>
           <p:cNvSpPr txBox="1"/>
           <p:nvPr/>
         </p:nvSpPr>
@@ -5317,7 +5542,7 @@
       </p:sp>
       <p:sp>
         <p:nvSpPr>
-          <p:cNvPr id="23" name="TextBox 22"/>
+          <p:cNvPr id="25" name="TextBox 24"/>
           <p:cNvSpPr txBox="1"/>
           <p:nvPr/>
         </p:nvSpPr>
@@ -5770,12 +5995,57 @@
         </p:nvSpPr>
         <p:spPr>
           <a:xfrm>
+            <a:off x="676656" y="5129783"/>
+            <a:ext cx="3566160" cy="1417320"/>
+          </a:xfrm>
+          <a:prstGeom prst="roundRect">
+            <a:avLst>
+              <a:gd name="adj" fmla="val 5000"/>
+            </a:avLst>
+          </a:prstGeom>
+          <a:solidFill>
+            <a:srgbClr val="E9EBF0"/>
+          </a:solidFill>
+          <a:ln>
+            <a:noFill/>
+          </a:ln>
+        </p:spPr>
+        <p:style>
+          <a:lnRef idx="1">
+            <a:schemeClr val="accent1"/>
+          </a:lnRef>
+          <a:fillRef idx="3">
+            <a:schemeClr val="accent1"/>
+          </a:fillRef>
+          <a:effectRef idx="2">
+            <a:schemeClr val="accent1"/>
+          </a:effectRef>
+          <a:fontRef idx="minor">
+            <a:schemeClr val="lt1"/>
+          </a:fontRef>
+        </p:style>
+        <p:txBody>
+          <a:bodyPr rtlCol="0" anchor="ctr"/>
+          <a:lstStyle/>
+          <a:p>
+            <a:pPr algn="ctr"/>
+          </a:p>
+        </p:txBody>
+      </p:sp>
+      <p:sp>
+        <p:nvSpPr>
+          <p:cNvPr id="13" name="Rounded Rectangle 12"/>
+          <p:cNvSpPr/>
+          <p:nvPr/>
+        </p:nvSpPr>
+        <p:spPr>
+          <a:xfrm>
             <a:off x="640080" y="5074920"/>
             <a:ext cx="3566160" cy="1417320"/>
           </a:xfrm>
           <a:prstGeom prst="roundRect">
             <a:avLst>
-              <a:gd name="adj" fmla="val 6000"/>
+              <a:gd name="adj" fmla="val 5000"/>
             </a:avLst>
           </a:prstGeom>
           <a:solidFill>
@@ -5811,7 +6081,7 @@
       </p:sp>
       <p:sp>
         <p:nvSpPr>
-          <p:cNvPr id="13" name="TextBox 12"/>
+          <p:cNvPr id="14" name="TextBox 13"/>
           <p:cNvSpPr txBox="1"/>
           <p:nvPr/>
         </p:nvSpPr>
@@ -5850,7 +6120,7 @@
       </p:sp>
       <p:sp>
         <p:nvSpPr>
-          <p:cNvPr id="14" name="TextBox 13"/>
+          <p:cNvPr id="15" name="TextBox 14"/>
           <p:cNvSpPr txBox="1"/>
           <p:nvPr/>
         </p:nvSpPr>
@@ -5889,7 +6159,7 @@
       </p:sp>
       <p:sp>
         <p:nvSpPr>
-          <p:cNvPr id="15" name="TextBox 14"/>
+          <p:cNvPr id="16" name="TextBox 15"/>
           <p:cNvSpPr txBox="1"/>
           <p:nvPr/>
         </p:nvSpPr>
@@ -5944,7 +6214,52 @@
       </p:sp>
       <p:sp>
         <p:nvSpPr>
-          <p:cNvPr id="16" name="Rounded Rectangle 15"/>
+          <p:cNvPr id="17" name="Rounded Rectangle 16"/>
+          <p:cNvSpPr/>
+          <p:nvPr/>
+        </p:nvSpPr>
+        <p:spPr>
+          <a:xfrm>
+            <a:off x="4425696" y="5129783"/>
+            <a:ext cx="3566160" cy="1417320"/>
+          </a:xfrm>
+          <a:prstGeom prst="roundRect">
+            <a:avLst>
+              <a:gd name="adj" fmla="val 5000"/>
+            </a:avLst>
+          </a:prstGeom>
+          <a:solidFill>
+            <a:srgbClr val="E9EBF0"/>
+          </a:solidFill>
+          <a:ln>
+            <a:noFill/>
+          </a:ln>
+        </p:spPr>
+        <p:style>
+          <a:lnRef idx="1">
+            <a:schemeClr val="accent1"/>
+          </a:lnRef>
+          <a:fillRef idx="3">
+            <a:schemeClr val="accent1"/>
+          </a:fillRef>
+          <a:effectRef idx="2">
+            <a:schemeClr val="accent1"/>
+          </a:effectRef>
+          <a:fontRef idx="minor">
+            <a:schemeClr val="lt1"/>
+          </a:fontRef>
+        </p:style>
+        <p:txBody>
+          <a:bodyPr rtlCol="0" anchor="ctr"/>
+          <a:lstStyle/>
+          <a:p>
+            <a:pPr algn="ctr"/>
+          </a:p>
+        </p:txBody>
+      </p:sp>
+      <p:sp>
+        <p:nvSpPr>
+          <p:cNvPr id="18" name="Rounded Rectangle 17"/>
           <p:cNvSpPr/>
           <p:nvPr/>
         </p:nvSpPr>
@@ -5955,7 +6270,7 @@
           </a:xfrm>
           <a:prstGeom prst="roundRect">
             <a:avLst>
-              <a:gd name="adj" fmla="val 6000"/>
+              <a:gd name="adj" fmla="val 5000"/>
             </a:avLst>
           </a:prstGeom>
           <a:solidFill>
@@ -5991,7 +6306,7 @@
       </p:sp>
       <p:sp>
         <p:nvSpPr>
-          <p:cNvPr id="17" name="TextBox 16"/>
+          <p:cNvPr id="19" name="TextBox 18"/>
           <p:cNvSpPr txBox="1"/>
           <p:nvPr/>
         </p:nvSpPr>
@@ -6030,7 +6345,7 @@
       </p:sp>
       <p:sp>
         <p:nvSpPr>
-          <p:cNvPr id="18" name="TextBox 17"/>
+          <p:cNvPr id="20" name="TextBox 19"/>
           <p:cNvSpPr txBox="1"/>
           <p:nvPr/>
         </p:nvSpPr>
@@ -6069,7 +6384,7 @@
       </p:sp>
       <p:sp>
         <p:nvSpPr>
-          <p:cNvPr id="19" name="TextBox 18"/>
+          <p:cNvPr id="21" name="TextBox 20"/>
           <p:cNvSpPr txBox="1"/>
           <p:nvPr/>
         </p:nvSpPr>
@@ -6124,7 +6439,52 @@
       </p:sp>
       <p:sp>
         <p:nvSpPr>
-          <p:cNvPr id="20" name="Rounded Rectangle 19"/>
+          <p:cNvPr id="22" name="Rounded Rectangle 21"/>
+          <p:cNvSpPr/>
+          <p:nvPr/>
+        </p:nvSpPr>
+        <p:spPr>
+          <a:xfrm>
+            <a:off x="8174735" y="5129783"/>
+            <a:ext cx="3566160" cy="1417320"/>
+          </a:xfrm>
+          <a:prstGeom prst="roundRect">
+            <a:avLst>
+              <a:gd name="adj" fmla="val 5000"/>
+            </a:avLst>
+          </a:prstGeom>
+          <a:solidFill>
+            <a:srgbClr val="E9EBF0"/>
+          </a:solidFill>
+          <a:ln>
+            <a:noFill/>
+          </a:ln>
+        </p:spPr>
+        <p:style>
+          <a:lnRef idx="1">
+            <a:schemeClr val="accent1"/>
+          </a:lnRef>
+          <a:fillRef idx="3">
+            <a:schemeClr val="accent1"/>
+          </a:fillRef>
+          <a:effectRef idx="2">
+            <a:schemeClr val="accent1"/>
+          </a:effectRef>
+          <a:fontRef idx="minor">
+            <a:schemeClr val="lt1"/>
+          </a:fontRef>
+        </p:style>
+        <p:txBody>
+          <a:bodyPr rtlCol="0" anchor="ctr"/>
+          <a:lstStyle/>
+          <a:p>
+            <a:pPr algn="ctr"/>
+          </a:p>
+        </p:txBody>
+      </p:sp>
+      <p:sp>
+        <p:nvSpPr>
+          <p:cNvPr id="23" name="Rounded Rectangle 22"/>
           <p:cNvSpPr/>
           <p:nvPr/>
         </p:nvSpPr>
@@ -6135,7 +6495,7 @@
           </a:xfrm>
           <a:prstGeom prst="roundRect">
             <a:avLst>
-              <a:gd name="adj" fmla="val 6000"/>
+              <a:gd name="adj" fmla="val 5000"/>
             </a:avLst>
           </a:prstGeom>
           <a:solidFill>
@@ -6171,7 +6531,7 @@
       </p:sp>
       <p:sp>
         <p:nvSpPr>
-          <p:cNvPr id="21" name="TextBox 20"/>
+          <p:cNvPr id="24" name="TextBox 23"/>
           <p:cNvSpPr txBox="1"/>
           <p:nvPr/>
         </p:nvSpPr>
@@ -6210,7 +6570,7 @@
       </p:sp>
       <p:sp>
         <p:nvSpPr>
-          <p:cNvPr id="22" name="TextBox 21"/>
+          <p:cNvPr id="25" name="TextBox 24"/>
           <p:cNvSpPr txBox="1"/>
           <p:nvPr/>
         </p:nvSpPr>
@@ -6249,7 +6609,7 @@
       </p:sp>
       <p:sp>
         <p:nvSpPr>
-          <p:cNvPr id="23" name="TextBox 22"/>
+          <p:cNvPr id="26" name="TextBox 25"/>
           <p:cNvSpPr txBox="1"/>
           <p:nvPr/>
         </p:nvSpPr>
@@ -6562,12 +6922,57 @@
         </p:nvSpPr>
         <p:spPr>
           <a:xfrm>
+            <a:off x="676656" y="2569464"/>
+            <a:ext cx="5440680" cy="1554480"/>
+          </a:xfrm>
+          <a:prstGeom prst="roundRect">
+            <a:avLst>
+              <a:gd name="adj" fmla="val 5000"/>
+            </a:avLst>
+          </a:prstGeom>
+          <a:solidFill>
+            <a:srgbClr val="E9EBF0"/>
+          </a:solidFill>
+          <a:ln>
+            <a:noFill/>
+          </a:ln>
+        </p:spPr>
+        <p:style>
+          <a:lnRef idx="1">
+            <a:schemeClr val="accent1"/>
+          </a:lnRef>
+          <a:fillRef idx="3">
+            <a:schemeClr val="accent1"/>
+          </a:fillRef>
+          <a:effectRef idx="2">
+            <a:schemeClr val="accent1"/>
+          </a:effectRef>
+          <a:fontRef idx="minor">
+            <a:schemeClr val="lt1"/>
+          </a:fontRef>
+        </p:style>
+        <p:txBody>
+          <a:bodyPr rtlCol="0" anchor="ctr"/>
+          <a:lstStyle/>
+          <a:p>
+            <a:pPr algn="ctr"/>
+          </a:p>
+        </p:txBody>
+      </p:sp>
+      <p:sp>
+        <p:nvSpPr>
+          <p:cNvPr id="9" name="Rounded Rectangle 8"/>
+          <p:cNvSpPr/>
+          <p:nvPr/>
+        </p:nvSpPr>
+        <p:spPr>
+          <a:xfrm>
             <a:off x="640080" y="2514600"/>
             <a:ext cx="5440680" cy="1554480"/>
           </a:xfrm>
           <a:prstGeom prst="roundRect">
             <a:avLst>
-              <a:gd name="adj" fmla="val 6000"/>
+              <a:gd name="adj" fmla="val 5000"/>
             </a:avLst>
           </a:prstGeom>
           <a:solidFill>
@@ -6603,7 +7008,7 @@
       </p:sp>
       <p:sp>
         <p:nvSpPr>
-          <p:cNvPr id="9" name="TextBox 8"/>
+          <p:cNvPr id="10" name="TextBox 9"/>
           <p:cNvSpPr txBox="1"/>
           <p:nvPr/>
         </p:nvSpPr>
@@ -6642,7 +7047,7 @@
       </p:sp>
       <p:sp>
         <p:nvSpPr>
-          <p:cNvPr id="10" name="TextBox 9"/>
+          <p:cNvPr id="11" name="TextBox 10"/>
           <p:cNvSpPr txBox="1"/>
           <p:nvPr/>
         </p:nvSpPr>
@@ -6681,7 +7086,7 @@
       </p:sp>
       <p:sp>
         <p:nvSpPr>
-          <p:cNvPr id="11" name="TextBox 10"/>
+          <p:cNvPr id="12" name="TextBox 11"/>
           <p:cNvSpPr txBox="1"/>
           <p:nvPr/>
         </p:nvSpPr>
@@ -6720,7 +7125,7 @@
       </p:sp>
       <p:sp>
         <p:nvSpPr>
-          <p:cNvPr id="12" name="TextBox 11"/>
+          <p:cNvPr id="13" name="TextBox 12"/>
           <p:cNvSpPr txBox="1"/>
           <p:nvPr/>
         </p:nvSpPr>
@@ -6759,7 +7164,7 @@
       </p:sp>
       <p:pic>
         <p:nvPicPr>
-          <p:cNvPr id="13" name="Picture 12" descr="f_framing.png"/>
+          <p:cNvPr id="14" name="Picture 13" descr="f_framing.png"/>
           <p:cNvPicPr>
             <a:picLocks noChangeAspect="1"/>
           </p:cNvPicPr>
@@ -6783,7 +7188,7 @@
       </p:pic>
       <p:sp>
         <p:nvSpPr>
-          <p:cNvPr id="14" name="TextBox 13"/>
+          <p:cNvPr id="15" name="TextBox 14"/>
           <p:cNvSpPr txBox="1"/>
           <p:nvPr/>
         </p:nvSpPr>
@@ -6822,7 +7227,7 @@
       </p:sp>
       <p:sp>
         <p:nvSpPr>
-          <p:cNvPr id="15" name="TextBox 14"/>
+          <p:cNvPr id="16" name="TextBox 15"/>
           <p:cNvSpPr txBox="1"/>
           <p:nvPr/>
         </p:nvSpPr>
@@ -6861,7 +7266,7 @@
       </p:sp>
       <p:sp>
         <p:nvSpPr>
-          <p:cNvPr id="16" name="TextBox 15"/>
+          <p:cNvPr id="17" name="TextBox 16"/>
           <p:cNvSpPr txBox="1"/>
           <p:nvPr/>
         </p:nvSpPr>
@@ -6900,7 +7305,52 @@
       </p:sp>
       <p:sp>
         <p:nvSpPr>
-          <p:cNvPr id="17" name="Rounded Rectangle 16"/>
+          <p:cNvPr id="18" name="Rounded Rectangle 17"/>
+          <p:cNvSpPr/>
+          <p:nvPr/>
+        </p:nvSpPr>
+        <p:spPr>
+          <a:xfrm>
+            <a:off x="6300216" y="2569464"/>
+            <a:ext cx="5257800" cy="4160520"/>
+          </a:xfrm>
+          <a:prstGeom prst="roundRect">
+            <a:avLst>
+              <a:gd name="adj" fmla="val 5000"/>
+            </a:avLst>
+          </a:prstGeom>
+          <a:solidFill>
+            <a:srgbClr val="E9EBF0"/>
+          </a:solidFill>
+          <a:ln>
+            <a:noFill/>
+          </a:ln>
+        </p:spPr>
+        <p:style>
+          <a:lnRef idx="1">
+            <a:schemeClr val="accent1"/>
+          </a:lnRef>
+          <a:fillRef idx="3">
+            <a:schemeClr val="accent1"/>
+          </a:fillRef>
+          <a:effectRef idx="2">
+            <a:schemeClr val="accent1"/>
+          </a:effectRef>
+          <a:fontRef idx="minor">
+            <a:schemeClr val="lt1"/>
+          </a:fontRef>
+        </p:style>
+        <p:txBody>
+          <a:bodyPr rtlCol="0" anchor="ctr"/>
+          <a:lstStyle/>
+          <a:p>
+            <a:pPr algn="ctr"/>
+          </a:p>
+        </p:txBody>
+      </p:sp>
+      <p:sp>
+        <p:nvSpPr>
+          <p:cNvPr id="19" name="Rounded Rectangle 18"/>
           <p:cNvSpPr/>
           <p:nvPr/>
         </p:nvSpPr>
@@ -6911,7 +7361,7 @@
           </a:xfrm>
           <a:prstGeom prst="roundRect">
             <a:avLst>
-              <a:gd name="adj" fmla="val 6000"/>
+              <a:gd name="adj" fmla="val 5000"/>
             </a:avLst>
           </a:prstGeom>
           <a:solidFill>
@@ -6947,7 +7397,7 @@
       </p:sp>
       <p:sp>
         <p:nvSpPr>
-          <p:cNvPr id="18" name="TextBox 17"/>
+          <p:cNvPr id="20" name="TextBox 19"/>
           <p:cNvSpPr txBox="1"/>
           <p:nvPr/>
         </p:nvSpPr>
@@ -6986,7 +7436,7 @@
       </p:sp>
       <p:sp>
         <p:nvSpPr>
-          <p:cNvPr id="19" name="TextBox 18"/>
+          <p:cNvPr id="21" name="TextBox 20"/>
           <p:cNvSpPr txBox="1"/>
           <p:nvPr/>
         </p:nvSpPr>
@@ -7025,7 +7475,7 @@
       </p:sp>
       <p:sp>
         <p:nvSpPr>
-          <p:cNvPr id="20" name="TextBox 19"/>
+          <p:cNvPr id="22" name="TextBox 21"/>
           <p:cNvSpPr txBox="1"/>
           <p:nvPr/>
         </p:nvSpPr>
@@ -7096,7 +7546,7 @@
       </p:sp>
       <p:cxnSp>
         <p:nvCxnSpPr>
-          <p:cNvPr id="21" name="Connector 20"/>
+          <p:cNvPr id="23" name="Connector 22"/>
           <p:cNvCxnSpPr/>
           <p:nvPr/>
         </p:nvCxnSpPr>
@@ -7131,7 +7581,7 @@
       </p:cxnSp>
       <p:sp>
         <p:nvSpPr>
-          <p:cNvPr id="22" name="TextBox 21"/>
+          <p:cNvPr id="24" name="TextBox 23"/>
           <p:cNvSpPr txBox="1"/>
           <p:nvPr/>
         </p:nvSpPr>
@@ -7170,7 +7620,7 @@
       </p:sp>
       <p:sp>
         <p:nvSpPr>
-          <p:cNvPr id="23" name="TextBox 22"/>
+          <p:cNvPr id="25" name="TextBox 24"/>
           <p:cNvSpPr txBox="1"/>
           <p:nvPr/>
         </p:nvSpPr>
@@ -7209,7 +7659,7 @@
       </p:sp>
       <p:sp>
         <p:nvSpPr>
-          <p:cNvPr id="24" name="TextBox 23"/>
+          <p:cNvPr id="26" name="TextBox 25"/>
           <p:cNvSpPr txBox="1"/>
           <p:nvPr/>
         </p:nvSpPr>
@@ -8573,12 +9023,57 @@
         </p:nvSpPr>
         <p:spPr>
           <a:xfrm>
+            <a:off x="676656" y="2157984"/>
+            <a:ext cx="10881360" cy="960120"/>
+          </a:xfrm>
+          <a:prstGeom prst="roundRect">
+            <a:avLst>
+              <a:gd name="adj" fmla="val 5000"/>
+            </a:avLst>
+          </a:prstGeom>
+          <a:solidFill>
+            <a:srgbClr val="E9EBF0"/>
+          </a:solidFill>
+          <a:ln>
+            <a:noFill/>
+          </a:ln>
+        </p:spPr>
+        <p:style>
+          <a:lnRef idx="1">
+            <a:schemeClr val="accent1"/>
+          </a:lnRef>
+          <a:fillRef idx="3">
+            <a:schemeClr val="accent1"/>
+          </a:fillRef>
+          <a:effectRef idx="2">
+            <a:schemeClr val="accent1"/>
+          </a:effectRef>
+          <a:fontRef idx="minor">
+            <a:schemeClr val="lt1"/>
+          </a:fontRef>
+        </p:style>
+        <p:txBody>
+          <a:bodyPr rtlCol="0" anchor="ctr"/>
+          <a:lstStyle/>
+          <a:p>
+            <a:pPr algn="ctr"/>
+          </a:p>
+        </p:txBody>
+      </p:sp>
+      <p:sp>
+        <p:nvSpPr>
+          <p:cNvPr id="8" name="Rounded Rectangle 7"/>
+          <p:cNvSpPr/>
+          <p:nvPr/>
+        </p:nvSpPr>
+        <p:spPr>
+          <a:xfrm>
             <a:off x="640080" y="2103120"/>
             <a:ext cx="10881360" cy="960120"/>
           </a:xfrm>
           <a:prstGeom prst="roundRect">
             <a:avLst>
-              <a:gd name="adj" fmla="val 6000"/>
+              <a:gd name="adj" fmla="val 5000"/>
             </a:avLst>
           </a:prstGeom>
           <a:solidFill>
@@ -8614,7 +9109,7 @@
       </p:sp>
       <p:sp>
         <p:nvSpPr>
-          <p:cNvPr id="8" name="Rounded Rectangle 7"/>
+          <p:cNvPr id="9" name="Rounded Rectangle 8"/>
           <p:cNvSpPr/>
           <p:nvPr/>
         </p:nvSpPr>
@@ -8659,7 +9154,7 @@
       </p:sp>
       <p:sp>
         <p:nvSpPr>
-          <p:cNvPr id="9" name="TextBox 8"/>
+          <p:cNvPr id="10" name="TextBox 9"/>
           <p:cNvSpPr txBox="1"/>
           <p:nvPr/>
         </p:nvSpPr>
@@ -8694,7 +9189,7 @@
       </p:sp>
       <p:sp>
         <p:nvSpPr>
-          <p:cNvPr id="10" name="TextBox 9"/>
+          <p:cNvPr id="11" name="TextBox 10"/>
           <p:cNvSpPr txBox="1"/>
           <p:nvPr/>
         </p:nvSpPr>
@@ -8733,7 +9228,7 @@
       </p:sp>
       <p:sp>
         <p:nvSpPr>
-          <p:cNvPr id="11" name="TextBox 10"/>
+          <p:cNvPr id="12" name="TextBox 11"/>
           <p:cNvSpPr txBox="1"/>
           <p:nvPr/>
         </p:nvSpPr>
@@ -8772,7 +9267,7 @@
       </p:sp>
       <p:sp>
         <p:nvSpPr>
-          <p:cNvPr id="12" name="TextBox 11"/>
+          <p:cNvPr id="13" name="TextBox 12"/>
           <p:cNvSpPr txBox="1"/>
           <p:nvPr/>
         </p:nvSpPr>
@@ -8811,7 +9306,52 @@
       </p:sp>
       <p:sp>
         <p:nvSpPr>
-          <p:cNvPr id="13" name="Rounded Rectangle 12"/>
+          <p:cNvPr id="14" name="Rounded Rectangle 13"/>
+          <p:cNvSpPr/>
+          <p:nvPr/>
+        </p:nvSpPr>
+        <p:spPr>
+          <a:xfrm>
+            <a:off x="676656" y="3236975"/>
+            <a:ext cx="10881360" cy="960120"/>
+          </a:xfrm>
+          <a:prstGeom prst="roundRect">
+            <a:avLst>
+              <a:gd name="adj" fmla="val 5000"/>
+            </a:avLst>
+          </a:prstGeom>
+          <a:solidFill>
+            <a:srgbClr val="E9EBF0"/>
+          </a:solidFill>
+          <a:ln>
+            <a:noFill/>
+          </a:ln>
+        </p:spPr>
+        <p:style>
+          <a:lnRef idx="1">
+            <a:schemeClr val="accent1"/>
+          </a:lnRef>
+          <a:fillRef idx="3">
+            <a:schemeClr val="accent1"/>
+          </a:fillRef>
+          <a:effectRef idx="2">
+            <a:schemeClr val="accent1"/>
+          </a:effectRef>
+          <a:fontRef idx="minor">
+            <a:schemeClr val="lt1"/>
+          </a:fontRef>
+        </p:style>
+        <p:txBody>
+          <a:bodyPr rtlCol="0" anchor="ctr"/>
+          <a:lstStyle/>
+          <a:p>
+            <a:pPr algn="ctr"/>
+          </a:p>
+        </p:txBody>
+      </p:sp>
+      <p:sp>
+        <p:nvSpPr>
+          <p:cNvPr id="15" name="Rounded Rectangle 14"/>
           <p:cNvSpPr/>
           <p:nvPr/>
         </p:nvSpPr>
@@ -8822,7 +9362,7 @@
           </a:xfrm>
           <a:prstGeom prst="roundRect">
             <a:avLst>
-              <a:gd name="adj" fmla="val 6000"/>
+              <a:gd name="adj" fmla="val 5000"/>
             </a:avLst>
           </a:prstGeom>
           <a:solidFill>
@@ -8858,7 +9398,7 @@
       </p:sp>
       <p:sp>
         <p:nvSpPr>
-          <p:cNvPr id="14" name="Rounded Rectangle 13"/>
+          <p:cNvPr id="16" name="Rounded Rectangle 15"/>
           <p:cNvSpPr/>
           <p:nvPr/>
         </p:nvSpPr>
@@ -8903,7 +9443,7 @@
       </p:sp>
       <p:sp>
         <p:nvSpPr>
-          <p:cNvPr id="15" name="TextBox 14"/>
+          <p:cNvPr id="17" name="TextBox 16"/>
           <p:cNvSpPr txBox="1"/>
           <p:nvPr/>
         </p:nvSpPr>
@@ -8938,7 +9478,7 @@
       </p:sp>
       <p:sp>
         <p:nvSpPr>
-          <p:cNvPr id="16" name="TextBox 15"/>
+          <p:cNvPr id="18" name="TextBox 17"/>
           <p:cNvSpPr txBox="1"/>
           <p:nvPr/>
         </p:nvSpPr>
@@ -8977,7 +9517,7 @@
       </p:sp>
       <p:sp>
         <p:nvSpPr>
-          <p:cNvPr id="17" name="TextBox 16"/>
+          <p:cNvPr id="19" name="TextBox 18"/>
           <p:cNvSpPr txBox="1"/>
           <p:nvPr/>
         </p:nvSpPr>
@@ -9016,7 +9556,7 @@
       </p:sp>
       <p:sp>
         <p:nvSpPr>
-          <p:cNvPr id="18" name="TextBox 17"/>
+          <p:cNvPr id="20" name="TextBox 19"/>
           <p:cNvSpPr txBox="1"/>
           <p:nvPr/>
         </p:nvSpPr>
@@ -9055,7 +9595,52 @@
       </p:sp>
       <p:sp>
         <p:nvSpPr>
-          <p:cNvPr id="19" name="Rounded Rectangle 18"/>
+          <p:cNvPr id="21" name="Rounded Rectangle 20"/>
+          <p:cNvSpPr/>
+          <p:nvPr/>
+        </p:nvSpPr>
+        <p:spPr>
+          <a:xfrm>
+            <a:off x="676656" y="4315968"/>
+            <a:ext cx="10881360" cy="960120"/>
+          </a:xfrm>
+          <a:prstGeom prst="roundRect">
+            <a:avLst>
+              <a:gd name="adj" fmla="val 5000"/>
+            </a:avLst>
+          </a:prstGeom>
+          <a:solidFill>
+            <a:srgbClr val="E9EBF0"/>
+          </a:solidFill>
+          <a:ln>
+            <a:noFill/>
+          </a:ln>
+        </p:spPr>
+        <p:style>
+          <a:lnRef idx="1">
+            <a:schemeClr val="accent1"/>
+          </a:lnRef>
+          <a:fillRef idx="3">
+            <a:schemeClr val="accent1"/>
+          </a:fillRef>
+          <a:effectRef idx="2">
+            <a:schemeClr val="accent1"/>
+          </a:effectRef>
+          <a:fontRef idx="minor">
+            <a:schemeClr val="lt1"/>
+          </a:fontRef>
+        </p:style>
+        <p:txBody>
+          <a:bodyPr rtlCol="0" anchor="ctr"/>
+          <a:lstStyle/>
+          <a:p>
+            <a:pPr algn="ctr"/>
+          </a:p>
+        </p:txBody>
+      </p:sp>
+      <p:sp>
+        <p:nvSpPr>
+          <p:cNvPr id="22" name="Rounded Rectangle 21"/>
           <p:cNvSpPr/>
           <p:nvPr/>
         </p:nvSpPr>
@@ -9066,7 +9651,7 @@
           </a:xfrm>
           <a:prstGeom prst="roundRect">
             <a:avLst>
-              <a:gd name="adj" fmla="val 6000"/>
+              <a:gd name="adj" fmla="val 5000"/>
             </a:avLst>
           </a:prstGeom>
           <a:solidFill>
@@ -9102,7 +9687,7 @@
       </p:sp>
       <p:sp>
         <p:nvSpPr>
-          <p:cNvPr id="20" name="Rounded Rectangle 19"/>
+          <p:cNvPr id="23" name="Rounded Rectangle 22"/>
           <p:cNvSpPr/>
           <p:nvPr/>
         </p:nvSpPr>
@@ -9147,7 +9732,7 @@
       </p:sp>
       <p:sp>
         <p:nvSpPr>
-          <p:cNvPr id="21" name="TextBox 20"/>
+          <p:cNvPr id="24" name="TextBox 23"/>
           <p:cNvSpPr txBox="1"/>
           <p:nvPr/>
         </p:nvSpPr>
@@ -9182,7 +9767,7 @@
       </p:sp>
       <p:sp>
         <p:nvSpPr>
-          <p:cNvPr id="22" name="TextBox 21"/>
+          <p:cNvPr id="25" name="TextBox 24"/>
           <p:cNvSpPr txBox="1"/>
           <p:nvPr/>
         </p:nvSpPr>
@@ -9221,7 +9806,7 @@
       </p:sp>
       <p:sp>
         <p:nvSpPr>
-          <p:cNvPr id="23" name="TextBox 22"/>
+          <p:cNvPr id="26" name="TextBox 25"/>
           <p:cNvSpPr txBox="1"/>
           <p:nvPr/>
         </p:nvSpPr>
@@ -9260,7 +9845,7 @@
       </p:sp>
       <p:sp>
         <p:nvSpPr>
-          <p:cNvPr id="24" name="TextBox 23"/>
+          <p:cNvPr id="27" name="TextBox 26"/>
           <p:cNvSpPr txBox="1"/>
           <p:nvPr/>
         </p:nvSpPr>
@@ -9299,7 +9884,52 @@
       </p:sp>
       <p:sp>
         <p:nvSpPr>
-          <p:cNvPr id="25" name="Rounded Rectangle 24"/>
+          <p:cNvPr id="28" name="Rounded Rectangle 27"/>
+          <p:cNvSpPr/>
+          <p:nvPr/>
+        </p:nvSpPr>
+        <p:spPr>
+          <a:xfrm>
+            <a:off x="676656" y="5394959"/>
+            <a:ext cx="10881360" cy="960120"/>
+          </a:xfrm>
+          <a:prstGeom prst="roundRect">
+            <a:avLst>
+              <a:gd name="adj" fmla="val 5000"/>
+            </a:avLst>
+          </a:prstGeom>
+          <a:solidFill>
+            <a:srgbClr val="E9EBF0"/>
+          </a:solidFill>
+          <a:ln>
+            <a:noFill/>
+          </a:ln>
+        </p:spPr>
+        <p:style>
+          <a:lnRef idx="1">
+            <a:schemeClr val="accent1"/>
+          </a:lnRef>
+          <a:fillRef idx="3">
+            <a:schemeClr val="accent1"/>
+          </a:fillRef>
+          <a:effectRef idx="2">
+            <a:schemeClr val="accent1"/>
+          </a:effectRef>
+          <a:fontRef idx="minor">
+            <a:schemeClr val="lt1"/>
+          </a:fontRef>
+        </p:style>
+        <p:txBody>
+          <a:bodyPr rtlCol="0" anchor="ctr"/>
+          <a:lstStyle/>
+          <a:p>
+            <a:pPr algn="ctr"/>
+          </a:p>
+        </p:txBody>
+      </p:sp>
+      <p:sp>
+        <p:nvSpPr>
+          <p:cNvPr id="29" name="Rounded Rectangle 28"/>
           <p:cNvSpPr/>
           <p:nvPr/>
         </p:nvSpPr>
@@ -9310,7 +9940,7 @@
           </a:xfrm>
           <a:prstGeom prst="roundRect">
             <a:avLst>
-              <a:gd name="adj" fmla="val 6000"/>
+              <a:gd name="adj" fmla="val 5000"/>
             </a:avLst>
           </a:prstGeom>
           <a:solidFill>
@@ -9346,7 +9976,7 @@
       </p:sp>
       <p:sp>
         <p:nvSpPr>
-          <p:cNvPr id="26" name="Rounded Rectangle 25"/>
+          <p:cNvPr id="30" name="Rounded Rectangle 29"/>
           <p:cNvSpPr/>
           <p:nvPr/>
         </p:nvSpPr>
@@ -9391,7 +10021,7 @@
       </p:sp>
       <p:sp>
         <p:nvSpPr>
-          <p:cNvPr id="27" name="TextBox 26"/>
+          <p:cNvPr id="31" name="TextBox 30"/>
           <p:cNvSpPr txBox="1"/>
           <p:nvPr/>
         </p:nvSpPr>
@@ -9426,7 +10056,7 @@
       </p:sp>
       <p:sp>
         <p:nvSpPr>
-          <p:cNvPr id="28" name="TextBox 27"/>
+          <p:cNvPr id="32" name="TextBox 31"/>
           <p:cNvSpPr txBox="1"/>
           <p:nvPr/>
         </p:nvSpPr>
@@ -9465,7 +10095,7 @@
       </p:sp>
       <p:sp>
         <p:nvSpPr>
-          <p:cNvPr id="29" name="TextBox 28"/>
+          <p:cNvPr id="33" name="TextBox 32"/>
           <p:cNvSpPr txBox="1"/>
           <p:nvPr/>
         </p:nvSpPr>
@@ -9504,7 +10134,7 @@
       </p:sp>
       <p:sp>
         <p:nvSpPr>
-          <p:cNvPr id="30" name="TextBox 29"/>
+          <p:cNvPr id="34" name="TextBox 33"/>
           <p:cNvSpPr txBox="1"/>
           <p:nvPr/>
         </p:nvSpPr>
@@ -10796,12 +11426,57 @@
         </p:nvSpPr>
         <p:spPr>
           <a:xfrm>
+            <a:off x="813816" y="2798064"/>
+            <a:ext cx="5303520" cy="3200400"/>
+          </a:xfrm>
+          <a:prstGeom prst="roundRect">
+            <a:avLst>
+              <a:gd name="adj" fmla="val 5000"/>
+            </a:avLst>
+          </a:prstGeom>
+          <a:solidFill>
+            <a:srgbClr val="E9EBF0"/>
+          </a:solidFill>
+          <a:ln>
+            <a:noFill/>
+          </a:ln>
+        </p:spPr>
+        <p:style>
+          <a:lnRef idx="1">
+            <a:schemeClr val="accent1"/>
+          </a:lnRef>
+          <a:fillRef idx="3">
+            <a:schemeClr val="accent1"/>
+          </a:fillRef>
+          <a:effectRef idx="2">
+            <a:schemeClr val="accent1"/>
+          </a:effectRef>
+          <a:fontRef idx="minor">
+            <a:schemeClr val="lt1"/>
+          </a:fontRef>
+        </p:style>
+        <p:txBody>
+          <a:bodyPr rtlCol="0" anchor="ctr"/>
+          <a:lstStyle/>
+          <a:p>
+            <a:pPr algn="ctr"/>
+          </a:p>
+        </p:txBody>
+      </p:sp>
+      <p:sp>
+        <p:nvSpPr>
+          <p:cNvPr id="10" name="Rounded Rectangle 9"/>
+          <p:cNvSpPr/>
+          <p:nvPr/>
+        </p:nvSpPr>
+        <p:spPr>
+          <a:xfrm>
             <a:off x="777240" y="2743200"/>
             <a:ext cx="5303520" cy="3200400"/>
           </a:xfrm>
           <a:prstGeom prst="roundRect">
             <a:avLst>
-              <a:gd name="adj" fmla="val 6000"/>
+              <a:gd name="adj" fmla="val 5000"/>
             </a:avLst>
           </a:prstGeom>
           <a:solidFill>
@@ -10837,7 +11512,7 @@
       </p:sp>
       <p:sp>
         <p:nvSpPr>
-          <p:cNvPr id="10" name="TextBox 9"/>
+          <p:cNvPr id="11" name="TextBox 10"/>
           <p:cNvSpPr txBox="1"/>
           <p:nvPr/>
         </p:nvSpPr>
@@ -10876,7 +11551,7 @@
       </p:sp>
       <p:sp>
         <p:nvSpPr>
-          <p:cNvPr id="11" name="TextBox 10"/>
+          <p:cNvPr id="12" name="TextBox 11"/>
           <p:cNvSpPr txBox="1"/>
           <p:nvPr/>
         </p:nvSpPr>
@@ -10931,7 +11606,7 @@
       </p:sp>
       <p:sp>
         <p:nvSpPr>
-          <p:cNvPr id="12" name="TextBox 11"/>
+          <p:cNvPr id="13" name="TextBox 12"/>
           <p:cNvSpPr txBox="1"/>
           <p:nvPr/>
         </p:nvSpPr>
@@ -10970,7 +11645,7 @@
       </p:sp>
       <p:sp>
         <p:nvSpPr>
-          <p:cNvPr id="13" name="TextBox 12"/>
+          <p:cNvPr id="14" name="TextBox 13"/>
           <p:cNvSpPr txBox="1"/>
           <p:nvPr/>
         </p:nvSpPr>
@@ -11009,7 +11684,7 @@
       </p:sp>
       <p:sp>
         <p:nvSpPr>
-          <p:cNvPr id="14" name="TextBox 13"/>
+          <p:cNvPr id="15" name="TextBox 14"/>
           <p:cNvSpPr txBox="1"/>
           <p:nvPr/>
         </p:nvSpPr>
@@ -11048,7 +11723,7 @@
       </p:sp>
       <p:sp>
         <p:nvSpPr>
-          <p:cNvPr id="15" name="TextBox 14"/>
+          <p:cNvPr id="16" name="TextBox 15"/>
           <p:cNvSpPr txBox="1"/>
           <p:nvPr/>
         </p:nvSpPr>
@@ -11087,7 +11762,7 @@
       </p:sp>
       <p:sp>
         <p:nvSpPr>
-          <p:cNvPr id="16" name="Rectangle 15"/>
+          <p:cNvPr id="17" name="Rectangle 16"/>
           <p:cNvSpPr/>
           <p:nvPr/>
         </p:nvSpPr>
@@ -11130,7 +11805,52 @@
       </p:sp>
       <p:sp>
         <p:nvSpPr>
-          <p:cNvPr id="17" name="Rounded Rectangle 16"/>
+          <p:cNvPr id="18" name="Rounded Rectangle 17"/>
+          <p:cNvSpPr/>
+          <p:nvPr/>
+        </p:nvSpPr>
+        <p:spPr>
+          <a:xfrm>
+            <a:off x="6437376" y="2798064"/>
+            <a:ext cx="5120640" cy="3200400"/>
+          </a:xfrm>
+          <a:prstGeom prst="roundRect">
+            <a:avLst>
+              <a:gd name="adj" fmla="val 5000"/>
+            </a:avLst>
+          </a:prstGeom>
+          <a:solidFill>
+            <a:srgbClr val="E9EBF0"/>
+          </a:solidFill>
+          <a:ln>
+            <a:noFill/>
+          </a:ln>
+        </p:spPr>
+        <p:style>
+          <a:lnRef idx="1">
+            <a:schemeClr val="accent1"/>
+          </a:lnRef>
+          <a:fillRef idx="3">
+            <a:schemeClr val="accent1"/>
+          </a:fillRef>
+          <a:effectRef idx="2">
+            <a:schemeClr val="accent1"/>
+          </a:effectRef>
+          <a:fontRef idx="minor">
+            <a:schemeClr val="lt1"/>
+          </a:fontRef>
+        </p:style>
+        <p:txBody>
+          <a:bodyPr rtlCol="0" anchor="ctr"/>
+          <a:lstStyle/>
+          <a:p>
+            <a:pPr algn="ctr"/>
+          </a:p>
+        </p:txBody>
+      </p:sp>
+      <p:sp>
+        <p:nvSpPr>
+          <p:cNvPr id="19" name="Rounded Rectangle 18"/>
           <p:cNvSpPr/>
           <p:nvPr/>
         </p:nvSpPr>
@@ -11141,7 +11861,7 @@
           </a:xfrm>
           <a:prstGeom prst="roundRect">
             <a:avLst>
-              <a:gd name="adj" fmla="val 6000"/>
+              <a:gd name="adj" fmla="val 5000"/>
             </a:avLst>
           </a:prstGeom>
           <a:solidFill>
@@ -11177,7 +11897,7 @@
       </p:sp>
       <p:sp>
         <p:nvSpPr>
-          <p:cNvPr id="18" name="TextBox 17"/>
+          <p:cNvPr id="20" name="TextBox 19"/>
           <p:cNvSpPr txBox="1"/>
           <p:nvPr/>
         </p:nvSpPr>
@@ -11216,7 +11936,7 @@
       </p:sp>
       <p:sp>
         <p:nvSpPr>
-          <p:cNvPr id="19" name="TextBox 18"/>
+          <p:cNvPr id="21" name="TextBox 20"/>
           <p:cNvSpPr txBox="1"/>
           <p:nvPr/>
         </p:nvSpPr>
@@ -11271,7 +11991,7 @@
       </p:sp>
       <p:sp>
         <p:nvSpPr>
-          <p:cNvPr id="20" name="TextBox 19"/>
+          <p:cNvPr id="22" name="TextBox 21"/>
           <p:cNvSpPr txBox="1"/>
           <p:nvPr/>
         </p:nvSpPr>
@@ -11310,7 +12030,7 @@
       </p:sp>
       <p:sp>
         <p:nvSpPr>
-          <p:cNvPr id="21" name="TextBox 20"/>
+          <p:cNvPr id="23" name="TextBox 22"/>
           <p:cNvSpPr txBox="1"/>
           <p:nvPr/>
         </p:nvSpPr>
@@ -11349,7 +12069,7 @@
       </p:sp>
       <p:sp>
         <p:nvSpPr>
-          <p:cNvPr id="22" name="TextBox 21"/>
+          <p:cNvPr id="24" name="TextBox 23"/>
           <p:cNvSpPr txBox="1"/>
           <p:nvPr/>
         </p:nvSpPr>
@@ -11388,7 +12108,7 @@
       </p:sp>
       <p:sp>
         <p:nvSpPr>
-          <p:cNvPr id="23" name="TextBox 22"/>
+          <p:cNvPr id="25" name="TextBox 24"/>
           <p:cNvSpPr txBox="1"/>
           <p:nvPr/>
         </p:nvSpPr>
@@ -11427,7 +12147,7 @@
       </p:sp>
       <p:sp>
         <p:nvSpPr>
-          <p:cNvPr id="24" name="TextBox 23"/>
+          <p:cNvPr id="26" name="TextBox 25"/>
           <p:cNvSpPr txBox="1"/>
           <p:nvPr/>
         </p:nvSpPr>
@@ -11724,12 +12444,57 @@
         </p:nvSpPr>
         <p:spPr>
           <a:xfrm>
+            <a:off x="676656" y="2798064"/>
+            <a:ext cx="3502152" cy="1554480"/>
+          </a:xfrm>
+          <a:prstGeom prst="roundRect">
+            <a:avLst>
+              <a:gd name="adj" fmla="val 5000"/>
+            </a:avLst>
+          </a:prstGeom>
+          <a:solidFill>
+            <a:srgbClr val="E9EBF0"/>
+          </a:solidFill>
+          <a:ln>
+            <a:noFill/>
+          </a:ln>
+        </p:spPr>
+        <p:style>
+          <a:lnRef idx="1">
+            <a:schemeClr val="accent1"/>
+          </a:lnRef>
+          <a:fillRef idx="3">
+            <a:schemeClr val="accent1"/>
+          </a:fillRef>
+          <a:effectRef idx="2">
+            <a:schemeClr val="accent1"/>
+          </a:effectRef>
+          <a:fontRef idx="minor">
+            <a:schemeClr val="lt1"/>
+          </a:fontRef>
+        </p:style>
+        <p:txBody>
+          <a:bodyPr rtlCol="0" anchor="ctr"/>
+          <a:lstStyle/>
+          <a:p>
+            <a:pPr algn="ctr"/>
+          </a:p>
+        </p:txBody>
+      </p:sp>
+      <p:sp>
+        <p:nvSpPr>
+          <p:cNvPr id="9" name="Rounded Rectangle 8"/>
+          <p:cNvSpPr/>
+          <p:nvPr/>
+        </p:nvSpPr>
+        <p:spPr>
+          <a:xfrm>
             <a:off x="640080" y="2743200"/>
             <a:ext cx="3502152" cy="1554480"/>
           </a:xfrm>
           <a:prstGeom prst="roundRect">
             <a:avLst>
-              <a:gd name="adj" fmla="val 6000"/>
+              <a:gd name="adj" fmla="val 5000"/>
             </a:avLst>
           </a:prstGeom>
           <a:solidFill>
@@ -11765,7 +12530,7 @@
       </p:sp>
       <p:sp>
         <p:nvSpPr>
-          <p:cNvPr id="9" name="TextBox 8"/>
+          <p:cNvPr id="10" name="TextBox 9"/>
           <p:cNvSpPr txBox="1"/>
           <p:nvPr/>
         </p:nvSpPr>
@@ -11804,7 +12569,7 @@
       </p:sp>
       <p:sp>
         <p:nvSpPr>
-          <p:cNvPr id="10" name="TextBox 9"/>
+          <p:cNvPr id="11" name="TextBox 10"/>
           <p:cNvSpPr txBox="1"/>
           <p:nvPr/>
         </p:nvSpPr>
@@ -11843,7 +12608,7 @@
       </p:sp>
       <p:sp>
         <p:nvSpPr>
-          <p:cNvPr id="11" name="TextBox 10"/>
+          <p:cNvPr id="12" name="TextBox 11"/>
           <p:cNvSpPr txBox="1"/>
           <p:nvPr/>
         </p:nvSpPr>
@@ -11882,7 +12647,52 @@
       </p:sp>
       <p:sp>
         <p:nvSpPr>
-          <p:cNvPr id="12" name="Rounded Rectangle 11"/>
+          <p:cNvPr id="13" name="Rounded Rectangle 12"/>
+          <p:cNvSpPr/>
+          <p:nvPr/>
+        </p:nvSpPr>
+        <p:spPr>
+          <a:xfrm>
+            <a:off x="4471416" y="2798064"/>
+            <a:ext cx="3502152" cy="1554480"/>
+          </a:xfrm>
+          <a:prstGeom prst="roundRect">
+            <a:avLst>
+              <a:gd name="adj" fmla="val 5000"/>
+            </a:avLst>
+          </a:prstGeom>
+          <a:solidFill>
+            <a:srgbClr val="E9EBF0"/>
+          </a:solidFill>
+          <a:ln>
+            <a:noFill/>
+          </a:ln>
+        </p:spPr>
+        <p:style>
+          <a:lnRef idx="1">
+            <a:schemeClr val="accent1"/>
+          </a:lnRef>
+          <a:fillRef idx="3">
+            <a:schemeClr val="accent1"/>
+          </a:fillRef>
+          <a:effectRef idx="2">
+            <a:schemeClr val="accent1"/>
+          </a:effectRef>
+          <a:fontRef idx="minor">
+            <a:schemeClr val="lt1"/>
+          </a:fontRef>
+        </p:style>
+        <p:txBody>
+          <a:bodyPr rtlCol="0" anchor="ctr"/>
+          <a:lstStyle/>
+          <a:p>
+            <a:pPr algn="ctr"/>
+          </a:p>
+        </p:txBody>
+      </p:sp>
+      <p:sp>
+        <p:nvSpPr>
+          <p:cNvPr id="14" name="Rounded Rectangle 13"/>
           <p:cNvSpPr/>
           <p:nvPr/>
         </p:nvSpPr>
@@ -11893,7 +12703,7 @@
           </a:xfrm>
           <a:prstGeom prst="roundRect">
             <a:avLst>
-              <a:gd name="adj" fmla="val 6000"/>
+              <a:gd name="adj" fmla="val 5000"/>
             </a:avLst>
           </a:prstGeom>
           <a:solidFill>
@@ -11929,7 +12739,7 @@
       </p:sp>
       <p:sp>
         <p:nvSpPr>
-          <p:cNvPr id="13" name="TextBox 12"/>
+          <p:cNvPr id="15" name="TextBox 14"/>
           <p:cNvSpPr txBox="1"/>
           <p:nvPr/>
         </p:nvSpPr>
@@ -11968,7 +12778,7 @@
       </p:sp>
       <p:sp>
         <p:nvSpPr>
-          <p:cNvPr id="14" name="TextBox 13"/>
+          <p:cNvPr id="16" name="TextBox 15"/>
           <p:cNvSpPr txBox="1"/>
           <p:nvPr/>
         </p:nvSpPr>
@@ -12007,7 +12817,7 @@
       </p:sp>
       <p:sp>
         <p:nvSpPr>
-          <p:cNvPr id="15" name="TextBox 14"/>
+          <p:cNvPr id="17" name="TextBox 16"/>
           <p:cNvSpPr txBox="1"/>
           <p:nvPr/>
         </p:nvSpPr>
@@ -12046,7 +12856,52 @@
       </p:sp>
       <p:sp>
         <p:nvSpPr>
-          <p:cNvPr id="16" name="Rounded Rectangle 15"/>
+          <p:cNvPr id="18" name="Rounded Rectangle 17"/>
+          <p:cNvSpPr/>
+          <p:nvPr/>
+        </p:nvSpPr>
+        <p:spPr>
+          <a:xfrm>
+            <a:off x="8266175" y="2798064"/>
+            <a:ext cx="3502152" cy="1554480"/>
+          </a:xfrm>
+          <a:prstGeom prst="roundRect">
+            <a:avLst>
+              <a:gd name="adj" fmla="val 5000"/>
+            </a:avLst>
+          </a:prstGeom>
+          <a:solidFill>
+            <a:srgbClr val="E9EBF0"/>
+          </a:solidFill>
+          <a:ln>
+            <a:noFill/>
+          </a:ln>
+        </p:spPr>
+        <p:style>
+          <a:lnRef idx="1">
+            <a:schemeClr val="accent1"/>
+          </a:lnRef>
+          <a:fillRef idx="3">
+            <a:schemeClr val="accent1"/>
+          </a:fillRef>
+          <a:effectRef idx="2">
+            <a:schemeClr val="accent1"/>
+          </a:effectRef>
+          <a:fontRef idx="minor">
+            <a:schemeClr val="lt1"/>
+          </a:fontRef>
+        </p:style>
+        <p:txBody>
+          <a:bodyPr rtlCol="0" anchor="ctr"/>
+          <a:lstStyle/>
+          <a:p>
+            <a:pPr algn="ctr"/>
+          </a:p>
+        </p:txBody>
+      </p:sp>
+      <p:sp>
+        <p:nvSpPr>
+          <p:cNvPr id="19" name="Rounded Rectangle 18"/>
           <p:cNvSpPr/>
           <p:nvPr/>
         </p:nvSpPr>
@@ -12057,7 +12912,7 @@
           </a:xfrm>
           <a:prstGeom prst="roundRect">
             <a:avLst>
-              <a:gd name="adj" fmla="val 6000"/>
+              <a:gd name="adj" fmla="val 5000"/>
             </a:avLst>
           </a:prstGeom>
           <a:solidFill>
@@ -12093,7 +12948,7 @@
       </p:sp>
       <p:sp>
         <p:nvSpPr>
-          <p:cNvPr id="17" name="TextBox 16"/>
+          <p:cNvPr id="20" name="TextBox 19"/>
           <p:cNvSpPr txBox="1"/>
           <p:nvPr/>
         </p:nvSpPr>
@@ -12132,7 +12987,7 @@
       </p:sp>
       <p:sp>
         <p:nvSpPr>
-          <p:cNvPr id="18" name="TextBox 17"/>
+          <p:cNvPr id="21" name="TextBox 20"/>
           <p:cNvSpPr txBox="1"/>
           <p:nvPr/>
         </p:nvSpPr>
@@ -12171,7 +13026,7 @@
       </p:sp>
       <p:sp>
         <p:nvSpPr>
-          <p:cNvPr id="19" name="TextBox 18"/>
+          <p:cNvPr id="22" name="TextBox 21"/>
           <p:cNvSpPr txBox="1"/>
           <p:nvPr/>
         </p:nvSpPr>
@@ -12210,7 +13065,7 @@
       </p:sp>
       <p:sp>
         <p:nvSpPr>
-          <p:cNvPr id="20" name="TextBox 19"/>
+          <p:cNvPr id="23" name="TextBox 22"/>
           <p:cNvSpPr txBox="1"/>
           <p:nvPr/>
         </p:nvSpPr>
@@ -12249,7 +13104,7 @@
       </p:sp>
       <p:sp>
         <p:nvSpPr>
-          <p:cNvPr id="21" name="TextBox 20"/>
+          <p:cNvPr id="24" name="TextBox 23"/>
           <p:cNvSpPr txBox="1"/>
           <p:nvPr/>
         </p:nvSpPr>
@@ -12288,7 +13143,7 @@
       </p:sp>
       <p:sp>
         <p:nvSpPr>
-          <p:cNvPr id="22" name="TextBox 21"/>
+          <p:cNvPr id="25" name="TextBox 24"/>
           <p:cNvSpPr txBox="1"/>
           <p:nvPr/>
         </p:nvSpPr>
@@ -12327,7 +13182,7 @@
       </p:sp>
       <p:sp>
         <p:nvSpPr>
-          <p:cNvPr id="23" name="TextBox 22"/>
+          <p:cNvPr id="26" name="TextBox 25"/>
           <p:cNvSpPr txBox="1"/>
           <p:nvPr/>
         </p:nvSpPr>
@@ -12366,7 +13221,7 @@
       </p:sp>
       <p:sp>
         <p:nvSpPr>
-          <p:cNvPr id="24" name="TextBox 23"/>
+          <p:cNvPr id="27" name="TextBox 26"/>
           <p:cNvSpPr txBox="1"/>
           <p:nvPr/>
         </p:nvSpPr>
@@ -12405,7 +13260,7 @@
       </p:sp>
       <p:sp>
         <p:nvSpPr>
-          <p:cNvPr id="25" name="TextBox 24"/>
+          <p:cNvPr id="28" name="TextBox 27"/>
           <p:cNvSpPr txBox="1"/>
           <p:nvPr/>
         </p:nvSpPr>
@@ -12444,7 +13299,7 @@
       </p:sp>
       <p:sp>
         <p:nvSpPr>
-          <p:cNvPr id="26" name="TextBox 25"/>
+          <p:cNvPr id="29" name="TextBox 28"/>
           <p:cNvSpPr txBox="1"/>
           <p:nvPr/>
         </p:nvSpPr>
@@ -12483,7 +13338,7 @@
       </p:sp>
       <p:sp>
         <p:nvSpPr>
-          <p:cNvPr id="27" name="TextBox 26"/>
+          <p:cNvPr id="30" name="TextBox 29"/>
           <p:cNvSpPr txBox="1"/>
           <p:nvPr/>
         </p:nvSpPr>
@@ -12522,7 +13377,7 @@
       </p:sp>
       <p:sp>
         <p:nvSpPr>
-          <p:cNvPr id="28" name="TextBox 27"/>
+          <p:cNvPr id="31" name="TextBox 30"/>
           <p:cNvSpPr txBox="1"/>
           <p:nvPr/>
         </p:nvSpPr>
@@ -12561,7 +13416,7 @@
       </p:sp>
       <p:sp>
         <p:nvSpPr>
-          <p:cNvPr id="29" name="TextBox 28"/>
+          <p:cNvPr id="32" name="TextBox 31"/>
           <p:cNvSpPr txBox="1"/>
           <p:nvPr/>
         </p:nvSpPr>
@@ -12858,12 +13713,57 @@
         </p:nvSpPr>
         <p:spPr>
           <a:xfrm>
+            <a:off x="676656" y="2752344"/>
+            <a:ext cx="5440680" cy="3291840"/>
+          </a:xfrm>
+          <a:prstGeom prst="roundRect">
+            <a:avLst>
+              <a:gd name="adj" fmla="val 5000"/>
+            </a:avLst>
+          </a:prstGeom>
+          <a:solidFill>
+            <a:srgbClr val="E9EBF0"/>
+          </a:solidFill>
+          <a:ln>
+            <a:noFill/>
+          </a:ln>
+        </p:spPr>
+        <p:style>
+          <a:lnRef idx="1">
+            <a:schemeClr val="accent1"/>
+          </a:lnRef>
+          <a:fillRef idx="3">
+            <a:schemeClr val="accent1"/>
+          </a:fillRef>
+          <a:effectRef idx="2">
+            <a:schemeClr val="accent1"/>
+          </a:effectRef>
+          <a:fontRef idx="minor">
+            <a:schemeClr val="lt1"/>
+          </a:fontRef>
+        </p:style>
+        <p:txBody>
+          <a:bodyPr rtlCol="0" anchor="ctr"/>
+          <a:lstStyle/>
+          <a:p>
+            <a:pPr algn="ctr"/>
+          </a:p>
+        </p:txBody>
+      </p:sp>
+      <p:sp>
+        <p:nvSpPr>
+          <p:cNvPr id="9" name="Rounded Rectangle 8"/>
+          <p:cNvSpPr/>
+          <p:nvPr/>
+        </p:nvSpPr>
+        <p:spPr>
+          <a:xfrm>
             <a:off x="640080" y="2697480"/>
             <a:ext cx="5440680" cy="3291840"/>
           </a:xfrm>
           <a:prstGeom prst="roundRect">
             <a:avLst>
-              <a:gd name="adj" fmla="val 6000"/>
+              <a:gd name="adj" fmla="val 5000"/>
             </a:avLst>
           </a:prstGeom>
           <a:solidFill>
@@ -12899,7 +13799,7 @@
       </p:sp>
       <p:sp>
         <p:nvSpPr>
-          <p:cNvPr id="9" name="Rectangle 8"/>
+          <p:cNvPr id="10" name="Rectangle 9"/>
           <p:cNvSpPr/>
           <p:nvPr/>
         </p:nvSpPr>
@@ -12942,7 +13842,7 @@
       </p:sp>
       <p:sp>
         <p:nvSpPr>
-          <p:cNvPr id="10" name="TextBox 9"/>
+          <p:cNvPr id="11" name="TextBox 10"/>
           <p:cNvSpPr txBox="1"/>
           <p:nvPr/>
         </p:nvSpPr>
@@ -12981,7 +13881,7 @@
       </p:sp>
       <p:sp>
         <p:nvSpPr>
-          <p:cNvPr id="11" name="TextBox 10"/>
+          <p:cNvPr id="12" name="TextBox 11"/>
           <p:cNvSpPr txBox="1"/>
           <p:nvPr/>
         </p:nvSpPr>
@@ -13020,7 +13920,7 @@
       </p:sp>
       <p:sp>
         <p:nvSpPr>
-          <p:cNvPr id="12" name="TextBox 11"/>
+          <p:cNvPr id="13" name="TextBox 12"/>
           <p:cNvSpPr txBox="1"/>
           <p:nvPr/>
         </p:nvSpPr>
@@ -13059,7 +13959,7 @@
       </p:sp>
       <p:sp>
         <p:nvSpPr>
-          <p:cNvPr id="13" name="TextBox 12"/>
+          <p:cNvPr id="14" name="TextBox 13"/>
           <p:cNvSpPr txBox="1"/>
           <p:nvPr/>
         </p:nvSpPr>
@@ -13098,7 +13998,7 @@
       </p:sp>
       <p:cxnSp>
         <p:nvCxnSpPr>
-          <p:cNvPr id="14" name="Connector 13"/>
+          <p:cNvPr id="15" name="Connector 14"/>
           <p:cNvCxnSpPr/>
           <p:nvPr/>
         </p:nvCxnSpPr>
@@ -13133,7 +14033,7 @@
       </p:cxnSp>
       <p:sp>
         <p:nvSpPr>
-          <p:cNvPr id="15" name="TextBox 14"/>
+          <p:cNvPr id="16" name="TextBox 15"/>
           <p:cNvSpPr txBox="1"/>
           <p:nvPr/>
         </p:nvSpPr>
@@ -13172,7 +14072,7 @@
       </p:sp>
       <p:sp>
         <p:nvSpPr>
-          <p:cNvPr id="16" name="TextBox 15"/>
+          <p:cNvPr id="17" name="TextBox 16"/>
           <p:cNvSpPr txBox="1"/>
           <p:nvPr/>
         </p:nvSpPr>
@@ -13227,7 +14127,52 @@
       </p:sp>
       <p:sp>
         <p:nvSpPr>
-          <p:cNvPr id="17" name="Rounded Rectangle 16"/>
+          <p:cNvPr id="18" name="Rounded Rectangle 17"/>
+          <p:cNvSpPr/>
+          <p:nvPr/>
+        </p:nvSpPr>
+        <p:spPr>
+          <a:xfrm>
+            <a:off x="6300216" y="2752344"/>
+            <a:ext cx="5257800" cy="3291840"/>
+          </a:xfrm>
+          <a:prstGeom prst="roundRect">
+            <a:avLst>
+              <a:gd name="adj" fmla="val 5000"/>
+            </a:avLst>
+          </a:prstGeom>
+          <a:solidFill>
+            <a:srgbClr val="E9EBF0"/>
+          </a:solidFill>
+          <a:ln>
+            <a:noFill/>
+          </a:ln>
+        </p:spPr>
+        <p:style>
+          <a:lnRef idx="1">
+            <a:schemeClr val="accent1"/>
+          </a:lnRef>
+          <a:fillRef idx="3">
+            <a:schemeClr val="accent1"/>
+          </a:fillRef>
+          <a:effectRef idx="2">
+            <a:schemeClr val="accent1"/>
+          </a:effectRef>
+          <a:fontRef idx="minor">
+            <a:schemeClr val="lt1"/>
+          </a:fontRef>
+        </p:style>
+        <p:txBody>
+          <a:bodyPr rtlCol="0" anchor="ctr"/>
+          <a:lstStyle/>
+          <a:p>
+            <a:pPr algn="ctr"/>
+          </a:p>
+        </p:txBody>
+      </p:sp>
+      <p:sp>
+        <p:nvSpPr>
+          <p:cNvPr id="19" name="Rounded Rectangle 18"/>
           <p:cNvSpPr/>
           <p:nvPr/>
         </p:nvSpPr>
@@ -13238,7 +14183,7 @@
           </a:xfrm>
           <a:prstGeom prst="roundRect">
             <a:avLst>
-              <a:gd name="adj" fmla="val 6000"/>
+              <a:gd name="adj" fmla="val 5000"/>
             </a:avLst>
           </a:prstGeom>
           <a:solidFill>
@@ -13274,7 +14219,7 @@
       </p:sp>
       <p:sp>
         <p:nvSpPr>
-          <p:cNvPr id="18" name="Rectangle 17"/>
+          <p:cNvPr id="20" name="Rectangle 19"/>
           <p:cNvSpPr/>
           <p:nvPr/>
         </p:nvSpPr>
@@ -13317,7 +14262,7 @@
       </p:sp>
       <p:sp>
         <p:nvSpPr>
-          <p:cNvPr id="19" name="TextBox 18"/>
+          <p:cNvPr id="21" name="TextBox 20"/>
           <p:cNvSpPr txBox="1"/>
           <p:nvPr/>
         </p:nvSpPr>
@@ -13356,7 +14301,7 @@
       </p:sp>
       <p:sp>
         <p:nvSpPr>
-          <p:cNvPr id="20" name="TextBox 19"/>
+          <p:cNvPr id="22" name="TextBox 21"/>
           <p:cNvSpPr txBox="1"/>
           <p:nvPr/>
         </p:nvSpPr>
@@ -13395,7 +14340,7 @@
       </p:sp>
       <p:sp>
         <p:nvSpPr>
-          <p:cNvPr id="21" name="TextBox 20"/>
+          <p:cNvPr id="23" name="TextBox 22"/>
           <p:cNvSpPr txBox="1"/>
           <p:nvPr/>
         </p:nvSpPr>
@@ -13434,7 +14379,7 @@
       </p:sp>
       <p:sp>
         <p:nvSpPr>
-          <p:cNvPr id="22" name="TextBox 21"/>
+          <p:cNvPr id="24" name="TextBox 23"/>
           <p:cNvSpPr txBox="1"/>
           <p:nvPr/>
         </p:nvSpPr>
@@ -13473,7 +14418,7 @@
       </p:sp>
       <p:cxnSp>
         <p:nvCxnSpPr>
-          <p:cNvPr id="23" name="Connector 22"/>
+          <p:cNvPr id="25" name="Connector 24"/>
           <p:cNvCxnSpPr/>
           <p:nvPr/>
         </p:nvCxnSpPr>
@@ -13508,7 +14453,7 @@
       </p:cxnSp>
       <p:sp>
         <p:nvSpPr>
-          <p:cNvPr id="24" name="TextBox 23"/>
+          <p:cNvPr id="26" name="TextBox 25"/>
           <p:cNvSpPr txBox="1"/>
           <p:nvPr/>
         </p:nvSpPr>
@@ -13547,7 +14492,7 @@
       </p:sp>
       <p:sp>
         <p:nvSpPr>
-          <p:cNvPr id="25" name="TextBox 24"/>
+          <p:cNvPr id="27" name="TextBox 26"/>
           <p:cNvSpPr txBox="1"/>
           <p:nvPr/>
         </p:nvSpPr>
@@ -13602,7 +14547,7 @@
       </p:sp>
       <p:sp>
         <p:nvSpPr>
-          <p:cNvPr id="26" name="TextBox 25"/>
+          <p:cNvPr id="28" name="TextBox 27"/>
           <p:cNvSpPr txBox="1"/>
           <p:nvPr/>
         </p:nvSpPr>
@@ -14502,12 +15447,57 @@
         </p:nvSpPr>
         <p:spPr>
           <a:xfrm>
+            <a:off x="676656" y="3895344"/>
+            <a:ext cx="3566160" cy="2560320"/>
+          </a:xfrm>
+          <a:prstGeom prst="roundRect">
+            <a:avLst>
+              <a:gd name="adj" fmla="val 5000"/>
+            </a:avLst>
+          </a:prstGeom>
+          <a:solidFill>
+            <a:srgbClr val="E9EBF0"/>
+          </a:solidFill>
+          <a:ln>
+            <a:noFill/>
+          </a:ln>
+        </p:spPr>
+        <p:style>
+          <a:lnRef idx="1">
+            <a:schemeClr val="accent1"/>
+          </a:lnRef>
+          <a:fillRef idx="3">
+            <a:schemeClr val="accent1"/>
+          </a:fillRef>
+          <a:effectRef idx="2">
+            <a:schemeClr val="accent1"/>
+          </a:effectRef>
+          <a:fontRef idx="minor">
+            <a:schemeClr val="lt1"/>
+          </a:fontRef>
+        </p:style>
+        <p:txBody>
+          <a:bodyPr rtlCol="0" anchor="ctr"/>
+          <a:lstStyle/>
+          <a:p>
+            <a:pPr algn="ctr"/>
+          </a:p>
+        </p:txBody>
+      </p:sp>
+      <p:sp>
+        <p:nvSpPr>
+          <p:cNvPr id="11" name="Rounded Rectangle 10"/>
+          <p:cNvSpPr/>
+          <p:nvPr/>
+        </p:nvSpPr>
+        <p:spPr>
+          <a:xfrm>
             <a:off x="640080" y="3840480"/>
             <a:ext cx="3566160" cy="2560320"/>
           </a:xfrm>
           <a:prstGeom prst="roundRect">
             <a:avLst>
-              <a:gd name="adj" fmla="val 6000"/>
+              <a:gd name="adj" fmla="val 5000"/>
             </a:avLst>
           </a:prstGeom>
           <a:solidFill>
@@ -14543,7 +15533,7 @@
       </p:sp>
       <p:sp>
         <p:nvSpPr>
-          <p:cNvPr id="11" name="TextBox 10"/>
+          <p:cNvPr id="12" name="TextBox 11"/>
           <p:cNvSpPr txBox="1"/>
           <p:nvPr/>
         </p:nvSpPr>
@@ -14582,7 +15572,7 @@
       </p:sp>
       <p:sp>
         <p:nvSpPr>
-          <p:cNvPr id="12" name="TextBox 11"/>
+          <p:cNvPr id="13" name="TextBox 12"/>
           <p:cNvSpPr txBox="1"/>
           <p:nvPr/>
         </p:nvSpPr>
@@ -14621,7 +15611,7 @@
       </p:sp>
       <p:sp>
         <p:nvSpPr>
-          <p:cNvPr id="13" name="TextBox 12"/>
+          <p:cNvPr id="14" name="TextBox 13"/>
           <p:cNvSpPr txBox="1"/>
           <p:nvPr/>
         </p:nvSpPr>
@@ -14676,7 +15666,7 @@
       </p:sp>
       <p:sp>
         <p:nvSpPr>
-          <p:cNvPr id="14" name="Rounded Rectangle 13"/>
+          <p:cNvPr id="15" name="Rounded Rectangle 14"/>
           <p:cNvSpPr/>
           <p:nvPr/>
         </p:nvSpPr>
@@ -14721,7 +15711,7 @@
       </p:sp>
       <p:sp>
         <p:nvSpPr>
-          <p:cNvPr id="15" name="TextBox 14"/>
+          <p:cNvPr id="16" name="TextBox 15"/>
           <p:cNvSpPr txBox="1"/>
           <p:nvPr/>
         </p:nvSpPr>
@@ -14756,7 +15746,7 @@
       </p:sp>
       <p:sp>
         <p:nvSpPr>
-          <p:cNvPr id="16" name="Oval 15"/>
+          <p:cNvPr id="17" name="Oval 16"/>
           <p:cNvSpPr/>
           <p:nvPr/>
         </p:nvSpPr>
@@ -14799,7 +15789,7 @@
       </p:sp>
       <p:sp>
         <p:nvSpPr>
-          <p:cNvPr id="17" name="TextBox 16"/>
+          <p:cNvPr id="18" name="TextBox 17"/>
           <p:cNvSpPr txBox="1"/>
           <p:nvPr/>
         </p:nvSpPr>
@@ -14838,7 +15828,52 @@
       </p:sp>
       <p:sp>
         <p:nvSpPr>
-          <p:cNvPr id="18" name="Rounded Rectangle 17"/>
+          <p:cNvPr id="19" name="Rounded Rectangle 18"/>
+          <p:cNvSpPr/>
+          <p:nvPr/>
+        </p:nvSpPr>
+        <p:spPr>
+          <a:xfrm>
+            <a:off x="4425696" y="3895344"/>
+            <a:ext cx="3566160" cy="2560320"/>
+          </a:xfrm>
+          <a:prstGeom prst="roundRect">
+            <a:avLst>
+              <a:gd name="adj" fmla="val 5000"/>
+            </a:avLst>
+          </a:prstGeom>
+          <a:solidFill>
+            <a:srgbClr val="E9EBF0"/>
+          </a:solidFill>
+          <a:ln>
+            <a:noFill/>
+          </a:ln>
+        </p:spPr>
+        <p:style>
+          <a:lnRef idx="1">
+            <a:schemeClr val="accent1"/>
+          </a:lnRef>
+          <a:fillRef idx="3">
+            <a:schemeClr val="accent1"/>
+          </a:fillRef>
+          <a:effectRef idx="2">
+            <a:schemeClr val="accent1"/>
+          </a:effectRef>
+          <a:fontRef idx="minor">
+            <a:schemeClr val="lt1"/>
+          </a:fontRef>
+        </p:style>
+        <p:txBody>
+          <a:bodyPr rtlCol="0" anchor="ctr"/>
+          <a:lstStyle/>
+          <a:p>
+            <a:pPr algn="ctr"/>
+          </a:p>
+        </p:txBody>
+      </p:sp>
+      <p:sp>
+        <p:nvSpPr>
+          <p:cNvPr id="20" name="Rounded Rectangle 19"/>
           <p:cNvSpPr/>
           <p:nvPr/>
         </p:nvSpPr>
@@ -14849,7 +15884,7 @@
           </a:xfrm>
           <a:prstGeom prst="roundRect">
             <a:avLst>
-              <a:gd name="adj" fmla="val 6000"/>
+              <a:gd name="adj" fmla="val 5000"/>
             </a:avLst>
           </a:prstGeom>
           <a:solidFill>
@@ -14885,7 +15920,7 @@
       </p:sp>
       <p:sp>
         <p:nvSpPr>
-          <p:cNvPr id="19" name="TextBox 18"/>
+          <p:cNvPr id="21" name="TextBox 20"/>
           <p:cNvSpPr txBox="1"/>
           <p:nvPr/>
         </p:nvSpPr>
@@ -14924,7 +15959,7 @@
       </p:sp>
       <p:sp>
         <p:nvSpPr>
-          <p:cNvPr id="20" name="TextBox 19"/>
+          <p:cNvPr id="22" name="TextBox 21"/>
           <p:cNvSpPr txBox="1"/>
           <p:nvPr/>
         </p:nvSpPr>
@@ -14963,7 +15998,7 @@
       </p:sp>
       <p:sp>
         <p:nvSpPr>
-          <p:cNvPr id="21" name="TextBox 20"/>
+          <p:cNvPr id="23" name="TextBox 22"/>
           <p:cNvSpPr txBox="1"/>
           <p:nvPr/>
         </p:nvSpPr>
@@ -15018,7 +16053,7 @@
       </p:sp>
       <p:sp>
         <p:nvSpPr>
-          <p:cNvPr id="22" name="Rounded Rectangle 21"/>
+          <p:cNvPr id="24" name="Rounded Rectangle 23"/>
           <p:cNvSpPr/>
           <p:nvPr/>
         </p:nvSpPr>
@@ -15063,7 +16098,7 @@
       </p:sp>
       <p:sp>
         <p:nvSpPr>
-          <p:cNvPr id="23" name="TextBox 22"/>
+          <p:cNvPr id="25" name="TextBox 24"/>
           <p:cNvSpPr txBox="1"/>
           <p:nvPr/>
         </p:nvSpPr>
@@ -15098,7 +16133,7 @@
       </p:sp>
       <p:sp>
         <p:nvSpPr>
-          <p:cNvPr id="24" name="Oval 23"/>
+          <p:cNvPr id="26" name="Oval 25"/>
           <p:cNvSpPr/>
           <p:nvPr/>
         </p:nvSpPr>
@@ -15141,7 +16176,7 @@
       </p:sp>
       <p:sp>
         <p:nvSpPr>
-          <p:cNvPr id="25" name="TextBox 24"/>
+          <p:cNvPr id="27" name="TextBox 26"/>
           <p:cNvSpPr txBox="1"/>
           <p:nvPr/>
         </p:nvSpPr>
@@ -15180,7 +16215,52 @@
       </p:sp>
       <p:sp>
         <p:nvSpPr>
-          <p:cNvPr id="26" name="Rounded Rectangle 25"/>
+          <p:cNvPr id="28" name="Rounded Rectangle 27"/>
+          <p:cNvSpPr/>
+          <p:nvPr/>
+        </p:nvSpPr>
+        <p:spPr>
+          <a:xfrm>
+            <a:off x="8174735" y="3895344"/>
+            <a:ext cx="3566160" cy="2560320"/>
+          </a:xfrm>
+          <a:prstGeom prst="roundRect">
+            <a:avLst>
+              <a:gd name="adj" fmla="val 5000"/>
+            </a:avLst>
+          </a:prstGeom>
+          <a:solidFill>
+            <a:srgbClr val="E9EBF0"/>
+          </a:solidFill>
+          <a:ln>
+            <a:noFill/>
+          </a:ln>
+        </p:spPr>
+        <p:style>
+          <a:lnRef idx="1">
+            <a:schemeClr val="accent1"/>
+          </a:lnRef>
+          <a:fillRef idx="3">
+            <a:schemeClr val="accent1"/>
+          </a:fillRef>
+          <a:effectRef idx="2">
+            <a:schemeClr val="accent1"/>
+          </a:effectRef>
+          <a:fontRef idx="minor">
+            <a:schemeClr val="lt1"/>
+          </a:fontRef>
+        </p:style>
+        <p:txBody>
+          <a:bodyPr rtlCol="0" anchor="ctr"/>
+          <a:lstStyle/>
+          <a:p>
+            <a:pPr algn="ctr"/>
+          </a:p>
+        </p:txBody>
+      </p:sp>
+      <p:sp>
+        <p:nvSpPr>
+          <p:cNvPr id="29" name="Rounded Rectangle 28"/>
           <p:cNvSpPr/>
           <p:nvPr/>
         </p:nvSpPr>
@@ -15191,7 +16271,7 @@
           </a:xfrm>
           <a:prstGeom prst="roundRect">
             <a:avLst>
-              <a:gd name="adj" fmla="val 6000"/>
+              <a:gd name="adj" fmla="val 5000"/>
             </a:avLst>
           </a:prstGeom>
           <a:solidFill>
@@ -15227,7 +16307,7 @@
       </p:sp>
       <p:sp>
         <p:nvSpPr>
-          <p:cNvPr id="27" name="TextBox 26"/>
+          <p:cNvPr id="30" name="TextBox 29"/>
           <p:cNvSpPr txBox="1"/>
           <p:nvPr/>
         </p:nvSpPr>
@@ -15266,7 +16346,7 @@
       </p:sp>
       <p:sp>
         <p:nvSpPr>
-          <p:cNvPr id="28" name="TextBox 27"/>
+          <p:cNvPr id="31" name="TextBox 30"/>
           <p:cNvSpPr txBox="1"/>
           <p:nvPr/>
         </p:nvSpPr>
@@ -15305,7 +16385,7 @@
       </p:sp>
       <p:sp>
         <p:nvSpPr>
-          <p:cNvPr id="29" name="TextBox 28"/>
+          <p:cNvPr id="32" name="TextBox 31"/>
           <p:cNvSpPr txBox="1"/>
           <p:nvPr/>
         </p:nvSpPr>
@@ -15360,7 +16440,7 @@
       </p:sp>
       <p:sp>
         <p:nvSpPr>
-          <p:cNvPr id="30" name="Rounded Rectangle 29"/>
+          <p:cNvPr id="33" name="Rounded Rectangle 32"/>
           <p:cNvSpPr/>
           <p:nvPr/>
         </p:nvSpPr>
@@ -15405,7 +16485,7 @@
       </p:sp>
       <p:sp>
         <p:nvSpPr>
-          <p:cNvPr id="31" name="TextBox 30"/>
+          <p:cNvPr id="34" name="TextBox 33"/>
           <p:cNvSpPr txBox="1"/>
           <p:nvPr/>
         </p:nvSpPr>
@@ -15440,7 +16520,7 @@
       </p:sp>
       <p:sp>
         <p:nvSpPr>
-          <p:cNvPr id="32" name="TextBox 31"/>
+          <p:cNvPr id="35" name="TextBox 34"/>
           <p:cNvSpPr txBox="1"/>
           <p:nvPr/>
         </p:nvSpPr>
@@ -16684,12 +17764,57 @@
         </p:nvSpPr>
         <p:spPr>
           <a:xfrm>
+            <a:off x="676656" y="3895344"/>
+            <a:ext cx="5440680" cy="2377440"/>
+          </a:xfrm>
+          <a:prstGeom prst="roundRect">
+            <a:avLst>
+              <a:gd name="adj" fmla="val 5000"/>
+            </a:avLst>
+          </a:prstGeom>
+          <a:solidFill>
+            <a:srgbClr val="E9EBF0"/>
+          </a:solidFill>
+          <a:ln>
+            <a:noFill/>
+          </a:ln>
+        </p:spPr>
+        <p:style>
+          <a:lnRef idx="1">
+            <a:schemeClr val="accent1"/>
+          </a:lnRef>
+          <a:fillRef idx="3">
+            <a:schemeClr val="accent1"/>
+          </a:fillRef>
+          <a:effectRef idx="2">
+            <a:schemeClr val="accent1"/>
+          </a:effectRef>
+          <a:fontRef idx="minor">
+            <a:schemeClr val="lt1"/>
+          </a:fontRef>
+        </p:style>
+        <p:txBody>
+          <a:bodyPr rtlCol="0" anchor="ctr"/>
+          <a:lstStyle/>
+          <a:p>
+            <a:pPr algn="ctr"/>
+          </a:p>
+        </p:txBody>
+      </p:sp>
+      <p:sp>
+        <p:nvSpPr>
+          <p:cNvPr id="12" name="Rounded Rectangle 11"/>
+          <p:cNvSpPr/>
+          <p:nvPr/>
+        </p:nvSpPr>
+        <p:spPr>
+          <a:xfrm>
             <a:off x="640080" y="3840480"/>
             <a:ext cx="5440680" cy="2377440"/>
           </a:xfrm>
           <a:prstGeom prst="roundRect">
             <a:avLst>
-              <a:gd name="adj" fmla="val 6000"/>
+              <a:gd name="adj" fmla="val 5000"/>
             </a:avLst>
           </a:prstGeom>
           <a:solidFill>
@@ -16725,7 +17850,7 @@
       </p:sp>
       <p:sp>
         <p:nvSpPr>
-          <p:cNvPr id="12" name="TextBox 11"/>
+          <p:cNvPr id="13" name="TextBox 12"/>
           <p:cNvSpPr txBox="1"/>
           <p:nvPr/>
         </p:nvSpPr>
@@ -16764,7 +17889,7 @@
       </p:sp>
       <p:sp>
         <p:nvSpPr>
-          <p:cNvPr id="13" name="TextBox 12"/>
+          <p:cNvPr id="14" name="TextBox 13"/>
           <p:cNvSpPr txBox="1"/>
           <p:nvPr/>
         </p:nvSpPr>
@@ -16803,7 +17928,7 @@
       </p:sp>
       <p:sp>
         <p:nvSpPr>
-          <p:cNvPr id="14" name="TextBox 13"/>
+          <p:cNvPr id="15" name="TextBox 14"/>
           <p:cNvSpPr txBox="1"/>
           <p:nvPr/>
         </p:nvSpPr>
@@ -16874,7 +17999,52 @@
       </p:sp>
       <p:sp>
         <p:nvSpPr>
-          <p:cNvPr id="15" name="Rounded Rectangle 14"/>
+          <p:cNvPr id="16" name="Rounded Rectangle 15"/>
+          <p:cNvSpPr/>
+          <p:nvPr/>
+        </p:nvSpPr>
+        <p:spPr>
+          <a:xfrm>
+            <a:off x="6300216" y="3895344"/>
+            <a:ext cx="5257800" cy="2377440"/>
+          </a:xfrm>
+          <a:prstGeom prst="roundRect">
+            <a:avLst>
+              <a:gd name="adj" fmla="val 5000"/>
+            </a:avLst>
+          </a:prstGeom>
+          <a:solidFill>
+            <a:srgbClr val="E9EBF0"/>
+          </a:solidFill>
+          <a:ln>
+            <a:noFill/>
+          </a:ln>
+        </p:spPr>
+        <p:style>
+          <a:lnRef idx="1">
+            <a:schemeClr val="accent1"/>
+          </a:lnRef>
+          <a:fillRef idx="3">
+            <a:schemeClr val="accent1"/>
+          </a:fillRef>
+          <a:effectRef idx="2">
+            <a:schemeClr val="accent1"/>
+          </a:effectRef>
+          <a:fontRef idx="minor">
+            <a:schemeClr val="lt1"/>
+          </a:fontRef>
+        </p:style>
+        <p:txBody>
+          <a:bodyPr rtlCol="0" anchor="ctr"/>
+          <a:lstStyle/>
+          <a:p>
+            <a:pPr algn="ctr"/>
+          </a:p>
+        </p:txBody>
+      </p:sp>
+      <p:sp>
+        <p:nvSpPr>
+          <p:cNvPr id="17" name="Rounded Rectangle 16"/>
           <p:cNvSpPr/>
           <p:nvPr/>
         </p:nvSpPr>
@@ -16885,7 +18055,7 @@
           </a:xfrm>
           <a:prstGeom prst="roundRect">
             <a:avLst>
-              <a:gd name="adj" fmla="val 6000"/>
+              <a:gd name="adj" fmla="val 5000"/>
             </a:avLst>
           </a:prstGeom>
           <a:solidFill>
@@ -16921,7 +18091,7 @@
       </p:sp>
       <p:sp>
         <p:nvSpPr>
-          <p:cNvPr id="16" name="TextBox 15"/>
+          <p:cNvPr id="18" name="TextBox 17"/>
           <p:cNvSpPr txBox="1"/>
           <p:nvPr/>
         </p:nvSpPr>
@@ -16960,7 +18130,7 @@
       </p:sp>
       <p:sp>
         <p:nvSpPr>
-          <p:cNvPr id="17" name="TextBox 16"/>
+          <p:cNvPr id="19" name="TextBox 18"/>
           <p:cNvSpPr txBox="1"/>
           <p:nvPr/>
         </p:nvSpPr>
@@ -16999,7 +18169,7 @@
       </p:sp>
       <p:sp>
         <p:nvSpPr>
-          <p:cNvPr id="18" name="TextBox 17"/>
+          <p:cNvPr id="20" name="TextBox 19"/>
           <p:cNvSpPr txBox="1"/>
           <p:nvPr/>
         </p:nvSpPr>
@@ -17070,7 +18240,7 @@
       </p:sp>
       <p:sp>
         <p:nvSpPr>
-          <p:cNvPr id="19" name="TextBox 18"/>
+          <p:cNvPr id="21" name="TextBox 20"/>
           <p:cNvSpPr txBox="1"/>
           <p:nvPr/>
         </p:nvSpPr>
@@ -17367,12 +18537,57 @@
         </p:nvSpPr>
         <p:spPr>
           <a:xfrm>
+            <a:off x="676656" y="2660904"/>
+            <a:ext cx="5486400" cy="3931920"/>
+          </a:xfrm>
+          <a:prstGeom prst="roundRect">
+            <a:avLst>
+              <a:gd name="adj" fmla="val 5000"/>
+            </a:avLst>
+          </a:prstGeom>
+          <a:solidFill>
+            <a:srgbClr val="E9EBF0"/>
+          </a:solidFill>
+          <a:ln>
+            <a:noFill/>
+          </a:ln>
+        </p:spPr>
+        <p:style>
+          <a:lnRef idx="1">
+            <a:schemeClr val="accent1"/>
+          </a:lnRef>
+          <a:fillRef idx="3">
+            <a:schemeClr val="accent1"/>
+          </a:fillRef>
+          <a:effectRef idx="2">
+            <a:schemeClr val="accent1"/>
+          </a:effectRef>
+          <a:fontRef idx="minor">
+            <a:schemeClr val="lt1"/>
+          </a:fontRef>
+        </p:style>
+        <p:txBody>
+          <a:bodyPr rtlCol="0" anchor="ctr"/>
+          <a:lstStyle/>
+          <a:p>
+            <a:pPr algn="ctr"/>
+          </a:p>
+        </p:txBody>
+      </p:sp>
+      <p:sp>
+        <p:nvSpPr>
+          <p:cNvPr id="9" name="Rounded Rectangle 8"/>
+          <p:cNvSpPr/>
+          <p:nvPr/>
+        </p:nvSpPr>
+        <p:spPr>
+          <a:xfrm>
             <a:off x="640080" y="2606040"/>
             <a:ext cx="5486400" cy="3931920"/>
           </a:xfrm>
           <a:prstGeom prst="roundRect">
             <a:avLst>
-              <a:gd name="adj" fmla="val 6000"/>
+              <a:gd name="adj" fmla="val 5000"/>
             </a:avLst>
           </a:prstGeom>
           <a:solidFill>
@@ -17408,7 +18623,7 @@
       </p:sp>
       <p:sp>
         <p:nvSpPr>
-          <p:cNvPr id="9" name="TextBox 8"/>
+          <p:cNvPr id="10" name="TextBox 9"/>
           <p:cNvSpPr txBox="1"/>
           <p:nvPr/>
         </p:nvSpPr>
@@ -17447,7 +18662,7 @@
       </p:sp>
       <p:sp>
         <p:nvSpPr>
-          <p:cNvPr id="10" name="TextBox 9"/>
+          <p:cNvPr id="11" name="TextBox 10"/>
           <p:cNvSpPr txBox="1"/>
           <p:nvPr/>
         </p:nvSpPr>
@@ -17486,7 +18701,7 @@
       </p:sp>
       <p:cxnSp>
         <p:nvCxnSpPr>
-          <p:cNvPr id="11" name="Connector 10"/>
+          <p:cNvPr id="12" name="Connector 11"/>
           <p:cNvCxnSpPr/>
           <p:nvPr/>
         </p:nvCxnSpPr>
@@ -17521,7 +18736,7 @@
       </p:cxnSp>
       <p:sp>
         <p:nvSpPr>
-          <p:cNvPr id="12" name="TextBox 11"/>
+          <p:cNvPr id="13" name="TextBox 12"/>
           <p:cNvSpPr txBox="1"/>
           <p:nvPr/>
         </p:nvSpPr>
@@ -17560,7 +18775,7 @@
       </p:sp>
       <p:sp>
         <p:nvSpPr>
-          <p:cNvPr id="13" name="TextBox 12"/>
+          <p:cNvPr id="14" name="TextBox 13"/>
           <p:cNvSpPr txBox="1"/>
           <p:nvPr/>
         </p:nvSpPr>
@@ -17599,7 +18814,7 @@
       </p:sp>
       <p:sp>
         <p:nvSpPr>
-          <p:cNvPr id="14" name="TextBox 13"/>
+          <p:cNvPr id="15" name="TextBox 14"/>
           <p:cNvSpPr txBox="1"/>
           <p:nvPr/>
         </p:nvSpPr>
@@ -17638,7 +18853,7 @@
       </p:sp>
       <p:sp>
         <p:nvSpPr>
-          <p:cNvPr id="15" name="TextBox 14"/>
+          <p:cNvPr id="16" name="TextBox 15"/>
           <p:cNvSpPr txBox="1"/>
           <p:nvPr/>
         </p:nvSpPr>
@@ -17677,7 +18892,7 @@
       </p:sp>
       <p:sp>
         <p:nvSpPr>
-          <p:cNvPr id="16" name="TextBox 15"/>
+          <p:cNvPr id="17" name="TextBox 16"/>
           <p:cNvSpPr txBox="1"/>
           <p:nvPr/>
         </p:nvSpPr>
@@ -17716,7 +18931,7 @@
       </p:sp>
       <p:sp>
         <p:nvSpPr>
-          <p:cNvPr id="17" name="TextBox 16"/>
+          <p:cNvPr id="18" name="TextBox 17"/>
           <p:cNvSpPr txBox="1"/>
           <p:nvPr/>
         </p:nvSpPr>
@@ -17755,7 +18970,7 @@
       </p:sp>
       <p:sp>
         <p:nvSpPr>
-          <p:cNvPr id="18" name="TextBox 17"/>
+          <p:cNvPr id="19" name="TextBox 18"/>
           <p:cNvSpPr txBox="1"/>
           <p:nvPr/>
         </p:nvSpPr>
@@ -17794,7 +19009,7 @@
       </p:sp>
       <p:sp>
         <p:nvSpPr>
-          <p:cNvPr id="19" name="TextBox 18"/>
+          <p:cNvPr id="20" name="TextBox 19"/>
           <p:cNvSpPr txBox="1"/>
           <p:nvPr/>
         </p:nvSpPr>
@@ -17833,7 +19048,7 @@
       </p:sp>
       <p:sp>
         <p:nvSpPr>
-          <p:cNvPr id="20" name="TextBox 19"/>
+          <p:cNvPr id="21" name="TextBox 20"/>
           <p:cNvSpPr txBox="1"/>
           <p:nvPr/>
         </p:nvSpPr>
@@ -17872,7 +19087,7 @@
       </p:sp>
       <p:sp>
         <p:nvSpPr>
-          <p:cNvPr id="21" name="TextBox 20"/>
+          <p:cNvPr id="22" name="TextBox 21"/>
           <p:cNvSpPr txBox="1"/>
           <p:nvPr/>
         </p:nvSpPr>
@@ -17911,7 +19126,7 @@
       </p:sp>
       <p:sp>
         <p:nvSpPr>
-          <p:cNvPr id="22" name="TextBox 21"/>
+          <p:cNvPr id="23" name="TextBox 22"/>
           <p:cNvSpPr txBox="1"/>
           <p:nvPr/>
         </p:nvSpPr>
@@ -17950,7 +19165,7 @@
       </p:sp>
       <p:sp>
         <p:nvSpPr>
-          <p:cNvPr id="23" name="TextBox 22"/>
+          <p:cNvPr id="24" name="TextBox 23"/>
           <p:cNvSpPr txBox="1"/>
           <p:nvPr/>
         </p:nvSpPr>
@@ -17989,7 +19204,7 @@
       </p:sp>
       <p:sp>
         <p:nvSpPr>
-          <p:cNvPr id="24" name="TextBox 23"/>
+          <p:cNvPr id="25" name="TextBox 24"/>
           <p:cNvSpPr txBox="1"/>
           <p:nvPr/>
         </p:nvSpPr>
@@ -18028,7 +19243,7 @@
       </p:sp>
       <p:sp>
         <p:nvSpPr>
-          <p:cNvPr id="25" name="TextBox 24"/>
+          <p:cNvPr id="26" name="TextBox 25"/>
           <p:cNvSpPr txBox="1"/>
           <p:nvPr/>
         </p:nvSpPr>
@@ -18131,7 +19346,7 @@
       </p:sp>
       <p:cxnSp>
         <p:nvCxnSpPr>
-          <p:cNvPr id="26" name="Connector 25"/>
+          <p:cNvPr id="27" name="Connector 26"/>
           <p:cNvCxnSpPr/>
           <p:nvPr/>
         </p:nvCxnSpPr>
@@ -18166,7 +19381,7 @@
       </p:cxnSp>
       <p:sp>
         <p:nvSpPr>
-          <p:cNvPr id="27" name="TextBox 26"/>
+          <p:cNvPr id="28" name="TextBox 27"/>
           <p:cNvSpPr txBox="1"/>
           <p:nvPr/>
         </p:nvSpPr>
@@ -18205,7 +19420,7 @@
       </p:sp>
       <p:sp>
         <p:nvSpPr>
-          <p:cNvPr id="28" name="TextBox 27"/>
+          <p:cNvPr id="29" name="TextBox 28"/>
           <p:cNvSpPr txBox="1"/>
           <p:nvPr/>
         </p:nvSpPr>
@@ -18276,7 +19491,7 @@
       </p:sp>
       <p:sp>
         <p:nvSpPr>
-          <p:cNvPr id="29" name="TextBox 28"/>
+          <p:cNvPr id="30" name="TextBox 29"/>
           <p:cNvSpPr txBox="1"/>
           <p:nvPr/>
         </p:nvSpPr>
@@ -18597,12 +19812,57 @@
         </p:nvSpPr>
         <p:spPr>
           <a:xfrm>
+            <a:off x="7306056" y="2660904"/>
+            <a:ext cx="4297680" cy="3840480"/>
+          </a:xfrm>
+          <a:prstGeom prst="roundRect">
+            <a:avLst>
+              <a:gd name="adj" fmla="val 5000"/>
+            </a:avLst>
+          </a:prstGeom>
+          <a:solidFill>
+            <a:srgbClr val="E9EBF0"/>
+          </a:solidFill>
+          <a:ln>
+            <a:noFill/>
+          </a:ln>
+        </p:spPr>
+        <p:style>
+          <a:lnRef idx="1">
+            <a:schemeClr val="accent1"/>
+          </a:lnRef>
+          <a:fillRef idx="3">
+            <a:schemeClr val="accent1"/>
+          </a:fillRef>
+          <a:effectRef idx="2">
+            <a:schemeClr val="accent1"/>
+          </a:effectRef>
+          <a:fontRef idx="minor">
+            <a:schemeClr val="lt1"/>
+          </a:fontRef>
+        </p:style>
+        <p:txBody>
+          <a:bodyPr rtlCol="0" anchor="ctr"/>
+          <a:lstStyle/>
+          <a:p>
+            <a:pPr algn="ctr"/>
+          </a:p>
+        </p:txBody>
+      </p:sp>
+      <p:sp>
+        <p:nvSpPr>
+          <p:cNvPr id="10" name="Rounded Rectangle 9"/>
+          <p:cNvSpPr/>
+          <p:nvPr/>
+        </p:nvSpPr>
+        <p:spPr>
+          <a:xfrm>
             <a:off x="7269480" y="2606040"/>
             <a:ext cx="4297680" cy="3840480"/>
           </a:xfrm>
           <a:prstGeom prst="roundRect">
             <a:avLst>
-              <a:gd name="adj" fmla="val 6000"/>
+              <a:gd name="adj" fmla="val 5000"/>
             </a:avLst>
           </a:prstGeom>
           <a:solidFill>
@@ -18636,7 +19896,7 @@
       </p:sp>
       <p:sp>
         <p:nvSpPr>
-          <p:cNvPr id="10" name="TextBox 9"/>
+          <p:cNvPr id="11" name="TextBox 10"/>
           <p:cNvSpPr txBox="1"/>
           <p:nvPr/>
         </p:nvSpPr>
@@ -18675,7 +19935,52 @@
       </p:sp>
       <p:sp>
         <p:nvSpPr>
-          <p:cNvPr id="11" name="Rounded Rectangle 10"/>
+          <p:cNvPr id="12" name="Rounded Rectangle 11"/>
+          <p:cNvSpPr/>
+          <p:nvPr/>
+        </p:nvSpPr>
+        <p:spPr>
+          <a:xfrm>
+            <a:off x="7488936" y="3209544"/>
+            <a:ext cx="3931920" cy="1417320"/>
+          </a:xfrm>
+          <a:prstGeom prst="roundRect">
+            <a:avLst>
+              <a:gd name="adj" fmla="val 5000"/>
+            </a:avLst>
+          </a:prstGeom>
+          <a:solidFill>
+            <a:srgbClr val="E9EBF0"/>
+          </a:solidFill>
+          <a:ln>
+            <a:noFill/>
+          </a:ln>
+        </p:spPr>
+        <p:style>
+          <a:lnRef idx="1">
+            <a:schemeClr val="accent1"/>
+          </a:lnRef>
+          <a:fillRef idx="3">
+            <a:schemeClr val="accent1"/>
+          </a:fillRef>
+          <a:effectRef idx="2">
+            <a:schemeClr val="accent1"/>
+          </a:effectRef>
+          <a:fontRef idx="minor">
+            <a:schemeClr val="lt1"/>
+          </a:fontRef>
+        </p:style>
+        <p:txBody>
+          <a:bodyPr rtlCol="0" anchor="ctr"/>
+          <a:lstStyle/>
+          <a:p>
+            <a:pPr algn="ctr"/>
+          </a:p>
+        </p:txBody>
+      </p:sp>
+      <p:sp>
+        <p:nvSpPr>
+          <p:cNvPr id="13" name="Rounded Rectangle 12"/>
           <p:cNvSpPr/>
           <p:nvPr/>
         </p:nvSpPr>
@@ -18686,7 +19991,7 @@
           </a:xfrm>
           <a:prstGeom prst="roundRect">
             <a:avLst>
-              <a:gd name="adj" fmla="val 6000"/>
+              <a:gd name="adj" fmla="val 5000"/>
             </a:avLst>
           </a:prstGeom>
           <a:solidFill>
@@ -18722,7 +20027,7 @@
       </p:sp>
       <p:sp>
         <p:nvSpPr>
-          <p:cNvPr id="12" name="TextBox 11"/>
+          <p:cNvPr id="14" name="TextBox 13"/>
           <p:cNvSpPr txBox="1"/>
           <p:nvPr/>
         </p:nvSpPr>
@@ -18761,7 +20066,7 @@
       </p:sp>
       <p:sp>
         <p:nvSpPr>
-          <p:cNvPr id="13" name="TextBox 12"/>
+          <p:cNvPr id="15" name="TextBox 14"/>
           <p:cNvSpPr txBox="1"/>
           <p:nvPr/>
         </p:nvSpPr>
@@ -18816,7 +20121,52 @@
       </p:sp>
       <p:sp>
         <p:nvSpPr>
-          <p:cNvPr id="14" name="Rounded Rectangle 13"/>
+          <p:cNvPr id="16" name="Rounded Rectangle 15"/>
+          <p:cNvSpPr/>
+          <p:nvPr/>
+        </p:nvSpPr>
+        <p:spPr>
+          <a:xfrm>
+            <a:off x="7488936" y="4718303"/>
+            <a:ext cx="3931920" cy="1417320"/>
+          </a:xfrm>
+          <a:prstGeom prst="roundRect">
+            <a:avLst>
+              <a:gd name="adj" fmla="val 5000"/>
+            </a:avLst>
+          </a:prstGeom>
+          <a:solidFill>
+            <a:srgbClr val="E9EBF0"/>
+          </a:solidFill>
+          <a:ln>
+            <a:noFill/>
+          </a:ln>
+        </p:spPr>
+        <p:style>
+          <a:lnRef idx="1">
+            <a:schemeClr val="accent1"/>
+          </a:lnRef>
+          <a:fillRef idx="3">
+            <a:schemeClr val="accent1"/>
+          </a:fillRef>
+          <a:effectRef idx="2">
+            <a:schemeClr val="accent1"/>
+          </a:effectRef>
+          <a:fontRef idx="minor">
+            <a:schemeClr val="lt1"/>
+          </a:fontRef>
+        </p:style>
+        <p:txBody>
+          <a:bodyPr rtlCol="0" anchor="ctr"/>
+          <a:lstStyle/>
+          <a:p>
+            <a:pPr algn="ctr"/>
+          </a:p>
+        </p:txBody>
+      </p:sp>
+      <p:sp>
+        <p:nvSpPr>
+          <p:cNvPr id="17" name="Rounded Rectangle 16"/>
           <p:cNvSpPr/>
           <p:nvPr/>
         </p:nvSpPr>
@@ -18827,7 +20177,7 @@
           </a:xfrm>
           <a:prstGeom prst="roundRect">
             <a:avLst>
-              <a:gd name="adj" fmla="val 6000"/>
+              <a:gd name="adj" fmla="val 5000"/>
             </a:avLst>
           </a:prstGeom>
           <a:solidFill>
@@ -18863,7 +20213,7 @@
       </p:sp>
       <p:sp>
         <p:nvSpPr>
-          <p:cNvPr id="15" name="TextBox 14"/>
+          <p:cNvPr id="18" name="TextBox 17"/>
           <p:cNvSpPr txBox="1"/>
           <p:nvPr/>
         </p:nvSpPr>
@@ -18902,7 +20252,7 @@
       </p:sp>
       <p:sp>
         <p:nvSpPr>
-          <p:cNvPr id="16" name="TextBox 15"/>
+          <p:cNvPr id="19" name="TextBox 18"/>
           <p:cNvSpPr txBox="1"/>
           <p:nvPr/>
         </p:nvSpPr>
@@ -18957,7 +20307,7 @@
       </p:sp>
       <p:sp>
         <p:nvSpPr>
-          <p:cNvPr id="17" name="TextBox 16"/>
+          <p:cNvPr id="20" name="TextBox 19"/>
           <p:cNvSpPr txBox="1"/>
           <p:nvPr/>
         </p:nvSpPr>
@@ -18996,7 +20346,7 @@
       </p:sp>
       <p:sp>
         <p:nvSpPr>
-          <p:cNvPr id="18" name="TextBox 17"/>
+          <p:cNvPr id="21" name="TextBox 20"/>
           <p:cNvSpPr txBox="1"/>
           <p:nvPr/>
         </p:nvSpPr>
@@ -20792,12 +22142,57 @@
         </p:nvSpPr>
         <p:spPr>
           <a:xfrm>
+            <a:off x="676656" y="2157984"/>
+            <a:ext cx="5440680" cy="1965960"/>
+          </a:xfrm>
+          <a:prstGeom prst="roundRect">
+            <a:avLst>
+              <a:gd name="adj" fmla="val 5000"/>
+            </a:avLst>
+          </a:prstGeom>
+          <a:solidFill>
+            <a:srgbClr val="E9EBF0"/>
+          </a:solidFill>
+          <a:ln>
+            <a:noFill/>
+          </a:ln>
+        </p:spPr>
+        <p:style>
+          <a:lnRef idx="1">
+            <a:schemeClr val="accent1"/>
+          </a:lnRef>
+          <a:fillRef idx="3">
+            <a:schemeClr val="accent1"/>
+          </a:fillRef>
+          <a:effectRef idx="2">
+            <a:schemeClr val="accent1"/>
+          </a:effectRef>
+          <a:fontRef idx="minor">
+            <a:schemeClr val="lt1"/>
+          </a:fontRef>
+        </p:style>
+        <p:txBody>
+          <a:bodyPr rtlCol="0" anchor="ctr"/>
+          <a:lstStyle/>
+          <a:p>
+            <a:pPr algn="ctr"/>
+          </a:p>
+        </p:txBody>
+      </p:sp>
+      <p:sp>
+        <p:nvSpPr>
+          <p:cNvPr id="8" name="Rounded Rectangle 7"/>
+          <p:cNvSpPr/>
+          <p:nvPr/>
+        </p:nvSpPr>
+        <p:spPr>
+          <a:xfrm>
             <a:off x="640080" y="2103120"/>
             <a:ext cx="5440680" cy="1965960"/>
           </a:xfrm>
           <a:prstGeom prst="roundRect">
             <a:avLst>
-              <a:gd name="adj" fmla="val 6000"/>
+              <a:gd name="adj" fmla="val 5000"/>
             </a:avLst>
           </a:prstGeom>
           <a:solidFill>
@@ -20833,7 +22228,7 @@
       </p:sp>
       <p:sp>
         <p:nvSpPr>
-          <p:cNvPr id="8" name="TextBox 7"/>
+          <p:cNvPr id="9" name="TextBox 8"/>
           <p:cNvSpPr txBox="1"/>
           <p:nvPr/>
         </p:nvSpPr>
@@ -20872,7 +22267,7 @@
       </p:sp>
       <p:sp>
         <p:nvSpPr>
-          <p:cNvPr id="9" name="TextBox 8"/>
+          <p:cNvPr id="10" name="TextBox 9"/>
           <p:cNvSpPr txBox="1"/>
           <p:nvPr/>
         </p:nvSpPr>
@@ -20911,7 +22306,7 @@
       </p:sp>
       <p:sp>
         <p:nvSpPr>
-          <p:cNvPr id="10" name="TextBox 9"/>
+          <p:cNvPr id="11" name="TextBox 10"/>
           <p:cNvSpPr txBox="1"/>
           <p:nvPr/>
         </p:nvSpPr>
@@ -20950,7 +22345,7 @@
       </p:sp>
       <p:cxnSp>
         <p:nvCxnSpPr>
-          <p:cNvPr id="11" name="Connector 10"/>
+          <p:cNvPr id="12" name="Connector 11"/>
           <p:cNvCxnSpPr/>
           <p:nvPr/>
         </p:nvCxnSpPr>
@@ -20985,7 +22380,7 @@
       </p:cxnSp>
       <p:sp>
         <p:nvSpPr>
-          <p:cNvPr id="12" name="TextBox 11"/>
+          <p:cNvPr id="13" name="TextBox 12"/>
           <p:cNvSpPr txBox="1"/>
           <p:nvPr/>
         </p:nvSpPr>
@@ -21024,7 +22419,52 @@
       </p:sp>
       <p:sp>
         <p:nvSpPr>
-          <p:cNvPr id="13" name="Rounded Rectangle 12"/>
+          <p:cNvPr id="14" name="Rounded Rectangle 13"/>
+          <p:cNvSpPr/>
+          <p:nvPr/>
+        </p:nvSpPr>
+        <p:spPr>
+          <a:xfrm>
+            <a:off x="6300216" y="2157984"/>
+            <a:ext cx="5440680" cy="1965960"/>
+          </a:xfrm>
+          <a:prstGeom prst="roundRect">
+            <a:avLst>
+              <a:gd name="adj" fmla="val 5000"/>
+            </a:avLst>
+          </a:prstGeom>
+          <a:solidFill>
+            <a:srgbClr val="E9EBF0"/>
+          </a:solidFill>
+          <a:ln>
+            <a:noFill/>
+          </a:ln>
+        </p:spPr>
+        <p:style>
+          <a:lnRef idx="1">
+            <a:schemeClr val="accent1"/>
+          </a:lnRef>
+          <a:fillRef idx="3">
+            <a:schemeClr val="accent1"/>
+          </a:fillRef>
+          <a:effectRef idx="2">
+            <a:schemeClr val="accent1"/>
+          </a:effectRef>
+          <a:fontRef idx="minor">
+            <a:schemeClr val="lt1"/>
+          </a:fontRef>
+        </p:style>
+        <p:txBody>
+          <a:bodyPr rtlCol="0" anchor="ctr"/>
+          <a:lstStyle/>
+          <a:p>
+            <a:pPr algn="ctr"/>
+          </a:p>
+        </p:txBody>
+      </p:sp>
+      <p:sp>
+        <p:nvSpPr>
+          <p:cNvPr id="15" name="Rounded Rectangle 14"/>
           <p:cNvSpPr/>
           <p:nvPr/>
         </p:nvSpPr>
@@ -21035,7 +22475,7 @@
           </a:xfrm>
           <a:prstGeom prst="roundRect">
             <a:avLst>
-              <a:gd name="adj" fmla="val 6000"/>
+              <a:gd name="adj" fmla="val 5000"/>
             </a:avLst>
           </a:prstGeom>
           <a:solidFill>
@@ -21071,7 +22511,7 @@
       </p:sp>
       <p:sp>
         <p:nvSpPr>
-          <p:cNvPr id="14" name="TextBox 13"/>
+          <p:cNvPr id="16" name="TextBox 15"/>
           <p:cNvSpPr txBox="1"/>
           <p:nvPr/>
         </p:nvSpPr>
@@ -21110,7 +22550,7 @@
       </p:sp>
       <p:sp>
         <p:nvSpPr>
-          <p:cNvPr id="15" name="TextBox 14"/>
+          <p:cNvPr id="17" name="TextBox 16"/>
           <p:cNvSpPr txBox="1"/>
           <p:nvPr/>
         </p:nvSpPr>
@@ -21149,7 +22589,7 @@
       </p:sp>
       <p:sp>
         <p:nvSpPr>
-          <p:cNvPr id="16" name="TextBox 15"/>
+          <p:cNvPr id="18" name="TextBox 17"/>
           <p:cNvSpPr txBox="1"/>
           <p:nvPr/>
         </p:nvSpPr>
@@ -21188,7 +22628,7 @@
       </p:sp>
       <p:cxnSp>
         <p:nvCxnSpPr>
-          <p:cNvPr id="17" name="Connector 16"/>
+          <p:cNvPr id="19" name="Connector 18"/>
           <p:cNvCxnSpPr/>
           <p:nvPr/>
         </p:nvCxnSpPr>
@@ -21223,7 +22663,7 @@
       </p:cxnSp>
       <p:sp>
         <p:nvSpPr>
-          <p:cNvPr id="18" name="TextBox 17"/>
+          <p:cNvPr id="20" name="TextBox 19"/>
           <p:cNvSpPr txBox="1"/>
           <p:nvPr/>
         </p:nvSpPr>
@@ -21262,7 +22702,52 @@
       </p:sp>
       <p:sp>
         <p:nvSpPr>
-          <p:cNvPr id="19" name="Rounded Rectangle 18"/>
+          <p:cNvPr id="21" name="Rounded Rectangle 20"/>
+          <p:cNvSpPr/>
+          <p:nvPr/>
+        </p:nvSpPr>
+        <p:spPr>
+          <a:xfrm>
+            <a:off x="676656" y="4352543"/>
+            <a:ext cx="5440680" cy="1965960"/>
+          </a:xfrm>
+          <a:prstGeom prst="roundRect">
+            <a:avLst>
+              <a:gd name="adj" fmla="val 5000"/>
+            </a:avLst>
+          </a:prstGeom>
+          <a:solidFill>
+            <a:srgbClr val="E9EBF0"/>
+          </a:solidFill>
+          <a:ln>
+            <a:noFill/>
+          </a:ln>
+        </p:spPr>
+        <p:style>
+          <a:lnRef idx="1">
+            <a:schemeClr val="accent1"/>
+          </a:lnRef>
+          <a:fillRef idx="3">
+            <a:schemeClr val="accent1"/>
+          </a:fillRef>
+          <a:effectRef idx="2">
+            <a:schemeClr val="accent1"/>
+          </a:effectRef>
+          <a:fontRef idx="minor">
+            <a:schemeClr val="lt1"/>
+          </a:fontRef>
+        </p:style>
+        <p:txBody>
+          <a:bodyPr rtlCol="0" anchor="ctr"/>
+          <a:lstStyle/>
+          <a:p>
+            <a:pPr algn="ctr"/>
+          </a:p>
+        </p:txBody>
+      </p:sp>
+      <p:sp>
+        <p:nvSpPr>
+          <p:cNvPr id="22" name="Rounded Rectangle 21"/>
           <p:cNvSpPr/>
           <p:nvPr/>
         </p:nvSpPr>
@@ -21273,7 +22758,7 @@
           </a:xfrm>
           <a:prstGeom prst="roundRect">
             <a:avLst>
-              <a:gd name="adj" fmla="val 6000"/>
+              <a:gd name="adj" fmla="val 5000"/>
             </a:avLst>
           </a:prstGeom>
           <a:solidFill>
@@ -21309,7 +22794,7 @@
       </p:sp>
       <p:sp>
         <p:nvSpPr>
-          <p:cNvPr id="20" name="TextBox 19"/>
+          <p:cNvPr id="23" name="TextBox 22"/>
           <p:cNvSpPr txBox="1"/>
           <p:nvPr/>
         </p:nvSpPr>
@@ -21348,7 +22833,7 @@
       </p:sp>
       <p:sp>
         <p:nvSpPr>
-          <p:cNvPr id="21" name="TextBox 20"/>
+          <p:cNvPr id="24" name="TextBox 23"/>
           <p:cNvSpPr txBox="1"/>
           <p:nvPr/>
         </p:nvSpPr>
@@ -21387,7 +22872,7 @@
       </p:sp>
       <p:sp>
         <p:nvSpPr>
-          <p:cNvPr id="22" name="TextBox 21"/>
+          <p:cNvPr id="25" name="TextBox 24"/>
           <p:cNvSpPr txBox="1"/>
           <p:nvPr/>
         </p:nvSpPr>
@@ -21426,7 +22911,7 @@
       </p:sp>
       <p:cxnSp>
         <p:nvCxnSpPr>
-          <p:cNvPr id="23" name="Connector 22"/>
+          <p:cNvPr id="26" name="Connector 25"/>
           <p:cNvCxnSpPr/>
           <p:nvPr/>
         </p:nvCxnSpPr>
@@ -21461,7 +22946,7 @@
       </p:cxnSp>
       <p:sp>
         <p:nvSpPr>
-          <p:cNvPr id="24" name="TextBox 23"/>
+          <p:cNvPr id="27" name="TextBox 26"/>
           <p:cNvSpPr txBox="1"/>
           <p:nvPr/>
         </p:nvSpPr>
@@ -21500,7 +22985,52 @@
       </p:sp>
       <p:sp>
         <p:nvSpPr>
-          <p:cNvPr id="25" name="Rounded Rectangle 24"/>
+          <p:cNvPr id="28" name="Rounded Rectangle 27"/>
+          <p:cNvSpPr/>
+          <p:nvPr/>
+        </p:nvSpPr>
+        <p:spPr>
+          <a:xfrm>
+            <a:off x="6300216" y="4352543"/>
+            <a:ext cx="5440680" cy="1965960"/>
+          </a:xfrm>
+          <a:prstGeom prst="roundRect">
+            <a:avLst>
+              <a:gd name="adj" fmla="val 5000"/>
+            </a:avLst>
+          </a:prstGeom>
+          <a:solidFill>
+            <a:srgbClr val="E9EBF0"/>
+          </a:solidFill>
+          <a:ln>
+            <a:noFill/>
+          </a:ln>
+        </p:spPr>
+        <p:style>
+          <a:lnRef idx="1">
+            <a:schemeClr val="accent1"/>
+          </a:lnRef>
+          <a:fillRef idx="3">
+            <a:schemeClr val="accent1"/>
+          </a:fillRef>
+          <a:effectRef idx="2">
+            <a:schemeClr val="accent1"/>
+          </a:effectRef>
+          <a:fontRef idx="minor">
+            <a:schemeClr val="lt1"/>
+          </a:fontRef>
+        </p:style>
+        <p:txBody>
+          <a:bodyPr rtlCol="0" anchor="ctr"/>
+          <a:lstStyle/>
+          <a:p>
+            <a:pPr algn="ctr"/>
+          </a:p>
+        </p:txBody>
+      </p:sp>
+      <p:sp>
+        <p:nvSpPr>
+          <p:cNvPr id="29" name="Rounded Rectangle 28"/>
           <p:cNvSpPr/>
           <p:nvPr/>
         </p:nvSpPr>
@@ -21511,7 +23041,7 @@
           </a:xfrm>
           <a:prstGeom prst="roundRect">
             <a:avLst>
-              <a:gd name="adj" fmla="val 6000"/>
+              <a:gd name="adj" fmla="val 5000"/>
             </a:avLst>
           </a:prstGeom>
           <a:solidFill>
@@ -21547,7 +23077,7 @@
       </p:sp>
       <p:sp>
         <p:nvSpPr>
-          <p:cNvPr id="26" name="TextBox 25"/>
+          <p:cNvPr id="30" name="TextBox 29"/>
           <p:cNvSpPr txBox="1"/>
           <p:nvPr/>
         </p:nvSpPr>
@@ -21586,7 +23116,7 @@
       </p:sp>
       <p:sp>
         <p:nvSpPr>
-          <p:cNvPr id="27" name="TextBox 26"/>
+          <p:cNvPr id="31" name="TextBox 30"/>
           <p:cNvSpPr txBox="1"/>
           <p:nvPr/>
         </p:nvSpPr>
@@ -21625,7 +23155,7 @@
       </p:sp>
       <p:sp>
         <p:nvSpPr>
-          <p:cNvPr id="28" name="TextBox 27"/>
+          <p:cNvPr id="32" name="TextBox 31"/>
           <p:cNvSpPr txBox="1"/>
           <p:nvPr/>
         </p:nvSpPr>
@@ -21664,7 +23194,7 @@
       </p:sp>
       <p:cxnSp>
         <p:nvCxnSpPr>
-          <p:cNvPr id="29" name="Connector 28"/>
+          <p:cNvPr id="33" name="Connector 32"/>
           <p:cNvCxnSpPr/>
           <p:nvPr/>
         </p:nvCxnSpPr>
@@ -21699,7 +23229,7 @@
       </p:cxnSp>
       <p:sp>
         <p:nvSpPr>
-          <p:cNvPr id="30" name="TextBox 29"/>
+          <p:cNvPr id="34" name="TextBox 33"/>
           <p:cNvSpPr txBox="1"/>
           <p:nvPr/>
         </p:nvSpPr>
@@ -21957,12 +23487,57 @@
         </p:nvSpPr>
         <p:spPr>
           <a:xfrm>
+            <a:off x="676656" y="2157984"/>
+            <a:ext cx="10881360" cy="914400"/>
+          </a:xfrm>
+          <a:prstGeom prst="roundRect">
+            <a:avLst>
+              <a:gd name="adj" fmla="val 5000"/>
+            </a:avLst>
+          </a:prstGeom>
+          <a:solidFill>
+            <a:srgbClr val="E9EBF0"/>
+          </a:solidFill>
+          <a:ln>
+            <a:noFill/>
+          </a:ln>
+        </p:spPr>
+        <p:style>
+          <a:lnRef idx="1">
+            <a:schemeClr val="accent1"/>
+          </a:lnRef>
+          <a:fillRef idx="3">
+            <a:schemeClr val="accent1"/>
+          </a:fillRef>
+          <a:effectRef idx="2">
+            <a:schemeClr val="accent1"/>
+          </a:effectRef>
+          <a:fontRef idx="minor">
+            <a:schemeClr val="lt1"/>
+          </a:fontRef>
+        </p:style>
+        <p:txBody>
+          <a:bodyPr rtlCol="0" anchor="ctr"/>
+          <a:lstStyle/>
+          <a:p>
+            <a:pPr algn="ctr"/>
+          </a:p>
+        </p:txBody>
+      </p:sp>
+      <p:sp>
+        <p:nvSpPr>
+          <p:cNvPr id="8" name="Rounded Rectangle 7"/>
+          <p:cNvSpPr/>
+          <p:nvPr/>
+        </p:nvSpPr>
+        <p:spPr>
+          <a:xfrm>
             <a:off x="640080" y="2103120"/>
             <a:ext cx="10881360" cy="914400"/>
           </a:xfrm>
           <a:prstGeom prst="roundRect">
             <a:avLst>
-              <a:gd name="adj" fmla="val 6000"/>
+              <a:gd name="adj" fmla="val 5000"/>
             </a:avLst>
           </a:prstGeom>
           <a:solidFill>
@@ -21998,14 +23573,14 @@
       </p:sp>
       <p:sp>
         <p:nvSpPr>
-          <p:cNvPr id="8" name="Rectangle 7"/>
+          <p:cNvPr id="9" name="Rectangle 8"/>
           <p:cNvSpPr/>
           <p:nvPr/>
         </p:nvSpPr>
         <p:spPr>
           <a:xfrm>
             <a:off x="640080" y="2103120"/>
-            <a:ext cx="91440" cy="914400"/>
+            <a:ext cx="109728" cy="914400"/>
           </a:xfrm>
           <a:prstGeom prst="rect">
             <a:avLst/>
@@ -22041,13 +23616,13 @@
       </p:sp>
       <p:sp>
         <p:nvSpPr>
-          <p:cNvPr id="9" name="TextBox 8"/>
-          <p:cNvSpPr txBox="1"/>
-          <p:nvPr/>
-        </p:nvSpPr>
-        <p:spPr>
-          <a:xfrm>
-            <a:off x="868680" y="2267712"/>
+          <p:cNvPr id="10" name="TextBox 9"/>
+          <p:cNvSpPr txBox="1"/>
+          <p:nvPr/>
+        </p:nvSpPr>
+        <p:spPr>
+          <a:xfrm>
+            <a:off x="914400" y="2267712"/>
             <a:ext cx="5029200" cy="365760"/>
           </a:xfrm>
           <a:prstGeom prst="rect">
@@ -22067,7 +23642,7 @@
               </a:lnSpc>
             </a:pPr>
             <a:r>
-              <a:rPr sz="1400" b="1">
+              <a:rPr sz="1600" b="1">
                 <a:solidFill>
                   <a:srgbClr val="0F141F"/>
                 </a:solidFill>
@@ -22080,13 +23655,13 @@
       </p:sp>
       <p:sp>
         <p:nvSpPr>
-          <p:cNvPr id="10" name="TextBox 9"/>
-          <p:cNvSpPr txBox="1"/>
-          <p:nvPr/>
-        </p:nvSpPr>
-        <p:spPr>
-          <a:xfrm>
-            <a:off x="868680" y="2633472"/>
+          <p:cNvPr id="11" name="TextBox 10"/>
+          <p:cNvSpPr txBox="1"/>
+          <p:nvPr/>
+        </p:nvSpPr>
+        <p:spPr>
+          <a:xfrm>
+            <a:off x="914400" y="2651760"/>
             <a:ext cx="6400800" cy="320040"/>
           </a:xfrm>
           <a:prstGeom prst="rect">
@@ -22106,7 +23681,7 @@
               </a:lnSpc>
             </a:pPr>
             <a:r>
-              <a:rPr sz="1000" b="0">
+              <a:rPr sz="1200" b="0">
                 <a:solidFill>
                   <a:srgbClr val="424B5C"/>
                 </a:solidFill>
@@ -22119,7 +23694,7 @@
       </p:sp>
       <p:sp>
         <p:nvSpPr>
-          <p:cNvPr id="11" name="TextBox 10"/>
+          <p:cNvPr id="12" name="TextBox 11"/>
           <p:cNvSpPr txBox="1"/>
           <p:nvPr/>
         </p:nvSpPr>
@@ -22145,7 +23720,7 @@
               </a:lnSpc>
             </a:pPr>
             <a:r>
-              <a:rPr sz="1100" b="1">
+              <a:rPr sz="1300" b="1">
                 <a:solidFill>
                   <a:srgbClr val="10B981"/>
                 </a:solidFill>
@@ -22158,7 +23733,52 @@
       </p:sp>
       <p:sp>
         <p:nvSpPr>
-          <p:cNvPr id="12" name="Rounded Rectangle 11"/>
+          <p:cNvPr id="13" name="Rounded Rectangle 12"/>
+          <p:cNvSpPr/>
+          <p:nvPr/>
+        </p:nvSpPr>
+        <p:spPr>
+          <a:xfrm>
+            <a:off x="676656" y="3191256"/>
+            <a:ext cx="10881360" cy="914400"/>
+          </a:xfrm>
+          <a:prstGeom prst="roundRect">
+            <a:avLst>
+              <a:gd name="adj" fmla="val 5000"/>
+            </a:avLst>
+          </a:prstGeom>
+          <a:solidFill>
+            <a:srgbClr val="E9EBF0"/>
+          </a:solidFill>
+          <a:ln>
+            <a:noFill/>
+          </a:ln>
+        </p:spPr>
+        <p:style>
+          <a:lnRef idx="1">
+            <a:schemeClr val="accent1"/>
+          </a:lnRef>
+          <a:fillRef idx="3">
+            <a:schemeClr val="accent1"/>
+          </a:fillRef>
+          <a:effectRef idx="2">
+            <a:schemeClr val="accent1"/>
+          </a:effectRef>
+          <a:fontRef idx="minor">
+            <a:schemeClr val="lt1"/>
+          </a:fontRef>
+        </p:style>
+        <p:txBody>
+          <a:bodyPr rtlCol="0" anchor="ctr"/>
+          <a:lstStyle/>
+          <a:p>
+            <a:pPr algn="ctr"/>
+          </a:p>
+        </p:txBody>
+      </p:sp>
+      <p:sp>
+        <p:nvSpPr>
+          <p:cNvPr id="14" name="Rounded Rectangle 13"/>
           <p:cNvSpPr/>
           <p:nvPr/>
         </p:nvSpPr>
@@ -22169,7 +23789,7 @@
           </a:xfrm>
           <a:prstGeom prst="roundRect">
             <a:avLst>
-              <a:gd name="adj" fmla="val 6000"/>
+              <a:gd name="adj" fmla="val 5000"/>
             </a:avLst>
           </a:prstGeom>
           <a:solidFill>
@@ -22205,14 +23825,14 @@
       </p:sp>
       <p:sp>
         <p:nvSpPr>
-          <p:cNvPr id="13" name="Rectangle 12"/>
+          <p:cNvPr id="15" name="Rectangle 14"/>
           <p:cNvSpPr/>
           <p:nvPr/>
         </p:nvSpPr>
         <p:spPr>
           <a:xfrm>
             <a:off x="640080" y="3136391"/>
-            <a:ext cx="91440" cy="914400"/>
+            <a:ext cx="109728" cy="914400"/>
           </a:xfrm>
           <a:prstGeom prst="rect">
             <a:avLst/>
@@ -22248,13 +23868,13 @@
       </p:sp>
       <p:sp>
         <p:nvSpPr>
-          <p:cNvPr id="14" name="TextBox 13"/>
-          <p:cNvSpPr txBox="1"/>
-          <p:nvPr/>
-        </p:nvSpPr>
-        <p:spPr>
-          <a:xfrm>
-            <a:off x="868680" y="3300984"/>
+          <p:cNvPr id="16" name="TextBox 15"/>
+          <p:cNvSpPr txBox="1"/>
+          <p:nvPr/>
+        </p:nvSpPr>
+        <p:spPr>
+          <a:xfrm>
+            <a:off x="914400" y="3300984"/>
             <a:ext cx="5029200" cy="365760"/>
           </a:xfrm>
           <a:prstGeom prst="rect">
@@ -22274,7 +23894,7 @@
               </a:lnSpc>
             </a:pPr>
             <a:r>
-              <a:rPr sz="1400" b="1">
+              <a:rPr sz="1600" b="1">
                 <a:solidFill>
                   <a:srgbClr val="0F141F"/>
                 </a:solidFill>
@@ -22287,13 +23907,13 @@
       </p:sp>
       <p:sp>
         <p:nvSpPr>
-          <p:cNvPr id="15" name="TextBox 14"/>
-          <p:cNvSpPr txBox="1"/>
-          <p:nvPr/>
-        </p:nvSpPr>
-        <p:spPr>
-          <a:xfrm>
-            <a:off x="868680" y="3666744"/>
+          <p:cNvPr id="17" name="TextBox 16"/>
+          <p:cNvSpPr txBox="1"/>
+          <p:nvPr/>
+        </p:nvSpPr>
+        <p:spPr>
+          <a:xfrm>
+            <a:off x="914400" y="3685031"/>
             <a:ext cx="6400800" cy="320040"/>
           </a:xfrm>
           <a:prstGeom prst="rect">
@@ -22313,7 +23933,7 @@
               </a:lnSpc>
             </a:pPr>
             <a:r>
-              <a:rPr sz="1000" b="0">
+              <a:rPr sz="1200" b="0">
                 <a:solidFill>
                   <a:srgbClr val="424B5C"/>
                 </a:solidFill>
@@ -22326,7 +23946,7 @@
       </p:sp>
       <p:sp>
         <p:nvSpPr>
-          <p:cNvPr id="16" name="TextBox 15"/>
+          <p:cNvPr id="18" name="TextBox 17"/>
           <p:cNvSpPr txBox="1"/>
           <p:nvPr/>
         </p:nvSpPr>
@@ -22352,7 +23972,7 @@
               </a:lnSpc>
             </a:pPr>
             <a:r>
-              <a:rPr sz="1100" b="1">
+              <a:rPr sz="1300" b="1">
                 <a:solidFill>
                   <a:srgbClr val="F59E0B"/>
                 </a:solidFill>
@@ -22365,7 +23985,52 @@
       </p:sp>
       <p:sp>
         <p:nvSpPr>
-          <p:cNvPr id="17" name="Rounded Rectangle 16"/>
+          <p:cNvPr id="19" name="Rounded Rectangle 18"/>
+          <p:cNvSpPr/>
+          <p:nvPr/>
+        </p:nvSpPr>
+        <p:spPr>
+          <a:xfrm>
+            <a:off x="676656" y="4224527"/>
+            <a:ext cx="10881360" cy="914400"/>
+          </a:xfrm>
+          <a:prstGeom prst="roundRect">
+            <a:avLst>
+              <a:gd name="adj" fmla="val 5000"/>
+            </a:avLst>
+          </a:prstGeom>
+          <a:solidFill>
+            <a:srgbClr val="E9EBF0"/>
+          </a:solidFill>
+          <a:ln>
+            <a:noFill/>
+          </a:ln>
+        </p:spPr>
+        <p:style>
+          <a:lnRef idx="1">
+            <a:schemeClr val="accent1"/>
+          </a:lnRef>
+          <a:fillRef idx="3">
+            <a:schemeClr val="accent1"/>
+          </a:fillRef>
+          <a:effectRef idx="2">
+            <a:schemeClr val="accent1"/>
+          </a:effectRef>
+          <a:fontRef idx="minor">
+            <a:schemeClr val="lt1"/>
+          </a:fontRef>
+        </p:style>
+        <p:txBody>
+          <a:bodyPr rtlCol="0" anchor="ctr"/>
+          <a:lstStyle/>
+          <a:p>
+            <a:pPr algn="ctr"/>
+          </a:p>
+        </p:txBody>
+      </p:sp>
+      <p:sp>
+        <p:nvSpPr>
+          <p:cNvPr id="20" name="Rounded Rectangle 19"/>
           <p:cNvSpPr/>
           <p:nvPr/>
         </p:nvSpPr>
@@ -22376,7 +24041,7 @@
           </a:xfrm>
           <a:prstGeom prst="roundRect">
             <a:avLst>
-              <a:gd name="adj" fmla="val 6000"/>
+              <a:gd name="adj" fmla="val 5000"/>
             </a:avLst>
           </a:prstGeom>
           <a:solidFill>
@@ -22412,14 +24077,14 @@
       </p:sp>
       <p:sp>
         <p:nvSpPr>
-          <p:cNvPr id="18" name="Rectangle 17"/>
+          <p:cNvPr id="21" name="Rectangle 20"/>
           <p:cNvSpPr/>
           <p:nvPr/>
         </p:nvSpPr>
         <p:spPr>
           <a:xfrm>
             <a:off x="640080" y="4169663"/>
-            <a:ext cx="91440" cy="914400"/>
+            <a:ext cx="109728" cy="914400"/>
           </a:xfrm>
           <a:prstGeom prst="rect">
             <a:avLst/>
@@ -22455,13 +24120,13 @@
       </p:sp>
       <p:sp>
         <p:nvSpPr>
-          <p:cNvPr id="19" name="TextBox 18"/>
-          <p:cNvSpPr txBox="1"/>
-          <p:nvPr/>
-        </p:nvSpPr>
-        <p:spPr>
-          <a:xfrm>
-            <a:off x="868680" y="4334255"/>
+          <p:cNvPr id="22" name="TextBox 21"/>
+          <p:cNvSpPr txBox="1"/>
+          <p:nvPr/>
+        </p:nvSpPr>
+        <p:spPr>
+          <a:xfrm>
+            <a:off x="914400" y="4334255"/>
             <a:ext cx="5029200" cy="365760"/>
           </a:xfrm>
           <a:prstGeom prst="rect">
@@ -22481,7 +24146,7 @@
               </a:lnSpc>
             </a:pPr>
             <a:r>
-              <a:rPr sz="1400" b="1">
+              <a:rPr sz="1600" b="1">
                 <a:solidFill>
                   <a:srgbClr val="0F141F"/>
                 </a:solidFill>
@@ -22494,13 +24159,13 @@
       </p:sp>
       <p:sp>
         <p:nvSpPr>
-          <p:cNvPr id="20" name="TextBox 19"/>
-          <p:cNvSpPr txBox="1"/>
-          <p:nvPr/>
-        </p:nvSpPr>
-        <p:spPr>
-          <a:xfrm>
-            <a:off x="868680" y="4700016"/>
+          <p:cNvPr id="23" name="TextBox 22"/>
+          <p:cNvSpPr txBox="1"/>
+          <p:nvPr/>
+        </p:nvSpPr>
+        <p:spPr>
+          <a:xfrm>
+            <a:off x="914400" y="4718303"/>
             <a:ext cx="6400800" cy="320040"/>
           </a:xfrm>
           <a:prstGeom prst="rect">
@@ -22520,7 +24185,7 @@
               </a:lnSpc>
             </a:pPr>
             <a:r>
-              <a:rPr sz="1000" b="0">
+              <a:rPr sz="1200" b="0">
                 <a:solidFill>
                   <a:srgbClr val="424B5C"/>
                 </a:solidFill>
@@ -22533,7 +24198,7 @@
       </p:sp>
       <p:sp>
         <p:nvSpPr>
-          <p:cNvPr id="21" name="TextBox 20"/>
+          <p:cNvPr id="24" name="TextBox 23"/>
           <p:cNvSpPr txBox="1"/>
           <p:nvPr/>
         </p:nvSpPr>
@@ -22559,7 +24224,7 @@
               </a:lnSpc>
             </a:pPr>
             <a:r>
-              <a:rPr sz="1100" b="1">
+              <a:rPr sz="1300" b="1">
                 <a:solidFill>
                   <a:srgbClr val="4F46E5"/>
                 </a:solidFill>
@@ -22572,7 +24237,52 @@
       </p:sp>
       <p:sp>
         <p:nvSpPr>
-          <p:cNvPr id="22" name="Rounded Rectangle 21"/>
+          <p:cNvPr id="25" name="Rounded Rectangle 24"/>
+          <p:cNvSpPr/>
+          <p:nvPr/>
+        </p:nvSpPr>
+        <p:spPr>
+          <a:xfrm>
+            <a:off x="676656" y="5257799"/>
+            <a:ext cx="10881360" cy="914400"/>
+          </a:xfrm>
+          <a:prstGeom prst="roundRect">
+            <a:avLst>
+              <a:gd name="adj" fmla="val 5000"/>
+            </a:avLst>
+          </a:prstGeom>
+          <a:solidFill>
+            <a:srgbClr val="E9EBF0"/>
+          </a:solidFill>
+          <a:ln>
+            <a:noFill/>
+          </a:ln>
+        </p:spPr>
+        <p:style>
+          <a:lnRef idx="1">
+            <a:schemeClr val="accent1"/>
+          </a:lnRef>
+          <a:fillRef idx="3">
+            <a:schemeClr val="accent1"/>
+          </a:fillRef>
+          <a:effectRef idx="2">
+            <a:schemeClr val="accent1"/>
+          </a:effectRef>
+          <a:fontRef idx="minor">
+            <a:schemeClr val="lt1"/>
+          </a:fontRef>
+        </p:style>
+        <p:txBody>
+          <a:bodyPr rtlCol="0" anchor="ctr"/>
+          <a:lstStyle/>
+          <a:p>
+            <a:pPr algn="ctr"/>
+          </a:p>
+        </p:txBody>
+      </p:sp>
+      <p:sp>
+        <p:nvSpPr>
+          <p:cNvPr id="26" name="Rounded Rectangle 25"/>
           <p:cNvSpPr/>
           <p:nvPr/>
         </p:nvSpPr>
@@ -22583,7 +24293,7 @@
           </a:xfrm>
           <a:prstGeom prst="roundRect">
             <a:avLst>
-              <a:gd name="adj" fmla="val 6000"/>
+              <a:gd name="adj" fmla="val 5000"/>
             </a:avLst>
           </a:prstGeom>
           <a:solidFill>
@@ -22619,14 +24329,14 @@
       </p:sp>
       <p:sp>
         <p:nvSpPr>
-          <p:cNvPr id="23" name="Rectangle 22"/>
+          <p:cNvPr id="27" name="Rectangle 26"/>
           <p:cNvSpPr/>
           <p:nvPr/>
         </p:nvSpPr>
         <p:spPr>
           <a:xfrm>
             <a:off x="640080" y="5202936"/>
-            <a:ext cx="91440" cy="914400"/>
+            <a:ext cx="109728" cy="914400"/>
           </a:xfrm>
           <a:prstGeom prst="rect">
             <a:avLst/>
@@ -22662,13 +24372,13 @@
       </p:sp>
       <p:sp>
         <p:nvSpPr>
-          <p:cNvPr id="24" name="TextBox 23"/>
-          <p:cNvSpPr txBox="1"/>
-          <p:nvPr/>
-        </p:nvSpPr>
-        <p:spPr>
-          <a:xfrm>
-            <a:off x="868680" y="5367527"/>
+          <p:cNvPr id="28" name="TextBox 27"/>
+          <p:cNvSpPr txBox="1"/>
+          <p:nvPr/>
+        </p:nvSpPr>
+        <p:spPr>
+          <a:xfrm>
+            <a:off x="914400" y="5367527"/>
             <a:ext cx="5029200" cy="365760"/>
           </a:xfrm>
           <a:prstGeom prst="rect">
@@ -22688,7 +24398,7 @@
               </a:lnSpc>
             </a:pPr>
             <a:r>
-              <a:rPr sz="1400" b="1">
+              <a:rPr sz="1600" b="1">
                 <a:solidFill>
                   <a:srgbClr val="0F141F"/>
                 </a:solidFill>
@@ -22701,13 +24411,13 @@
       </p:sp>
       <p:sp>
         <p:nvSpPr>
-          <p:cNvPr id="25" name="TextBox 24"/>
-          <p:cNvSpPr txBox="1"/>
-          <p:nvPr/>
-        </p:nvSpPr>
-        <p:spPr>
-          <a:xfrm>
-            <a:off x="868680" y="5733288"/>
+          <p:cNvPr id="29" name="TextBox 28"/>
+          <p:cNvSpPr txBox="1"/>
+          <p:nvPr/>
+        </p:nvSpPr>
+        <p:spPr>
+          <a:xfrm>
+            <a:off x="914400" y="5751575"/>
             <a:ext cx="6400800" cy="320040"/>
           </a:xfrm>
           <a:prstGeom prst="rect">
@@ -22727,7 +24437,7 @@
               </a:lnSpc>
             </a:pPr>
             <a:r>
-              <a:rPr sz="1000" b="0">
+              <a:rPr sz="1200" b="0">
                 <a:solidFill>
                   <a:srgbClr val="424B5C"/>
                 </a:solidFill>
@@ -22740,7 +24450,7 @@
       </p:sp>
       <p:sp>
         <p:nvSpPr>
-          <p:cNvPr id="26" name="TextBox 25"/>
+          <p:cNvPr id="30" name="TextBox 29"/>
           <p:cNvSpPr txBox="1"/>
           <p:nvPr/>
         </p:nvSpPr>
@@ -22766,7 +24476,7 @@
               </a:lnSpc>
             </a:pPr>
             <a:r>
-              <a:rPr sz="1100" b="1">
+              <a:rPr sz="1300" b="1">
                 <a:solidFill>
                   <a:srgbClr val="EC4899"/>
                 </a:solidFill>
@@ -22998,12 +24708,57 @@
         </p:nvSpPr>
         <p:spPr>
           <a:xfrm>
+            <a:off x="676656" y="2157984"/>
+            <a:ext cx="5440680" cy="1965960"/>
+          </a:xfrm>
+          <a:prstGeom prst="roundRect">
+            <a:avLst>
+              <a:gd name="adj" fmla="val 5000"/>
+            </a:avLst>
+          </a:prstGeom>
+          <a:solidFill>
+            <a:srgbClr val="E9EBF0"/>
+          </a:solidFill>
+          <a:ln>
+            <a:noFill/>
+          </a:ln>
+        </p:spPr>
+        <p:style>
+          <a:lnRef idx="1">
+            <a:schemeClr val="accent1"/>
+          </a:lnRef>
+          <a:fillRef idx="3">
+            <a:schemeClr val="accent1"/>
+          </a:fillRef>
+          <a:effectRef idx="2">
+            <a:schemeClr val="accent1"/>
+          </a:effectRef>
+          <a:fontRef idx="minor">
+            <a:schemeClr val="lt1"/>
+          </a:fontRef>
+        </p:style>
+        <p:txBody>
+          <a:bodyPr rtlCol="0" anchor="ctr"/>
+          <a:lstStyle/>
+          <a:p>
+            <a:pPr algn="ctr"/>
+          </a:p>
+        </p:txBody>
+      </p:sp>
+      <p:sp>
+        <p:nvSpPr>
+          <p:cNvPr id="8" name="Rounded Rectangle 7"/>
+          <p:cNvSpPr/>
+          <p:nvPr/>
+        </p:nvSpPr>
+        <p:spPr>
+          <a:xfrm>
             <a:off x="640080" y="2103120"/>
             <a:ext cx="5440680" cy="1965960"/>
           </a:xfrm>
           <a:prstGeom prst="roundRect">
             <a:avLst>
-              <a:gd name="adj" fmla="val 6000"/>
+              <a:gd name="adj" fmla="val 5000"/>
             </a:avLst>
           </a:prstGeom>
           <a:solidFill>
@@ -23039,14 +24794,14 @@
       </p:sp>
       <p:sp>
         <p:nvSpPr>
-          <p:cNvPr id="8" name="Rectangle 7"/>
+          <p:cNvPr id="9" name="Rectangle 8"/>
           <p:cNvSpPr/>
           <p:nvPr/>
         </p:nvSpPr>
         <p:spPr>
           <a:xfrm>
-            <a:off x="640080" y="2103120"/>
-            <a:ext cx="91440" cy="1965960"/>
+            <a:off x="777240" y="2103120"/>
+            <a:ext cx="5166360" cy="73152"/>
           </a:xfrm>
           <a:prstGeom prst="rect">
             <a:avLst/>
@@ -23082,33 +24837,33 @@
       </p:sp>
       <p:sp>
         <p:nvSpPr>
-          <p:cNvPr id="9" name="TextBox 8"/>
-          <p:cNvSpPr txBox="1"/>
-          <p:nvPr/>
-        </p:nvSpPr>
-        <p:spPr>
-          <a:xfrm>
-            <a:off x="960119" y="2240279"/>
-            <a:ext cx="4937760" cy="365760"/>
-          </a:xfrm>
-          <a:prstGeom prst="rect">
-            <a:avLst/>
-          </a:prstGeom>
-          <a:noFill/>
-        </p:spPr>
-        <p:txBody>
-          <a:bodyPr wrap="square" lIns="0" rIns="0" tIns="0" bIns="0">
-            <a:spAutoFit/>
-          </a:bodyPr>
-          <a:lstStyle/>
-          <a:p>
-            <a:pPr algn="l">
-              <a:lnSpc>
-                <a:spcPct val="125000"/>
-              </a:lnSpc>
-            </a:pPr>
-            <a:r>
-              <a:rPr sz="1600" b="1">
+          <p:cNvPr id="10" name="TextBox 9"/>
+          <p:cNvSpPr txBox="1"/>
+          <p:nvPr/>
+        </p:nvSpPr>
+        <p:spPr>
+          <a:xfrm>
+            <a:off x="960119" y="2331720"/>
+            <a:ext cx="4937760" cy="457200"/>
+          </a:xfrm>
+          <a:prstGeom prst="rect">
+            <a:avLst/>
+          </a:prstGeom>
+          <a:noFill/>
+        </p:spPr>
+        <p:txBody>
+          <a:bodyPr wrap="square" lIns="0" rIns="0" tIns="0" bIns="0">
+            <a:spAutoFit/>
+          </a:bodyPr>
+          <a:lstStyle/>
+          <a:p>
+            <a:pPr algn="l">
+              <a:lnSpc>
+                <a:spcPct val="125000"/>
+              </a:lnSpc>
+            </a:pPr>
+            <a:r>
+              <a:rPr sz="1800" b="1">
                 <a:solidFill>
                   <a:srgbClr val="0F141F"/>
                 </a:solidFill>
@@ -23121,13 +24876,13 @@
       </p:sp>
       <p:sp>
         <p:nvSpPr>
-          <p:cNvPr id="10" name="TextBox 9"/>
-          <p:cNvSpPr txBox="1"/>
-          <p:nvPr/>
-        </p:nvSpPr>
-        <p:spPr>
-          <a:xfrm>
-            <a:off x="960119" y="2651760"/>
+          <p:cNvPr id="11" name="TextBox 10"/>
+          <p:cNvSpPr txBox="1"/>
+          <p:nvPr/>
+        </p:nvSpPr>
+        <p:spPr>
+          <a:xfrm>
+            <a:off x="960119" y="2788920"/>
             <a:ext cx="4937760" cy="320040"/>
           </a:xfrm>
           <a:prstGeom prst="rect">
@@ -23147,7 +24902,7 @@
               </a:lnSpc>
             </a:pPr>
             <a:r>
-              <a:rPr sz="1000" b="0">
+              <a:rPr sz="1100" b="0">
                 <a:solidFill>
                   <a:srgbClr val="8B95A7"/>
                 </a:solidFill>
@@ -23160,7 +24915,7 @@
       </p:sp>
       <p:pic>
         <p:nvPicPr>
-          <p:cNvPr id="11" name="Picture 10" descr="f_utility.png"/>
+          <p:cNvPr id="12" name="Picture 11" descr="f_utility.png"/>
           <p:cNvPicPr>
             <a:picLocks noChangeAspect="1"/>
           </p:cNvPicPr>
@@ -23174,8 +24929,8 @@
         </p:blipFill>
         <p:spPr>
           <a:xfrm>
-            <a:off x="960119" y="3017520"/>
-            <a:ext cx="3962740" cy="502920"/>
+            <a:off x="960119" y="3108960"/>
+            <a:ext cx="3602491" cy="457200"/>
           </a:xfrm>
           <a:prstGeom prst="rect">
             <a:avLst/>
@@ -23184,7 +24939,7 @@
       </p:pic>
       <p:sp>
         <p:nvSpPr>
-          <p:cNvPr id="12" name="TextBox 11"/>
+          <p:cNvPr id="13" name="TextBox 12"/>
           <p:cNvSpPr txBox="1"/>
           <p:nvPr/>
         </p:nvSpPr>
@@ -23210,7 +24965,7 @@
               </a:lnSpc>
             </a:pPr>
             <a:r>
-              <a:rPr sz="1100" b="0">
+              <a:rPr sz="1200" b="0">
                 <a:solidFill>
                   <a:srgbClr val="10B981"/>
                 </a:solidFill>
@@ -23223,7 +24978,52 @@
       </p:sp>
       <p:sp>
         <p:nvSpPr>
-          <p:cNvPr id="13" name="Rounded Rectangle 12"/>
+          <p:cNvPr id="14" name="Rounded Rectangle 13"/>
+          <p:cNvSpPr/>
+          <p:nvPr/>
+        </p:nvSpPr>
+        <p:spPr>
+          <a:xfrm>
+            <a:off x="6300216" y="2157984"/>
+            <a:ext cx="5440680" cy="1965960"/>
+          </a:xfrm>
+          <a:prstGeom prst="roundRect">
+            <a:avLst>
+              <a:gd name="adj" fmla="val 5000"/>
+            </a:avLst>
+          </a:prstGeom>
+          <a:solidFill>
+            <a:srgbClr val="E9EBF0"/>
+          </a:solidFill>
+          <a:ln>
+            <a:noFill/>
+          </a:ln>
+        </p:spPr>
+        <p:style>
+          <a:lnRef idx="1">
+            <a:schemeClr val="accent1"/>
+          </a:lnRef>
+          <a:fillRef idx="3">
+            <a:schemeClr val="accent1"/>
+          </a:fillRef>
+          <a:effectRef idx="2">
+            <a:schemeClr val="accent1"/>
+          </a:effectRef>
+          <a:fontRef idx="minor">
+            <a:schemeClr val="lt1"/>
+          </a:fontRef>
+        </p:style>
+        <p:txBody>
+          <a:bodyPr rtlCol="0" anchor="ctr"/>
+          <a:lstStyle/>
+          <a:p>
+            <a:pPr algn="ctr"/>
+          </a:p>
+        </p:txBody>
+      </p:sp>
+      <p:sp>
+        <p:nvSpPr>
+          <p:cNvPr id="15" name="Rounded Rectangle 14"/>
           <p:cNvSpPr/>
           <p:nvPr/>
         </p:nvSpPr>
@@ -23234,7 +25034,7 @@
           </a:xfrm>
           <a:prstGeom prst="roundRect">
             <a:avLst>
-              <a:gd name="adj" fmla="val 6000"/>
+              <a:gd name="adj" fmla="val 5000"/>
             </a:avLst>
           </a:prstGeom>
           <a:solidFill>
@@ -23270,14 +25070,14 @@
       </p:sp>
       <p:sp>
         <p:nvSpPr>
-          <p:cNvPr id="14" name="Rectangle 13"/>
+          <p:cNvPr id="16" name="Rectangle 15"/>
           <p:cNvSpPr/>
           <p:nvPr/>
         </p:nvSpPr>
         <p:spPr>
           <a:xfrm>
-            <a:off x="6263640" y="2103120"/>
-            <a:ext cx="91440" cy="1965960"/>
+            <a:off x="6400800" y="2103120"/>
+            <a:ext cx="5166360" cy="73152"/>
           </a:xfrm>
           <a:prstGeom prst="rect">
             <a:avLst/>
@@ -23313,33 +25113,33 @@
       </p:sp>
       <p:sp>
         <p:nvSpPr>
-          <p:cNvPr id="15" name="TextBox 14"/>
-          <p:cNvSpPr txBox="1"/>
-          <p:nvPr/>
-        </p:nvSpPr>
-        <p:spPr>
-          <a:xfrm>
-            <a:off x="6583680" y="2240279"/>
-            <a:ext cx="4937760" cy="365760"/>
-          </a:xfrm>
-          <a:prstGeom prst="rect">
-            <a:avLst/>
-          </a:prstGeom>
-          <a:noFill/>
-        </p:spPr>
-        <p:txBody>
-          <a:bodyPr wrap="square" lIns="0" rIns="0" tIns="0" bIns="0">
-            <a:spAutoFit/>
-          </a:bodyPr>
-          <a:lstStyle/>
-          <a:p>
-            <a:pPr algn="l">
-              <a:lnSpc>
-                <a:spcPct val="125000"/>
-              </a:lnSpc>
-            </a:pPr>
-            <a:r>
-              <a:rPr sz="1600" b="1">
+          <p:cNvPr id="17" name="TextBox 16"/>
+          <p:cNvSpPr txBox="1"/>
+          <p:nvPr/>
+        </p:nvSpPr>
+        <p:spPr>
+          <a:xfrm>
+            <a:off x="6583680" y="2331720"/>
+            <a:ext cx="4937760" cy="457200"/>
+          </a:xfrm>
+          <a:prstGeom prst="rect">
+            <a:avLst/>
+          </a:prstGeom>
+          <a:noFill/>
+        </p:spPr>
+        <p:txBody>
+          <a:bodyPr wrap="square" lIns="0" rIns="0" tIns="0" bIns="0">
+            <a:spAutoFit/>
+          </a:bodyPr>
+          <a:lstStyle/>
+          <a:p>
+            <a:pPr algn="l">
+              <a:lnSpc>
+                <a:spcPct val="125000"/>
+              </a:lnSpc>
+            </a:pPr>
+            <a:r>
+              <a:rPr sz="1800" b="1">
                 <a:solidFill>
                   <a:srgbClr val="0F141F"/>
                 </a:solidFill>
@@ -23352,13 +25152,13 @@
       </p:sp>
       <p:sp>
         <p:nvSpPr>
-          <p:cNvPr id="16" name="TextBox 15"/>
-          <p:cNvSpPr txBox="1"/>
-          <p:nvPr/>
-        </p:nvSpPr>
-        <p:spPr>
-          <a:xfrm>
-            <a:off x="6583680" y="2651760"/>
+          <p:cNvPr id="18" name="TextBox 17"/>
+          <p:cNvSpPr txBox="1"/>
+          <p:nvPr/>
+        </p:nvSpPr>
+        <p:spPr>
+          <a:xfrm>
+            <a:off x="6583680" y="2788920"/>
             <a:ext cx="4937760" cy="320040"/>
           </a:xfrm>
           <a:prstGeom prst="rect">
@@ -23378,7 +25178,7 @@
               </a:lnSpc>
             </a:pPr>
             <a:r>
-              <a:rPr sz="1000" b="0">
+              <a:rPr sz="1100" b="0">
                 <a:solidFill>
                   <a:srgbClr val="8B95A7"/>
                 </a:solidFill>
@@ -23391,7 +25191,7 @@
       </p:sp>
       <p:pic>
         <p:nvPicPr>
-          <p:cNvPr id="17" name="Picture 16" descr="f_memory.png"/>
+          <p:cNvPr id="19" name="Picture 18" descr="f_memory.png"/>
           <p:cNvPicPr>
             <a:picLocks noChangeAspect="1"/>
           </p:cNvPicPr>
@@ -23405,8 +25205,8 @@
         </p:blipFill>
         <p:spPr>
           <a:xfrm>
-            <a:off x="6583680" y="3017520"/>
-            <a:ext cx="2487630" cy="502920"/>
+            <a:off x="6583680" y="3108960"/>
+            <a:ext cx="2261481" cy="457200"/>
           </a:xfrm>
           <a:prstGeom prst="rect">
             <a:avLst/>
@@ -23415,7 +25215,7 @@
       </p:pic>
       <p:sp>
         <p:nvSpPr>
-          <p:cNvPr id="18" name="TextBox 17"/>
+          <p:cNvPr id="20" name="TextBox 19"/>
           <p:cNvSpPr txBox="1"/>
           <p:nvPr/>
         </p:nvSpPr>
@@ -23441,7 +25241,7 @@
               </a:lnSpc>
             </a:pPr>
             <a:r>
-              <a:rPr sz="1100" b="0">
+              <a:rPr sz="1200" b="0">
                 <a:solidFill>
                   <a:srgbClr val="F59E0B"/>
                 </a:solidFill>
@@ -23454,7 +25254,52 @@
       </p:sp>
       <p:sp>
         <p:nvSpPr>
-          <p:cNvPr id="19" name="Rounded Rectangle 18"/>
+          <p:cNvPr id="21" name="Rounded Rectangle 20"/>
+          <p:cNvSpPr/>
+          <p:nvPr/>
+        </p:nvSpPr>
+        <p:spPr>
+          <a:xfrm>
+            <a:off x="676656" y="4352543"/>
+            <a:ext cx="5440680" cy="1965960"/>
+          </a:xfrm>
+          <a:prstGeom prst="roundRect">
+            <a:avLst>
+              <a:gd name="adj" fmla="val 5000"/>
+            </a:avLst>
+          </a:prstGeom>
+          <a:solidFill>
+            <a:srgbClr val="E9EBF0"/>
+          </a:solidFill>
+          <a:ln>
+            <a:noFill/>
+          </a:ln>
+        </p:spPr>
+        <p:style>
+          <a:lnRef idx="1">
+            <a:schemeClr val="accent1"/>
+          </a:lnRef>
+          <a:fillRef idx="3">
+            <a:schemeClr val="accent1"/>
+          </a:fillRef>
+          <a:effectRef idx="2">
+            <a:schemeClr val="accent1"/>
+          </a:effectRef>
+          <a:fontRef idx="minor">
+            <a:schemeClr val="lt1"/>
+          </a:fontRef>
+        </p:style>
+        <p:txBody>
+          <a:bodyPr rtlCol="0" anchor="ctr"/>
+          <a:lstStyle/>
+          <a:p>
+            <a:pPr algn="ctr"/>
+          </a:p>
+        </p:txBody>
+      </p:sp>
+      <p:sp>
+        <p:nvSpPr>
+          <p:cNvPr id="22" name="Rounded Rectangle 21"/>
           <p:cNvSpPr/>
           <p:nvPr/>
         </p:nvSpPr>
@@ -23465,7 +25310,7 @@
           </a:xfrm>
           <a:prstGeom prst="roundRect">
             <a:avLst>
-              <a:gd name="adj" fmla="val 6000"/>
+              <a:gd name="adj" fmla="val 5000"/>
             </a:avLst>
           </a:prstGeom>
           <a:solidFill>
@@ -23501,14 +25346,14 @@
       </p:sp>
       <p:sp>
         <p:nvSpPr>
-          <p:cNvPr id="20" name="Rectangle 19"/>
+          <p:cNvPr id="23" name="Rectangle 22"/>
           <p:cNvSpPr/>
           <p:nvPr/>
         </p:nvSpPr>
         <p:spPr>
           <a:xfrm>
-            <a:off x="640080" y="4297679"/>
-            <a:ext cx="91440" cy="1965960"/>
+            <a:off x="777240" y="4297679"/>
+            <a:ext cx="5166360" cy="73152"/>
           </a:xfrm>
           <a:prstGeom prst="rect">
             <a:avLst/>
@@ -23544,33 +25389,33 @@
       </p:sp>
       <p:sp>
         <p:nvSpPr>
-          <p:cNvPr id="21" name="TextBox 20"/>
-          <p:cNvSpPr txBox="1"/>
-          <p:nvPr/>
-        </p:nvSpPr>
-        <p:spPr>
-          <a:xfrm>
-            <a:off x="960119" y="4434840"/>
-            <a:ext cx="4937760" cy="365760"/>
-          </a:xfrm>
-          <a:prstGeom prst="rect">
-            <a:avLst/>
-          </a:prstGeom>
-          <a:noFill/>
-        </p:spPr>
-        <p:txBody>
-          <a:bodyPr wrap="square" lIns="0" rIns="0" tIns="0" bIns="0">
-            <a:spAutoFit/>
-          </a:bodyPr>
-          <a:lstStyle/>
-          <a:p>
-            <a:pPr algn="l">
-              <a:lnSpc>
-                <a:spcPct val="125000"/>
-              </a:lnSpc>
-            </a:pPr>
-            <a:r>
-              <a:rPr sz="1600" b="1">
+          <p:cNvPr id="24" name="TextBox 23"/>
+          <p:cNvSpPr txBox="1"/>
+          <p:nvPr/>
+        </p:nvSpPr>
+        <p:spPr>
+          <a:xfrm>
+            <a:off x="960119" y="4526279"/>
+            <a:ext cx="4937760" cy="457200"/>
+          </a:xfrm>
+          <a:prstGeom prst="rect">
+            <a:avLst/>
+          </a:prstGeom>
+          <a:noFill/>
+        </p:spPr>
+        <p:txBody>
+          <a:bodyPr wrap="square" lIns="0" rIns="0" tIns="0" bIns="0">
+            <a:spAutoFit/>
+          </a:bodyPr>
+          <a:lstStyle/>
+          <a:p>
+            <a:pPr algn="l">
+              <a:lnSpc>
+                <a:spcPct val="125000"/>
+              </a:lnSpc>
+            </a:pPr>
+            <a:r>
+              <a:rPr sz="1800" b="1">
                 <a:solidFill>
                   <a:srgbClr val="0F141F"/>
                 </a:solidFill>
@@ -23583,13 +25428,13 @@
       </p:sp>
       <p:sp>
         <p:nvSpPr>
-          <p:cNvPr id="22" name="TextBox 21"/>
-          <p:cNvSpPr txBox="1"/>
-          <p:nvPr/>
-        </p:nvSpPr>
-        <p:spPr>
-          <a:xfrm>
-            <a:off x="960119" y="4846319"/>
+          <p:cNvPr id="25" name="TextBox 24"/>
+          <p:cNvSpPr txBox="1"/>
+          <p:nvPr/>
+        </p:nvSpPr>
+        <p:spPr>
+          <a:xfrm>
+            <a:off x="960119" y="4983479"/>
             <a:ext cx="4937760" cy="320040"/>
           </a:xfrm>
           <a:prstGeom prst="rect">
@@ -23609,7 +25454,7 @@
               </a:lnSpc>
             </a:pPr>
             <a:r>
-              <a:rPr sz="1000" b="0">
+              <a:rPr sz="1100" b="0">
                 <a:solidFill>
                   <a:srgbClr val="8B95A7"/>
                 </a:solidFill>
@@ -23622,7 +25467,7 @@
       </p:sp>
       <p:pic>
         <p:nvPicPr>
-          <p:cNvPr id="23" name="Picture 22" descr="f_wm.png"/>
+          <p:cNvPr id="26" name="Picture 25" descr="f_wm.png"/>
           <p:cNvPicPr>
             <a:picLocks noChangeAspect="1"/>
           </p:cNvPicPr>
@@ -23636,8 +25481,8 @@
         </p:blipFill>
         <p:spPr>
           <a:xfrm>
-            <a:off x="960119" y="5212079"/>
-            <a:ext cx="2873829" cy="502920"/>
+            <a:off x="960119" y="5303519"/>
+            <a:ext cx="2612571" cy="457200"/>
           </a:xfrm>
           <a:prstGeom prst="rect">
             <a:avLst/>
@@ -23646,7 +25491,7 @@
       </p:pic>
       <p:sp>
         <p:nvSpPr>
-          <p:cNvPr id="24" name="TextBox 23"/>
+          <p:cNvPr id="27" name="TextBox 26"/>
           <p:cNvSpPr txBox="1"/>
           <p:nvPr/>
         </p:nvSpPr>
@@ -23672,7 +25517,7 @@
               </a:lnSpc>
             </a:pPr>
             <a:r>
-              <a:rPr sz="1100" b="0">
+              <a:rPr sz="1200" b="0">
                 <a:solidFill>
                   <a:srgbClr val="4F46E5"/>
                 </a:solidFill>
@@ -23685,7 +25530,52 @@
       </p:sp>
       <p:sp>
         <p:nvSpPr>
-          <p:cNvPr id="25" name="Rounded Rectangle 24"/>
+          <p:cNvPr id="28" name="Rounded Rectangle 27"/>
+          <p:cNvSpPr/>
+          <p:nvPr/>
+        </p:nvSpPr>
+        <p:spPr>
+          <a:xfrm>
+            <a:off x="6300216" y="4352543"/>
+            <a:ext cx="5440680" cy="1965960"/>
+          </a:xfrm>
+          <a:prstGeom prst="roundRect">
+            <a:avLst>
+              <a:gd name="adj" fmla="val 5000"/>
+            </a:avLst>
+          </a:prstGeom>
+          <a:solidFill>
+            <a:srgbClr val="E9EBF0"/>
+          </a:solidFill>
+          <a:ln>
+            <a:noFill/>
+          </a:ln>
+        </p:spPr>
+        <p:style>
+          <a:lnRef idx="1">
+            <a:schemeClr val="accent1"/>
+          </a:lnRef>
+          <a:fillRef idx="3">
+            <a:schemeClr val="accent1"/>
+          </a:fillRef>
+          <a:effectRef idx="2">
+            <a:schemeClr val="accent1"/>
+          </a:effectRef>
+          <a:fontRef idx="minor">
+            <a:schemeClr val="lt1"/>
+          </a:fontRef>
+        </p:style>
+        <p:txBody>
+          <a:bodyPr rtlCol="0" anchor="ctr"/>
+          <a:lstStyle/>
+          <a:p>
+            <a:pPr algn="ctr"/>
+          </a:p>
+        </p:txBody>
+      </p:sp>
+      <p:sp>
+        <p:nvSpPr>
+          <p:cNvPr id="29" name="Rounded Rectangle 28"/>
           <p:cNvSpPr/>
           <p:nvPr/>
         </p:nvSpPr>
@@ -23696,7 +25586,7 @@
           </a:xfrm>
           <a:prstGeom prst="roundRect">
             <a:avLst>
-              <a:gd name="adj" fmla="val 6000"/>
+              <a:gd name="adj" fmla="val 5000"/>
             </a:avLst>
           </a:prstGeom>
           <a:solidFill>
@@ -23732,14 +25622,14 @@
       </p:sp>
       <p:sp>
         <p:nvSpPr>
-          <p:cNvPr id="26" name="Rectangle 25"/>
+          <p:cNvPr id="30" name="Rectangle 29"/>
           <p:cNvSpPr/>
           <p:nvPr/>
         </p:nvSpPr>
         <p:spPr>
           <a:xfrm>
-            <a:off x="6263640" y="4297679"/>
-            <a:ext cx="91440" cy="1965960"/>
+            <a:off x="6400800" y="4297679"/>
+            <a:ext cx="5166360" cy="73152"/>
           </a:xfrm>
           <a:prstGeom prst="rect">
             <a:avLst/>
@@ -23775,33 +25665,33 @@
       </p:sp>
       <p:sp>
         <p:nvSpPr>
-          <p:cNvPr id="27" name="TextBox 26"/>
-          <p:cNvSpPr txBox="1"/>
-          <p:nvPr/>
-        </p:nvSpPr>
-        <p:spPr>
-          <a:xfrm>
-            <a:off x="6583680" y="4434840"/>
-            <a:ext cx="4937760" cy="365760"/>
-          </a:xfrm>
-          <a:prstGeom prst="rect">
-            <a:avLst/>
-          </a:prstGeom>
-          <a:noFill/>
-        </p:spPr>
-        <p:txBody>
-          <a:bodyPr wrap="square" lIns="0" rIns="0" tIns="0" bIns="0">
-            <a:spAutoFit/>
-          </a:bodyPr>
-          <a:lstStyle/>
-          <a:p>
-            <a:pPr algn="l">
-              <a:lnSpc>
-                <a:spcPct val="125000"/>
-              </a:lnSpc>
-            </a:pPr>
-            <a:r>
-              <a:rPr sz="1600" b="1">
+          <p:cNvPr id="31" name="TextBox 30"/>
+          <p:cNvSpPr txBox="1"/>
+          <p:nvPr/>
+        </p:nvSpPr>
+        <p:spPr>
+          <a:xfrm>
+            <a:off x="6583680" y="4526279"/>
+            <a:ext cx="4937760" cy="457200"/>
+          </a:xfrm>
+          <a:prstGeom prst="rect">
+            <a:avLst/>
+          </a:prstGeom>
+          <a:noFill/>
+        </p:spPr>
+        <p:txBody>
+          <a:bodyPr wrap="square" lIns="0" rIns="0" tIns="0" bIns="0">
+            <a:spAutoFit/>
+          </a:bodyPr>
+          <a:lstStyle/>
+          <a:p>
+            <a:pPr algn="l">
+              <a:lnSpc>
+                <a:spcPct val="125000"/>
+              </a:lnSpc>
+            </a:pPr>
+            <a:r>
+              <a:rPr sz="1800" b="1">
                 <a:solidFill>
                   <a:srgbClr val="0F141F"/>
                 </a:solidFill>
@@ -23814,13 +25704,13 @@
       </p:sp>
       <p:sp>
         <p:nvSpPr>
-          <p:cNvPr id="28" name="TextBox 27"/>
-          <p:cNvSpPr txBox="1"/>
-          <p:nvPr/>
-        </p:nvSpPr>
-        <p:spPr>
-          <a:xfrm>
-            <a:off x="6583680" y="4846319"/>
+          <p:cNvPr id="32" name="TextBox 31"/>
+          <p:cNvSpPr txBox="1"/>
+          <p:nvPr/>
+        </p:nvSpPr>
+        <p:spPr>
+          <a:xfrm>
+            <a:off x="6583680" y="4983479"/>
             <a:ext cx="4937760" cy="320040"/>
           </a:xfrm>
           <a:prstGeom prst="rect">
@@ -23840,7 +25730,7 @@
               </a:lnSpc>
             </a:pPr>
             <a:r>
-              <a:rPr sz="1000" b="0">
+              <a:rPr sz="1100" b="0">
                 <a:solidFill>
                   <a:srgbClr val="8B95A7"/>
                 </a:solidFill>
@@ -23853,7 +25743,7 @@
       </p:sp>
       <p:pic>
         <p:nvPicPr>
-          <p:cNvPr id="29" name="Picture 28" descr="f_framing.png"/>
+          <p:cNvPr id="33" name="Picture 32" descr="f_framing.png"/>
           <p:cNvPicPr>
             <a:picLocks noChangeAspect="1"/>
           </p:cNvPicPr>
@@ -23867,8 +25757,8 @@
         </p:blipFill>
         <p:spPr>
           <a:xfrm>
-            <a:off x="6583680" y="5212079"/>
-            <a:ext cx="3345316" cy="502920"/>
+            <a:off x="6583680" y="5303519"/>
+            <a:ext cx="3041196" cy="457200"/>
           </a:xfrm>
           <a:prstGeom prst="rect">
             <a:avLst/>
@@ -23877,7 +25767,7 @@
       </p:pic>
       <p:sp>
         <p:nvSpPr>
-          <p:cNvPr id="30" name="TextBox 29"/>
+          <p:cNvPr id="34" name="TextBox 33"/>
           <p:cNvSpPr txBox="1"/>
           <p:nvPr/>
         </p:nvSpPr>
@@ -23903,7 +25793,7 @@
               </a:lnSpc>
             </a:pPr>
             <a:r>
-              <a:rPr sz="1100" b="0">
+              <a:rPr sz="1200" b="0">
                 <a:solidFill>
                   <a:srgbClr val="EC4899"/>
                 </a:solidFill>
@@ -23916,7 +25806,7 @@
       </p:sp>
       <p:sp>
         <p:nvSpPr>
-          <p:cNvPr id="31" name="TextBox 30"/>
+          <p:cNvPr id="35" name="TextBox 34"/>
           <p:cNvSpPr txBox="1"/>
           <p:nvPr/>
         </p:nvSpPr>
@@ -24369,12 +26259,57 @@
         </p:nvSpPr>
         <p:spPr>
           <a:xfrm>
+            <a:off x="676656" y="5129783"/>
+            <a:ext cx="3566160" cy="1417320"/>
+          </a:xfrm>
+          <a:prstGeom prst="roundRect">
+            <a:avLst>
+              <a:gd name="adj" fmla="val 5000"/>
+            </a:avLst>
+          </a:prstGeom>
+          <a:solidFill>
+            <a:srgbClr val="E9EBF0"/>
+          </a:solidFill>
+          <a:ln>
+            <a:noFill/>
+          </a:ln>
+        </p:spPr>
+        <p:style>
+          <a:lnRef idx="1">
+            <a:schemeClr val="accent1"/>
+          </a:lnRef>
+          <a:fillRef idx="3">
+            <a:schemeClr val="accent1"/>
+          </a:fillRef>
+          <a:effectRef idx="2">
+            <a:schemeClr val="accent1"/>
+          </a:effectRef>
+          <a:fontRef idx="minor">
+            <a:schemeClr val="lt1"/>
+          </a:fontRef>
+        </p:style>
+        <p:txBody>
+          <a:bodyPr rtlCol="0" anchor="ctr"/>
+          <a:lstStyle/>
+          <a:p>
+            <a:pPr algn="ctr"/>
+          </a:p>
+        </p:txBody>
+      </p:sp>
+      <p:sp>
+        <p:nvSpPr>
+          <p:cNvPr id="13" name="Rounded Rectangle 12"/>
+          <p:cNvSpPr/>
+          <p:nvPr/>
+        </p:nvSpPr>
+        <p:spPr>
+          <a:xfrm>
             <a:off x="640080" y="5074920"/>
             <a:ext cx="3566160" cy="1417320"/>
           </a:xfrm>
           <a:prstGeom prst="roundRect">
             <a:avLst>
-              <a:gd name="adj" fmla="val 6000"/>
+              <a:gd name="adj" fmla="val 5000"/>
             </a:avLst>
           </a:prstGeom>
           <a:solidFill>
@@ -24410,7 +26345,7 @@
       </p:sp>
       <p:sp>
         <p:nvSpPr>
-          <p:cNvPr id="13" name="TextBox 12"/>
+          <p:cNvPr id="14" name="TextBox 13"/>
           <p:cNvSpPr txBox="1"/>
           <p:nvPr/>
         </p:nvSpPr>
@@ -24449,7 +26384,7 @@
       </p:sp>
       <p:sp>
         <p:nvSpPr>
-          <p:cNvPr id="14" name="TextBox 13"/>
+          <p:cNvPr id="15" name="TextBox 14"/>
           <p:cNvSpPr txBox="1"/>
           <p:nvPr/>
         </p:nvSpPr>
@@ -24488,7 +26423,7 @@
       </p:sp>
       <p:sp>
         <p:nvSpPr>
-          <p:cNvPr id="15" name="TextBox 14"/>
+          <p:cNvPr id="16" name="TextBox 15"/>
           <p:cNvSpPr txBox="1"/>
           <p:nvPr/>
         </p:nvSpPr>
@@ -24543,7 +26478,52 @@
       </p:sp>
       <p:sp>
         <p:nvSpPr>
-          <p:cNvPr id="16" name="Rounded Rectangle 15"/>
+          <p:cNvPr id="17" name="Rounded Rectangle 16"/>
+          <p:cNvSpPr/>
+          <p:nvPr/>
+        </p:nvSpPr>
+        <p:spPr>
+          <a:xfrm>
+            <a:off x="4425696" y="5129783"/>
+            <a:ext cx="3566160" cy="1417320"/>
+          </a:xfrm>
+          <a:prstGeom prst="roundRect">
+            <a:avLst>
+              <a:gd name="adj" fmla="val 5000"/>
+            </a:avLst>
+          </a:prstGeom>
+          <a:solidFill>
+            <a:srgbClr val="E9EBF0"/>
+          </a:solidFill>
+          <a:ln>
+            <a:noFill/>
+          </a:ln>
+        </p:spPr>
+        <p:style>
+          <a:lnRef idx="1">
+            <a:schemeClr val="accent1"/>
+          </a:lnRef>
+          <a:fillRef idx="3">
+            <a:schemeClr val="accent1"/>
+          </a:fillRef>
+          <a:effectRef idx="2">
+            <a:schemeClr val="accent1"/>
+          </a:effectRef>
+          <a:fontRef idx="minor">
+            <a:schemeClr val="lt1"/>
+          </a:fontRef>
+        </p:style>
+        <p:txBody>
+          <a:bodyPr rtlCol="0" anchor="ctr"/>
+          <a:lstStyle/>
+          <a:p>
+            <a:pPr algn="ctr"/>
+          </a:p>
+        </p:txBody>
+      </p:sp>
+      <p:sp>
+        <p:nvSpPr>
+          <p:cNvPr id="18" name="Rounded Rectangle 17"/>
           <p:cNvSpPr/>
           <p:nvPr/>
         </p:nvSpPr>
@@ -24554,7 +26534,7 @@
           </a:xfrm>
           <a:prstGeom prst="roundRect">
             <a:avLst>
-              <a:gd name="adj" fmla="val 6000"/>
+              <a:gd name="adj" fmla="val 5000"/>
             </a:avLst>
           </a:prstGeom>
           <a:solidFill>
@@ -24590,7 +26570,7 @@
       </p:sp>
       <p:sp>
         <p:nvSpPr>
-          <p:cNvPr id="17" name="TextBox 16"/>
+          <p:cNvPr id="19" name="TextBox 18"/>
           <p:cNvSpPr txBox="1"/>
           <p:nvPr/>
         </p:nvSpPr>
@@ -24629,7 +26609,7 @@
       </p:sp>
       <p:sp>
         <p:nvSpPr>
-          <p:cNvPr id="18" name="TextBox 17"/>
+          <p:cNvPr id="20" name="TextBox 19"/>
           <p:cNvSpPr txBox="1"/>
           <p:nvPr/>
         </p:nvSpPr>
@@ -24668,7 +26648,7 @@
       </p:sp>
       <p:sp>
         <p:nvSpPr>
-          <p:cNvPr id="19" name="TextBox 18"/>
+          <p:cNvPr id="21" name="TextBox 20"/>
           <p:cNvSpPr txBox="1"/>
           <p:nvPr/>
         </p:nvSpPr>
@@ -24723,7 +26703,52 @@
       </p:sp>
       <p:sp>
         <p:nvSpPr>
-          <p:cNvPr id="20" name="Rounded Rectangle 19"/>
+          <p:cNvPr id="22" name="Rounded Rectangle 21"/>
+          <p:cNvSpPr/>
+          <p:nvPr/>
+        </p:nvSpPr>
+        <p:spPr>
+          <a:xfrm>
+            <a:off x="8174735" y="5129783"/>
+            <a:ext cx="3566160" cy="1417320"/>
+          </a:xfrm>
+          <a:prstGeom prst="roundRect">
+            <a:avLst>
+              <a:gd name="adj" fmla="val 5000"/>
+            </a:avLst>
+          </a:prstGeom>
+          <a:solidFill>
+            <a:srgbClr val="E9EBF0"/>
+          </a:solidFill>
+          <a:ln>
+            <a:noFill/>
+          </a:ln>
+        </p:spPr>
+        <p:style>
+          <a:lnRef idx="1">
+            <a:schemeClr val="accent1"/>
+          </a:lnRef>
+          <a:fillRef idx="3">
+            <a:schemeClr val="accent1"/>
+          </a:fillRef>
+          <a:effectRef idx="2">
+            <a:schemeClr val="accent1"/>
+          </a:effectRef>
+          <a:fontRef idx="minor">
+            <a:schemeClr val="lt1"/>
+          </a:fontRef>
+        </p:style>
+        <p:txBody>
+          <a:bodyPr rtlCol="0" anchor="ctr"/>
+          <a:lstStyle/>
+          <a:p>
+            <a:pPr algn="ctr"/>
+          </a:p>
+        </p:txBody>
+      </p:sp>
+      <p:sp>
+        <p:nvSpPr>
+          <p:cNvPr id="23" name="Rounded Rectangle 22"/>
           <p:cNvSpPr/>
           <p:nvPr/>
         </p:nvSpPr>
@@ -24734,7 +26759,7 @@
           </a:xfrm>
           <a:prstGeom prst="roundRect">
             <a:avLst>
-              <a:gd name="adj" fmla="val 6000"/>
+              <a:gd name="adj" fmla="val 5000"/>
             </a:avLst>
           </a:prstGeom>
           <a:solidFill>
@@ -24770,7 +26795,7 @@
       </p:sp>
       <p:sp>
         <p:nvSpPr>
-          <p:cNvPr id="21" name="TextBox 20"/>
+          <p:cNvPr id="24" name="TextBox 23"/>
           <p:cNvSpPr txBox="1"/>
           <p:nvPr/>
         </p:nvSpPr>
@@ -24809,7 +26834,7 @@
       </p:sp>
       <p:sp>
         <p:nvSpPr>
-          <p:cNvPr id="22" name="TextBox 21"/>
+          <p:cNvPr id="25" name="TextBox 24"/>
           <p:cNvSpPr txBox="1"/>
           <p:nvPr/>
         </p:nvSpPr>
@@ -24848,7 +26873,7 @@
       </p:sp>
       <p:sp>
         <p:nvSpPr>
-          <p:cNvPr id="23" name="TextBox 22"/>
+          <p:cNvPr id="26" name="TextBox 25"/>
           <p:cNvSpPr txBox="1"/>
           <p:nvPr/>
         </p:nvSpPr>
@@ -25161,12 +27186,57 @@
         </p:nvSpPr>
         <p:spPr>
           <a:xfrm>
+            <a:off x="676656" y="2569464"/>
+            <a:ext cx="5440680" cy="1280160"/>
+          </a:xfrm>
+          <a:prstGeom prst="roundRect">
+            <a:avLst>
+              <a:gd name="adj" fmla="val 5000"/>
+            </a:avLst>
+          </a:prstGeom>
+          <a:solidFill>
+            <a:srgbClr val="E9EBF0"/>
+          </a:solidFill>
+          <a:ln>
+            <a:noFill/>
+          </a:ln>
+        </p:spPr>
+        <p:style>
+          <a:lnRef idx="1">
+            <a:schemeClr val="accent1"/>
+          </a:lnRef>
+          <a:fillRef idx="3">
+            <a:schemeClr val="accent1"/>
+          </a:fillRef>
+          <a:effectRef idx="2">
+            <a:schemeClr val="accent1"/>
+          </a:effectRef>
+          <a:fontRef idx="minor">
+            <a:schemeClr val="lt1"/>
+          </a:fontRef>
+        </p:style>
+        <p:txBody>
+          <a:bodyPr rtlCol="0" anchor="ctr"/>
+          <a:lstStyle/>
+          <a:p>
+            <a:pPr algn="ctr"/>
+          </a:p>
+        </p:txBody>
+      </p:sp>
+      <p:sp>
+        <p:nvSpPr>
+          <p:cNvPr id="9" name="Rounded Rectangle 8"/>
+          <p:cNvSpPr/>
+          <p:nvPr/>
+        </p:nvSpPr>
+        <p:spPr>
+          <a:xfrm>
             <a:off x="640080" y="2514600"/>
             <a:ext cx="5440680" cy="1280160"/>
           </a:xfrm>
           <a:prstGeom prst="roundRect">
             <a:avLst>
-              <a:gd name="adj" fmla="val 6000"/>
+              <a:gd name="adj" fmla="val 5000"/>
             </a:avLst>
           </a:prstGeom>
           <a:solidFill>
@@ -25202,7 +27272,7 @@
       </p:sp>
       <p:sp>
         <p:nvSpPr>
-          <p:cNvPr id="9" name="TextBox 8"/>
+          <p:cNvPr id="10" name="TextBox 9"/>
           <p:cNvSpPr txBox="1"/>
           <p:nvPr/>
         </p:nvSpPr>
@@ -25241,7 +27311,7 @@
       </p:sp>
       <p:pic>
         <p:nvPicPr>
-          <p:cNvPr id="10" name="Picture 9" descr="f_utility.png"/>
+          <p:cNvPr id="11" name="Picture 10" descr="f_utility.png"/>
           <p:cNvPicPr>
             <a:picLocks noChangeAspect="1"/>
           </p:cNvPicPr>
@@ -25265,7 +27335,7 @@
       </p:pic>
       <p:sp>
         <p:nvSpPr>
-          <p:cNvPr id="11" name="TextBox 10"/>
+          <p:cNvPr id="12" name="TextBox 11"/>
           <p:cNvSpPr txBox="1"/>
           <p:nvPr/>
         </p:nvSpPr>
@@ -25304,7 +27374,7 @@
       </p:sp>
       <p:sp>
         <p:nvSpPr>
-          <p:cNvPr id="12" name="TextBox 11"/>
+          <p:cNvPr id="13" name="TextBox 12"/>
           <p:cNvSpPr txBox="1"/>
           <p:nvPr/>
         </p:nvSpPr>
@@ -25343,7 +27413,7 @@
       </p:sp>
       <p:sp>
         <p:nvSpPr>
-          <p:cNvPr id="13" name="TextBox 12"/>
+          <p:cNvPr id="14" name="TextBox 13"/>
           <p:cNvSpPr txBox="1"/>
           <p:nvPr/>
         </p:nvSpPr>
@@ -25382,7 +27452,7 @@
       </p:sp>
       <p:sp>
         <p:nvSpPr>
-          <p:cNvPr id="14" name="TextBox 13"/>
+          <p:cNvPr id="15" name="TextBox 14"/>
           <p:cNvSpPr txBox="1"/>
           <p:nvPr/>
         </p:nvSpPr>
@@ -25421,7 +27491,7 @@
       </p:sp>
       <p:sp>
         <p:nvSpPr>
-          <p:cNvPr id="15" name="TextBox 14"/>
+          <p:cNvPr id="16" name="TextBox 15"/>
           <p:cNvSpPr txBox="1"/>
           <p:nvPr/>
         </p:nvSpPr>
@@ -25460,7 +27530,7 @@
       </p:sp>
       <p:sp>
         <p:nvSpPr>
-          <p:cNvPr id="16" name="TextBox 15"/>
+          <p:cNvPr id="17" name="TextBox 16"/>
           <p:cNvSpPr txBox="1"/>
           <p:nvPr/>
         </p:nvSpPr>
@@ -25499,7 +27569,7 @@
       </p:sp>
       <p:sp>
         <p:nvSpPr>
-          <p:cNvPr id="17" name="TextBox 16"/>
+          <p:cNvPr id="18" name="TextBox 17"/>
           <p:cNvSpPr txBox="1"/>
           <p:nvPr/>
         </p:nvSpPr>
@@ -25538,7 +27608,7 @@
       </p:sp>
       <p:sp>
         <p:nvSpPr>
-          <p:cNvPr id="18" name="TextBox 17"/>
+          <p:cNvPr id="19" name="TextBox 18"/>
           <p:cNvSpPr txBox="1"/>
           <p:nvPr/>
         </p:nvSpPr>
@@ -25577,7 +27647,7 @@
       </p:sp>
       <p:sp>
         <p:nvSpPr>
-          <p:cNvPr id="19" name="TextBox 18"/>
+          <p:cNvPr id="20" name="TextBox 19"/>
           <p:cNvSpPr txBox="1"/>
           <p:nvPr/>
         </p:nvSpPr>
@@ -25632,7 +27702,52 @@
       </p:sp>
       <p:sp>
         <p:nvSpPr>
-          <p:cNvPr id="20" name="Rounded Rectangle 19"/>
+          <p:cNvPr id="21" name="Rounded Rectangle 20"/>
+          <p:cNvSpPr/>
+          <p:nvPr/>
+        </p:nvSpPr>
+        <p:spPr>
+          <a:xfrm>
+            <a:off x="6300216" y="2569464"/>
+            <a:ext cx="5257800" cy="4160520"/>
+          </a:xfrm>
+          <a:prstGeom prst="roundRect">
+            <a:avLst>
+              <a:gd name="adj" fmla="val 5000"/>
+            </a:avLst>
+          </a:prstGeom>
+          <a:solidFill>
+            <a:srgbClr val="E9EBF0"/>
+          </a:solidFill>
+          <a:ln>
+            <a:noFill/>
+          </a:ln>
+        </p:spPr>
+        <p:style>
+          <a:lnRef idx="1">
+            <a:schemeClr val="accent1"/>
+          </a:lnRef>
+          <a:fillRef idx="3">
+            <a:schemeClr val="accent1"/>
+          </a:fillRef>
+          <a:effectRef idx="2">
+            <a:schemeClr val="accent1"/>
+          </a:effectRef>
+          <a:fontRef idx="minor">
+            <a:schemeClr val="lt1"/>
+          </a:fontRef>
+        </p:style>
+        <p:txBody>
+          <a:bodyPr rtlCol="0" anchor="ctr"/>
+          <a:lstStyle/>
+          <a:p>
+            <a:pPr algn="ctr"/>
+          </a:p>
+        </p:txBody>
+      </p:sp>
+      <p:sp>
+        <p:nvSpPr>
+          <p:cNvPr id="22" name="Rounded Rectangle 21"/>
           <p:cNvSpPr/>
           <p:nvPr/>
         </p:nvSpPr>
@@ -25643,7 +27758,7 @@
           </a:xfrm>
           <a:prstGeom prst="roundRect">
             <a:avLst>
-              <a:gd name="adj" fmla="val 6000"/>
+              <a:gd name="adj" fmla="val 5000"/>
             </a:avLst>
           </a:prstGeom>
           <a:solidFill>
@@ -25679,7 +27794,7 @@
       </p:sp>
       <p:sp>
         <p:nvSpPr>
-          <p:cNvPr id="21" name="TextBox 20"/>
+          <p:cNvPr id="23" name="TextBox 22"/>
           <p:cNvSpPr txBox="1"/>
           <p:nvPr/>
         </p:nvSpPr>
@@ -25718,7 +27833,7 @@
       </p:sp>
       <p:sp>
         <p:nvSpPr>
-          <p:cNvPr id="22" name="TextBox 21"/>
+          <p:cNvPr id="24" name="TextBox 23"/>
           <p:cNvSpPr txBox="1"/>
           <p:nvPr/>
         </p:nvSpPr>
@@ -25757,7 +27872,7 @@
       </p:sp>
       <p:sp>
         <p:nvSpPr>
-          <p:cNvPr id="23" name="TextBox 22"/>
+          <p:cNvPr id="25" name="TextBox 24"/>
           <p:cNvSpPr txBox="1"/>
           <p:nvPr/>
         </p:nvSpPr>
@@ -25828,7 +27943,7 @@
       </p:sp>
       <p:cxnSp>
         <p:nvCxnSpPr>
-          <p:cNvPr id="24" name="Connector 23"/>
+          <p:cNvPr id="26" name="Connector 25"/>
           <p:cNvCxnSpPr/>
           <p:nvPr/>
         </p:nvCxnSpPr>
@@ -25863,7 +27978,7 @@
       </p:cxnSp>
       <p:sp>
         <p:nvSpPr>
-          <p:cNvPr id="25" name="TextBox 24"/>
+          <p:cNvPr id="27" name="TextBox 26"/>
           <p:cNvSpPr txBox="1"/>
           <p:nvPr/>
         </p:nvSpPr>
@@ -25902,7 +28017,7 @@
       </p:sp>
       <p:sp>
         <p:nvSpPr>
-          <p:cNvPr id="26" name="TextBox 25"/>
+          <p:cNvPr id="28" name="TextBox 27"/>
           <p:cNvSpPr txBox="1"/>
           <p:nvPr/>
         </p:nvSpPr>
@@ -25941,7 +28056,7 @@
       </p:sp>
       <p:sp>
         <p:nvSpPr>
-          <p:cNvPr id="27" name="TextBox 26"/>
+          <p:cNvPr id="29" name="TextBox 28"/>
           <p:cNvSpPr txBox="1"/>
           <p:nvPr/>
         </p:nvSpPr>
@@ -25980,7 +28095,7 @@
       </p:sp>
       <p:sp>
         <p:nvSpPr>
-          <p:cNvPr id="28" name="Rounded Rectangle 27"/>
+          <p:cNvPr id="30" name="Rounded Rectangle 29"/>
           <p:cNvSpPr/>
           <p:nvPr/>
         </p:nvSpPr>
@@ -26025,7 +28140,7 @@
       </p:sp>
       <p:sp>
         <p:nvSpPr>
-          <p:cNvPr id="29" name="TextBox 28"/>
+          <p:cNvPr id="31" name="TextBox 30"/>
           <p:cNvSpPr txBox="1"/>
           <p:nvPr/>
         </p:nvSpPr>
@@ -26474,12 +28589,57 @@
         </p:nvSpPr>
         <p:spPr>
           <a:xfrm>
+            <a:off x="676656" y="5129783"/>
+            <a:ext cx="3566160" cy="1417320"/>
+          </a:xfrm>
+          <a:prstGeom prst="roundRect">
+            <a:avLst>
+              <a:gd name="adj" fmla="val 5000"/>
+            </a:avLst>
+          </a:prstGeom>
+          <a:solidFill>
+            <a:srgbClr val="E9EBF0"/>
+          </a:solidFill>
+          <a:ln>
+            <a:noFill/>
+          </a:ln>
+        </p:spPr>
+        <p:style>
+          <a:lnRef idx="1">
+            <a:schemeClr val="accent1"/>
+          </a:lnRef>
+          <a:fillRef idx="3">
+            <a:schemeClr val="accent1"/>
+          </a:fillRef>
+          <a:effectRef idx="2">
+            <a:schemeClr val="accent1"/>
+          </a:effectRef>
+          <a:fontRef idx="minor">
+            <a:schemeClr val="lt1"/>
+          </a:fontRef>
+        </p:style>
+        <p:txBody>
+          <a:bodyPr rtlCol="0" anchor="ctr"/>
+          <a:lstStyle/>
+          <a:p>
+            <a:pPr algn="ctr"/>
+          </a:p>
+        </p:txBody>
+      </p:sp>
+      <p:sp>
+        <p:nvSpPr>
+          <p:cNvPr id="13" name="Rounded Rectangle 12"/>
+          <p:cNvSpPr/>
+          <p:nvPr/>
+        </p:nvSpPr>
+        <p:spPr>
+          <a:xfrm>
             <a:off x="640080" y="5074920"/>
             <a:ext cx="3566160" cy="1417320"/>
           </a:xfrm>
           <a:prstGeom prst="roundRect">
             <a:avLst>
-              <a:gd name="adj" fmla="val 6000"/>
+              <a:gd name="adj" fmla="val 5000"/>
             </a:avLst>
           </a:prstGeom>
           <a:solidFill>
@@ -26515,7 +28675,7 @@
       </p:sp>
       <p:sp>
         <p:nvSpPr>
-          <p:cNvPr id="13" name="TextBox 12"/>
+          <p:cNvPr id="14" name="TextBox 13"/>
           <p:cNvSpPr txBox="1"/>
           <p:nvPr/>
         </p:nvSpPr>
@@ -26554,7 +28714,7 @@
       </p:sp>
       <p:sp>
         <p:nvSpPr>
-          <p:cNvPr id="14" name="TextBox 13"/>
+          <p:cNvPr id="15" name="TextBox 14"/>
           <p:cNvSpPr txBox="1"/>
           <p:nvPr/>
         </p:nvSpPr>
@@ -26593,7 +28753,7 @@
       </p:sp>
       <p:sp>
         <p:nvSpPr>
-          <p:cNvPr id="15" name="TextBox 14"/>
+          <p:cNvPr id="16" name="TextBox 15"/>
           <p:cNvSpPr txBox="1"/>
           <p:nvPr/>
         </p:nvSpPr>
@@ -26648,7 +28808,52 @@
       </p:sp>
       <p:sp>
         <p:nvSpPr>
-          <p:cNvPr id="16" name="Rounded Rectangle 15"/>
+          <p:cNvPr id="17" name="Rounded Rectangle 16"/>
+          <p:cNvSpPr/>
+          <p:nvPr/>
+        </p:nvSpPr>
+        <p:spPr>
+          <a:xfrm>
+            <a:off x="4425696" y="5129783"/>
+            <a:ext cx="3566160" cy="1417320"/>
+          </a:xfrm>
+          <a:prstGeom prst="roundRect">
+            <a:avLst>
+              <a:gd name="adj" fmla="val 5000"/>
+            </a:avLst>
+          </a:prstGeom>
+          <a:solidFill>
+            <a:srgbClr val="E9EBF0"/>
+          </a:solidFill>
+          <a:ln>
+            <a:noFill/>
+          </a:ln>
+        </p:spPr>
+        <p:style>
+          <a:lnRef idx="1">
+            <a:schemeClr val="accent1"/>
+          </a:lnRef>
+          <a:fillRef idx="3">
+            <a:schemeClr val="accent1"/>
+          </a:fillRef>
+          <a:effectRef idx="2">
+            <a:schemeClr val="accent1"/>
+          </a:effectRef>
+          <a:fontRef idx="minor">
+            <a:schemeClr val="lt1"/>
+          </a:fontRef>
+        </p:style>
+        <p:txBody>
+          <a:bodyPr rtlCol="0" anchor="ctr"/>
+          <a:lstStyle/>
+          <a:p>
+            <a:pPr algn="ctr"/>
+          </a:p>
+        </p:txBody>
+      </p:sp>
+      <p:sp>
+        <p:nvSpPr>
+          <p:cNvPr id="18" name="Rounded Rectangle 17"/>
           <p:cNvSpPr/>
           <p:nvPr/>
         </p:nvSpPr>
@@ -26659,7 +28864,7 @@
           </a:xfrm>
           <a:prstGeom prst="roundRect">
             <a:avLst>
-              <a:gd name="adj" fmla="val 6000"/>
+              <a:gd name="adj" fmla="val 5000"/>
             </a:avLst>
           </a:prstGeom>
           <a:solidFill>
@@ -26695,7 +28900,7 @@
       </p:sp>
       <p:sp>
         <p:nvSpPr>
-          <p:cNvPr id="17" name="TextBox 16"/>
+          <p:cNvPr id="19" name="TextBox 18"/>
           <p:cNvSpPr txBox="1"/>
           <p:nvPr/>
         </p:nvSpPr>
@@ -26734,7 +28939,7 @@
       </p:sp>
       <p:sp>
         <p:nvSpPr>
-          <p:cNvPr id="18" name="TextBox 17"/>
+          <p:cNvPr id="20" name="TextBox 19"/>
           <p:cNvSpPr txBox="1"/>
           <p:nvPr/>
         </p:nvSpPr>
@@ -26773,7 +28978,7 @@
       </p:sp>
       <p:sp>
         <p:nvSpPr>
-          <p:cNvPr id="19" name="TextBox 18"/>
+          <p:cNvPr id="21" name="TextBox 20"/>
           <p:cNvSpPr txBox="1"/>
           <p:nvPr/>
         </p:nvSpPr>
@@ -26828,7 +29033,52 @@
       </p:sp>
       <p:sp>
         <p:nvSpPr>
-          <p:cNvPr id="20" name="Rounded Rectangle 19"/>
+          <p:cNvPr id="22" name="Rounded Rectangle 21"/>
+          <p:cNvSpPr/>
+          <p:nvPr/>
+        </p:nvSpPr>
+        <p:spPr>
+          <a:xfrm>
+            <a:off x="8174735" y="5129783"/>
+            <a:ext cx="3566160" cy="1417320"/>
+          </a:xfrm>
+          <a:prstGeom prst="roundRect">
+            <a:avLst>
+              <a:gd name="adj" fmla="val 5000"/>
+            </a:avLst>
+          </a:prstGeom>
+          <a:solidFill>
+            <a:srgbClr val="E9EBF0"/>
+          </a:solidFill>
+          <a:ln>
+            <a:noFill/>
+          </a:ln>
+        </p:spPr>
+        <p:style>
+          <a:lnRef idx="1">
+            <a:schemeClr val="accent1"/>
+          </a:lnRef>
+          <a:fillRef idx="3">
+            <a:schemeClr val="accent1"/>
+          </a:fillRef>
+          <a:effectRef idx="2">
+            <a:schemeClr val="accent1"/>
+          </a:effectRef>
+          <a:fontRef idx="minor">
+            <a:schemeClr val="lt1"/>
+          </a:fontRef>
+        </p:style>
+        <p:txBody>
+          <a:bodyPr rtlCol="0" anchor="ctr"/>
+          <a:lstStyle/>
+          <a:p>
+            <a:pPr algn="ctr"/>
+          </a:p>
+        </p:txBody>
+      </p:sp>
+      <p:sp>
+        <p:nvSpPr>
+          <p:cNvPr id="23" name="Rounded Rectangle 22"/>
           <p:cNvSpPr/>
           <p:nvPr/>
         </p:nvSpPr>
@@ -26839,7 +29089,7 @@
           </a:xfrm>
           <a:prstGeom prst="roundRect">
             <a:avLst>
-              <a:gd name="adj" fmla="val 6000"/>
+              <a:gd name="adj" fmla="val 5000"/>
             </a:avLst>
           </a:prstGeom>
           <a:solidFill>
@@ -26875,7 +29125,7 @@
       </p:sp>
       <p:sp>
         <p:nvSpPr>
-          <p:cNvPr id="21" name="TextBox 20"/>
+          <p:cNvPr id="24" name="TextBox 23"/>
           <p:cNvSpPr txBox="1"/>
           <p:nvPr/>
         </p:nvSpPr>
@@ -26914,7 +29164,7 @@
       </p:sp>
       <p:sp>
         <p:nvSpPr>
-          <p:cNvPr id="22" name="TextBox 21"/>
+          <p:cNvPr id="25" name="TextBox 24"/>
           <p:cNvSpPr txBox="1"/>
           <p:nvPr/>
         </p:nvSpPr>
@@ -26953,7 +29203,7 @@
       </p:sp>
       <p:sp>
         <p:nvSpPr>
-          <p:cNvPr id="23" name="TextBox 22"/>
+          <p:cNvPr id="26" name="TextBox 25"/>
           <p:cNvSpPr txBox="1"/>
           <p:nvPr/>
         </p:nvSpPr>
@@ -27266,12 +29516,57 @@
         </p:nvSpPr>
         <p:spPr>
           <a:xfrm>
+            <a:off x="676656" y="2569464"/>
+            <a:ext cx="5440680" cy="1280160"/>
+          </a:xfrm>
+          <a:prstGeom prst="roundRect">
+            <a:avLst>
+              <a:gd name="adj" fmla="val 5000"/>
+            </a:avLst>
+          </a:prstGeom>
+          <a:solidFill>
+            <a:srgbClr val="E9EBF0"/>
+          </a:solidFill>
+          <a:ln>
+            <a:noFill/>
+          </a:ln>
+        </p:spPr>
+        <p:style>
+          <a:lnRef idx="1">
+            <a:schemeClr val="accent1"/>
+          </a:lnRef>
+          <a:fillRef idx="3">
+            <a:schemeClr val="accent1"/>
+          </a:fillRef>
+          <a:effectRef idx="2">
+            <a:schemeClr val="accent1"/>
+          </a:effectRef>
+          <a:fontRef idx="minor">
+            <a:schemeClr val="lt1"/>
+          </a:fontRef>
+        </p:style>
+        <p:txBody>
+          <a:bodyPr rtlCol="0" anchor="ctr"/>
+          <a:lstStyle/>
+          <a:p>
+            <a:pPr algn="ctr"/>
+          </a:p>
+        </p:txBody>
+      </p:sp>
+      <p:sp>
+        <p:nvSpPr>
+          <p:cNvPr id="9" name="Rounded Rectangle 8"/>
+          <p:cNvSpPr/>
+          <p:nvPr/>
+        </p:nvSpPr>
+        <p:spPr>
+          <a:xfrm>
             <a:off x="640080" y="2514600"/>
             <a:ext cx="5440680" cy="1280160"/>
           </a:xfrm>
           <a:prstGeom prst="roundRect">
             <a:avLst>
-              <a:gd name="adj" fmla="val 6000"/>
+              <a:gd name="adj" fmla="val 5000"/>
             </a:avLst>
           </a:prstGeom>
           <a:solidFill>
@@ -27307,7 +29602,7 @@
       </p:sp>
       <p:sp>
         <p:nvSpPr>
-          <p:cNvPr id="9" name="TextBox 8"/>
+          <p:cNvPr id="10" name="TextBox 9"/>
           <p:cNvSpPr txBox="1"/>
           <p:nvPr/>
         </p:nvSpPr>
@@ -27346,7 +29641,7 @@
       </p:sp>
       <p:pic>
         <p:nvPicPr>
-          <p:cNvPr id="10" name="Picture 9" descr="f_memory.png"/>
+          <p:cNvPr id="11" name="Picture 10" descr="f_memory.png"/>
           <p:cNvPicPr>
             <a:picLocks noChangeAspect="1"/>
           </p:cNvPicPr>
@@ -27370,7 +29665,7 @@
       </p:pic>
       <p:sp>
         <p:nvSpPr>
-          <p:cNvPr id="11" name="TextBox 10"/>
+          <p:cNvPr id="12" name="TextBox 11"/>
           <p:cNvSpPr txBox="1"/>
           <p:nvPr/>
         </p:nvSpPr>
@@ -27409,7 +29704,7 @@
       </p:sp>
       <p:sp>
         <p:nvSpPr>
-          <p:cNvPr id="12" name="TextBox 11"/>
+          <p:cNvPr id="13" name="TextBox 12"/>
           <p:cNvSpPr txBox="1"/>
           <p:nvPr/>
         </p:nvSpPr>
@@ -27448,7 +29743,7 @@
       </p:sp>
       <p:sp>
         <p:nvSpPr>
-          <p:cNvPr id="13" name="TextBox 12"/>
+          <p:cNvPr id="14" name="TextBox 13"/>
           <p:cNvSpPr txBox="1"/>
           <p:nvPr/>
         </p:nvSpPr>
@@ -27487,7 +29782,7 @@
       </p:sp>
       <p:sp>
         <p:nvSpPr>
-          <p:cNvPr id="14" name="TextBox 13"/>
+          <p:cNvPr id="15" name="TextBox 14"/>
           <p:cNvSpPr txBox="1"/>
           <p:nvPr/>
         </p:nvSpPr>
@@ -27526,7 +29821,7 @@
       </p:sp>
       <p:sp>
         <p:nvSpPr>
-          <p:cNvPr id="15" name="TextBox 14"/>
+          <p:cNvPr id="16" name="TextBox 15"/>
           <p:cNvSpPr txBox="1"/>
           <p:nvPr/>
         </p:nvSpPr>
@@ -27565,7 +29860,7 @@
       </p:sp>
       <p:sp>
         <p:nvSpPr>
-          <p:cNvPr id="16" name="TextBox 15"/>
+          <p:cNvPr id="17" name="TextBox 16"/>
           <p:cNvSpPr txBox="1"/>
           <p:nvPr/>
         </p:nvSpPr>
@@ -27604,7 +29899,7 @@
       </p:sp>
       <p:sp>
         <p:nvSpPr>
-          <p:cNvPr id="17" name="TextBox 16"/>
+          <p:cNvPr id="18" name="TextBox 17"/>
           <p:cNvSpPr txBox="1"/>
           <p:nvPr/>
         </p:nvSpPr>
@@ -27643,7 +29938,7 @@
       </p:sp>
       <p:sp>
         <p:nvSpPr>
-          <p:cNvPr id="18" name="TextBox 17"/>
+          <p:cNvPr id="19" name="TextBox 18"/>
           <p:cNvSpPr txBox="1"/>
           <p:nvPr/>
         </p:nvSpPr>
@@ -27682,7 +29977,7 @@
       </p:sp>
       <p:sp>
         <p:nvSpPr>
-          <p:cNvPr id="19" name="TextBox 18"/>
+          <p:cNvPr id="20" name="TextBox 19"/>
           <p:cNvSpPr txBox="1"/>
           <p:nvPr/>
         </p:nvSpPr>
@@ -27721,7 +30016,7 @@
       </p:sp>
       <p:sp>
         <p:nvSpPr>
-          <p:cNvPr id="20" name="TextBox 19"/>
+          <p:cNvPr id="21" name="TextBox 20"/>
           <p:cNvSpPr txBox="1"/>
           <p:nvPr/>
         </p:nvSpPr>
@@ -27760,7 +30055,52 @@
       </p:sp>
       <p:sp>
         <p:nvSpPr>
-          <p:cNvPr id="21" name="Rounded Rectangle 20"/>
+          <p:cNvPr id="22" name="Rounded Rectangle 21"/>
+          <p:cNvSpPr/>
+          <p:nvPr/>
+        </p:nvSpPr>
+        <p:spPr>
+          <a:xfrm>
+            <a:off x="6300216" y="2569464"/>
+            <a:ext cx="5257800" cy="4160520"/>
+          </a:xfrm>
+          <a:prstGeom prst="roundRect">
+            <a:avLst>
+              <a:gd name="adj" fmla="val 5000"/>
+            </a:avLst>
+          </a:prstGeom>
+          <a:solidFill>
+            <a:srgbClr val="E9EBF0"/>
+          </a:solidFill>
+          <a:ln>
+            <a:noFill/>
+          </a:ln>
+        </p:spPr>
+        <p:style>
+          <a:lnRef idx="1">
+            <a:schemeClr val="accent1"/>
+          </a:lnRef>
+          <a:fillRef idx="3">
+            <a:schemeClr val="accent1"/>
+          </a:fillRef>
+          <a:effectRef idx="2">
+            <a:schemeClr val="accent1"/>
+          </a:effectRef>
+          <a:fontRef idx="minor">
+            <a:schemeClr val="lt1"/>
+          </a:fontRef>
+        </p:style>
+        <p:txBody>
+          <a:bodyPr rtlCol="0" anchor="ctr"/>
+          <a:lstStyle/>
+          <a:p>
+            <a:pPr algn="ctr"/>
+          </a:p>
+        </p:txBody>
+      </p:sp>
+      <p:sp>
+        <p:nvSpPr>
+          <p:cNvPr id="23" name="Rounded Rectangle 22"/>
           <p:cNvSpPr/>
           <p:nvPr/>
         </p:nvSpPr>
@@ -27771,7 +30111,7 @@
           </a:xfrm>
           <a:prstGeom prst="roundRect">
             <a:avLst>
-              <a:gd name="adj" fmla="val 6000"/>
+              <a:gd name="adj" fmla="val 5000"/>
             </a:avLst>
           </a:prstGeom>
           <a:solidFill>
@@ -27807,7 +30147,7 @@
       </p:sp>
       <p:sp>
         <p:nvSpPr>
-          <p:cNvPr id="22" name="TextBox 21"/>
+          <p:cNvPr id="24" name="TextBox 23"/>
           <p:cNvSpPr txBox="1"/>
           <p:nvPr/>
         </p:nvSpPr>
@@ -27846,7 +30186,7 @@
       </p:sp>
       <p:sp>
         <p:nvSpPr>
-          <p:cNvPr id="23" name="TextBox 22"/>
+          <p:cNvPr id="25" name="TextBox 24"/>
           <p:cNvSpPr txBox="1"/>
           <p:nvPr/>
         </p:nvSpPr>
@@ -27885,7 +30225,7 @@
       </p:sp>
       <p:sp>
         <p:nvSpPr>
-          <p:cNvPr id="24" name="TextBox 23"/>
+          <p:cNvPr id="26" name="TextBox 25"/>
           <p:cNvSpPr txBox="1"/>
           <p:nvPr/>
         </p:nvSpPr>
@@ -27956,7 +30296,7 @@
       </p:sp>
       <p:cxnSp>
         <p:nvCxnSpPr>
-          <p:cNvPr id="25" name="Connector 24"/>
+          <p:cNvPr id="27" name="Connector 26"/>
           <p:cNvCxnSpPr/>
           <p:nvPr/>
         </p:nvCxnSpPr>
@@ -27991,7 +30331,7 @@
       </p:cxnSp>
       <p:sp>
         <p:nvSpPr>
-          <p:cNvPr id="26" name="TextBox 25"/>
+          <p:cNvPr id="28" name="TextBox 27"/>
           <p:cNvSpPr txBox="1"/>
           <p:nvPr/>
         </p:nvSpPr>
@@ -28030,7 +30370,7 @@
       </p:sp>
       <p:sp>
         <p:nvSpPr>
-          <p:cNvPr id="27" name="TextBox 26"/>
+          <p:cNvPr id="29" name="TextBox 28"/>
           <p:cNvSpPr txBox="1"/>
           <p:nvPr/>
         </p:nvSpPr>
@@ -28069,7 +30409,7 @@
       </p:sp>
       <p:sp>
         <p:nvSpPr>
-          <p:cNvPr id="28" name="TextBox 27"/>
+          <p:cNvPr id="30" name="TextBox 29"/>
           <p:cNvSpPr txBox="1"/>
           <p:nvPr/>
         </p:nvSpPr>

--- a/team_project/kickoff_2026-05-11.pptx
+++ b/team_project/kickoff_2026-05-11.pptx
@@ -3987,13 +3987,56 @@
       </p:sp>
       <p:sp>
         <p:nvSpPr>
-          <p:cNvPr id="14" name="TextBox 13"/>
-          <p:cNvSpPr txBox="1"/>
-          <p:nvPr/>
-        </p:nvSpPr>
-        <p:spPr>
-          <a:xfrm>
-            <a:off x="868680" y="5212080"/>
+          <p:cNvPr id="14" name="Rectangle 13"/>
+          <p:cNvSpPr/>
+          <p:nvPr/>
+        </p:nvSpPr>
+        <p:spPr>
+          <a:xfrm>
+            <a:off x="777240" y="5074920"/>
+            <a:ext cx="3291840" cy="73152"/>
+          </a:xfrm>
+          <a:prstGeom prst="rect">
+            <a:avLst/>
+          </a:prstGeom>
+          <a:solidFill>
+            <a:srgbClr val="4F46E5"/>
+          </a:solidFill>
+          <a:ln>
+            <a:noFill/>
+          </a:ln>
+        </p:spPr>
+        <p:style>
+          <a:lnRef idx="1">
+            <a:schemeClr val="accent1"/>
+          </a:lnRef>
+          <a:fillRef idx="3">
+            <a:schemeClr val="accent1"/>
+          </a:fillRef>
+          <a:effectRef idx="2">
+            <a:schemeClr val="accent1"/>
+          </a:effectRef>
+          <a:fontRef idx="minor">
+            <a:schemeClr val="lt1"/>
+          </a:fontRef>
+        </p:style>
+        <p:txBody>
+          <a:bodyPr rtlCol="0" anchor="ctr"/>
+          <a:lstStyle/>
+          <a:p>
+            <a:pPr algn="ctr"/>
+          </a:p>
+        </p:txBody>
+      </p:sp>
+      <p:sp>
+        <p:nvSpPr>
+          <p:cNvPr id="15" name="TextBox 14"/>
+          <p:cNvSpPr txBox="1"/>
+          <p:nvPr/>
+        </p:nvSpPr>
+        <p:spPr>
+          <a:xfrm>
+            <a:off x="868680" y="5257800"/>
             <a:ext cx="914400" cy="457200"/>
           </a:xfrm>
           <a:prstGeom prst="rect">
@@ -4013,7 +4056,7 @@
               </a:lnSpc>
             </a:pPr>
             <a:r>
-              <a:rPr sz="2400" b="0">
+              <a:rPr sz="2800" b="0">
                 <a:solidFill>
                   <a:srgbClr val="0F141F"/>
                 </a:solidFill>
@@ -4026,13 +4069,13 @@
       </p:sp>
       <p:sp>
         <p:nvSpPr>
-          <p:cNvPr id="15" name="TextBox 14"/>
-          <p:cNvSpPr txBox="1"/>
-          <p:nvPr/>
-        </p:nvSpPr>
-        <p:spPr>
-          <a:xfrm>
-            <a:off x="1600200" y="5212080"/>
+          <p:cNvPr id="16" name="TextBox 15"/>
+          <p:cNvSpPr txBox="1"/>
+          <p:nvPr/>
+        </p:nvSpPr>
+        <p:spPr>
+          <a:xfrm>
+            <a:off x="1691639" y="5285232"/>
             <a:ext cx="2468880" cy="365760"/>
           </a:xfrm>
           <a:prstGeom prst="rect">
@@ -4052,7 +4095,7 @@
               </a:lnSpc>
             </a:pPr>
             <a:r>
-              <a:rPr sz="1400" b="1">
+              <a:rPr sz="1500" b="1">
                 <a:solidFill>
                   <a:srgbClr val="4F46E5"/>
                 </a:solidFill>
@@ -4065,13 +4108,13 @@
       </p:sp>
       <p:sp>
         <p:nvSpPr>
-          <p:cNvPr id="16" name="TextBox 15"/>
-          <p:cNvSpPr txBox="1"/>
-          <p:nvPr/>
-        </p:nvSpPr>
-        <p:spPr>
-          <a:xfrm>
-            <a:off x="868680" y="5715000"/>
+          <p:cNvPr id="17" name="TextBox 16"/>
+          <p:cNvSpPr txBox="1"/>
+          <p:nvPr/>
+        </p:nvSpPr>
+        <p:spPr>
+          <a:xfrm>
+            <a:off x="868680" y="5760720"/>
             <a:ext cx="3200400" cy="777240"/>
           </a:xfrm>
           <a:prstGeom prst="rect">
@@ -4087,11 +4130,11 @@
           <a:p>
             <a:pPr algn="l">
               <a:lnSpc>
-                <a:spcPct val="130000"/>
-              </a:lnSpc>
-            </a:pPr>
-            <a:r>
-              <a:rPr sz="1000" b="0">
+                <a:spcPct val="135000"/>
+              </a:lnSpc>
+            </a:pPr>
+            <a:r>
+              <a:rPr sz="1100" b="0">
                 <a:solidFill>
                   <a:srgbClr val="424B5C"/>
                 </a:solidFill>
@@ -4103,11 +4146,11 @@
           <a:p>
             <a:pPr algn="l">
               <a:lnSpc>
-                <a:spcPct val="130000"/>
-              </a:lnSpc>
-            </a:pPr>
-            <a:r>
-              <a:rPr sz="1000" b="0">
+                <a:spcPct val="135000"/>
+              </a:lnSpc>
+            </a:pPr>
+            <a:r>
+              <a:rPr sz="1100" b="0">
                 <a:solidFill>
                   <a:srgbClr val="424B5C"/>
                 </a:solidFill>
@@ -4120,7 +4163,7 @@
       </p:sp>
       <p:sp>
         <p:nvSpPr>
-          <p:cNvPr id="17" name="Rounded Rectangle 16"/>
+          <p:cNvPr id="18" name="Rounded Rectangle 17"/>
           <p:cNvSpPr/>
           <p:nvPr/>
         </p:nvSpPr>
@@ -4165,7 +4208,7 @@
       </p:sp>
       <p:sp>
         <p:nvSpPr>
-          <p:cNvPr id="18" name="Rounded Rectangle 17"/>
+          <p:cNvPr id="19" name="Rounded Rectangle 18"/>
           <p:cNvSpPr/>
           <p:nvPr/>
         </p:nvSpPr>
@@ -4212,13 +4255,56 @@
       </p:sp>
       <p:sp>
         <p:nvSpPr>
-          <p:cNvPr id="19" name="TextBox 18"/>
-          <p:cNvSpPr txBox="1"/>
-          <p:nvPr/>
-        </p:nvSpPr>
-        <p:spPr>
-          <a:xfrm>
-            <a:off x="4617720" y="5212080"/>
+          <p:cNvPr id="20" name="Rectangle 19"/>
+          <p:cNvSpPr/>
+          <p:nvPr/>
+        </p:nvSpPr>
+        <p:spPr>
+          <a:xfrm>
+            <a:off x="4526280" y="5074920"/>
+            <a:ext cx="3291840" cy="73152"/>
+          </a:xfrm>
+          <a:prstGeom prst="rect">
+            <a:avLst/>
+          </a:prstGeom>
+          <a:solidFill>
+            <a:srgbClr val="4F46E5"/>
+          </a:solidFill>
+          <a:ln>
+            <a:noFill/>
+          </a:ln>
+        </p:spPr>
+        <p:style>
+          <a:lnRef idx="1">
+            <a:schemeClr val="accent1"/>
+          </a:lnRef>
+          <a:fillRef idx="3">
+            <a:schemeClr val="accent1"/>
+          </a:fillRef>
+          <a:effectRef idx="2">
+            <a:schemeClr val="accent1"/>
+          </a:effectRef>
+          <a:fontRef idx="minor">
+            <a:schemeClr val="lt1"/>
+          </a:fontRef>
+        </p:style>
+        <p:txBody>
+          <a:bodyPr rtlCol="0" anchor="ctr"/>
+          <a:lstStyle/>
+          <a:p>
+            <a:pPr algn="ctr"/>
+          </a:p>
+        </p:txBody>
+      </p:sp>
+      <p:sp>
+        <p:nvSpPr>
+          <p:cNvPr id="21" name="TextBox 20"/>
+          <p:cNvSpPr txBox="1"/>
+          <p:nvPr/>
+        </p:nvSpPr>
+        <p:spPr>
+          <a:xfrm>
+            <a:off x="4617720" y="5257800"/>
             <a:ext cx="914400" cy="457200"/>
           </a:xfrm>
           <a:prstGeom prst="rect">
@@ -4238,7 +4324,7 @@
               </a:lnSpc>
             </a:pPr>
             <a:r>
-              <a:rPr sz="2400" b="0">
+              <a:rPr sz="2800" b="0">
                 <a:solidFill>
                   <a:srgbClr val="0F141F"/>
                 </a:solidFill>
@@ -4251,13 +4337,13 @@
       </p:sp>
       <p:sp>
         <p:nvSpPr>
-          <p:cNvPr id="20" name="TextBox 19"/>
-          <p:cNvSpPr txBox="1"/>
-          <p:nvPr/>
-        </p:nvSpPr>
-        <p:spPr>
-          <a:xfrm>
-            <a:off x="5349240" y="5212080"/>
+          <p:cNvPr id="22" name="TextBox 21"/>
+          <p:cNvSpPr txBox="1"/>
+          <p:nvPr/>
+        </p:nvSpPr>
+        <p:spPr>
+          <a:xfrm>
+            <a:off x="5440679" y="5285232"/>
             <a:ext cx="2468880" cy="365760"/>
           </a:xfrm>
           <a:prstGeom prst="rect">
@@ -4277,7 +4363,7 @@
               </a:lnSpc>
             </a:pPr>
             <a:r>
-              <a:rPr sz="1400" b="1">
+              <a:rPr sz="1500" b="1">
                 <a:solidFill>
                   <a:srgbClr val="4F46E5"/>
                 </a:solidFill>
@@ -4290,13 +4376,13 @@
       </p:sp>
       <p:sp>
         <p:nvSpPr>
-          <p:cNvPr id="21" name="TextBox 20"/>
-          <p:cNvSpPr txBox="1"/>
-          <p:nvPr/>
-        </p:nvSpPr>
-        <p:spPr>
-          <a:xfrm>
-            <a:off x="4617720" y="5715000"/>
+          <p:cNvPr id="23" name="TextBox 22"/>
+          <p:cNvSpPr txBox="1"/>
+          <p:nvPr/>
+        </p:nvSpPr>
+        <p:spPr>
+          <a:xfrm>
+            <a:off x="4617720" y="5760720"/>
             <a:ext cx="3200400" cy="777240"/>
           </a:xfrm>
           <a:prstGeom prst="rect">
@@ -4312,11 +4398,11 @@
           <a:p>
             <a:pPr algn="l">
               <a:lnSpc>
-                <a:spcPct val="130000"/>
-              </a:lnSpc>
-            </a:pPr>
-            <a:r>
-              <a:rPr sz="1000" b="0">
+                <a:spcPct val="135000"/>
+              </a:lnSpc>
+            </a:pPr>
+            <a:r>
+              <a:rPr sz="1100" b="0">
                 <a:solidFill>
                   <a:srgbClr val="424B5C"/>
                 </a:solidFill>
@@ -4328,11 +4414,11 @@
           <a:p>
             <a:pPr algn="l">
               <a:lnSpc>
-                <a:spcPct val="130000"/>
-              </a:lnSpc>
-            </a:pPr>
-            <a:r>
-              <a:rPr sz="1000" b="0">
+                <a:spcPct val="135000"/>
+              </a:lnSpc>
+            </a:pPr>
+            <a:r>
+              <a:rPr sz="1100" b="0">
                 <a:solidFill>
                   <a:srgbClr val="424B5C"/>
                 </a:solidFill>
@@ -4345,7 +4431,7 @@
       </p:sp>
       <p:sp>
         <p:nvSpPr>
-          <p:cNvPr id="22" name="Rounded Rectangle 21"/>
+          <p:cNvPr id="24" name="Rounded Rectangle 23"/>
           <p:cNvSpPr/>
           <p:nvPr/>
         </p:nvSpPr>
@@ -4390,7 +4476,7 @@
       </p:sp>
       <p:sp>
         <p:nvSpPr>
-          <p:cNvPr id="23" name="Rounded Rectangle 22"/>
+          <p:cNvPr id="25" name="Rounded Rectangle 24"/>
           <p:cNvSpPr/>
           <p:nvPr/>
         </p:nvSpPr>
@@ -4437,13 +4523,56 @@
       </p:sp>
       <p:sp>
         <p:nvSpPr>
-          <p:cNvPr id="24" name="TextBox 23"/>
-          <p:cNvSpPr txBox="1"/>
-          <p:nvPr/>
-        </p:nvSpPr>
-        <p:spPr>
-          <a:xfrm>
-            <a:off x="8366759" y="5212080"/>
+          <p:cNvPr id="26" name="Rectangle 25"/>
+          <p:cNvSpPr/>
+          <p:nvPr/>
+        </p:nvSpPr>
+        <p:spPr>
+          <a:xfrm>
+            <a:off x="8275319" y="5074920"/>
+            <a:ext cx="3291840" cy="73152"/>
+          </a:xfrm>
+          <a:prstGeom prst="rect">
+            <a:avLst/>
+          </a:prstGeom>
+          <a:solidFill>
+            <a:srgbClr val="4F46E5"/>
+          </a:solidFill>
+          <a:ln>
+            <a:noFill/>
+          </a:ln>
+        </p:spPr>
+        <p:style>
+          <a:lnRef idx="1">
+            <a:schemeClr val="accent1"/>
+          </a:lnRef>
+          <a:fillRef idx="3">
+            <a:schemeClr val="accent1"/>
+          </a:fillRef>
+          <a:effectRef idx="2">
+            <a:schemeClr val="accent1"/>
+          </a:effectRef>
+          <a:fontRef idx="minor">
+            <a:schemeClr val="lt1"/>
+          </a:fontRef>
+        </p:style>
+        <p:txBody>
+          <a:bodyPr rtlCol="0" anchor="ctr"/>
+          <a:lstStyle/>
+          <a:p>
+            <a:pPr algn="ctr"/>
+          </a:p>
+        </p:txBody>
+      </p:sp>
+      <p:sp>
+        <p:nvSpPr>
+          <p:cNvPr id="27" name="TextBox 26"/>
+          <p:cNvSpPr txBox="1"/>
+          <p:nvPr/>
+        </p:nvSpPr>
+        <p:spPr>
+          <a:xfrm>
+            <a:off x="8366759" y="5257800"/>
             <a:ext cx="914400" cy="457200"/>
           </a:xfrm>
           <a:prstGeom prst="rect">
@@ -4463,7 +4592,7 @@
               </a:lnSpc>
             </a:pPr>
             <a:r>
-              <a:rPr sz="2400" b="0">
+              <a:rPr sz="2800" b="0">
                 <a:solidFill>
                   <a:srgbClr val="0F141F"/>
                 </a:solidFill>
@@ -4476,13 +4605,13 @@
       </p:sp>
       <p:sp>
         <p:nvSpPr>
-          <p:cNvPr id="25" name="TextBox 24"/>
-          <p:cNvSpPr txBox="1"/>
-          <p:nvPr/>
-        </p:nvSpPr>
-        <p:spPr>
-          <a:xfrm>
-            <a:off x="9098280" y="5212080"/>
+          <p:cNvPr id="28" name="TextBox 27"/>
+          <p:cNvSpPr txBox="1"/>
+          <p:nvPr/>
+        </p:nvSpPr>
+        <p:spPr>
+          <a:xfrm>
+            <a:off x="9189719" y="5285232"/>
             <a:ext cx="2468880" cy="365760"/>
           </a:xfrm>
           <a:prstGeom prst="rect">
@@ -4502,7 +4631,7 @@
               </a:lnSpc>
             </a:pPr>
             <a:r>
-              <a:rPr sz="1400" b="1">
+              <a:rPr sz="1500" b="1">
                 <a:solidFill>
                   <a:srgbClr val="4F46E5"/>
                 </a:solidFill>
@@ -4515,13 +4644,13 @@
       </p:sp>
       <p:sp>
         <p:nvSpPr>
-          <p:cNvPr id="26" name="TextBox 25"/>
-          <p:cNvSpPr txBox="1"/>
-          <p:nvPr/>
-        </p:nvSpPr>
-        <p:spPr>
-          <a:xfrm>
-            <a:off x="8366759" y="5715000"/>
+          <p:cNvPr id="29" name="TextBox 28"/>
+          <p:cNvSpPr txBox="1"/>
+          <p:nvPr/>
+        </p:nvSpPr>
+        <p:spPr>
+          <a:xfrm>
+            <a:off x="8366759" y="5760720"/>
             <a:ext cx="3200400" cy="777240"/>
           </a:xfrm>
           <a:prstGeom prst="rect">
@@ -4537,11 +4666,11 @@
           <a:p>
             <a:pPr algn="l">
               <a:lnSpc>
-                <a:spcPct val="130000"/>
-              </a:lnSpc>
-            </a:pPr>
-            <a:r>
-              <a:rPr sz="1000" b="0">
+                <a:spcPct val="135000"/>
+              </a:lnSpc>
+            </a:pPr>
+            <a:r>
+              <a:rPr sz="1100" b="0">
                 <a:solidFill>
                   <a:srgbClr val="424B5C"/>
                 </a:solidFill>
@@ -4553,11 +4682,11 @@
           <a:p>
             <a:pPr algn="l">
               <a:lnSpc>
-                <a:spcPct val="130000"/>
-              </a:lnSpc>
-            </a:pPr>
-            <a:r>
-              <a:rPr sz="1000" b="0">
+                <a:spcPct val="135000"/>
+              </a:lnSpc>
+            </a:pPr>
+            <a:r>
+              <a:rPr sz="1100" b="0">
                 <a:solidFill>
                   <a:srgbClr val="424B5C"/>
                 </a:solidFill>
@@ -6081,13 +6210,56 @@
       </p:sp>
       <p:sp>
         <p:nvSpPr>
-          <p:cNvPr id="14" name="TextBox 13"/>
-          <p:cNvSpPr txBox="1"/>
-          <p:nvPr/>
-        </p:nvSpPr>
-        <p:spPr>
-          <a:xfrm>
-            <a:off x="868680" y="5212080"/>
+          <p:cNvPr id="14" name="Rectangle 13"/>
+          <p:cNvSpPr/>
+          <p:nvPr/>
+        </p:nvSpPr>
+        <p:spPr>
+          <a:xfrm>
+            <a:off x="777240" y="5074920"/>
+            <a:ext cx="3291840" cy="73152"/>
+          </a:xfrm>
+          <a:prstGeom prst="rect">
+            <a:avLst/>
+          </a:prstGeom>
+          <a:solidFill>
+            <a:srgbClr val="EC4899"/>
+          </a:solidFill>
+          <a:ln>
+            <a:noFill/>
+          </a:ln>
+        </p:spPr>
+        <p:style>
+          <a:lnRef idx="1">
+            <a:schemeClr val="accent1"/>
+          </a:lnRef>
+          <a:fillRef idx="3">
+            <a:schemeClr val="accent1"/>
+          </a:fillRef>
+          <a:effectRef idx="2">
+            <a:schemeClr val="accent1"/>
+          </a:effectRef>
+          <a:fontRef idx="minor">
+            <a:schemeClr val="lt1"/>
+          </a:fontRef>
+        </p:style>
+        <p:txBody>
+          <a:bodyPr rtlCol="0" anchor="ctr"/>
+          <a:lstStyle/>
+          <a:p>
+            <a:pPr algn="ctr"/>
+          </a:p>
+        </p:txBody>
+      </p:sp>
+      <p:sp>
+        <p:nvSpPr>
+          <p:cNvPr id="15" name="TextBox 14"/>
+          <p:cNvSpPr txBox="1"/>
+          <p:nvPr/>
+        </p:nvSpPr>
+        <p:spPr>
+          <a:xfrm>
+            <a:off x="868680" y="5257800"/>
             <a:ext cx="914400" cy="457200"/>
           </a:xfrm>
           <a:prstGeom prst="rect">
@@ -6107,7 +6279,7 @@
               </a:lnSpc>
             </a:pPr>
             <a:r>
-              <a:rPr sz="2400" b="0">
+              <a:rPr sz="2800" b="0">
                 <a:solidFill>
                   <a:srgbClr val="0F141F"/>
                 </a:solidFill>
@@ -6120,13 +6292,13 @@
       </p:sp>
       <p:sp>
         <p:nvSpPr>
-          <p:cNvPr id="15" name="TextBox 14"/>
-          <p:cNvSpPr txBox="1"/>
-          <p:nvPr/>
-        </p:nvSpPr>
-        <p:spPr>
-          <a:xfrm>
-            <a:off x="1600200" y="5212080"/>
+          <p:cNvPr id="16" name="TextBox 15"/>
+          <p:cNvSpPr txBox="1"/>
+          <p:nvPr/>
+        </p:nvSpPr>
+        <p:spPr>
+          <a:xfrm>
+            <a:off x="1691639" y="5285232"/>
             <a:ext cx="2468880" cy="365760"/>
           </a:xfrm>
           <a:prstGeom prst="rect">
@@ -6146,7 +6318,7 @@
               </a:lnSpc>
             </a:pPr>
             <a:r>
-              <a:rPr sz="1400" b="1">
+              <a:rPr sz="1500" b="1">
                 <a:solidFill>
                   <a:srgbClr val="EC4899"/>
                 </a:solidFill>
@@ -6159,13 +6331,13 @@
       </p:sp>
       <p:sp>
         <p:nvSpPr>
-          <p:cNvPr id="16" name="TextBox 15"/>
-          <p:cNvSpPr txBox="1"/>
-          <p:nvPr/>
-        </p:nvSpPr>
-        <p:spPr>
-          <a:xfrm>
-            <a:off x="868680" y="5715000"/>
+          <p:cNvPr id="17" name="TextBox 16"/>
+          <p:cNvSpPr txBox="1"/>
+          <p:nvPr/>
+        </p:nvSpPr>
+        <p:spPr>
+          <a:xfrm>
+            <a:off x="868680" y="5760720"/>
             <a:ext cx="3200400" cy="777240"/>
           </a:xfrm>
           <a:prstGeom prst="rect">
@@ -6181,11 +6353,11 @@
           <a:p>
             <a:pPr algn="l">
               <a:lnSpc>
-                <a:spcPct val="130000"/>
-              </a:lnSpc>
-            </a:pPr>
-            <a:r>
-              <a:rPr sz="1000" b="0">
+                <a:spcPct val="135000"/>
+              </a:lnSpc>
+            </a:pPr>
+            <a:r>
+              <a:rPr sz="1100" b="0">
                 <a:solidFill>
                   <a:srgbClr val="424B5C"/>
                 </a:solidFill>
@@ -6197,11 +6369,11 @@
           <a:p>
             <a:pPr algn="l">
               <a:lnSpc>
-                <a:spcPct val="130000"/>
-              </a:lnSpc>
-            </a:pPr>
-            <a:r>
-              <a:rPr sz="1000" b="0">
+                <a:spcPct val="135000"/>
+              </a:lnSpc>
+            </a:pPr>
+            <a:r>
+              <a:rPr sz="1100" b="0">
                 <a:solidFill>
                   <a:srgbClr val="424B5C"/>
                 </a:solidFill>
@@ -6214,7 +6386,7 @@
       </p:sp>
       <p:sp>
         <p:nvSpPr>
-          <p:cNvPr id="17" name="Rounded Rectangle 16"/>
+          <p:cNvPr id="18" name="Rounded Rectangle 17"/>
           <p:cNvSpPr/>
           <p:nvPr/>
         </p:nvSpPr>
@@ -6259,7 +6431,7 @@
       </p:sp>
       <p:sp>
         <p:nvSpPr>
-          <p:cNvPr id="18" name="Rounded Rectangle 17"/>
+          <p:cNvPr id="19" name="Rounded Rectangle 18"/>
           <p:cNvSpPr/>
           <p:nvPr/>
         </p:nvSpPr>
@@ -6306,13 +6478,56 @@
       </p:sp>
       <p:sp>
         <p:nvSpPr>
-          <p:cNvPr id="19" name="TextBox 18"/>
-          <p:cNvSpPr txBox="1"/>
-          <p:nvPr/>
-        </p:nvSpPr>
-        <p:spPr>
-          <a:xfrm>
-            <a:off x="4617720" y="5212080"/>
+          <p:cNvPr id="20" name="Rectangle 19"/>
+          <p:cNvSpPr/>
+          <p:nvPr/>
+        </p:nvSpPr>
+        <p:spPr>
+          <a:xfrm>
+            <a:off x="4526280" y="5074920"/>
+            <a:ext cx="3291840" cy="73152"/>
+          </a:xfrm>
+          <a:prstGeom prst="rect">
+            <a:avLst/>
+          </a:prstGeom>
+          <a:solidFill>
+            <a:srgbClr val="EC4899"/>
+          </a:solidFill>
+          <a:ln>
+            <a:noFill/>
+          </a:ln>
+        </p:spPr>
+        <p:style>
+          <a:lnRef idx="1">
+            <a:schemeClr val="accent1"/>
+          </a:lnRef>
+          <a:fillRef idx="3">
+            <a:schemeClr val="accent1"/>
+          </a:fillRef>
+          <a:effectRef idx="2">
+            <a:schemeClr val="accent1"/>
+          </a:effectRef>
+          <a:fontRef idx="minor">
+            <a:schemeClr val="lt1"/>
+          </a:fontRef>
+        </p:style>
+        <p:txBody>
+          <a:bodyPr rtlCol="0" anchor="ctr"/>
+          <a:lstStyle/>
+          <a:p>
+            <a:pPr algn="ctr"/>
+          </a:p>
+        </p:txBody>
+      </p:sp>
+      <p:sp>
+        <p:nvSpPr>
+          <p:cNvPr id="21" name="TextBox 20"/>
+          <p:cNvSpPr txBox="1"/>
+          <p:nvPr/>
+        </p:nvSpPr>
+        <p:spPr>
+          <a:xfrm>
+            <a:off x="4617720" y="5257800"/>
             <a:ext cx="914400" cy="457200"/>
           </a:xfrm>
           <a:prstGeom prst="rect">
@@ -6332,7 +6547,7 @@
               </a:lnSpc>
             </a:pPr>
             <a:r>
-              <a:rPr sz="2400" b="0">
+              <a:rPr sz="2800" b="0">
                 <a:solidFill>
                   <a:srgbClr val="0F141F"/>
                 </a:solidFill>
@@ -6345,13 +6560,13 @@
       </p:sp>
       <p:sp>
         <p:nvSpPr>
-          <p:cNvPr id="20" name="TextBox 19"/>
-          <p:cNvSpPr txBox="1"/>
-          <p:nvPr/>
-        </p:nvSpPr>
-        <p:spPr>
-          <a:xfrm>
-            <a:off x="5349240" y="5212080"/>
+          <p:cNvPr id="22" name="TextBox 21"/>
+          <p:cNvSpPr txBox="1"/>
+          <p:nvPr/>
+        </p:nvSpPr>
+        <p:spPr>
+          <a:xfrm>
+            <a:off x="5440679" y="5285232"/>
             <a:ext cx="2468880" cy="365760"/>
           </a:xfrm>
           <a:prstGeom prst="rect">
@@ -6371,7 +6586,7 @@
               </a:lnSpc>
             </a:pPr>
             <a:r>
-              <a:rPr sz="1400" b="1">
+              <a:rPr sz="1500" b="1">
                 <a:solidFill>
                   <a:srgbClr val="EC4899"/>
                 </a:solidFill>
@@ -6384,13 +6599,13 @@
       </p:sp>
       <p:sp>
         <p:nvSpPr>
-          <p:cNvPr id="21" name="TextBox 20"/>
-          <p:cNvSpPr txBox="1"/>
-          <p:nvPr/>
-        </p:nvSpPr>
-        <p:spPr>
-          <a:xfrm>
-            <a:off x="4617720" y="5715000"/>
+          <p:cNvPr id="23" name="TextBox 22"/>
+          <p:cNvSpPr txBox="1"/>
+          <p:nvPr/>
+        </p:nvSpPr>
+        <p:spPr>
+          <a:xfrm>
+            <a:off x="4617720" y="5760720"/>
             <a:ext cx="3200400" cy="777240"/>
           </a:xfrm>
           <a:prstGeom prst="rect">
@@ -6406,11 +6621,11 @@
           <a:p>
             <a:pPr algn="l">
               <a:lnSpc>
-                <a:spcPct val="130000"/>
-              </a:lnSpc>
-            </a:pPr>
-            <a:r>
-              <a:rPr sz="1000" b="0">
+                <a:spcPct val="135000"/>
+              </a:lnSpc>
+            </a:pPr>
+            <a:r>
+              <a:rPr sz="1100" b="0">
                 <a:solidFill>
                   <a:srgbClr val="424B5C"/>
                 </a:solidFill>
@@ -6422,11 +6637,11 @@
           <a:p>
             <a:pPr algn="l">
               <a:lnSpc>
-                <a:spcPct val="130000"/>
-              </a:lnSpc>
-            </a:pPr>
-            <a:r>
-              <a:rPr sz="1000" b="0">
+                <a:spcPct val="135000"/>
+              </a:lnSpc>
+            </a:pPr>
+            <a:r>
+              <a:rPr sz="1100" b="0">
                 <a:solidFill>
                   <a:srgbClr val="424B5C"/>
                 </a:solidFill>
@@ -6439,7 +6654,7 @@
       </p:sp>
       <p:sp>
         <p:nvSpPr>
-          <p:cNvPr id="22" name="Rounded Rectangle 21"/>
+          <p:cNvPr id="24" name="Rounded Rectangle 23"/>
           <p:cNvSpPr/>
           <p:nvPr/>
         </p:nvSpPr>
@@ -6484,7 +6699,7 @@
       </p:sp>
       <p:sp>
         <p:nvSpPr>
-          <p:cNvPr id="23" name="Rounded Rectangle 22"/>
+          <p:cNvPr id="25" name="Rounded Rectangle 24"/>
           <p:cNvSpPr/>
           <p:nvPr/>
         </p:nvSpPr>
@@ -6531,13 +6746,56 @@
       </p:sp>
       <p:sp>
         <p:nvSpPr>
-          <p:cNvPr id="24" name="TextBox 23"/>
-          <p:cNvSpPr txBox="1"/>
-          <p:nvPr/>
-        </p:nvSpPr>
-        <p:spPr>
-          <a:xfrm>
-            <a:off x="8366759" y="5212080"/>
+          <p:cNvPr id="26" name="Rectangle 25"/>
+          <p:cNvSpPr/>
+          <p:nvPr/>
+        </p:nvSpPr>
+        <p:spPr>
+          <a:xfrm>
+            <a:off x="8275319" y="5074920"/>
+            <a:ext cx="3291840" cy="73152"/>
+          </a:xfrm>
+          <a:prstGeom prst="rect">
+            <a:avLst/>
+          </a:prstGeom>
+          <a:solidFill>
+            <a:srgbClr val="EC4899"/>
+          </a:solidFill>
+          <a:ln>
+            <a:noFill/>
+          </a:ln>
+        </p:spPr>
+        <p:style>
+          <a:lnRef idx="1">
+            <a:schemeClr val="accent1"/>
+          </a:lnRef>
+          <a:fillRef idx="3">
+            <a:schemeClr val="accent1"/>
+          </a:fillRef>
+          <a:effectRef idx="2">
+            <a:schemeClr val="accent1"/>
+          </a:effectRef>
+          <a:fontRef idx="minor">
+            <a:schemeClr val="lt1"/>
+          </a:fontRef>
+        </p:style>
+        <p:txBody>
+          <a:bodyPr rtlCol="0" anchor="ctr"/>
+          <a:lstStyle/>
+          <a:p>
+            <a:pPr algn="ctr"/>
+          </a:p>
+        </p:txBody>
+      </p:sp>
+      <p:sp>
+        <p:nvSpPr>
+          <p:cNvPr id="27" name="TextBox 26"/>
+          <p:cNvSpPr txBox="1"/>
+          <p:nvPr/>
+        </p:nvSpPr>
+        <p:spPr>
+          <a:xfrm>
+            <a:off x="8366759" y="5257800"/>
             <a:ext cx="914400" cy="457200"/>
           </a:xfrm>
           <a:prstGeom prst="rect">
@@ -6557,7 +6815,7 @@
               </a:lnSpc>
             </a:pPr>
             <a:r>
-              <a:rPr sz="2400" b="0">
+              <a:rPr sz="2800" b="0">
                 <a:solidFill>
                   <a:srgbClr val="0F141F"/>
                 </a:solidFill>
@@ -6570,13 +6828,13 @@
       </p:sp>
       <p:sp>
         <p:nvSpPr>
-          <p:cNvPr id="25" name="TextBox 24"/>
-          <p:cNvSpPr txBox="1"/>
-          <p:nvPr/>
-        </p:nvSpPr>
-        <p:spPr>
-          <a:xfrm>
-            <a:off x="9098280" y="5212080"/>
+          <p:cNvPr id="28" name="TextBox 27"/>
+          <p:cNvSpPr txBox="1"/>
+          <p:nvPr/>
+        </p:nvSpPr>
+        <p:spPr>
+          <a:xfrm>
+            <a:off x="9189719" y="5285232"/>
             <a:ext cx="2468880" cy="365760"/>
           </a:xfrm>
           <a:prstGeom prst="rect">
@@ -6596,7 +6854,7 @@
               </a:lnSpc>
             </a:pPr>
             <a:r>
-              <a:rPr sz="1400" b="1">
+              <a:rPr sz="1500" b="1">
                 <a:solidFill>
                   <a:srgbClr val="EC4899"/>
                 </a:solidFill>
@@ -6609,13 +6867,13 @@
       </p:sp>
       <p:sp>
         <p:nvSpPr>
-          <p:cNvPr id="26" name="TextBox 25"/>
-          <p:cNvSpPr txBox="1"/>
-          <p:nvPr/>
-        </p:nvSpPr>
-        <p:spPr>
-          <a:xfrm>
-            <a:off x="8366759" y="5715000"/>
+          <p:cNvPr id="29" name="TextBox 28"/>
+          <p:cNvSpPr txBox="1"/>
+          <p:nvPr/>
+        </p:nvSpPr>
+        <p:spPr>
+          <a:xfrm>
+            <a:off x="8366759" y="5760720"/>
             <a:ext cx="3200400" cy="777240"/>
           </a:xfrm>
           <a:prstGeom prst="rect">
@@ -6631,11 +6889,11 @@
           <a:p>
             <a:pPr algn="l">
               <a:lnSpc>
-                <a:spcPct val="130000"/>
-              </a:lnSpc>
-            </a:pPr>
-            <a:r>
-              <a:rPr sz="1000" b="0">
+                <a:spcPct val="135000"/>
+              </a:lnSpc>
+            </a:pPr>
+            <a:r>
+              <a:rPr sz="1100" b="0">
                 <a:solidFill>
                   <a:srgbClr val="424B5C"/>
                 </a:solidFill>
@@ -6647,11 +6905,11 @@
           <a:p>
             <a:pPr algn="l">
               <a:lnSpc>
-                <a:spcPct val="130000"/>
-              </a:lnSpc>
-            </a:pPr>
-            <a:r>
-              <a:rPr sz="1000" b="0">
+                <a:spcPct val="135000"/>
+              </a:lnSpc>
+            </a:pPr>
+            <a:r>
+              <a:rPr sz="1100" b="0">
                 <a:solidFill>
                   <a:srgbClr val="424B5C"/>
                 </a:solidFill>
@@ -26345,13 +26603,56 @@
       </p:sp>
       <p:sp>
         <p:nvSpPr>
-          <p:cNvPr id="14" name="TextBox 13"/>
-          <p:cNvSpPr txBox="1"/>
-          <p:nvPr/>
-        </p:nvSpPr>
-        <p:spPr>
-          <a:xfrm>
-            <a:off x="868680" y="5212080"/>
+          <p:cNvPr id="14" name="Rectangle 13"/>
+          <p:cNvSpPr/>
+          <p:nvPr/>
+        </p:nvSpPr>
+        <p:spPr>
+          <a:xfrm>
+            <a:off x="777240" y="5074920"/>
+            <a:ext cx="3291840" cy="73152"/>
+          </a:xfrm>
+          <a:prstGeom prst="rect">
+            <a:avLst/>
+          </a:prstGeom>
+          <a:solidFill>
+            <a:srgbClr val="10B981"/>
+          </a:solidFill>
+          <a:ln>
+            <a:noFill/>
+          </a:ln>
+        </p:spPr>
+        <p:style>
+          <a:lnRef idx="1">
+            <a:schemeClr val="accent1"/>
+          </a:lnRef>
+          <a:fillRef idx="3">
+            <a:schemeClr val="accent1"/>
+          </a:fillRef>
+          <a:effectRef idx="2">
+            <a:schemeClr val="accent1"/>
+          </a:effectRef>
+          <a:fontRef idx="minor">
+            <a:schemeClr val="lt1"/>
+          </a:fontRef>
+        </p:style>
+        <p:txBody>
+          <a:bodyPr rtlCol="0" anchor="ctr"/>
+          <a:lstStyle/>
+          <a:p>
+            <a:pPr algn="ctr"/>
+          </a:p>
+        </p:txBody>
+      </p:sp>
+      <p:sp>
+        <p:nvSpPr>
+          <p:cNvPr id="15" name="TextBox 14"/>
+          <p:cNvSpPr txBox="1"/>
+          <p:nvPr/>
+        </p:nvSpPr>
+        <p:spPr>
+          <a:xfrm>
+            <a:off x="868680" y="5257800"/>
             <a:ext cx="914400" cy="457200"/>
           </a:xfrm>
           <a:prstGeom prst="rect">
@@ -26371,7 +26672,7 @@
               </a:lnSpc>
             </a:pPr>
             <a:r>
-              <a:rPr sz="2400" b="0">
+              <a:rPr sz="2800" b="0">
                 <a:solidFill>
                   <a:srgbClr val="0F141F"/>
                 </a:solidFill>
@@ -26384,13 +26685,13 @@
       </p:sp>
       <p:sp>
         <p:nvSpPr>
-          <p:cNvPr id="15" name="TextBox 14"/>
-          <p:cNvSpPr txBox="1"/>
-          <p:nvPr/>
-        </p:nvSpPr>
-        <p:spPr>
-          <a:xfrm>
-            <a:off x="1600200" y="5212080"/>
+          <p:cNvPr id="16" name="TextBox 15"/>
+          <p:cNvSpPr txBox="1"/>
+          <p:nvPr/>
+        </p:nvSpPr>
+        <p:spPr>
+          <a:xfrm>
+            <a:off x="1691639" y="5285232"/>
             <a:ext cx="2468880" cy="365760"/>
           </a:xfrm>
           <a:prstGeom prst="rect">
@@ -26410,7 +26711,7 @@
               </a:lnSpc>
             </a:pPr>
             <a:r>
-              <a:rPr sz="1400" b="1">
+              <a:rPr sz="1500" b="1">
                 <a:solidFill>
                   <a:srgbClr val="10B981"/>
                 </a:solidFill>
@@ -26423,13 +26724,13 @@
       </p:sp>
       <p:sp>
         <p:nvSpPr>
-          <p:cNvPr id="16" name="TextBox 15"/>
-          <p:cNvSpPr txBox="1"/>
-          <p:nvPr/>
-        </p:nvSpPr>
-        <p:spPr>
-          <a:xfrm>
-            <a:off x="868680" y="5715000"/>
+          <p:cNvPr id="17" name="TextBox 16"/>
+          <p:cNvSpPr txBox="1"/>
+          <p:nvPr/>
+        </p:nvSpPr>
+        <p:spPr>
+          <a:xfrm>
+            <a:off x="868680" y="5760720"/>
             <a:ext cx="3200400" cy="777240"/>
           </a:xfrm>
           <a:prstGeom prst="rect">
@@ -26445,11 +26746,11 @@
           <a:p>
             <a:pPr algn="l">
               <a:lnSpc>
-                <a:spcPct val="130000"/>
-              </a:lnSpc>
-            </a:pPr>
-            <a:r>
-              <a:rPr sz="1000" b="0">
+                <a:spcPct val="135000"/>
+              </a:lnSpc>
+            </a:pPr>
+            <a:r>
+              <a:rPr sz="1100" b="0">
                 <a:solidFill>
                   <a:srgbClr val="424B5C"/>
                 </a:solidFill>
@@ -26461,11 +26762,11 @@
           <a:p>
             <a:pPr algn="l">
               <a:lnSpc>
-                <a:spcPct val="130000"/>
-              </a:lnSpc>
-            </a:pPr>
-            <a:r>
-              <a:rPr sz="1000" b="0">
+                <a:spcPct val="135000"/>
+              </a:lnSpc>
+            </a:pPr>
+            <a:r>
+              <a:rPr sz="1100" b="0">
                 <a:solidFill>
                   <a:srgbClr val="424B5C"/>
                 </a:solidFill>
@@ -26478,7 +26779,7 @@
       </p:sp>
       <p:sp>
         <p:nvSpPr>
-          <p:cNvPr id="17" name="Rounded Rectangle 16"/>
+          <p:cNvPr id="18" name="Rounded Rectangle 17"/>
           <p:cNvSpPr/>
           <p:nvPr/>
         </p:nvSpPr>
@@ -26523,7 +26824,7 @@
       </p:sp>
       <p:sp>
         <p:nvSpPr>
-          <p:cNvPr id="18" name="Rounded Rectangle 17"/>
+          <p:cNvPr id="19" name="Rounded Rectangle 18"/>
           <p:cNvSpPr/>
           <p:nvPr/>
         </p:nvSpPr>
@@ -26570,13 +26871,56 @@
       </p:sp>
       <p:sp>
         <p:nvSpPr>
-          <p:cNvPr id="19" name="TextBox 18"/>
-          <p:cNvSpPr txBox="1"/>
-          <p:nvPr/>
-        </p:nvSpPr>
-        <p:spPr>
-          <a:xfrm>
-            <a:off x="4617720" y="5212080"/>
+          <p:cNvPr id="20" name="Rectangle 19"/>
+          <p:cNvSpPr/>
+          <p:nvPr/>
+        </p:nvSpPr>
+        <p:spPr>
+          <a:xfrm>
+            <a:off x="4526280" y="5074920"/>
+            <a:ext cx="3291840" cy="73152"/>
+          </a:xfrm>
+          <a:prstGeom prst="rect">
+            <a:avLst/>
+          </a:prstGeom>
+          <a:solidFill>
+            <a:srgbClr val="10B981"/>
+          </a:solidFill>
+          <a:ln>
+            <a:noFill/>
+          </a:ln>
+        </p:spPr>
+        <p:style>
+          <a:lnRef idx="1">
+            <a:schemeClr val="accent1"/>
+          </a:lnRef>
+          <a:fillRef idx="3">
+            <a:schemeClr val="accent1"/>
+          </a:fillRef>
+          <a:effectRef idx="2">
+            <a:schemeClr val="accent1"/>
+          </a:effectRef>
+          <a:fontRef idx="minor">
+            <a:schemeClr val="lt1"/>
+          </a:fontRef>
+        </p:style>
+        <p:txBody>
+          <a:bodyPr rtlCol="0" anchor="ctr"/>
+          <a:lstStyle/>
+          <a:p>
+            <a:pPr algn="ctr"/>
+          </a:p>
+        </p:txBody>
+      </p:sp>
+      <p:sp>
+        <p:nvSpPr>
+          <p:cNvPr id="21" name="TextBox 20"/>
+          <p:cNvSpPr txBox="1"/>
+          <p:nvPr/>
+        </p:nvSpPr>
+        <p:spPr>
+          <a:xfrm>
+            <a:off x="4617720" y="5257800"/>
             <a:ext cx="914400" cy="457200"/>
           </a:xfrm>
           <a:prstGeom prst="rect">
@@ -26596,7 +26940,7 @@
               </a:lnSpc>
             </a:pPr>
             <a:r>
-              <a:rPr sz="2400" b="0">
+              <a:rPr sz="2800" b="0">
                 <a:solidFill>
                   <a:srgbClr val="0F141F"/>
                 </a:solidFill>
@@ -26609,13 +26953,13 @@
       </p:sp>
       <p:sp>
         <p:nvSpPr>
-          <p:cNvPr id="20" name="TextBox 19"/>
-          <p:cNvSpPr txBox="1"/>
-          <p:nvPr/>
-        </p:nvSpPr>
-        <p:spPr>
-          <a:xfrm>
-            <a:off x="5349240" y="5212080"/>
+          <p:cNvPr id="22" name="TextBox 21"/>
+          <p:cNvSpPr txBox="1"/>
+          <p:nvPr/>
+        </p:nvSpPr>
+        <p:spPr>
+          <a:xfrm>
+            <a:off x="5440679" y="5285232"/>
             <a:ext cx="2468880" cy="365760"/>
           </a:xfrm>
           <a:prstGeom prst="rect">
@@ -26635,7 +26979,7 @@
               </a:lnSpc>
             </a:pPr>
             <a:r>
-              <a:rPr sz="1400" b="1">
+              <a:rPr sz="1500" b="1">
                 <a:solidFill>
                   <a:srgbClr val="10B981"/>
                 </a:solidFill>
@@ -26648,13 +26992,13 @@
       </p:sp>
       <p:sp>
         <p:nvSpPr>
-          <p:cNvPr id="21" name="TextBox 20"/>
-          <p:cNvSpPr txBox="1"/>
-          <p:nvPr/>
-        </p:nvSpPr>
-        <p:spPr>
-          <a:xfrm>
-            <a:off x="4617720" y="5715000"/>
+          <p:cNvPr id="23" name="TextBox 22"/>
+          <p:cNvSpPr txBox="1"/>
+          <p:nvPr/>
+        </p:nvSpPr>
+        <p:spPr>
+          <a:xfrm>
+            <a:off x="4617720" y="5760720"/>
             <a:ext cx="3200400" cy="777240"/>
           </a:xfrm>
           <a:prstGeom prst="rect">
@@ -26670,11 +27014,11 @@
           <a:p>
             <a:pPr algn="l">
               <a:lnSpc>
-                <a:spcPct val="130000"/>
-              </a:lnSpc>
-            </a:pPr>
-            <a:r>
-              <a:rPr sz="1000" b="0">
+                <a:spcPct val="135000"/>
+              </a:lnSpc>
+            </a:pPr>
+            <a:r>
+              <a:rPr sz="1100" b="0">
                 <a:solidFill>
                   <a:srgbClr val="424B5C"/>
                 </a:solidFill>
@@ -26686,11 +27030,11 @@
           <a:p>
             <a:pPr algn="l">
               <a:lnSpc>
-                <a:spcPct val="130000"/>
-              </a:lnSpc>
-            </a:pPr>
-            <a:r>
-              <a:rPr sz="1000" b="0">
+                <a:spcPct val="135000"/>
+              </a:lnSpc>
+            </a:pPr>
+            <a:r>
+              <a:rPr sz="1100" b="0">
                 <a:solidFill>
                   <a:srgbClr val="424B5C"/>
                 </a:solidFill>
@@ -26703,7 +27047,7 @@
       </p:sp>
       <p:sp>
         <p:nvSpPr>
-          <p:cNvPr id="22" name="Rounded Rectangle 21"/>
+          <p:cNvPr id="24" name="Rounded Rectangle 23"/>
           <p:cNvSpPr/>
           <p:nvPr/>
         </p:nvSpPr>
@@ -26748,7 +27092,7 @@
       </p:sp>
       <p:sp>
         <p:nvSpPr>
-          <p:cNvPr id="23" name="Rounded Rectangle 22"/>
+          <p:cNvPr id="25" name="Rounded Rectangle 24"/>
           <p:cNvSpPr/>
           <p:nvPr/>
         </p:nvSpPr>
@@ -26795,13 +27139,56 @@
       </p:sp>
       <p:sp>
         <p:nvSpPr>
-          <p:cNvPr id="24" name="TextBox 23"/>
-          <p:cNvSpPr txBox="1"/>
-          <p:nvPr/>
-        </p:nvSpPr>
-        <p:spPr>
-          <a:xfrm>
-            <a:off x="8366759" y="5212080"/>
+          <p:cNvPr id="26" name="Rectangle 25"/>
+          <p:cNvSpPr/>
+          <p:nvPr/>
+        </p:nvSpPr>
+        <p:spPr>
+          <a:xfrm>
+            <a:off x="8275319" y="5074920"/>
+            <a:ext cx="3291840" cy="73152"/>
+          </a:xfrm>
+          <a:prstGeom prst="rect">
+            <a:avLst/>
+          </a:prstGeom>
+          <a:solidFill>
+            <a:srgbClr val="10B981"/>
+          </a:solidFill>
+          <a:ln>
+            <a:noFill/>
+          </a:ln>
+        </p:spPr>
+        <p:style>
+          <a:lnRef idx="1">
+            <a:schemeClr val="accent1"/>
+          </a:lnRef>
+          <a:fillRef idx="3">
+            <a:schemeClr val="accent1"/>
+          </a:fillRef>
+          <a:effectRef idx="2">
+            <a:schemeClr val="accent1"/>
+          </a:effectRef>
+          <a:fontRef idx="minor">
+            <a:schemeClr val="lt1"/>
+          </a:fontRef>
+        </p:style>
+        <p:txBody>
+          <a:bodyPr rtlCol="0" anchor="ctr"/>
+          <a:lstStyle/>
+          <a:p>
+            <a:pPr algn="ctr"/>
+          </a:p>
+        </p:txBody>
+      </p:sp>
+      <p:sp>
+        <p:nvSpPr>
+          <p:cNvPr id="27" name="TextBox 26"/>
+          <p:cNvSpPr txBox="1"/>
+          <p:nvPr/>
+        </p:nvSpPr>
+        <p:spPr>
+          <a:xfrm>
+            <a:off x="8366759" y="5257800"/>
             <a:ext cx="914400" cy="457200"/>
           </a:xfrm>
           <a:prstGeom prst="rect">
@@ -26821,7 +27208,7 @@
               </a:lnSpc>
             </a:pPr>
             <a:r>
-              <a:rPr sz="2400" b="0">
+              <a:rPr sz="2800" b="0">
                 <a:solidFill>
                   <a:srgbClr val="0F141F"/>
                 </a:solidFill>
@@ -26834,13 +27221,13 @@
       </p:sp>
       <p:sp>
         <p:nvSpPr>
-          <p:cNvPr id="25" name="TextBox 24"/>
-          <p:cNvSpPr txBox="1"/>
-          <p:nvPr/>
-        </p:nvSpPr>
-        <p:spPr>
-          <a:xfrm>
-            <a:off x="9098280" y="5212080"/>
+          <p:cNvPr id="28" name="TextBox 27"/>
+          <p:cNvSpPr txBox="1"/>
+          <p:nvPr/>
+        </p:nvSpPr>
+        <p:spPr>
+          <a:xfrm>
+            <a:off x="9189719" y="5285232"/>
             <a:ext cx="2468880" cy="365760"/>
           </a:xfrm>
           <a:prstGeom prst="rect">
@@ -26860,7 +27247,7 @@
               </a:lnSpc>
             </a:pPr>
             <a:r>
-              <a:rPr sz="1400" b="1">
+              <a:rPr sz="1500" b="1">
                 <a:solidFill>
                   <a:srgbClr val="10B981"/>
                 </a:solidFill>
@@ -26873,13 +27260,13 @@
       </p:sp>
       <p:sp>
         <p:nvSpPr>
-          <p:cNvPr id="26" name="TextBox 25"/>
-          <p:cNvSpPr txBox="1"/>
-          <p:nvPr/>
-        </p:nvSpPr>
-        <p:spPr>
-          <a:xfrm>
-            <a:off x="8366759" y="5715000"/>
+          <p:cNvPr id="29" name="TextBox 28"/>
+          <p:cNvSpPr txBox="1"/>
+          <p:nvPr/>
+        </p:nvSpPr>
+        <p:spPr>
+          <a:xfrm>
+            <a:off x="8366759" y="5760720"/>
             <a:ext cx="3200400" cy="777240"/>
           </a:xfrm>
           <a:prstGeom prst="rect">
@@ -26895,11 +27282,11 @@
           <a:p>
             <a:pPr algn="l">
               <a:lnSpc>
-                <a:spcPct val="130000"/>
-              </a:lnSpc>
-            </a:pPr>
-            <a:r>
-              <a:rPr sz="1000" b="0">
+                <a:spcPct val="135000"/>
+              </a:lnSpc>
+            </a:pPr>
+            <a:r>
+              <a:rPr sz="1100" b="0">
                 <a:solidFill>
                   <a:srgbClr val="424B5C"/>
                 </a:solidFill>
@@ -26911,11 +27298,11 @@
           <a:p>
             <a:pPr algn="l">
               <a:lnSpc>
-                <a:spcPct val="130000"/>
-              </a:lnSpc>
-            </a:pPr>
-            <a:r>
-              <a:rPr sz="1000" b="0">
+                <a:spcPct val="135000"/>
+              </a:lnSpc>
+            </a:pPr>
+            <a:r>
+              <a:rPr sz="1100" b="0">
                 <a:solidFill>
                   <a:srgbClr val="424B5C"/>
                 </a:solidFill>
@@ -27240,12 +27627,10 @@
             </a:avLst>
           </a:prstGeom>
           <a:solidFill>
-            <a:srgbClr val="FAFBFC"/>
+            <a:srgbClr val="F7F8FB"/>
           </a:solidFill>
-          <a:ln w="9525">
-            <a:solidFill>
-              <a:srgbClr val="E5E7EB"/>
-            </a:solidFill>
+          <a:ln>
+            <a:noFill/>
           </a:ln>
         </p:spPr>
         <p:style>
@@ -28675,13 +29060,56 @@
       </p:sp>
       <p:sp>
         <p:nvSpPr>
-          <p:cNvPr id="14" name="TextBox 13"/>
-          <p:cNvSpPr txBox="1"/>
-          <p:nvPr/>
-        </p:nvSpPr>
-        <p:spPr>
-          <a:xfrm>
-            <a:off x="868680" y="5212080"/>
+          <p:cNvPr id="14" name="Rectangle 13"/>
+          <p:cNvSpPr/>
+          <p:nvPr/>
+        </p:nvSpPr>
+        <p:spPr>
+          <a:xfrm>
+            <a:off x="777240" y="5074920"/>
+            <a:ext cx="3291840" cy="73152"/>
+          </a:xfrm>
+          <a:prstGeom prst="rect">
+            <a:avLst/>
+          </a:prstGeom>
+          <a:solidFill>
+            <a:srgbClr val="F59E0B"/>
+          </a:solidFill>
+          <a:ln>
+            <a:noFill/>
+          </a:ln>
+        </p:spPr>
+        <p:style>
+          <a:lnRef idx="1">
+            <a:schemeClr val="accent1"/>
+          </a:lnRef>
+          <a:fillRef idx="3">
+            <a:schemeClr val="accent1"/>
+          </a:fillRef>
+          <a:effectRef idx="2">
+            <a:schemeClr val="accent1"/>
+          </a:effectRef>
+          <a:fontRef idx="minor">
+            <a:schemeClr val="lt1"/>
+          </a:fontRef>
+        </p:style>
+        <p:txBody>
+          <a:bodyPr rtlCol="0" anchor="ctr"/>
+          <a:lstStyle/>
+          <a:p>
+            <a:pPr algn="ctr"/>
+          </a:p>
+        </p:txBody>
+      </p:sp>
+      <p:sp>
+        <p:nvSpPr>
+          <p:cNvPr id="15" name="TextBox 14"/>
+          <p:cNvSpPr txBox="1"/>
+          <p:nvPr/>
+        </p:nvSpPr>
+        <p:spPr>
+          <a:xfrm>
+            <a:off x="868680" y="5257800"/>
             <a:ext cx="914400" cy="457200"/>
           </a:xfrm>
           <a:prstGeom prst="rect">
@@ -28701,7 +29129,7 @@
               </a:lnSpc>
             </a:pPr>
             <a:r>
-              <a:rPr sz="2400" b="0">
+              <a:rPr sz="2800" b="0">
                 <a:solidFill>
                   <a:srgbClr val="0F141F"/>
                 </a:solidFill>
@@ -28714,13 +29142,13 @@
       </p:sp>
       <p:sp>
         <p:nvSpPr>
-          <p:cNvPr id="15" name="TextBox 14"/>
-          <p:cNvSpPr txBox="1"/>
-          <p:nvPr/>
-        </p:nvSpPr>
-        <p:spPr>
-          <a:xfrm>
-            <a:off x="1600200" y="5212080"/>
+          <p:cNvPr id="16" name="TextBox 15"/>
+          <p:cNvSpPr txBox="1"/>
+          <p:nvPr/>
+        </p:nvSpPr>
+        <p:spPr>
+          <a:xfrm>
+            <a:off x="1691639" y="5285232"/>
             <a:ext cx="2468880" cy="365760"/>
           </a:xfrm>
           <a:prstGeom prst="rect">
@@ -28740,7 +29168,7 @@
               </a:lnSpc>
             </a:pPr>
             <a:r>
-              <a:rPr sz="1400" b="1">
+              <a:rPr sz="1500" b="1">
                 <a:solidFill>
                   <a:srgbClr val="F59E0B"/>
                 </a:solidFill>
@@ -28753,13 +29181,13 @@
       </p:sp>
       <p:sp>
         <p:nvSpPr>
-          <p:cNvPr id="16" name="TextBox 15"/>
-          <p:cNvSpPr txBox="1"/>
-          <p:nvPr/>
-        </p:nvSpPr>
-        <p:spPr>
-          <a:xfrm>
-            <a:off x="868680" y="5715000"/>
+          <p:cNvPr id="17" name="TextBox 16"/>
+          <p:cNvSpPr txBox="1"/>
+          <p:nvPr/>
+        </p:nvSpPr>
+        <p:spPr>
+          <a:xfrm>
+            <a:off x="868680" y="5760720"/>
             <a:ext cx="3200400" cy="777240"/>
           </a:xfrm>
           <a:prstGeom prst="rect">
@@ -28775,11 +29203,11 @@
           <a:p>
             <a:pPr algn="l">
               <a:lnSpc>
-                <a:spcPct val="130000"/>
-              </a:lnSpc>
-            </a:pPr>
-            <a:r>
-              <a:rPr sz="1000" b="0">
+                <a:spcPct val="135000"/>
+              </a:lnSpc>
+            </a:pPr>
+            <a:r>
+              <a:rPr sz="1100" b="0">
                 <a:solidFill>
                   <a:srgbClr val="424B5C"/>
                 </a:solidFill>
@@ -28791,11 +29219,11 @@
           <a:p>
             <a:pPr algn="l">
               <a:lnSpc>
-                <a:spcPct val="130000"/>
-              </a:lnSpc>
-            </a:pPr>
-            <a:r>
-              <a:rPr sz="1000" b="0">
+                <a:spcPct val="135000"/>
+              </a:lnSpc>
+            </a:pPr>
+            <a:r>
+              <a:rPr sz="1100" b="0">
                 <a:solidFill>
                   <a:srgbClr val="424B5C"/>
                 </a:solidFill>
@@ -28808,7 +29236,7 @@
       </p:sp>
       <p:sp>
         <p:nvSpPr>
-          <p:cNvPr id="17" name="Rounded Rectangle 16"/>
+          <p:cNvPr id="18" name="Rounded Rectangle 17"/>
           <p:cNvSpPr/>
           <p:nvPr/>
         </p:nvSpPr>
@@ -28853,7 +29281,7 @@
       </p:sp>
       <p:sp>
         <p:nvSpPr>
-          <p:cNvPr id="18" name="Rounded Rectangle 17"/>
+          <p:cNvPr id="19" name="Rounded Rectangle 18"/>
           <p:cNvSpPr/>
           <p:nvPr/>
         </p:nvSpPr>
@@ -28900,13 +29328,56 @@
       </p:sp>
       <p:sp>
         <p:nvSpPr>
-          <p:cNvPr id="19" name="TextBox 18"/>
-          <p:cNvSpPr txBox="1"/>
-          <p:nvPr/>
-        </p:nvSpPr>
-        <p:spPr>
-          <a:xfrm>
-            <a:off x="4617720" y="5212080"/>
+          <p:cNvPr id="20" name="Rectangle 19"/>
+          <p:cNvSpPr/>
+          <p:nvPr/>
+        </p:nvSpPr>
+        <p:spPr>
+          <a:xfrm>
+            <a:off x="4526280" y="5074920"/>
+            <a:ext cx="3291840" cy="73152"/>
+          </a:xfrm>
+          <a:prstGeom prst="rect">
+            <a:avLst/>
+          </a:prstGeom>
+          <a:solidFill>
+            <a:srgbClr val="F59E0B"/>
+          </a:solidFill>
+          <a:ln>
+            <a:noFill/>
+          </a:ln>
+        </p:spPr>
+        <p:style>
+          <a:lnRef idx="1">
+            <a:schemeClr val="accent1"/>
+          </a:lnRef>
+          <a:fillRef idx="3">
+            <a:schemeClr val="accent1"/>
+          </a:fillRef>
+          <a:effectRef idx="2">
+            <a:schemeClr val="accent1"/>
+          </a:effectRef>
+          <a:fontRef idx="minor">
+            <a:schemeClr val="lt1"/>
+          </a:fontRef>
+        </p:style>
+        <p:txBody>
+          <a:bodyPr rtlCol="0" anchor="ctr"/>
+          <a:lstStyle/>
+          <a:p>
+            <a:pPr algn="ctr"/>
+          </a:p>
+        </p:txBody>
+      </p:sp>
+      <p:sp>
+        <p:nvSpPr>
+          <p:cNvPr id="21" name="TextBox 20"/>
+          <p:cNvSpPr txBox="1"/>
+          <p:nvPr/>
+        </p:nvSpPr>
+        <p:spPr>
+          <a:xfrm>
+            <a:off x="4617720" y="5257800"/>
             <a:ext cx="914400" cy="457200"/>
           </a:xfrm>
           <a:prstGeom prst="rect">
@@ -28926,7 +29397,7 @@
               </a:lnSpc>
             </a:pPr>
             <a:r>
-              <a:rPr sz="2400" b="0">
+              <a:rPr sz="2800" b="0">
                 <a:solidFill>
                   <a:srgbClr val="0F141F"/>
                 </a:solidFill>
@@ -28939,13 +29410,13 @@
       </p:sp>
       <p:sp>
         <p:nvSpPr>
-          <p:cNvPr id="20" name="TextBox 19"/>
-          <p:cNvSpPr txBox="1"/>
-          <p:nvPr/>
-        </p:nvSpPr>
-        <p:spPr>
-          <a:xfrm>
-            <a:off x="5349240" y="5212080"/>
+          <p:cNvPr id="22" name="TextBox 21"/>
+          <p:cNvSpPr txBox="1"/>
+          <p:nvPr/>
+        </p:nvSpPr>
+        <p:spPr>
+          <a:xfrm>
+            <a:off x="5440679" y="5285232"/>
             <a:ext cx="2468880" cy="365760"/>
           </a:xfrm>
           <a:prstGeom prst="rect">
@@ -28965,7 +29436,7 @@
               </a:lnSpc>
             </a:pPr>
             <a:r>
-              <a:rPr sz="1400" b="1">
+              <a:rPr sz="1500" b="1">
                 <a:solidFill>
                   <a:srgbClr val="F59E0B"/>
                 </a:solidFill>
@@ -28978,13 +29449,13 @@
       </p:sp>
       <p:sp>
         <p:nvSpPr>
-          <p:cNvPr id="21" name="TextBox 20"/>
-          <p:cNvSpPr txBox="1"/>
-          <p:nvPr/>
-        </p:nvSpPr>
-        <p:spPr>
-          <a:xfrm>
-            <a:off x="4617720" y="5715000"/>
+          <p:cNvPr id="23" name="TextBox 22"/>
+          <p:cNvSpPr txBox="1"/>
+          <p:nvPr/>
+        </p:nvSpPr>
+        <p:spPr>
+          <a:xfrm>
+            <a:off x="4617720" y="5760720"/>
             <a:ext cx="3200400" cy="777240"/>
           </a:xfrm>
           <a:prstGeom prst="rect">
@@ -29000,11 +29471,11 @@
           <a:p>
             <a:pPr algn="l">
               <a:lnSpc>
-                <a:spcPct val="130000"/>
-              </a:lnSpc>
-            </a:pPr>
-            <a:r>
-              <a:rPr sz="1000" b="0">
+                <a:spcPct val="135000"/>
+              </a:lnSpc>
+            </a:pPr>
+            <a:r>
+              <a:rPr sz="1100" b="0">
                 <a:solidFill>
                   <a:srgbClr val="424B5C"/>
                 </a:solidFill>
@@ -29016,11 +29487,11 @@
           <a:p>
             <a:pPr algn="l">
               <a:lnSpc>
-                <a:spcPct val="130000"/>
-              </a:lnSpc>
-            </a:pPr>
-            <a:r>
-              <a:rPr sz="1000" b="0">
+                <a:spcPct val="135000"/>
+              </a:lnSpc>
+            </a:pPr>
+            <a:r>
+              <a:rPr sz="1100" b="0">
                 <a:solidFill>
                   <a:srgbClr val="424B5C"/>
                 </a:solidFill>
@@ -29033,7 +29504,7 @@
       </p:sp>
       <p:sp>
         <p:nvSpPr>
-          <p:cNvPr id="22" name="Rounded Rectangle 21"/>
+          <p:cNvPr id="24" name="Rounded Rectangle 23"/>
           <p:cNvSpPr/>
           <p:nvPr/>
         </p:nvSpPr>
@@ -29078,7 +29549,7 @@
       </p:sp>
       <p:sp>
         <p:nvSpPr>
-          <p:cNvPr id="23" name="Rounded Rectangle 22"/>
+          <p:cNvPr id="25" name="Rounded Rectangle 24"/>
           <p:cNvSpPr/>
           <p:nvPr/>
         </p:nvSpPr>
@@ -29125,13 +29596,56 @@
       </p:sp>
       <p:sp>
         <p:nvSpPr>
-          <p:cNvPr id="24" name="TextBox 23"/>
-          <p:cNvSpPr txBox="1"/>
-          <p:nvPr/>
-        </p:nvSpPr>
-        <p:spPr>
-          <a:xfrm>
-            <a:off x="8366759" y="5212080"/>
+          <p:cNvPr id="26" name="Rectangle 25"/>
+          <p:cNvSpPr/>
+          <p:nvPr/>
+        </p:nvSpPr>
+        <p:spPr>
+          <a:xfrm>
+            <a:off x="8275319" y="5074920"/>
+            <a:ext cx="3291840" cy="73152"/>
+          </a:xfrm>
+          <a:prstGeom prst="rect">
+            <a:avLst/>
+          </a:prstGeom>
+          <a:solidFill>
+            <a:srgbClr val="F59E0B"/>
+          </a:solidFill>
+          <a:ln>
+            <a:noFill/>
+          </a:ln>
+        </p:spPr>
+        <p:style>
+          <a:lnRef idx="1">
+            <a:schemeClr val="accent1"/>
+          </a:lnRef>
+          <a:fillRef idx="3">
+            <a:schemeClr val="accent1"/>
+          </a:fillRef>
+          <a:effectRef idx="2">
+            <a:schemeClr val="accent1"/>
+          </a:effectRef>
+          <a:fontRef idx="minor">
+            <a:schemeClr val="lt1"/>
+          </a:fontRef>
+        </p:style>
+        <p:txBody>
+          <a:bodyPr rtlCol="0" anchor="ctr"/>
+          <a:lstStyle/>
+          <a:p>
+            <a:pPr algn="ctr"/>
+          </a:p>
+        </p:txBody>
+      </p:sp>
+      <p:sp>
+        <p:nvSpPr>
+          <p:cNvPr id="27" name="TextBox 26"/>
+          <p:cNvSpPr txBox="1"/>
+          <p:nvPr/>
+        </p:nvSpPr>
+        <p:spPr>
+          <a:xfrm>
+            <a:off x="8366759" y="5257800"/>
             <a:ext cx="914400" cy="457200"/>
           </a:xfrm>
           <a:prstGeom prst="rect">
@@ -29151,7 +29665,7 @@
               </a:lnSpc>
             </a:pPr>
             <a:r>
-              <a:rPr sz="2400" b="0">
+              <a:rPr sz="2800" b="0">
                 <a:solidFill>
                   <a:srgbClr val="0F141F"/>
                 </a:solidFill>
@@ -29164,13 +29678,13 @@
       </p:sp>
       <p:sp>
         <p:nvSpPr>
-          <p:cNvPr id="25" name="TextBox 24"/>
-          <p:cNvSpPr txBox="1"/>
-          <p:nvPr/>
-        </p:nvSpPr>
-        <p:spPr>
-          <a:xfrm>
-            <a:off x="9098280" y="5212080"/>
+          <p:cNvPr id="28" name="TextBox 27"/>
+          <p:cNvSpPr txBox="1"/>
+          <p:nvPr/>
+        </p:nvSpPr>
+        <p:spPr>
+          <a:xfrm>
+            <a:off x="9189719" y="5285232"/>
             <a:ext cx="2468880" cy="365760"/>
           </a:xfrm>
           <a:prstGeom prst="rect">
@@ -29190,7 +29704,7 @@
               </a:lnSpc>
             </a:pPr>
             <a:r>
-              <a:rPr sz="1400" b="1">
+              <a:rPr sz="1500" b="1">
                 <a:solidFill>
                   <a:srgbClr val="F59E0B"/>
                 </a:solidFill>
@@ -29203,13 +29717,13 @@
       </p:sp>
       <p:sp>
         <p:nvSpPr>
-          <p:cNvPr id="26" name="TextBox 25"/>
-          <p:cNvSpPr txBox="1"/>
-          <p:nvPr/>
-        </p:nvSpPr>
-        <p:spPr>
-          <a:xfrm>
-            <a:off x="8366759" y="5715000"/>
+          <p:cNvPr id="29" name="TextBox 28"/>
+          <p:cNvSpPr txBox="1"/>
+          <p:nvPr/>
+        </p:nvSpPr>
+        <p:spPr>
+          <a:xfrm>
+            <a:off x="8366759" y="5760720"/>
             <a:ext cx="3200400" cy="777240"/>
           </a:xfrm>
           <a:prstGeom prst="rect">
@@ -29225,11 +29739,11 @@
           <a:p>
             <a:pPr algn="l">
               <a:lnSpc>
-                <a:spcPct val="130000"/>
-              </a:lnSpc>
-            </a:pPr>
-            <a:r>
-              <a:rPr sz="1000" b="0">
+                <a:spcPct val="135000"/>
+              </a:lnSpc>
+            </a:pPr>
+            <a:r>
+              <a:rPr sz="1100" b="0">
                 <a:solidFill>
                   <a:srgbClr val="424B5C"/>
                 </a:solidFill>
@@ -29241,11 +29755,11 @@
           <a:p>
             <a:pPr algn="l">
               <a:lnSpc>
-                <a:spcPct val="130000"/>
-              </a:lnSpc>
-            </a:pPr>
-            <a:r>
-              <a:rPr sz="1000" b="0">
+                <a:spcPct val="135000"/>
+              </a:lnSpc>
+            </a:pPr>
+            <a:r>
+              <a:rPr sz="1100" b="0">
                 <a:solidFill>
                   <a:srgbClr val="424B5C"/>
                 </a:solidFill>
@@ -29570,12 +30084,10 @@
             </a:avLst>
           </a:prstGeom>
           <a:solidFill>
-            <a:srgbClr val="FAFBFC"/>
+            <a:srgbClr val="F7F8FB"/>
           </a:solidFill>
-          <a:ln w="9525">
-            <a:solidFill>
-              <a:srgbClr val="E5E7EB"/>
-            </a:solidFill>
+          <a:ln>
+            <a:noFill/>
           </a:ln>
         </p:spPr>
         <p:style>

--- a/team_project/kickoff_2026-05-11.pptx
+++ b/team_project/kickoff_2026-05-11.pptx
@@ -3901,7 +3901,7 @@
         </p:nvSpPr>
         <p:spPr>
           <a:xfrm>
-            <a:off x="676656" y="5129783"/>
+            <a:off x="667512" y="5111496"/>
             <a:ext cx="3566160" cy="1417320"/>
           </a:xfrm>
           <a:prstGeom prst="roundRect">
@@ -3910,7 +3910,7 @@
             </a:avLst>
           </a:prstGeom>
           <a:solidFill>
-            <a:srgbClr val="E9EBF0"/>
+            <a:srgbClr val="ECEEF2"/>
           </a:solidFill>
           <a:ln>
             <a:noFill/>
@@ -4169,7 +4169,7 @@
         </p:nvSpPr>
         <p:spPr>
           <a:xfrm>
-            <a:off x="4425696" y="5129783"/>
+            <a:off x="4416552" y="5111496"/>
             <a:ext cx="3566160" cy="1417320"/>
           </a:xfrm>
           <a:prstGeom prst="roundRect">
@@ -4178,7 +4178,7 @@
             </a:avLst>
           </a:prstGeom>
           <a:solidFill>
-            <a:srgbClr val="E9EBF0"/>
+            <a:srgbClr val="ECEEF2"/>
           </a:solidFill>
           <a:ln>
             <a:noFill/>
@@ -4437,7 +4437,7 @@
         </p:nvSpPr>
         <p:spPr>
           <a:xfrm>
-            <a:off x="8174735" y="5129783"/>
+            <a:off x="8165591" y="5111496"/>
             <a:ext cx="3566160" cy="1417320"/>
           </a:xfrm>
           <a:prstGeom prst="roundRect">
@@ -4446,7 +4446,7 @@
             </a:avLst>
           </a:prstGeom>
           <a:solidFill>
-            <a:srgbClr val="E9EBF0"/>
+            <a:srgbClr val="ECEEF2"/>
           </a:solidFill>
           <a:ln>
             <a:noFill/>
@@ -4957,7 +4957,7 @@
         </p:nvSpPr>
         <p:spPr>
           <a:xfrm>
-            <a:off x="676656" y="2569464"/>
+            <a:off x="667512" y="2551176"/>
             <a:ext cx="5440680" cy="1554480"/>
           </a:xfrm>
           <a:prstGeom prst="roundRect">
@@ -4966,7 +4966,7 @@
             </a:avLst>
           </a:prstGeom>
           <a:solidFill>
-            <a:srgbClr val="E9EBF0"/>
+            <a:srgbClr val="ECEEF2"/>
           </a:solidFill>
           <a:ln>
             <a:noFill/>
@@ -5323,7 +5323,7 @@
         </p:nvSpPr>
         <p:spPr>
           <a:xfrm>
-            <a:off x="6300216" y="2569464"/>
+            <a:off x="6291072" y="2551176"/>
             <a:ext cx="5257800" cy="4160520"/>
           </a:xfrm>
           <a:prstGeom prst="roundRect">
@@ -5332,7 +5332,7 @@
             </a:avLst>
           </a:prstGeom>
           <a:solidFill>
-            <a:srgbClr val="E9EBF0"/>
+            <a:srgbClr val="ECEEF2"/>
           </a:solidFill>
           <a:ln>
             <a:noFill/>
@@ -6124,7 +6124,7 @@
         </p:nvSpPr>
         <p:spPr>
           <a:xfrm>
-            <a:off x="676656" y="5129783"/>
+            <a:off x="667512" y="5111496"/>
             <a:ext cx="3566160" cy="1417320"/>
           </a:xfrm>
           <a:prstGeom prst="roundRect">
@@ -6133,7 +6133,7 @@
             </a:avLst>
           </a:prstGeom>
           <a:solidFill>
-            <a:srgbClr val="E9EBF0"/>
+            <a:srgbClr val="ECEEF2"/>
           </a:solidFill>
           <a:ln>
             <a:noFill/>
@@ -6392,7 +6392,7 @@
         </p:nvSpPr>
         <p:spPr>
           <a:xfrm>
-            <a:off x="4425696" y="5129783"/>
+            <a:off x="4416552" y="5111496"/>
             <a:ext cx="3566160" cy="1417320"/>
           </a:xfrm>
           <a:prstGeom prst="roundRect">
@@ -6401,7 +6401,7 @@
             </a:avLst>
           </a:prstGeom>
           <a:solidFill>
-            <a:srgbClr val="E9EBF0"/>
+            <a:srgbClr val="ECEEF2"/>
           </a:solidFill>
           <a:ln>
             <a:noFill/>
@@ -6660,7 +6660,7 @@
         </p:nvSpPr>
         <p:spPr>
           <a:xfrm>
-            <a:off x="8174735" y="5129783"/>
+            <a:off x="8165591" y="5111496"/>
             <a:ext cx="3566160" cy="1417320"/>
           </a:xfrm>
           <a:prstGeom prst="roundRect">
@@ -6669,7 +6669,7 @@
             </a:avLst>
           </a:prstGeom>
           <a:solidFill>
-            <a:srgbClr val="E9EBF0"/>
+            <a:srgbClr val="ECEEF2"/>
           </a:solidFill>
           <a:ln>
             <a:noFill/>
@@ -7180,7 +7180,7 @@
         </p:nvSpPr>
         <p:spPr>
           <a:xfrm>
-            <a:off x="676656" y="2569464"/>
+            <a:off x="667512" y="2551176"/>
             <a:ext cx="5440680" cy="1554480"/>
           </a:xfrm>
           <a:prstGeom prst="roundRect">
@@ -7189,7 +7189,7 @@
             </a:avLst>
           </a:prstGeom>
           <a:solidFill>
-            <a:srgbClr val="E9EBF0"/>
+            <a:srgbClr val="ECEEF2"/>
           </a:solidFill>
           <a:ln>
             <a:noFill/>
@@ -7569,7 +7569,7 @@
         </p:nvSpPr>
         <p:spPr>
           <a:xfrm>
-            <a:off x="6300216" y="2569464"/>
+            <a:off x="6291072" y="2551176"/>
             <a:ext cx="5257800" cy="4160520"/>
           </a:xfrm>
           <a:prstGeom prst="roundRect">
@@ -7578,7 +7578,7 @@
             </a:avLst>
           </a:prstGeom>
           <a:solidFill>
-            <a:srgbClr val="E9EBF0"/>
+            <a:srgbClr val="ECEEF2"/>
           </a:solidFill>
           <a:ln>
             <a:noFill/>
@@ -9281,7 +9281,7 @@
         </p:nvSpPr>
         <p:spPr>
           <a:xfrm>
-            <a:off x="676656" y="2157984"/>
+            <a:off x="667512" y="2139696"/>
             <a:ext cx="10881360" cy="960120"/>
           </a:xfrm>
           <a:prstGeom prst="roundRect">
@@ -9290,7 +9290,7 @@
             </a:avLst>
           </a:prstGeom>
           <a:solidFill>
-            <a:srgbClr val="E9EBF0"/>
+            <a:srgbClr val="ECEEF2"/>
           </a:solidFill>
           <a:ln>
             <a:noFill/>
@@ -9570,7 +9570,7 @@
         </p:nvSpPr>
         <p:spPr>
           <a:xfrm>
-            <a:off x="676656" y="3236975"/>
+            <a:off x="667512" y="3218687"/>
             <a:ext cx="10881360" cy="960120"/>
           </a:xfrm>
           <a:prstGeom prst="roundRect">
@@ -9579,7 +9579,7 @@
             </a:avLst>
           </a:prstGeom>
           <a:solidFill>
-            <a:srgbClr val="E9EBF0"/>
+            <a:srgbClr val="ECEEF2"/>
           </a:solidFill>
           <a:ln>
             <a:noFill/>
@@ -9859,7 +9859,7 @@
         </p:nvSpPr>
         <p:spPr>
           <a:xfrm>
-            <a:off x="676656" y="4315968"/>
+            <a:off x="667512" y="4297680"/>
             <a:ext cx="10881360" cy="960120"/>
           </a:xfrm>
           <a:prstGeom prst="roundRect">
@@ -9868,7 +9868,7 @@
             </a:avLst>
           </a:prstGeom>
           <a:solidFill>
-            <a:srgbClr val="E9EBF0"/>
+            <a:srgbClr val="ECEEF2"/>
           </a:solidFill>
           <a:ln>
             <a:noFill/>
@@ -10148,7 +10148,7 @@
         </p:nvSpPr>
         <p:spPr>
           <a:xfrm>
-            <a:off x="676656" y="5394959"/>
+            <a:off x="667512" y="5376672"/>
             <a:ext cx="10881360" cy="960120"/>
           </a:xfrm>
           <a:prstGeom prst="roundRect">
@@ -10157,7 +10157,7 @@
             </a:avLst>
           </a:prstGeom>
           <a:solidFill>
-            <a:srgbClr val="E9EBF0"/>
+            <a:srgbClr val="ECEEF2"/>
           </a:solidFill>
           <a:ln>
             <a:noFill/>
@@ -11684,7 +11684,7 @@
         </p:nvSpPr>
         <p:spPr>
           <a:xfrm>
-            <a:off x="813816" y="2798064"/>
+            <a:off x="804672" y="2779776"/>
             <a:ext cx="5303520" cy="3200400"/>
           </a:xfrm>
           <a:prstGeom prst="roundRect">
@@ -11693,7 +11693,7 @@
             </a:avLst>
           </a:prstGeom>
           <a:solidFill>
-            <a:srgbClr val="E9EBF0"/>
+            <a:srgbClr val="ECEEF2"/>
           </a:solidFill>
           <a:ln>
             <a:noFill/>
@@ -12069,7 +12069,7 @@
         </p:nvSpPr>
         <p:spPr>
           <a:xfrm>
-            <a:off x="6437376" y="2798064"/>
+            <a:off x="6428232" y="2779776"/>
             <a:ext cx="5120640" cy="3200400"/>
           </a:xfrm>
           <a:prstGeom prst="roundRect">
@@ -12078,7 +12078,7 @@
             </a:avLst>
           </a:prstGeom>
           <a:solidFill>
-            <a:srgbClr val="E9EBF0"/>
+            <a:srgbClr val="ECEEF2"/>
           </a:solidFill>
           <a:ln>
             <a:noFill/>
@@ -12702,7 +12702,7 @@
         </p:nvSpPr>
         <p:spPr>
           <a:xfrm>
-            <a:off x="676656" y="2798064"/>
+            <a:off x="667512" y="2779776"/>
             <a:ext cx="3502152" cy="1554480"/>
           </a:xfrm>
           <a:prstGeom prst="roundRect">
@@ -12711,7 +12711,7 @@
             </a:avLst>
           </a:prstGeom>
           <a:solidFill>
-            <a:srgbClr val="E9EBF0"/>
+            <a:srgbClr val="ECEEF2"/>
           </a:solidFill>
           <a:ln>
             <a:noFill/>
@@ -12911,7 +12911,7 @@
         </p:nvSpPr>
         <p:spPr>
           <a:xfrm>
-            <a:off x="4471416" y="2798064"/>
+            <a:off x="4462272" y="2779776"/>
             <a:ext cx="3502152" cy="1554480"/>
           </a:xfrm>
           <a:prstGeom prst="roundRect">
@@ -12920,7 +12920,7 @@
             </a:avLst>
           </a:prstGeom>
           <a:solidFill>
-            <a:srgbClr val="E9EBF0"/>
+            <a:srgbClr val="ECEEF2"/>
           </a:solidFill>
           <a:ln>
             <a:noFill/>
@@ -13120,7 +13120,7 @@
         </p:nvSpPr>
         <p:spPr>
           <a:xfrm>
-            <a:off x="8266175" y="2798064"/>
+            <a:off x="8257031" y="2779776"/>
             <a:ext cx="3502152" cy="1554480"/>
           </a:xfrm>
           <a:prstGeom prst="roundRect">
@@ -13129,7 +13129,7 @@
             </a:avLst>
           </a:prstGeom>
           <a:solidFill>
-            <a:srgbClr val="E9EBF0"/>
+            <a:srgbClr val="ECEEF2"/>
           </a:solidFill>
           <a:ln>
             <a:noFill/>
@@ -13971,7 +13971,7 @@
         </p:nvSpPr>
         <p:spPr>
           <a:xfrm>
-            <a:off x="676656" y="2752344"/>
+            <a:off x="667512" y="2734056"/>
             <a:ext cx="5440680" cy="3291840"/>
           </a:xfrm>
           <a:prstGeom prst="roundRect">
@@ -13980,7 +13980,7 @@
             </a:avLst>
           </a:prstGeom>
           <a:solidFill>
-            <a:srgbClr val="E9EBF0"/>
+            <a:srgbClr val="ECEEF2"/>
           </a:solidFill>
           <a:ln>
             <a:noFill/>
@@ -14391,7 +14391,7 @@
         </p:nvSpPr>
         <p:spPr>
           <a:xfrm>
-            <a:off x="6300216" y="2752344"/>
+            <a:off x="6291072" y="2734056"/>
             <a:ext cx="5257800" cy="3291840"/>
           </a:xfrm>
           <a:prstGeom prst="roundRect">
@@ -14400,7 +14400,7 @@
             </a:avLst>
           </a:prstGeom>
           <a:solidFill>
-            <a:srgbClr val="E9EBF0"/>
+            <a:srgbClr val="ECEEF2"/>
           </a:solidFill>
           <a:ln>
             <a:noFill/>
@@ -15705,7 +15705,7 @@
         </p:nvSpPr>
         <p:spPr>
           <a:xfrm>
-            <a:off x="676656" y="3895344"/>
+            <a:off x="667512" y="3877056"/>
             <a:ext cx="3566160" cy="2560320"/>
           </a:xfrm>
           <a:prstGeom prst="roundRect">
@@ -15714,7 +15714,7 @@
             </a:avLst>
           </a:prstGeom>
           <a:solidFill>
-            <a:srgbClr val="E9EBF0"/>
+            <a:srgbClr val="ECEEF2"/>
           </a:solidFill>
           <a:ln>
             <a:noFill/>
@@ -16092,7 +16092,7 @@
         </p:nvSpPr>
         <p:spPr>
           <a:xfrm>
-            <a:off x="4425696" y="3895344"/>
+            <a:off x="4416552" y="3877056"/>
             <a:ext cx="3566160" cy="2560320"/>
           </a:xfrm>
           <a:prstGeom prst="roundRect">
@@ -16101,7 +16101,7 @@
             </a:avLst>
           </a:prstGeom>
           <a:solidFill>
-            <a:srgbClr val="E9EBF0"/>
+            <a:srgbClr val="ECEEF2"/>
           </a:solidFill>
           <a:ln>
             <a:noFill/>
@@ -16479,7 +16479,7 @@
         </p:nvSpPr>
         <p:spPr>
           <a:xfrm>
-            <a:off x="8174735" y="3895344"/>
+            <a:off x="8165591" y="3877056"/>
             <a:ext cx="3566160" cy="2560320"/>
           </a:xfrm>
           <a:prstGeom prst="roundRect">
@@ -16488,7 +16488,7 @@
             </a:avLst>
           </a:prstGeom>
           <a:solidFill>
-            <a:srgbClr val="E9EBF0"/>
+            <a:srgbClr val="ECEEF2"/>
           </a:solidFill>
           <a:ln>
             <a:noFill/>
@@ -18022,7 +18022,7 @@
         </p:nvSpPr>
         <p:spPr>
           <a:xfrm>
-            <a:off x="676656" y="3895344"/>
+            <a:off x="667512" y="3877056"/>
             <a:ext cx="5440680" cy="2377440"/>
           </a:xfrm>
           <a:prstGeom prst="roundRect">
@@ -18031,7 +18031,7 @@
             </a:avLst>
           </a:prstGeom>
           <a:solidFill>
-            <a:srgbClr val="E9EBF0"/>
+            <a:srgbClr val="ECEEF2"/>
           </a:solidFill>
           <a:ln>
             <a:noFill/>
@@ -18263,7 +18263,7 @@
         </p:nvSpPr>
         <p:spPr>
           <a:xfrm>
-            <a:off x="6300216" y="3895344"/>
+            <a:off x="6291072" y="3877056"/>
             <a:ext cx="5257800" cy="2377440"/>
           </a:xfrm>
           <a:prstGeom prst="roundRect">
@@ -18272,7 +18272,7 @@
             </a:avLst>
           </a:prstGeom>
           <a:solidFill>
-            <a:srgbClr val="E9EBF0"/>
+            <a:srgbClr val="ECEEF2"/>
           </a:solidFill>
           <a:ln>
             <a:noFill/>
@@ -18795,7 +18795,7 @@
         </p:nvSpPr>
         <p:spPr>
           <a:xfrm>
-            <a:off x="676656" y="2660904"/>
+            <a:off x="667512" y="2642616"/>
             <a:ext cx="5486400" cy="3931920"/>
           </a:xfrm>
           <a:prstGeom prst="roundRect">
@@ -18804,7 +18804,7 @@
             </a:avLst>
           </a:prstGeom>
           <a:solidFill>
-            <a:srgbClr val="E9EBF0"/>
+            <a:srgbClr val="ECEEF2"/>
           </a:solidFill>
           <a:ln>
             <a:noFill/>
@@ -20070,7 +20070,7 @@
         </p:nvSpPr>
         <p:spPr>
           <a:xfrm>
-            <a:off x="7306056" y="2660904"/>
+            <a:off x="7296912" y="2642616"/>
             <a:ext cx="4297680" cy="3840480"/>
           </a:xfrm>
           <a:prstGeom prst="roundRect">
@@ -20079,7 +20079,7 @@
             </a:avLst>
           </a:prstGeom>
           <a:solidFill>
-            <a:srgbClr val="E9EBF0"/>
+            <a:srgbClr val="ECEEF2"/>
           </a:solidFill>
           <a:ln>
             <a:noFill/>
@@ -20199,7 +20199,7 @@
         </p:nvSpPr>
         <p:spPr>
           <a:xfrm>
-            <a:off x="7488936" y="3209544"/>
+            <a:off x="7479792" y="3191256"/>
             <a:ext cx="3931920" cy="1417320"/>
           </a:xfrm>
           <a:prstGeom prst="roundRect">
@@ -20208,7 +20208,7 @@
             </a:avLst>
           </a:prstGeom>
           <a:solidFill>
-            <a:srgbClr val="E9EBF0"/>
+            <a:srgbClr val="ECEEF2"/>
           </a:solidFill>
           <a:ln>
             <a:noFill/>
@@ -20385,7 +20385,7 @@
         </p:nvSpPr>
         <p:spPr>
           <a:xfrm>
-            <a:off x="7488936" y="4718303"/>
+            <a:off x="7479792" y="4700016"/>
             <a:ext cx="3931920" cy="1417320"/>
           </a:xfrm>
           <a:prstGeom prst="roundRect">
@@ -20394,7 +20394,7 @@
             </a:avLst>
           </a:prstGeom>
           <a:solidFill>
-            <a:srgbClr val="E9EBF0"/>
+            <a:srgbClr val="ECEEF2"/>
           </a:solidFill>
           <a:ln>
             <a:noFill/>
@@ -22400,7 +22400,7 @@
         </p:nvSpPr>
         <p:spPr>
           <a:xfrm>
-            <a:off x="676656" y="2157984"/>
+            <a:off x="667512" y="2139696"/>
             <a:ext cx="5440680" cy="1965960"/>
           </a:xfrm>
           <a:prstGeom prst="roundRect">
@@ -22409,7 +22409,7 @@
             </a:avLst>
           </a:prstGeom>
           <a:solidFill>
-            <a:srgbClr val="E9EBF0"/>
+            <a:srgbClr val="ECEEF2"/>
           </a:solidFill>
           <a:ln>
             <a:noFill/>
@@ -22683,7 +22683,7 @@
         </p:nvSpPr>
         <p:spPr>
           <a:xfrm>
-            <a:off x="6300216" y="2157984"/>
+            <a:off x="6291072" y="2139696"/>
             <a:ext cx="5440680" cy="1965960"/>
           </a:xfrm>
           <a:prstGeom prst="roundRect">
@@ -22692,7 +22692,7 @@
             </a:avLst>
           </a:prstGeom>
           <a:solidFill>
-            <a:srgbClr val="E9EBF0"/>
+            <a:srgbClr val="ECEEF2"/>
           </a:solidFill>
           <a:ln>
             <a:noFill/>
@@ -22966,7 +22966,7 @@
         </p:nvSpPr>
         <p:spPr>
           <a:xfrm>
-            <a:off x="676656" y="4352543"/>
+            <a:off x="667512" y="4334255"/>
             <a:ext cx="5440680" cy="1965960"/>
           </a:xfrm>
           <a:prstGeom prst="roundRect">
@@ -22975,7 +22975,7 @@
             </a:avLst>
           </a:prstGeom>
           <a:solidFill>
-            <a:srgbClr val="E9EBF0"/>
+            <a:srgbClr val="ECEEF2"/>
           </a:solidFill>
           <a:ln>
             <a:noFill/>
@@ -23249,7 +23249,7 @@
         </p:nvSpPr>
         <p:spPr>
           <a:xfrm>
-            <a:off x="6300216" y="4352543"/>
+            <a:off x="6291072" y="4334255"/>
             <a:ext cx="5440680" cy="1965960"/>
           </a:xfrm>
           <a:prstGeom prst="roundRect">
@@ -23258,7 +23258,7 @@
             </a:avLst>
           </a:prstGeom>
           <a:solidFill>
-            <a:srgbClr val="E9EBF0"/>
+            <a:srgbClr val="ECEEF2"/>
           </a:solidFill>
           <a:ln>
             <a:noFill/>
@@ -23745,7 +23745,7 @@
         </p:nvSpPr>
         <p:spPr>
           <a:xfrm>
-            <a:off x="676656" y="2157984"/>
+            <a:off x="667512" y="2139696"/>
             <a:ext cx="10881360" cy="914400"/>
           </a:xfrm>
           <a:prstGeom prst="roundRect">
@@ -23754,7 +23754,7 @@
             </a:avLst>
           </a:prstGeom>
           <a:solidFill>
-            <a:srgbClr val="E9EBF0"/>
+            <a:srgbClr val="ECEEF2"/>
           </a:solidFill>
           <a:ln>
             <a:noFill/>
@@ -23997,7 +23997,7 @@
         </p:nvSpPr>
         <p:spPr>
           <a:xfrm>
-            <a:off x="676656" y="3191256"/>
+            <a:off x="667512" y="3172968"/>
             <a:ext cx="10881360" cy="914400"/>
           </a:xfrm>
           <a:prstGeom prst="roundRect">
@@ -24006,7 +24006,7 @@
             </a:avLst>
           </a:prstGeom>
           <a:solidFill>
-            <a:srgbClr val="E9EBF0"/>
+            <a:srgbClr val="ECEEF2"/>
           </a:solidFill>
           <a:ln>
             <a:noFill/>
@@ -24249,7 +24249,7 @@
         </p:nvSpPr>
         <p:spPr>
           <a:xfrm>
-            <a:off x="676656" y="4224527"/>
+            <a:off x="667512" y="4206240"/>
             <a:ext cx="10881360" cy="914400"/>
           </a:xfrm>
           <a:prstGeom prst="roundRect">
@@ -24258,7 +24258,7 @@
             </a:avLst>
           </a:prstGeom>
           <a:solidFill>
-            <a:srgbClr val="E9EBF0"/>
+            <a:srgbClr val="ECEEF2"/>
           </a:solidFill>
           <a:ln>
             <a:noFill/>
@@ -24501,7 +24501,7 @@
         </p:nvSpPr>
         <p:spPr>
           <a:xfrm>
-            <a:off x="676656" y="5257799"/>
+            <a:off x="667512" y="5239512"/>
             <a:ext cx="10881360" cy="914400"/>
           </a:xfrm>
           <a:prstGeom prst="roundRect">
@@ -24510,7 +24510,7 @@
             </a:avLst>
           </a:prstGeom>
           <a:solidFill>
-            <a:srgbClr val="E9EBF0"/>
+            <a:srgbClr val="ECEEF2"/>
           </a:solidFill>
           <a:ln>
             <a:noFill/>
@@ -24966,7 +24966,7 @@
         </p:nvSpPr>
         <p:spPr>
           <a:xfrm>
-            <a:off x="676656" y="2157984"/>
+            <a:off x="667512" y="2139696"/>
             <a:ext cx="5440680" cy="1965960"/>
           </a:xfrm>
           <a:prstGeom prst="roundRect">
@@ -24975,7 +24975,7 @@
             </a:avLst>
           </a:prstGeom>
           <a:solidFill>
-            <a:srgbClr val="E9EBF0"/>
+            <a:srgbClr val="ECEEF2"/>
           </a:solidFill>
           <a:ln>
             <a:noFill/>
@@ -25242,7 +25242,7 @@
         </p:nvSpPr>
         <p:spPr>
           <a:xfrm>
-            <a:off x="6300216" y="2157984"/>
+            <a:off x="6291072" y="2139696"/>
             <a:ext cx="5440680" cy="1965960"/>
           </a:xfrm>
           <a:prstGeom prst="roundRect">
@@ -25251,7 +25251,7 @@
             </a:avLst>
           </a:prstGeom>
           <a:solidFill>
-            <a:srgbClr val="E9EBF0"/>
+            <a:srgbClr val="ECEEF2"/>
           </a:solidFill>
           <a:ln>
             <a:noFill/>
@@ -25518,7 +25518,7 @@
         </p:nvSpPr>
         <p:spPr>
           <a:xfrm>
-            <a:off x="676656" y="4352543"/>
+            <a:off x="667512" y="4334255"/>
             <a:ext cx="5440680" cy="1965960"/>
           </a:xfrm>
           <a:prstGeom prst="roundRect">
@@ -25527,7 +25527,7 @@
             </a:avLst>
           </a:prstGeom>
           <a:solidFill>
-            <a:srgbClr val="E9EBF0"/>
+            <a:srgbClr val="ECEEF2"/>
           </a:solidFill>
           <a:ln>
             <a:noFill/>
@@ -25794,7 +25794,7 @@
         </p:nvSpPr>
         <p:spPr>
           <a:xfrm>
-            <a:off x="6300216" y="4352543"/>
+            <a:off x="6291072" y="4334255"/>
             <a:ext cx="5440680" cy="1965960"/>
           </a:xfrm>
           <a:prstGeom prst="roundRect">
@@ -25803,7 +25803,7 @@
             </a:avLst>
           </a:prstGeom>
           <a:solidFill>
-            <a:srgbClr val="E9EBF0"/>
+            <a:srgbClr val="ECEEF2"/>
           </a:solidFill>
           <a:ln>
             <a:noFill/>
@@ -26517,7 +26517,7 @@
         </p:nvSpPr>
         <p:spPr>
           <a:xfrm>
-            <a:off x="676656" y="5129783"/>
+            <a:off x="667512" y="5111496"/>
             <a:ext cx="3566160" cy="1417320"/>
           </a:xfrm>
           <a:prstGeom prst="roundRect">
@@ -26526,7 +26526,7 @@
             </a:avLst>
           </a:prstGeom>
           <a:solidFill>
-            <a:srgbClr val="E9EBF0"/>
+            <a:srgbClr val="ECEEF2"/>
           </a:solidFill>
           <a:ln>
             <a:noFill/>
@@ -26785,7 +26785,7 @@
         </p:nvSpPr>
         <p:spPr>
           <a:xfrm>
-            <a:off x="4425696" y="5129783"/>
+            <a:off x="4416552" y="5111496"/>
             <a:ext cx="3566160" cy="1417320"/>
           </a:xfrm>
           <a:prstGeom prst="roundRect">
@@ -26794,7 +26794,7 @@
             </a:avLst>
           </a:prstGeom>
           <a:solidFill>
-            <a:srgbClr val="E9EBF0"/>
+            <a:srgbClr val="ECEEF2"/>
           </a:solidFill>
           <a:ln>
             <a:noFill/>
@@ -27053,7 +27053,7 @@
         </p:nvSpPr>
         <p:spPr>
           <a:xfrm>
-            <a:off x="8174735" y="5129783"/>
+            <a:off x="8165591" y="5111496"/>
             <a:ext cx="3566160" cy="1417320"/>
           </a:xfrm>
           <a:prstGeom prst="roundRect">
@@ -27062,7 +27062,7 @@
             </a:avLst>
           </a:prstGeom>
           <a:solidFill>
-            <a:srgbClr val="E9EBF0"/>
+            <a:srgbClr val="ECEEF2"/>
           </a:solidFill>
           <a:ln>
             <a:noFill/>
@@ -27573,7 +27573,7 @@
         </p:nvSpPr>
         <p:spPr>
           <a:xfrm>
-            <a:off x="676656" y="2569464"/>
+            <a:off x="667512" y="2551176"/>
             <a:ext cx="5440680" cy="1280160"/>
           </a:xfrm>
           <a:prstGeom prst="roundRect">
@@ -27582,7 +27582,7 @@
             </a:avLst>
           </a:prstGeom>
           <a:solidFill>
-            <a:srgbClr val="E9EBF0"/>
+            <a:srgbClr val="ECEEF2"/>
           </a:solidFill>
           <a:ln>
             <a:noFill/>
@@ -28093,7 +28093,7 @@
         </p:nvSpPr>
         <p:spPr>
           <a:xfrm>
-            <a:off x="6300216" y="2569464"/>
+            <a:off x="6291072" y="2551176"/>
             <a:ext cx="5257800" cy="4160520"/>
           </a:xfrm>
           <a:prstGeom prst="roundRect">
@@ -28102,7 +28102,7 @@
             </a:avLst>
           </a:prstGeom>
           <a:solidFill>
-            <a:srgbClr val="E9EBF0"/>
+            <a:srgbClr val="ECEEF2"/>
           </a:solidFill>
           <a:ln>
             <a:noFill/>
@@ -28974,7 +28974,7 @@
         </p:nvSpPr>
         <p:spPr>
           <a:xfrm>
-            <a:off x="676656" y="5129783"/>
+            <a:off x="667512" y="5111496"/>
             <a:ext cx="3566160" cy="1417320"/>
           </a:xfrm>
           <a:prstGeom prst="roundRect">
@@ -28983,7 +28983,7 @@
             </a:avLst>
           </a:prstGeom>
           <a:solidFill>
-            <a:srgbClr val="E9EBF0"/>
+            <a:srgbClr val="ECEEF2"/>
           </a:solidFill>
           <a:ln>
             <a:noFill/>
@@ -29242,7 +29242,7 @@
         </p:nvSpPr>
         <p:spPr>
           <a:xfrm>
-            <a:off x="4425696" y="5129783"/>
+            <a:off x="4416552" y="5111496"/>
             <a:ext cx="3566160" cy="1417320"/>
           </a:xfrm>
           <a:prstGeom prst="roundRect">
@@ -29251,7 +29251,7 @@
             </a:avLst>
           </a:prstGeom>
           <a:solidFill>
-            <a:srgbClr val="E9EBF0"/>
+            <a:srgbClr val="ECEEF2"/>
           </a:solidFill>
           <a:ln>
             <a:noFill/>
@@ -29510,7 +29510,7 @@
         </p:nvSpPr>
         <p:spPr>
           <a:xfrm>
-            <a:off x="8174735" y="5129783"/>
+            <a:off x="8165591" y="5111496"/>
             <a:ext cx="3566160" cy="1417320"/>
           </a:xfrm>
           <a:prstGeom prst="roundRect">
@@ -29519,7 +29519,7 @@
             </a:avLst>
           </a:prstGeom>
           <a:solidFill>
-            <a:srgbClr val="E9EBF0"/>
+            <a:srgbClr val="ECEEF2"/>
           </a:solidFill>
           <a:ln>
             <a:noFill/>
@@ -30030,7 +30030,7 @@
         </p:nvSpPr>
         <p:spPr>
           <a:xfrm>
-            <a:off x="676656" y="2569464"/>
+            <a:off x="667512" y="2551176"/>
             <a:ext cx="5440680" cy="1280160"/>
           </a:xfrm>
           <a:prstGeom prst="roundRect">
@@ -30039,7 +30039,7 @@
             </a:avLst>
           </a:prstGeom>
           <a:solidFill>
-            <a:srgbClr val="E9EBF0"/>
+            <a:srgbClr val="ECEEF2"/>
           </a:solidFill>
           <a:ln>
             <a:noFill/>
@@ -30573,7 +30573,7 @@
         </p:nvSpPr>
         <p:spPr>
           <a:xfrm>
-            <a:off x="6300216" y="2569464"/>
+            <a:off x="6291072" y="2551176"/>
             <a:ext cx="5257800" cy="4160520"/>
           </a:xfrm>
           <a:prstGeom prst="roundRect">
@@ -30582,7 +30582,7 @@
             </a:avLst>
           </a:prstGeom>
           <a:solidFill>
-            <a:srgbClr val="E9EBF0"/>
+            <a:srgbClr val="ECEEF2"/>
           </a:solidFill>
           <a:ln>
             <a:noFill/>

--- a/team_project/kickoff_2026-05-11.pptx
+++ b/team_project/kickoff_2026-05-11.pptx
@@ -15617,17 +15617,111 @@
       </p:sp>
       <p:sp>
         <p:nvSpPr>
-          <p:cNvPr id="8" name="Oval 7"/>
+          <p:cNvPr id="8" name="Rounded Rectangle 7"/>
           <p:cNvSpPr/>
           <p:nvPr/>
         </p:nvSpPr>
         <p:spPr>
           <a:xfrm>
-            <a:off x="822959" y="2697480"/>
-            <a:ext cx="914400" cy="914400"/>
-          </a:xfrm>
-          <a:prstGeom prst="ellipse">
-            <a:avLst/>
+            <a:off x="667512" y="2642616"/>
+            <a:ext cx="3566160" cy="4023360"/>
+          </a:xfrm>
+          <a:prstGeom prst="roundRect">
+            <a:avLst>
+              <a:gd name="adj" fmla="val 5000"/>
+            </a:avLst>
+          </a:prstGeom>
+          <a:solidFill>
+            <a:srgbClr val="ECEEF2"/>
+          </a:solidFill>
+          <a:ln>
+            <a:noFill/>
+          </a:ln>
+        </p:spPr>
+        <p:style>
+          <a:lnRef idx="1">
+            <a:schemeClr val="accent1"/>
+          </a:lnRef>
+          <a:fillRef idx="3">
+            <a:schemeClr val="accent1"/>
+          </a:fillRef>
+          <a:effectRef idx="2">
+            <a:schemeClr val="accent1"/>
+          </a:effectRef>
+          <a:fontRef idx="minor">
+            <a:schemeClr val="lt1"/>
+          </a:fontRef>
+        </p:style>
+        <p:txBody>
+          <a:bodyPr rtlCol="0" anchor="ctr"/>
+          <a:lstStyle/>
+          <a:p>
+            <a:pPr algn="ctr"/>
+          </a:p>
+        </p:txBody>
+      </p:sp>
+      <p:sp>
+        <p:nvSpPr>
+          <p:cNvPr id="9" name="Rounded Rectangle 8"/>
+          <p:cNvSpPr/>
+          <p:nvPr/>
+        </p:nvSpPr>
+        <p:spPr>
+          <a:xfrm>
+            <a:off x="640080" y="2606040"/>
+            <a:ext cx="3566160" cy="4023360"/>
+          </a:xfrm>
+          <a:prstGeom prst="roundRect">
+            <a:avLst>
+              <a:gd name="adj" fmla="val 5000"/>
+            </a:avLst>
+          </a:prstGeom>
+          <a:solidFill>
+            <a:srgbClr val="FFFFFF"/>
+          </a:solidFill>
+          <a:ln w="19050">
+            <a:solidFill>
+              <a:srgbClr val="F59E0B"/>
+            </a:solidFill>
+          </a:ln>
+        </p:spPr>
+        <p:style>
+          <a:lnRef idx="1">
+            <a:schemeClr val="accent1"/>
+          </a:lnRef>
+          <a:fillRef idx="3">
+            <a:schemeClr val="accent1"/>
+          </a:fillRef>
+          <a:effectRef idx="2">
+            <a:schemeClr val="accent1"/>
+          </a:effectRef>
+          <a:fontRef idx="minor">
+            <a:schemeClr val="lt1"/>
+          </a:fontRef>
+        </p:style>
+        <p:txBody>
+          <a:bodyPr rtlCol="0" anchor="ctr"/>
+          <a:lstStyle/>
+          <a:p>
+            <a:pPr algn="ctr"/>
+          </a:p>
+        </p:txBody>
+      </p:sp>
+      <p:sp>
+        <p:nvSpPr>
+          <p:cNvPr id="10" name="Rounded Rectangle 9"/>
+          <p:cNvSpPr/>
+          <p:nvPr/>
+        </p:nvSpPr>
+        <p:spPr>
+          <a:xfrm>
+            <a:off x="640080" y="2606040"/>
+            <a:ext cx="3566160" cy="960120"/>
+          </a:xfrm>
+          <a:prstGeom prst="roundRect">
+            <a:avLst>
+              <a:gd name="adj" fmla="val 5000"/>
+            </a:avLst>
           </a:prstGeom>
           <a:solidFill>
             <a:srgbClr val="F59E0B"/>
@@ -15660,33 +15754,76 @@
       </p:sp>
       <p:sp>
         <p:nvSpPr>
-          <p:cNvPr id="9" name="TextBox 8"/>
-          <p:cNvSpPr txBox="1"/>
-          <p:nvPr/>
-        </p:nvSpPr>
-        <p:spPr>
-          <a:xfrm>
-            <a:off x="822959" y="2834640"/>
-            <a:ext cx="914400" cy="640080"/>
-          </a:xfrm>
-          <a:prstGeom prst="rect">
-            <a:avLst/>
-          </a:prstGeom>
-          <a:noFill/>
-        </p:spPr>
-        <p:txBody>
-          <a:bodyPr wrap="square" lIns="0" rIns="0" tIns="0" bIns="0">
-            <a:spAutoFit/>
-          </a:bodyPr>
-          <a:lstStyle/>
-          <a:p>
-            <a:pPr algn="ctr">
-              <a:lnSpc>
-                <a:spcPct val="125000"/>
-              </a:lnSpc>
-            </a:pPr>
-            <a:r>
-              <a:rPr sz="2600" b="1">
+          <p:cNvPr id="11" name="Rectangle 10"/>
+          <p:cNvSpPr/>
+          <p:nvPr/>
+        </p:nvSpPr>
+        <p:spPr>
+          <a:xfrm>
+            <a:off x="640080" y="3154680"/>
+            <a:ext cx="3566160" cy="411480"/>
+          </a:xfrm>
+          <a:prstGeom prst="rect">
+            <a:avLst/>
+          </a:prstGeom>
+          <a:solidFill>
+            <a:srgbClr val="F59E0B"/>
+          </a:solidFill>
+          <a:ln>
+            <a:noFill/>
+          </a:ln>
+        </p:spPr>
+        <p:style>
+          <a:lnRef idx="1">
+            <a:schemeClr val="accent1"/>
+          </a:lnRef>
+          <a:fillRef idx="3">
+            <a:schemeClr val="accent1"/>
+          </a:fillRef>
+          <a:effectRef idx="2">
+            <a:schemeClr val="accent1"/>
+          </a:effectRef>
+          <a:fontRef idx="minor">
+            <a:schemeClr val="lt1"/>
+          </a:fontRef>
+        </p:style>
+        <p:txBody>
+          <a:bodyPr rtlCol="0" anchor="ctr"/>
+          <a:lstStyle/>
+          <a:p>
+            <a:pPr algn="ctr"/>
+          </a:p>
+        </p:txBody>
+      </p:sp>
+      <p:sp>
+        <p:nvSpPr>
+          <p:cNvPr id="12" name="TextBox 11"/>
+          <p:cNvSpPr txBox="1"/>
+          <p:nvPr/>
+        </p:nvSpPr>
+        <p:spPr>
+          <a:xfrm>
+            <a:off x="914400" y="2788920"/>
+            <a:ext cx="914400" cy="365760"/>
+          </a:xfrm>
+          <a:prstGeom prst="rect">
+            <a:avLst/>
+          </a:prstGeom>
+          <a:noFill/>
+        </p:spPr>
+        <p:txBody>
+          <a:bodyPr wrap="square" lIns="0" rIns="0" tIns="0" bIns="0">
+            <a:spAutoFit/>
+          </a:bodyPr>
+          <a:lstStyle/>
+          <a:p>
+            <a:pPr algn="l">
+              <a:lnSpc>
+                <a:spcPct val="125000"/>
+              </a:lnSpc>
+            </a:pPr>
+            <a:r>
+              <a:rPr sz="1400" b="1">
                 <a:solidFill>
                   <a:srgbClr val="FFFFFF"/>
                 </a:solidFill>
@@ -15699,14 +15836,260 @@
       </p:sp>
       <p:sp>
         <p:nvSpPr>
-          <p:cNvPr id="10" name="Rounded Rectangle 9"/>
+          <p:cNvPr id="13" name="TextBox 12"/>
+          <p:cNvSpPr txBox="1"/>
+          <p:nvPr/>
+        </p:nvSpPr>
+        <p:spPr>
+          <a:xfrm>
+            <a:off x="914400" y="3017520"/>
+            <a:ext cx="3108960" cy="502920"/>
+          </a:xfrm>
+          <a:prstGeom prst="rect">
+            <a:avLst/>
+          </a:prstGeom>
+          <a:noFill/>
+        </p:spPr>
+        <p:txBody>
+          <a:bodyPr wrap="square" lIns="0" rIns="0" tIns="0" bIns="0">
+            <a:spAutoFit/>
+          </a:bodyPr>
+          <a:lstStyle/>
+          <a:p>
+            <a:pPr algn="l">
+              <a:lnSpc>
+                <a:spcPct val="125000"/>
+              </a:lnSpc>
+            </a:pPr>
+            <a:r>
+              <a:rPr sz="2200" b="1">
+                <a:solidFill>
+                  <a:srgbClr val="FFFFFF"/>
+                </a:solidFill>
+                <a:latin typeface="맑은 고딕"/>
+              </a:rPr>
+              <a:t>분산 평가</a:t>
+            </a:r>
+          </a:p>
+        </p:txBody>
+      </p:sp>
+      <p:sp>
+        <p:nvSpPr>
+          <p:cNvPr id="14" name="TextBox 13"/>
+          <p:cNvSpPr txBox="1"/>
+          <p:nvPr/>
+        </p:nvSpPr>
+        <p:spPr>
+          <a:xfrm>
+            <a:off x="914400" y="3749039"/>
+            <a:ext cx="3108960" cy="411480"/>
+          </a:xfrm>
+          <a:prstGeom prst="rect">
+            <a:avLst/>
+          </a:prstGeom>
+          <a:noFill/>
+        </p:spPr>
+        <p:txBody>
+          <a:bodyPr wrap="square" lIns="0" rIns="0" tIns="0" bIns="0">
+            <a:spAutoFit/>
+          </a:bodyPr>
+          <a:lstStyle/>
+          <a:p>
+            <a:pPr algn="l">
+              <a:lnSpc>
+                <a:spcPct val="125000"/>
+              </a:lnSpc>
+            </a:pPr>
+            <a:r>
+              <a:rPr sz="1300" b="1">
+                <a:solidFill>
+                  <a:srgbClr val="F59E0B"/>
+                </a:solidFill>
+                <a:latin typeface="맑은 고딕"/>
+              </a:rPr>
+              <a:t>격주 퀴즈 6회 + 기말 40%</a:t>
+            </a:r>
+          </a:p>
+        </p:txBody>
+      </p:sp>
+      <p:sp>
+        <p:nvSpPr>
+          <p:cNvPr id="15" name="TextBox 14"/>
+          <p:cNvSpPr txBox="1"/>
+          <p:nvPr/>
+        </p:nvSpPr>
+        <p:spPr>
+          <a:xfrm>
+            <a:off x="914400" y="4297680"/>
+            <a:ext cx="3108960" cy="1280160"/>
+          </a:xfrm>
+          <a:prstGeom prst="rect">
+            <a:avLst/>
+          </a:prstGeom>
+          <a:noFill/>
+        </p:spPr>
+        <p:txBody>
+          <a:bodyPr wrap="square" lIns="0" rIns="0" tIns="0" bIns="0">
+            <a:spAutoFit/>
+          </a:bodyPr>
+          <a:lstStyle/>
+          <a:p>
+            <a:pPr algn="l">
+              <a:lnSpc>
+                <a:spcPct val="155000"/>
+              </a:lnSpc>
+            </a:pPr>
+            <a:r>
+              <a:rPr sz="1400" b="0">
+                <a:solidFill>
+                  <a:srgbClr val="424B5C"/>
+                </a:solidFill>
+                <a:latin typeface="맑은 고딕"/>
+              </a:rPr>
+              <a:t>기말 한 번이 아니라</a:t>
+            </a:r>
+          </a:p>
+          <a:p>
+            <a:pPr algn="l">
+              <a:lnSpc>
+                <a:spcPct val="155000"/>
+              </a:lnSpc>
+            </a:pPr>
+            <a:r>
+              <a:rPr sz="1400" b="0">
+                <a:solidFill>
+                  <a:srgbClr val="424B5C"/>
+                </a:solidFill>
+                <a:latin typeface="맑은 고딕"/>
+              </a:rPr>
+              <a:t>격주마다 작은 퀴즈로 나누어 본다.</a:t>
+            </a:r>
+          </a:p>
+        </p:txBody>
+      </p:sp>
+      <p:cxnSp>
+        <p:nvCxnSpPr>
+          <p:cNvPr id="16" name="Connector 15"/>
+          <p:cNvCxnSpPr/>
+          <p:nvPr/>
+        </p:nvCxnSpPr>
+        <p:spPr>
+          <a:xfrm>
+            <a:off x="914400" y="5897880"/>
+            <a:ext cx="3017520" cy="0"/>
+          </a:xfrm>
+          <a:prstGeom prst="line">
+            <a:avLst/>
+          </a:prstGeom>
+          <a:ln w="19050">
+            <a:solidFill>
+              <a:srgbClr val="F59E0B"/>
+            </a:solidFill>
+          </a:ln>
+        </p:spPr>
+        <p:style>
+          <a:lnRef idx="2">
+            <a:schemeClr val="accent1"/>
+          </a:lnRef>
+          <a:fillRef idx="0">
+            <a:schemeClr val="accent1"/>
+          </a:fillRef>
+          <a:effectRef idx="1">
+            <a:schemeClr val="accent1"/>
+          </a:effectRef>
+          <a:fontRef idx="minor">
+            <a:schemeClr val="tx1"/>
+          </a:fontRef>
+        </p:style>
+      </p:cxnSp>
+      <p:sp>
+        <p:nvSpPr>
+          <p:cNvPr id="17" name="TextBox 16"/>
+          <p:cNvSpPr txBox="1"/>
+          <p:nvPr/>
+        </p:nvSpPr>
+        <p:spPr>
+          <a:xfrm>
+            <a:off x="914400" y="6035040"/>
+            <a:ext cx="914400" cy="320040"/>
+          </a:xfrm>
+          <a:prstGeom prst="rect">
+            <a:avLst/>
+          </a:prstGeom>
+          <a:noFill/>
+        </p:spPr>
+        <p:txBody>
+          <a:bodyPr wrap="square" lIns="0" rIns="0" tIns="0" bIns="0">
+            <a:spAutoFit/>
+          </a:bodyPr>
+          <a:lstStyle/>
+          <a:p>
+            <a:pPr algn="l">
+              <a:lnSpc>
+                <a:spcPct val="125000"/>
+              </a:lnSpc>
+            </a:pPr>
+            <a:r>
+              <a:rPr sz="1000" b="1">
+                <a:solidFill>
+                  <a:srgbClr val="8B95A7"/>
+                </a:solidFill>
+                <a:latin typeface="맑은 고딕"/>
+              </a:rPr>
+              <a:t>근거 이론</a:t>
+            </a:r>
+          </a:p>
+        </p:txBody>
+      </p:sp>
+      <p:sp>
+        <p:nvSpPr>
+          <p:cNvPr id="18" name="TextBox 17"/>
+          <p:cNvSpPr txBox="1"/>
+          <p:nvPr/>
+        </p:nvSpPr>
+        <p:spPr>
+          <a:xfrm>
+            <a:off x="914400" y="6263640"/>
+            <a:ext cx="3108960" cy="320040"/>
+          </a:xfrm>
+          <a:prstGeom prst="rect">
+            <a:avLst/>
+          </a:prstGeom>
+          <a:noFill/>
+        </p:spPr>
+        <p:txBody>
+          <a:bodyPr wrap="square" lIns="0" rIns="0" tIns="0" bIns="0">
+            <a:spAutoFit/>
+          </a:bodyPr>
+          <a:lstStyle/>
+          <a:p>
+            <a:pPr algn="l">
+              <a:lnSpc>
+                <a:spcPct val="125000"/>
+              </a:lnSpc>
+            </a:pPr>
+            <a:r>
+              <a:rPr sz="1300" b="1">
+                <a:solidFill>
+                  <a:srgbClr val="F59E0B"/>
+                </a:solidFill>
+                <a:latin typeface="맑은 고딕"/>
+              </a:rPr>
+              <a:t>Forgetting Curve</a:t>
+            </a:r>
+          </a:p>
+        </p:txBody>
+      </p:sp>
+      <p:sp>
+        <p:nvSpPr>
+          <p:cNvPr id="19" name="Rounded Rectangle 18"/>
           <p:cNvSpPr/>
           <p:nvPr/>
         </p:nvSpPr>
         <p:spPr>
           <a:xfrm>
-            <a:off x="667512" y="3877056"/>
-            <a:ext cx="3566160" cy="2560320"/>
+            <a:off x="4416552" y="2642616"/>
+            <a:ext cx="3566160" cy="4023360"/>
           </a:xfrm>
           <a:prstGeom prst="roundRect">
             <a:avLst>
@@ -15744,14 +16127,14 @@
       </p:sp>
       <p:sp>
         <p:nvSpPr>
-          <p:cNvPr id="11" name="Rounded Rectangle 10"/>
+          <p:cNvPr id="20" name="Rounded Rectangle 19"/>
           <p:cNvSpPr/>
           <p:nvPr/>
         </p:nvSpPr>
         <p:spPr>
           <a:xfrm>
-            <a:off x="640080" y="3840480"/>
-            <a:ext cx="3566160" cy="2560320"/>
+            <a:off x="4389120" y="2606040"/>
+            <a:ext cx="3566160" cy="4023360"/>
           </a:xfrm>
           <a:prstGeom prst="roundRect">
             <a:avLst>
@@ -15759,11 +16142,11 @@
             </a:avLst>
           </a:prstGeom>
           <a:solidFill>
-            <a:srgbClr val="FAFBFC"/>
+            <a:srgbClr val="FFFFFF"/>
           </a:solidFill>
-          <a:ln w="15240">
+          <a:ln w="19050">
             <a:solidFill>
-              <a:srgbClr val="F59E0B"/>
+              <a:srgbClr val="4F46E5"/>
             </a:solidFill>
           </a:ln>
         </p:spPr>
@@ -15791,230 +16174,19 @@
       </p:sp>
       <p:sp>
         <p:nvSpPr>
-          <p:cNvPr id="12" name="TextBox 11"/>
-          <p:cNvSpPr txBox="1"/>
-          <p:nvPr/>
-        </p:nvSpPr>
-        <p:spPr>
-          <a:xfrm>
-            <a:off x="868680" y="4023360"/>
-            <a:ext cx="3200400" cy="502920"/>
-          </a:xfrm>
-          <a:prstGeom prst="rect">
-            <a:avLst/>
-          </a:prstGeom>
-          <a:noFill/>
-        </p:spPr>
-        <p:txBody>
-          <a:bodyPr wrap="square" lIns="0" rIns="0" tIns="0" bIns="0">
-            <a:spAutoFit/>
-          </a:bodyPr>
-          <a:lstStyle/>
-          <a:p>
-            <a:pPr algn="l">
-              <a:lnSpc>
-                <a:spcPct val="125000"/>
-              </a:lnSpc>
-            </a:pPr>
-            <a:r>
-              <a:rPr sz="2200" b="1">
-                <a:solidFill>
-                  <a:srgbClr val="0F141F"/>
-                </a:solidFill>
-                <a:latin typeface="맑은 고딕"/>
-              </a:rPr>
-              <a:t>분산 평가</a:t>
-            </a:r>
-          </a:p>
-        </p:txBody>
-      </p:sp>
-      <p:sp>
-        <p:nvSpPr>
-          <p:cNvPr id="13" name="TextBox 12"/>
-          <p:cNvSpPr txBox="1"/>
-          <p:nvPr/>
-        </p:nvSpPr>
-        <p:spPr>
-          <a:xfrm>
-            <a:off x="868680" y="4572000"/>
-            <a:ext cx="3200400" cy="365760"/>
-          </a:xfrm>
-          <a:prstGeom prst="rect">
-            <a:avLst/>
-          </a:prstGeom>
-          <a:noFill/>
-        </p:spPr>
-        <p:txBody>
-          <a:bodyPr wrap="square" lIns="0" rIns="0" tIns="0" bIns="0">
-            <a:spAutoFit/>
-          </a:bodyPr>
-          <a:lstStyle/>
-          <a:p>
-            <a:pPr algn="l">
-              <a:lnSpc>
-                <a:spcPct val="125000"/>
-              </a:lnSpc>
-            </a:pPr>
-            <a:r>
-              <a:rPr sz="1200" b="1">
-                <a:solidFill>
-                  <a:srgbClr val="F59E0B"/>
-                </a:solidFill>
-                <a:latin typeface="맑은 고딕"/>
-              </a:rPr>
-              <a:t>격주 퀴즈 6회 + 기말 40%</a:t>
-            </a:r>
-          </a:p>
-        </p:txBody>
-      </p:sp>
-      <p:sp>
-        <p:nvSpPr>
-          <p:cNvPr id="14" name="TextBox 13"/>
-          <p:cNvSpPr txBox="1"/>
-          <p:nvPr/>
-        </p:nvSpPr>
-        <p:spPr>
-          <a:xfrm>
-            <a:off x="868680" y="5029200"/>
-            <a:ext cx="3200400" cy="914400"/>
-          </a:xfrm>
-          <a:prstGeom prst="rect">
-            <a:avLst/>
-          </a:prstGeom>
-          <a:noFill/>
-        </p:spPr>
-        <p:txBody>
-          <a:bodyPr wrap="square" lIns="0" rIns="0" tIns="0" bIns="0">
-            <a:spAutoFit/>
-          </a:bodyPr>
-          <a:lstStyle/>
-          <a:p>
-            <a:pPr algn="l">
-              <a:lnSpc>
-                <a:spcPct val="150000"/>
-              </a:lnSpc>
-            </a:pPr>
-            <a:r>
-              <a:rPr sz="1300" b="0">
-                <a:solidFill>
-                  <a:srgbClr val="424B5C"/>
-                </a:solidFill>
-                <a:latin typeface="맑은 고딕"/>
-              </a:rPr>
-              <a:t>기말 한 번이 아니라</a:t>
-            </a:r>
-          </a:p>
-          <a:p>
-            <a:pPr algn="l">
-              <a:lnSpc>
-                <a:spcPct val="150000"/>
-              </a:lnSpc>
-            </a:pPr>
-            <a:r>
-              <a:rPr sz="1300" b="0">
-                <a:solidFill>
-                  <a:srgbClr val="424B5C"/>
-                </a:solidFill>
-                <a:latin typeface="맑은 고딕"/>
-              </a:rPr>
-              <a:t>격주마다 작은 퀴즈로 나누어 본다.</a:t>
-            </a:r>
-          </a:p>
-        </p:txBody>
-      </p:sp>
-      <p:sp>
-        <p:nvSpPr>
-          <p:cNvPr id="15" name="Rounded Rectangle 14"/>
+          <p:cNvPr id="21" name="Rounded Rectangle 20"/>
           <p:cNvSpPr/>
           <p:nvPr/>
         </p:nvSpPr>
         <p:spPr>
           <a:xfrm>
-            <a:off x="868680" y="5989320"/>
-            <a:ext cx="3108960" cy="320040"/>
+            <a:off x="4389120" y="2606040"/>
+            <a:ext cx="3566160" cy="960120"/>
           </a:xfrm>
           <a:prstGeom prst="roundRect">
             <a:avLst>
-              <a:gd name="adj" fmla="val 50000"/>
+              <a:gd name="adj" fmla="val 5000"/>
             </a:avLst>
-          </a:prstGeom>
-          <a:solidFill>
-            <a:srgbClr val="F59E0B"/>
-          </a:solidFill>
-          <a:ln>
-            <a:noFill/>
-          </a:ln>
-        </p:spPr>
-        <p:style>
-          <a:lnRef idx="1">
-            <a:schemeClr val="accent1"/>
-          </a:lnRef>
-          <a:fillRef idx="3">
-            <a:schemeClr val="accent1"/>
-          </a:fillRef>
-          <a:effectRef idx="2">
-            <a:schemeClr val="accent1"/>
-          </a:effectRef>
-          <a:fontRef idx="minor">
-            <a:schemeClr val="lt1"/>
-          </a:fontRef>
-        </p:style>
-        <p:txBody>
-          <a:bodyPr rtlCol="0" anchor="ctr"/>
-          <a:lstStyle/>
-          <a:p>
-            <a:pPr algn="ctr"/>
-          </a:p>
-        </p:txBody>
-      </p:sp>
-      <p:sp>
-        <p:nvSpPr>
-          <p:cNvPr id="16" name="TextBox 15"/>
-          <p:cNvSpPr txBox="1"/>
-          <p:nvPr/>
-        </p:nvSpPr>
-        <p:spPr>
-          <a:xfrm>
-            <a:off x="868680" y="5989320"/>
-            <a:ext cx="3108960" cy="320040"/>
-          </a:xfrm>
-          <a:prstGeom prst="rect">
-            <a:avLst/>
-          </a:prstGeom>
-          <a:noFill/>
-        </p:spPr>
-        <p:txBody>
-          <a:bodyPr wrap="none" lIns="36576" rIns="36576" tIns="0" bIns="0" anchor="ctr">
-            <a:spAutoFit/>
-          </a:bodyPr>
-          <a:lstStyle/>
-          <a:p>
-            <a:pPr algn="ctr"/>
-            <a:r>
-              <a:rPr sz="1000" b="1">
-                <a:solidFill>
-                  <a:srgbClr val="FFFFFF"/>
-                </a:solidFill>
-                <a:latin typeface="맑은 고딕"/>
-              </a:rPr>
-              <a:t>근거: Forgetting Curve</a:t>
-            </a:r>
-          </a:p>
-        </p:txBody>
-      </p:sp>
-      <p:sp>
-        <p:nvSpPr>
-          <p:cNvPr id="17" name="Oval 16"/>
-          <p:cNvSpPr/>
-          <p:nvPr/>
-        </p:nvSpPr>
-        <p:spPr>
-          <a:xfrm>
-            <a:off x="4572000" y="2697480"/>
-            <a:ext cx="914400" cy="914400"/>
-          </a:xfrm>
-          <a:prstGeom prst="ellipse">
-            <a:avLst/>
           </a:prstGeom>
           <a:solidFill>
             <a:srgbClr val="4F46E5"/>
@@ -16047,33 +16219,76 @@
       </p:sp>
       <p:sp>
         <p:nvSpPr>
-          <p:cNvPr id="18" name="TextBox 17"/>
-          <p:cNvSpPr txBox="1"/>
-          <p:nvPr/>
-        </p:nvSpPr>
-        <p:spPr>
-          <a:xfrm>
-            <a:off x="4572000" y="2834640"/>
-            <a:ext cx="914400" cy="640080"/>
-          </a:xfrm>
-          <a:prstGeom prst="rect">
-            <a:avLst/>
-          </a:prstGeom>
-          <a:noFill/>
-        </p:spPr>
-        <p:txBody>
-          <a:bodyPr wrap="square" lIns="0" rIns="0" tIns="0" bIns="0">
-            <a:spAutoFit/>
-          </a:bodyPr>
-          <a:lstStyle/>
-          <a:p>
-            <a:pPr algn="ctr">
-              <a:lnSpc>
-                <a:spcPct val="125000"/>
-              </a:lnSpc>
-            </a:pPr>
-            <a:r>
-              <a:rPr sz="2600" b="1">
+          <p:cNvPr id="22" name="Rectangle 21"/>
+          <p:cNvSpPr/>
+          <p:nvPr/>
+        </p:nvSpPr>
+        <p:spPr>
+          <a:xfrm>
+            <a:off x="4389120" y="3154680"/>
+            <a:ext cx="3566160" cy="411480"/>
+          </a:xfrm>
+          <a:prstGeom prst="rect">
+            <a:avLst/>
+          </a:prstGeom>
+          <a:solidFill>
+            <a:srgbClr val="4F46E5"/>
+          </a:solidFill>
+          <a:ln>
+            <a:noFill/>
+          </a:ln>
+        </p:spPr>
+        <p:style>
+          <a:lnRef idx="1">
+            <a:schemeClr val="accent1"/>
+          </a:lnRef>
+          <a:fillRef idx="3">
+            <a:schemeClr val="accent1"/>
+          </a:fillRef>
+          <a:effectRef idx="2">
+            <a:schemeClr val="accent1"/>
+          </a:effectRef>
+          <a:fontRef idx="minor">
+            <a:schemeClr val="lt1"/>
+          </a:fontRef>
+        </p:style>
+        <p:txBody>
+          <a:bodyPr rtlCol="0" anchor="ctr"/>
+          <a:lstStyle/>
+          <a:p>
+            <a:pPr algn="ctr"/>
+          </a:p>
+        </p:txBody>
+      </p:sp>
+      <p:sp>
+        <p:nvSpPr>
+          <p:cNvPr id="23" name="TextBox 22"/>
+          <p:cNvSpPr txBox="1"/>
+          <p:nvPr/>
+        </p:nvSpPr>
+        <p:spPr>
+          <a:xfrm>
+            <a:off x="4663440" y="2788920"/>
+            <a:ext cx="914400" cy="365760"/>
+          </a:xfrm>
+          <a:prstGeom prst="rect">
+            <a:avLst/>
+          </a:prstGeom>
+          <a:noFill/>
+        </p:spPr>
+        <p:txBody>
+          <a:bodyPr wrap="square" lIns="0" rIns="0" tIns="0" bIns="0">
+            <a:spAutoFit/>
+          </a:bodyPr>
+          <a:lstStyle/>
+          <a:p>
+            <a:pPr algn="l">
+              <a:lnSpc>
+                <a:spcPct val="125000"/>
+              </a:lnSpc>
+            </a:pPr>
+            <a:r>
+              <a:rPr sz="1400" b="1">
                 <a:solidFill>
                   <a:srgbClr val="FFFFFF"/>
                 </a:solidFill>
@@ -16086,14 +16301,260 @@
       </p:sp>
       <p:sp>
         <p:nvSpPr>
-          <p:cNvPr id="19" name="Rounded Rectangle 18"/>
+          <p:cNvPr id="24" name="TextBox 23"/>
+          <p:cNvSpPr txBox="1"/>
+          <p:nvPr/>
+        </p:nvSpPr>
+        <p:spPr>
+          <a:xfrm>
+            <a:off x="4663440" y="3017520"/>
+            <a:ext cx="3108960" cy="502920"/>
+          </a:xfrm>
+          <a:prstGeom prst="rect">
+            <a:avLst/>
+          </a:prstGeom>
+          <a:noFill/>
+        </p:spPr>
+        <p:txBody>
+          <a:bodyPr wrap="square" lIns="0" rIns="0" tIns="0" bIns="0">
+            <a:spAutoFit/>
+          </a:bodyPr>
+          <a:lstStyle/>
+          <a:p>
+            <a:pPr algn="l">
+              <a:lnSpc>
+                <a:spcPct val="125000"/>
+              </a:lnSpc>
+            </a:pPr>
+            <a:r>
+              <a:rPr sz="2200" b="1">
+                <a:solidFill>
+                  <a:srgbClr val="FFFFFF"/>
+                </a:solidFill>
+                <a:latin typeface="맑은 고딕"/>
+              </a:rPr>
+              <a:t>프로필 카드</a:t>
+            </a:r>
+          </a:p>
+        </p:txBody>
+      </p:sp>
+      <p:sp>
+        <p:nvSpPr>
+          <p:cNvPr id="25" name="TextBox 24"/>
+          <p:cNvSpPr txBox="1"/>
+          <p:nvPr/>
+        </p:nvSpPr>
+        <p:spPr>
+          <a:xfrm>
+            <a:off x="4663440" y="3749039"/>
+            <a:ext cx="3108960" cy="411480"/>
+          </a:xfrm>
+          <a:prstGeom prst="rect">
+            <a:avLst/>
+          </a:prstGeom>
+          <a:noFill/>
+        </p:spPr>
+        <p:txBody>
+          <a:bodyPr wrap="square" lIns="0" rIns="0" tIns="0" bIns="0">
+            <a:spAutoFit/>
+          </a:bodyPr>
+          <a:lstStyle/>
+          <a:p>
+            <a:pPr algn="l">
+              <a:lnSpc>
+                <a:spcPct val="125000"/>
+              </a:lnSpc>
+            </a:pPr>
+            <a:r>
+              <a:rPr sz="1300" b="1">
+                <a:solidFill>
+                  <a:srgbClr val="4F46E5"/>
+                </a:solidFill>
+                <a:latin typeface="맑은 고딕"/>
+              </a:rPr>
+              <a:t>후보별 정보를 카드로 시각화</a:t>
+            </a:r>
+          </a:p>
+        </p:txBody>
+      </p:sp>
+      <p:sp>
+        <p:nvSpPr>
+          <p:cNvPr id="26" name="TextBox 25"/>
+          <p:cNvSpPr txBox="1"/>
+          <p:nvPr/>
+        </p:nvSpPr>
+        <p:spPr>
+          <a:xfrm>
+            <a:off x="4663440" y="4297680"/>
+            <a:ext cx="3108960" cy="1280160"/>
+          </a:xfrm>
+          <a:prstGeom prst="rect">
+            <a:avLst/>
+          </a:prstGeom>
+          <a:noFill/>
+        </p:spPr>
+        <p:txBody>
+          <a:bodyPr wrap="square" lIns="0" rIns="0" tIns="0" bIns="0">
+            <a:spAutoFit/>
+          </a:bodyPr>
+          <a:lstStyle/>
+          <a:p>
+            <a:pPr algn="l">
+              <a:lnSpc>
+                <a:spcPct val="155000"/>
+              </a:lnSpc>
+            </a:pPr>
+            <a:r>
+              <a:rPr sz="1400" b="0">
+                <a:solidFill>
+                  <a:srgbClr val="424B5C"/>
+                </a:solidFill>
+                <a:latin typeface="맑은 고딕"/>
+              </a:rPr>
+              <a:t>팀장이 후보 평가할 때</a:t>
+            </a:r>
+          </a:p>
+          <a:p>
+            <a:pPr algn="l">
+              <a:lnSpc>
+                <a:spcPct val="155000"/>
+              </a:lnSpc>
+            </a:pPr>
+            <a:r>
+              <a:rPr sz="1400" b="0">
+                <a:solidFill>
+                  <a:srgbClr val="424B5C"/>
+                </a:solidFill>
+                <a:latin typeface="맑은 고딕"/>
+              </a:rPr>
+              <a:t>역량·시간·관심을 한 화면에 보여준다.</a:t>
+            </a:r>
+          </a:p>
+        </p:txBody>
+      </p:sp>
+      <p:cxnSp>
+        <p:nvCxnSpPr>
+          <p:cNvPr id="27" name="Connector 26"/>
+          <p:cNvCxnSpPr/>
+          <p:nvPr/>
+        </p:nvCxnSpPr>
+        <p:spPr>
+          <a:xfrm>
+            <a:off x="4663440" y="5897880"/>
+            <a:ext cx="3017520" cy="0"/>
+          </a:xfrm>
+          <a:prstGeom prst="line">
+            <a:avLst/>
+          </a:prstGeom>
+          <a:ln w="19050">
+            <a:solidFill>
+              <a:srgbClr val="4F46E5"/>
+            </a:solidFill>
+          </a:ln>
+        </p:spPr>
+        <p:style>
+          <a:lnRef idx="2">
+            <a:schemeClr val="accent1"/>
+          </a:lnRef>
+          <a:fillRef idx="0">
+            <a:schemeClr val="accent1"/>
+          </a:fillRef>
+          <a:effectRef idx="1">
+            <a:schemeClr val="accent1"/>
+          </a:effectRef>
+          <a:fontRef idx="minor">
+            <a:schemeClr val="tx1"/>
+          </a:fontRef>
+        </p:style>
+      </p:cxnSp>
+      <p:sp>
+        <p:nvSpPr>
+          <p:cNvPr id="28" name="TextBox 27"/>
+          <p:cNvSpPr txBox="1"/>
+          <p:nvPr/>
+        </p:nvSpPr>
+        <p:spPr>
+          <a:xfrm>
+            <a:off x="4663440" y="6035040"/>
+            <a:ext cx="914400" cy="320040"/>
+          </a:xfrm>
+          <a:prstGeom prst="rect">
+            <a:avLst/>
+          </a:prstGeom>
+          <a:noFill/>
+        </p:spPr>
+        <p:txBody>
+          <a:bodyPr wrap="square" lIns="0" rIns="0" tIns="0" bIns="0">
+            <a:spAutoFit/>
+          </a:bodyPr>
+          <a:lstStyle/>
+          <a:p>
+            <a:pPr algn="l">
+              <a:lnSpc>
+                <a:spcPct val="125000"/>
+              </a:lnSpc>
+            </a:pPr>
+            <a:r>
+              <a:rPr sz="1000" b="1">
+                <a:solidFill>
+                  <a:srgbClr val="8B95A7"/>
+                </a:solidFill>
+                <a:latin typeface="맑은 고딕"/>
+              </a:rPr>
+              <a:t>근거 이론</a:t>
+            </a:r>
+          </a:p>
+        </p:txBody>
+      </p:sp>
+      <p:sp>
+        <p:nvSpPr>
+          <p:cNvPr id="29" name="TextBox 28"/>
+          <p:cNvSpPr txBox="1"/>
+          <p:nvPr/>
+        </p:nvSpPr>
+        <p:spPr>
+          <a:xfrm>
+            <a:off x="4663440" y="6263640"/>
+            <a:ext cx="3108960" cy="320040"/>
+          </a:xfrm>
+          <a:prstGeom prst="rect">
+            <a:avLst/>
+          </a:prstGeom>
+          <a:noFill/>
+        </p:spPr>
+        <p:txBody>
+          <a:bodyPr wrap="square" lIns="0" rIns="0" tIns="0" bIns="0">
+            <a:spAutoFit/>
+          </a:bodyPr>
+          <a:lstStyle/>
+          <a:p>
+            <a:pPr algn="l">
+              <a:lnSpc>
+                <a:spcPct val="125000"/>
+              </a:lnSpc>
+            </a:pPr>
+            <a:r>
+              <a:rPr sz="1300" b="1">
+                <a:solidFill>
+                  <a:srgbClr val="4F46E5"/>
+                </a:solidFill>
+                <a:latin typeface="맑은 고딕"/>
+              </a:rPr>
+              <a:t>Working Memory 7±2</a:t>
+            </a:r>
+          </a:p>
+        </p:txBody>
+      </p:sp>
+      <p:sp>
+        <p:nvSpPr>
+          <p:cNvPr id="30" name="Rounded Rectangle 29"/>
           <p:cNvSpPr/>
           <p:nvPr/>
         </p:nvSpPr>
         <p:spPr>
           <a:xfrm>
-            <a:off x="4416552" y="3877056"/>
-            <a:ext cx="3566160" cy="2560320"/>
+            <a:off x="8165591" y="2642616"/>
+            <a:ext cx="3566160" cy="4023360"/>
           </a:xfrm>
           <a:prstGeom prst="roundRect">
             <a:avLst>
@@ -16131,14 +16592,14 @@
       </p:sp>
       <p:sp>
         <p:nvSpPr>
-          <p:cNvPr id="20" name="Rounded Rectangle 19"/>
+          <p:cNvPr id="31" name="Rounded Rectangle 30"/>
           <p:cNvSpPr/>
           <p:nvPr/>
         </p:nvSpPr>
         <p:spPr>
           <a:xfrm>
-            <a:off x="4389120" y="3840480"/>
-            <a:ext cx="3566160" cy="2560320"/>
+            <a:off x="8138159" y="2606040"/>
+            <a:ext cx="3566160" cy="4023360"/>
           </a:xfrm>
           <a:prstGeom prst="roundRect">
             <a:avLst>
@@ -16146,11 +16607,11 @@
             </a:avLst>
           </a:prstGeom>
           <a:solidFill>
-            <a:srgbClr val="FAFBFC"/>
+            <a:srgbClr val="FFFFFF"/>
           </a:solidFill>
-          <a:ln w="15240">
+          <a:ln w="19050">
             <a:solidFill>
-              <a:srgbClr val="4F46E5"/>
+              <a:srgbClr val="EC4899"/>
             </a:solidFill>
           </a:ln>
         </p:spPr>
@@ -16178,230 +16639,19 @@
       </p:sp>
       <p:sp>
         <p:nvSpPr>
-          <p:cNvPr id="21" name="TextBox 20"/>
-          <p:cNvSpPr txBox="1"/>
-          <p:nvPr/>
-        </p:nvSpPr>
-        <p:spPr>
-          <a:xfrm>
-            <a:off x="4617720" y="4023360"/>
-            <a:ext cx="3200400" cy="502920"/>
-          </a:xfrm>
-          <a:prstGeom prst="rect">
-            <a:avLst/>
-          </a:prstGeom>
-          <a:noFill/>
-        </p:spPr>
-        <p:txBody>
-          <a:bodyPr wrap="square" lIns="0" rIns="0" tIns="0" bIns="0">
-            <a:spAutoFit/>
-          </a:bodyPr>
-          <a:lstStyle/>
-          <a:p>
-            <a:pPr algn="l">
-              <a:lnSpc>
-                <a:spcPct val="125000"/>
-              </a:lnSpc>
-            </a:pPr>
-            <a:r>
-              <a:rPr sz="2200" b="1">
-                <a:solidFill>
-                  <a:srgbClr val="0F141F"/>
-                </a:solidFill>
-                <a:latin typeface="맑은 고딕"/>
-              </a:rPr>
-              <a:t>프로필 카드</a:t>
-            </a:r>
-          </a:p>
-        </p:txBody>
-      </p:sp>
-      <p:sp>
-        <p:nvSpPr>
-          <p:cNvPr id="22" name="TextBox 21"/>
-          <p:cNvSpPr txBox="1"/>
-          <p:nvPr/>
-        </p:nvSpPr>
-        <p:spPr>
-          <a:xfrm>
-            <a:off x="4617720" y="4572000"/>
-            <a:ext cx="3200400" cy="365760"/>
-          </a:xfrm>
-          <a:prstGeom prst="rect">
-            <a:avLst/>
-          </a:prstGeom>
-          <a:noFill/>
-        </p:spPr>
-        <p:txBody>
-          <a:bodyPr wrap="square" lIns="0" rIns="0" tIns="0" bIns="0">
-            <a:spAutoFit/>
-          </a:bodyPr>
-          <a:lstStyle/>
-          <a:p>
-            <a:pPr algn="l">
-              <a:lnSpc>
-                <a:spcPct val="125000"/>
-              </a:lnSpc>
-            </a:pPr>
-            <a:r>
-              <a:rPr sz="1200" b="1">
-                <a:solidFill>
-                  <a:srgbClr val="4F46E5"/>
-                </a:solidFill>
-                <a:latin typeface="맑은 고딕"/>
-              </a:rPr>
-              <a:t>후보별 정보를 카드로 시각화</a:t>
-            </a:r>
-          </a:p>
-        </p:txBody>
-      </p:sp>
-      <p:sp>
-        <p:nvSpPr>
-          <p:cNvPr id="23" name="TextBox 22"/>
-          <p:cNvSpPr txBox="1"/>
-          <p:nvPr/>
-        </p:nvSpPr>
-        <p:spPr>
-          <a:xfrm>
-            <a:off x="4617720" y="5029200"/>
-            <a:ext cx="3200400" cy="914400"/>
-          </a:xfrm>
-          <a:prstGeom prst="rect">
-            <a:avLst/>
-          </a:prstGeom>
-          <a:noFill/>
-        </p:spPr>
-        <p:txBody>
-          <a:bodyPr wrap="square" lIns="0" rIns="0" tIns="0" bIns="0">
-            <a:spAutoFit/>
-          </a:bodyPr>
-          <a:lstStyle/>
-          <a:p>
-            <a:pPr algn="l">
-              <a:lnSpc>
-                <a:spcPct val="150000"/>
-              </a:lnSpc>
-            </a:pPr>
-            <a:r>
-              <a:rPr sz="1300" b="0">
-                <a:solidFill>
-                  <a:srgbClr val="424B5C"/>
-                </a:solidFill>
-                <a:latin typeface="맑은 고딕"/>
-              </a:rPr>
-              <a:t>팀장이 후보 평가할 때</a:t>
-            </a:r>
-          </a:p>
-          <a:p>
-            <a:pPr algn="l">
-              <a:lnSpc>
-                <a:spcPct val="150000"/>
-              </a:lnSpc>
-            </a:pPr>
-            <a:r>
-              <a:rPr sz="1300" b="0">
-                <a:solidFill>
-                  <a:srgbClr val="424B5C"/>
-                </a:solidFill>
-                <a:latin typeface="맑은 고딕"/>
-              </a:rPr>
-              <a:t>역량·시간·관심을 한 화면에 보여준다.</a:t>
-            </a:r>
-          </a:p>
-        </p:txBody>
-      </p:sp>
-      <p:sp>
-        <p:nvSpPr>
-          <p:cNvPr id="24" name="Rounded Rectangle 23"/>
+          <p:cNvPr id="32" name="Rounded Rectangle 31"/>
           <p:cNvSpPr/>
           <p:nvPr/>
         </p:nvSpPr>
         <p:spPr>
           <a:xfrm>
-            <a:off x="4617720" y="5989320"/>
-            <a:ext cx="3108960" cy="320040"/>
+            <a:off x="8138159" y="2606040"/>
+            <a:ext cx="3566160" cy="960120"/>
           </a:xfrm>
           <a:prstGeom prst="roundRect">
             <a:avLst>
-              <a:gd name="adj" fmla="val 50000"/>
+              <a:gd name="adj" fmla="val 5000"/>
             </a:avLst>
-          </a:prstGeom>
-          <a:solidFill>
-            <a:srgbClr val="4F46E5"/>
-          </a:solidFill>
-          <a:ln>
-            <a:noFill/>
-          </a:ln>
-        </p:spPr>
-        <p:style>
-          <a:lnRef idx="1">
-            <a:schemeClr val="accent1"/>
-          </a:lnRef>
-          <a:fillRef idx="3">
-            <a:schemeClr val="accent1"/>
-          </a:fillRef>
-          <a:effectRef idx="2">
-            <a:schemeClr val="accent1"/>
-          </a:effectRef>
-          <a:fontRef idx="minor">
-            <a:schemeClr val="lt1"/>
-          </a:fontRef>
-        </p:style>
-        <p:txBody>
-          <a:bodyPr rtlCol="0" anchor="ctr"/>
-          <a:lstStyle/>
-          <a:p>
-            <a:pPr algn="ctr"/>
-          </a:p>
-        </p:txBody>
-      </p:sp>
-      <p:sp>
-        <p:nvSpPr>
-          <p:cNvPr id="25" name="TextBox 24"/>
-          <p:cNvSpPr txBox="1"/>
-          <p:nvPr/>
-        </p:nvSpPr>
-        <p:spPr>
-          <a:xfrm>
-            <a:off x="4617720" y="5989320"/>
-            <a:ext cx="3108960" cy="320040"/>
-          </a:xfrm>
-          <a:prstGeom prst="rect">
-            <a:avLst/>
-          </a:prstGeom>
-          <a:noFill/>
-        </p:spPr>
-        <p:txBody>
-          <a:bodyPr wrap="none" lIns="36576" rIns="36576" tIns="0" bIns="0" anchor="ctr">
-            <a:spAutoFit/>
-          </a:bodyPr>
-          <a:lstStyle/>
-          <a:p>
-            <a:pPr algn="ctr"/>
-            <a:r>
-              <a:rPr sz="1000" b="1">
-                <a:solidFill>
-                  <a:srgbClr val="FFFFFF"/>
-                </a:solidFill>
-                <a:latin typeface="맑은 고딕"/>
-              </a:rPr>
-              <a:t>근거: Working Memory 7±2</a:t>
-            </a:r>
-          </a:p>
-        </p:txBody>
-      </p:sp>
-      <p:sp>
-        <p:nvSpPr>
-          <p:cNvPr id="26" name="Oval 25"/>
-          <p:cNvSpPr/>
-          <p:nvPr/>
-        </p:nvSpPr>
-        <p:spPr>
-          <a:xfrm>
-            <a:off x="8321039" y="2697480"/>
-            <a:ext cx="914400" cy="914400"/>
-          </a:xfrm>
-          <a:prstGeom prst="ellipse">
-            <a:avLst/>
           </a:prstGeom>
           <a:solidFill>
             <a:srgbClr val="EC4899"/>
@@ -16434,283 +16684,17 @@
       </p:sp>
       <p:sp>
         <p:nvSpPr>
-          <p:cNvPr id="27" name="TextBox 26"/>
-          <p:cNvSpPr txBox="1"/>
-          <p:nvPr/>
-        </p:nvSpPr>
-        <p:spPr>
-          <a:xfrm>
-            <a:off x="8321039" y="2834640"/>
-            <a:ext cx="914400" cy="640080"/>
-          </a:xfrm>
-          <a:prstGeom prst="rect">
-            <a:avLst/>
-          </a:prstGeom>
-          <a:noFill/>
-        </p:spPr>
-        <p:txBody>
-          <a:bodyPr wrap="square" lIns="0" rIns="0" tIns="0" bIns="0">
-            <a:spAutoFit/>
-          </a:bodyPr>
-          <a:lstStyle/>
-          <a:p>
-            <a:pPr algn="ctr">
-              <a:lnSpc>
-                <a:spcPct val="125000"/>
-              </a:lnSpc>
-            </a:pPr>
-            <a:r>
-              <a:rPr sz="2600" b="1">
-                <a:solidFill>
-                  <a:srgbClr val="FFFFFF"/>
-                </a:solidFill>
-                <a:latin typeface="맑은 고딕"/>
-              </a:rPr>
-              <a:t>03</a:t>
-            </a:r>
-          </a:p>
-        </p:txBody>
-      </p:sp>
-      <p:sp>
-        <p:nvSpPr>
-          <p:cNvPr id="28" name="Rounded Rectangle 27"/>
+          <p:cNvPr id="33" name="Rectangle 32"/>
           <p:cNvSpPr/>
           <p:nvPr/>
         </p:nvSpPr>
         <p:spPr>
           <a:xfrm>
-            <a:off x="8165591" y="3877056"/>
-            <a:ext cx="3566160" cy="2560320"/>
-          </a:xfrm>
-          <a:prstGeom prst="roundRect">
-            <a:avLst>
-              <a:gd name="adj" fmla="val 5000"/>
-            </a:avLst>
-          </a:prstGeom>
-          <a:solidFill>
-            <a:srgbClr val="ECEEF2"/>
-          </a:solidFill>
-          <a:ln>
-            <a:noFill/>
-          </a:ln>
-        </p:spPr>
-        <p:style>
-          <a:lnRef idx="1">
-            <a:schemeClr val="accent1"/>
-          </a:lnRef>
-          <a:fillRef idx="3">
-            <a:schemeClr val="accent1"/>
-          </a:fillRef>
-          <a:effectRef idx="2">
-            <a:schemeClr val="accent1"/>
-          </a:effectRef>
-          <a:fontRef idx="minor">
-            <a:schemeClr val="lt1"/>
-          </a:fontRef>
-        </p:style>
-        <p:txBody>
-          <a:bodyPr rtlCol="0" anchor="ctr"/>
-          <a:lstStyle/>
-          <a:p>
-            <a:pPr algn="ctr"/>
-          </a:p>
-        </p:txBody>
-      </p:sp>
-      <p:sp>
-        <p:nvSpPr>
-          <p:cNvPr id="29" name="Rounded Rectangle 28"/>
-          <p:cNvSpPr/>
-          <p:nvPr/>
-        </p:nvSpPr>
-        <p:spPr>
-          <a:xfrm>
-            <a:off x="8138159" y="3840480"/>
-            <a:ext cx="3566160" cy="2560320"/>
-          </a:xfrm>
-          <a:prstGeom prst="roundRect">
-            <a:avLst>
-              <a:gd name="adj" fmla="val 5000"/>
-            </a:avLst>
-          </a:prstGeom>
-          <a:solidFill>
-            <a:srgbClr val="FAFBFC"/>
-          </a:solidFill>
-          <a:ln w="15240">
-            <a:solidFill>
-              <a:srgbClr val="EC4899"/>
-            </a:solidFill>
-          </a:ln>
-        </p:spPr>
-        <p:style>
-          <a:lnRef idx="1">
-            <a:schemeClr val="accent1"/>
-          </a:lnRef>
-          <a:fillRef idx="3">
-            <a:schemeClr val="accent1"/>
-          </a:fillRef>
-          <a:effectRef idx="2">
-            <a:schemeClr val="accent1"/>
-          </a:effectRef>
-          <a:fontRef idx="minor">
-            <a:schemeClr val="lt1"/>
-          </a:fontRef>
-        </p:style>
-        <p:txBody>
-          <a:bodyPr rtlCol="0" anchor="ctr"/>
-          <a:lstStyle/>
-          <a:p>
-            <a:pPr algn="ctr"/>
-          </a:p>
-        </p:txBody>
-      </p:sp>
-      <p:sp>
-        <p:nvSpPr>
-          <p:cNvPr id="30" name="TextBox 29"/>
-          <p:cNvSpPr txBox="1"/>
-          <p:nvPr/>
-        </p:nvSpPr>
-        <p:spPr>
-          <a:xfrm>
-            <a:off x="8366759" y="4023360"/>
-            <a:ext cx="3200400" cy="502920"/>
-          </a:xfrm>
-          <a:prstGeom prst="rect">
-            <a:avLst/>
-          </a:prstGeom>
-          <a:noFill/>
-        </p:spPr>
-        <p:txBody>
-          <a:bodyPr wrap="square" lIns="0" rIns="0" tIns="0" bIns="0">
-            <a:spAutoFit/>
-          </a:bodyPr>
-          <a:lstStyle/>
-          <a:p>
-            <a:pPr algn="l">
-              <a:lnSpc>
-                <a:spcPct val="125000"/>
-              </a:lnSpc>
-            </a:pPr>
-            <a:r>
-              <a:rPr sz="2200" b="1">
-                <a:solidFill>
-                  <a:srgbClr val="0F141F"/>
-                </a:solidFill>
-                <a:latin typeface="맑은 고딕"/>
-              </a:rPr>
-              <a:t>명확한 가산</a:t>
-            </a:r>
-          </a:p>
-        </p:txBody>
-      </p:sp>
-      <p:sp>
-        <p:nvSpPr>
-          <p:cNvPr id="31" name="TextBox 30"/>
-          <p:cNvSpPr txBox="1"/>
-          <p:nvPr/>
-        </p:nvSpPr>
-        <p:spPr>
-          <a:xfrm>
-            <a:off x="8366759" y="4572000"/>
-            <a:ext cx="3200400" cy="365760"/>
-          </a:xfrm>
-          <a:prstGeom prst="rect">
-            <a:avLst/>
-          </a:prstGeom>
-          <a:noFill/>
-        </p:spPr>
-        <p:txBody>
-          <a:bodyPr wrap="square" lIns="0" rIns="0" tIns="0" bIns="0">
-            <a:spAutoFit/>
-          </a:bodyPr>
-          <a:lstStyle/>
-          <a:p>
-            <a:pPr algn="l">
-              <a:lnSpc>
-                <a:spcPct val="125000"/>
-              </a:lnSpc>
-            </a:pPr>
-            <a:r>
-              <a:rPr sz="1200" b="1">
-                <a:solidFill>
-                  <a:srgbClr val="EC4899"/>
-                </a:solidFill>
-                <a:latin typeface="맑은 고딕"/>
-              </a:rPr>
-              <a:t>모호한 감점 → +10 가산만</a:t>
-            </a:r>
-          </a:p>
-        </p:txBody>
-      </p:sp>
-      <p:sp>
-        <p:nvSpPr>
-          <p:cNvPr id="32" name="TextBox 31"/>
-          <p:cNvSpPr txBox="1"/>
-          <p:nvPr/>
-        </p:nvSpPr>
-        <p:spPr>
-          <a:xfrm>
-            <a:off x="8366759" y="5029200"/>
-            <a:ext cx="3200400" cy="914400"/>
-          </a:xfrm>
-          <a:prstGeom prst="rect">
-            <a:avLst/>
-          </a:prstGeom>
-          <a:noFill/>
-        </p:spPr>
-        <p:txBody>
-          <a:bodyPr wrap="square" lIns="0" rIns="0" tIns="0" bIns="0">
-            <a:spAutoFit/>
-          </a:bodyPr>
-          <a:lstStyle/>
-          <a:p>
-            <a:pPr algn="l">
-              <a:lnSpc>
-                <a:spcPct val="150000"/>
-              </a:lnSpc>
-            </a:pPr>
-            <a:r>
-              <a:rPr sz="1300" b="0">
-                <a:solidFill>
-                  <a:srgbClr val="424B5C"/>
-                </a:solidFill>
-                <a:latin typeface="맑은 고딕"/>
-              </a:rPr>
-              <a:t>기준이 모호한 "감점" 표현 대신</a:t>
-            </a:r>
-          </a:p>
-          <a:p>
-            <a:pPr algn="l">
-              <a:lnSpc>
-                <a:spcPct val="150000"/>
-              </a:lnSpc>
-            </a:pPr>
-            <a:r>
-              <a:rPr sz="1300" b="0">
-                <a:solidFill>
-                  <a:srgbClr val="424B5C"/>
-                </a:solidFill>
-                <a:latin typeface="맑은 고딕"/>
-              </a:rPr>
-              <a:t>명확한 +10 가산만 사용한다.</a:t>
-            </a:r>
-          </a:p>
-        </p:txBody>
-      </p:sp>
-      <p:sp>
-        <p:nvSpPr>
-          <p:cNvPr id="33" name="Rounded Rectangle 32"/>
-          <p:cNvSpPr/>
-          <p:nvPr/>
-        </p:nvSpPr>
-        <p:spPr>
-          <a:xfrm>
-            <a:off x="8366759" y="5989320"/>
-            <a:ext cx="3108960" cy="320040"/>
-          </a:xfrm>
-          <a:prstGeom prst="roundRect">
-            <a:avLst>
-              <a:gd name="adj" fmla="val 50000"/>
-            </a:avLst>
+            <a:off x="8138159" y="3154680"/>
+            <a:ext cx="3566160" cy="411480"/>
+          </a:xfrm>
+          <a:prstGeom prst="rect">
+            <a:avLst/>
           </a:prstGeom>
           <a:solidFill>
             <a:srgbClr val="EC4899"/>
@@ -16749,7 +16733,253 @@
         </p:nvSpPr>
         <p:spPr>
           <a:xfrm>
-            <a:off x="8366759" y="5989320"/>
+            <a:off x="8412480" y="2788920"/>
+            <a:ext cx="914400" cy="365760"/>
+          </a:xfrm>
+          <a:prstGeom prst="rect">
+            <a:avLst/>
+          </a:prstGeom>
+          <a:noFill/>
+        </p:spPr>
+        <p:txBody>
+          <a:bodyPr wrap="square" lIns="0" rIns="0" tIns="0" bIns="0">
+            <a:spAutoFit/>
+          </a:bodyPr>
+          <a:lstStyle/>
+          <a:p>
+            <a:pPr algn="l">
+              <a:lnSpc>
+                <a:spcPct val="125000"/>
+              </a:lnSpc>
+            </a:pPr>
+            <a:r>
+              <a:rPr sz="1400" b="1">
+                <a:solidFill>
+                  <a:srgbClr val="FFFFFF"/>
+                </a:solidFill>
+                <a:latin typeface="맑은 고딕"/>
+              </a:rPr>
+              <a:t>03</a:t>
+            </a:r>
+          </a:p>
+        </p:txBody>
+      </p:sp>
+      <p:sp>
+        <p:nvSpPr>
+          <p:cNvPr id="35" name="TextBox 34"/>
+          <p:cNvSpPr txBox="1"/>
+          <p:nvPr/>
+        </p:nvSpPr>
+        <p:spPr>
+          <a:xfrm>
+            <a:off x="8412480" y="3017520"/>
+            <a:ext cx="3108960" cy="502920"/>
+          </a:xfrm>
+          <a:prstGeom prst="rect">
+            <a:avLst/>
+          </a:prstGeom>
+          <a:noFill/>
+        </p:spPr>
+        <p:txBody>
+          <a:bodyPr wrap="square" lIns="0" rIns="0" tIns="0" bIns="0">
+            <a:spAutoFit/>
+          </a:bodyPr>
+          <a:lstStyle/>
+          <a:p>
+            <a:pPr algn="l">
+              <a:lnSpc>
+                <a:spcPct val="125000"/>
+              </a:lnSpc>
+            </a:pPr>
+            <a:r>
+              <a:rPr sz="2200" b="1">
+                <a:solidFill>
+                  <a:srgbClr val="FFFFFF"/>
+                </a:solidFill>
+                <a:latin typeface="맑은 고딕"/>
+              </a:rPr>
+              <a:t>명확한 가산</a:t>
+            </a:r>
+          </a:p>
+        </p:txBody>
+      </p:sp>
+      <p:sp>
+        <p:nvSpPr>
+          <p:cNvPr id="36" name="TextBox 35"/>
+          <p:cNvSpPr txBox="1"/>
+          <p:nvPr/>
+        </p:nvSpPr>
+        <p:spPr>
+          <a:xfrm>
+            <a:off x="8412480" y="3749039"/>
+            <a:ext cx="3108960" cy="411480"/>
+          </a:xfrm>
+          <a:prstGeom prst="rect">
+            <a:avLst/>
+          </a:prstGeom>
+          <a:noFill/>
+        </p:spPr>
+        <p:txBody>
+          <a:bodyPr wrap="square" lIns="0" rIns="0" tIns="0" bIns="0">
+            <a:spAutoFit/>
+          </a:bodyPr>
+          <a:lstStyle/>
+          <a:p>
+            <a:pPr algn="l">
+              <a:lnSpc>
+                <a:spcPct val="125000"/>
+              </a:lnSpc>
+            </a:pPr>
+            <a:r>
+              <a:rPr sz="1300" b="1">
+                <a:solidFill>
+                  <a:srgbClr val="EC4899"/>
+                </a:solidFill>
+                <a:latin typeface="맑은 고딕"/>
+              </a:rPr>
+              <a:t>모호한 감점 → +10 가산만</a:t>
+            </a:r>
+          </a:p>
+        </p:txBody>
+      </p:sp>
+      <p:sp>
+        <p:nvSpPr>
+          <p:cNvPr id="37" name="TextBox 36"/>
+          <p:cNvSpPr txBox="1"/>
+          <p:nvPr/>
+        </p:nvSpPr>
+        <p:spPr>
+          <a:xfrm>
+            <a:off x="8412480" y="4297680"/>
+            <a:ext cx="3108960" cy="1280160"/>
+          </a:xfrm>
+          <a:prstGeom prst="rect">
+            <a:avLst/>
+          </a:prstGeom>
+          <a:noFill/>
+        </p:spPr>
+        <p:txBody>
+          <a:bodyPr wrap="square" lIns="0" rIns="0" tIns="0" bIns="0">
+            <a:spAutoFit/>
+          </a:bodyPr>
+          <a:lstStyle/>
+          <a:p>
+            <a:pPr algn="l">
+              <a:lnSpc>
+                <a:spcPct val="155000"/>
+              </a:lnSpc>
+            </a:pPr>
+            <a:r>
+              <a:rPr sz="1400" b="0">
+                <a:solidFill>
+                  <a:srgbClr val="424B5C"/>
+                </a:solidFill>
+                <a:latin typeface="맑은 고딕"/>
+              </a:rPr>
+              <a:t>기준이 모호한 "감점" 표현 대신</a:t>
+            </a:r>
+          </a:p>
+          <a:p>
+            <a:pPr algn="l">
+              <a:lnSpc>
+                <a:spcPct val="155000"/>
+              </a:lnSpc>
+            </a:pPr>
+            <a:r>
+              <a:rPr sz="1400" b="0">
+                <a:solidFill>
+                  <a:srgbClr val="424B5C"/>
+                </a:solidFill>
+                <a:latin typeface="맑은 고딕"/>
+              </a:rPr>
+              <a:t>명확한 +10 가산만 사용한다.</a:t>
+            </a:r>
+          </a:p>
+        </p:txBody>
+      </p:sp>
+      <p:cxnSp>
+        <p:nvCxnSpPr>
+          <p:cNvPr id="38" name="Connector 37"/>
+          <p:cNvCxnSpPr/>
+          <p:nvPr/>
+        </p:nvCxnSpPr>
+        <p:spPr>
+          <a:xfrm>
+            <a:off x="8412480" y="5897880"/>
+            <a:ext cx="3017519" cy="0"/>
+          </a:xfrm>
+          <a:prstGeom prst="line">
+            <a:avLst/>
+          </a:prstGeom>
+          <a:ln w="19050">
+            <a:solidFill>
+              <a:srgbClr val="EC4899"/>
+            </a:solidFill>
+          </a:ln>
+        </p:spPr>
+        <p:style>
+          <a:lnRef idx="2">
+            <a:schemeClr val="accent1"/>
+          </a:lnRef>
+          <a:fillRef idx="0">
+            <a:schemeClr val="accent1"/>
+          </a:fillRef>
+          <a:effectRef idx="1">
+            <a:schemeClr val="accent1"/>
+          </a:effectRef>
+          <a:fontRef idx="minor">
+            <a:schemeClr val="tx1"/>
+          </a:fontRef>
+        </p:style>
+      </p:cxnSp>
+      <p:sp>
+        <p:nvSpPr>
+          <p:cNvPr id="39" name="TextBox 38"/>
+          <p:cNvSpPr txBox="1"/>
+          <p:nvPr/>
+        </p:nvSpPr>
+        <p:spPr>
+          <a:xfrm>
+            <a:off x="8412480" y="6035040"/>
+            <a:ext cx="914400" cy="320040"/>
+          </a:xfrm>
+          <a:prstGeom prst="rect">
+            <a:avLst/>
+          </a:prstGeom>
+          <a:noFill/>
+        </p:spPr>
+        <p:txBody>
+          <a:bodyPr wrap="square" lIns="0" rIns="0" tIns="0" bIns="0">
+            <a:spAutoFit/>
+          </a:bodyPr>
+          <a:lstStyle/>
+          <a:p>
+            <a:pPr algn="l">
+              <a:lnSpc>
+                <a:spcPct val="125000"/>
+              </a:lnSpc>
+            </a:pPr>
+            <a:r>
+              <a:rPr sz="1000" b="1">
+                <a:solidFill>
+                  <a:srgbClr val="8B95A7"/>
+                </a:solidFill>
+                <a:latin typeface="맑은 고딕"/>
+              </a:rPr>
+              <a:t>근거 이론</a:t>
+            </a:r>
+          </a:p>
+        </p:txBody>
+      </p:sp>
+      <p:sp>
+        <p:nvSpPr>
+          <p:cNvPr id="40" name="TextBox 39"/>
+          <p:cNvSpPr txBox="1"/>
+          <p:nvPr/>
+        </p:nvSpPr>
+        <p:spPr>
+          <a:xfrm>
+            <a:off x="8412480" y="6263640"/>
             <a:ext cx="3108960" cy="320040"/>
           </a:xfrm>
           <a:prstGeom prst="rect">
@@ -16758,33 +16988,37 @@
           <a:noFill/>
         </p:spPr>
         <p:txBody>
-          <a:bodyPr wrap="none" lIns="36576" rIns="36576" tIns="0" bIns="0" anchor="ctr">
-            <a:spAutoFit/>
-          </a:bodyPr>
-          <a:lstStyle/>
-          <a:p>
-            <a:pPr algn="ctr"/>
-            <a:r>
-              <a:rPr sz="1000" b="1">
-                <a:solidFill>
-                  <a:srgbClr val="FFFFFF"/>
-                </a:solidFill>
-                <a:latin typeface="맑은 고딕"/>
-              </a:rPr>
-              <a:t>근거: Framing Effect</a:t>
-            </a:r>
-          </a:p>
-        </p:txBody>
-      </p:sp>
-      <p:sp>
-        <p:nvSpPr>
-          <p:cNvPr id="35" name="TextBox 34"/>
-          <p:cNvSpPr txBox="1"/>
-          <p:nvPr/>
-        </p:nvSpPr>
-        <p:spPr>
-          <a:xfrm>
-            <a:off x="640080" y="6583680"/>
+          <a:bodyPr wrap="square" lIns="0" rIns="0" tIns="0" bIns="0">
+            <a:spAutoFit/>
+          </a:bodyPr>
+          <a:lstStyle/>
+          <a:p>
+            <a:pPr algn="l">
+              <a:lnSpc>
+                <a:spcPct val="125000"/>
+              </a:lnSpc>
+            </a:pPr>
+            <a:r>
+              <a:rPr sz="1300" b="1">
+                <a:solidFill>
+                  <a:srgbClr val="EC4899"/>
+                </a:solidFill>
+                <a:latin typeface="맑은 고딕"/>
+              </a:rPr>
+              <a:t>Framing Effect</a:t>
+            </a:r>
+          </a:p>
+        </p:txBody>
+      </p:sp>
+      <p:sp>
+        <p:nvSpPr>
+          <p:cNvPr id="41" name="TextBox 40"/>
+          <p:cNvSpPr txBox="1"/>
+          <p:nvPr/>
+        </p:nvSpPr>
+        <p:spPr>
+          <a:xfrm>
+            <a:off x="640080" y="6766560"/>
             <a:ext cx="10972800" cy="274320"/>
           </a:xfrm>
           <a:prstGeom prst="rect">
@@ -16810,7 +17044,7 @@
                 </a:solidFill>
                 <a:latin typeface="맑은 고딕"/>
               </a:rPr>
-              <a:t>T1 설문은 인식 변화, T2 시뮬은 약한 학생 보호 효과를 각각 검증</a:t>
+              <a:t>T1 설문은 인식 변화, T2 시뮬은 약한 학생 보호 효과를 검증</a:t>
             </a:r>
           </a:p>
         </p:txBody>

--- a/team_project/kickoff_2026-05-11.pptx
+++ b/team_project/kickoff_2026-05-11.pptx
@@ -28419,7 +28419,7 @@
         </p:nvSpPr>
         <p:spPr>
           <a:xfrm>
-            <a:off x="6492240" y="2651760"/>
+            <a:off x="6492240" y="2697480"/>
             <a:ext cx="4572000" cy="365760"/>
           </a:xfrm>
           <a:prstGeom prst="rect">
@@ -28439,13 +28439,13 @@
               </a:lnSpc>
             </a:pPr>
             <a:r>
-              <a:rPr sz="1100" b="1">
+              <a:rPr sz="1300" b="1">
                 <a:solidFill>
                   <a:srgbClr val="10B981"/>
                 </a:solidFill>
                 <a:latin typeface="맑은 고딕"/>
               </a:rPr>
-              <a:t>강의계획서의 실제 효과</a:t>
+              <a:t>강의계획서가 만드는 효과</a:t>
             </a:r>
           </a:p>
         </p:txBody>
@@ -28458,33 +28458,33 @@
         </p:nvSpPr>
         <p:spPr>
           <a:xfrm>
-            <a:off x="6492240" y="3017520"/>
-            <a:ext cx="4846320" cy="502920"/>
-          </a:xfrm>
-          <a:prstGeom prst="rect">
-            <a:avLst/>
-          </a:prstGeom>
-          <a:noFill/>
-        </p:spPr>
-        <p:txBody>
-          <a:bodyPr wrap="square" lIns="0" rIns="0" tIns="0" bIns="0">
-            <a:spAutoFit/>
-          </a:bodyPr>
-          <a:lstStyle/>
-          <a:p>
-            <a:pPr algn="l">
-              <a:lnSpc>
-                <a:spcPct val="125000"/>
-              </a:lnSpc>
-            </a:pPr>
-            <a:r>
-              <a:rPr sz="1400" b="1">
+            <a:off x="6492240" y="3154680"/>
+            <a:ext cx="4846320" cy="548640"/>
+          </a:xfrm>
+          <a:prstGeom prst="rect">
+            <a:avLst/>
+          </a:prstGeom>
+          <a:noFill/>
+        </p:spPr>
+        <p:txBody>
+          <a:bodyPr wrap="square" lIns="0" rIns="0" tIns="0" bIns="0">
+            <a:spAutoFit/>
+          </a:bodyPr>
+          <a:lstStyle/>
+          <a:p>
+            <a:pPr algn="l">
+              <a:lnSpc>
+                <a:spcPct val="125000"/>
+              </a:lnSpc>
+            </a:pPr>
+            <a:r>
+              <a:rPr sz="1800" b="1">
                 <a:solidFill>
                   <a:srgbClr val="0F141F"/>
                 </a:solidFill>
                 <a:latin typeface="맑은 고딕"/>
               </a:rPr>
-              <a:t>"출석 예정일 외에도 임의로 체크"</a:t>
+              <a:t>"임의로 출석 체크"</a:t>
             </a:r>
           </a:p>
         </p:txBody>
@@ -28497,65 +28497,65 @@
         </p:nvSpPr>
         <p:spPr>
           <a:xfrm>
-            <a:off x="6492240" y="3657600"/>
-            <a:ext cx="4846320" cy="1097280"/>
-          </a:xfrm>
-          <a:prstGeom prst="rect">
-            <a:avLst/>
-          </a:prstGeom>
-          <a:noFill/>
-        </p:spPr>
-        <p:txBody>
-          <a:bodyPr wrap="square" lIns="0" rIns="0" tIns="0" bIns="0">
-            <a:spAutoFit/>
-          </a:bodyPr>
-          <a:lstStyle/>
-          <a:p>
-            <a:pPr algn="l">
-              <a:lnSpc>
-                <a:spcPct val="140000"/>
-              </a:lnSpc>
-            </a:pPr>
-            <a:r>
-              <a:rPr sz="1100" b="0">
+            <a:off x="6492240" y="3840480"/>
+            <a:ext cx="4846320" cy="1371600"/>
+          </a:xfrm>
+          <a:prstGeom prst="rect">
+            <a:avLst/>
+          </a:prstGeom>
+          <a:noFill/>
+        </p:spPr>
+        <p:txBody>
+          <a:bodyPr wrap="square" lIns="0" rIns="0" tIns="0" bIns="0">
+            <a:spAutoFit/>
+          </a:bodyPr>
+          <a:lstStyle/>
+          <a:p>
+            <a:pPr algn="l">
+              <a:lnSpc>
+                <a:spcPct val="145000"/>
+              </a:lnSpc>
+            </a:pPr>
+            <a:r>
+              <a:rPr sz="1400" b="0">
                 <a:solidFill>
                   <a:srgbClr val="424B5C"/>
                 </a:solidFill>
                 <a:latin typeface="맑은 고딕"/>
               </a:rPr>
-              <a:t>학생은 "오늘 안 가면 잡힐까" 알 수 없다.</a:t>
-            </a:r>
-          </a:p>
-          <a:p>
-            <a:pPr algn="l">
-              <a:lnSpc>
-                <a:spcPct val="140000"/>
-              </a:lnSpc>
-            </a:pPr>
-            <a:r>
-              <a:rPr sz="1100" b="0">
+              <a:t>오늘 안 가면 잡힐지 학생은 모른다.</a:t>
+            </a:r>
+          </a:p>
+          <a:p>
+            <a:pPr algn="l">
+              <a:lnSpc>
+                <a:spcPct val="145000"/>
+              </a:lnSpc>
+            </a:pPr>
+            <a:r>
+              <a:rPr sz="1400" b="0">
                 <a:solidFill>
                   <a:srgbClr val="424B5C"/>
                 </a:solidFill>
                 <a:latin typeface="맑은 고딕"/>
               </a:rPr>
-              <a:t>슬롯머신과 같은 원리로 매일 출석하게 된다.</a:t>
-            </a:r>
-          </a:p>
-          <a:p>
-            <a:pPr algn="l">
-              <a:lnSpc>
-                <a:spcPct val="140000"/>
-              </a:lnSpc>
-            </a:pPr>
-            <a:r>
-              <a:rPr sz="1100" b="0">
+              <a:t>슬롯머신과 같은 원리로 매일 출석한다.</a:t>
+            </a:r>
+          </a:p>
+          <a:p>
+            <a:pPr algn="l">
+              <a:lnSpc>
+                <a:spcPct val="145000"/>
+              </a:lnSpc>
+            </a:pPr>
+            <a:r>
+              <a:rPr sz="1400" b="0">
                 <a:solidFill>
                   <a:srgbClr val="424B5C"/>
                 </a:solidFill>
                 <a:latin typeface="맑은 고딕"/>
               </a:rPr>
-              <a:t>행동이 굳어져 한 학기 내내 유지된다.</a:t>
+              <a:t>학기 내내 같은 행동이 이어진다.</a:t>
             </a:r>
           </a:p>
         </p:txBody>
@@ -28568,7 +28568,7 @@
         </p:nvCxnSpPr>
         <p:spPr>
           <a:xfrm>
-            <a:off x="6492240" y="5074920"/>
+            <a:off x="6492240" y="5349240"/>
             <a:ext cx="4846320" cy="0"/>
           </a:xfrm>
           <a:prstGeom prst="line">
@@ -28603,33 +28603,33 @@
         </p:nvSpPr>
         <p:spPr>
           <a:xfrm>
-            <a:off x="6492240" y="5166360"/>
-            <a:ext cx="4572000" cy="320040"/>
-          </a:xfrm>
-          <a:prstGeom prst="rect">
-            <a:avLst/>
-          </a:prstGeom>
-          <a:noFill/>
-        </p:spPr>
-        <p:txBody>
-          <a:bodyPr wrap="square" lIns="0" rIns="0" tIns="0" bIns="0">
-            <a:spAutoFit/>
-          </a:bodyPr>
-          <a:lstStyle/>
-          <a:p>
-            <a:pPr algn="l">
-              <a:lnSpc>
-                <a:spcPct val="125000"/>
-              </a:lnSpc>
-            </a:pPr>
-            <a:r>
-              <a:rPr sz="1000" b="1">
+            <a:off x="6492240" y="5440680"/>
+            <a:ext cx="4572000" cy="365760"/>
+          </a:xfrm>
+          <a:prstGeom prst="rect">
+            <a:avLst/>
+          </a:prstGeom>
+          <a:noFill/>
+        </p:spPr>
+        <p:txBody>
+          <a:bodyPr wrap="square" lIns="0" rIns="0" tIns="0" bIns="0">
+            <a:spAutoFit/>
+          </a:bodyPr>
+          <a:lstStyle/>
+          <a:p>
+            <a:pPr algn="l">
+              <a:lnSpc>
+                <a:spcPct val="125000"/>
+              </a:lnSpc>
+            </a:pPr>
+            <a:r>
+              <a:rPr sz="1200" b="1">
                 <a:solidFill>
                   <a:srgbClr val="10B981"/>
                 </a:solidFill>
                 <a:latin typeface="맑은 고딕"/>
               </a:rPr>
-              <a:t>시뮬레이션 결과</a:t>
+              <a:t>시뮬레이션 예측</a:t>
             </a:r>
           </a:p>
         </p:txBody>
@@ -28637,45 +28637,6 @@
       <p:sp>
         <p:nvSpPr>
           <p:cNvPr id="28" name="TextBox 27"/>
-          <p:cNvSpPr txBox="1"/>
-          <p:nvPr/>
-        </p:nvSpPr>
-        <p:spPr>
-          <a:xfrm>
-            <a:off x="6492240" y="5486400"/>
-            <a:ext cx="4846320" cy="365760"/>
-          </a:xfrm>
-          <a:prstGeom prst="rect">
-            <a:avLst/>
-          </a:prstGeom>
-          <a:noFill/>
-        </p:spPr>
-        <p:txBody>
-          <a:bodyPr wrap="square" lIns="0" rIns="0" tIns="0" bIns="0">
-            <a:spAutoFit/>
-          </a:bodyPr>
-          <a:lstStyle/>
-          <a:p>
-            <a:pPr algn="l">
-              <a:lnSpc>
-                <a:spcPct val="125000"/>
-              </a:lnSpc>
-            </a:pPr>
-            <a:r>
-              <a:rPr sz="1100" b="0">
-                <a:solidFill>
-                  <a:srgbClr val="424B5C"/>
-                </a:solidFill>
-                <a:latin typeface="맑은 고딕"/>
-              </a:rPr>
-              <a:t>월요일만 체크하면 출석률 6.7%</a:t>
-            </a:r>
-          </a:p>
-        </p:txBody>
-      </p:sp>
-      <p:sp>
-        <p:nvSpPr>
-          <p:cNvPr id="29" name="TextBox 28"/>
           <p:cNvSpPr txBox="1"/>
           <p:nvPr/>
         </p:nvSpPr>
@@ -28701,93 +28662,52 @@
               </a:lnSpc>
             </a:pPr>
             <a:r>
-              <a:rPr sz="1200" b="1">
+              <a:rPr sz="1400" b="0">
+                <a:solidFill>
+                  <a:srgbClr val="424B5C"/>
+                </a:solidFill>
+                <a:latin typeface="맑은 고딕"/>
+              </a:rPr>
+              <a:t>고정 일정: 출석률 6.7%</a:t>
+            </a:r>
+          </a:p>
+        </p:txBody>
+      </p:sp>
+      <p:sp>
+        <p:nvSpPr>
+          <p:cNvPr id="29" name="TextBox 28"/>
+          <p:cNvSpPr txBox="1"/>
+          <p:nvPr/>
+        </p:nvSpPr>
+        <p:spPr>
+          <a:xfrm>
+            <a:off x="6492240" y="6263640"/>
+            <a:ext cx="4846320" cy="365760"/>
+          </a:xfrm>
+          <a:prstGeom prst="rect">
+            <a:avLst/>
+          </a:prstGeom>
+          <a:noFill/>
+        </p:spPr>
+        <p:txBody>
+          <a:bodyPr wrap="square" lIns="0" rIns="0" tIns="0" bIns="0">
+            <a:spAutoFit/>
+          </a:bodyPr>
+          <a:lstStyle/>
+          <a:p>
+            <a:pPr algn="l">
+              <a:lnSpc>
+                <a:spcPct val="125000"/>
+              </a:lnSpc>
+            </a:pPr>
+            <a:r>
+              <a:rPr sz="1600" b="1">
                 <a:solidFill>
                   <a:srgbClr val="0F141F"/>
                 </a:solidFill>
                 <a:latin typeface="맑은 고딕"/>
               </a:rPr>
-              <a:t>랜덤+비공개로 하면 20% (3배 ↑)</a:t>
-            </a:r>
-          </a:p>
-        </p:txBody>
-      </p:sp>
-      <p:sp>
-        <p:nvSpPr>
-          <p:cNvPr id="30" name="Rounded Rectangle 29"/>
-          <p:cNvSpPr/>
-          <p:nvPr/>
-        </p:nvSpPr>
-        <p:spPr>
-          <a:xfrm>
-            <a:off x="6492240" y="6263640"/>
-            <a:ext cx="1828800" cy="365760"/>
-          </a:xfrm>
-          <a:prstGeom prst="roundRect">
-            <a:avLst>
-              <a:gd name="adj" fmla="val 50000"/>
-            </a:avLst>
-          </a:prstGeom>
-          <a:solidFill>
-            <a:srgbClr val="10B981"/>
-          </a:solidFill>
-          <a:ln>
-            <a:noFill/>
-          </a:ln>
-        </p:spPr>
-        <p:style>
-          <a:lnRef idx="1">
-            <a:schemeClr val="accent1"/>
-          </a:lnRef>
-          <a:fillRef idx="3">
-            <a:schemeClr val="accent1"/>
-          </a:fillRef>
-          <a:effectRef idx="2">
-            <a:schemeClr val="accent1"/>
-          </a:effectRef>
-          <a:fontRef idx="minor">
-            <a:schemeClr val="lt1"/>
-          </a:fontRef>
-        </p:style>
-        <p:txBody>
-          <a:bodyPr rtlCol="0" anchor="ctr"/>
-          <a:lstStyle/>
-          <a:p>
-            <a:pPr algn="ctr"/>
-          </a:p>
-        </p:txBody>
-      </p:sp>
-      <p:sp>
-        <p:nvSpPr>
-          <p:cNvPr id="31" name="TextBox 30"/>
-          <p:cNvSpPr txBox="1"/>
-          <p:nvPr/>
-        </p:nvSpPr>
-        <p:spPr>
-          <a:xfrm>
-            <a:off x="6492240" y="6263640"/>
-            <a:ext cx="1828800" cy="365760"/>
-          </a:xfrm>
-          <a:prstGeom prst="rect">
-            <a:avLst/>
-          </a:prstGeom>
-          <a:noFill/>
-        </p:spPr>
-        <p:txBody>
-          <a:bodyPr wrap="none" lIns="36576" rIns="36576" tIns="0" bIns="0" anchor="ctr">
-            <a:spAutoFit/>
-          </a:bodyPr>
-          <a:lstStyle/>
-          <a:p>
-            <a:pPr algn="ctr"/>
-            <a:r>
-              <a:rPr sz="1000" b="1">
-                <a:solidFill>
-                  <a:srgbClr val="FFFFFF"/>
-                </a:solidFill>
-                <a:latin typeface="맑은 고딕"/>
-              </a:rPr>
-              <a:t>검증할 값</a:t>
+              <a:t>랜덤+비공개: 20% (3배)</a:t>
             </a:r>
           </a:p>
         </p:txBody>

--- a/team_project/kickoff_2026-05-11.pptx
+++ b/team_project/kickoff_2026-05-11.pptx
@@ -3435,7 +3435,7 @@
               </a:lnSpc>
             </a:pPr>
             <a:r>
-              <a:rPr sz="1100" b="0">
+              <a:rPr sz="1200" b="0">
                 <a:solidFill>
                   <a:srgbClr val="8B95A7"/>
                 </a:solidFill>
@@ -3474,7 +3474,7 @@
               </a:lnSpc>
             </a:pPr>
             <a:r>
-              <a:rPr sz="1100" b="0">
+              <a:rPr sz="1200" b="0">
                 <a:solidFill>
                   <a:srgbClr val="8B95A7"/>
                 </a:solidFill>
@@ -3554,27 +3554,27 @@
         </p:nvSpPr>
         <p:spPr>
           <a:xfrm>
-            <a:off x="640080" y="502920"/>
-            <a:ext cx="10972800" cy="320040"/>
-          </a:xfrm>
-          <a:prstGeom prst="rect">
-            <a:avLst/>
-          </a:prstGeom>
-          <a:noFill/>
-        </p:spPr>
-        <p:txBody>
-          <a:bodyPr wrap="square" lIns="0" rIns="0" tIns="0" bIns="0">
-            <a:spAutoFit/>
-          </a:bodyPr>
-          <a:lstStyle/>
-          <a:p>
-            <a:pPr algn="l">
-              <a:lnSpc>
-                <a:spcPct val="125000"/>
-              </a:lnSpc>
-            </a:pPr>
-            <a:r>
-              <a:rPr sz="1100" b="1">
+            <a:off x="640080" y="457200"/>
+            <a:ext cx="10972800" cy="365760"/>
+          </a:xfrm>
+          <a:prstGeom prst="rect">
+            <a:avLst/>
+          </a:prstGeom>
+          <a:noFill/>
+        </p:spPr>
+        <p:txBody>
+          <a:bodyPr wrap="square" lIns="0" rIns="0" tIns="0" bIns="0">
+            <a:spAutoFit/>
+          </a:bodyPr>
+          <a:lstStyle/>
+          <a:p>
+            <a:pPr algn="l">
+              <a:lnSpc>
+                <a:spcPct val="125000"/>
+              </a:lnSpc>
+            </a:pPr>
+            <a:r>
+              <a:rPr sz="1200" b="1">
                 <a:solidFill>
                   <a:srgbClr val="4F46E5"/>
                 </a:solidFill>
@@ -3593,27 +3593,27 @@
         </p:nvSpPr>
         <p:spPr>
           <a:xfrm>
-            <a:off x="640080" y="868680"/>
-            <a:ext cx="10972800" cy="822960"/>
-          </a:xfrm>
-          <a:prstGeom prst="rect">
-            <a:avLst/>
-          </a:prstGeom>
-          <a:noFill/>
-        </p:spPr>
-        <p:txBody>
-          <a:bodyPr wrap="square" lIns="0" rIns="0" tIns="0" bIns="0">
-            <a:spAutoFit/>
-          </a:bodyPr>
-          <a:lstStyle/>
-          <a:p>
-            <a:pPr algn="l">
-              <a:lnSpc>
-                <a:spcPct val="125000"/>
-              </a:lnSpc>
-            </a:pPr>
-            <a:r>
-              <a:rPr sz="2800" b="1">
+            <a:off x="640080" y="822960"/>
+            <a:ext cx="10972800" cy="914400"/>
+          </a:xfrm>
+          <a:prstGeom prst="rect">
+            <a:avLst/>
+          </a:prstGeom>
+          <a:noFill/>
+        </p:spPr>
+        <p:txBody>
+          <a:bodyPr wrap="square" lIns="0" rIns="0" tIns="0" bIns="0">
+            <a:spAutoFit/>
+          </a:bodyPr>
+          <a:lstStyle/>
+          <a:p>
+            <a:pPr algn="l">
+              <a:lnSpc>
+                <a:spcPct val="125000"/>
+              </a:lnSpc>
+            </a:pPr>
+            <a:r>
+              <a:rPr sz="3200" b="1">
                 <a:solidFill>
                   <a:srgbClr val="0F141F"/>
                 </a:solidFill>
@@ -3632,7 +3632,7 @@
         </p:nvCxnSpPr>
         <p:spPr>
           <a:xfrm>
-            <a:off x="640080" y="1783080"/>
+            <a:off x="640080" y="1828800"/>
             <a:ext cx="10881360" cy="0"/>
           </a:xfrm>
           <a:prstGeom prst="line">
@@ -3687,7 +3687,7 @@
               </a:lnSpc>
             </a:pPr>
             <a:r>
-              <a:rPr sz="900" b="0">
+              <a:rPr sz="1100" b="0">
                 <a:solidFill>
                   <a:srgbClr val="8B95A7"/>
                 </a:solidFill>
@@ -4134,7 +4134,7 @@
               </a:lnSpc>
             </a:pPr>
             <a:r>
-              <a:rPr sz="1100" b="0">
+              <a:rPr sz="1300" b="0">
                 <a:solidFill>
                   <a:srgbClr val="424B5C"/>
                 </a:solidFill>
@@ -4150,7 +4150,7 @@
               </a:lnSpc>
             </a:pPr>
             <a:r>
-              <a:rPr sz="1100" b="0">
+              <a:rPr sz="1300" b="0">
                 <a:solidFill>
                   <a:srgbClr val="424B5C"/>
                 </a:solidFill>
@@ -4402,7 +4402,7 @@
               </a:lnSpc>
             </a:pPr>
             <a:r>
-              <a:rPr sz="1100" b="0">
+              <a:rPr sz="1300" b="0">
                 <a:solidFill>
                   <a:srgbClr val="424B5C"/>
                 </a:solidFill>
@@ -4418,7 +4418,7 @@
               </a:lnSpc>
             </a:pPr>
             <a:r>
-              <a:rPr sz="1100" b="0">
+              <a:rPr sz="1300" b="0">
                 <a:solidFill>
                   <a:srgbClr val="424B5C"/>
                 </a:solidFill>
@@ -4670,7 +4670,7 @@
               </a:lnSpc>
             </a:pPr>
             <a:r>
-              <a:rPr sz="1100" b="0">
+              <a:rPr sz="1300" b="0">
                 <a:solidFill>
                   <a:srgbClr val="424B5C"/>
                 </a:solidFill>
@@ -4686,7 +4686,7 @@
               </a:lnSpc>
             </a:pPr>
             <a:r>
-              <a:rPr sz="1100" b="0">
+              <a:rPr sz="1300" b="0">
                 <a:solidFill>
                   <a:srgbClr val="424B5C"/>
                 </a:solidFill>
@@ -4766,27 +4766,27 @@
         </p:nvSpPr>
         <p:spPr>
           <a:xfrm>
-            <a:off x="640080" y="502920"/>
-            <a:ext cx="10972800" cy="320040"/>
-          </a:xfrm>
-          <a:prstGeom prst="rect">
-            <a:avLst/>
-          </a:prstGeom>
-          <a:noFill/>
-        </p:spPr>
-        <p:txBody>
-          <a:bodyPr wrap="square" lIns="0" rIns="0" tIns="0" bIns="0">
-            <a:spAutoFit/>
-          </a:bodyPr>
-          <a:lstStyle/>
-          <a:p>
-            <a:pPr algn="l">
-              <a:lnSpc>
-                <a:spcPct val="125000"/>
-              </a:lnSpc>
-            </a:pPr>
-            <a:r>
-              <a:rPr sz="1100" b="1">
+            <a:off x="640080" y="457200"/>
+            <a:ext cx="10972800" cy="365760"/>
+          </a:xfrm>
+          <a:prstGeom prst="rect">
+            <a:avLst/>
+          </a:prstGeom>
+          <a:noFill/>
+        </p:spPr>
+        <p:txBody>
+          <a:bodyPr wrap="square" lIns="0" rIns="0" tIns="0" bIns="0">
+            <a:spAutoFit/>
+          </a:bodyPr>
+          <a:lstStyle/>
+          <a:p>
+            <a:pPr algn="l">
+              <a:lnSpc>
+                <a:spcPct val="125000"/>
+              </a:lnSpc>
+            </a:pPr>
+            <a:r>
+              <a:rPr sz="1200" b="1">
                 <a:solidFill>
                   <a:srgbClr val="4F46E5"/>
                 </a:solidFill>
@@ -4805,27 +4805,27 @@
         </p:nvSpPr>
         <p:spPr>
           <a:xfrm>
-            <a:off x="640080" y="868680"/>
-            <a:ext cx="10972800" cy="822960"/>
-          </a:xfrm>
-          <a:prstGeom prst="rect">
-            <a:avLst/>
-          </a:prstGeom>
-          <a:noFill/>
-        </p:spPr>
-        <p:txBody>
-          <a:bodyPr wrap="square" lIns="0" rIns="0" tIns="0" bIns="0">
-            <a:spAutoFit/>
-          </a:bodyPr>
-          <a:lstStyle/>
-          <a:p>
-            <a:pPr algn="l">
-              <a:lnSpc>
-                <a:spcPct val="125000"/>
-              </a:lnSpc>
-            </a:pPr>
-            <a:r>
-              <a:rPr sz="2800" b="1">
+            <a:off x="640080" y="822960"/>
+            <a:ext cx="10972800" cy="914400"/>
+          </a:xfrm>
+          <a:prstGeom prst="rect">
+            <a:avLst/>
+          </a:prstGeom>
+          <a:noFill/>
+        </p:spPr>
+        <p:txBody>
+          <a:bodyPr wrap="square" lIns="0" rIns="0" tIns="0" bIns="0">
+            <a:spAutoFit/>
+          </a:bodyPr>
+          <a:lstStyle/>
+          <a:p>
+            <a:pPr algn="l">
+              <a:lnSpc>
+                <a:spcPct val="125000"/>
+              </a:lnSpc>
+            </a:pPr>
+            <a:r>
+              <a:rPr sz="3200" b="1">
                 <a:solidFill>
                   <a:srgbClr val="0F141F"/>
                 </a:solidFill>
@@ -4844,7 +4844,7 @@
         </p:nvCxnSpPr>
         <p:spPr>
           <a:xfrm>
-            <a:off x="640080" y="1783080"/>
+            <a:off x="640080" y="1828800"/>
             <a:ext cx="10881360" cy="0"/>
           </a:xfrm>
           <a:prstGeom prst="line">
@@ -4899,7 +4899,7 @@
               </a:lnSpc>
             </a:pPr>
             <a:r>
-              <a:rPr sz="900" b="0">
+              <a:rPr sz="1100" b="0">
                 <a:solidFill>
                   <a:srgbClr val="8B95A7"/>
                 </a:solidFill>
@@ -5069,7 +5069,7 @@
               </a:lnSpc>
             </a:pPr>
             <a:r>
-              <a:rPr sz="1000" b="1">
+              <a:rPr sz="1100" b="1">
                 <a:solidFill>
                   <a:srgbClr val="8B95A7"/>
                 </a:solidFill>
@@ -5210,7 +5210,7 @@
               </a:lnSpc>
             </a:pPr>
             <a:r>
-              <a:rPr sz="1100" b="0">
+              <a:rPr sz="1300" b="0">
                 <a:solidFill>
                   <a:srgbClr val="424B5C"/>
                 </a:solidFill>
@@ -5226,7 +5226,7 @@
               </a:lnSpc>
             </a:pPr>
             <a:r>
-              <a:rPr sz="1100" b="0">
+              <a:rPr sz="1300" b="0">
                 <a:solidFill>
                   <a:srgbClr val="424B5C"/>
                 </a:solidFill>
@@ -5304,7 +5304,7 @@
               </a:lnSpc>
             </a:pPr>
             <a:r>
-              <a:rPr sz="1100" b="0">
+              <a:rPr sz="1200" b="0">
                 <a:solidFill>
                   <a:srgbClr val="8B95A7"/>
                 </a:solidFill>
@@ -5435,7 +5435,7 @@
               </a:lnSpc>
             </a:pPr>
             <a:r>
-              <a:rPr sz="1300" b="1">
+              <a:rPr sz="1500" b="1">
                 <a:solidFill>
                   <a:srgbClr val="4F46E5"/>
                 </a:solidFill>
@@ -5777,27 +5777,27 @@
         </p:nvSpPr>
         <p:spPr>
           <a:xfrm>
-            <a:off x="640080" y="502920"/>
-            <a:ext cx="10972800" cy="320040"/>
-          </a:xfrm>
-          <a:prstGeom prst="rect">
-            <a:avLst/>
-          </a:prstGeom>
-          <a:noFill/>
-        </p:spPr>
-        <p:txBody>
-          <a:bodyPr wrap="square" lIns="0" rIns="0" tIns="0" bIns="0">
-            <a:spAutoFit/>
-          </a:bodyPr>
-          <a:lstStyle/>
-          <a:p>
-            <a:pPr algn="l">
-              <a:lnSpc>
-                <a:spcPct val="125000"/>
-              </a:lnSpc>
-            </a:pPr>
-            <a:r>
-              <a:rPr sz="1100" b="1">
+            <a:off x="640080" y="457200"/>
+            <a:ext cx="10972800" cy="365760"/>
+          </a:xfrm>
+          <a:prstGeom prst="rect">
+            <a:avLst/>
+          </a:prstGeom>
+          <a:noFill/>
+        </p:spPr>
+        <p:txBody>
+          <a:bodyPr wrap="square" lIns="0" rIns="0" tIns="0" bIns="0">
+            <a:spAutoFit/>
+          </a:bodyPr>
+          <a:lstStyle/>
+          <a:p>
+            <a:pPr algn="l">
+              <a:lnSpc>
+                <a:spcPct val="125000"/>
+              </a:lnSpc>
+            </a:pPr>
+            <a:r>
+              <a:rPr sz="1200" b="1">
                 <a:solidFill>
                   <a:srgbClr val="4F46E5"/>
                 </a:solidFill>
@@ -5816,27 +5816,27 @@
         </p:nvSpPr>
         <p:spPr>
           <a:xfrm>
-            <a:off x="640080" y="868680"/>
-            <a:ext cx="10972800" cy="822960"/>
-          </a:xfrm>
-          <a:prstGeom prst="rect">
-            <a:avLst/>
-          </a:prstGeom>
-          <a:noFill/>
-        </p:spPr>
-        <p:txBody>
-          <a:bodyPr wrap="square" lIns="0" rIns="0" tIns="0" bIns="0">
-            <a:spAutoFit/>
-          </a:bodyPr>
-          <a:lstStyle/>
-          <a:p>
-            <a:pPr algn="l">
-              <a:lnSpc>
-                <a:spcPct val="125000"/>
-              </a:lnSpc>
-            </a:pPr>
-            <a:r>
-              <a:rPr sz="2800" b="1">
+            <a:off x="640080" y="822960"/>
+            <a:ext cx="10972800" cy="914400"/>
+          </a:xfrm>
+          <a:prstGeom prst="rect">
+            <a:avLst/>
+          </a:prstGeom>
+          <a:noFill/>
+        </p:spPr>
+        <p:txBody>
+          <a:bodyPr wrap="square" lIns="0" rIns="0" tIns="0" bIns="0">
+            <a:spAutoFit/>
+          </a:bodyPr>
+          <a:lstStyle/>
+          <a:p>
+            <a:pPr algn="l">
+              <a:lnSpc>
+                <a:spcPct val="125000"/>
+              </a:lnSpc>
+            </a:pPr>
+            <a:r>
+              <a:rPr sz="3200" b="1">
                 <a:solidFill>
                   <a:srgbClr val="0F141F"/>
                 </a:solidFill>
@@ -5855,7 +5855,7 @@
         </p:nvCxnSpPr>
         <p:spPr>
           <a:xfrm>
-            <a:off x="640080" y="1783080"/>
+            <a:off x="640080" y="1828800"/>
             <a:ext cx="10881360" cy="0"/>
           </a:xfrm>
           <a:prstGeom prst="line">
@@ -5910,7 +5910,7 @@
               </a:lnSpc>
             </a:pPr>
             <a:r>
-              <a:rPr sz="900" b="0">
+              <a:rPr sz="1100" b="0">
                 <a:solidFill>
                   <a:srgbClr val="8B95A7"/>
                 </a:solidFill>
@@ -6357,7 +6357,7 @@
               </a:lnSpc>
             </a:pPr>
             <a:r>
-              <a:rPr sz="1100" b="0">
+              <a:rPr sz="1300" b="0">
                 <a:solidFill>
                   <a:srgbClr val="424B5C"/>
                 </a:solidFill>
@@ -6373,7 +6373,7 @@
               </a:lnSpc>
             </a:pPr>
             <a:r>
-              <a:rPr sz="1100" b="0">
+              <a:rPr sz="1300" b="0">
                 <a:solidFill>
                   <a:srgbClr val="424B5C"/>
                 </a:solidFill>
@@ -6625,7 +6625,7 @@
               </a:lnSpc>
             </a:pPr>
             <a:r>
-              <a:rPr sz="1100" b="0">
+              <a:rPr sz="1300" b="0">
                 <a:solidFill>
                   <a:srgbClr val="424B5C"/>
                 </a:solidFill>
@@ -6641,7 +6641,7 @@
               </a:lnSpc>
             </a:pPr>
             <a:r>
-              <a:rPr sz="1100" b="0">
+              <a:rPr sz="1300" b="0">
                 <a:solidFill>
                   <a:srgbClr val="424B5C"/>
                 </a:solidFill>
@@ -6893,7 +6893,7 @@
               </a:lnSpc>
             </a:pPr>
             <a:r>
-              <a:rPr sz="1100" b="0">
+              <a:rPr sz="1300" b="0">
                 <a:solidFill>
                   <a:srgbClr val="424B5C"/>
                 </a:solidFill>
@@ -6909,7 +6909,7 @@
               </a:lnSpc>
             </a:pPr>
             <a:r>
-              <a:rPr sz="1100" b="0">
+              <a:rPr sz="1300" b="0">
                 <a:solidFill>
                   <a:srgbClr val="424B5C"/>
                 </a:solidFill>
@@ -6989,27 +6989,27 @@
         </p:nvSpPr>
         <p:spPr>
           <a:xfrm>
-            <a:off x="640080" y="502920"/>
-            <a:ext cx="10972800" cy="320040"/>
-          </a:xfrm>
-          <a:prstGeom prst="rect">
-            <a:avLst/>
-          </a:prstGeom>
-          <a:noFill/>
-        </p:spPr>
-        <p:txBody>
-          <a:bodyPr wrap="square" lIns="0" rIns="0" tIns="0" bIns="0">
-            <a:spAutoFit/>
-          </a:bodyPr>
-          <a:lstStyle/>
-          <a:p>
-            <a:pPr algn="l">
-              <a:lnSpc>
-                <a:spcPct val="125000"/>
-              </a:lnSpc>
-            </a:pPr>
-            <a:r>
-              <a:rPr sz="1100" b="1">
+            <a:off x="640080" y="457200"/>
+            <a:ext cx="10972800" cy="365760"/>
+          </a:xfrm>
+          <a:prstGeom prst="rect">
+            <a:avLst/>
+          </a:prstGeom>
+          <a:noFill/>
+        </p:spPr>
+        <p:txBody>
+          <a:bodyPr wrap="square" lIns="0" rIns="0" tIns="0" bIns="0">
+            <a:spAutoFit/>
+          </a:bodyPr>
+          <a:lstStyle/>
+          <a:p>
+            <a:pPr algn="l">
+              <a:lnSpc>
+                <a:spcPct val="125000"/>
+              </a:lnSpc>
+            </a:pPr>
+            <a:r>
+              <a:rPr sz="1200" b="1">
                 <a:solidFill>
                   <a:srgbClr val="4F46E5"/>
                 </a:solidFill>
@@ -7028,27 +7028,27 @@
         </p:nvSpPr>
         <p:spPr>
           <a:xfrm>
-            <a:off x="640080" y="868680"/>
-            <a:ext cx="10972800" cy="822960"/>
-          </a:xfrm>
-          <a:prstGeom prst="rect">
-            <a:avLst/>
-          </a:prstGeom>
-          <a:noFill/>
-        </p:spPr>
-        <p:txBody>
-          <a:bodyPr wrap="square" lIns="0" rIns="0" tIns="0" bIns="0">
-            <a:spAutoFit/>
-          </a:bodyPr>
-          <a:lstStyle/>
-          <a:p>
-            <a:pPr algn="l">
-              <a:lnSpc>
-                <a:spcPct val="125000"/>
-              </a:lnSpc>
-            </a:pPr>
-            <a:r>
-              <a:rPr sz="2800" b="1">
+            <a:off x="640080" y="822960"/>
+            <a:ext cx="10972800" cy="914400"/>
+          </a:xfrm>
+          <a:prstGeom prst="rect">
+            <a:avLst/>
+          </a:prstGeom>
+          <a:noFill/>
+        </p:spPr>
+        <p:txBody>
+          <a:bodyPr wrap="square" lIns="0" rIns="0" tIns="0" bIns="0">
+            <a:spAutoFit/>
+          </a:bodyPr>
+          <a:lstStyle/>
+          <a:p>
+            <a:pPr algn="l">
+              <a:lnSpc>
+                <a:spcPct val="125000"/>
+              </a:lnSpc>
+            </a:pPr>
+            <a:r>
+              <a:rPr sz="3200" b="1">
                 <a:solidFill>
                   <a:srgbClr val="0F141F"/>
                 </a:solidFill>
@@ -7067,7 +7067,7 @@
         </p:nvCxnSpPr>
         <p:spPr>
           <a:xfrm>
-            <a:off x="640080" y="1783080"/>
+            <a:off x="640080" y="1828800"/>
             <a:ext cx="10881360" cy="0"/>
           </a:xfrm>
           <a:prstGeom prst="line">
@@ -7122,7 +7122,7 @@
               </a:lnSpc>
             </a:pPr>
             <a:r>
-              <a:rPr sz="900" b="0">
+              <a:rPr sz="1100" b="0">
                 <a:solidFill>
                   <a:srgbClr val="8B95A7"/>
                 </a:solidFill>
@@ -7292,7 +7292,7 @@
               </a:lnSpc>
             </a:pPr>
             <a:r>
-              <a:rPr sz="1000" b="1">
+              <a:rPr sz="1100" b="1">
                 <a:solidFill>
                   <a:srgbClr val="8B95A7"/>
                 </a:solidFill>
@@ -7472,7 +7472,7 @@
               </a:lnSpc>
             </a:pPr>
             <a:r>
-              <a:rPr sz="1100" b="0">
+              <a:rPr sz="1300" b="0">
                 <a:solidFill>
                   <a:srgbClr val="424B5C"/>
                 </a:solidFill>
@@ -7550,7 +7550,7 @@
               </a:lnSpc>
             </a:pPr>
             <a:r>
-              <a:rPr sz="1000" b="0">
+              <a:rPr sz="1100" b="0">
                 <a:solidFill>
                   <a:srgbClr val="8B95A7"/>
                 </a:solidFill>
@@ -7681,7 +7681,7 @@
               </a:lnSpc>
             </a:pPr>
             <a:r>
-              <a:rPr sz="1300" b="1">
+              <a:rPr sz="1500" b="1">
                 <a:solidFill>
                   <a:srgbClr val="EC4899"/>
                 </a:solidFill>
@@ -8023,27 +8023,27 @@
         </p:nvSpPr>
         <p:spPr>
           <a:xfrm>
-            <a:off x="640080" y="502920"/>
-            <a:ext cx="10972800" cy="320040"/>
-          </a:xfrm>
-          <a:prstGeom prst="rect">
-            <a:avLst/>
-          </a:prstGeom>
-          <a:noFill/>
-        </p:spPr>
-        <p:txBody>
-          <a:bodyPr wrap="square" lIns="0" rIns="0" tIns="0" bIns="0">
-            <a:spAutoFit/>
-          </a:bodyPr>
-          <a:lstStyle/>
-          <a:p>
-            <a:pPr algn="l">
-              <a:lnSpc>
-                <a:spcPct val="125000"/>
-              </a:lnSpc>
-            </a:pPr>
-            <a:r>
-              <a:rPr sz="1100" b="1">
+            <a:off x="640080" y="457200"/>
+            <a:ext cx="10972800" cy="365760"/>
+          </a:xfrm>
+          <a:prstGeom prst="rect">
+            <a:avLst/>
+          </a:prstGeom>
+          <a:noFill/>
+        </p:spPr>
+        <p:txBody>
+          <a:bodyPr wrap="square" lIns="0" rIns="0" tIns="0" bIns="0">
+            <a:spAutoFit/>
+          </a:bodyPr>
+          <a:lstStyle/>
+          <a:p>
+            <a:pPr algn="l">
+              <a:lnSpc>
+                <a:spcPct val="125000"/>
+              </a:lnSpc>
+            </a:pPr>
+            <a:r>
+              <a:rPr sz="1200" b="1">
                 <a:solidFill>
                   <a:srgbClr val="4F46E5"/>
                 </a:solidFill>
@@ -8062,27 +8062,27 @@
         </p:nvSpPr>
         <p:spPr>
           <a:xfrm>
-            <a:off x="640080" y="868680"/>
-            <a:ext cx="10972800" cy="822960"/>
-          </a:xfrm>
-          <a:prstGeom prst="rect">
-            <a:avLst/>
-          </a:prstGeom>
-          <a:noFill/>
-        </p:spPr>
-        <p:txBody>
-          <a:bodyPr wrap="square" lIns="0" rIns="0" tIns="0" bIns="0">
-            <a:spAutoFit/>
-          </a:bodyPr>
-          <a:lstStyle/>
-          <a:p>
-            <a:pPr algn="l">
-              <a:lnSpc>
-                <a:spcPct val="125000"/>
-              </a:lnSpc>
-            </a:pPr>
-            <a:r>
-              <a:rPr sz="2800" b="1">
+            <a:off x="640080" y="822960"/>
+            <a:ext cx="10972800" cy="914400"/>
+          </a:xfrm>
+          <a:prstGeom prst="rect">
+            <a:avLst/>
+          </a:prstGeom>
+          <a:noFill/>
+        </p:spPr>
+        <p:txBody>
+          <a:bodyPr wrap="square" lIns="0" rIns="0" tIns="0" bIns="0">
+            <a:spAutoFit/>
+          </a:bodyPr>
+          <a:lstStyle/>
+          <a:p>
+            <a:pPr algn="l">
+              <a:lnSpc>
+                <a:spcPct val="125000"/>
+              </a:lnSpc>
+            </a:pPr>
+            <a:r>
+              <a:rPr sz="3200" b="1">
                 <a:solidFill>
                   <a:srgbClr val="0F141F"/>
                 </a:solidFill>
@@ -8101,7 +8101,7 @@
         </p:nvCxnSpPr>
         <p:spPr>
           <a:xfrm>
-            <a:off x="640080" y="1783080"/>
+            <a:off x="640080" y="1828800"/>
             <a:ext cx="10881360" cy="0"/>
           </a:xfrm>
           <a:prstGeom prst="line">
@@ -8156,7 +8156,7 @@
               </a:lnSpc>
             </a:pPr>
             <a:r>
-              <a:rPr sz="900" b="0">
+              <a:rPr sz="1100" b="0">
                 <a:solidFill>
                   <a:srgbClr val="8B95A7"/>
                 </a:solidFill>
@@ -8425,7 +8425,7 @@
               </a:lnSpc>
             </a:pPr>
             <a:r>
-              <a:rPr sz="1100" b="0">
+              <a:rPr sz="1300" b="0">
                 <a:solidFill>
                   <a:srgbClr val="424B5C"/>
                 </a:solidFill>
@@ -8542,7 +8542,7 @@
               </a:lnSpc>
             </a:pPr>
             <a:r>
-              <a:rPr sz="1100" b="0">
+              <a:rPr sz="1300" b="0">
                 <a:solidFill>
                   <a:srgbClr val="424B5C"/>
                 </a:solidFill>
@@ -8659,7 +8659,7 @@
               </a:lnSpc>
             </a:pPr>
             <a:r>
-              <a:rPr sz="1100" b="0">
+              <a:rPr sz="1300" b="0">
                 <a:solidFill>
                   <a:srgbClr val="424B5C"/>
                 </a:solidFill>
@@ -8776,7 +8776,7 @@
               </a:lnSpc>
             </a:pPr>
             <a:r>
-              <a:rPr sz="1100" b="0">
+              <a:rPr sz="1300" b="0">
                 <a:solidFill>
                   <a:srgbClr val="424B5C"/>
                 </a:solidFill>
@@ -8893,7 +8893,7 @@
               </a:lnSpc>
             </a:pPr>
             <a:r>
-              <a:rPr sz="1100" b="0">
+              <a:rPr sz="1300" b="0">
                 <a:solidFill>
                   <a:srgbClr val="424B5C"/>
                 </a:solidFill>
@@ -9010,7 +9010,7 @@
               </a:lnSpc>
             </a:pPr>
             <a:r>
-              <a:rPr sz="1100" b="0">
+              <a:rPr sz="1300" b="0">
                 <a:solidFill>
                   <a:srgbClr val="424B5C"/>
                 </a:solidFill>
@@ -9129,27 +9129,27 @@
         </p:nvSpPr>
         <p:spPr>
           <a:xfrm>
-            <a:off x="640080" y="502920"/>
-            <a:ext cx="10972800" cy="320040"/>
-          </a:xfrm>
-          <a:prstGeom prst="rect">
-            <a:avLst/>
-          </a:prstGeom>
-          <a:noFill/>
-        </p:spPr>
-        <p:txBody>
-          <a:bodyPr wrap="square" lIns="0" rIns="0" tIns="0" bIns="0">
-            <a:spAutoFit/>
-          </a:bodyPr>
-          <a:lstStyle/>
-          <a:p>
-            <a:pPr algn="l">
-              <a:lnSpc>
-                <a:spcPct val="125000"/>
-              </a:lnSpc>
-            </a:pPr>
-            <a:r>
-              <a:rPr sz="1100" b="1">
+            <a:off x="640080" y="457200"/>
+            <a:ext cx="10972800" cy="365760"/>
+          </a:xfrm>
+          <a:prstGeom prst="rect">
+            <a:avLst/>
+          </a:prstGeom>
+          <a:noFill/>
+        </p:spPr>
+        <p:txBody>
+          <a:bodyPr wrap="square" lIns="0" rIns="0" tIns="0" bIns="0">
+            <a:spAutoFit/>
+          </a:bodyPr>
+          <a:lstStyle/>
+          <a:p>
+            <a:pPr algn="l">
+              <a:lnSpc>
+                <a:spcPct val="125000"/>
+              </a:lnSpc>
+            </a:pPr>
+            <a:r>
+              <a:rPr sz="1200" b="1">
                 <a:solidFill>
                   <a:srgbClr val="4F46E5"/>
                 </a:solidFill>
@@ -9168,27 +9168,27 @@
         </p:nvSpPr>
         <p:spPr>
           <a:xfrm>
-            <a:off x="640080" y="868680"/>
-            <a:ext cx="10972800" cy="822960"/>
-          </a:xfrm>
-          <a:prstGeom prst="rect">
-            <a:avLst/>
-          </a:prstGeom>
-          <a:noFill/>
-        </p:spPr>
-        <p:txBody>
-          <a:bodyPr wrap="square" lIns="0" rIns="0" tIns="0" bIns="0">
-            <a:spAutoFit/>
-          </a:bodyPr>
-          <a:lstStyle/>
-          <a:p>
-            <a:pPr algn="l">
-              <a:lnSpc>
-                <a:spcPct val="125000"/>
-              </a:lnSpc>
-            </a:pPr>
-            <a:r>
-              <a:rPr sz="2800" b="1">
+            <a:off x="640080" y="822960"/>
+            <a:ext cx="10972800" cy="914400"/>
+          </a:xfrm>
+          <a:prstGeom prst="rect">
+            <a:avLst/>
+          </a:prstGeom>
+          <a:noFill/>
+        </p:spPr>
+        <p:txBody>
+          <a:bodyPr wrap="square" lIns="0" rIns="0" tIns="0" bIns="0">
+            <a:spAutoFit/>
+          </a:bodyPr>
+          <a:lstStyle/>
+          <a:p>
+            <a:pPr algn="l">
+              <a:lnSpc>
+                <a:spcPct val="125000"/>
+              </a:lnSpc>
+            </a:pPr>
+            <a:r>
+              <a:rPr sz="3200" b="1">
                 <a:solidFill>
                   <a:srgbClr val="0F141F"/>
                 </a:solidFill>
@@ -9207,7 +9207,7 @@
         </p:nvCxnSpPr>
         <p:spPr>
           <a:xfrm>
-            <a:off x="640080" y="1783080"/>
+            <a:off x="640080" y="1828800"/>
             <a:ext cx="10881360" cy="0"/>
           </a:xfrm>
           <a:prstGeom prst="line">
@@ -9262,7 +9262,7 @@
               </a:lnSpc>
             </a:pPr>
             <a:r>
-              <a:rPr sz="900" b="0">
+              <a:rPr sz="1100" b="0">
                 <a:solidFill>
                   <a:srgbClr val="8B95A7"/>
                 </a:solidFill>
@@ -9551,7 +9551,7 @@
               </a:lnSpc>
             </a:pPr>
             <a:r>
-              <a:rPr sz="1000" b="0">
+              <a:rPr sz="1200" b="0">
                 <a:solidFill>
                   <a:srgbClr val="424B5C"/>
                 </a:solidFill>
@@ -9840,7 +9840,7 @@
               </a:lnSpc>
             </a:pPr>
             <a:r>
-              <a:rPr sz="1000" b="0">
+              <a:rPr sz="1200" b="0">
                 <a:solidFill>
                   <a:srgbClr val="424B5C"/>
                 </a:solidFill>
@@ -10129,7 +10129,7 @@
               </a:lnSpc>
             </a:pPr>
             <a:r>
-              <a:rPr sz="1000" b="0">
+              <a:rPr sz="1200" b="0">
                 <a:solidFill>
                   <a:srgbClr val="424B5C"/>
                 </a:solidFill>
@@ -10418,7 +10418,7 @@
               </a:lnSpc>
             </a:pPr>
             <a:r>
-              <a:rPr sz="1000" b="0">
+              <a:rPr sz="1200" b="0">
                 <a:solidFill>
                   <a:srgbClr val="424B5C"/>
                 </a:solidFill>
@@ -10498,27 +10498,27 @@
         </p:nvSpPr>
         <p:spPr>
           <a:xfrm>
-            <a:off x="640080" y="502920"/>
-            <a:ext cx="10972800" cy="320040"/>
-          </a:xfrm>
-          <a:prstGeom prst="rect">
-            <a:avLst/>
-          </a:prstGeom>
-          <a:noFill/>
-        </p:spPr>
-        <p:txBody>
-          <a:bodyPr wrap="square" lIns="0" rIns="0" tIns="0" bIns="0">
-            <a:spAutoFit/>
-          </a:bodyPr>
-          <a:lstStyle/>
-          <a:p>
-            <a:pPr algn="l">
-              <a:lnSpc>
-                <a:spcPct val="125000"/>
-              </a:lnSpc>
-            </a:pPr>
-            <a:r>
-              <a:rPr sz="1100" b="1">
+            <a:off x="640080" y="457200"/>
+            <a:ext cx="10972800" cy="365760"/>
+          </a:xfrm>
+          <a:prstGeom prst="rect">
+            <a:avLst/>
+          </a:prstGeom>
+          <a:noFill/>
+        </p:spPr>
+        <p:txBody>
+          <a:bodyPr wrap="square" lIns="0" rIns="0" tIns="0" bIns="0">
+            <a:spAutoFit/>
+          </a:bodyPr>
+          <a:lstStyle/>
+          <a:p>
+            <a:pPr algn="l">
+              <a:lnSpc>
+                <a:spcPct val="125000"/>
+              </a:lnSpc>
+            </a:pPr>
+            <a:r>
+              <a:rPr sz="1200" b="1">
                 <a:solidFill>
                   <a:srgbClr val="4F46E5"/>
                 </a:solidFill>
@@ -10537,27 +10537,27 @@
         </p:nvSpPr>
         <p:spPr>
           <a:xfrm>
-            <a:off x="640080" y="868680"/>
-            <a:ext cx="10972800" cy="822960"/>
-          </a:xfrm>
-          <a:prstGeom prst="rect">
-            <a:avLst/>
-          </a:prstGeom>
-          <a:noFill/>
-        </p:spPr>
-        <p:txBody>
-          <a:bodyPr wrap="square" lIns="0" rIns="0" tIns="0" bIns="0">
-            <a:spAutoFit/>
-          </a:bodyPr>
-          <a:lstStyle/>
-          <a:p>
-            <a:pPr algn="l">
-              <a:lnSpc>
-                <a:spcPct val="125000"/>
-              </a:lnSpc>
-            </a:pPr>
-            <a:r>
-              <a:rPr sz="2800" b="1">
+            <a:off x="640080" y="822960"/>
+            <a:ext cx="10972800" cy="914400"/>
+          </a:xfrm>
+          <a:prstGeom prst="rect">
+            <a:avLst/>
+          </a:prstGeom>
+          <a:noFill/>
+        </p:spPr>
+        <p:txBody>
+          <a:bodyPr wrap="square" lIns="0" rIns="0" tIns="0" bIns="0">
+            <a:spAutoFit/>
+          </a:bodyPr>
+          <a:lstStyle/>
+          <a:p>
+            <a:pPr algn="l">
+              <a:lnSpc>
+                <a:spcPct val="125000"/>
+              </a:lnSpc>
+            </a:pPr>
+            <a:r>
+              <a:rPr sz="3200" b="1">
                 <a:solidFill>
                   <a:srgbClr val="0F141F"/>
                 </a:solidFill>
@@ -10576,7 +10576,7 @@
         </p:nvCxnSpPr>
         <p:spPr>
           <a:xfrm>
-            <a:off x="640080" y="1783080"/>
+            <a:off x="640080" y="1828800"/>
             <a:ext cx="10881360" cy="0"/>
           </a:xfrm>
           <a:prstGeom prst="line">
@@ -10631,7 +10631,7 @@
               </a:lnSpc>
             </a:pPr>
             <a:r>
-              <a:rPr sz="900" b="0">
+              <a:rPr sz="1100" b="0">
                 <a:solidFill>
                   <a:srgbClr val="8B95A7"/>
                 </a:solidFill>
@@ -10828,7 +10828,7 @@
               </a:lnSpc>
             </a:pPr>
             <a:r>
-              <a:rPr sz="1000" b="0">
+              <a:rPr sz="1200" b="0">
                 <a:solidFill>
                   <a:srgbClr val="424B5C"/>
                 </a:solidFill>
@@ -11060,7 +11060,7 @@
               </a:lnSpc>
             </a:pPr>
             <a:r>
-              <a:rPr sz="1000" b="0">
+              <a:rPr sz="1200" b="0">
                 <a:solidFill>
                   <a:srgbClr val="424B5C"/>
                 </a:solidFill>
@@ -11292,7 +11292,7 @@
               </a:lnSpc>
             </a:pPr>
             <a:r>
-              <a:rPr sz="1000" b="0">
+              <a:rPr sz="1200" b="0">
                 <a:solidFill>
                   <a:srgbClr val="424B5C"/>
                 </a:solidFill>
@@ -11370,7 +11370,7 @@
               </a:lnSpc>
             </a:pPr>
             <a:r>
-              <a:rPr sz="1100" b="0">
+              <a:rPr sz="1200" b="0">
                 <a:solidFill>
                   <a:srgbClr val="8B95A7"/>
                 </a:solidFill>
@@ -11450,27 +11450,27 @@
         </p:nvSpPr>
         <p:spPr>
           <a:xfrm>
-            <a:off x="640080" y="502920"/>
-            <a:ext cx="10972800" cy="320040"/>
-          </a:xfrm>
-          <a:prstGeom prst="rect">
-            <a:avLst/>
-          </a:prstGeom>
-          <a:noFill/>
-        </p:spPr>
-        <p:txBody>
-          <a:bodyPr wrap="square" lIns="0" rIns="0" tIns="0" bIns="0">
-            <a:spAutoFit/>
-          </a:bodyPr>
-          <a:lstStyle/>
-          <a:p>
-            <a:pPr algn="l">
-              <a:lnSpc>
-                <a:spcPct val="125000"/>
-              </a:lnSpc>
-            </a:pPr>
-            <a:r>
-              <a:rPr sz="1100" b="1">
+            <a:off x="640080" y="457200"/>
+            <a:ext cx="10972800" cy="365760"/>
+          </a:xfrm>
+          <a:prstGeom prst="rect">
+            <a:avLst/>
+          </a:prstGeom>
+          <a:noFill/>
+        </p:spPr>
+        <p:txBody>
+          <a:bodyPr wrap="square" lIns="0" rIns="0" tIns="0" bIns="0">
+            <a:spAutoFit/>
+          </a:bodyPr>
+          <a:lstStyle/>
+          <a:p>
+            <a:pPr algn="l">
+              <a:lnSpc>
+                <a:spcPct val="125000"/>
+              </a:lnSpc>
+            </a:pPr>
+            <a:r>
+              <a:rPr sz="1200" b="1">
                 <a:solidFill>
                   <a:srgbClr val="4F46E5"/>
                 </a:solidFill>
@@ -11489,27 +11489,27 @@
         </p:nvSpPr>
         <p:spPr>
           <a:xfrm>
-            <a:off x="640080" y="868680"/>
-            <a:ext cx="10972800" cy="822960"/>
-          </a:xfrm>
-          <a:prstGeom prst="rect">
-            <a:avLst/>
-          </a:prstGeom>
-          <a:noFill/>
-        </p:spPr>
-        <p:txBody>
-          <a:bodyPr wrap="square" lIns="0" rIns="0" tIns="0" bIns="0">
-            <a:spAutoFit/>
-          </a:bodyPr>
-          <a:lstStyle/>
-          <a:p>
-            <a:pPr algn="l">
-              <a:lnSpc>
-                <a:spcPct val="125000"/>
-              </a:lnSpc>
-            </a:pPr>
-            <a:r>
-              <a:rPr sz="2800" b="1">
+            <a:off x="640080" y="822960"/>
+            <a:ext cx="10972800" cy="914400"/>
+          </a:xfrm>
+          <a:prstGeom prst="rect">
+            <a:avLst/>
+          </a:prstGeom>
+          <a:noFill/>
+        </p:spPr>
+        <p:txBody>
+          <a:bodyPr wrap="square" lIns="0" rIns="0" tIns="0" bIns="0">
+            <a:spAutoFit/>
+          </a:bodyPr>
+          <a:lstStyle/>
+          <a:p>
+            <a:pPr algn="l">
+              <a:lnSpc>
+                <a:spcPct val="125000"/>
+              </a:lnSpc>
+            </a:pPr>
+            <a:r>
+              <a:rPr sz="3200" b="1">
                 <a:solidFill>
                   <a:srgbClr val="0F141F"/>
                 </a:solidFill>
@@ -11528,7 +11528,7 @@
         </p:nvCxnSpPr>
         <p:spPr>
           <a:xfrm>
-            <a:off x="640080" y="1783080"/>
+            <a:off x="640080" y="1828800"/>
             <a:ext cx="10881360" cy="0"/>
           </a:xfrm>
           <a:prstGeom prst="line">
@@ -11583,7 +11583,7 @@
               </a:lnSpc>
             </a:pPr>
             <a:r>
-              <a:rPr sz="900" b="0">
+              <a:rPr sz="1100" b="0">
                 <a:solidFill>
                   <a:srgbClr val="8B95A7"/>
                 </a:solidFill>
@@ -11796,7 +11796,7 @@
               </a:lnSpc>
             </a:pPr>
             <a:r>
-              <a:rPr sz="1300" b="1">
+              <a:rPr sz="1500" b="1">
                 <a:solidFill>
                   <a:srgbClr val="10B981"/>
                 </a:solidFill>
@@ -11929,7 +11929,7 @@
               </a:lnSpc>
             </a:pPr>
             <a:r>
-              <a:rPr sz="1200" b="0">
+              <a:rPr sz="1400" b="0">
                 <a:solidFill>
                   <a:srgbClr val="424B5C"/>
                 </a:solidFill>
@@ -11968,7 +11968,7 @@
               </a:lnSpc>
             </a:pPr>
             <a:r>
-              <a:rPr sz="1200" b="0">
+              <a:rPr sz="1400" b="0">
                 <a:solidFill>
                   <a:srgbClr val="424B5C"/>
                 </a:solidFill>
@@ -12181,7 +12181,7 @@
               </a:lnSpc>
             </a:pPr>
             <a:r>
-              <a:rPr sz="1300" b="1">
+              <a:rPr sz="1500" b="1">
                 <a:solidFill>
                   <a:srgbClr val="EC4899"/>
                 </a:solidFill>
@@ -12314,7 +12314,7 @@
               </a:lnSpc>
             </a:pPr>
             <a:r>
-              <a:rPr sz="1200" b="0">
+              <a:rPr sz="1400" b="0">
                 <a:solidFill>
                   <a:srgbClr val="424B5C"/>
                 </a:solidFill>
@@ -12353,7 +12353,7 @@
               </a:lnSpc>
             </a:pPr>
             <a:r>
-              <a:rPr sz="1200" b="0">
+              <a:rPr sz="1400" b="0">
                 <a:solidFill>
                   <a:srgbClr val="424B5C"/>
                 </a:solidFill>
@@ -12511,27 +12511,27 @@
         </p:nvSpPr>
         <p:spPr>
           <a:xfrm>
-            <a:off x="640080" y="502920"/>
-            <a:ext cx="10972800" cy="320040"/>
-          </a:xfrm>
-          <a:prstGeom prst="rect">
-            <a:avLst/>
-          </a:prstGeom>
-          <a:noFill/>
-        </p:spPr>
-        <p:txBody>
-          <a:bodyPr wrap="square" lIns="0" rIns="0" tIns="0" bIns="0">
-            <a:spAutoFit/>
-          </a:bodyPr>
-          <a:lstStyle/>
-          <a:p>
-            <a:pPr algn="l">
-              <a:lnSpc>
-                <a:spcPct val="125000"/>
-              </a:lnSpc>
-            </a:pPr>
-            <a:r>
-              <a:rPr sz="1100" b="1">
+            <a:off x="640080" y="457200"/>
+            <a:ext cx="10972800" cy="365760"/>
+          </a:xfrm>
+          <a:prstGeom prst="rect">
+            <a:avLst/>
+          </a:prstGeom>
+          <a:noFill/>
+        </p:spPr>
+        <p:txBody>
+          <a:bodyPr wrap="square" lIns="0" rIns="0" tIns="0" bIns="0">
+            <a:spAutoFit/>
+          </a:bodyPr>
+          <a:lstStyle/>
+          <a:p>
+            <a:pPr algn="l">
+              <a:lnSpc>
+                <a:spcPct val="125000"/>
+              </a:lnSpc>
+            </a:pPr>
+            <a:r>
+              <a:rPr sz="1200" b="1">
                 <a:solidFill>
                   <a:srgbClr val="4F46E5"/>
                 </a:solidFill>
@@ -12550,27 +12550,27 @@
         </p:nvSpPr>
         <p:spPr>
           <a:xfrm>
-            <a:off x="640080" y="868680"/>
-            <a:ext cx="10972800" cy="822960"/>
-          </a:xfrm>
-          <a:prstGeom prst="rect">
-            <a:avLst/>
-          </a:prstGeom>
-          <a:noFill/>
-        </p:spPr>
-        <p:txBody>
-          <a:bodyPr wrap="square" lIns="0" rIns="0" tIns="0" bIns="0">
-            <a:spAutoFit/>
-          </a:bodyPr>
-          <a:lstStyle/>
-          <a:p>
-            <a:pPr algn="l">
-              <a:lnSpc>
-                <a:spcPct val="125000"/>
-              </a:lnSpc>
-            </a:pPr>
-            <a:r>
-              <a:rPr sz="2800" b="1">
+            <a:off x="640080" y="822960"/>
+            <a:ext cx="10972800" cy="914400"/>
+          </a:xfrm>
+          <a:prstGeom prst="rect">
+            <a:avLst/>
+          </a:prstGeom>
+          <a:noFill/>
+        </p:spPr>
+        <p:txBody>
+          <a:bodyPr wrap="square" lIns="0" rIns="0" tIns="0" bIns="0">
+            <a:spAutoFit/>
+          </a:bodyPr>
+          <a:lstStyle/>
+          <a:p>
+            <a:pPr algn="l">
+              <a:lnSpc>
+                <a:spcPct val="125000"/>
+              </a:lnSpc>
+            </a:pPr>
+            <a:r>
+              <a:rPr sz="3200" b="1">
                 <a:solidFill>
                   <a:srgbClr val="0F141F"/>
                 </a:solidFill>
@@ -12589,7 +12589,7 @@
         </p:nvCxnSpPr>
         <p:spPr>
           <a:xfrm>
-            <a:off x="640080" y="1783080"/>
+            <a:off x="640080" y="1828800"/>
             <a:ext cx="10881360" cy="0"/>
           </a:xfrm>
           <a:prstGeom prst="line">
@@ -12644,7 +12644,7 @@
               </a:lnSpc>
             </a:pPr>
             <a:r>
-              <a:rPr sz="900" b="0">
+              <a:rPr sz="1100" b="0">
                 <a:solidFill>
                   <a:srgbClr val="8B95A7"/>
                 </a:solidFill>
@@ -12853,7 +12853,7 @@
               </a:lnSpc>
             </a:pPr>
             <a:r>
-              <a:rPr sz="1100" b="0">
+              <a:rPr sz="1300" b="0">
                 <a:solidFill>
                   <a:srgbClr val="424B5C"/>
                 </a:solidFill>
@@ -13062,7 +13062,7 @@
               </a:lnSpc>
             </a:pPr>
             <a:r>
-              <a:rPr sz="1100" b="0">
+              <a:rPr sz="1300" b="0">
                 <a:solidFill>
                   <a:srgbClr val="424B5C"/>
                 </a:solidFill>
@@ -13271,7 +13271,7 @@
               </a:lnSpc>
             </a:pPr>
             <a:r>
-              <a:rPr sz="1100" b="0">
+              <a:rPr sz="1300" b="0">
                 <a:solidFill>
                   <a:srgbClr val="424B5C"/>
                 </a:solidFill>
@@ -13427,7 +13427,7 @@
               </a:lnSpc>
             </a:pPr>
             <a:r>
-              <a:rPr sz="1000" b="0">
+              <a:rPr sz="1100" b="0">
                 <a:solidFill>
                   <a:srgbClr val="8B95A7"/>
                 </a:solidFill>
@@ -13505,7 +13505,7 @@
               </a:lnSpc>
             </a:pPr>
             <a:r>
-              <a:rPr sz="1000" b="0">
+              <a:rPr sz="1100" b="0">
                 <a:solidFill>
                   <a:srgbClr val="8B95A7"/>
                 </a:solidFill>
@@ -13583,7 +13583,7 @@
               </a:lnSpc>
             </a:pPr>
             <a:r>
-              <a:rPr sz="1000" b="0">
+              <a:rPr sz="1100" b="0">
                 <a:solidFill>
                   <a:srgbClr val="8B95A7"/>
                 </a:solidFill>
@@ -13661,7 +13661,7 @@
               </a:lnSpc>
             </a:pPr>
             <a:r>
-              <a:rPr sz="1000" b="0">
+              <a:rPr sz="1100" b="0">
                 <a:solidFill>
                   <a:srgbClr val="8B95A7"/>
                 </a:solidFill>
@@ -13780,27 +13780,27 @@
         </p:nvSpPr>
         <p:spPr>
           <a:xfrm>
-            <a:off x="640080" y="502920"/>
-            <a:ext cx="10972800" cy="320040"/>
-          </a:xfrm>
-          <a:prstGeom prst="rect">
-            <a:avLst/>
-          </a:prstGeom>
-          <a:noFill/>
-        </p:spPr>
-        <p:txBody>
-          <a:bodyPr wrap="square" lIns="0" rIns="0" tIns="0" bIns="0">
-            <a:spAutoFit/>
-          </a:bodyPr>
-          <a:lstStyle/>
-          <a:p>
-            <a:pPr algn="l">
-              <a:lnSpc>
-                <a:spcPct val="125000"/>
-              </a:lnSpc>
-            </a:pPr>
-            <a:r>
-              <a:rPr sz="1100" b="1">
+            <a:off x="640080" y="457200"/>
+            <a:ext cx="10972800" cy="365760"/>
+          </a:xfrm>
+          <a:prstGeom prst="rect">
+            <a:avLst/>
+          </a:prstGeom>
+          <a:noFill/>
+        </p:spPr>
+        <p:txBody>
+          <a:bodyPr wrap="square" lIns="0" rIns="0" tIns="0" bIns="0">
+            <a:spAutoFit/>
+          </a:bodyPr>
+          <a:lstStyle/>
+          <a:p>
+            <a:pPr algn="l">
+              <a:lnSpc>
+                <a:spcPct val="125000"/>
+              </a:lnSpc>
+            </a:pPr>
+            <a:r>
+              <a:rPr sz="1200" b="1">
                 <a:solidFill>
                   <a:srgbClr val="4F46E5"/>
                 </a:solidFill>
@@ -13819,27 +13819,27 @@
         </p:nvSpPr>
         <p:spPr>
           <a:xfrm>
-            <a:off x="640080" y="868680"/>
-            <a:ext cx="10972800" cy="822960"/>
-          </a:xfrm>
-          <a:prstGeom prst="rect">
-            <a:avLst/>
-          </a:prstGeom>
-          <a:noFill/>
-        </p:spPr>
-        <p:txBody>
-          <a:bodyPr wrap="square" lIns="0" rIns="0" tIns="0" bIns="0">
-            <a:spAutoFit/>
-          </a:bodyPr>
-          <a:lstStyle/>
-          <a:p>
-            <a:pPr algn="l">
-              <a:lnSpc>
-                <a:spcPct val="125000"/>
-              </a:lnSpc>
-            </a:pPr>
-            <a:r>
-              <a:rPr sz="2800" b="1">
+            <a:off x="640080" y="822960"/>
+            <a:ext cx="10972800" cy="914400"/>
+          </a:xfrm>
+          <a:prstGeom prst="rect">
+            <a:avLst/>
+          </a:prstGeom>
+          <a:noFill/>
+        </p:spPr>
+        <p:txBody>
+          <a:bodyPr wrap="square" lIns="0" rIns="0" tIns="0" bIns="0">
+            <a:spAutoFit/>
+          </a:bodyPr>
+          <a:lstStyle/>
+          <a:p>
+            <a:pPr algn="l">
+              <a:lnSpc>
+                <a:spcPct val="125000"/>
+              </a:lnSpc>
+            </a:pPr>
+            <a:r>
+              <a:rPr sz="3200" b="1">
                 <a:solidFill>
                   <a:srgbClr val="0F141F"/>
                 </a:solidFill>
@@ -13858,7 +13858,7 @@
         </p:nvCxnSpPr>
         <p:spPr>
           <a:xfrm>
-            <a:off x="640080" y="1783080"/>
+            <a:off x="640080" y="1828800"/>
             <a:ext cx="10881360" cy="0"/>
           </a:xfrm>
           <a:prstGeom prst="line">
@@ -13913,7 +13913,7 @@
               </a:lnSpc>
             </a:pPr>
             <a:r>
-              <a:rPr sz="900" b="0">
+              <a:rPr sz="1100" b="0">
                 <a:solidFill>
                   <a:srgbClr val="8B95A7"/>
                 </a:solidFill>
@@ -14165,7 +14165,7 @@
               </a:lnSpc>
             </a:pPr>
             <a:r>
-              <a:rPr sz="1100" b="0">
+              <a:rPr sz="1200" b="0">
                 <a:solidFill>
                   <a:srgbClr val="8B95A7"/>
                 </a:solidFill>
@@ -14243,7 +14243,7 @@
               </a:lnSpc>
             </a:pPr>
             <a:r>
-              <a:rPr sz="1200" b="0">
+              <a:rPr sz="1400" b="0">
                 <a:solidFill>
                   <a:srgbClr val="424B5C"/>
                 </a:solidFill>
@@ -14585,7 +14585,7 @@
               </a:lnSpc>
             </a:pPr>
             <a:r>
-              <a:rPr sz="1100" b="0">
+              <a:rPr sz="1200" b="0">
                 <a:solidFill>
                   <a:srgbClr val="8B95A7"/>
                 </a:solidFill>
@@ -14663,7 +14663,7 @@
               </a:lnSpc>
             </a:pPr>
             <a:r>
-              <a:rPr sz="1200" b="0">
+              <a:rPr sz="1400" b="0">
                 <a:solidFill>
                   <a:srgbClr val="424B5C"/>
                 </a:solidFill>
@@ -14831,7 +14831,7 @@
               </a:lnSpc>
             </a:pPr>
             <a:r>
-              <a:rPr sz="1100" b="0">
+              <a:rPr sz="1200" b="0">
                 <a:solidFill>
                   <a:srgbClr val="8B95A7"/>
                 </a:solidFill>
@@ -14911,27 +14911,27 @@
         </p:nvSpPr>
         <p:spPr>
           <a:xfrm>
-            <a:off x="640080" y="502920"/>
-            <a:ext cx="10972800" cy="320040"/>
-          </a:xfrm>
-          <a:prstGeom prst="rect">
-            <a:avLst/>
-          </a:prstGeom>
-          <a:noFill/>
-        </p:spPr>
-        <p:txBody>
-          <a:bodyPr wrap="square" lIns="0" rIns="0" tIns="0" bIns="0">
-            <a:spAutoFit/>
-          </a:bodyPr>
-          <a:lstStyle/>
-          <a:p>
-            <a:pPr algn="l">
-              <a:lnSpc>
-                <a:spcPct val="125000"/>
-              </a:lnSpc>
-            </a:pPr>
-            <a:r>
-              <a:rPr sz="1100" b="1">
+            <a:off x="640080" y="457200"/>
+            <a:ext cx="10972800" cy="365760"/>
+          </a:xfrm>
+          <a:prstGeom prst="rect">
+            <a:avLst/>
+          </a:prstGeom>
+          <a:noFill/>
+        </p:spPr>
+        <p:txBody>
+          <a:bodyPr wrap="square" lIns="0" rIns="0" tIns="0" bIns="0">
+            <a:spAutoFit/>
+          </a:bodyPr>
+          <a:lstStyle/>
+          <a:p>
+            <a:pPr algn="l">
+              <a:lnSpc>
+                <a:spcPct val="125000"/>
+              </a:lnSpc>
+            </a:pPr>
+            <a:r>
+              <a:rPr sz="1200" b="1">
                 <a:solidFill>
                   <a:srgbClr val="4F46E5"/>
                 </a:solidFill>
@@ -14950,27 +14950,27 @@
         </p:nvSpPr>
         <p:spPr>
           <a:xfrm>
-            <a:off x="640080" y="868680"/>
-            <a:ext cx="10972800" cy="822960"/>
-          </a:xfrm>
-          <a:prstGeom prst="rect">
-            <a:avLst/>
-          </a:prstGeom>
-          <a:noFill/>
-        </p:spPr>
-        <p:txBody>
-          <a:bodyPr wrap="square" lIns="0" rIns="0" tIns="0" bIns="0">
-            <a:spAutoFit/>
-          </a:bodyPr>
-          <a:lstStyle/>
-          <a:p>
-            <a:pPr algn="l">
-              <a:lnSpc>
-                <a:spcPct val="125000"/>
-              </a:lnSpc>
-            </a:pPr>
-            <a:r>
-              <a:rPr sz="2800" b="1">
+            <a:off x="640080" y="822960"/>
+            <a:ext cx="10972800" cy="914400"/>
+          </a:xfrm>
+          <a:prstGeom prst="rect">
+            <a:avLst/>
+          </a:prstGeom>
+          <a:noFill/>
+        </p:spPr>
+        <p:txBody>
+          <a:bodyPr wrap="square" lIns="0" rIns="0" tIns="0" bIns="0">
+            <a:spAutoFit/>
+          </a:bodyPr>
+          <a:lstStyle/>
+          <a:p>
+            <a:pPr algn="l">
+              <a:lnSpc>
+                <a:spcPct val="125000"/>
+              </a:lnSpc>
+            </a:pPr>
+            <a:r>
+              <a:rPr sz="3200" b="1">
                 <a:solidFill>
                   <a:srgbClr val="0F141F"/>
                 </a:solidFill>
@@ -14989,7 +14989,7 @@
         </p:nvCxnSpPr>
         <p:spPr>
           <a:xfrm>
-            <a:off x="640080" y="1783080"/>
+            <a:off x="640080" y="1828800"/>
             <a:ext cx="10881360" cy="0"/>
           </a:xfrm>
           <a:prstGeom prst="line">
@@ -15044,7 +15044,7 @@
               </a:lnSpc>
             </a:pPr>
             <a:r>
-              <a:rPr sz="900" b="0">
+              <a:rPr sz="1100" b="0">
                 <a:solidFill>
                   <a:srgbClr val="8B95A7"/>
                 </a:solidFill>
@@ -15432,27 +15432,27 @@
         </p:nvSpPr>
         <p:spPr>
           <a:xfrm>
-            <a:off x="640080" y="502920"/>
-            <a:ext cx="10972800" cy="320040"/>
-          </a:xfrm>
-          <a:prstGeom prst="rect">
-            <a:avLst/>
-          </a:prstGeom>
-          <a:noFill/>
-        </p:spPr>
-        <p:txBody>
-          <a:bodyPr wrap="square" lIns="0" rIns="0" tIns="0" bIns="0">
-            <a:spAutoFit/>
-          </a:bodyPr>
-          <a:lstStyle/>
-          <a:p>
-            <a:pPr algn="l">
-              <a:lnSpc>
-                <a:spcPct val="125000"/>
-              </a:lnSpc>
-            </a:pPr>
-            <a:r>
-              <a:rPr sz="1100" b="1">
+            <a:off x="640080" y="457200"/>
+            <a:ext cx="10972800" cy="365760"/>
+          </a:xfrm>
+          <a:prstGeom prst="rect">
+            <a:avLst/>
+          </a:prstGeom>
+          <a:noFill/>
+        </p:spPr>
+        <p:txBody>
+          <a:bodyPr wrap="square" lIns="0" rIns="0" tIns="0" bIns="0">
+            <a:spAutoFit/>
+          </a:bodyPr>
+          <a:lstStyle/>
+          <a:p>
+            <a:pPr algn="l">
+              <a:lnSpc>
+                <a:spcPct val="125000"/>
+              </a:lnSpc>
+            </a:pPr>
+            <a:r>
+              <a:rPr sz="1200" b="1">
                 <a:solidFill>
                   <a:srgbClr val="4F46E5"/>
                 </a:solidFill>
@@ -15471,27 +15471,27 @@
         </p:nvSpPr>
         <p:spPr>
           <a:xfrm>
-            <a:off x="640080" y="868680"/>
-            <a:ext cx="10972800" cy="822960"/>
-          </a:xfrm>
-          <a:prstGeom prst="rect">
-            <a:avLst/>
-          </a:prstGeom>
-          <a:noFill/>
-        </p:spPr>
-        <p:txBody>
-          <a:bodyPr wrap="square" lIns="0" rIns="0" tIns="0" bIns="0">
-            <a:spAutoFit/>
-          </a:bodyPr>
-          <a:lstStyle/>
-          <a:p>
-            <a:pPr algn="l">
-              <a:lnSpc>
-                <a:spcPct val="125000"/>
-              </a:lnSpc>
-            </a:pPr>
-            <a:r>
-              <a:rPr sz="2800" b="1">
+            <a:off x="640080" y="822960"/>
+            <a:ext cx="10972800" cy="914400"/>
+          </a:xfrm>
+          <a:prstGeom prst="rect">
+            <a:avLst/>
+          </a:prstGeom>
+          <a:noFill/>
+        </p:spPr>
+        <p:txBody>
+          <a:bodyPr wrap="square" lIns="0" rIns="0" tIns="0" bIns="0">
+            <a:spAutoFit/>
+          </a:bodyPr>
+          <a:lstStyle/>
+          <a:p>
+            <a:pPr algn="l">
+              <a:lnSpc>
+                <a:spcPct val="125000"/>
+              </a:lnSpc>
+            </a:pPr>
+            <a:r>
+              <a:rPr sz="3200" b="1">
                 <a:solidFill>
                   <a:srgbClr val="0F141F"/>
                 </a:solidFill>
@@ -15510,7 +15510,7 @@
         </p:nvCxnSpPr>
         <p:spPr>
           <a:xfrm>
-            <a:off x="640080" y="1783080"/>
+            <a:off x="640080" y="1828800"/>
             <a:ext cx="10881360" cy="0"/>
           </a:xfrm>
           <a:prstGeom prst="line">
@@ -15565,7 +15565,7 @@
               </a:lnSpc>
             </a:pPr>
             <a:r>
-              <a:rPr sz="900" b="0">
+              <a:rPr sz="1100" b="0">
                 <a:solidFill>
                   <a:srgbClr val="8B95A7"/>
                 </a:solidFill>
@@ -16030,7 +16030,7 @@
               </a:lnSpc>
             </a:pPr>
             <a:r>
-              <a:rPr sz="1000" b="1">
+              <a:rPr sz="1100" b="1">
                 <a:solidFill>
                   <a:srgbClr val="8B95A7"/>
                 </a:solidFill>
@@ -16495,7 +16495,7 @@
               </a:lnSpc>
             </a:pPr>
             <a:r>
-              <a:rPr sz="1000" b="1">
+              <a:rPr sz="1100" b="1">
                 <a:solidFill>
                   <a:srgbClr val="8B95A7"/>
                 </a:solidFill>
@@ -16960,7 +16960,7 @@
               </a:lnSpc>
             </a:pPr>
             <a:r>
-              <a:rPr sz="1000" b="1">
+              <a:rPr sz="1100" b="1">
                 <a:solidFill>
                   <a:srgbClr val="8B95A7"/>
                 </a:solidFill>
@@ -17038,7 +17038,7 @@
               </a:lnSpc>
             </a:pPr>
             <a:r>
-              <a:rPr sz="1100" b="0">
+              <a:rPr sz="1200" b="0">
                 <a:solidFill>
                   <a:srgbClr val="8B95A7"/>
                 </a:solidFill>
@@ -17118,27 +17118,27 @@
         </p:nvSpPr>
         <p:spPr>
           <a:xfrm>
-            <a:off x="640080" y="502920"/>
-            <a:ext cx="10972800" cy="320040"/>
-          </a:xfrm>
-          <a:prstGeom prst="rect">
-            <a:avLst/>
-          </a:prstGeom>
-          <a:noFill/>
-        </p:spPr>
-        <p:txBody>
-          <a:bodyPr wrap="square" lIns="0" rIns="0" tIns="0" bIns="0">
-            <a:spAutoFit/>
-          </a:bodyPr>
-          <a:lstStyle/>
-          <a:p>
-            <a:pPr algn="l">
-              <a:lnSpc>
-                <a:spcPct val="125000"/>
-              </a:lnSpc>
-            </a:pPr>
-            <a:r>
-              <a:rPr sz="1100" b="1">
+            <a:off x="640080" y="457200"/>
+            <a:ext cx="10972800" cy="365760"/>
+          </a:xfrm>
+          <a:prstGeom prst="rect">
+            <a:avLst/>
+          </a:prstGeom>
+          <a:noFill/>
+        </p:spPr>
+        <p:txBody>
+          <a:bodyPr wrap="square" lIns="0" rIns="0" tIns="0" bIns="0">
+            <a:spAutoFit/>
+          </a:bodyPr>
+          <a:lstStyle/>
+          <a:p>
+            <a:pPr algn="l">
+              <a:lnSpc>
+                <a:spcPct val="125000"/>
+              </a:lnSpc>
+            </a:pPr>
+            <a:r>
+              <a:rPr sz="1200" b="1">
                 <a:solidFill>
                   <a:srgbClr val="4F46E5"/>
                 </a:solidFill>
@@ -17157,27 +17157,27 @@
         </p:nvSpPr>
         <p:spPr>
           <a:xfrm>
-            <a:off x="640080" y="868680"/>
-            <a:ext cx="10972800" cy="822960"/>
-          </a:xfrm>
-          <a:prstGeom prst="rect">
-            <a:avLst/>
-          </a:prstGeom>
-          <a:noFill/>
-        </p:spPr>
-        <p:txBody>
-          <a:bodyPr wrap="square" lIns="0" rIns="0" tIns="0" bIns="0">
-            <a:spAutoFit/>
-          </a:bodyPr>
-          <a:lstStyle/>
-          <a:p>
-            <a:pPr algn="l">
-              <a:lnSpc>
-                <a:spcPct val="125000"/>
-              </a:lnSpc>
-            </a:pPr>
-            <a:r>
-              <a:rPr sz="2800" b="1">
+            <a:off x="640080" y="822960"/>
+            <a:ext cx="10972800" cy="914400"/>
+          </a:xfrm>
+          <a:prstGeom prst="rect">
+            <a:avLst/>
+          </a:prstGeom>
+          <a:noFill/>
+        </p:spPr>
+        <p:txBody>
+          <a:bodyPr wrap="square" lIns="0" rIns="0" tIns="0" bIns="0">
+            <a:spAutoFit/>
+          </a:bodyPr>
+          <a:lstStyle/>
+          <a:p>
+            <a:pPr algn="l">
+              <a:lnSpc>
+                <a:spcPct val="125000"/>
+              </a:lnSpc>
+            </a:pPr>
+            <a:r>
+              <a:rPr sz="3200" b="1">
                 <a:solidFill>
                   <a:srgbClr val="0F141F"/>
                 </a:solidFill>
@@ -17196,7 +17196,7 @@
         </p:nvCxnSpPr>
         <p:spPr>
           <a:xfrm>
-            <a:off x="640080" y="1783080"/>
+            <a:off x="640080" y="1828800"/>
             <a:ext cx="10881360" cy="0"/>
           </a:xfrm>
           <a:prstGeom prst="line">
@@ -17251,7 +17251,7 @@
               </a:lnSpc>
             </a:pPr>
             <a:r>
-              <a:rPr sz="900" b="0">
+              <a:rPr sz="1100" b="0">
                 <a:solidFill>
                   <a:srgbClr val="8B95A7"/>
                 </a:solidFill>
@@ -17353,7 +17353,7 @@
               </a:lnSpc>
             </a:pPr>
             <a:r>
-              <a:rPr sz="1000" b="0">
+              <a:rPr sz="1100" b="0">
                 <a:solidFill>
                   <a:srgbClr val="8B95A7"/>
                 </a:solidFill>
@@ -17455,7 +17455,7 @@
               </a:lnSpc>
             </a:pPr>
             <a:r>
-              <a:rPr sz="1000" b="0">
+              <a:rPr sz="1100" b="0">
                 <a:solidFill>
                   <a:srgbClr val="8B95A7"/>
                 </a:solidFill>
@@ -17535,27 +17535,27 @@
         </p:nvSpPr>
         <p:spPr>
           <a:xfrm>
-            <a:off x="640080" y="502920"/>
-            <a:ext cx="10972800" cy="320040"/>
-          </a:xfrm>
-          <a:prstGeom prst="rect">
-            <a:avLst/>
-          </a:prstGeom>
-          <a:noFill/>
-        </p:spPr>
-        <p:txBody>
-          <a:bodyPr wrap="square" lIns="0" rIns="0" tIns="0" bIns="0">
-            <a:spAutoFit/>
-          </a:bodyPr>
-          <a:lstStyle/>
-          <a:p>
-            <a:pPr algn="l">
-              <a:lnSpc>
-                <a:spcPct val="125000"/>
-              </a:lnSpc>
-            </a:pPr>
-            <a:r>
-              <a:rPr sz="1100" b="1">
+            <a:off x="640080" y="457200"/>
+            <a:ext cx="10972800" cy="365760"/>
+          </a:xfrm>
+          <a:prstGeom prst="rect">
+            <a:avLst/>
+          </a:prstGeom>
+          <a:noFill/>
+        </p:spPr>
+        <p:txBody>
+          <a:bodyPr wrap="square" lIns="0" rIns="0" tIns="0" bIns="0">
+            <a:spAutoFit/>
+          </a:bodyPr>
+          <a:lstStyle/>
+          <a:p>
+            <a:pPr algn="l">
+              <a:lnSpc>
+                <a:spcPct val="125000"/>
+              </a:lnSpc>
+            </a:pPr>
+            <a:r>
+              <a:rPr sz="1200" b="1">
                 <a:solidFill>
                   <a:srgbClr val="4F46E5"/>
                 </a:solidFill>
@@ -17574,27 +17574,27 @@
         </p:nvSpPr>
         <p:spPr>
           <a:xfrm>
-            <a:off x="640080" y="868680"/>
-            <a:ext cx="10972800" cy="822960"/>
-          </a:xfrm>
-          <a:prstGeom prst="rect">
-            <a:avLst/>
-          </a:prstGeom>
-          <a:noFill/>
-        </p:spPr>
-        <p:txBody>
-          <a:bodyPr wrap="square" lIns="0" rIns="0" tIns="0" bIns="0">
-            <a:spAutoFit/>
-          </a:bodyPr>
-          <a:lstStyle/>
-          <a:p>
-            <a:pPr algn="l">
-              <a:lnSpc>
-                <a:spcPct val="125000"/>
-              </a:lnSpc>
-            </a:pPr>
-            <a:r>
-              <a:rPr sz="2800" b="1">
+            <a:off x="640080" y="822960"/>
+            <a:ext cx="10972800" cy="914400"/>
+          </a:xfrm>
+          <a:prstGeom prst="rect">
+            <a:avLst/>
+          </a:prstGeom>
+          <a:noFill/>
+        </p:spPr>
+        <p:txBody>
+          <a:bodyPr wrap="square" lIns="0" rIns="0" tIns="0" bIns="0">
+            <a:spAutoFit/>
+          </a:bodyPr>
+          <a:lstStyle/>
+          <a:p>
+            <a:pPr algn="l">
+              <a:lnSpc>
+                <a:spcPct val="125000"/>
+              </a:lnSpc>
+            </a:pPr>
+            <a:r>
+              <a:rPr sz="3200" b="1">
                 <a:solidFill>
                   <a:srgbClr val="0F141F"/>
                 </a:solidFill>
@@ -17613,7 +17613,7 @@
         </p:nvCxnSpPr>
         <p:spPr>
           <a:xfrm>
-            <a:off x="640080" y="1783080"/>
+            <a:off x="640080" y="1828800"/>
             <a:ext cx="10881360" cy="0"/>
           </a:xfrm>
           <a:prstGeom prst="line">
@@ -17668,7 +17668,7 @@
               </a:lnSpc>
             </a:pPr>
             <a:r>
-              <a:rPr sz="900" b="0">
+              <a:rPr sz="1100" b="0">
                 <a:solidFill>
                   <a:srgbClr val="8B95A7"/>
                 </a:solidFill>
@@ -17770,7 +17770,7 @@
               </a:lnSpc>
             </a:pPr>
             <a:r>
-              <a:rPr sz="1000" b="0">
+              <a:rPr sz="1100" b="0">
                 <a:solidFill>
                   <a:srgbClr val="8B95A7"/>
                 </a:solidFill>
@@ -17872,7 +17872,7 @@
               </a:lnSpc>
             </a:pPr>
             <a:r>
-              <a:rPr sz="1000" b="0">
+              <a:rPr sz="1100" b="0">
                 <a:solidFill>
                   <a:srgbClr val="8B95A7"/>
                 </a:solidFill>
@@ -17952,27 +17952,27 @@
         </p:nvSpPr>
         <p:spPr>
           <a:xfrm>
-            <a:off x="640080" y="502920"/>
-            <a:ext cx="10972800" cy="320040"/>
-          </a:xfrm>
-          <a:prstGeom prst="rect">
-            <a:avLst/>
-          </a:prstGeom>
-          <a:noFill/>
-        </p:spPr>
-        <p:txBody>
-          <a:bodyPr wrap="square" lIns="0" rIns="0" tIns="0" bIns="0">
-            <a:spAutoFit/>
-          </a:bodyPr>
-          <a:lstStyle/>
-          <a:p>
-            <a:pPr algn="l">
-              <a:lnSpc>
-                <a:spcPct val="125000"/>
-              </a:lnSpc>
-            </a:pPr>
-            <a:r>
-              <a:rPr sz="1100" b="1">
+            <a:off x="640080" y="457200"/>
+            <a:ext cx="10972800" cy="365760"/>
+          </a:xfrm>
+          <a:prstGeom prst="rect">
+            <a:avLst/>
+          </a:prstGeom>
+          <a:noFill/>
+        </p:spPr>
+        <p:txBody>
+          <a:bodyPr wrap="square" lIns="0" rIns="0" tIns="0" bIns="0">
+            <a:spAutoFit/>
+          </a:bodyPr>
+          <a:lstStyle/>
+          <a:p>
+            <a:pPr algn="l">
+              <a:lnSpc>
+                <a:spcPct val="125000"/>
+              </a:lnSpc>
+            </a:pPr>
+            <a:r>
+              <a:rPr sz="1200" b="1">
                 <a:solidFill>
                   <a:srgbClr val="4F46E5"/>
                 </a:solidFill>
@@ -17991,27 +17991,27 @@
         </p:nvSpPr>
         <p:spPr>
           <a:xfrm>
-            <a:off x="640080" y="868680"/>
-            <a:ext cx="10972800" cy="822960"/>
-          </a:xfrm>
-          <a:prstGeom prst="rect">
-            <a:avLst/>
-          </a:prstGeom>
-          <a:noFill/>
-        </p:spPr>
-        <p:txBody>
-          <a:bodyPr wrap="square" lIns="0" rIns="0" tIns="0" bIns="0">
-            <a:spAutoFit/>
-          </a:bodyPr>
-          <a:lstStyle/>
-          <a:p>
-            <a:pPr algn="l">
-              <a:lnSpc>
-                <a:spcPct val="125000"/>
-              </a:lnSpc>
-            </a:pPr>
-            <a:r>
-              <a:rPr sz="2800" b="1">
+            <a:off x="640080" y="822960"/>
+            <a:ext cx="10972800" cy="914400"/>
+          </a:xfrm>
+          <a:prstGeom prst="rect">
+            <a:avLst/>
+          </a:prstGeom>
+          <a:noFill/>
+        </p:spPr>
+        <p:txBody>
+          <a:bodyPr wrap="square" lIns="0" rIns="0" tIns="0" bIns="0">
+            <a:spAutoFit/>
+          </a:bodyPr>
+          <a:lstStyle/>
+          <a:p>
+            <a:pPr algn="l">
+              <a:lnSpc>
+                <a:spcPct val="125000"/>
+              </a:lnSpc>
+            </a:pPr>
+            <a:r>
+              <a:rPr sz="3200" b="1">
                 <a:solidFill>
                   <a:srgbClr val="0F141F"/>
                 </a:solidFill>
@@ -18030,7 +18030,7 @@
         </p:nvCxnSpPr>
         <p:spPr>
           <a:xfrm>
-            <a:off x="640080" y="1783080"/>
+            <a:off x="640080" y="1828800"/>
             <a:ext cx="10881360" cy="0"/>
           </a:xfrm>
           <a:prstGeom prst="line">
@@ -18085,7 +18085,7 @@
               </a:lnSpc>
             </a:pPr>
             <a:r>
-              <a:rPr sz="900" b="0">
+              <a:rPr sz="1100" b="0">
                 <a:solidFill>
                   <a:srgbClr val="8B95A7"/>
                 </a:solidFill>
@@ -18446,7 +18446,7 @@
               </a:lnSpc>
             </a:pPr>
             <a:r>
-              <a:rPr sz="1100" b="0">
+              <a:rPr sz="1300" b="0">
                 <a:solidFill>
                   <a:srgbClr val="424B5C"/>
                 </a:solidFill>
@@ -18462,7 +18462,7 @@
               </a:lnSpc>
             </a:pPr>
             <a:r>
-              <a:rPr sz="1100" b="0">
+              <a:rPr sz="1300" b="0">
                 <a:solidFill>
                   <a:srgbClr val="424B5C"/>
                 </a:solidFill>
@@ -18478,7 +18478,7 @@
               </a:lnSpc>
             </a:pPr>
             <a:r>
-              <a:rPr sz="1100" b="0">
+              <a:rPr sz="1300" b="0">
                 <a:solidFill>
                   <a:srgbClr val="424B5C"/>
                 </a:solidFill>
@@ -18687,7 +18687,7 @@
               </a:lnSpc>
             </a:pPr>
             <a:r>
-              <a:rPr sz="1100" b="0">
+              <a:rPr sz="1300" b="0">
                 <a:solidFill>
                   <a:srgbClr val="424B5C"/>
                 </a:solidFill>
@@ -18703,7 +18703,7 @@
               </a:lnSpc>
             </a:pPr>
             <a:r>
-              <a:rPr sz="1100" b="0">
+              <a:rPr sz="1300" b="0">
                 <a:solidFill>
                   <a:srgbClr val="424B5C"/>
                 </a:solidFill>
@@ -18719,7 +18719,7 @@
               </a:lnSpc>
             </a:pPr>
             <a:r>
-              <a:rPr sz="1100" b="0">
+              <a:rPr sz="1300" b="0">
                 <a:solidFill>
                   <a:srgbClr val="424B5C"/>
                 </a:solidFill>
@@ -18838,27 +18838,27 @@
         </p:nvSpPr>
         <p:spPr>
           <a:xfrm>
-            <a:off x="640080" y="502920"/>
-            <a:ext cx="10972800" cy="320040"/>
-          </a:xfrm>
-          <a:prstGeom prst="rect">
-            <a:avLst/>
-          </a:prstGeom>
-          <a:noFill/>
-        </p:spPr>
-        <p:txBody>
-          <a:bodyPr wrap="square" lIns="0" rIns="0" tIns="0" bIns="0">
-            <a:spAutoFit/>
-          </a:bodyPr>
-          <a:lstStyle/>
-          <a:p>
-            <a:pPr algn="l">
-              <a:lnSpc>
-                <a:spcPct val="125000"/>
-              </a:lnSpc>
-            </a:pPr>
-            <a:r>
-              <a:rPr sz="1100" b="1">
+            <a:off x="640080" y="457200"/>
+            <a:ext cx="10972800" cy="365760"/>
+          </a:xfrm>
+          <a:prstGeom prst="rect">
+            <a:avLst/>
+          </a:prstGeom>
+          <a:noFill/>
+        </p:spPr>
+        <p:txBody>
+          <a:bodyPr wrap="square" lIns="0" rIns="0" tIns="0" bIns="0">
+            <a:spAutoFit/>
+          </a:bodyPr>
+          <a:lstStyle/>
+          <a:p>
+            <a:pPr algn="l">
+              <a:lnSpc>
+                <a:spcPct val="125000"/>
+              </a:lnSpc>
+            </a:pPr>
+            <a:r>
+              <a:rPr sz="1200" b="1">
                 <a:solidFill>
                   <a:srgbClr val="4F46E5"/>
                 </a:solidFill>
@@ -18877,27 +18877,27 @@
         </p:nvSpPr>
         <p:spPr>
           <a:xfrm>
-            <a:off x="640080" y="868680"/>
-            <a:ext cx="10972800" cy="822960"/>
-          </a:xfrm>
-          <a:prstGeom prst="rect">
-            <a:avLst/>
-          </a:prstGeom>
-          <a:noFill/>
-        </p:spPr>
-        <p:txBody>
-          <a:bodyPr wrap="square" lIns="0" rIns="0" tIns="0" bIns="0">
-            <a:spAutoFit/>
-          </a:bodyPr>
-          <a:lstStyle/>
-          <a:p>
-            <a:pPr algn="l">
-              <a:lnSpc>
-                <a:spcPct val="125000"/>
-              </a:lnSpc>
-            </a:pPr>
-            <a:r>
-              <a:rPr sz="2800" b="1">
+            <a:off x="640080" y="822960"/>
+            <a:ext cx="10972800" cy="914400"/>
+          </a:xfrm>
+          <a:prstGeom prst="rect">
+            <a:avLst/>
+          </a:prstGeom>
+          <a:noFill/>
+        </p:spPr>
+        <p:txBody>
+          <a:bodyPr wrap="square" lIns="0" rIns="0" tIns="0" bIns="0">
+            <a:spAutoFit/>
+          </a:bodyPr>
+          <a:lstStyle/>
+          <a:p>
+            <a:pPr algn="l">
+              <a:lnSpc>
+                <a:spcPct val="125000"/>
+              </a:lnSpc>
+            </a:pPr>
+            <a:r>
+              <a:rPr sz="3200" b="1">
                 <a:solidFill>
                   <a:srgbClr val="0F141F"/>
                 </a:solidFill>
@@ -18916,7 +18916,7 @@
         </p:nvCxnSpPr>
         <p:spPr>
           <a:xfrm>
-            <a:off x="640080" y="1783080"/>
+            <a:off x="640080" y="1828800"/>
             <a:ext cx="10881360" cy="0"/>
           </a:xfrm>
           <a:prstGeom prst="line">
@@ -18971,7 +18971,7 @@
               </a:lnSpc>
             </a:pPr>
             <a:r>
-              <a:rPr sz="900" b="0">
+              <a:rPr sz="1100" b="0">
                 <a:solidFill>
                   <a:srgbClr val="8B95A7"/>
                 </a:solidFill>
@@ -19180,7 +19180,7 @@
               </a:lnSpc>
             </a:pPr>
             <a:r>
-              <a:rPr sz="1000" b="0">
+              <a:rPr sz="1100" b="0">
                 <a:solidFill>
                   <a:srgbClr val="8B95A7"/>
                 </a:solidFill>
@@ -19332,7 +19332,7 @@
               </a:lnSpc>
             </a:pPr>
             <a:r>
-              <a:rPr sz="900" b="0">
+              <a:rPr sz="1100" b="0">
                 <a:solidFill>
                   <a:srgbClr val="424B5C"/>
                 </a:solidFill>
@@ -19449,7 +19449,7 @@
               </a:lnSpc>
             </a:pPr>
             <a:r>
-              <a:rPr sz="900" b="0">
+              <a:rPr sz="1100" b="0">
                 <a:solidFill>
                   <a:srgbClr val="424B5C"/>
                 </a:solidFill>
@@ -19566,7 +19566,7 @@
               </a:lnSpc>
             </a:pPr>
             <a:r>
-              <a:rPr sz="900" b="0">
+              <a:rPr sz="1100" b="0">
                 <a:solidFill>
                   <a:srgbClr val="424B5C"/>
                 </a:solidFill>
@@ -19683,7 +19683,7 @@
               </a:lnSpc>
             </a:pPr>
             <a:r>
-              <a:rPr sz="900" b="0">
+              <a:rPr sz="1100" b="0">
                 <a:solidFill>
                   <a:srgbClr val="424B5C"/>
                 </a:solidFill>
@@ -19761,7 +19761,7 @@
               </a:lnSpc>
             </a:pPr>
             <a:r>
-              <a:rPr sz="1100" b="0">
+              <a:rPr sz="1300" b="0">
                 <a:solidFill>
                   <a:srgbClr val="424B5C"/>
                 </a:solidFill>
@@ -19777,7 +19777,7 @@
               </a:lnSpc>
             </a:pPr>
             <a:r>
-              <a:rPr sz="1100" b="0">
+              <a:rPr sz="1300" b="0">
                 <a:solidFill>
                   <a:srgbClr val="424B5C"/>
                 </a:solidFill>
@@ -19793,7 +19793,7 @@
               </a:lnSpc>
             </a:pPr>
             <a:r>
-              <a:rPr sz="1100" b="0">
+              <a:rPr sz="1300" b="0">
                 <a:solidFill>
                   <a:srgbClr val="424B5C"/>
                 </a:solidFill>
@@ -19809,7 +19809,7 @@
               </a:lnSpc>
             </a:pPr>
             <a:r>
-              <a:rPr sz="1100" b="0">
+              <a:rPr sz="1300" b="0">
                 <a:solidFill>
                   <a:srgbClr val="424B5C"/>
                 </a:solidFill>
@@ -19825,7 +19825,7 @@
               </a:lnSpc>
             </a:pPr>
             <a:r>
-              <a:rPr sz="1100" b="0">
+              <a:rPr sz="1300" b="0">
                 <a:solidFill>
                   <a:srgbClr val="424B5C"/>
                 </a:solidFill>
@@ -19938,7 +19938,7 @@
               </a:lnSpc>
             </a:pPr>
             <a:r>
-              <a:rPr sz="1100" b="0">
+              <a:rPr sz="1300" b="0">
                 <a:solidFill>
                   <a:srgbClr val="424B5C"/>
                 </a:solidFill>
@@ -19954,7 +19954,7 @@
               </a:lnSpc>
             </a:pPr>
             <a:r>
-              <a:rPr sz="1100" b="0">
+              <a:rPr sz="1300" b="0">
                 <a:solidFill>
                   <a:srgbClr val="424B5C"/>
                 </a:solidFill>
@@ -19970,7 +19970,7 @@
               </a:lnSpc>
             </a:pPr>
             <a:r>
-              <a:rPr sz="1100" b="0">
+              <a:rPr sz="1300" b="0">
                 <a:solidFill>
                   <a:srgbClr val="424B5C"/>
                 </a:solidFill>
@@ -20009,7 +20009,7 @@
               </a:lnSpc>
             </a:pPr>
             <a:r>
-              <a:rPr sz="900" b="0">
+              <a:rPr sz="1100" b="0">
                 <a:solidFill>
                   <a:srgbClr val="8B95A7"/>
                 </a:solidFill>
@@ -20089,27 +20089,27 @@
         </p:nvSpPr>
         <p:spPr>
           <a:xfrm>
-            <a:off x="640080" y="502920"/>
-            <a:ext cx="10972800" cy="320040"/>
-          </a:xfrm>
-          <a:prstGeom prst="rect">
-            <a:avLst/>
-          </a:prstGeom>
-          <a:noFill/>
-        </p:spPr>
-        <p:txBody>
-          <a:bodyPr wrap="square" lIns="0" rIns="0" tIns="0" bIns="0">
-            <a:spAutoFit/>
-          </a:bodyPr>
-          <a:lstStyle/>
-          <a:p>
-            <a:pPr algn="l">
-              <a:lnSpc>
-                <a:spcPct val="125000"/>
-              </a:lnSpc>
-            </a:pPr>
-            <a:r>
-              <a:rPr sz="1100" b="1">
+            <a:off x="640080" y="457200"/>
+            <a:ext cx="10972800" cy="365760"/>
+          </a:xfrm>
+          <a:prstGeom prst="rect">
+            <a:avLst/>
+          </a:prstGeom>
+          <a:noFill/>
+        </p:spPr>
+        <p:txBody>
+          <a:bodyPr wrap="square" lIns="0" rIns="0" tIns="0" bIns="0">
+            <a:spAutoFit/>
+          </a:bodyPr>
+          <a:lstStyle/>
+          <a:p>
+            <a:pPr algn="l">
+              <a:lnSpc>
+                <a:spcPct val="125000"/>
+              </a:lnSpc>
+            </a:pPr>
+            <a:r>
+              <a:rPr sz="1200" b="1">
                 <a:solidFill>
                   <a:srgbClr val="4F46E5"/>
                 </a:solidFill>
@@ -20128,27 +20128,27 @@
         </p:nvSpPr>
         <p:spPr>
           <a:xfrm>
-            <a:off x="640080" y="868680"/>
-            <a:ext cx="10972800" cy="822960"/>
-          </a:xfrm>
-          <a:prstGeom prst="rect">
-            <a:avLst/>
-          </a:prstGeom>
-          <a:noFill/>
-        </p:spPr>
-        <p:txBody>
-          <a:bodyPr wrap="square" lIns="0" rIns="0" tIns="0" bIns="0">
-            <a:spAutoFit/>
-          </a:bodyPr>
-          <a:lstStyle/>
-          <a:p>
-            <a:pPr algn="l">
-              <a:lnSpc>
-                <a:spcPct val="125000"/>
-              </a:lnSpc>
-            </a:pPr>
-            <a:r>
-              <a:rPr sz="2800" b="1">
+            <a:off x="640080" y="822960"/>
+            <a:ext cx="10972800" cy="914400"/>
+          </a:xfrm>
+          <a:prstGeom prst="rect">
+            <a:avLst/>
+          </a:prstGeom>
+          <a:noFill/>
+        </p:spPr>
+        <p:txBody>
+          <a:bodyPr wrap="square" lIns="0" rIns="0" tIns="0" bIns="0">
+            <a:spAutoFit/>
+          </a:bodyPr>
+          <a:lstStyle/>
+          <a:p>
+            <a:pPr algn="l">
+              <a:lnSpc>
+                <a:spcPct val="125000"/>
+              </a:lnSpc>
+            </a:pPr>
+            <a:r>
+              <a:rPr sz="3200" b="1">
                 <a:solidFill>
                   <a:srgbClr val="0F141F"/>
                 </a:solidFill>
@@ -20167,7 +20167,7 @@
         </p:nvCxnSpPr>
         <p:spPr>
           <a:xfrm>
-            <a:off x="640080" y="1783080"/>
+            <a:off x="640080" y="1828800"/>
             <a:ext cx="10881360" cy="0"/>
           </a:xfrm>
           <a:prstGeom prst="line">
@@ -20222,7 +20222,7 @@
               </a:lnSpc>
             </a:pPr>
             <a:r>
-              <a:rPr sz="900" b="0">
+              <a:rPr sz="1100" b="0">
                 <a:solidFill>
                   <a:srgbClr val="8B95A7"/>
                 </a:solidFill>
@@ -20261,7 +20261,7 @@
               </a:lnSpc>
             </a:pPr>
             <a:r>
-              <a:rPr sz="1200" b="0">
+              <a:rPr sz="1400" b="0">
                 <a:solidFill>
                   <a:srgbClr val="424B5C"/>
                 </a:solidFill>
@@ -20584,7 +20584,7 @@
               </a:lnSpc>
             </a:pPr>
             <a:r>
-              <a:rPr sz="1000" b="0">
+              <a:rPr sz="1200" b="0">
                 <a:solidFill>
                   <a:srgbClr val="424B5C"/>
                 </a:solidFill>
@@ -20600,7 +20600,7 @@
               </a:lnSpc>
             </a:pPr>
             <a:r>
-              <a:rPr sz="1000" b="0">
+              <a:rPr sz="1200" b="0">
                 <a:solidFill>
                   <a:srgbClr val="424B5C"/>
                 </a:solidFill>
@@ -20770,7 +20770,7 @@
               </a:lnSpc>
             </a:pPr>
             <a:r>
-              <a:rPr sz="1000" b="0">
+              <a:rPr sz="1200" b="0">
                 <a:solidFill>
                   <a:srgbClr val="424B5C"/>
                 </a:solidFill>
@@ -20786,7 +20786,7 @@
               </a:lnSpc>
             </a:pPr>
             <a:r>
-              <a:rPr sz="1000" b="0">
+              <a:rPr sz="1200" b="0">
                 <a:solidFill>
                   <a:srgbClr val="424B5C"/>
                 </a:solidFill>
@@ -20944,27 +20944,27 @@
         </p:nvSpPr>
         <p:spPr>
           <a:xfrm>
-            <a:off x="640080" y="502920"/>
-            <a:ext cx="10972800" cy="320040"/>
-          </a:xfrm>
-          <a:prstGeom prst="rect">
-            <a:avLst/>
-          </a:prstGeom>
-          <a:noFill/>
-        </p:spPr>
-        <p:txBody>
-          <a:bodyPr wrap="square" lIns="0" rIns="0" tIns="0" bIns="0">
-            <a:spAutoFit/>
-          </a:bodyPr>
-          <a:lstStyle/>
-          <a:p>
-            <a:pPr algn="l">
-              <a:lnSpc>
-                <a:spcPct val="125000"/>
-              </a:lnSpc>
-            </a:pPr>
-            <a:r>
-              <a:rPr sz="1100" b="1">
+            <a:off x="640080" y="457200"/>
+            <a:ext cx="10972800" cy="365760"/>
+          </a:xfrm>
+          <a:prstGeom prst="rect">
+            <a:avLst/>
+          </a:prstGeom>
+          <a:noFill/>
+        </p:spPr>
+        <p:txBody>
+          <a:bodyPr wrap="square" lIns="0" rIns="0" tIns="0" bIns="0">
+            <a:spAutoFit/>
+          </a:bodyPr>
+          <a:lstStyle/>
+          <a:p>
+            <a:pPr algn="l">
+              <a:lnSpc>
+                <a:spcPct val="125000"/>
+              </a:lnSpc>
+            </a:pPr>
+            <a:r>
+              <a:rPr sz="1200" b="1">
                 <a:solidFill>
                   <a:srgbClr val="4F46E5"/>
                 </a:solidFill>
@@ -20983,27 +20983,27 @@
         </p:nvSpPr>
         <p:spPr>
           <a:xfrm>
-            <a:off x="640080" y="868680"/>
-            <a:ext cx="10972800" cy="822960"/>
-          </a:xfrm>
-          <a:prstGeom prst="rect">
-            <a:avLst/>
-          </a:prstGeom>
-          <a:noFill/>
-        </p:spPr>
-        <p:txBody>
-          <a:bodyPr wrap="square" lIns="0" rIns="0" tIns="0" bIns="0">
-            <a:spAutoFit/>
-          </a:bodyPr>
-          <a:lstStyle/>
-          <a:p>
-            <a:pPr algn="l">
-              <a:lnSpc>
-                <a:spcPct val="125000"/>
-              </a:lnSpc>
-            </a:pPr>
-            <a:r>
-              <a:rPr sz="2800" b="1">
+            <a:off x="640080" y="822960"/>
+            <a:ext cx="10972800" cy="914400"/>
+          </a:xfrm>
+          <a:prstGeom prst="rect">
+            <a:avLst/>
+          </a:prstGeom>
+          <a:noFill/>
+        </p:spPr>
+        <p:txBody>
+          <a:bodyPr wrap="square" lIns="0" rIns="0" tIns="0" bIns="0">
+            <a:spAutoFit/>
+          </a:bodyPr>
+          <a:lstStyle/>
+          <a:p>
+            <a:pPr algn="l">
+              <a:lnSpc>
+                <a:spcPct val="125000"/>
+              </a:lnSpc>
+            </a:pPr>
+            <a:r>
+              <a:rPr sz="3200" b="1">
                 <a:solidFill>
                   <a:srgbClr val="0F141F"/>
                 </a:solidFill>
@@ -21022,7 +21022,7 @@
         </p:nvCxnSpPr>
         <p:spPr>
           <a:xfrm>
-            <a:off x="640080" y="1783080"/>
+            <a:off x="640080" y="1828800"/>
             <a:ext cx="10881360" cy="0"/>
           </a:xfrm>
           <a:prstGeom prst="line">
@@ -21077,7 +21077,7 @@
               </a:lnSpc>
             </a:pPr>
             <a:r>
-              <a:rPr sz="900" b="0">
+              <a:rPr sz="1100" b="0">
                 <a:solidFill>
                   <a:srgbClr val="8B95A7"/>
                 </a:solidFill>
@@ -21155,7 +21155,7 @@
               </a:lnSpc>
             </a:pPr>
             <a:r>
-              <a:rPr sz="1200" b="0">
+              <a:rPr sz="1400" b="0">
                 <a:solidFill>
                   <a:srgbClr val="424B5C"/>
                 </a:solidFill>
@@ -21346,7 +21346,7 @@
               </a:lnSpc>
             </a:pPr>
             <a:r>
-              <a:rPr sz="1000" b="0">
+              <a:rPr sz="1200" b="0">
                 <a:solidFill>
                   <a:srgbClr val="424B5C"/>
                 </a:solidFill>
@@ -21502,7 +21502,7 @@
               </a:lnSpc>
             </a:pPr>
             <a:r>
-              <a:rPr sz="1000" b="0">
+              <a:rPr sz="1200" b="0">
                 <a:solidFill>
                   <a:srgbClr val="424B5C"/>
                 </a:solidFill>
@@ -21658,7 +21658,7 @@
               </a:lnSpc>
             </a:pPr>
             <a:r>
-              <a:rPr sz="1000" b="0">
+              <a:rPr sz="1200" b="0">
                 <a:solidFill>
                   <a:srgbClr val="424B5C"/>
                 </a:solidFill>
@@ -21814,7 +21814,7 @@
               </a:lnSpc>
             </a:pPr>
             <a:r>
-              <a:rPr sz="1000" b="0">
+              <a:rPr sz="1200" b="0">
                 <a:solidFill>
                   <a:srgbClr val="424B5C"/>
                 </a:solidFill>
@@ -21970,7 +21970,7 @@
               </a:lnSpc>
             </a:pPr>
             <a:r>
-              <a:rPr sz="1000" b="0">
+              <a:rPr sz="1200" b="0">
                 <a:solidFill>
                   <a:srgbClr val="424B5C"/>
                 </a:solidFill>
@@ -22128,27 +22128,27 @@
         </p:nvSpPr>
         <p:spPr>
           <a:xfrm>
-            <a:off x="640080" y="502920"/>
-            <a:ext cx="10972800" cy="320040"/>
-          </a:xfrm>
-          <a:prstGeom prst="rect">
-            <a:avLst/>
-          </a:prstGeom>
-          <a:noFill/>
-        </p:spPr>
-        <p:txBody>
-          <a:bodyPr wrap="square" lIns="0" rIns="0" tIns="0" bIns="0">
-            <a:spAutoFit/>
-          </a:bodyPr>
-          <a:lstStyle/>
-          <a:p>
-            <a:pPr algn="l">
-              <a:lnSpc>
-                <a:spcPct val="125000"/>
-              </a:lnSpc>
-            </a:pPr>
-            <a:r>
-              <a:rPr sz="1100" b="1">
+            <a:off x="640080" y="457200"/>
+            <a:ext cx="10972800" cy="365760"/>
+          </a:xfrm>
+          <a:prstGeom prst="rect">
+            <a:avLst/>
+          </a:prstGeom>
+          <a:noFill/>
+        </p:spPr>
+        <p:txBody>
+          <a:bodyPr wrap="square" lIns="0" rIns="0" tIns="0" bIns="0">
+            <a:spAutoFit/>
+          </a:bodyPr>
+          <a:lstStyle/>
+          <a:p>
+            <a:pPr algn="l">
+              <a:lnSpc>
+                <a:spcPct val="125000"/>
+              </a:lnSpc>
+            </a:pPr>
+            <a:r>
+              <a:rPr sz="1200" b="1">
                 <a:solidFill>
                   <a:srgbClr val="4F46E5"/>
                 </a:solidFill>
@@ -22167,27 +22167,27 @@
         </p:nvSpPr>
         <p:spPr>
           <a:xfrm>
-            <a:off x="640080" y="868680"/>
-            <a:ext cx="10972800" cy="822960"/>
-          </a:xfrm>
-          <a:prstGeom prst="rect">
-            <a:avLst/>
-          </a:prstGeom>
-          <a:noFill/>
-        </p:spPr>
-        <p:txBody>
-          <a:bodyPr wrap="square" lIns="0" rIns="0" tIns="0" bIns="0">
-            <a:spAutoFit/>
-          </a:bodyPr>
-          <a:lstStyle/>
-          <a:p>
-            <a:pPr algn="l">
-              <a:lnSpc>
-                <a:spcPct val="125000"/>
-              </a:lnSpc>
-            </a:pPr>
-            <a:r>
-              <a:rPr sz="2800" b="1">
+            <a:off x="640080" y="822960"/>
+            <a:ext cx="10972800" cy="914400"/>
+          </a:xfrm>
+          <a:prstGeom prst="rect">
+            <a:avLst/>
+          </a:prstGeom>
+          <a:noFill/>
+        </p:spPr>
+        <p:txBody>
+          <a:bodyPr wrap="square" lIns="0" rIns="0" tIns="0" bIns="0">
+            <a:spAutoFit/>
+          </a:bodyPr>
+          <a:lstStyle/>
+          <a:p>
+            <a:pPr algn="l">
+              <a:lnSpc>
+                <a:spcPct val="125000"/>
+              </a:lnSpc>
+            </a:pPr>
+            <a:r>
+              <a:rPr sz="3200" b="1">
                 <a:solidFill>
                   <a:srgbClr val="0F141F"/>
                 </a:solidFill>
@@ -22206,7 +22206,7 @@
         </p:nvCxnSpPr>
         <p:spPr>
           <a:xfrm>
-            <a:off x="640080" y="1783080"/>
+            <a:off x="640080" y="1828800"/>
             <a:ext cx="10881360" cy="0"/>
           </a:xfrm>
           <a:prstGeom prst="line">
@@ -22261,7 +22261,7 @@
               </a:lnSpc>
             </a:pPr>
             <a:r>
-              <a:rPr sz="900" b="0">
+              <a:rPr sz="1100" b="0">
                 <a:solidFill>
                   <a:srgbClr val="8B95A7"/>
                 </a:solidFill>
@@ -22363,7 +22363,7 @@
               </a:lnSpc>
             </a:pPr>
             <a:r>
-              <a:rPr sz="1000" b="0">
+              <a:rPr sz="1200" b="0">
                 <a:solidFill>
                   <a:srgbClr val="424B5C"/>
                 </a:solidFill>
@@ -22402,7 +22402,7 @@
               </a:lnSpc>
             </a:pPr>
             <a:r>
-              <a:rPr sz="1000" b="0">
+              <a:rPr sz="1200" b="0">
                 <a:solidFill>
                   <a:srgbClr val="424B5C"/>
                 </a:solidFill>
@@ -22482,27 +22482,27 @@
         </p:nvSpPr>
         <p:spPr>
           <a:xfrm>
-            <a:off x="640080" y="502920"/>
-            <a:ext cx="10972800" cy="320040"/>
-          </a:xfrm>
-          <a:prstGeom prst="rect">
-            <a:avLst/>
-          </a:prstGeom>
-          <a:noFill/>
-        </p:spPr>
-        <p:txBody>
-          <a:bodyPr wrap="square" lIns="0" rIns="0" tIns="0" bIns="0">
-            <a:spAutoFit/>
-          </a:bodyPr>
-          <a:lstStyle/>
-          <a:p>
-            <a:pPr algn="l">
-              <a:lnSpc>
-                <a:spcPct val="125000"/>
-              </a:lnSpc>
-            </a:pPr>
-            <a:r>
-              <a:rPr sz="1100" b="1">
+            <a:off x="640080" y="457200"/>
+            <a:ext cx="10972800" cy="365760"/>
+          </a:xfrm>
+          <a:prstGeom prst="rect">
+            <a:avLst/>
+          </a:prstGeom>
+          <a:noFill/>
+        </p:spPr>
+        <p:txBody>
+          <a:bodyPr wrap="square" lIns="0" rIns="0" tIns="0" bIns="0">
+            <a:spAutoFit/>
+          </a:bodyPr>
+          <a:lstStyle/>
+          <a:p>
+            <a:pPr algn="l">
+              <a:lnSpc>
+                <a:spcPct val="125000"/>
+              </a:lnSpc>
+            </a:pPr>
+            <a:r>
+              <a:rPr sz="1200" b="1">
                 <a:solidFill>
                   <a:srgbClr val="4F46E5"/>
                 </a:solidFill>
@@ -22521,27 +22521,27 @@
         </p:nvSpPr>
         <p:spPr>
           <a:xfrm>
-            <a:off x="640080" y="868680"/>
-            <a:ext cx="10972800" cy="822960"/>
-          </a:xfrm>
-          <a:prstGeom prst="rect">
-            <a:avLst/>
-          </a:prstGeom>
-          <a:noFill/>
-        </p:spPr>
-        <p:txBody>
-          <a:bodyPr wrap="square" lIns="0" rIns="0" tIns="0" bIns="0">
-            <a:spAutoFit/>
-          </a:bodyPr>
-          <a:lstStyle/>
-          <a:p>
-            <a:pPr algn="l">
-              <a:lnSpc>
-                <a:spcPct val="125000"/>
-              </a:lnSpc>
-            </a:pPr>
-            <a:r>
-              <a:rPr sz="2800" b="1">
+            <a:off x="640080" y="822960"/>
+            <a:ext cx="10972800" cy="914400"/>
+          </a:xfrm>
+          <a:prstGeom prst="rect">
+            <a:avLst/>
+          </a:prstGeom>
+          <a:noFill/>
+        </p:spPr>
+        <p:txBody>
+          <a:bodyPr wrap="square" lIns="0" rIns="0" tIns="0" bIns="0">
+            <a:spAutoFit/>
+          </a:bodyPr>
+          <a:lstStyle/>
+          <a:p>
+            <a:pPr algn="l">
+              <a:lnSpc>
+                <a:spcPct val="125000"/>
+              </a:lnSpc>
+            </a:pPr>
+            <a:r>
+              <a:rPr sz="3200" b="1">
                 <a:solidFill>
                   <a:srgbClr val="0F141F"/>
                 </a:solidFill>
@@ -22560,7 +22560,7 @@
         </p:nvCxnSpPr>
         <p:spPr>
           <a:xfrm>
-            <a:off x="640080" y="1783080"/>
+            <a:off x="640080" y="1828800"/>
             <a:ext cx="10881360" cy="0"/>
           </a:xfrm>
           <a:prstGeom prst="line">
@@ -22615,7 +22615,7 @@
               </a:lnSpc>
             </a:pPr>
             <a:r>
-              <a:rPr sz="900" b="0">
+              <a:rPr sz="1100" b="0">
                 <a:solidFill>
                   <a:srgbClr val="8B95A7"/>
                 </a:solidFill>
@@ -22824,7 +22824,7 @@
               </a:lnSpc>
             </a:pPr>
             <a:r>
-              <a:rPr sz="1100" b="0">
+              <a:rPr sz="1200" b="0">
                 <a:solidFill>
                   <a:srgbClr val="8B95A7"/>
                 </a:solidFill>
@@ -23107,7 +23107,7 @@
               </a:lnSpc>
             </a:pPr>
             <a:r>
-              <a:rPr sz="1100" b="0">
+              <a:rPr sz="1200" b="0">
                 <a:solidFill>
                   <a:srgbClr val="8B95A7"/>
                 </a:solidFill>
@@ -23390,7 +23390,7 @@
               </a:lnSpc>
             </a:pPr>
             <a:r>
-              <a:rPr sz="1100" b="0">
+              <a:rPr sz="1200" b="0">
                 <a:solidFill>
                   <a:srgbClr val="8B95A7"/>
                 </a:solidFill>
@@ -23673,7 +23673,7 @@
               </a:lnSpc>
             </a:pPr>
             <a:r>
-              <a:rPr sz="1100" b="0">
+              <a:rPr sz="1200" b="0">
                 <a:solidFill>
                   <a:srgbClr val="8B95A7"/>
                 </a:solidFill>
@@ -23827,27 +23827,27 @@
         </p:nvSpPr>
         <p:spPr>
           <a:xfrm>
-            <a:off x="640080" y="502920"/>
-            <a:ext cx="10972800" cy="320040"/>
-          </a:xfrm>
-          <a:prstGeom prst="rect">
-            <a:avLst/>
-          </a:prstGeom>
-          <a:noFill/>
-        </p:spPr>
-        <p:txBody>
-          <a:bodyPr wrap="square" lIns="0" rIns="0" tIns="0" bIns="0">
-            <a:spAutoFit/>
-          </a:bodyPr>
-          <a:lstStyle/>
-          <a:p>
-            <a:pPr algn="l">
-              <a:lnSpc>
-                <a:spcPct val="125000"/>
-              </a:lnSpc>
-            </a:pPr>
-            <a:r>
-              <a:rPr sz="1100" b="1">
+            <a:off x="640080" y="457200"/>
+            <a:ext cx="10972800" cy="365760"/>
+          </a:xfrm>
+          <a:prstGeom prst="rect">
+            <a:avLst/>
+          </a:prstGeom>
+          <a:noFill/>
+        </p:spPr>
+        <p:txBody>
+          <a:bodyPr wrap="square" lIns="0" rIns="0" tIns="0" bIns="0">
+            <a:spAutoFit/>
+          </a:bodyPr>
+          <a:lstStyle/>
+          <a:p>
+            <a:pPr algn="l">
+              <a:lnSpc>
+                <a:spcPct val="125000"/>
+              </a:lnSpc>
+            </a:pPr>
+            <a:r>
+              <a:rPr sz="1200" b="1">
                 <a:solidFill>
                   <a:srgbClr val="4F46E5"/>
                 </a:solidFill>
@@ -23866,27 +23866,27 @@
         </p:nvSpPr>
         <p:spPr>
           <a:xfrm>
-            <a:off x="640080" y="868680"/>
-            <a:ext cx="10972800" cy="822960"/>
-          </a:xfrm>
-          <a:prstGeom prst="rect">
-            <a:avLst/>
-          </a:prstGeom>
-          <a:noFill/>
-        </p:spPr>
-        <p:txBody>
-          <a:bodyPr wrap="square" lIns="0" rIns="0" tIns="0" bIns="0">
-            <a:spAutoFit/>
-          </a:bodyPr>
-          <a:lstStyle/>
-          <a:p>
-            <a:pPr algn="l">
-              <a:lnSpc>
-                <a:spcPct val="125000"/>
-              </a:lnSpc>
-            </a:pPr>
-            <a:r>
-              <a:rPr sz="2800" b="1">
+            <a:off x="640080" y="822960"/>
+            <a:ext cx="10972800" cy="914400"/>
+          </a:xfrm>
+          <a:prstGeom prst="rect">
+            <a:avLst/>
+          </a:prstGeom>
+          <a:noFill/>
+        </p:spPr>
+        <p:txBody>
+          <a:bodyPr wrap="square" lIns="0" rIns="0" tIns="0" bIns="0">
+            <a:spAutoFit/>
+          </a:bodyPr>
+          <a:lstStyle/>
+          <a:p>
+            <a:pPr algn="l">
+              <a:lnSpc>
+                <a:spcPct val="125000"/>
+              </a:lnSpc>
+            </a:pPr>
+            <a:r>
+              <a:rPr sz="3200" b="1">
                 <a:solidFill>
                   <a:srgbClr val="0F141F"/>
                 </a:solidFill>
@@ -23905,7 +23905,7 @@
         </p:nvCxnSpPr>
         <p:spPr>
           <a:xfrm>
-            <a:off x="640080" y="1783080"/>
+            <a:off x="640080" y="1828800"/>
             <a:ext cx="10881360" cy="0"/>
           </a:xfrm>
           <a:prstGeom prst="line">
@@ -23960,7 +23960,7 @@
               </a:lnSpc>
             </a:pPr>
             <a:r>
-              <a:rPr sz="900" b="0">
+              <a:rPr sz="1100" b="0">
                 <a:solidFill>
                   <a:srgbClr val="8B95A7"/>
                 </a:solidFill>
@@ -24173,7 +24173,7 @@
               </a:lnSpc>
             </a:pPr>
             <a:r>
-              <a:rPr sz="1200" b="0">
+              <a:rPr sz="1400" b="0">
                 <a:solidFill>
                   <a:srgbClr val="424B5C"/>
                 </a:solidFill>
@@ -24425,7 +24425,7 @@
               </a:lnSpc>
             </a:pPr>
             <a:r>
-              <a:rPr sz="1200" b="0">
+              <a:rPr sz="1400" b="0">
                 <a:solidFill>
                   <a:srgbClr val="424B5C"/>
                 </a:solidFill>
@@ -24677,7 +24677,7 @@
               </a:lnSpc>
             </a:pPr>
             <a:r>
-              <a:rPr sz="1200" b="0">
+              <a:rPr sz="1400" b="0">
                 <a:solidFill>
                   <a:srgbClr val="424B5C"/>
                 </a:solidFill>
@@ -24929,7 +24929,7 @@
               </a:lnSpc>
             </a:pPr>
             <a:r>
-              <a:rPr sz="1200" b="0">
+              <a:rPr sz="1400" b="0">
                 <a:solidFill>
                   <a:srgbClr val="424B5C"/>
                 </a:solidFill>
@@ -25048,27 +25048,27 @@
         </p:nvSpPr>
         <p:spPr>
           <a:xfrm>
-            <a:off x="640080" y="502920"/>
-            <a:ext cx="10972800" cy="320040"/>
-          </a:xfrm>
-          <a:prstGeom prst="rect">
-            <a:avLst/>
-          </a:prstGeom>
-          <a:noFill/>
-        </p:spPr>
-        <p:txBody>
-          <a:bodyPr wrap="square" lIns="0" rIns="0" tIns="0" bIns="0">
-            <a:spAutoFit/>
-          </a:bodyPr>
-          <a:lstStyle/>
-          <a:p>
-            <a:pPr algn="l">
-              <a:lnSpc>
-                <a:spcPct val="125000"/>
-              </a:lnSpc>
-            </a:pPr>
-            <a:r>
-              <a:rPr sz="1100" b="1">
+            <a:off x="640080" y="457200"/>
+            <a:ext cx="10972800" cy="365760"/>
+          </a:xfrm>
+          <a:prstGeom prst="rect">
+            <a:avLst/>
+          </a:prstGeom>
+          <a:noFill/>
+        </p:spPr>
+        <p:txBody>
+          <a:bodyPr wrap="square" lIns="0" rIns="0" tIns="0" bIns="0">
+            <a:spAutoFit/>
+          </a:bodyPr>
+          <a:lstStyle/>
+          <a:p>
+            <a:pPr algn="l">
+              <a:lnSpc>
+                <a:spcPct val="125000"/>
+              </a:lnSpc>
+            </a:pPr>
+            <a:r>
+              <a:rPr sz="1200" b="1">
                 <a:solidFill>
                   <a:srgbClr val="4F46E5"/>
                 </a:solidFill>
@@ -25087,27 +25087,27 @@
         </p:nvSpPr>
         <p:spPr>
           <a:xfrm>
-            <a:off x="640080" y="868680"/>
-            <a:ext cx="10972800" cy="822960"/>
-          </a:xfrm>
-          <a:prstGeom prst="rect">
-            <a:avLst/>
-          </a:prstGeom>
-          <a:noFill/>
-        </p:spPr>
-        <p:txBody>
-          <a:bodyPr wrap="square" lIns="0" rIns="0" tIns="0" bIns="0">
-            <a:spAutoFit/>
-          </a:bodyPr>
-          <a:lstStyle/>
-          <a:p>
-            <a:pPr algn="l">
-              <a:lnSpc>
-                <a:spcPct val="125000"/>
-              </a:lnSpc>
-            </a:pPr>
-            <a:r>
-              <a:rPr sz="2800" b="1">
+            <a:off x="640080" y="822960"/>
+            <a:ext cx="10972800" cy="914400"/>
+          </a:xfrm>
+          <a:prstGeom prst="rect">
+            <a:avLst/>
+          </a:prstGeom>
+          <a:noFill/>
+        </p:spPr>
+        <p:txBody>
+          <a:bodyPr wrap="square" lIns="0" rIns="0" tIns="0" bIns="0">
+            <a:spAutoFit/>
+          </a:bodyPr>
+          <a:lstStyle/>
+          <a:p>
+            <a:pPr algn="l">
+              <a:lnSpc>
+                <a:spcPct val="125000"/>
+              </a:lnSpc>
+            </a:pPr>
+            <a:r>
+              <a:rPr sz="3200" b="1">
                 <a:solidFill>
                   <a:srgbClr val="0F141F"/>
                 </a:solidFill>
@@ -25126,7 +25126,7 @@
         </p:nvCxnSpPr>
         <p:spPr>
           <a:xfrm>
-            <a:off x="640080" y="1783080"/>
+            <a:off x="640080" y="1828800"/>
             <a:ext cx="10881360" cy="0"/>
           </a:xfrm>
           <a:prstGeom prst="line">
@@ -25181,7 +25181,7 @@
               </a:lnSpc>
             </a:pPr>
             <a:r>
-              <a:rPr sz="900" b="0">
+              <a:rPr sz="1100" b="0">
                 <a:solidFill>
                   <a:srgbClr val="8B95A7"/>
                 </a:solidFill>
@@ -25394,7 +25394,7 @@
               </a:lnSpc>
             </a:pPr>
             <a:r>
-              <a:rPr sz="1100" b="0">
+              <a:rPr sz="1200" b="0">
                 <a:solidFill>
                   <a:srgbClr val="8B95A7"/>
                 </a:solidFill>
@@ -25670,7 +25670,7 @@
               </a:lnSpc>
             </a:pPr>
             <a:r>
-              <a:rPr sz="1100" b="0">
+              <a:rPr sz="1200" b="0">
                 <a:solidFill>
                   <a:srgbClr val="8B95A7"/>
                 </a:solidFill>
@@ -25946,7 +25946,7 @@
               </a:lnSpc>
             </a:pPr>
             <a:r>
-              <a:rPr sz="1100" b="0">
+              <a:rPr sz="1200" b="0">
                 <a:solidFill>
                   <a:srgbClr val="8B95A7"/>
                 </a:solidFill>
@@ -26222,7 +26222,7 @@
               </a:lnSpc>
             </a:pPr>
             <a:r>
-              <a:rPr sz="1100" b="0">
+              <a:rPr sz="1200" b="0">
                 <a:solidFill>
                   <a:srgbClr val="8B95A7"/>
                 </a:solidFill>
@@ -26404,27 +26404,27 @@
         </p:nvSpPr>
         <p:spPr>
           <a:xfrm>
-            <a:off x="640080" y="502920"/>
-            <a:ext cx="10972800" cy="320040"/>
-          </a:xfrm>
-          <a:prstGeom prst="rect">
-            <a:avLst/>
-          </a:prstGeom>
-          <a:noFill/>
-        </p:spPr>
-        <p:txBody>
-          <a:bodyPr wrap="square" lIns="0" rIns="0" tIns="0" bIns="0">
-            <a:spAutoFit/>
-          </a:bodyPr>
-          <a:lstStyle/>
-          <a:p>
-            <a:pPr algn="l">
-              <a:lnSpc>
-                <a:spcPct val="125000"/>
-              </a:lnSpc>
-            </a:pPr>
-            <a:r>
-              <a:rPr sz="1100" b="1">
+            <a:off x="640080" y="457200"/>
+            <a:ext cx="10972800" cy="365760"/>
+          </a:xfrm>
+          <a:prstGeom prst="rect">
+            <a:avLst/>
+          </a:prstGeom>
+          <a:noFill/>
+        </p:spPr>
+        <p:txBody>
+          <a:bodyPr wrap="square" lIns="0" rIns="0" tIns="0" bIns="0">
+            <a:spAutoFit/>
+          </a:bodyPr>
+          <a:lstStyle/>
+          <a:p>
+            <a:pPr algn="l">
+              <a:lnSpc>
+                <a:spcPct val="125000"/>
+              </a:lnSpc>
+            </a:pPr>
+            <a:r>
+              <a:rPr sz="1200" b="1">
                 <a:solidFill>
                   <a:srgbClr val="4F46E5"/>
                 </a:solidFill>
@@ -26443,27 +26443,27 @@
         </p:nvSpPr>
         <p:spPr>
           <a:xfrm>
-            <a:off x="640080" y="868680"/>
-            <a:ext cx="10972800" cy="822960"/>
-          </a:xfrm>
-          <a:prstGeom prst="rect">
-            <a:avLst/>
-          </a:prstGeom>
-          <a:noFill/>
-        </p:spPr>
-        <p:txBody>
-          <a:bodyPr wrap="square" lIns="0" rIns="0" tIns="0" bIns="0">
-            <a:spAutoFit/>
-          </a:bodyPr>
-          <a:lstStyle/>
-          <a:p>
-            <a:pPr algn="l">
-              <a:lnSpc>
-                <a:spcPct val="125000"/>
-              </a:lnSpc>
-            </a:pPr>
-            <a:r>
-              <a:rPr sz="2800" b="1">
+            <a:off x="640080" y="822960"/>
+            <a:ext cx="10972800" cy="914400"/>
+          </a:xfrm>
+          <a:prstGeom prst="rect">
+            <a:avLst/>
+          </a:prstGeom>
+          <a:noFill/>
+        </p:spPr>
+        <p:txBody>
+          <a:bodyPr wrap="square" lIns="0" rIns="0" tIns="0" bIns="0">
+            <a:spAutoFit/>
+          </a:bodyPr>
+          <a:lstStyle/>
+          <a:p>
+            <a:pPr algn="l">
+              <a:lnSpc>
+                <a:spcPct val="125000"/>
+              </a:lnSpc>
+            </a:pPr>
+            <a:r>
+              <a:rPr sz="3200" b="1">
                 <a:solidFill>
                   <a:srgbClr val="0F141F"/>
                 </a:solidFill>
@@ -26482,7 +26482,7 @@
         </p:nvCxnSpPr>
         <p:spPr>
           <a:xfrm>
-            <a:off x="640080" y="1783080"/>
+            <a:off x="640080" y="1828800"/>
             <a:ext cx="10881360" cy="0"/>
           </a:xfrm>
           <a:prstGeom prst="line">
@@ -26537,7 +26537,7 @@
               </a:lnSpc>
             </a:pPr>
             <a:r>
-              <a:rPr sz="900" b="0">
+              <a:rPr sz="1100" b="0">
                 <a:solidFill>
                   <a:srgbClr val="8B95A7"/>
                 </a:solidFill>
@@ -26984,7 +26984,7 @@
               </a:lnSpc>
             </a:pPr>
             <a:r>
-              <a:rPr sz="1100" b="0">
+              <a:rPr sz="1300" b="0">
                 <a:solidFill>
                   <a:srgbClr val="424B5C"/>
                 </a:solidFill>
@@ -27000,7 +27000,7 @@
               </a:lnSpc>
             </a:pPr>
             <a:r>
-              <a:rPr sz="1100" b="0">
+              <a:rPr sz="1300" b="0">
                 <a:solidFill>
                   <a:srgbClr val="424B5C"/>
                 </a:solidFill>
@@ -27252,7 +27252,7 @@
               </a:lnSpc>
             </a:pPr>
             <a:r>
-              <a:rPr sz="1100" b="0">
+              <a:rPr sz="1300" b="0">
                 <a:solidFill>
                   <a:srgbClr val="424B5C"/>
                 </a:solidFill>
@@ -27268,7 +27268,7 @@
               </a:lnSpc>
             </a:pPr>
             <a:r>
-              <a:rPr sz="1100" b="0">
+              <a:rPr sz="1300" b="0">
                 <a:solidFill>
                   <a:srgbClr val="424B5C"/>
                 </a:solidFill>
@@ -27520,7 +27520,7 @@
               </a:lnSpc>
             </a:pPr>
             <a:r>
-              <a:rPr sz="1100" b="0">
+              <a:rPr sz="1300" b="0">
                 <a:solidFill>
                   <a:srgbClr val="424B5C"/>
                 </a:solidFill>
@@ -27536,7 +27536,7 @@
               </a:lnSpc>
             </a:pPr>
             <a:r>
-              <a:rPr sz="1100" b="0">
+              <a:rPr sz="1300" b="0">
                 <a:solidFill>
                   <a:srgbClr val="424B5C"/>
                 </a:solidFill>
@@ -27616,27 +27616,27 @@
         </p:nvSpPr>
         <p:spPr>
           <a:xfrm>
-            <a:off x="640080" y="502920"/>
-            <a:ext cx="10972800" cy="320040"/>
-          </a:xfrm>
-          <a:prstGeom prst="rect">
-            <a:avLst/>
-          </a:prstGeom>
-          <a:noFill/>
-        </p:spPr>
-        <p:txBody>
-          <a:bodyPr wrap="square" lIns="0" rIns="0" tIns="0" bIns="0">
-            <a:spAutoFit/>
-          </a:bodyPr>
-          <a:lstStyle/>
-          <a:p>
-            <a:pPr algn="l">
-              <a:lnSpc>
-                <a:spcPct val="125000"/>
-              </a:lnSpc>
-            </a:pPr>
-            <a:r>
-              <a:rPr sz="1100" b="1">
+            <a:off x="640080" y="457200"/>
+            <a:ext cx="10972800" cy="365760"/>
+          </a:xfrm>
+          <a:prstGeom prst="rect">
+            <a:avLst/>
+          </a:prstGeom>
+          <a:noFill/>
+        </p:spPr>
+        <p:txBody>
+          <a:bodyPr wrap="square" lIns="0" rIns="0" tIns="0" bIns="0">
+            <a:spAutoFit/>
+          </a:bodyPr>
+          <a:lstStyle/>
+          <a:p>
+            <a:pPr algn="l">
+              <a:lnSpc>
+                <a:spcPct val="125000"/>
+              </a:lnSpc>
+            </a:pPr>
+            <a:r>
+              <a:rPr sz="1200" b="1">
                 <a:solidFill>
                   <a:srgbClr val="4F46E5"/>
                 </a:solidFill>
@@ -27655,27 +27655,27 @@
         </p:nvSpPr>
         <p:spPr>
           <a:xfrm>
-            <a:off x="640080" y="868680"/>
-            <a:ext cx="10972800" cy="822960"/>
-          </a:xfrm>
-          <a:prstGeom prst="rect">
-            <a:avLst/>
-          </a:prstGeom>
-          <a:noFill/>
-        </p:spPr>
-        <p:txBody>
-          <a:bodyPr wrap="square" lIns="0" rIns="0" tIns="0" bIns="0">
-            <a:spAutoFit/>
-          </a:bodyPr>
-          <a:lstStyle/>
-          <a:p>
-            <a:pPr algn="l">
-              <a:lnSpc>
-                <a:spcPct val="125000"/>
-              </a:lnSpc>
-            </a:pPr>
-            <a:r>
-              <a:rPr sz="2800" b="1">
+            <a:off x="640080" y="822960"/>
+            <a:ext cx="10972800" cy="914400"/>
+          </a:xfrm>
+          <a:prstGeom prst="rect">
+            <a:avLst/>
+          </a:prstGeom>
+          <a:noFill/>
+        </p:spPr>
+        <p:txBody>
+          <a:bodyPr wrap="square" lIns="0" rIns="0" tIns="0" bIns="0">
+            <a:spAutoFit/>
+          </a:bodyPr>
+          <a:lstStyle/>
+          <a:p>
+            <a:pPr algn="l">
+              <a:lnSpc>
+                <a:spcPct val="125000"/>
+              </a:lnSpc>
+            </a:pPr>
+            <a:r>
+              <a:rPr sz="3200" b="1">
                 <a:solidFill>
                   <a:srgbClr val="0F141F"/>
                 </a:solidFill>
@@ -27694,7 +27694,7 @@
         </p:nvCxnSpPr>
         <p:spPr>
           <a:xfrm>
-            <a:off x="640080" y="1783080"/>
+            <a:off x="640080" y="1828800"/>
             <a:ext cx="10881360" cy="0"/>
           </a:xfrm>
           <a:prstGeom prst="line">
@@ -27749,7 +27749,7 @@
               </a:lnSpc>
             </a:pPr>
             <a:r>
-              <a:rPr sz="900" b="0">
+              <a:rPr sz="1100" b="0">
                 <a:solidFill>
                   <a:srgbClr val="8B95A7"/>
                 </a:solidFill>
@@ -27917,7 +27917,7 @@
               </a:lnSpc>
             </a:pPr>
             <a:r>
-              <a:rPr sz="1000" b="1">
+              <a:rPr sz="1100" b="1">
                 <a:solidFill>
                   <a:srgbClr val="8B95A7"/>
                 </a:solidFill>
@@ -28058,7 +28058,7 @@
               </a:lnSpc>
             </a:pPr>
             <a:r>
-              <a:rPr sz="1100" b="0">
+              <a:rPr sz="1300" b="0">
                 <a:solidFill>
                   <a:srgbClr val="424B5C"/>
                 </a:solidFill>
@@ -28136,7 +28136,7 @@
               </a:lnSpc>
             </a:pPr>
             <a:r>
-              <a:rPr sz="1100" b="0">
+              <a:rPr sz="1300" b="0">
                 <a:solidFill>
                   <a:srgbClr val="424B5C"/>
                 </a:solidFill>
@@ -28214,7 +28214,7 @@
               </a:lnSpc>
             </a:pPr>
             <a:r>
-              <a:rPr sz="1100" b="0">
+              <a:rPr sz="1300" b="0">
                 <a:solidFill>
                   <a:srgbClr val="424B5C"/>
                 </a:solidFill>
@@ -28292,7 +28292,7 @@
               </a:lnSpc>
             </a:pPr>
             <a:r>
-              <a:rPr sz="1100" b="0">
+              <a:rPr sz="1300" b="0">
                 <a:solidFill>
                   <a:srgbClr val="424B5C"/>
                 </a:solidFill>
@@ -28308,7 +28308,7 @@
               </a:lnSpc>
             </a:pPr>
             <a:r>
-              <a:rPr sz="1100" b="0">
+              <a:rPr sz="1300" b="0">
                 <a:solidFill>
                   <a:srgbClr val="424B5C"/>
                 </a:solidFill>
@@ -28439,7 +28439,7 @@
               </a:lnSpc>
             </a:pPr>
             <a:r>
-              <a:rPr sz="1300" b="1">
+              <a:rPr sz="1500" b="1">
                 <a:solidFill>
                   <a:srgbClr val="10B981"/>
                 </a:solidFill>
@@ -28781,27 +28781,27 @@
         </p:nvSpPr>
         <p:spPr>
           <a:xfrm>
-            <a:off x="640080" y="502920"/>
-            <a:ext cx="10972800" cy="320040"/>
-          </a:xfrm>
-          <a:prstGeom prst="rect">
-            <a:avLst/>
-          </a:prstGeom>
-          <a:noFill/>
-        </p:spPr>
-        <p:txBody>
-          <a:bodyPr wrap="square" lIns="0" rIns="0" tIns="0" bIns="0">
-            <a:spAutoFit/>
-          </a:bodyPr>
-          <a:lstStyle/>
-          <a:p>
-            <a:pPr algn="l">
-              <a:lnSpc>
-                <a:spcPct val="125000"/>
-              </a:lnSpc>
-            </a:pPr>
-            <a:r>
-              <a:rPr sz="1100" b="1">
+            <a:off x="640080" y="457200"/>
+            <a:ext cx="10972800" cy="365760"/>
+          </a:xfrm>
+          <a:prstGeom prst="rect">
+            <a:avLst/>
+          </a:prstGeom>
+          <a:noFill/>
+        </p:spPr>
+        <p:txBody>
+          <a:bodyPr wrap="square" lIns="0" rIns="0" tIns="0" bIns="0">
+            <a:spAutoFit/>
+          </a:bodyPr>
+          <a:lstStyle/>
+          <a:p>
+            <a:pPr algn="l">
+              <a:lnSpc>
+                <a:spcPct val="125000"/>
+              </a:lnSpc>
+            </a:pPr>
+            <a:r>
+              <a:rPr sz="1200" b="1">
                 <a:solidFill>
                   <a:srgbClr val="4F46E5"/>
                 </a:solidFill>
@@ -28820,27 +28820,27 @@
         </p:nvSpPr>
         <p:spPr>
           <a:xfrm>
-            <a:off x="640080" y="868680"/>
-            <a:ext cx="10972800" cy="822960"/>
-          </a:xfrm>
-          <a:prstGeom prst="rect">
-            <a:avLst/>
-          </a:prstGeom>
-          <a:noFill/>
-        </p:spPr>
-        <p:txBody>
-          <a:bodyPr wrap="square" lIns="0" rIns="0" tIns="0" bIns="0">
-            <a:spAutoFit/>
-          </a:bodyPr>
-          <a:lstStyle/>
-          <a:p>
-            <a:pPr algn="l">
-              <a:lnSpc>
-                <a:spcPct val="125000"/>
-              </a:lnSpc>
-            </a:pPr>
-            <a:r>
-              <a:rPr sz="2800" b="1">
+            <a:off x="640080" y="822960"/>
+            <a:ext cx="10972800" cy="914400"/>
+          </a:xfrm>
+          <a:prstGeom prst="rect">
+            <a:avLst/>
+          </a:prstGeom>
+          <a:noFill/>
+        </p:spPr>
+        <p:txBody>
+          <a:bodyPr wrap="square" lIns="0" rIns="0" tIns="0" bIns="0">
+            <a:spAutoFit/>
+          </a:bodyPr>
+          <a:lstStyle/>
+          <a:p>
+            <a:pPr algn="l">
+              <a:lnSpc>
+                <a:spcPct val="125000"/>
+              </a:lnSpc>
+            </a:pPr>
+            <a:r>
+              <a:rPr sz="3200" b="1">
                 <a:solidFill>
                   <a:srgbClr val="0F141F"/>
                 </a:solidFill>
@@ -28859,7 +28859,7 @@
         </p:nvCxnSpPr>
         <p:spPr>
           <a:xfrm>
-            <a:off x="640080" y="1783080"/>
+            <a:off x="640080" y="1828800"/>
             <a:ext cx="10881360" cy="0"/>
           </a:xfrm>
           <a:prstGeom prst="line">
@@ -28914,7 +28914,7 @@
               </a:lnSpc>
             </a:pPr>
             <a:r>
-              <a:rPr sz="900" b="0">
+              <a:rPr sz="1100" b="0">
                 <a:solidFill>
                   <a:srgbClr val="8B95A7"/>
                 </a:solidFill>
@@ -29361,7 +29361,7 @@
               </a:lnSpc>
             </a:pPr>
             <a:r>
-              <a:rPr sz="1100" b="0">
+              <a:rPr sz="1300" b="0">
                 <a:solidFill>
                   <a:srgbClr val="424B5C"/>
                 </a:solidFill>
@@ -29377,7 +29377,7 @@
               </a:lnSpc>
             </a:pPr>
             <a:r>
-              <a:rPr sz="1100" b="0">
+              <a:rPr sz="1300" b="0">
                 <a:solidFill>
                   <a:srgbClr val="424B5C"/>
                 </a:solidFill>
@@ -29629,7 +29629,7 @@
               </a:lnSpc>
             </a:pPr>
             <a:r>
-              <a:rPr sz="1100" b="0">
+              <a:rPr sz="1300" b="0">
                 <a:solidFill>
                   <a:srgbClr val="424B5C"/>
                 </a:solidFill>
@@ -29645,7 +29645,7 @@
               </a:lnSpc>
             </a:pPr>
             <a:r>
-              <a:rPr sz="1100" b="0">
+              <a:rPr sz="1300" b="0">
                 <a:solidFill>
                   <a:srgbClr val="424B5C"/>
                 </a:solidFill>
@@ -29897,7 +29897,7 @@
               </a:lnSpc>
             </a:pPr>
             <a:r>
-              <a:rPr sz="1100" b="0">
+              <a:rPr sz="1300" b="0">
                 <a:solidFill>
                   <a:srgbClr val="424B5C"/>
                 </a:solidFill>
@@ -29913,7 +29913,7 @@
               </a:lnSpc>
             </a:pPr>
             <a:r>
-              <a:rPr sz="1100" b="0">
+              <a:rPr sz="1300" b="0">
                 <a:solidFill>
                   <a:srgbClr val="424B5C"/>
                 </a:solidFill>
@@ -29993,27 +29993,27 @@
         </p:nvSpPr>
         <p:spPr>
           <a:xfrm>
-            <a:off x="640080" y="502920"/>
-            <a:ext cx="10972800" cy="320040"/>
-          </a:xfrm>
-          <a:prstGeom prst="rect">
-            <a:avLst/>
-          </a:prstGeom>
-          <a:noFill/>
-        </p:spPr>
-        <p:txBody>
-          <a:bodyPr wrap="square" lIns="0" rIns="0" tIns="0" bIns="0">
-            <a:spAutoFit/>
-          </a:bodyPr>
-          <a:lstStyle/>
-          <a:p>
-            <a:pPr algn="l">
-              <a:lnSpc>
-                <a:spcPct val="125000"/>
-              </a:lnSpc>
-            </a:pPr>
-            <a:r>
-              <a:rPr sz="1100" b="1">
+            <a:off x="640080" y="457200"/>
+            <a:ext cx="10972800" cy="365760"/>
+          </a:xfrm>
+          <a:prstGeom prst="rect">
+            <a:avLst/>
+          </a:prstGeom>
+          <a:noFill/>
+        </p:spPr>
+        <p:txBody>
+          <a:bodyPr wrap="square" lIns="0" rIns="0" tIns="0" bIns="0">
+            <a:spAutoFit/>
+          </a:bodyPr>
+          <a:lstStyle/>
+          <a:p>
+            <a:pPr algn="l">
+              <a:lnSpc>
+                <a:spcPct val="125000"/>
+              </a:lnSpc>
+            </a:pPr>
+            <a:r>
+              <a:rPr sz="1200" b="1">
                 <a:solidFill>
                   <a:srgbClr val="4F46E5"/>
                 </a:solidFill>
@@ -30032,27 +30032,27 @@
         </p:nvSpPr>
         <p:spPr>
           <a:xfrm>
-            <a:off x="640080" y="868680"/>
-            <a:ext cx="10972800" cy="822960"/>
-          </a:xfrm>
-          <a:prstGeom prst="rect">
-            <a:avLst/>
-          </a:prstGeom>
-          <a:noFill/>
-        </p:spPr>
-        <p:txBody>
-          <a:bodyPr wrap="square" lIns="0" rIns="0" tIns="0" bIns="0">
-            <a:spAutoFit/>
-          </a:bodyPr>
-          <a:lstStyle/>
-          <a:p>
-            <a:pPr algn="l">
-              <a:lnSpc>
-                <a:spcPct val="125000"/>
-              </a:lnSpc>
-            </a:pPr>
-            <a:r>
-              <a:rPr sz="2800" b="1">
+            <a:off x="640080" y="822960"/>
+            <a:ext cx="10972800" cy="914400"/>
+          </a:xfrm>
+          <a:prstGeom prst="rect">
+            <a:avLst/>
+          </a:prstGeom>
+          <a:noFill/>
+        </p:spPr>
+        <p:txBody>
+          <a:bodyPr wrap="square" lIns="0" rIns="0" tIns="0" bIns="0">
+            <a:spAutoFit/>
+          </a:bodyPr>
+          <a:lstStyle/>
+          <a:p>
+            <a:pPr algn="l">
+              <a:lnSpc>
+                <a:spcPct val="125000"/>
+              </a:lnSpc>
+            </a:pPr>
+            <a:r>
+              <a:rPr sz="3200" b="1">
                 <a:solidFill>
                   <a:srgbClr val="0F141F"/>
                 </a:solidFill>
@@ -30071,7 +30071,7 @@
         </p:nvCxnSpPr>
         <p:spPr>
           <a:xfrm>
-            <a:off x="640080" y="1783080"/>
+            <a:off x="640080" y="1828800"/>
             <a:ext cx="10881360" cy="0"/>
           </a:xfrm>
           <a:prstGeom prst="line">
@@ -30126,7 +30126,7 @@
               </a:lnSpc>
             </a:pPr>
             <a:r>
-              <a:rPr sz="900" b="0">
+              <a:rPr sz="1100" b="0">
                 <a:solidFill>
                   <a:srgbClr val="8B95A7"/>
                 </a:solidFill>
@@ -30294,7 +30294,7 @@
               </a:lnSpc>
             </a:pPr>
             <a:r>
-              <a:rPr sz="1000" b="1">
+              <a:rPr sz="1100" b="1">
                 <a:solidFill>
                   <a:srgbClr val="8B95A7"/>
                 </a:solidFill>
@@ -30435,7 +30435,7 @@
               </a:lnSpc>
             </a:pPr>
             <a:r>
-              <a:rPr sz="1100" b="0">
+              <a:rPr sz="1300" b="0">
                 <a:solidFill>
                   <a:srgbClr val="424B5C"/>
                 </a:solidFill>
@@ -30513,7 +30513,7 @@
               </a:lnSpc>
             </a:pPr>
             <a:r>
-              <a:rPr sz="1100" b="0">
+              <a:rPr sz="1300" b="0">
                 <a:solidFill>
                   <a:srgbClr val="424B5C"/>
                 </a:solidFill>
@@ -30591,7 +30591,7 @@
               </a:lnSpc>
             </a:pPr>
             <a:r>
-              <a:rPr sz="1100" b="0">
+              <a:rPr sz="1300" b="0">
                 <a:solidFill>
                   <a:srgbClr val="424B5C"/>
                 </a:solidFill>
@@ -30669,7 +30669,7 @@
               </a:lnSpc>
             </a:pPr>
             <a:r>
-              <a:rPr sz="1100" b="0">
+              <a:rPr sz="1300" b="0">
                 <a:solidFill>
                   <a:srgbClr val="424B5C"/>
                 </a:solidFill>
@@ -30708,7 +30708,7 @@
               </a:lnSpc>
             </a:pPr>
             <a:r>
-              <a:rPr sz="1000" b="0">
+              <a:rPr sz="1100" b="0">
                 <a:solidFill>
                   <a:srgbClr val="8B95A7"/>
                 </a:solidFill>
@@ -30839,7 +30839,7 @@
               </a:lnSpc>
             </a:pPr>
             <a:r>
-              <a:rPr sz="1300" b="1">
+              <a:rPr sz="1500" b="1">
                 <a:solidFill>
                   <a:srgbClr val="F59E0B"/>
                 </a:solidFill>

--- a/team_project/kickoff_2026-05-11.pptx
+++ b/team_project/kickoff_2026-05-11.pptx
@@ -4958,7 +4958,7 @@
         <p:spPr>
           <a:xfrm>
             <a:off x="667512" y="2551176"/>
-            <a:ext cx="5440680" cy="1554480"/>
+            <a:ext cx="5440680" cy="1645920"/>
           </a:xfrm>
           <a:prstGeom prst="roundRect">
             <a:avLst>
@@ -5003,7 +5003,7 @@
         <p:spPr>
           <a:xfrm>
             <a:off x="640080" y="2514600"/>
-            <a:ext cx="5440680" cy="1554480"/>
+            <a:ext cx="5440680" cy="1645920"/>
           </a:xfrm>
           <a:prstGeom prst="roundRect">
             <a:avLst>
@@ -5011,12 +5011,10 @@
             </a:avLst>
           </a:prstGeom>
           <a:solidFill>
-            <a:srgbClr val="FAFBFC"/>
+            <a:srgbClr val="F7F8FB"/>
           </a:solidFill>
-          <a:ln w="9525">
-            <a:solidFill>
-              <a:srgbClr val="E5E7EB"/>
-            </a:solidFill>
+          <a:ln>
+            <a:noFill/>
           </a:ln>
         </p:spPr>
         <p:style>
@@ -5050,26 +5048,26 @@
         <p:spPr>
           <a:xfrm>
             <a:off x="868680" y="2651760"/>
-            <a:ext cx="5029200" cy="320040"/>
-          </a:xfrm>
-          <a:prstGeom prst="rect">
-            <a:avLst/>
-          </a:prstGeom>
-          <a:noFill/>
-        </p:spPr>
-        <p:txBody>
-          <a:bodyPr wrap="square" lIns="0" rIns="0" tIns="0" bIns="0">
-            <a:spAutoFit/>
-          </a:bodyPr>
-          <a:lstStyle/>
-          <a:p>
-            <a:pPr algn="l">
-              <a:lnSpc>
-                <a:spcPct val="125000"/>
-              </a:lnSpc>
-            </a:pPr>
-            <a:r>
-              <a:rPr sz="1100" b="1">
+            <a:ext cx="5029200" cy="365760"/>
+          </a:xfrm>
+          <a:prstGeom prst="rect">
+            <a:avLst/>
+          </a:prstGeom>
+          <a:noFill/>
+        </p:spPr>
+        <p:txBody>
+          <a:bodyPr wrap="square" lIns="0" rIns="0" tIns="0" bIns="0">
+            <a:spAutoFit/>
+          </a:bodyPr>
+          <a:lstStyle/>
+          <a:p>
+            <a:pPr algn="l">
+              <a:lnSpc>
+                <a:spcPct val="125000"/>
+              </a:lnSpc>
+            </a:pPr>
+            <a:r>
+              <a:rPr sz="1300" b="1">
                 <a:solidFill>
                   <a:srgbClr val="8B95A7"/>
                 </a:solidFill>
@@ -5097,7 +5095,7 @@
         <p:spPr>
           <a:xfrm>
             <a:off x="868680" y="3017520"/>
-            <a:ext cx="2612571" cy="457200"/>
+            <a:ext cx="2873829" cy="502920"/>
           </a:xfrm>
           <a:prstGeom prst="rect">
             <a:avLst/>
@@ -5112,33 +5110,33 @@
         </p:nvSpPr>
         <p:spPr>
           <a:xfrm>
-            <a:off x="868680" y="3611880"/>
-            <a:ext cx="5029200" cy="411480"/>
-          </a:xfrm>
-          <a:prstGeom prst="rect">
-            <a:avLst/>
-          </a:prstGeom>
-          <a:noFill/>
-        </p:spPr>
-        <p:txBody>
-          <a:bodyPr wrap="square" lIns="0" rIns="0" tIns="0" bIns="0">
-            <a:spAutoFit/>
-          </a:bodyPr>
-          <a:lstStyle/>
-          <a:p>
-            <a:pPr algn="l">
-              <a:lnSpc>
-                <a:spcPct val="125000"/>
-              </a:lnSpc>
-            </a:pPr>
-            <a:r>
-              <a:rPr sz="1300" b="1">
+            <a:off x="868680" y="3657600"/>
+            <a:ext cx="5029200" cy="457200"/>
+          </a:xfrm>
+          <a:prstGeom prst="rect">
+            <a:avLst/>
+          </a:prstGeom>
+          <a:noFill/>
+        </p:spPr>
+        <p:txBody>
+          <a:bodyPr wrap="square" lIns="0" rIns="0" tIns="0" bIns="0">
+            <a:spAutoFit/>
+          </a:bodyPr>
+          <a:lstStyle/>
+          <a:p>
+            <a:pPr algn="l">
+              <a:lnSpc>
+                <a:spcPct val="125000"/>
+              </a:lnSpc>
+            </a:pPr>
+            <a:r>
+              <a:rPr sz="1500" b="1">
                 <a:solidFill>
                   <a:srgbClr val="0F141F"/>
                 </a:solidFill>
                 <a:latin typeface="맑은 고딕"/>
               </a:rPr>
-              <a:t>Simon (1956): 한계 초과 → Satisficing (만족화)</a:t>
+              <a:t>한계 초과 시 만족화(Satisficing)로 후퇴</a:t>
             </a:r>
           </a:p>
         </p:txBody>
@@ -5151,7 +5149,7 @@
         </p:nvSpPr>
         <p:spPr>
           <a:xfrm>
-            <a:off x="640080" y="4206240"/>
+            <a:off x="640080" y="4434840"/>
             <a:ext cx="5212080" cy="365760"/>
           </a:xfrm>
           <a:prstGeom prst="rect">
@@ -5171,13 +5169,13 @@
               </a:lnSpc>
             </a:pPr>
             <a:r>
-              <a:rPr sz="1100" b="1">
+              <a:rPr sz="1400" b="1">
                 <a:solidFill>
                   <a:srgbClr val="0F141F"/>
                 </a:solidFill>
                 <a:latin typeface="맑은 고딕"/>
               </a:rPr>
-              <a:t>Satisficing이란?</a:t>
+              <a:t>만족화란</a:t>
             </a:r>
           </a:p>
         </p:txBody>
@@ -5190,49 +5188,49 @@
         </p:nvSpPr>
         <p:spPr>
           <a:xfrm>
-            <a:off x="868680" y="4572000"/>
-            <a:ext cx="5029200" cy="914400"/>
-          </a:xfrm>
-          <a:prstGeom prst="rect">
-            <a:avLst/>
-          </a:prstGeom>
-          <a:noFill/>
-        </p:spPr>
-        <p:txBody>
-          <a:bodyPr wrap="square" lIns="0" rIns="0" tIns="0" bIns="0">
-            <a:spAutoFit/>
-          </a:bodyPr>
-          <a:lstStyle/>
-          <a:p>
-            <a:pPr algn="l">
-              <a:lnSpc>
-                <a:spcPct val="130000"/>
-              </a:lnSpc>
-            </a:pPr>
-            <a:r>
-              <a:rPr sz="1300" b="0">
+            <a:off x="868680" y="4800600"/>
+            <a:ext cx="5029200" cy="1097280"/>
+          </a:xfrm>
+          <a:prstGeom prst="rect">
+            <a:avLst/>
+          </a:prstGeom>
+          <a:noFill/>
+        </p:spPr>
+        <p:txBody>
+          <a:bodyPr wrap="square" lIns="0" rIns="0" tIns="0" bIns="0">
+            <a:spAutoFit/>
+          </a:bodyPr>
+          <a:lstStyle/>
+          <a:p>
+            <a:pPr algn="l">
+              <a:lnSpc>
+                <a:spcPct val="140000"/>
+              </a:lnSpc>
+            </a:pPr>
+            <a:r>
+              <a:rPr sz="1500" b="0">
                 <a:solidFill>
                   <a:srgbClr val="424B5C"/>
                 </a:solidFill>
                 <a:latin typeface="맑은 고딕"/>
               </a:rPr>
-              <a:t>최적(optimal) 선택을 포기하고</a:t>
-            </a:r>
-          </a:p>
-          <a:p>
-            <a:pPr algn="l">
-              <a:lnSpc>
-                <a:spcPct val="130000"/>
-              </a:lnSpc>
-            </a:pPr>
-            <a:r>
-              <a:rPr sz="1300" b="0">
+              <a:t>최적 선택을 포기하고</a:t>
+            </a:r>
+          </a:p>
+          <a:p>
+            <a:pPr algn="l">
+              <a:lnSpc>
+                <a:spcPct val="140000"/>
+              </a:lnSpc>
+            </a:pPr>
+            <a:r>
+              <a:rPr sz="1500" b="0">
                 <a:solidFill>
                   <a:srgbClr val="424B5C"/>
                 </a:solidFill>
                 <a:latin typeface="맑은 고딕"/>
               </a:rPr>
-              <a:t>"그럭저럭 괜찮은(good enough)" 첫 번째 옵션에서 멈춤</a:t>
+              <a:t>첫 번째로 "괜찮은" 옵션에서 멈춘다.</a:t>
             </a:r>
           </a:p>
         </p:txBody>
@@ -5245,27 +5243,27 @@
         </p:nvSpPr>
         <p:spPr>
           <a:xfrm>
-            <a:off x="640080" y="5852160"/>
-            <a:ext cx="5212080" cy="320040"/>
-          </a:xfrm>
-          <a:prstGeom prst="rect">
-            <a:avLst/>
-          </a:prstGeom>
-          <a:noFill/>
-        </p:spPr>
-        <p:txBody>
-          <a:bodyPr wrap="square" lIns="0" rIns="0" tIns="0" bIns="0">
-            <a:spAutoFit/>
-          </a:bodyPr>
-          <a:lstStyle/>
-          <a:p>
-            <a:pPr algn="l">
-              <a:lnSpc>
-                <a:spcPct val="125000"/>
-              </a:lnSpc>
-            </a:pPr>
-            <a:r>
-              <a:rPr sz="1100" b="1">
+            <a:off x="640080" y="5943600"/>
+            <a:ext cx="5212080" cy="365760"/>
+          </a:xfrm>
+          <a:prstGeom prst="rect">
+            <a:avLst/>
+          </a:prstGeom>
+          <a:noFill/>
+        </p:spPr>
+        <p:txBody>
+          <a:bodyPr wrap="square" lIns="0" rIns="0" tIns="0" bIns="0">
+            <a:spAutoFit/>
+          </a:bodyPr>
+          <a:lstStyle/>
+          <a:p>
+            <a:pPr algn="l">
+              <a:lnSpc>
+                <a:spcPct val="125000"/>
+              </a:lnSpc>
+            </a:pPr>
+            <a:r>
+              <a:rPr sz="1400" b="1">
                 <a:solidFill>
                   <a:srgbClr val="0F141F"/>
                 </a:solidFill>
@@ -5284,33 +5282,33 @@
         </p:nvSpPr>
         <p:spPr>
           <a:xfrm>
-            <a:off x="868680" y="6172200"/>
-            <a:ext cx="5029200" cy="365760"/>
-          </a:xfrm>
-          <a:prstGeom prst="rect">
-            <a:avLst/>
-          </a:prstGeom>
-          <a:noFill/>
-        </p:spPr>
-        <p:txBody>
-          <a:bodyPr wrap="square" lIns="0" rIns="0" tIns="0" bIns="0">
-            <a:spAutoFit/>
-          </a:bodyPr>
-          <a:lstStyle/>
-          <a:p>
-            <a:pPr algn="l">
-              <a:lnSpc>
-                <a:spcPct val="125000"/>
-              </a:lnSpc>
-            </a:pPr>
-            <a:r>
-              <a:rPr sz="1200" b="0">
+            <a:off x="868680" y="6309360"/>
+            <a:ext cx="5029200" cy="457200"/>
+          </a:xfrm>
+          <a:prstGeom prst="rect">
+            <a:avLst/>
+          </a:prstGeom>
+          <a:noFill/>
+        </p:spPr>
+        <p:txBody>
+          <a:bodyPr wrap="square" lIns="0" rIns="0" tIns="0" bIns="0">
+            <a:spAutoFit/>
+          </a:bodyPr>
+          <a:lstStyle/>
+          <a:p>
+            <a:pPr algn="l">
+              <a:lnSpc>
+                <a:spcPct val="125000"/>
+              </a:lnSpc>
+            </a:pPr>
+            <a:r>
+              <a:rPr sz="1400" b="0">
                 <a:solidFill>
                   <a:srgbClr val="8B95A7"/>
                 </a:solidFill>
                 <a:latin typeface="맑은 고딕"/>
               </a:rPr>
-              <a:t>메뉴 3개: 다 비교 가능 / 메뉴 30개: "그냥 라떼"</a:t>
+              <a:t>메뉴 3개면 다 비교. 메뉴 30개면 그냥 라떼.</a:t>
             </a:r>
           </a:p>
         </p:txBody>
@@ -5474,7 +5472,7 @@
               </a:lnSpc>
             </a:pPr>
             <a:r>
-              <a:rPr sz="1800" b="1">
+              <a:rPr sz="2000" b="1">
                 <a:solidFill>
                   <a:srgbClr val="0F141F"/>
                 </a:solidFill>
@@ -5509,11 +5507,11 @@
           <a:p>
             <a:pPr algn="l">
               <a:lnSpc>
-                <a:spcPct val="145000"/>
-              </a:lnSpc>
-            </a:pPr>
-            <a:r>
-              <a:rPr sz="1400" b="0">
+                <a:spcPct val="150000"/>
+              </a:lnSpc>
+            </a:pPr>
+            <a:r>
+              <a:rPr sz="1500" b="0">
                 <a:solidFill>
                   <a:srgbClr val="424B5C"/>
                 </a:solidFill>
@@ -5525,11 +5523,11 @@
           <a:p>
             <a:pPr algn="l">
               <a:lnSpc>
-                <a:spcPct val="145000"/>
-              </a:lnSpc>
-            </a:pPr>
-            <a:r>
-              <a:rPr sz="1400" b="0">
+                <a:spcPct val="150000"/>
+              </a:lnSpc>
+            </a:pPr>
+            <a:r>
+              <a:rPr sz="1500" b="0">
                 <a:solidFill>
                   <a:srgbClr val="424B5C"/>
                 </a:solidFill>
@@ -5541,11 +5539,11 @@
           <a:p>
             <a:pPr algn="l">
               <a:lnSpc>
-                <a:spcPct val="145000"/>
-              </a:lnSpc>
-            </a:pPr>
-            <a:r>
-              <a:rPr sz="1400" b="0">
+                <a:spcPct val="150000"/>
+              </a:lnSpc>
+            </a:pPr>
+            <a:r>
+              <a:rPr sz="1500" b="0">
                 <a:solidFill>
                   <a:srgbClr val="424B5C"/>
                 </a:solidFill>
@@ -5564,7 +5562,7 @@
         </p:nvCxnSpPr>
         <p:spPr>
           <a:xfrm>
-            <a:off x="6492240" y="5349240"/>
+            <a:off x="6492240" y="5440680"/>
             <a:ext cx="4846320" cy="0"/>
           </a:xfrm>
           <a:prstGeom prst="line">
@@ -5599,7 +5597,7 @@
         </p:nvSpPr>
         <p:spPr>
           <a:xfrm>
-            <a:off x="6492240" y="5440680"/>
+            <a:off x="6492240" y="5532120"/>
             <a:ext cx="4572000" cy="365760"/>
           </a:xfrm>
           <a:prstGeom prst="rect">
@@ -5619,7 +5617,7 @@
               </a:lnSpc>
             </a:pPr>
             <a:r>
-              <a:rPr sz="1200" b="1">
+              <a:rPr sz="1400" b="1">
                 <a:solidFill>
                   <a:srgbClr val="4F46E5"/>
                 </a:solidFill>
@@ -5638,7 +5636,7 @@
         </p:nvSpPr>
         <p:spPr>
           <a:xfrm>
-            <a:off x="6492240" y="5852160"/>
+            <a:off x="6492240" y="5943600"/>
             <a:ext cx="4846320" cy="365760"/>
           </a:xfrm>
           <a:prstGeom prst="rect">
@@ -5658,13 +5656,13 @@
               </a:lnSpc>
             </a:pPr>
             <a:r>
-              <a:rPr sz="1400" b="0">
+              <a:rPr sz="1500" b="0">
                 <a:solidFill>
                   <a:srgbClr val="424B5C"/>
                 </a:solidFill>
                 <a:latin typeface="맑은 고딕"/>
               </a:rPr>
-              <a:t>후보 15명, 정보 X: 70% 이하</a:t>
+              <a:t>정보 없이 15명 중: 70% 이하</a:t>
             </a:r>
           </a:p>
         </p:txBody>
@@ -5672,6 +5670,45 @@
       <p:sp>
         <p:nvSpPr>
           <p:cNvPr id="25" name="TextBox 24"/>
+          <p:cNvSpPr txBox="1"/>
+          <p:nvPr/>
+        </p:nvSpPr>
+        <p:spPr>
+          <a:xfrm>
+            <a:off x="6492240" y="6355080"/>
+            <a:ext cx="4846320" cy="365760"/>
+          </a:xfrm>
+          <a:prstGeom prst="rect">
+            <a:avLst/>
+          </a:prstGeom>
+          <a:noFill/>
+        </p:spPr>
+        <p:txBody>
+          <a:bodyPr wrap="square" lIns="0" rIns="0" tIns="0" bIns="0">
+            <a:spAutoFit/>
+          </a:bodyPr>
+          <a:lstStyle/>
+          <a:p>
+            <a:pPr algn="l">
+              <a:lnSpc>
+                <a:spcPct val="125000"/>
+              </a:lnSpc>
+            </a:pPr>
+            <a:r>
+              <a:rPr sz="1800" b="1">
+                <a:solidFill>
+                  <a:srgbClr val="0F141F"/>
+                </a:solidFill>
+                <a:latin typeface="맑은 고딕"/>
+              </a:rPr>
+              <a:t>프로필 카드 제공: 92%</a:t>
+            </a:r>
+          </a:p>
+        </p:txBody>
+      </p:sp>
+      <p:sp>
+        <p:nvSpPr>
+          <p:cNvPr id="26" name="TextBox 25"/>
           <p:cNvSpPr txBox="1"/>
           <p:nvPr/>
         </p:nvSpPr>
@@ -7943,7 +7980,7 @@
               </a:lnSpc>
             </a:pPr>
             <a:r>
-              <a:rPr sz="1600" b="1">
+              <a:rPr sz="1800" b="1">
                 <a:solidFill>
                   <a:srgbClr val="0F141F"/>
                 </a:solidFill>
@@ -28701,7 +28738,7 @@
               </a:lnSpc>
             </a:pPr>
             <a:r>
-              <a:rPr sz="1600" b="1">
+              <a:rPr sz="1800" b="1">
                 <a:solidFill>
                   <a:srgbClr val="0F141F"/>
                 </a:solidFill>
@@ -31101,7 +31138,7 @@
               </a:lnSpc>
             </a:pPr>
             <a:r>
-              <a:rPr sz="1600" b="1">
+              <a:rPr sz="1800" b="1">
                 <a:solidFill>
                   <a:srgbClr val="0F141F"/>
                 </a:solidFill>

--- a/team_project/kickoff_2026-05-11.pptx
+++ b/team_project/kickoff_2026-05-11.pptx
@@ -3849,7 +3849,7 @@
                 </a:solidFill>
                 <a:latin typeface="맑은 고딕"/>
               </a:rPr>
-              <a:t>이걸 만족화 (Satisficing) 라고 한다 — Simon이 노벨상 받은 개념.</a:t>
+              <a:t>이걸 만족화(Satisficing)라고 한다.</a:t>
             </a:r>
           </a:p>
         </p:txBody>
